--- a/40_AWS/01_構成資料/カスミPOS_AWS構成資料.pptx
+++ b/40_AWS/01_構成資料/カスミPOS_AWS構成資料.pptx
@@ -17,9 +17,10 @@
     <p:sldId id="265" r:id="rId11"/>
     <p:sldId id="266" r:id="rId12"/>
     <p:sldId id="267" r:id="rId13"/>
+    <p:sldId id="268" r:id="rId14"/>
   </p:sldIdLst>
   <p:notesMasterIdLst>
-    <p:notesMasterId r:id="rId14"/>
+    <p:notesMasterId r:id="rId15"/>
   </p:notesMasterIdLst>
   <p:sldSz cx="9902952" cy="6858000"/>
   <p:notesSz cx="6858000" cy="9902952"/>
@@ -801,6 +802,94 @@
             <a:fld id="{F7021451-1387-4CA6-816F-3879F97B5CBC}" type="slidenum">
               <a:rPr lang="en-US"/>
               <a:t>12</a:t>
+            </a:fld>
+            <a:endParaRPr lang="en-US"/>
+          </a:p>
+        </p:txBody>
+      </p:sp>
+    </p:spTree>
+    <p:extLst>
+      <p:ext uri="{BB962C8B-B14F-4D97-AF65-F5344CB8AC3E}">
+        <p14:creationId xmlns:p14="http://schemas.microsoft.com/office/powerpoint/2010/main" val="1024086991"/>
+      </p:ext>
+    </p:extLst>
+  </p:cSld>
+  <p:clrMapOvr>
+    <a:masterClrMapping/>
+  </p:clrMapOvr>
+</p:notes>
+</file>
+
+<file path=ppt/notesSlides/notesSlide13.xml><?xml version="1.0" encoding="utf-8"?>
+<p:notes xmlns:a="http://schemas.openxmlformats.org/drawingml/2006/main" xmlns:r="http://schemas.openxmlformats.org/officeDocument/2006/relationships" xmlns:p="http://schemas.openxmlformats.org/presentationml/2006/main">
+  <p:cSld>
+    <p:spTree>
+      <p:nvGrpSpPr>
+        <p:cNvPr id="1" name=""/>
+        <p:cNvGrpSpPr/>
+        <p:nvPr/>
+      </p:nvGrpSpPr>
+      <p:grpSpPr>
+        <a:xfrm>
+          <a:off x="0" y="0"/>
+          <a:ext cx="0" cy="0"/>
+          <a:chOff x="0" y="0"/>
+          <a:chExt cx="0" cy="0"/>
+        </a:xfrm>
+      </p:grpSpPr>
+      <p:sp>
+        <p:nvSpPr>
+          <p:cNvPr id="2" name="Slide Image Placeholder 1"/>
+          <p:cNvSpPr>
+            <a:spLocks noGrp="1" noRot="1" noChangeAspect="1"/>
+          </p:cNvSpPr>
+          <p:nvPr>
+            <p:ph type="sldImg"/>
+          </p:nvPr>
+        </p:nvSpPr>
+        <p:spPr/>
+      </p:sp>
+      <p:sp>
+        <p:nvSpPr>
+          <p:cNvPr id="3" name="Notes Placeholder 2"/>
+          <p:cNvSpPr>
+            <a:spLocks noGrp="1"/>
+          </p:cNvSpPr>
+          <p:nvPr>
+            <p:ph type="body" idx="1"/>
+          </p:nvPr>
+        </p:nvSpPr>
+        <p:spPr/>
+        <p:txBody>
+          <a:bodyPr/>
+          <a:lstStyle/>
+          <a:p>
+            <a:r>
+              <a:rPr lang="en-US" dirty="0"/>
+              <a:t/>
+            </a:r>
+            <a:endParaRPr lang="en-US" dirty="0"/>
+          </a:p>
+        </p:txBody>
+      </p:sp>
+      <p:sp>
+        <p:nvSpPr>
+          <p:cNvPr id="4" name="Slide Number Placeholder 3"/>
+          <p:cNvSpPr>
+            <a:spLocks noGrp="1"/>
+          </p:cNvSpPr>
+          <p:nvPr>
+            <p:ph type="sldNum" sz="quarter" idx="10"/>
+          </p:nvPr>
+        </p:nvSpPr>
+        <p:spPr/>
+        <p:txBody>
+          <a:bodyPr/>
+          <a:lstStyle/>
+          <a:p>
+            <a:fld id="{F7021451-1387-4CA6-816F-3879F97B5CBC}" type="slidenum">
+              <a:rPr lang="en-US"/>
+              <a:t>13</a:t>
             </a:fld>
             <a:endParaRPr lang="en-US"/>
           </a:p>
@@ -4452,7 +4541,7 @@
                           <a:ea typeface="Calibri" pitchFamily="34" charset="-122"/>
                           <a:cs typeface="Calibri" pitchFamily="34" charset="-120"/>
                         </a:rPr>
-                        <a:t>スケジュール（UTC）</a:t>
+                        <a:t>スケジュール(UTC)</a:t>
                       </a:r>
                       <a:endParaRPr lang="en-US" sz="900" dirty="0">
                         <a:latin typeface="Calibri" charset="0"/>
@@ -5845,7 +5934,7 @@
                 <a:ea typeface="Calibri" pitchFamily="34" charset="-122"/>
                 <a:cs typeface="Calibri" pitchFamily="34" charset="-120"/>
               </a:rPr>
-              <a:t>※ PPTXに記載の06:00(ESLDATA)・07:00(レポート)のルールは確認されず</a:t>
+              <a:t>※ 06:00(ESLDATA)・07:00(レポート)のルールは確認されず</a:t>
             </a:r>
             <a:endParaRPr lang="en-US" sz="800" dirty="0"/>
           </a:p>
@@ -6675,7 +6764,7 @@
                 <a:ea typeface="Calibri" pitchFamily="34" charset="-122"/>
                 <a:cs typeface="Calibri" pitchFamily="34" charset="-120"/>
               </a:rPr>
-              <a:t>9. 外部連携</a:t>
+              <a:t>9-1. 外部連携 — USMH閉域網とLUVINA AWS環境の接続構成</a:t>
             </a:r>
             <a:endParaRPr lang="en-US" sz="2000" dirty="0"/>
           </a:p>
@@ -6714,7 +6803,7 @@
                 <a:ea typeface="Calibri" pitchFamily="34" charset="-122"/>
                 <a:cs typeface="Calibri" pitchFamily="34" charset="-120"/>
               </a:rPr>
-              <a:t>USMH網（IPSec VPN）/ Transfer Family（SFTP）/ Route53</a:t>
+              <a:t>Direct Connect(100Mbps) → Gateway VPC → VPN GW → カスミ本番VPC</a:t>
             </a:r>
             <a:endParaRPr lang="en-US" sz="1300" dirty="0"/>
           </a:p>
@@ -6778,14 +6867,1591 @@
       </p:sp>
       <p:sp>
         <p:nvSpPr>
-          <p:cNvPr id="11" name="Text 6"/>
+          <p:cNvPr id="11" name="Shape 6"/>
           <p:cNvSpPr/>
           <p:nvPr/>
         </p:nvSpPr>
         <p:spPr>
           <a:xfrm>
-            <a:off x="365760" y="1572768"/>
-            <a:ext cx="4389120" cy="256032"/>
+            <a:off x="228600" y="1828800"/>
+            <a:ext cx="1188720" cy="457200"/>
+          </a:xfrm>
+          <a:prstGeom prst="rect">
+            <a:avLst/>
+          </a:prstGeom>
+          <a:solidFill>
+            <a:srgbClr val="FFE8E8"/>
+          </a:solidFill>
+          <a:ln w="12700">
+            <a:solidFill>
+              <a:srgbClr val="D0232A"/>
+            </a:solidFill>
+            <a:prstDash val="solid"/>
+          </a:ln>
+        </p:spPr>
+      </p:sp>
+      <p:sp>
+        <p:nvSpPr>
+          <p:cNvPr id="12" name="Text 7"/>
+          <p:cNvSpPr/>
+          <p:nvPr/>
+        </p:nvSpPr>
+        <p:spPr>
+          <a:xfrm>
+            <a:off x="228600" y="1828800"/>
+            <a:ext cx="1188720" cy="457200"/>
+          </a:xfrm>
+          <a:prstGeom prst="rect">
+            <a:avLst/>
+          </a:prstGeom>
+          <a:noFill/>
+          <a:ln/>
+        </p:spPr>
+        <p:txBody>
+          <a:bodyPr wrap="square" lIns="0" tIns="0" rIns="0" bIns="0" rtlCol="0" anchor="ctr"/>
+          <a:lstStyle/>
+          <a:p>
+            <a:pPr algn="ctr" indent="0" marL="0">
+              <a:buNone/>
+            </a:pPr>
+            <a:r>
+              <a:rPr lang="en-US" sz="800" dirty="0">
+                <a:solidFill>
+                  <a:srgbClr val="333333"/>
+                </a:solidFill>
+                <a:latin typeface="Calibri" pitchFamily="34" charset="0"/>
+                <a:ea typeface="Calibri" pitchFamily="34" charset="-122"/>
+                <a:cs typeface="Calibri" pitchFamily="34" charset="-120"/>
+              </a:rPr>
+              <a:t>カスミ</a:t>
+            </a:r>
+            <a:endParaRPr lang="en-US" sz="800" dirty="0"/>
+          </a:p>
+          <a:p>
+            <a:pPr algn="ctr" indent="0" marL="0">
+              <a:buNone/>
+            </a:pPr>
+            <a:r>
+              <a:rPr lang="en-US" sz="800" dirty="0">
+                <a:solidFill>
+                  <a:srgbClr val="333333"/>
+                </a:solidFill>
+                <a:latin typeface="Calibri" pitchFamily="34" charset="0"/>
+                <a:ea typeface="Calibri" pitchFamily="34" charset="-122"/>
+                <a:cs typeface="Calibri" pitchFamily="34" charset="-120"/>
+              </a:rPr>
+              <a:t>10Mbps</a:t>
+            </a:r>
+            <a:endParaRPr lang="en-US" sz="800" dirty="0"/>
+          </a:p>
+        </p:txBody>
+      </p:sp>
+      <p:sp>
+        <p:nvSpPr>
+          <p:cNvPr id="13" name="Shape 8"/>
+          <p:cNvSpPr/>
+          <p:nvPr/>
+        </p:nvSpPr>
+        <p:spPr>
+          <a:xfrm>
+            <a:off x="228600" y="2423160"/>
+            <a:ext cx="1188720" cy="457200"/>
+          </a:xfrm>
+          <a:prstGeom prst="rect">
+            <a:avLst/>
+          </a:prstGeom>
+          <a:solidFill>
+            <a:srgbClr val="FFF5EB"/>
+          </a:solidFill>
+          <a:ln w="12700">
+            <a:solidFill>
+              <a:srgbClr val="E8A040"/>
+            </a:solidFill>
+            <a:prstDash val="solid"/>
+          </a:ln>
+        </p:spPr>
+      </p:sp>
+      <p:sp>
+        <p:nvSpPr>
+          <p:cNvPr id="14" name="Text 9"/>
+          <p:cNvSpPr/>
+          <p:nvPr/>
+        </p:nvSpPr>
+        <p:spPr>
+          <a:xfrm>
+            <a:off x="228600" y="2423160"/>
+            <a:ext cx="1188720" cy="457200"/>
+          </a:xfrm>
+          <a:prstGeom prst="rect">
+            <a:avLst/>
+          </a:prstGeom>
+          <a:noFill/>
+          <a:ln/>
+        </p:spPr>
+        <p:txBody>
+          <a:bodyPr wrap="square" lIns="0" tIns="0" rIns="0" bIns="0" rtlCol="0" anchor="ctr"/>
+          <a:lstStyle/>
+          <a:p>
+            <a:pPr algn="ctr" indent="0" marL="0">
+              <a:buNone/>
+            </a:pPr>
+            <a:r>
+              <a:rPr lang="en-US" sz="800" dirty="0">
+                <a:solidFill>
+                  <a:srgbClr val="333333"/>
+                </a:solidFill>
+                <a:latin typeface="Calibri" pitchFamily="34" charset="0"/>
+                <a:ea typeface="Calibri" pitchFamily="34" charset="-122"/>
+                <a:cs typeface="Calibri" pitchFamily="34" charset="-120"/>
+              </a:rPr>
+              <a:t>マルエツ</a:t>
+            </a:r>
+            <a:endParaRPr lang="en-US" sz="800" dirty="0"/>
+          </a:p>
+          <a:p>
+            <a:pPr algn="ctr" indent="0" marL="0">
+              <a:buNone/>
+            </a:pPr>
+            <a:r>
+              <a:rPr lang="en-US" sz="800" dirty="0">
+                <a:solidFill>
+                  <a:srgbClr val="333333"/>
+                </a:solidFill>
+                <a:latin typeface="Calibri" pitchFamily="34" charset="0"/>
+                <a:ea typeface="Calibri" pitchFamily="34" charset="-122"/>
+                <a:cs typeface="Calibri" pitchFamily="34" charset="-120"/>
+              </a:rPr>
+              <a:t>100Mbps</a:t>
+            </a:r>
+            <a:endParaRPr lang="en-US" sz="800" dirty="0"/>
+          </a:p>
+        </p:txBody>
+      </p:sp>
+      <p:sp>
+        <p:nvSpPr>
+          <p:cNvPr id="15" name="Shape 10"/>
+          <p:cNvSpPr/>
+          <p:nvPr/>
+        </p:nvSpPr>
+        <p:spPr>
+          <a:xfrm>
+            <a:off x="228600" y="3017520"/>
+            <a:ext cx="1188720" cy="457200"/>
+          </a:xfrm>
+          <a:prstGeom prst="rect">
+            <a:avLst/>
+          </a:prstGeom>
+          <a:solidFill>
+            <a:srgbClr val="FFF5EB"/>
+          </a:solidFill>
+          <a:ln w="12700">
+            <a:solidFill>
+              <a:srgbClr val="E8A040"/>
+            </a:solidFill>
+            <a:prstDash val="solid"/>
+          </a:ln>
+        </p:spPr>
+      </p:sp>
+      <p:sp>
+        <p:nvSpPr>
+          <p:cNvPr id="16" name="Text 11"/>
+          <p:cNvSpPr/>
+          <p:nvPr/>
+        </p:nvSpPr>
+        <p:spPr>
+          <a:xfrm>
+            <a:off x="228600" y="3017520"/>
+            <a:ext cx="1188720" cy="457200"/>
+          </a:xfrm>
+          <a:prstGeom prst="rect">
+            <a:avLst/>
+          </a:prstGeom>
+          <a:noFill/>
+          <a:ln/>
+        </p:spPr>
+        <p:txBody>
+          <a:bodyPr wrap="square" lIns="0" tIns="0" rIns="0" bIns="0" rtlCol="0" anchor="ctr"/>
+          <a:lstStyle/>
+          <a:p>
+            <a:pPr algn="ctr" indent="0" marL="0">
+              <a:buNone/>
+            </a:pPr>
+            <a:r>
+              <a:rPr lang="en-US" sz="800" dirty="0">
+                <a:solidFill>
+                  <a:srgbClr val="333333"/>
+                </a:solidFill>
+                <a:latin typeface="Calibri" pitchFamily="34" charset="0"/>
+                <a:ea typeface="Calibri" pitchFamily="34" charset="-122"/>
+                <a:cs typeface="Calibri" pitchFamily="34" charset="-120"/>
+              </a:rPr>
+              <a:t>いなげや</a:t>
+            </a:r>
+            <a:endParaRPr lang="en-US" sz="800" dirty="0"/>
+          </a:p>
+          <a:p>
+            <a:pPr algn="ctr" indent="0" marL="0">
+              <a:buNone/>
+            </a:pPr>
+            <a:r>
+              <a:rPr lang="en-US" sz="800" dirty="0">
+                <a:solidFill>
+                  <a:srgbClr val="333333"/>
+                </a:solidFill>
+                <a:latin typeface="Calibri" pitchFamily="34" charset="0"/>
+                <a:ea typeface="Calibri" pitchFamily="34" charset="-122"/>
+                <a:cs typeface="Calibri" pitchFamily="34" charset="-120"/>
+              </a:rPr>
+              <a:t>50Mbps</a:t>
+            </a:r>
+            <a:endParaRPr lang="en-US" sz="800" dirty="0"/>
+          </a:p>
+        </p:txBody>
+      </p:sp>
+      <p:sp>
+        <p:nvSpPr>
+          <p:cNvPr id="17" name="Shape 12"/>
+          <p:cNvSpPr/>
+          <p:nvPr/>
+        </p:nvSpPr>
+        <p:spPr>
+          <a:xfrm>
+            <a:off x="228600" y="3611880"/>
+            <a:ext cx="1188720" cy="457200"/>
+          </a:xfrm>
+          <a:prstGeom prst="rect">
+            <a:avLst/>
+          </a:prstGeom>
+          <a:solidFill>
+            <a:srgbClr val="FFF5EB"/>
+          </a:solidFill>
+          <a:ln w="12700">
+            <a:solidFill>
+              <a:srgbClr val="E8A040"/>
+            </a:solidFill>
+            <a:prstDash val="solid"/>
+          </a:ln>
+        </p:spPr>
+      </p:sp>
+      <p:sp>
+        <p:nvSpPr>
+          <p:cNvPr id="18" name="Text 13"/>
+          <p:cNvSpPr/>
+          <p:nvPr/>
+        </p:nvSpPr>
+        <p:spPr>
+          <a:xfrm>
+            <a:off x="228600" y="3611880"/>
+            <a:ext cx="1188720" cy="457200"/>
+          </a:xfrm>
+          <a:prstGeom prst="rect">
+            <a:avLst/>
+          </a:prstGeom>
+          <a:noFill/>
+          <a:ln/>
+        </p:spPr>
+        <p:txBody>
+          <a:bodyPr wrap="square" lIns="0" tIns="0" rIns="0" bIns="0" rtlCol="0" anchor="ctr"/>
+          <a:lstStyle/>
+          <a:p>
+            <a:pPr algn="ctr" indent="0" marL="0">
+              <a:buNone/>
+            </a:pPr>
+            <a:r>
+              <a:rPr lang="en-US" sz="800" dirty="0">
+                <a:solidFill>
+                  <a:srgbClr val="333333"/>
+                </a:solidFill>
+                <a:latin typeface="Calibri" pitchFamily="34" charset="0"/>
+                <a:ea typeface="Calibri" pitchFamily="34" charset="-122"/>
+                <a:cs typeface="Calibri" pitchFamily="34" charset="-120"/>
+              </a:rPr>
+              <a:t>MV関東</a:t>
+            </a:r>
+            <a:endParaRPr lang="en-US" sz="800" dirty="0"/>
+          </a:p>
+          <a:p>
+            <a:pPr algn="ctr" indent="0" marL="0">
+              <a:buNone/>
+            </a:pPr>
+            <a:r>
+              <a:rPr lang="en-US" sz="800" dirty="0">
+                <a:solidFill>
+                  <a:srgbClr val="333333"/>
+                </a:solidFill>
+                <a:latin typeface="Calibri" pitchFamily="34" charset="0"/>
+                <a:ea typeface="Calibri" pitchFamily="34" charset="-122"/>
+                <a:cs typeface="Calibri" pitchFamily="34" charset="-120"/>
+              </a:rPr>
+              <a:t>100Mbps(BE)</a:t>
+            </a:r>
+            <a:endParaRPr lang="en-US" sz="800" dirty="0"/>
+          </a:p>
+        </p:txBody>
+      </p:sp>
+      <p:sp>
+        <p:nvSpPr>
+          <p:cNvPr id="19" name="Shape 14"/>
+          <p:cNvSpPr/>
+          <p:nvPr/>
+        </p:nvSpPr>
+        <p:spPr>
+          <a:xfrm>
+            <a:off x="137160" y="1627632"/>
+            <a:ext cx="1371600" cy="2606040"/>
+          </a:xfrm>
+          <a:prstGeom prst="rect">
+            <a:avLst/>
+          </a:prstGeom>
+          <a:solidFill>
+            <a:srgbClr val="000000"/>
+          </a:solidFill>
+          <a:ln w="12700">
+            <a:solidFill>
+              <a:srgbClr val="888888"/>
+            </a:solidFill>
+            <a:prstDash val="dash"/>
+          </a:ln>
+        </p:spPr>
+      </p:sp>
+      <p:sp>
+        <p:nvSpPr>
+          <p:cNvPr id="20" name="Text 15"/>
+          <p:cNvSpPr/>
+          <p:nvPr/>
+        </p:nvSpPr>
+        <p:spPr>
+          <a:xfrm>
+            <a:off x="137160" y="1645920"/>
+            <a:ext cx="1371600" cy="201168"/>
+          </a:xfrm>
+          <a:prstGeom prst="rect">
+            <a:avLst/>
+          </a:prstGeom>
+          <a:noFill/>
+          <a:ln/>
+        </p:spPr>
+        <p:txBody>
+          <a:bodyPr wrap="square" lIns="0" tIns="0" rIns="0" bIns="0" rtlCol="0" anchor="ctr"/>
+          <a:lstStyle/>
+          <a:p>
+            <a:pPr algn="ctr" indent="0" marL="0">
+              <a:buNone/>
+            </a:pPr>
+            <a:r>
+              <a:rPr lang="en-US" sz="800" b="1" dirty="0">
+                <a:solidFill>
+                  <a:srgbClr val="888888"/>
+                </a:solidFill>
+                <a:latin typeface="Calibri" pitchFamily="34" charset="0"/>
+                <a:ea typeface="Calibri" pitchFamily="34" charset="-122"/>
+                <a:cs typeface="Calibri" pitchFamily="34" charset="-120"/>
+              </a:rPr>
+              <a:t>USMH閉域網</a:t>
+            </a:r>
+            <a:endParaRPr lang="en-US" sz="800" dirty="0"/>
+          </a:p>
+        </p:txBody>
+      </p:sp>
+      <p:sp>
+        <p:nvSpPr>
+          <p:cNvPr id="21" name="Shape 16"/>
+          <p:cNvSpPr/>
+          <p:nvPr/>
+        </p:nvSpPr>
+        <p:spPr>
+          <a:xfrm>
+            <a:off x="1828800" y="2606040"/>
+            <a:ext cx="1005840" cy="457200"/>
+          </a:xfrm>
+          <a:prstGeom prst="rect">
+            <a:avLst/>
+          </a:prstGeom>
+          <a:solidFill>
+            <a:srgbClr val="F5F5FF"/>
+          </a:solidFill>
+          <a:ln w="12700">
+            <a:solidFill>
+              <a:srgbClr val="8866BB"/>
+            </a:solidFill>
+            <a:prstDash val="solid"/>
+          </a:ln>
+        </p:spPr>
+      </p:sp>
+      <p:sp>
+        <p:nvSpPr>
+          <p:cNvPr id="22" name="Text 17"/>
+          <p:cNvSpPr/>
+          <p:nvPr/>
+        </p:nvSpPr>
+        <p:spPr>
+          <a:xfrm>
+            <a:off x="1865376" y="2642616"/>
+            <a:ext cx="932688" cy="384048"/>
+          </a:xfrm>
+          <a:prstGeom prst="rect">
+            <a:avLst/>
+          </a:prstGeom>
+          <a:noFill/>
+          <a:ln/>
+        </p:spPr>
+        <p:txBody>
+          <a:bodyPr wrap="square" lIns="0" tIns="0" rIns="0" bIns="0" rtlCol="0" anchor="ctr"/>
+          <a:lstStyle/>
+          <a:p>
+            <a:pPr algn="ctr" indent="0" marL="0">
+              <a:buNone/>
+            </a:pPr>
+            <a:r>
+              <a:rPr lang="en-US" sz="800" dirty="0">
+                <a:solidFill>
+                  <a:srgbClr val="333333"/>
+                </a:solidFill>
+                <a:latin typeface="Calibri" pitchFamily="34" charset="0"/>
+                <a:ea typeface="Calibri" pitchFamily="34" charset="-122"/>
+                <a:cs typeface="Calibri" pitchFamily="34" charset="-120"/>
+              </a:rPr>
+              <a:t>SmartVPN</a:t>
+            </a:r>
+            <a:endParaRPr lang="en-US" sz="800" dirty="0"/>
+          </a:p>
+        </p:txBody>
+      </p:sp>
+      <p:sp>
+        <p:nvSpPr>
+          <p:cNvPr id="23" name="Shape 18"/>
+          <p:cNvSpPr/>
+          <p:nvPr/>
+        </p:nvSpPr>
+        <p:spPr>
+          <a:xfrm>
+            <a:off x="1508760" y="2834640"/>
+            <a:ext cx="320040" cy="0"/>
+          </a:xfrm>
+          <a:prstGeom prst="line">
+            <a:avLst/>
+          </a:prstGeom>
+          <a:noFill/>
+          <a:ln w="12700">
+            <a:solidFill>
+              <a:srgbClr val="888888"/>
+            </a:solidFill>
+            <a:prstDash val="solid"/>
+            <a:tailEnd type="arrow"/>
+          </a:ln>
+        </p:spPr>
+      </p:sp>
+      <p:sp>
+        <p:nvSpPr>
+          <p:cNvPr id="24" name="Shape 19"/>
+          <p:cNvSpPr/>
+          <p:nvPr/>
+        </p:nvSpPr>
+        <p:spPr>
+          <a:xfrm>
+            <a:off x="3108960" y="2487168"/>
+            <a:ext cx="1371600" cy="685800"/>
+          </a:xfrm>
+          <a:prstGeom prst="rect">
+            <a:avLst/>
+          </a:prstGeom>
+          <a:solidFill>
+            <a:srgbClr val="EBF5FF"/>
+          </a:solidFill>
+          <a:ln w="12700">
+            <a:solidFill>
+              <a:srgbClr val="4488CC"/>
+            </a:solidFill>
+            <a:prstDash val="solid"/>
+          </a:ln>
+        </p:spPr>
+      </p:sp>
+      <p:sp>
+        <p:nvSpPr>
+          <p:cNvPr id="25" name="Text 20"/>
+          <p:cNvSpPr/>
+          <p:nvPr/>
+        </p:nvSpPr>
+        <p:spPr>
+          <a:xfrm>
+            <a:off x="3145536" y="2523744"/>
+            <a:ext cx="1298448" cy="612648"/>
+          </a:xfrm>
+          <a:prstGeom prst="rect">
+            <a:avLst/>
+          </a:prstGeom>
+          <a:noFill/>
+          <a:ln/>
+        </p:spPr>
+        <p:txBody>
+          <a:bodyPr wrap="square" lIns="0" tIns="0" rIns="0" bIns="0" rtlCol="0" anchor="ctr"/>
+          <a:lstStyle/>
+          <a:p>
+            <a:pPr algn="ctr" indent="0" marL="0">
+              <a:buNone/>
+            </a:pPr>
+            <a:r>
+              <a:rPr lang="en-US" sz="900" dirty="0">
+                <a:solidFill>
+                  <a:srgbClr val="333333"/>
+                </a:solidFill>
+                <a:latin typeface="Calibri" pitchFamily="34" charset="0"/>
+                <a:ea typeface="Calibri" pitchFamily="34" charset="-122"/>
+                <a:cs typeface="Calibri" pitchFamily="34" charset="-120"/>
+              </a:rPr>
+              <a:t>AWS Direct</a:t>
+            </a:r>
+            <a:endParaRPr lang="en-US" sz="900" dirty="0"/>
+          </a:p>
+          <a:p>
+            <a:pPr algn="ctr" indent="0" marL="0">
+              <a:buNone/>
+            </a:pPr>
+            <a:r>
+              <a:rPr lang="en-US" sz="900" dirty="0">
+                <a:solidFill>
+                  <a:srgbClr val="333333"/>
+                </a:solidFill>
+                <a:latin typeface="Calibri" pitchFamily="34" charset="0"/>
+                <a:ea typeface="Calibri" pitchFamily="34" charset="-122"/>
+                <a:cs typeface="Calibri" pitchFamily="34" charset="-120"/>
+              </a:rPr>
+              <a:t>Connect</a:t>
+            </a:r>
+            <a:endParaRPr lang="en-US" sz="900" dirty="0"/>
+          </a:p>
+          <a:p>
+            <a:pPr algn="ctr" indent="0" marL="0">
+              <a:buNone/>
+            </a:pPr>
+            <a:r>
+              <a:rPr lang="en-US" sz="900" dirty="0">
+                <a:solidFill>
+                  <a:srgbClr val="333333"/>
+                </a:solidFill>
+                <a:latin typeface="Calibri" pitchFamily="34" charset="0"/>
+                <a:ea typeface="Calibri" pitchFamily="34" charset="-122"/>
+                <a:cs typeface="Calibri" pitchFamily="34" charset="-120"/>
+              </a:rPr>
+              <a:t>100Mbps</a:t>
+            </a:r>
+            <a:endParaRPr lang="en-US" sz="900" dirty="0"/>
+          </a:p>
+        </p:txBody>
+      </p:sp>
+      <p:sp>
+        <p:nvSpPr>
+          <p:cNvPr id="26" name="Shape 21"/>
+          <p:cNvSpPr/>
+          <p:nvPr/>
+        </p:nvSpPr>
+        <p:spPr>
+          <a:xfrm>
+            <a:off x="2834640" y="2834640"/>
+            <a:ext cx="274320" cy="0"/>
+          </a:xfrm>
+          <a:prstGeom prst="line">
+            <a:avLst/>
+          </a:prstGeom>
+          <a:noFill/>
+          <a:ln w="19050">
+            <a:solidFill>
+              <a:srgbClr val="4488CC"/>
+            </a:solidFill>
+            <a:prstDash val="solid"/>
+            <a:tailEnd type="arrow"/>
+          </a:ln>
+        </p:spPr>
+      </p:sp>
+      <p:sp>
+        <p:nvSpPr>
+          <p:cNvPr id="27" name="Shape 22"/>
+          <p:cNvSpPr/>
+          <p:nvPr/>
+        </p:nvSpPr>
+        <p:spPr>
+          <a:xfrm>
+            <a:off x="4663440" y="2103120"/>
+            <a:ext cx="1645920" cy="1371600"/>
+          </a:xfrm>
+          <a:prstGeom prst="rect">
+            <a:avLst/>
+          </a:prstGeom>
+          <a:solidFill>
+            <a:srgbClr val="F0FAFF"/>
+          </a:solidFill>
+          <a:ln w="19050">
+            <a:solidFill>
+              <a:srgbClr val="4488CC"/>
+            </a:solidFill>
+            <a:prstDash val="dash"/>
+          </a:ln>
+        </p:spPr>
+      </p:sp>
+      <p:sp>
+        <p:nvSpPr>
+          <p:cNvPr id="28" name="Text 23"/>
+          <p:cNvSpPr/>
+          <p:nvPr/>
+        </p:nvSpPr>
+        <p:spPr>
+          <a:xfrm>
+            <a:off x="4663440" y="2121408"/>
+            <a:ext cx="1645920" cy="320040"/>
+          </a:xfrm>
+          <a:prstGeom prst="rect">
+            <a:avLst/>
+          </a:prstGeom>
+          <a:noFill/>
+          <a:ln/>
+        </p:spPr>
+        <p:txBody>
+          <a:bodyPr wrap="square" lIns="0" tIns="0" rIns="0" bIns="0" rtlCol="0" anchor="ctr"/>
+          <a:lstStyle/>
+          <a:p>
+            <a:pPr algn="ctr" indent="0" marL="0">
+              <a:buNone/>
+            </a:pPr>
+            <a:r>
+              <a:rPr lang="en-US" sz="800" b="1" dirty="0">
+                <a:solidFill>
+                  <a:srgbClr val="4488CC"/>
+                </a:solidFill>
+                <a:latin typeface="Calibri" pitchFamily="34" charset="0"/>
+                <a:ea typeface="Calibri" pitchFamily="34" charset="-122"/>
+                <a:cs typeface="Calibri" pitchFamily="34" charset="-120"/>
+              </a:rPr>
+              <a:t>Gateway VPC</a:t>
+            </a:r>
+            <a:endParaRPr lang="en-US" sz="800" dirty="0"/>
+          </a:p>
+          <a:p>
+            <a:pPr algn="ctr" indent="0" marL="0">
+              <a:buNone/>
+            </a:pPr>
+            <a:r>
+              <a:rPr lang="en-US" sz="800" b="1" dirty="0">
+                <a:solidFill>
+                  <a:srgbClr val="4488CC"/>
+                </a:solidFill>
+                <a:latin typeface="Calibri" pitchFamily="34" charset="0"/>
+                <a:ea typeface="Calibri" pitchFamily="34" charset="-122"/>
+                <a:cs typeface="Calibri" pitchFamily="34" charset="-120"/>
+              </a:rPr>
+              <a:t>（別AWSアカウント）</a:t>
+            </a:r>
+            <a:endParaRPr lang="en-US" sz="800" dirty="0"/>
+          </a:p>
+        </p:txBody>
+      </p:sp>
+      <p:sp>
+        <p:nvSpPr>
+          <p:cNvPr id="29" name="Shape 24"/>
+          <p:cNvSpPr/>
+          <p:nvPr/>
+        </p:nvSpPr>
+        <p:spPr>
+          <a:xfrm>
+            <a:off x="4800600" y="2487168"/>
+            <a:ext cx="1371600" cy="457200"/>
+          </a:xfrm>
+          <a:prstGeom prst="rect">
+            <a:avLst/>
+          </a:prstGeom>
+          <a:solidFill>
+            <a:srgbClr val="EBF5FF"/>
+          </a:solidFill>
+          <a:ln w="12700">
+            <a:solidFill>
+              <a:srgbClr val="4488CC"/>
+            </a:solidFill>
+            <a:prstDash val="solid"/>
+          </a:ln>
+        </p:spPr>
+      </p:sp>
+      <p:sp>
+        <p:nvSpPr>
+          <p:cNvPr id="30" name="Text 25"/>
+          <p:cNvSpPr/>
+          <p:nvPr/>
+        </p:nvSpPr>
+        <p:spPr>
+          <a:xfrm>
+            <a:off x="4837176" y="2523744"/>
+            <a:ext cx="1298448" cy="384048"/>
+          </a:xfrm>
+          <a:prstGeom prst="rect">
+            <a:avLst/>
+          </a:prstGeom>
+          <a:noFill/>
+          <a:ln/>
+        </p:spPr>
+        <p:txBody>
+          <a:bodyPr wrap="square" lIns="0" tIns="0" rIns="0" bIns="0" rtlCol="0" anchor="ctr"/>
+          <a:lstStyle/>
+          <a:p>
+            <a:pPr algn="ctr" indent="0" marL="0">
+              <a:buNone/>
+            </a:pPr>
+            <a:r>
+              <a:rPr lang="en-US" sz="800" dirty="0">
+                <a:solidFill>
+                  <a:srgbClr val="333333"/>
+                </a:solidFill>
+                <a:latin typeface="Calibri" pitchFamily="34" charset="0"/>
+                <a:ea typeface="Calibri" pitchFamily="34" charset="-122"/>
+                <a:cs typeface="Calibri" pitchFamily="34" charset="-120"/>
+              </a:rPr>
+              <a:t>Transit</a:t>
+            </a:r>
+            <a:endParaRPr lang="en-US" sz="800" dirty="0"/>
+          </a:p>
+          <a:p>
+            <a:pPr algn="ctr" indent="0" marL="0">
+              <a:buNone/>
+            </a:pPr>
+            <a:r>
+              <a:rPr lang="en-US" sz="800" dirty="0">
+                <a:solidFill>
+                  <a:srgbClr val="333333"/>
+                </a:solidFill>
+                <a:latin typeface="Calibri" pitchFamily="34" charset="0"/>
+                <a:ea typeface="Calibri" pitchFamily="34" charset="-122"/>
+                <a:cs typeface="Calibri" pitchFamily="34" charset="-120"/>
+              </a:rPr>
+              <a:t>Gateway / GW</a:t>
+            </a:r>
+            <a:endParaRPr lang="en-US" sz="800" dirty="0"/>
+          </a:p>
+        </p:txBody>
+      </p:sp>
+      <p:sp>
+        <p:nvSpPr>
+          <p:cNvPr id="31" name="Shape 26"/>
+          <p:cNvSpPr/>
+          <p:nvPr/>
+        </p:nvSpPr>
+        <p:spPr>
+          <a:xfrm>
+            <a:off x="4480560" y="2834640"/>
+            <a:ext cx="320040" cy="0"/>
+          </a:xfrm>
+          <a:prstGeom prst="line">
+            <a:avLst/>
+          </a:prstGeom>
+          <a:noFill/>
+          <a:ln w="19050">
+            <a:solidFill>
+              <a:srgbClr val="4488CC"/>
+            </a:solidFill>
+            <a:prstDash val="solid"/>
+            <a:tailEnd type="arrow"/>
+          </a:ln>
+        </p:spPr>
+      </p:sp>
+      <p:sp>
+        <p:nvSpPr>
+          <p:cNvPr id="32" name="Shape 27"/>
+          <p:cNvSpPr/>
+          <p:nvPr/>
+        </p:nvSpPr>
+        <p:spPr>
+          <a:xfrm>
+            <a:off x="6309360" y="2834640"/>
+            <a:ext cx="274320" cy="0"/>
+          </a:xfrm>
+          <a:prstGeom prst="line">
+            <a:avLst/>
+          </a:prstGeom>
+          <a:noFill/>
+          <a:ln w="19050">
+            <a:solidFill>
+              <a:srgbClr val="D0232A"/>
+            </a:solidFill>
+            <a:prstDash val="solid"/>
+            <a:tailEnd type="arrow"/>
+          </a:ln>
+        </p:spPr>
+      </p:sp>
+      <p:sp>
+        <p:nvSpPr>
+          <p:cNvPr id="33" name="Shape 28"/>
+          <p:cNvSpPr/>
+          <p:nvPr/>
+        </p:nvSpPr>
+        <p:spPr>
+          <a:xfrm>
+            <a:off x="6583680" y="2487168"/>
+            <a:ext cx="1097280" cy="457200"/>
+          </a:xfrm>
+          <a:prstGeom prst="rect">
+            <a:avLst/>
+          </a:prstGeom>
+          <a:solidFill>
+            <a:srgbClr val="FFF0F0"/>
+          </a:solidFill>
+          <a:ln w="12700">
+            <a:solidFill>
+              <a:srgbClr val="D0232A"/>
+            </a:solidFill>
+            <a:prstDash val="solid"/>
+          </a:ln>
+        </p:spPr>
+      </p:sp>
+      <p:sp>
+        <p:nvSpPr>
+          <p:cNvPr id="34" name="Text 29"/>
+          <p:cNvSpPr/>
+          <p:nvPr/>
+        </p:nvSpPr>
+        <p:spPr>
+          <a:xfrm>
+            <a:off x="6620256" y="2523744"/>
+            <a:ext cx="1024128" cy="384048"/>
+          </a:xfrm>
+          <a:prstGeom prst="rect">
+            <a:avLst/>
+          </a:prstGeom>
+          <a:noFill/>
+          <a:ln/>
+        </p:spPr>
+        <p:txBody>
+          <a:bodyPr wrap="square" lIns="0" tIns="0" rIns="0" bIns="0" rtlCol="0" anchor="ctr"/>
+          <a:lstStyle/>
+          <a:p>
+            <a:pPr algn="ctr" indent="0" marL="0">
+              <a:buNone/>
+            </a:pPr>
+            <a:r>
+              <a:rPr lang="en-US" sz="700" dirty="0">
+                <a:solidFill>
+                  <a:srgbClr val="333333"/>
+                </a:solidFill>
+                <a:latin typeface="Calibri" pitchFamily="34" charset="0"/>
+                <a:ea typeface="Calibri" pitchFamily="34" charset="-122"/>
+                <a:cs typeface="Calibri" pitchFamily="34" charset="-120"/>
+              </a:rPr>
+              <a:t>VPN Gateway</a:t>
+            </a:r>
+            <a:endParaRPr lang="en-US" sz="700" dirty="0"/>
+          </a:p>
+          <a:p>
+            <a:pPr algn="ctr" indent="0" marL="0">
+              <a:buNone/>
+            </a:pPr>
+            <a:r>
+              <a:rPr lang="en-US" sz="700" dirty="0">
+                <a:solidFill>
+                  <a:srgbClr val="333333"/>
+                </a:solidFill>
+                <a:latin typeface="Calibri" pitchFamily="34" charset="0"/>
+                <a:ea typeface="Calibri" pitchFamily="34" charset="-122"/>
+                <a:cs typeface="Calibri" pitchFamily="34" charset="-120"/>
+              </a:rPr>
+              <a:t>(vgw-06d8981903cf33c62)</a:t>
+            </a:r>
+            <a:endParaRPr lang="en-US" sz="700" dirty="0"/>
+          </a:p>
+        </p:txBody>
+      </p:sp>
+      <p:sp>
+        <p:nvSpPr>
+          <p:cNvPr id="35" name="Shape 30"/>
+          <p:cNvSpPr/>
+          <p:nvPr/>
+        </p:nvSpPr>
+        <p:spPr>
+          <a:xfrm>
+            <a:off x="7863840" y="1572768"/>
+            <a:ext cx="1874520" cy="2926080"/>
+          </a:xfrm>
+          <a:prstGeom prst="rect">
+            <a:avLst/>
+          </a:prstGeom>
+          <a:solidFill>
+            <a:srgbClr val="FFF8F8"/>
+          </a:solidFill>
+          <a:ln w="19050">
+            <a:solidFill>
+              <a:srgbClr val="D0232A"/>
+            </a:solidFill>
+            <a:prstDash val="solid"/>
+          </a:ln>
+        </p:spPr>
+      </p:sp>
+      <p:sp>
+        <p:nvSpPr>
+          <p:cNvPr id="36" name="Text 31"/>
+          <p:cNvSpPr/>
+          <p:nvPr/>
+        </p:nvSpPr>
+        <p:spPr>
+          <a:xfrm>
+            <a:off x="7863840" y="1591056"/>
+            <a:ext cx="1874520" cy="320040"/>
+          </a:xfrm>
+          <a:prstGeom prst="rect">
+            <a:avLst/>
+          </a:prstGeom>
+          <a:noFill/>
+          <a:ln/>
+        </p:spPr>
+        <p:txBody>
+          <a:bodyPr wrap="square" lIns="0" tIns="0" rIns="0" bIns="0" rtlCol="0" anchor="ctr"/>
+          <a:lstStyle/>
+          <a:p>
+            <a:pPr algn="ctr" indent="0" marL="0">
+              <a:buNone/>
+            </a:pPr>
+            <a:r>
+              <a:rPr lang="en-US" sz="800" b="1" dirty="0">
+                <a:solidFill>
+                  <a:srgbClr val="D0232A"/>
+                </a:solidFill>
+                <a:latin typeface="Calibri" pitchFamily="34" charset="0"/>
+                <a:ea typeface="Calibri" pitchFamily="34" charset="-122"/>
+                <a:cs typeface="Calibri" pitchFamily="34" charset="-120"/>
+              </a:rPr>
+              <a:t>AWS本番VPC</a:t>
+            </a:r>
+            <a:endParaRPr lang="en-US" sz="800" dirty="0"/>
+          </a:p>
+          <a:p>
+            <a:pPr algn="ctr" indent="0" marL="0">
+              <a:buNone/>
+            </a:pPr>
+            <a:r>
+              <a:rPr lang="en-US" sz="800" b="1" dirty="0">
+                <a:solidFill>
+                  <a:srgbClr val="D0232A"/>
+                </a:solidFill>
+                <a:latin typeface="Calibri" pitchFamily="34" charset="0"/>
+                <a:ea typeface="Calibri" pitchFamily="34" charset="-122"/>
+                <a:cs typeface="Calibri" pitchFamily="34" charset="-120"/>
+              </a:rPr>
+              <a:t>10.238.0.0/16</a:t>
+            </a:r>
+            <a:endParaRPr lang="en-US" sz="800" dirty="0"/>
+          </a:p>
+        </p:txBody>
+      </p:sp>
+      <p:sp>
+        <p:nvSpPr>
+          <p:cNvPr id="37" name="Shape 32"/>
+          <p:cNvSpPr/>
+          <p:nvPr/>
+        </p:nvSpPr>
+        <p:spPr>
+          <a:xfrm>
+            <a:off x="7680960" y="2834640"/>
+            <a:ext cx="182880" cy="0"/>
+          </a:xfrm>
+          <a:prstGeom prst="line">
+            <a:avLst/>
+          </a:prstGeom>
+          <a:noFill/>
+          <a:ln w="19050">
+            <a:solidFill>
+              <a:srgbClr val="D0232A"/>
+            </a:solidFill>
+            <a:prstDash val="solid"/>
+            <a:tailEnd type="arrow"/>
+          </a:ln>
+        </p:spPr>
+      </p:sp>
+      <p:sp>
+        <p:nvSpPr>
+          <p:cNvPr id="38" name="Shape 33"/>
+          <p:cNvSpPr/>
+          <p:nvPr/>
+        </p:nvSpPr>
+        <p:spPr>
+          <a:xfrm>
+            <a:off x="7936992" y="1965960"/>
+            <a:ext cx="1719072" cy="429768"/>
+          </a:xfrm>
+          <a:prstGeom prst="rect">
+            <a:avLst/>
+          </a:prstGeom>
+          <a:solidFill>
+            <a:srgbClr val="FFE8E8"/>
+          </a:solidFill>
+          <a:ln w="12700">
+            <a:solidFill>
+              <a:srgbClr val="DDDDDD"/>
+            </a:solidFill>
+            <a:prstDash val="solid"/>
+          </a:ln>
+        </p:spPr>
+      </p:sp>
+      <p:sp>
+        <p:nvSpPr>
+          <p:cNvPr id="39" name="Text 34"/>
+          <p:cNvSpPr/>
+          <p:nvPr/>
+        </p:nvSpPr>
+        <p:spPr>
+          <a:xfrm>
+            <a:off x="7936992" y="1965960"/>
+            <a:ext cx="1719072" cy="429768"/>
+          </a:xfrm>
+          <a:prstGeom prst="rect">
+            <a:avLst/>
+          </a:prstGeom>
+          <a:noFill/>
+          <a:ln/>
+        </p:spPr>
+        <p:txBody>
+          <a:bodyPr wrap="square" lIns="0" tIns="0" rIns="0" bIns="0" rtlCol="0" anchor="ctr"/>
+          <a:lstStyle/>
+          <a:p>
+            <a:pPr algn="ctr" indent="0" marL="0">
+              <a:buNone/>
+            </a:pPr>
+            <a:r>
+              <a:rPr lang="en-US" sz="700" dirty="0">
+                <a:solidFill>
+                  <a:srgbClr val="333333"/>
+                </a:solidFill>
+                <a:latin typeface="Calibri" pitchFamily="34" charset="0"/>
+                <a:ea typeface="Calibri" pitchFamily="34" charset="-122"/>
+                <a:cs typeface="Calibri" pitchFamily="34" charset="-120"/>
+              </a:rPr>
+              <a:t>Bastion(VPN GW)</a:t>
+            </a:r>
+            <a:endParaRPr lang="en-US" sz="700" dirty="0"/>
+          </a:p>
+          <a:p>
+            <a:pPr algn="ctr" indent="0" marL="0">
+              <a:buNone/>
+            </a:pPr>
+            <a:r>
+              <a:rPr lang="en-US" sz="700" dirty="0">
+                <a:solidFill>
+                  <a:srgbClr val="333333"/>
+                </a:solidFill>
+                <a:latin typeface="Calibri" pitchFamily="34" charset="0"/>
+                <a:ea typeface="Calibri" pitchFamily="34" charset="-122"/>
+                <a:cs typeface="Calibri" pitchFamily="34" charset="-120"/>
+              </a:rPr>
+              <a:t>10.238.2.39</a:t>
+            </a:r>
+            <a:endParaRPr lang="en-US" sz="700" dirty="0"/>
+          </a:p>
+        </p:txBody>
+      </p:sp>
+      <p:sp>
+        <p:nvSpPr>
+          <p:cNvPr id="40" name="Shape 35"/>
+          <p:cNvSpPr/>
+          <p:nvPr/>
+        </p:nvSpPr>
+        <p:spPr>
+          <a:xfrm>
+            <a:off x="7936992" y="2487168"/>
+            <a:ext cx="1719072" cy="429768"/>
+          </a:xfrm>
+          <a:prstGeom prst="rect">
+            <a:avLst/>
+          </a:prstGeom>
+          <a:solidFill>
+            <a:srgbClr val="FFE8E8"/>
+          </a:solidFill>
+          <a:ln w="12700">
+            <a:solidFill>
+              <a:srgbClr val="DDDDDD"/>
+            </a:solidFill>
+            <a:prstDash val="solid"/>
+          </a:ln>
+        </p:spPr>
+      </p:sp>
+      <p:sp>
+        <p:nvSpPr>
+          <p:cNvPr id="41" name="Text 36"/>
+          <p:cNvSpPr/>
+          <p:nvPr/>
+        </p:nvSpPr>
+        <p:spPr>
+          <a:xfrm>
+            <a:off x="7936992" y="2487168"/>
+            <a:ext cx="1719072" cy="429768"/>
+          </a:xfrm>
+          <a:prstGeom prst="rect">
+            <a:avLst/>
+          </a:prstGeom>
+          <a:noFill/>
+          <a:ln/>
+        </p:spPr>
+        <p:txBody>
+          <a:bodyPr wrap="square" lIns="0" tIns="0" rIns="0" bIns="0" rtlCol="0" anchor="ctr"/>
+          <a:lstStyle/>
+          <a:p>
+            <a:pPr algn="ctr" indent="0" marL="0">
+              <a:buNone/>
+            </a:pPr>
+            <a:r>
+              <a:rPr lang="en-US" sz="700" dirty="0">
+                <a:solidFill>
+                  <a:srgbClr val="333333"/>
+                </a:solidFill>
+                <a:latin typeface="Calibri" pitchFamily="34" charset="0"/>
+                <a:ea typeface="Calibri" pitchFamily="34" charset="-122"/>
+                <a:cs typeface="Calibri" pitchFamily="34" charset="-120"/>
+              </a:rPr>
+              <a:t>Giftcard管理</a:t>
+            </a:r>
+            <a:endParaRPr lang="en-US" sz="700" dirty="0"/>
+          </a:p>
+          <a:p>
+            <a:pPr algn="ctr" indent="0" marL="0">
+              <a:buNone/>
+            </a:pPr>
+            <a:r>
+              <a:rPr lang="en-US" sz="700" dirty="0">
+                <a:solidFill>
+                  <a:srgbClr val="333333"/>
+                </a:solidFill>
+                <a:latin typeface="Calibri" pitchFamily="34" charset="0"/>
+                <a:ea typeface="Calibri" pitchFamily="34" charset="-122"/>
+                <a:cs typeface="Calibri" pitchFamily="34" charset="-120"/>
+              </a:rPr>
+              <a:t>10.238.2.198</a:t>
+            </a:r>
+            <a:endParaRPr lang="en-US" sz="700" dirty="0"/>
+          </a:p>
+        </p:txBody>
+      </p:sp>
+      <p:sp>
+        <p:nvSpPr>
+          <p:cNvPr id="42" name="Shape 37"/>
+          <p:cNvSpPr/>
+          <p:nvPr/>
+        </p:nvSpPr>
+        <p:spPr>
+          <a:xfrm>
+            <a:off x="7936992" y="3017520"/>
+            <a:ext cx="1719072" cy="429768"/>
+          </a:xfrm>
+          <a:prstGeom prst="rect">
+            <a:avLst/>
+          </a:prstGeom>
+          <a:solidFill>
+            <a:srgbClr val="F0FFF0"/>
+          </a:solidFill>
+          <a:ln w="12700">
+            <a:solidFill>
+              <a:srgbClr val="DDDDDD"/>
+            </a:solidFill>
+            <a:prstDash val="solid"/>
+          </a:ln>
+        </p:spPr>
+      </p:sp>
+      <p:sp>
+        <p:nvSpPr>
+          <p:cNvPr id="43" name="Text 38"/>
+          <p:cNvSpPr/>
+          <p:nvPr/>
+        </p:nvSpPr>
+        <p:spPr>
+          <a:xfrm>
+            <a:off x="7936992" y="3017520"/>
+            <a:ext cx="1719072" cy="429768"/>
+          </a:xfrm>
+          <a:prstGeom prst="rect">
+            <a:avLst/>
+          </a:prstGeom>
+          <a:noFill/>
+          <a:ln/>
+        </p:spPr>
+        <p:txBody>
+          <a:bodyPr wrap="square" lIns="0" tIns="0" rIns="0" bIns="0" rtlCol="0" anchor="ctr"/>
+          <a:lstStyle/>
+          <a:p>
+            <a:pPr algn="ctr" indent="0" marL="0">
+              <a:buNone/>
+            </a:pPr>
+            <a:r>
+              <a:rPr lang="en-US" sz="700" dirty="0">
+                <a:solidFill>
+                  <a:srgbClr val="333333"/>
+                </a:solidFill>
+                <a:latin typeface="Calibri" pitchFamily="34" charset="0"/>
+                <a:ea typeface="Calibri" pitchFamily="34" charset="-122"/>
+                <a:cs typeface="Calibri" pitchFamily="34" charset="-120"/>
+              </a:rPr>
+              <a:t>RDS Aurora</a:t>
+            </a:r>
+            <a:endParaRPr lang="en-US" sz="700" dirty="0"/>
+          </a:p>
+          <a:p>
+            <a:pPr algn="ctr" indent="0" marL="0">
+              <a:buNone/>
+            </a:pPr>
+            <a:r>
+              <a:rPr lang="en-US" sz="700" dirty="0">
+                <a:solidFill>
+                  <a:srgbClr val="333333"/>
+                </a:solidFill>
+                <a:latin typeface="Calibri" pitchFamily="34" charset="0"/>
+                <a:ea typeface="Calibri" pitchFamily="34" charset="-122"/>
+                <a:cs typeface="Calibri" pitchFamily="34" charset="-120"/>
+              </a:rPr>
+              <a:t>MySQL 8.0</a:t>
+            </a:r>
+            <a:endParaRPr lang="en-US" sz="700" dirty="0"/>
+          </a:p>
+        </p:txBody>
+      </p:sp>
+      <p:sp>
+        <p:nvSpPr>
+          <p:cNvPr id="44" name="Shape 39"/>
+          <p:cNvSpPr/>
+          <p:nvPr/>
+        </p:nvSpPr>
+        <p:spPr>
+          <a:xfrm>
+            <a:off x="7936992" y="3538728"/>
+            <a:ext cx="1719072" cy="429768"/>
+          </a:xfrm>
+          <a:prstGeom prst="rect">
+            <a:avLst/>
+          </a:prstGeom>
+          <a:solidFill>
+            <a:srgbClr val="EBF5FF"/>
+          </a:solidFill>
+          <a:ln w="12700">
+            <a:solidFill>
+              <a:srgbClr val="DDDDDD"/>
+            </a:solidFill>
+            <a:prstDash val="solid"/>
+          </a:ln>
+        </p:spPr>
+      </p:sp>
+      <p:sp>
+        <p:nvSpPr>
+          <p:cNvPr id="45" name="Text 40"/>
+          <p:cNvSpPr/>
+          <p:nvPr/>
+        </p:nvSpPr>
+        <p:spPr>
+          <a:xfrm>
+            <a:off x="7936992" y="3538728"/>
+            <a:ext cx="1719072" cy="429768"/>
+          </a:xfrm>
+          <a:prstGeom prst="rect">
+            <a:avLst/>
+          </a:prstGeom>
+          <a:noFill/>
+          <a:ln/>
+        </p:spPr>
+        <p:txBody>
+          <a:bodyPr wrap="square" lIns="0" tIns="0" rIns="0" bIns="0" rtlCol="0" anchor="ctr"/>
+          <a:lstStyle/>
+          <a:p>
+            <a:pPr algn="ctr" indent="0" marL="0">
+              <a:buNone/>
+            </a:pPr>
+            <a:r>
+              <a:rPr lang="en-US" sz="700" dirty="0">
+                <a:solidFill>
+                  <a:srgbClr val="333333"/>
+                </a:solidFill>
+                <a:latin typeface="Calibri" pitchFamily="34" charset="0"/>
+                <a:ea typeface="Calibri" pitchFamily="34" charset="-122"/>
+                <a:cs typeface="Calibri" pitchFamily="34" charset="-120"/>
+              </a:rPr>
+              <a:t>AWS Client VPN</a:t>
+            </a:r>
+            <a:endParaRPr lang="en-US" sz="700" dirty="0"/>
+          </a:p>
+          <a:p>
+            <a:pPr algn="ctr" indent="0" marL="0">
+              <a:buNone/>
+            </a:pPr>
+            <a:r>
+              <a:rPr lang="en-US" sz="700" dirty="0">
+                <a:solidFill>
+                  <a:srgbClr val="333333"/>
+                </a:solidFill>
+                <a:latin typeface="Calibri" pitchFamily="34" charset="0"/>
+                <a:ea typeface="Calibri" pitchFamily="34" charset="-122"/>
+                <a:cs typeface="Calibri" pitchFamily="34" charset="-120"/>
+              </a:rPr>
+              <a:t>(端末→AWS接続)</a:t>
+            </a:r>
+            <a:endParaRPr lang="en-US" sz="700" dirty="0"/>
+          </a:p>
+        </p:txBody>
+      </p:sp>
+      <p:sp>
+        <p:nvSpPr>
+          <p:cNvPr id="46" name="Shape 41"/>
+          <p:cNvSpPr/>
+          <p:nvPr/>
+        </p:nvSpPr>
+        <p:spPr>
+          <a:xfrm>
+            <a:off x="6492240" y="4206240"/>
+            <a:ext cx="1874520" cy="822960"/>
+          </a:xfrm>
+          <a:prstGeom prst="rect">
+            <a:avLst/>
+          </a:prstGeom>
+          <a:solidFill>
+            <a:srgbClr val="F5F8FF"/>
+          </a:solidFill>
+          <a:ln w="12700">
+            <a:solidFill>
+              <a:srgbClr val="4488CC"/>
+            </a:solidFill>
+            <a:prstDash val="dash"/>
+          </a:ln>
+        </p:spPr>
+      </p:sp>
+      <p:sp>
+        <p:nvSpPr>
+          <p:cNvPr id="47" name="Text 42"/>
+          <p:cNvSpPr/>
+          <p:nvPr/>
+        </p:nvSpPr>
+        <p:spPr>
+          <a:xfrm>
+            <a:off x="6492240" y="4224528"/>
+            <a:ext cx="1874520" cy="786384"/>
+          </a:xfrm>
+          <a:prstGeom prst="rect">
+            <a:avLst/>
+          </a:prstGeom>
+          <a:noFill/>
+          <a:ln/>
+        </p:spPr>
+        <p:txBody>
+          <a:bodyPr wrap="square" lIns="0" tIns="0" rIns="0" bIns="0" rtlCol="0" anchor="ctr"/>
+          <a:lstStyle/>
+          <a:p>
+            <a:pPr algn="ctr" indent="0" marL="0">
+              <a:buNone/>
+            </a:pPr>
+            <a:r>
+              <a:rPr lang="en-US" sz="700" dirty="0">
+                <a:solidFill>
+                  <a:srgbClr val="4488CC"/>
+                </a:solidFill>
+                <a:latin typeface="Calibri" pitchFamily="34" charset="0"/>
+                <a:ea typeface="Calibri" pitchFamily="34" charset="-122"/>
+                <a:cs typeface="Calibri" pitchFamily="34" charset="-120"/>
+              </a:rPr>
+              <a:t>AWS STG VPC</a:t>
+            </a:r>
+            <a:endParaRPr lang="en-US" sz="700" dirty="0"/>
+          </a:p>
+          <a:p>
+            <a:pPr algn="ctr" indent="0" marL="0">
+              <a:buNone/>
+            </a:pPr>
+            <a:r>
+              <a:rPr lang="en-US" sz="700" dirty="0">
+                <a:solidFill>
+                  <a:srgbClr val="4488CC"/>
+                </a:solidFill>
+                <a:latin typeface="Calibri" pitchFamily="34" charset="0"/>
+                <a:ea typeface="Calibri" pitchFamily="34" charset="-122"/>
+                <a:cs typeface="Calibri" pitchFamily="34" charset="-120"/>
+              </a:rPr>
+              <a:t>10.239.0.0/16</a:t>
+            </a:r>
+            <a:endParaRPr lang="en-US" sz="700" dirty="0"/>
+          </a:p>
+          <a:p>
+            <a:pPr algn="ctr" indent="0" marL="0">
+              <a:buNone/>
+            </a:pPr>
+            <a:r>
+              <a:rPr lang="en-US" sz="700" dirty="0">
+                <a:solidFill>
+                  <a:srgbClr val="4488CC"/>
+                </a:solidFill>
+                <a:latin typeface="Calibri" pitchFamily="34" charset="0"/>
+                <a:ea typeface="Calibri" pitchFamily="34" charset="-122"/>
+                <a:cs typeface="Calibri" pitchFamily="34" charset="-120"/>
+              </a:rPr>
+              <a:t>(STG: 10.239.2.4 / 10.239.2.193)</a:t>
+            </a:r>
+            <a:endParaRPr lang="en-US" sz="700" dirty="0"/>
+          </a:p>
+        </p:txBody>
+      </p:sp>
+      <p:sp>
+        <p:nvSpPr>
+          <p:cNvPr id="48" name="Shape 43"/>
+          <p:cNvSpPr/>
+          <p:nvPr/>
+        </p:nvSpPr>
+        <p:spPr>
+          <a:xfrm>
+            <a:off x="182880" y="4572000"/>
+            <a:ext cx="1371600" cy="731520"/>
+          </a:xfrm>
+          <a:prstGeom prst="rect">
+            <a:avLst/>
+          </a:prstGeom>
+          <a:solidFill>
+            <a:srgbClr val="F0F8FF"/>
+          </a:solidFill>
+          <a:ln w="12700">
+            <a:solidFill>
+              <a:srgbClr val="4488CC"/>
+            </a:solidFill>
+            <a:prstDash val="solid"/>
+          </a:ln>
+        </p:spPr>
+      </p:sp>
+      <p:sp>
+        <p:nvSpPr>
+          <p:cNvPr id="49" name="Text 44"/>
+          <p:cNvSpPr/>
+          <p:nvPr/>
+        </p:nvSpPr>
+        <p:spPr>
+          <a:xfrm>
+            <a:off x="182880" y="4572000"/>
+            <a:ext cx="1371600" cy="731520"/>
+          </a:xfrm>
+          <a:prstGeom prst="rect">
+            <a:avLst/>
+          </a:prstGeom>
+          <a:noFill/>
+          <a:ln/>
+        </p:spPr>
+        <p:txBody>
+          <a:bodyPr wrap="square" lIns="0" tIns="0" rIns="0" bIns="0" rtlCol="0" anchor="ctr"/>
+          <a:lstStyle/>
+          <a:p>
+            <a:pPr algn="ctr" indent="0" marL="0">
+              <a:buNone/>
+            </a:pPr>
+            <a:r>
+              <a:rPr lang="en-US" sz="700" dirty="0">
+                <a:solidFill>
+                  <a:srgbClr val="4488CC"/>
+                </a:solidFill>
+                <a:latin typeface="Calibri" pitchFamily="34" charset="0"/>
+                <a:ea typeface="Calibri" pitchFamily="34" charset="-122"/>
+                <a:cs typeface="Calibri" pitchFamily="34" charset="-120"/>
+              </a:rPr>
+              <a:t>LUVINA開発端末</a:t>
+            </a:r>
+            <a:endParaRPr lang="en-US" sz="700" dirty="0"/>
+          </a:p>
+          <a:p>
+            <a:pPr algn="ctr" indent="0" marL="0">
+              <a:buNone/>
+            </a:pPr>
+            <a:r>
+              <a:rPr lang="en-US" sz="700" dirty="0">
+                <a:solidFill>
+                  <a:srgbClr val="4488CC"/>
+                </a:solidFill>
+                <a:latin typeface="Calibri" pitchFamily="34" charset="0"/>
+                <a:ea typeface="Calibri" pitchFamily="34" charset="-122"/>
+                <a:cs typeface="Calibri" pitchFamily="34" charset="-120"/>
+              </a:rPr>
+              <a:t>STG:10.239.2.4</a:t>
+            </a:r>
+            <a:endParaRPr lang="en-US" sz="700" dirty="0"/>
+          </a:p>
+          <a:p>
+            <a:pPr algn="ctr" indent="0" marL="0">
+              <a:buNone/>
+            </a:pPr>
+            <a:r>
+              <a:rPr lang="en-US" sz="700" dirty="0">
+                <a:solidFill>
+                  <a:srgbClr val="4488CC"/>
+                </a:solidFill>
+                <a:latin typeface="Calibri" pitchFamily="34" charset="0"/>
+                <a:ea typeface="Calibri" pitchFamily="34" charset="-122"/>
+                <a:cs typeface="Calibri" pitchFamily="34" charset="-120"/>
+              </a:rPr>
+              <a:t>PRD:10.238.2.39</a:t>
+            </a:r>
+            <a:endParaRPr lang="en-US" sz="700" dirty="0"/>
+          </a:p>
+        </p:txBody>
+      </p:sp>
+      <p:sp>
+        <p:nvSpPr>
+          <p:cNvPr id="50" name="Shape 45"/>
+          <p:cNvSpPr/>
+          <p:nvPr/>
+        </p:nvSpPr>
+        <p:spPr>
+          <a:xfrm>
+            <a:off x="1554480" y="4937760"/>
+            <a:ext cx="4937760" cy="0"/>
+          </a:xfrm>
+          <a:prstGeom prst="line">
+            <a:avLst/>
+          </a:prstGeom>
+          <a:noFill/>
+          <a:ln w="12700">
+            <a:solidFill>
+              <a:srgbClr val="4488CC"/>
+            </a:solidFill>
+            <a:prstDash val="dash"/>
+            <a:tailEnd type="arrow"/>
+          </a:ln>
+        </p:spPr>
+      </p:sp>
+      <p:sp>
+        <p:nvSpPr>
+          <p:cNvPr id="51" name="Text 46"/>
+          <p:cNvSpPr/>
+          <p:nvPr/>
+        </p:nvSpPr>
+        <p:spPr>
+          <a:xfrm>
+            <a:off x="3017520" y="4754880"/>
+            <a:ext cx="1645920" cy="228600"/>
+          </a:xfrm>
+          <a:prstGeom prst="rect">
+            <a:avLst/>
+          </a:prstGeom>
+          <a:noFill/>
+          <a:ln/>
+        </p:spPr>
+        <p:txBody>
+          <a:bodyPr wrap="square" lIns="0" tIns="0" rIns="0" bIns="0" rtlCol="0" anchor="ctr"/>
+          <a:lstStyle/>
+          <a:p>
+            <a:pPr algn="ctr" indent="0" marL="0">
+              <a:buNone/>
+            </a:pPr>
+            <a:r>
+              <a:rPr lang="en-US" sz="700" dirty="0">
+                <a:solidFill>
+                  <a:srgbClr val="4488CC"/>
+                </a:solidFill>
+                <a:latin typeface="Calibri" pitchFamily="34" charset="0"/>
+                <a:ea typeface="Calibri" pitchFamily="34" charset="-122"/>
+                <a:cs typeface="Calibri" pitchFamily="34" charset="-120"/>
+              </a:rPr>
+              <a:t>AWS Client VPN</a:t>
+            </a:r>
+            <a:endParaRPr lang="en-US" sz="700" dirty="0"/>
+          </a:p>
+        </p:txBody>
+      </p:sp>
+      <p:sp>
+        <p:nvSpPr>
+          <p:cNvPr id="52" name="Text 47"/>
+          <p:cNvSpPr/>
+          <p:nvPr/>
+        </p:nvSpPr>
+        <p:spPr>
+          <a:xfrm>
+            <a:off x="274320" y="5669280"/>
+            <a:ext cx="9326880" cy="274320"/>
           </a:xfrm>
           <a:prstGeom prst="rect">
             <a:avLst/>
@@ -6801,23 +8467,384 @@
               <a:buNone/>
             </a:pPr>
             <a:r>
-              <a:rPr lang="en-US" sz="1200" b="1" dirty="0">
+              <a:rPr lang="en-US" sz="800" dirty="0">
                 <a:solidFill>
-                  <a:srgbClr val="D0232A"/>
+                  <a:srgbClr val="888888"/>
                 </a:solidFill>
                 <a:latin typeface="Calibri" pitchFamily="34" charset="0"/>
                 <a:ea typeface="Calibri" pitchFamily="34" charset="-122"/>
                 <a:cs typeface="Calibri" pitchFamily="34" charset="-120"/>
               </a:rPr>
-              <a:t>Transfer Family（SFTP 3サーバー）</a:t>
+              <a:t>※ Direct ConnectはGateway VPC（別AWSアカウント）で終端後、VPN GatewayでカスミVPCへルーティング。カスミは10Mbps帯域。</a:t>
             </a:r>
-            <a:endParaRPr lang="en-US" sz="1200" dirty="0"/>
+            <a:endParaRPr lang="en-US" sz="800" dirty="0"/>
+          </a:p>
+        </p:txBody>
+      </p:sp>
+    </p:spTree>
+  </p:cSld>
+  <p:clrMapOvr>
+    <a:masterClrMapping/>
+  </p:clrMapOvr>
+</p:sld>
+</file>
+
+<file path=ppt/slides/slide12.xml><?xml version="1.0" encoding="utf-8"?>
+<p:sld xmlns:a="http://schemas.openxmlformats.org/drawingml/2006/main" xmlns:r="http://schemas.openxmlformats.org/officeDocument/2006/relationships" xmlns:p="http://schemas.openxmlformats.org/presentationml/2006/main">
+  <p:cSld name="Slide 12">
+    <p:bg>
+      <p:bgPr>
+        <a:solidFill>
+          <a:srgbClr val="FFFFFF"/>
+        </a:solidFill>
+      </p:bgPr>
+    </p:bg>
+    <p:spTree>
+      <p:nvGrpSpPr>
+        <p:cNvPr id="1" name=""/>
+        <p:cNvGrpSpPr/>
+        <p:nvPr/>
+      </p:nvGrpSpPr>
+      <p:grpSpPr>
+        <a:xfrm>
+          <a:off x="0" y="0"/>
+          <a:ext cx="0" cy="0"/>
+          <a:chOff x="0" y="0"/>
+          <a:chExt cx="0" cy="0"/>
+        </a:xfrm>
+      </p:grpSpPr>
+      <p:pic>
+        <p:nvPicPr>
+          <p:cNvPr id="2" name="Image 0" descr="/mnt/skills/user/luvina-ppt/assets/decoration_dots.png">    </p:cNvPr>
+          <p:cNvPicPr>
+            <a:picLocks noChangeAspect="1"/>
+          </p:cNvPicPr>
+          <p:nvPr/>
+        </p:nvPicPr>
+        <p:blipFill>
+          <a:blip r:embed="rId1"/>
+          <a:stretch>
+            <a:fillRect/>
+          </a:stretch>
+        </p:blipFill>
+        <p:spPr>
+          <a:xfrm>
+            <a:off x="0" y="0"/>
+            <a:ext cx="3904488" cy="2880360"/>
+          </a:xfrm>
+          <a:prstGeom prst="rect">
+            <a:avLst/>
+          </a:prstGeom>
+        </p:spPr>
+      </p:pic>
+      <p:pic>
+        <p:nvPicPr>
+          <p:cNvPr id="3" name="Image 1" descr="/mnt/skills/user/luvina-ppt/assets/luvina_badge.png">    </p:cNvPr>
+          <p:cNvPicPr>
+            <a:picLocks noChangeAspect="1"/>
+          </p:cNvPicPr>
+          <p:nvPr/>
+        </p:nvPicPr>
+        <p:blipFill>
+          <a:blip r:embed="rId2"/>
+          <a:stretch>
+            <a:fillRect/>
+          </a:stretch>
+        </p:blipFill>
+        <p:spPr>
+          <a:xfrm>
+            <a:off x="109728" y="109728"/>
+            <a:ext cx="1874520" cy="466344"/>
+          </a:xfrm>
+          <a:prstGeom prst="rect">
+            <a:avLst/>
+          </a:prstGeom>
+        </p:spPr>
+      </p:pic>
+      <p:sp>
+        <p:nvSpPr>
+          <p:cNvPr id="4" name="Text 0"/>
+          <p:cNvSpPr/>
+          <p:nvPr/>
+        </p:nvSpPr>
+        <p:spPr>
+          <a:xfrm>
+            <a:off x="438912" y="173736"/>
+            <a:ext cx="1216152" cy="329184"/>
+          </a:xfrm>
+          <a:prstGeom prst="rect">
+            <a:avLst/>
+          </a:prstGeom>
+          <a:noFill/>
+          <a:ln/>
+        </p:spPr>
+        <p:txBody>
+          <a:bodyPr wrap="square" lIns="0" tIns="0" rIns="0" bIns="0" rtlCol="0" anchor="ctr"/>
+          <a:lstStyle/>
+          <a:p>
+            <a:pPr indent="0" marL="0">
+              <a:buNone/>
+            </a:pPr>
+            <a:r>
+              <a:rPr lang="en-US" sz="1600" b="1" dirty="0">
+                <a:solidFill>
+                  <a:srgbClr val="FFFFFF"/>
+                </a:solidFill>
+                <a:latin typeface="Arial Black" pitchFamily="34" charset="0"/>
+                <a:ea typeface="Arial Black" pitchFamily="34" charset="-122"/>
+                <a:cs typeface="Arial Black" pitchFamily="34" charset="-120"/>
+              </a:rPr>
+              <a:t>LUVINA</a:t>
+            </a:r>
+            <a:endParaRPr lang="en-US" sz="1600" dirty="0"/>
+          </a:p>
+        </p:txBody>
+      </p:sp>
+      <p:pic>
+        <p:nvPicPr>
+          <p:cNvPr id="5" name="Image 2" descr="/mnt/skills/user/luvina-ppt/assets/luvina_logo.png">    </p:cNvPr>
+          <p:cNvPicPr>
+            <a:picLocks noChangeAspect="1"/>
+          </p:cNvPicPr>
+          <p:nvPr/>
+        </p:nvPicPr>
+        <p:blipFill>
+          <a:blip r:embed="rId3"/>
+          <a:stretch>
+            <a:fillRect/>
+          </a:stretch>
+        </p:blipFill>
+        <p:spPr>
+          <a:xfrm>
+            <a:off x="8924544" y="109728"/>
+            <a:ext cx="932688" cy="466344"/>
+          </a:xfrm>
+          <a:prstGeom prst="rect">
+            <a:avLst/>
+          </a:prstGeom>
+        </p:spPr>
+      </p:pic>
+      <p:sp>
+        <p:nvSpPr>
+          <p:cNvPr id="6" name="Shape 1"/>
+          <p:cNvSpPr/>
+          <p:nvPr/>
+        </p:nvSpPr>
+        <p:spPr>
+          <a:xfrm>
+            <a:off x="0" y="640080"/>
+            <a:ext cx="9902952" cy="548640"/>
+          </a:xfrm>
+          <a:prstGeom prst="rect">
+            <a:avLst/>
+          </a:prstGeom>
+          <a:solidFill>
+            <a:srgbClr val="D0232A"/>
+          </a:solidFill>
+          <a:ln/>
+        </p:spPr>
+      </p:sp>
+      <p:sp>
+        <p:nvSpPr>
+          <p:cNvPr id="7" name="Text 2"/>
+          <p:cNvSpPr/>
+          <p:nvPr/>
+        </p:nvSpPr>
+        <p:spPr>
+          <a:xfrm>
+            <a:off x="301752" y="786384"/>
+            <a:ext cx="9144000" cy="356616"/>
+          </a:xfrm>
+          <a:prstGeom prst="rect">
+            <a:avLst/>
+          </a:prstGeom>
+          <a:noFill/>
+          <a:ln/>
+        </p:spPr>
+        <p:txBody>
+          <a:bodyPr wrap="square" lIns="0" tIns="0" rIns="0" bIns="0" rtlCol="0" anchor="ctr"/>
+          <a:lstStyle/>
+          <a:p>
+            <a:pPr indent="0" marL="0">
+              <a:buNone/>
+            </a:pPr>
+            <a:r>
+              <a:rPr lang="en-US" sz="2000" b="1" dirty="0">
+                <a:solidFill>
+                  <a:srgbClr val="FFFFFF"/>
+                </a:solidFill>
+                <a:latin typeface="Calibri" pitchFamily="34" charset="0"/>
+                <a:ea typeface="Calibri" pitchFamily="34" charset="-122"/>
+                <a:cs typeface="Calibri" pitchFamily="34" charset="-120"/>
+              </a:rPr>
+              <a:t>9-2. 外部連携 — 通信仕様（NAT変換・通信フロー）</a:t>
+            </a:r>
+            <a:endParaRPr lang="en-US" sz="2000" dirty="0"/>
+          </a:p>
+        </p:txBody>
+      </p:sp>
+      <p:sp>
+        <p:nvSpPr>
+          <p:cNvPr id="8" name="Text 3"/>
+          <p:cNvSpPr/>
+          <p:nvPr/>
+        </p:nvSpPr>
+        <p:spPr>
+          <a:xfrm>
+            <a:off x="493776" y="1307592"/>
+            <a:ext cx="8915400" cy="173736"/>
+          </a:xfrm>
+          <a:prstGeom prst="rect">
+            <a:avLst/>
+          </a:prstGeom>
+          <a:noFill/>
+          <a:ln/>
+        </p:spPr>
+        <p:txBody>
+          <a:bodyPr wrap="square" lIns="0" tIns="0" rIns="0" bIns="0" rtlCol="0" anchor="ctr"/>
+          <a:lstStyle/>
+          <a:p>
+            <a:pPr indent="0" marL="0">
+              <a:buNone/>
+            </a:pPr>
+            <a:r>
+              <a:rPr lang="en-US" sz="1300" dirty="0">
+                <a:solidFill>
+                  <a:srgbClr val="555555"/>
+                </a:solidFill>
+                <a:latin typeface="Calibri" pitchFamily="34" charset="0"/>
+                <a:ea typeface="Calibri" pitchFamily="34" charset="-122"/>
+                <a:cs typeface="Calibri" pitchFamily="34" charset="-120"/>
+              </a:rPr>
+              <a:t>ギフトカード端末↔AFS / ギフト端末↔LuvinaAWS / AWS↔CDSセンタ</a:t>
+            </a:r>
+            <a:endParaRPr lang="en-US" sz="1300" dirty="0"/>
+          </a:p>
+        </p:txBody>
+      </p:sp>
+      <p:sp>
+        <p:nvSpPr>
+          <p:cNvPr id="9" name="Shape 4"/>
+          <p:cNvSpPr/>
+          <p:nvPr/>
+        </p:nvSpPr>
+        <p:spPr>
+          <a:xfrm>
+            <a:off x="0" y="6483096"/>
+            <a:ext cx="9902952" cy="393192"/>
+          </a:xfrm>
+          <a:prstGeom prst="rect">
+            <a:avLst/>
+          </a:prstGeom>
+          <a:solidFill>
+            <a:srgbClr val="D0232A"/>
+          </a:solidFill>
+          <a:ln/>
+        </p:spPr>
+      </p:sp>
+      <p:sp>
+        <p:nvSpPr>
+          <p:cNvPr id="10" name="Text 5"/>
+          <p:cNvSpPr/>
+          <p:nvPr/>
+        </p:nvSpPr>
+        <p:spPr>
+          <a:xfrm>
+            <a:off x="109728" y="6583680"/>
+            <a:ext cx="457200" cy="219456"/>
+          </a:xfrm>
+          <a:prstGeom prst="rect">
+            <a:avLst/>
+          </a:prstGeom>
+          <a:noFill/>
+          <a:ln/>
+        </p:spPr>
+        <p:txBody>
+          <a:bodyPr wrap="square" lIns="0" tIns="0" rIns="0" bIns="0" rtlCol="0" anchor="ctr"/>
+          <a:lstStyle/>
+          <a:p>
+            <a:pPr indent="0" marL="0">
+              <a:buNone/>
+            </a:pPr>
+            <a:r>
+              <a:rPr lang="en-US" sz="1000" dirty="0">
+                <a:solidFill>
+                  <a:srgbClr val="FFFFFF"/>
+                </a:solidFill>
+              </a:rPr>
+              <a:t>12</a:t>
+            </a:r>
+            <a:endParaRPr lang="en-US" sz="1000" dirty="0"/>
+          </a:p>
+        </p:txBody>
+      </p:sp>
+      <p:sp>
+        <p:nvSpPr>
+          <p:cNvPr id="11" name="Shape 6"/>
+          <p:cNvSpPr/>
+          <p:nvPr/>
+        </p:nvSpPr>
+        <p:spPr>
+          <a:xfrm>
+            <a:off x="274320" y="1572768"/>
+            <a:ext cx="9354312" cy="228600"/>
+          </a:xfrm>
+          <a:prstGeom prst="rect">
+            <a:avLst/>
+          </a:prstGeom>
+          <a:solidFill>
+            <a:srgbClr val="D0232A"/>
+          </a:solidFill>
+          <a:ln w="12700">
+            <a:solidFill>
+              <a:srgbClr val="D0232A"/>
+            </a:solidFill>
+            <a:prstDash val="solid"/>
+          </a:ln>
+        </p:spPr>
+      </p:sp>
+      <p:sp>
+        <p:nvSpPr>
+          <p:cNvPr id="12" name="Text 7"/>
+          <p:cNvSpPr/>
+          <p:nvPr/>
+        </p:nvSpPr>
+        <p:spPr>
+          <a:xfrm>
+            <a:off x="274320" y="1572768"/>
+            <a:ext cx="9354312" cy="228600"/>
+          </a:xfrm>
+          <a:prstGeom prst="rect">
+            <a:avLst/>
+          </a:prstGeom>
+          <a:noFill/>
+          <a:ln/>
+        </p:spPr>
+        <p:txBody>
+          <a:bodyPr wrap="square" lIns="0" tIns="0" rIns="76200" bIns="0" rtlCol="0" anchor="ctr"/>
+          <a:lstStyle/>
+          <a:p>
+            <a:pPr algn="l" indent="0" marL="0">
+              <a:buNone/>
+            </a:pPr>
+            <a:r>
+              <a:rPr lang="en-US" sz="1000" b="1" dirty="0">
+                <a:solidFill>
+                  <a:srgbClr val="FFFFFF"/>
+                </a:solidFill>
+                <a:latin typeface="Calibri" pitchFamily="34" charset="0"/>
+                <a:ea typeface="Calibri" pitchFamily="34" charset="-122"/>
+                <a:cs typeface="Calibri" pitchFamily="34" charset="-120"/>
+              </a:rPr>
+              <a:t>① LuvinaAWS環境 → AFSオーソリサーバーへのTCPIP＋ソケット通信</a:t>
+            </a:r>
+            <a:endParaRPr lang="en-US" sz="1000" dirty="0"/>
           </a:p>
         </p:txBody>
       </p:sp>
       <p:graphicFrame>
         <p:nvGraphicFramePr>
-          <p:cNvPr id="12" name="Table 0"/>
+          <p:cNvPr id="13" name="Table 0"/>
           <p:cNvGraphicFramePr>
             <a:graphicFrameLocks noGrp="1"/>
           </p:cNvGraphicFramePr>
@@ -6830,37 +8857,38 @@
           </p:nvPr>
         </p:nvGraphicFramePr>
         <p:xfrm>
-          <a:off x="365760" y="1847088"/>
-          <a:ext cx="4389120" cy="914400"/>
+          <a:off x="274320" y="1828800"/>
+          <a:ext cx="9354312" cy="914400"/>
         </p:xfrm>
         <a:graphic>
           <a:graphicData uri="http://schemas.openxmlformats.org/drawingml/2006/table">
             <a:tbl>
               <a:tblPr/>
               <a:tblGrid>
-                <a:gridCol w="2194560"/>
-                <a:gridCol w="731520"/>
-                <a:gridCol w="1463040"/>
+                <a:gridCol w="2011680"/>
+                <a:gridCol w="1828800"/>
+                <a:gridCol w="1828800"/>
+                <a:gridCol w="3685032"/>
               </a:tblGrid>
-              <a:tr h="347472">
+              <a:tr h="411480">
                 <a:tc>
                   <a:txBody>
                     <a:bodyPr/>
                     <a:lstStyle/>
                     <a:p>
-                      <a:pPr indent="0" marL="0">
+                      <a:pPr algn="ctr" indent="0" marL="0">
                         <a:buNone/>
                       </a:pPr>
                       <a:r>
                         <a:rPr lang="en-US" sz="900" b="1" dirty="0">
                           <a:solidFill>
-                            <a:srgbClr val="FFFFFF"/>
+                            <a:srgbClr val="D0232A"/>
                           </a:solidFill>
                           <a:latin typeface="Calibri" pitchFamily="34" charset="0"/>
                           <a:ea typeface="Calibri" pitchFamily="34" charset="-122"/>
                           <a:cs typeface="Calibri" pitchFamily="34" charset="-120"/>
                         </a:rPr>
-                        <a:t>サーバーID</a:t>
+                        <a:t>Luvinaリソース</a:t>
                       </a:r>
                       <a:endParaRPr lang="en-US" sz="900" dirty="0">
                         <a:latin typeface="Calibri" charset="0"/>
@@ -6907,7 +8935,7 @@
                       <a:tailEnd type="none" w="med" len="med"/>
                     </a:lnB>
                     <a:solidFill>
-                      <a:srgbClr val="D0232A"/>
+                      <a:srgbClr val="FFE8E8"/>
                     </a:solidFill>
                   </a:tcPr>
                 </a:tc>
@@ -6916,19 +8944,19 @@
                     <a:bodyPr/>
                     <a:lstStyle/>
                     <a:p>
-                      <a:pPr indent="0" marL="0">
+                      <a:pPr algn="ctr" indent="0" marL="0">
                         <a:buNone/>
                       </a:pPr>
                       <a:r>
                         <a:rPr lang="en-US" sz="900" b="1" dirty="0">
                           <a:solidFill>
-                            <a:srgbClr val="FFFFFF"/>
+                            <a:srgbClr val="D0232A"/>
                           </a:solidFill>
                           <a:latin typeface="Calibri" pitchFamily="34" charset="0"/>
                           <a:ea typeface="Calibri" pitchFamily="34" charset="-122"/>
                           <a:cs typeface="Calibri" pitchFamily="34" charset="-120"/>
                         </a:rPr>
-                        <a:t>状態</a:t>
+                        <a:t>USMH側IP（送信元）</a:t>
                       </a:r>
                       <a:endParaRPr lang="en-US" sz="900" dirty="0">
                         <a:latin typeface="Calibri" charset="0"/>
@@ -6975,7 +9003,7 @@
                       <a:tailEnd type="none" w="med" len="med"/>
                     </a:lnB>
                     <a:solidFill>
-                      <a:srgbClr val="D0232A"/>
+                      <a:srgbClr val="FFE8E8"/>
                     </a:solidFill>
                   </a:tcPr>
                 </a:tc>
@@ -6984,19 +9012,19 @@
                     <a:bodyPr/>
                     <a:lstStyle/>
                     <a:p>
-                      <a:pPr indent="0" marL="0">
+                      <a:pPr algn="ctr" indent="0" marL="0">
                         <a:buNone/>
                       </a:pPr>
                       <a:r>
                         <a:rPr lang="en-US" sz="900" b="1" dirty="0">
                           <a:solidFill>
-                            <a:srgbClr val="FFFFFF"/>
+                            <a:srgbClr val="D0232A"/>
                           </a:solidFill>
                           <a:latin typeface="Calibri" pitchFamily="34" charset="0"/>
                           <a:ea typeface="Calibri" pitchFamily="34" charset="-122"/>
                           <a:cs typeface="Calibri" pitchFamily="34" charset="-120"/>
                         </a:rPr>
-                        <a:t>Endpoint/Domain</a:t>
+                        <a:t>カスミ側IP（NAT後）</a:t>
                       </a:r>
                       <a:endParaRPr lang="en-US" sz="900" dirty="0">
                         <a:latin typeface="Calibri" charset="0"/>
@@ -7043,12 +9071,80 @@
                       <a:tailEnd type="none" w="med" len="med"/>
                     </a:lnB>
                     <a:solidFill>
-                      <a:srgbClr val="D0232A"/>
+                      <a:srgbClr val="FFD0D0"/>
+                    </a:solidFill>
+                  </a:tcPr>
+                </a:tc>
+                <a:tc>
+                  <a:txBody>
+                    <a:bodyPr/>
+                    <a:lstStyle/>
+                    <a:p>
+                      <a:pPr algn="ctr" indent="0" marL="0">
+                        <a:buNone/>
+                      </a:pPr>
+                      <a:r>
+                        <a:rPr lang="en-US" sz="900" b="1" dirty="0">
+                          <a:solidFill>
+                            <a:srgbClr val="D0232A"/>
+                          </a:solidFill>
+                          <a:latin typeface="Calibri" pitchFamily="34" charset="0"/>
+                          <a:ea typeface="Calibri" pitchFamily="34" charset="-122"/>
+                          <a:cs typeface="Calibri" pitchFamily="34" charset="-120"/>
+                        </a:rPr>
+                        <a:t>AFS オーソリサーバー</a:t>
+                      </a:r>
+                      <a:endParaRPr lang="en-US" sz="900" dirty="0">
+                        <a:latin typeface="Calibri" charset="0"/>
+                        <a:ea typeface="Calibri" charset="0"/>
+                        <a:cs typeface="Calibri" charset="0"/>
+                      </a:endParaRPr>
+                    </a:p>
+                  </a:txBody>
+                  <a:tcPr marL="91440" marR="91440" marT="45720" marB="45720">
+                    <a:lnL w="6350" cap="flat" cmpd="sng" algn="ctr">
+                      <a:solidFill>
+                        <a:srgbClr val="CCCCCC"/>
+                      </a:solidFill>
+                      <a:prstDash val="solid"/>
+                      <a:round/>
+                      <a:headEnd type="none" w="med" len="med"/>
+                      <a:tailEnd type="none" w="med" len="med"/>
+                    </a:lnL>
+                    <a:lnR w="6350" cap="flat" cmpd="sng" algn="ctr">
+                      <a:solidFill>
+                        <a:srgbClr val="CCCCCC"/>
+                      </a:solidFill>
+                      <a:prstDash val="solid"/>
+                      <a:round/>
+                      <a:headEnd type="none" w="med" len="med"/>
+                      <a:tailEnd type="none" w="med" len="med"/>
+                    </a:lnR>
+                    <a:lnT w="6350" cap="flat" cmpd="sng" algn="ctr">
+                      <a:solidFill>
+                        <a:srgbClr val="CCCCCC"/>
+                      </a:solidFill>
+                      <a:prstDash val="solid"/>
+                      <a:round/>
+                      <a:headEnd type="none" w="med" len="med"/>
+                      <a:tailEnd type="none" w="med" len="med"/>
+                    </a:lnT>
+                    <a:lnB w="6350" cap="flat" cmpd="sng" algn="ctr">
+                      <a:solidFill>
+                        <a:srgbClr val="CCCCCC"/>
+                      </a:solidFill>
+                      <a:prstDash val="solid"/>
+                      <a:round/>
+                      <a:headEnd type="none" w="med" len="med"/>
+                      <a:tailEnd type="none" w="med" len="med"/>
+                    </a:lnB>
+                    <a:solidFill>
+                      <a:srgbClr val="FFD0D0"/>
                     </a:solidFill>
                   </a:tcPr>
                 </a:tc>
               </a:tr>
-              <a:tr h="347472">
+              <a:tr h="411480">
                 <a:tc>
                   <a:txBody>
                     <a:bodyPr/>
@@ -7066,7 +9162,28 @@
                           <a:ea typeface="Calibri" pitchFamily="34" charset="-122"/>
                           <a:cs typeface="Calibri" pitchFamily="34" charset="-120"/>
                         </a:rPr>
-                        <a:t>s-2a4905e8210f48248</a:t>
+                        <a:t>ギフト端末(本番)</a:t>
+                      </a:r>
+                      <a:endParaRPr lang="en-US" sz="900" dirty="0">
+                        <a:latin typeface="Calibri" charset="0"/>
+                        <a:ea typeface="Calibri" charset="0"/>
+                        <a:cs typeface="Calibri" charset="0"/>
+                      </a:endParaRPr>
+                    </a:p>
+                    <a:p>
+                      <a:pPr indent="0" marL="0">
+                        <a:buNone/>
+                      </a:pPr>
+                      <a:r>
+                        <a:rPr lang="en-US" sz="900" dirty="0">
+                          <a:solidFill>
+                            <a:srgbClr val="2D2D2D"/>
+                          </a:solidFill>
+                          <a:latin typeface="Calibri" pitchFamily="34" charset="0"/>
+                          <a:ea typeface="Calibri" pitchFamily="34" charset="-122"/>
+                          <a:cs typeface="Calibri" pitchFamily="34" charset="-120"/>
+                        </a:rPr>
+                        <a:t>10.238.2.39</a:t>
                       </a:r>
                       <a:endParaRPr lang="en-US" sz="900" dirty="0">
                         <a:latin typeface="Calibri" charset="0"/>
@@ -7112,9 +9229,6 @@
                       <a:headEnd type="none" w="med" len="med"/>
                       <a:tailEnd type="none" w="med" len="med"/>
                     </a:lnB>
-                    <a:solidFill>
-                      <a:srgbClr val="FFFFFF"/>
-                    </a:solidFill>
                   </a:tcPr>
                 </a:tc>
                 <a:tc>
@@ -7134,7 +9248,7 @@
                           <a:ea typeface="Calibri" pitchFamily="34" charset="-122"/>
                           <a:cs typeface="Calibri" pitchFamily="34" charset="-120"/>
                         </a:rPr>
-                        <a:t>ONLINE</a:t>
+                        <a:t>10.156.96.220</a:t>
                       </a:r>
                       <a:endParaRPr lang="en-US" sz="900" dirty="0">
                         <a:latin typeface="Calibri" charset="0"/>
@@ -7180,11 +9294,167 @@
                       <a:headEnd type="none" w="med" len="med"/>
                       <a:tailEnd type="none" w="med" len="med"/>
                     </a:lnB>
+                  </a:tcPr>
+                </a:tc>
+                <a:tc>
+                  <a:txBody>
+                    <a:bodyPr/>
+                    <a:lstStyle/>
+                    <a:p>
+                      <a:pPr indent="0" marL="0">
+                        <a:buNone/>
+                      </a:pPr>
+                      <a:r>
+                        <a:rPr lang="en-US" sz="900" dirty="0">
+                          <a:solidFill>
+                            <a:srgbClr val="D0232A"/>
+                          </a:solidFill>
+                          <a:latin typeface="Calibri" pitchFamily="34" charset="0"/>
+                          <a:ea typeface="Calibri" pitchFamily="34" charset="-122"/>
+                          <a:cs typeface="Calibri" pitchFamily="34" charset="-120"/>
+                        </a:rPr>
+                        <a:t>192.168.134.70</a:t>
+                      </a:r>
+                      <a:endParaRPr lang="en-US" sz="900" dirty="0">
+                        <a:latin typeface="Calibri" charset="0"/>
+                        <a:ea typeface="Calibri" charset="0"/>
+                        <a:cs typeface="Calibri" charset="0"/>
+                      </a:endParaRPr>
+                    </a:p>
+                  </a:txBody>
+                  <a:tcPr marL="91440" marR="91440" marT="45720" marB="45720">
+                    <a:lnL w="6350" cap="flat" cmpd="sng" algn="ctr">
+                      <a:solidFill>
+                        <a:srgbClr val="CCCCCC"/>
+                      </a:solidFill>
+                      <a:prstDash val="solid"/>
+                      <a:round/>
+                      <a:headEnd type="none" w="med" len="med"/>
+                      <a:tailEnd type="none" w="med" len="med"/>
+                    </a:lnL>
+                    <a:lnR w="6350" cap="flat" cmpd="sng" algn="ctr">
+                      <a:solidFill>
+                        <a:srgbClr val="CCCCCC"/>
+                      </a:solidFill>
+                      <a:prstDash val="solid"/>
+                      <a:round/>
+                      <a:headEnd type="none" w="med" len="med"/>
+                      <a:tailEnd type="none" w="med" len="med"/>
+                    </a:lnR>
+                    <a:lnT w="6350" cap="flat" cmpd="sng" algn="ctr">
+                      <a:solidFill>
+                        <a:srgbClr val="CCCCCC"/>
+                      </a:solidFill>
+                      <a:prstDash val="solid"/>
+                      <a:round/>
+                      <a:headEnd type="none" w="med" len="med"/>
+                      <a:tailEnd type="none" w="med" len="med"/>
+                    </a:lnT>
+                    <a:lnB w="6350" cap="flat" cmpd="sng" algn="ctr">
+                      <a:solidFill>
+                        <a:srgbClr val="CCCCCC"/>
+                      </a:solidFill>
+                      <a:prstDash val="solid"/>
+                      <a:round/>
+                      <a:headEnd type="none" w="med" len="med"/>
+                      <a:tailEnd type="none" w="med" len="med"/>
+                    </a:lnB>
                     <a:solidFill>
-                      <a:srgbClr val="FFFFFF"/>
+                      <a:srgbClr val="FFF0F0"/>
                     </a:solidFill>
                   </a:tcPr>
                 </a:tc>
+                <a:tc>
+                  <a:txBody>
+                    <a:bodyPr/>
+                    <a:lstStyle/>
+                    <a:p>
+                      <a:pPr indent="0" marL="0">
+                        <a:buNone/>
+                      </a:pPr>
+                      <a:r>
+                        <a:rPr lang="en-US" sz="900" b="1" dirty="0">
+                          <a:solidFill>
+                            <a:srgbClr val="D0232A"/>
+                          </a:solidFill>
+                          <a:latin typeface="Calibri" pitchFamily="34" charset="0"/>
+                          <a:ea typeface="Calibri" pitchFamily="34" charset="-122"/>
+                          <a:cs typeface="Calibri" pitchFamily="34" charset="-120"/>
+                        </a:rPr>
+                        <a:t>オーソリサーバー本番</a:t>
+                      </a:r>
+                      <a:endParaRPr lang="en-US" sz="900" dirty="0">
+                        <a:latin typeface="Calibri" charset="0"/>
+                        <a:ea typeface="Calibri" charset="0"/>
+                        <a:cs typeface="Calibri" charset="0"/>
+                      </a:endParaRPr>
+                    </a:p>
+                    <a:p>
+                      <a:pPr indent="0" marL="0">
+                        <a:buNone/>
+                      </a:pPr>
+                      <a:r>
+                        <a:rPr lang="en-US" sz="900" b="1" dirty="0">
+                          <a:solidFill>
+                            <a:srgbClr val="D0232A"/>
+                          </a:solidFill>
+                          <a:latin typeface="Calibri" pitchFamily="34" charset="0"/>
+                          <a:ea typeface="Calibri" pitchFamily="34" charset="-122"/>
+                          <a:cs typeface="Calibri" pitchFamily="34" charset="-120"/>
+                        </a:rPr>
+                        <a:t>192.168.60.10:1501-1508</a:t>
+                      </a:r>
+                      <a:endParaRPr lang="en-US" sz="900" dirty="0">
+                        <a:latin typeface="Calibri" charset="0"/>
+                        <a:ea typeface="Calibri" charset="0"/>
+                        <a:cs typeface="Calibri" charset="0"/>
+                      </a:endParaRPr>
+                    </a:p>
+                  </a:txBody>
+                  <a:tcPr marL="91440" marR="91440" marT="45720" marB="45720">
+                    <a:lnL w="6350" cap="flat" cmpd="sng" algn="ctr">
+                      <a:solidFill>
+                        <a:srgbClr val="CCCCCC"/>
+                      </a:solidFill>
+                      <a:prstDash val="solid"/>
+                      <a:round/>
+                      <a:headEnd type="none" w="med" len="med"/>
+                      <a:tailEnd type="none" w="med" len="med"/>
+                    </a:lnL>
+                    <a:lnR w="6350" cap="flat" cmpd="sng" algn="ctr">
+                      <a:solidFill>
+                        <a:srgbClr val="CCCCCC"/>
+                      </a:solidFill>
+                      <a:prstDash val="solid"/>
+                      <a:round/>
+                      <a:headEnd type="none" w="med" len="med"/>
+                      <a:tailEnd type="none" w="med" len="med"/>
+                    </a:lnR>
+                    <a:lnT w="6350" cap="flat" cmpd="sng" algn="ctr">
+                      <a:solidFill>
+                        <a:srgbClr val="CCCCCC"/>
+                      </a:solidFill>
+                      <a:prstDash val="solid"/>
+                      <a:round/>
+                      <a:headEnd type="none" w="med" len="med"/>
+                      <a:tailEnd type="none" w="med" len="med"/>
+                    </a:lnT>
+                    <a:lnB w="6350" cap="flat" cmpd="sng" algn="ctr">
+                      <a:solidFill>
+                        <a:srgbClr val="CCCCCC"/>
+                      </a:solidFill>
+                      <a:prstDash val="solid"/>
+                      <a:round/>
+                      <a:headEnd type="none" w="med" len="med"/>
+                      <a:tailEnd type="none" w="med" len="med"/>
+                    </a:lnB>
+                    <a:solidFill>
+                      <a:srgbClr val="FFF0F0"/>
+                    </a:solidFill>
+                  </a:tcPr>
+                </a:tc>
+              </a:tr>
+              <a:tr h="411480">
                 <a:tc>
                   <a:txBody>
                     <a:bodyPr/>
@@ -7202,7 +9472,7 @@
                           <a:ea typeface="Calibri" pitchFamily="34" charset="-122"/>
                           <a:cs typeface="Calibri" pitchFamily="34" charset="-120"/>
                         </a:rPr>
-                        <a:t>VPC / S3</a:t>
+                        <a:t>ギフト端末(開発)</a:t>
                       </a:r>
                       <a:endParaRPr lang="en-US" sz="900" dirty="0">
                         <a:latin typeface="Calibri" charset="0"/>
@@ -7210,55 +9480,6 @@
                         <a:cs typeface="Calibri" charset="0"/>
                       </a:endParaRPr>
                     </a:p>
-                  </a:txBody>
-                  <a:tcPr marL="91440" marR="91440" marT="45720" marB="45720">
-                    <a:lnL w="6350" cap="flat" cmpd="sng" algn="ctr">
-                      <a:solidFill>
-                        <a:srgbClr val="CCCCCC"/>
-                      </a:solidFill>
-                      <a:prstDash val="solid"/>
-                      <a:round/>
-                      <a:headEnd type="none" w="med" len="med"/>
-                      <a:tailEnd type="none" w="med" len="med"/>
-                    </a:lnL>
-                    <a:lnR w="6350" cap="flat" cmpd="sng" algn="ctr">
-                      <a:solidFill>
-                        <a:srgbClr val="CCCCCC"/>
-                      </a:solidFill>
-                      <a:prstDash val="solid"/>
-                      <a:round/>
-                      <a:headEnd type="none" w="med" len="med"/>
-                      <a:tailEnd type="none" w="med" len="med"/>
-                    </a:lnR>
-                    <a:lnT w="6350" cap="flat" cmpd="sng" algn="ctr">
-                      <a:solidFill>
-                        <a:srgbClr val="CCCCCC"/>
-                      </a:solidFill>
-                      <a:prstDash val="solid"/>
-                      <a:round/>
-                      <a:headEnd type="none" w="med" len="med"/>
-                      <a:tailEnd type="none" w="med" len="med"/>
-                    </a:lnT>
-                    <a:lnB w="6350" cap="flat" cmpd="sng" algn="ctr">
-                      <a:solidFill>
-                        <a:srgbClr val="CCCCCC"/>
-                      </a:solidFill>
-                      <a:prstDash val="solid"/>
-                      <a:round/>
-                      <a:headEnd type="none" w="med" len="med"/>
-                      <a:tailEnd type="none" w="med" len="med"/>
-                    </a:lnB>
-                    <a:solidFill>
-                      <a:srgbClr val="FFFFFF"/>
-                    </a:solidFill>
-                  </a:tcPr>
-                </a:tc>
-              </a:tr>
-              <a:tr h="347472">
-                <a:tc>
-                  <a:txBody>
-                    <a:bodyPr/>
-                    <a:lstStyle/>
                     <a:p>
                       <a:pPr indent="0" marL="0">
                         <a:buNone/>
@@ -7272,7 +9493,7 @@
                           <a:ea typeface="Calibri" pitchFamily="34" charset="-122"/>
                           <a:cs typeface="Calibri" pitchFamily="34" charset="-120"/>
                         </a:rPr>
-                        <a:t>s-5546031218784c4ba</a:t>
+                        <a:t>10.239.2.4</a:t>
                       </a:r>
                       <a:endParaRPr lang="en-US" sz="900" dirty="0">
                         <a:latin typeface="Calibri" charset="0"/>
@@ -7340,7 +9561,956 @@
                           <a:ea typeface="Calibri" pitchFamily="34" charset="-122"/>
                           <a:cs typeface="Calibri" pitchFamily="34" charset="-120"/>
                         </a:rPr>
-                        <a:t>ONLINE</a:t>
+                        <a:t>10.156.96.221</a:t>
+                      </a:r>
+                      <a:endParaRPr lang="en-US" sz="900" dirty="0">
+                        <a:latin typeface="Calibri" charset="0"/>
+                        <a:ea typeface="Calibri" charset="0"/>
+                        <a:cs typeface="Calibri" charset="0"/>
+                      </a:endParaRPr>
+                    </a:p>
+                  </a:txBody>
+                  <a:tcPr marL="91440" marR="91440" marT="45720" marB="45720">
+                    <a:lnL w="6350" cap="flat" cmpd="sng" algn="ctr">
+                      <a:solidFill>
+                        <a:srgbClr val="CCCCCC"/>
+                      </a:solidFill>
+                      <a:prstDash val="solid"/>
+                      <a:round/>
+                      <a:headEnd type="none" w="med" len="med"/>
+                      <a:tailEnd type="none" w="med" len="med"/>
+                    </a:lnL>
+                    <a:lnR w="6350" cap="flat" cmpd="sng" algn="ctr">
+                      <a:solidFill>
+                        <a:srgbClr val="CCCCCC"/>
+                      </a:solidFill>
+                      <a:prstDash val="solid"/>
+                      <a:round/>
+                      <a:headEnd type="none" w="med" len="med"/>
+                      <a:tailEnd type="none" w="med" len="med"/>
+                    </a:lnR>
+                    <a:lnT w="6350" cap="flat" cmpd="sng" algn="ctr">
+                      <a:solidFill>
+                        <a:srgbClr val="CCCCCC"/>
+                      </a:solidFill>
+                      <a:prstDash val="solid"/>
+                      <a:round/>
+                      <a:headEnd type="none" w="med" len="med"/>
+                      <a:tailEnd type="none" w="med" len="med"/>
+                    </a:lnT>
+                    <a:lnB w="6350" cap="flat" cmpd="sng" algn="ctr">
+                      <a:solidFill>
+                        <a:srgbClr val="CCCCCC"/>
+                      </a:solidFill>
+                      <a:prstDash val="solid"/>
+                      <a:round/>
+                      <a:headEnd type="none" w="med" len="med"/>
+                      <a:tailEnd type="none" w="med" len="med"/>
+                    </a:lnB>
+                    <a:solidFill>
+                      <a:srgbClr val="F5F5F5"/>
+                    </a:solidFill>
+                  </a:tcPr>
+                </a:tc>
+                <a:tc>
+                  <a:txBody>
+                    <a:bodyPr/>
+                    <a:lstStyle/>
+                    <a:p>
+                      <a:pPr indent="0" marL="0">
+                        <a:buNone/>
+                      </a:pPr>
+                      <a:r>
+                        <a:rPr lang="en-US" sz="900" dirty="0">
+                          <a:solidFill>
+                            <a:srgbClr val="D0232A"/>
+                          </a:solidFill>
+                          <a:latin typeface="Calibri" pitchFamily="34" charset="0"/>
+                          <a:ea typeface="Calibri" pitchFamily="34" charset="-122"/>
+                          <a:cs typeface="Calibri" pitchFamily="34" charset="-120"/>
+                        </a:rPr>
+                        <a:t>192.168.134.70</a:t>
+                      </a:r>
+                      <a:endParaRPr lang="en-US" sz="900" dirty="0">
+                        <a:latin typeface="Calibri" charset="0"/>
+                        <a:ea typeface="Calibri" charset="0"/>
+                        <a:cs typeface="Calibri" charset="0"/>
+                      </a:endParaRPr>
+                    </a:p>
+                  </a:txBody>
+                  <a:tcPr marL="91440" marR="91440" marT="45720" marB="45720">
+                    <a:lnL w="6350" cap="flat" cmpd="sng" algn="ctr">
+                      <a:solidFill>
+                        <a:srgbClr val="CCCCCC"/>
+                      </a:solidFill>
+                      <a:prstDash val="solid"/>
+                      <a:round/>
+                      <a:headEnd type="none" w="med" len="med"/>
+                      <a:tailEnd type="none" w="med" len="med"/>
+                    </a:lnL>
+                    <a:lnR w="6350" cap="flat" cmpd="sng" algn="ctr">
+                      <a:solidFill>
+                        <a:srgbClr val="CCCCCC"/>
+                      </a:solidFill>
+                      <a:prstDash val="solid"/>
+                      <a:round/>
+                      <a:headEnd type="none" w="med" len="med"/>
+                      <a:tailEnd type="none" w="med" len="med"/>
+                    </a:lnR>
+                    <a:lnT w="6350" cap="flat" cmpd="sng" algn="ctr">
+                      <a:solidFill>
+                        <a:srgbClr val="CCCCCC"/>
+                      </a:solidFill>
+                      <a:prstDash val="solid"/>
+                      <a:round/>
+                      <a:headEnd type="none" w="med" len="med"/>
+                      <a:tailEnd type="none" w="med" len="med"/>
+                    </a:lnT>
+                    <a:lnB w="6350" cap="flat" cmpd="sng" algn="ctr">
+                      <a:solidFill>
+                        <a:srgbClr val="CCCCCC"/>
+                      </a:solidFill>
+                      <a:prstDash val="solid"/>
+                      <a:round/>
+                      <a:headEnd type="none" w="med" len="med"/>
+                      <a:tailEnd type="none" w="med" len="med"/>
+                    </a:lnB>
+                    <a:solidFill>
+                      <a:srgbClr val="FFF5F5"/>
+                    </a:solidFill>
+                  </a:tcPr>
+                </a:tc>
+                <a:tc>
+                  <a:txBody>
+                    <a:bodyPr/>
+                    <a:lstStyle/>
+                    <a:p>
+                      <a:pPr indent="0" marL="0">
+                        <a:buNone/>
+                      </a:pPr>
+                      <a:r>
+                        <a:rPr lang="en-US" sz="900" b="1" dirty="0">
+                          <a:solidFill>
+                            <a:srgbClr val="D0232A"/>
+                          </a:solidFill>
+                          <a:latin typeface="Calibri" pitchFamily="34" charset="0"/>
+                          <a:ea typeface="Calibri" pitchFamily="34" charset="-122"/>
+                          <a:cs typeface="Calibri" pitchFamily="34" charset="-120"/>
+                        </a:rPr>
+                        <a:t>オーソリサーバー開発</a:t>
+                      </a:r>
+                      <a:endParaRPr lang="en-US" sz="900" dirty="0">
+                        <a:latin typeface="Calibri" charset="0"/>
+                        <a:ea typeface="Calibri" charset="0"/>
+                        <a:cs typeface="Calibri" charset="0"/>
+                      </a:endParaRPr>
+                    </a:p>
+                    <a:p>
+                      <a:pPr indent="0" marL="0">
+                        <a:buNone/>
+                      </a:pPr>
+                      <a:r>
+                        <a:rPr lang="en-US" sz="900" b="1" dirty="0">
+                          <a:solidFill>
+                            <a:srgbClr val="D0232A"/>
+                          </a:solidFill>
+                          <a:latin typeface="Calibri" pitchFamily="34" charset="0"/>
+                          <a:ea typeface="Calibri" pitchFamily="34" charset="-122"/>
+                          <a:cs typeface="Calibri" pitchFamily="34" charset="-120"/>
+                        </a:rPr>
+                        <a:t>192.168.60.100:1501-1508</a:t>
+                      </a:r>
+                      <a:endParaRPr lang="en-US" sz="900" dirty="0">
+                        <a:latin typeface="Calibri" charset="0"/>
+                        <a:ea typeface="Calibri" charset="0"/>
+                        <a:cs typeface="Calibri" charset="0"/>
+                      </a:endParaRPr>
+                    </a:p>
+                  </a:txBody>
+                  <a:tcPr marL="91440" marR="91440" marT="45720" marB="45720">
+                    <a:lnL w="6350" cap="flat" cmpd="sng" algn="ctr">
+                      <a:solidFill>
+                        <a:srgbClr val="CCCCCC"/>
+                      </a:solidFill>
+                      <a:prstDash val="solid"/>
+                      <a:round/>
+                      <a:headEnd type="none" w="med" len="med"/>
+                      <a:tailEnd type="none" w="med" len="med"/>
+                    </a:lnL>
+                    <a:lnR w="6350" cap="flat" cmpd="sng" algn="ctr">
+                      <a:solidFill>
+                        <a:srgbClr val="CCCCCC"/>
+                      </a:solidFill>
+                      <a:prstDash val="solid"/>
+                      <a:round/>
+                      <a:headEnd type="none" w="med" len="med"/>
+                      <a:tailEnd type="none" w="med" len="med"/>
+                    </a:lnR>
+                    <a:lnT w="6350" cap="flat" cmpd="sng" algn="ctr">
+                      <a:solidFill>
+                        <a:srgbClr val="CCCCCC"/>
+                      </a:solidFill>
+                      <a:prstDash val="solid"/>
+                      <a:round/>
+                      <a:headEnd type="none" w="med" len="med"/>
+                      <a:tailEnd type="none" w="med" len="med"/>
+                    </a:lnT>
+                    <a:lnB w="6350" cap="flat" cmpd="sng" algn="ctr">
+                      <a:solidFill>
+                        <a:srgbClr val="CCCCCC"/>
+                      </a:solidFill>
+                      <a:prstDash val="solid"/>
+                      <a:round/>
+                      <a:headEnd type="none" w="med" len="med"/>
+                      <a:tailEnd type="none" w="med" len="med"/>
+                    </a:lnB>
+                    <a:solidFill>
+                      <a:srgbClr val="FFF5F5"/>
+                    </a:solidFill>
+                  </a:tcPr>
+                </a:tc>
+              </a:tr>
+            </a:tbl>
+          </a:graphicData>
+        </a:graphic>
+      </p:graphicFrame>
+      <p:sp>
+        <p:nvSpPr>
+          <p:cNvPr id="14" name="Shape 8"/>
+          <p:cNvSpPr/>
+          <p:nvPr/>
+        </p:nvSpPr>
+        <p:spPr>
+          <a:xfrm>
+            <a:off x="274320" y="2788920"/>
+            <a:ext cx="9354312" cy="228600"/>
+          </a:xfrm>
+          <a:prstGeom prst="rect">
+            <a:avLst/>
+          </a:prstGeom>
+          <a:solidFill>
+            <a:srgbClr val="E8A040"/>
+          </a:solidFill>
+          <a:ln w="12700">
+            <a:solidFill>
+              <a:srgbClr val="E8A040"/>
+            </a:solidFill>
+            <a:prstDash val="solid"/>
+          </a:ln>
+        </p:spPr>
+      </p:sp>
+      <p:sp>
+        <p:nvSpPr>
+          <p:cNvPr id="15" name="Text 9"/>
+          <p:cNvSpPr/>
+          <p:nvPr/>
+        </p:nvSpPr>
+        <p:spPr>
+          <a:xfrm>
+            <a:off x="274320" y="2788920"/>
+            <a:ext cx="9354312" cy="228600"/>
+          </a:xfrm>
+          <a:prstGeom prst="rect">
+            <a:avLst/>
+          </a:prstGeom>
+          <a:noFill/>
+          <a:ln/>
+        </p:spPr>
+        <p:txBody>
+          <a:bodyPr wrap="square" lIns="0" tIns="0" rIns="76200" bIns="0" rtlCol="0" anchor="ctr"/>
+          <a:lstStyle/>
+          <a:p>
+            <a:pPr algn="l" indent="0" marL="0">
+              <a:buNone/>
+            </a:pPr>
+            <a:r>
+              <a:rPr lang="en-US" sz="1000" b="1" dirty="0">
+                <a:solidFill>
+                  <a:srgbClr val="FFFFFF"/>
+                </a:solidFill>
+                <a:latin typeface="Calibri" pitchFamily="34" charset="0"/>
+                <a:ea typeface="Calibri" pitchFamily="34" charset="-122"/>
+                <a:cs typeface="Calibri" pitchFamily="34" charset="-120"/>
+              </a:rPr>
+              <a:t>② ギフト端末（店頭） → LuvinaAWS環境へのWebAPI通信</a:t>
+            </a:r>
+            <a:endParaRPr lang="en-US" sz="1000" dirty="0"/>
+          </a:p>
+        </p:txBody>
+      </p:sp>
+      <p:graphicFrame>
+        <p:nvGraphicFramePr>
+          <p:cNvPr id="25" name="Table 1"/>
+          <p:cNvGraphicFramePr>
+            <a:graphicFrameLocks noGrp="1"/>
+          </p:cNvGraphicFramePr>
+          <p:nvPr>
+            <p:extLst>
+              <p:ext uri="{D42A27DB-BD31-4B8C-83A1-F6EECF244321}">
+                <p14:modId xmlns:p14="http://schemas.microsoft.com/office/powerpoint/2010/main" val="1579011935"/>
+              </p:ext>
+            </p:extLst>
+          </p:nvPr>
+        </p:nvGraphicFramePr>
+        <p:xfrm>
+          <a:off x="274320" y="3044952"/>
+          <a:ext cx="9354312" cy="914400"/>
+        </p:xfrm>
+        <a:graphic>
+          <a:graphicData uri="http://schemas.openxmlformats.org/drawingml/2006/table">
+            <a:tbl>
+              <a:tblPr/>
+              <a:tblGrid>
+                <a:gridCol w="2011680"/>
+                <a:gridCol w="1828800"/>
+                <a:gridCol w="2560320"/>
+                <a:gridCol w="2953512"/>
+              </a:tblGrid>
+              <a:tr h="411480">
+                <a:tc>
+                  <a:txBody>
+                    <a:bodyPr/>
+                    <a:lstStyle/>
+                    <a:p>
+                      <a:pPr algn="ctr" indent="0" marL="0">
+                        <a:buNone/>
+                      </a:pPr>
+                      <a:r>
+                        <a:rPr lang="en-US" sz="900" b="1" dirty="0">
+                          <a:solidFill>
+                            <a:srgbClr val="AA6600"/>
+                          </a:solidFill>
+                          <a:latin typeface="Calibri" pitchFamily="34" charset="0"/>
+                          <a:ea typeface="Calibri" pitchFamily="34" charset="-122"/>
+                          <a:cs typeface="Calibri" pitchFamily="34" charset="-120"/>
+                        </a:rPr>
+                        <a:t>カスミ端末リソース</a:t>
+                      </a:r>
+                      <a:endParaRPr lang="en-US" sz="900" dirty="0">
+                        <a:latin typeface="Calibri" charset="0"/>
+                        <a:ea typeface="Calibri" charset="0"/>
+                        <a:cs typeface="Calibri" charset="0"/>
+                      </a:endParaRPr>
+                    </a:p>
+                  </a:txBody>
+                  <a:tcPr marL="91440" marR="91440" marT="45720" marB="45720">
+                    <a:lnL w="6350" cap="flat" cmpd="sng" algn="ctr">
+                      <a:solidFill>
+                        <a:srgbClr val="CCCCCC"/>
+                      </a:solidFill>
+                      <a:prstDash val="solid"/>
+                      <a:round/>
+                      <a:headEnd type="none" w="med" len="med"/>
+                      <a:tailEnd type="none" w="med" len="med"/>
+                    </a:lnL>
+                    <a:lnR w="6350" cap="flat" cmpd="sng" algn="ctr">
+                      <a:solidFill>
+                        <a:srgbClr val="CCCCCC"/>
+                      </a:solidFill>
+                      <a:prstDash val="solid"/>
+                      <a:round/>
+                      <a:headEnd type="none" w="med" len="med"/>
+                      <a:tailEnd type="none" w="med" len="med"/>
+                    </a:lnR>
+                    <a:lnT w="6350" cap="flat" cmpd="sng" algn="ctr">
+                      <a:solidFill>
+                        <a:srgbClr val="CCCCCC"/>
+                      </a:solidFill>
+                      <a:prstDash val="solid"/>
+                      <a:round/>
+                      <a:headEnd type="none" w="med" len="med"/>
+                      <a:tailEnd type="none" w="med" len="med"/>
+                    </a:lnT>
+                    <a:lnB w="6350" cap="flat" cmpd="sng" algn="ctr">
+                      <a:solidFill>
+                        <a:srgbClr val="CCCCCC"/>
+                      </a:solidFill>
+                      <a:prstDash val="solid"/>
+                      <a:round/>
+                      <a:headEnd type="none" w="med" len="med"/>
+                      <a:tailEnd type="none" w="med" len="med"/>
+                    </a:lnB>
+                    <a:solidFill>
+                      <a:srgbClr val="FFF5EB"/>
+                    </a:solidFill>
+                  </a:tcPr>
+                </a:tc>
+                <a:tc>
+                  <a:txBody>
+                    <a:bodyPr/>
+                    <a:lstStyle/>
+                    <a:p>
+                      <a:pPr algn="ctr" indent="0" marL="0">
+                        <a:buNone/>
+                      </a:pPr>
+                      <a:r>
+                        <a:rPr lang="en-US" sz="900" b="1" dirty="0">
+                          <a:solidFill>
+                            <a:srgbClr val="AA6600"/>
+                          </a:solidFill>
+                          <a:latin typeface="Calibri" pitchFamily="34" charset="0"/>
+                          <a:ea typeface="Calibri" pitchFamily="34" charset="-122"/>
+                          <a:cs typeface="Calibri" pitchFamily="34" charset="-120"/>
+                        </a:rPr>
+                        <a:t>USMH側IP（送信元）</a:t>
+                      </a:r>
+                      <a:endParaRPr lang="en-US" sz="900" dirty="0">
+                        <a:latin typeface="Calibri" charset="0"/>
+                        <a:ea typeface="Calibri" charset="0"/>
+                        <a:cs typeface="Calibri" charset="0"/>
+                      </a:endParaRPr>
+                    </a:p>
+                  </a:txBody>
+                  <a:tcPr marL="91440" marR="91440" marT="45720" marB="45720">
+                    <a:lnL w="6350" cap="flat" cmpd="sng" algn="ctr">
+                      <a:solidFill>
+                        <a:srgbClr val="CCCCCC"/>
+                      </a:solidFill>
+                      <a:prstDash val="solid"/>
+                      <a:round/>
+                      <a:headEnd type="none" w="med" len="med"/>
+                      <a:tailEnd type="none" w="med" len="med"/>
+                    </a:lnL>
+                    <a:lnR w="6350" cap="flat" cmpd="sng" algn="ctr">
+                      <a:solidFill>
+                        <a:srgbClr val="CCCCCC"/>
+                      </a:solidFill>
+                      <a:prstDash val="solid"/>
+                      <a:round/>
+                      <a:headEnd type="none" w="med" len="med"/>
+                      <a:tailEnd type="none" w="med" len="med"/>
+                    </a:lnR>
+                    <a:lnT w="6350" cap="flat" cmpd="sng" algn="ctr">
+                      <a:solidFill>
+                        <a:srgbClr val="CCCCCC"/>
+                      </a:solidFill>
+                      <a:prstDash val="solid"/>
+                      <a:round/>
+                      <a:headEnd type="none" w="med" len="med"/>
+                      <a:tailEnd type="none" w="med" len="med"/>
+                    </a:lnT>
+                    <a:lnB w="6350" cap="flat" cmpd="sng" algn="ctr">
+                      <a:solidFill>
+                        <a:srgbClr val="CCCCCC"/>
+                      </a:solidFill>
+                      <a:prstDash val="solid"/>
+                      <a:round/>
+                      <a:headEnd type="none" w="med" len="med"/>
+                      <a:tailEnd type="none" w="med" len="med"/>
+                    </a:lnB>
+                    <a:solidFill>
+                      <a:srgbClr val="FFF5EB"/>
+                    </a:solidFill>
+                  </a:tcPr>
+                </a:tc>
+                <a:tc>
+                  <a:txBody>
+                    <a:bodyPr/>
+                    <a:lstStyle/>
+                    <a:p>
+                      <a:pPr algn="ctr" indent="0" marL="0">
+                        <a:buNone/>
+                      </a:pPr>
+                      <a:r>
+                        <a:rPr lang="en-US" sz="900" b="1" dirty="0">
+                          <a:solidFill>
+                            <a:srgbClr val="AA6600"/>
+                          </a:solidFill>
+                          <a:latin typeface="Calibri" pitchFamily="34" charset="0"/>
+                          <a:ea typeface="Calibri" pitchFamily="34" charset="-122"/>
+                          <a:cs typeface="Calibri" pitchFamily="34" charset="-120"/>
+                        </a:rPr>
+                        <a:t>カスミ側IP（NAT後送信先）</a:t>
+                      </a:r>
+                      <a:endParaRPr lang="en-US" sz="900" dirty="0">
+                        <a:latin typeface="Calibri" charset="0"/>
+                        <a:ea typeface="Calibri" charset="0"/>
+                        <a:cs typeface="Calibri" charset="0"/>
+                      </a:endParaRPr>
+                    </a:p>
+                  </a:txBody>
+                  <a:tcPr marL="91440" marR="91440" marT="45720" marB="45720">
+                    <a:lnL w="6350" cap="flat" cmpd="sng" algn="ctr">
+                      <a:solidFill>
+                        <a:srgbClr val="CCCCCC"/>
+                      </a:solidFill>
+                      <a:prstDash val="solid"/>
+                      <a:round/>
+                      <a:headEnd type="none" w="med" len="med"/>
+                      <a:tailEnd type="none" w="med" len="med"/>
+                    </a:lnL>
+                    <a:lnR w="6350" cap="flat" cmpd="sng" algn="ctr">
+                      <a:solidFill>
+                        <a:srgbClr val="CCCCCC"/>
+                      </a:solidFill>
+                      <a:prstDash val="solid"/>
+                      <a:round/>
+                      <a:headEnd type="none" w="med" len="med"/>
+                      <a:tailEnd type="none" w="med" len="med"/>
+                    </a:lnR>
+                    <a:lnT w="6350" cap="flat" cmpd="sng" algn="ctr">
+                      <a:solidFill>
+                        <a:srgbClr val="CCCCCC"/>
+                      </a:solidFill>
+                      <a:prstDash val="solid"/>
+                      <a:round/>
+                      <a:headEnd type="none" w="med" len="med"/>
+                      <a:tailEnd type="none" w="med" len="med"/>
+                    </a:lnT>
+                    <a:lnB w="6350" cap="flat" cmpd="sng" algn="ctr">
+                      <a:solidFill>
+                        <a:srgbClr val="CCCCCC"/>
+                      </a:solidFill>
+                      <a:prstDash val="solid"/>
+                      <a:round/>
+                      <a:headEnd type="none" w="med" len="med"/>
+                      <a:tailEnd type="none" w="med" len="med"/>
+                    </a:lnB>
+                    <a:solidFill>
+                      <a:srgbClr val="FFE8CC"/>
+                    </a:solidFill>
+                  </a:tcPr>
+                </a:tc>
+                <a:tc>
+                  <a:txBody>
+                    <a:bodyPr/>
+                    <a:lstStyle/>
+                    <a:p>
+                      <a:pPr algn="ctr" indent="0" marL="0">
+                        <a:buNone/>
+                      </a:pPr>
+                      <a:r>
+                        <a:rPr lang="en-US" sz="900" b="1" dirty="0">
+                          <a:solidFill>
+                            <a:srgbClr val="AA6600"/>
+                          </a:solidFill>
+                          <a:latin typeface="Calibri" pitchFamily="34" charset="0"/>
+                          <a:ea typeface="Calibri" pitchFamily="34" charset="-122"/>
+                          <a:cs typeface="Calibri" pitchFamily="34" charset="-120"/>
+                        </a:rPr>
+                        <a:t>LuvinaAWS管理サーバー</a:t>
+                      </a:r>
+                      <a:endParaRPr lang="en-US" sz="900" dirty="0">
+                        <a:latin typeface="Calibri" charset="0"/>
+                        <a:ea typeface="Calibri" charset="0"/>
+                        <a:cs typeface="Calibri" charset="0"/>
+                      </a:endParaRPr>
+                    </a:p>
+                  </a:txBody>
+                  <a:tcPr marL="91440" marR="91440" marT="45720" marB="45720">
+                    <a:lnL w="6350" cap="flat" cmpd="sng" algn="ctr">
+                      <a:solidFill>
+                        <a:srgbClr val="CCCCCC"/>
+                      </a:solidFill>
+                      <a:prstDash val="solid"/>
+                      <a:round/>
+                      <a:headEnd type="none" w="med" len="med"/>
+                      <a:tailEnd type="none" w="med" len="med"/>
+                    </a:lnL>
+                    <a:lnR w="6350" cap="flat" cmpd="sng" algn="ctr">
+                      <a:solidFill>
+                        <a:srgbClr val="CCCCCC"/>
+                      </a:solidFill>
+                      <a:prstDash val="solid"/>
+                      <a:round/>
+                      <a:headEnd type="none" w="med" len="med"/>
+                      <a:tailEnd type="none" w="med" len="med"/>
+                    </a:lnR>
+                    <a:lnT w="6350" cap="flat" cmpd="sng" algn="ctr">
+                      <a:solidFill>
+                        <a:srgbClr val="CCCCCC"/>
+                      </a:solidFill>
+                      <a:prstDash val="solid"/>
+                      <a:round/>
+                      <a:headEnd type="none" w="med" len="med"/>
+                      <a:tailEnd type="none" w="med" len="med"/>
+                    </a:lnT>
+                    <a:lnB w="6350" cap="flat" cmpd="sng" algn="ctr">
+                      <a:solidFill>
+                        <a:srgbClr val="CCCCCC"/>
+                      </a:solidFill>
+                      <a:prstDash val="solid"/>
+                      <a:round/>
+                      <a:headEnd type="none" w="med" len="med"/>
+                      <a:tailEnd type="none" w="med" len="med"/>
+                    </a:lnB>
+                    <a:solidFill>
+                      <a:srgbClr val="FFE8CC"/>
+                    </a:solidFill>
+                  </a:tcPr>
+                </a:tc>
+              </a:tr>
+              <a:tr h="411480">
+                <a:tc>
+                  <a:txBody>
+                    <a:bodyPr/>
+                    <a:lstStyle/>
+                    <a:p>
+                      <a:pPr indent="0" marL="0">
+                        <a:buNone/>
+                      </a:pPr>
+                      <a:r>
+                        <a:rPr lang="en-US" sz="900" dirty="0">
+                          <a:solidFill>
+                            <a:srgbClr val="2D2D2D"/>
+                          </a:solidFill>
+                          <a:latin typeface="Calibri" pitchFamily="34" charset="0"/>
+                          <a:ea typeface="Calibri" pitchFamily="34" charset="-122"/>
+                          <a:cs typeface="Calibri" pitchFamily="34" charset="-120"/>
+                        </a:rPr>
+                        <a:t>ギフト端末(店頭)</a:t>
+                      </a:r>
+                      <a:endParaRPr lang="en-US" sz="900" dirty="0">
+                        <a:latin typeface="Calibri" charset="0"/>
+                        <a:ea typeface="Calibri" charset="0"/>
+                        <a:cs typeface="Calibri" charset="0"/>
+                      </a:endParaRPr>
+                    </a:p>
+                    <a:p>
+                      <a:pPr indent="0" marL="0">
+                        <a:buNone/>
+                      </a:pPr>
+                      <a:r>
+                        <a:rPr lang="en-US" sz="900" dirty="0">
+                          <a:solidFill>
+                            <a:srgbClr val="2D2D2D"/>
+                          </a:solidFill>
+                          <a:latin typeface="Calibri" pitchFamily="34" charset="0"/>
+                          <a:ea typeface="Calibri" pitchFamily="34" charset="-122"/>
+                          <a:cs typeface="Calibri" pitchFamily="34" charset="-120"/>
+                        </a:rPr>
+                        <a:t>10.0.0.0/8</a:t>
+                      </a:r>
+                      <a:endParaRPr lang="en-US" sz="900" dirty="0">
+                        <a:latin typeface="Calibri" charset="0"/>
+                        <a:ea typeface="Calibri" charset="0"/>
+                        <a:cs typeface="Calibri" charset="0"/>
+                      </a:endParaRPr>
+                    </a:p>
+                  </a:txBody>
+                  <a:tcPr marL="91440" marR="91440" marT="45720" marB="45720">
+                    <a:lnL w="6350" cap="flat" cmpd="sng" algn="ctr">
+                      <a:solidFill>
+                        <a:srgbClr val="CCCCCC"/>
+                      </a:solidFill>
+                      <a:prstDash val="solid"/>
+                      <a:round/>
+                      <a:headEnd type="none" w="med" len="med"/>
+                      <a:tailEnd type="none" w="med" len="med"/>
+                    </a:lnL>
+                    <a:lnR w="6350" cap="flat" cmpd="sng" algn="ctr">
+                      <a:solidFill>
+                        <a:srgbClr val="CCCCCC"/>
+                      </a:solidFill>
+                      <a:prstDash val="solid"/>
+                      <a:round/>
+                      <a:headEnd type="none" w="med" len="med"/>
+                      <a:tailEnd type="none" w="med" len="med"/>
+                    </a:lnR>
+                    <a:lnT w="6350" cap="flat" cmpd="sng" algn="ctr">
+                      <a:solidFill>
+                        <a:srgbClr val="CCCCCC"/>
+                      </a:solidFill>
+                      <a:prstDash val="solid"/>
+                      <a:round/>
+                      <a:headEnd type="none" w="med" len="med"/>
+                      <a:tailEnd type="none" w="med" len="med"/>
+                    </a:lnT>
+                    <a:lnB w="6350" cap="flat" cmpd="sng" algn="ctr">
+                      <a:solidFill>
+                        <a:srgbClr val="CCCCCC"/>
+                      </a:solidFill>
+                      <a:prstDash val="solid"/>
+                      <a:round/>
+                      <a:headEnd type="none" w="med" len="med"/>
+                      <a:tailEnd type="none" w="med" len="med"/>
+                    </a:lnB>
+                  </a:tcPr>
+                </a:tc>
+                <a:tc>
+                  <a:txBody>
+                    <a:bodyPr/>
+                    <a:lstStyle/>
+                    <a:p>
+                      <a:pPr indent="0" marL="0">
+                        <a:buNone/>
+                      </a:pPr>
+                      <a:r>
+                        <a:rPr lang="en-US" sz="900" dirty="0">
+                          <a:solidFill>
+                            <a:srgbClr val="2D2D2D"/>
+                          </a:solidFill>
+                          <a:latin typeface="Calibri" pitchFamily="34" charset="0"/>
+                          <a:ea typeface="Calibri" pitchFamily="34" charset="-122"/>
+                          <a:cs typeface="Calibri" pitchFamily="34" charset="-120"/>
+                        </a:rPr>
+                        <a:t>10.156.96.214</a:t>
+                      </a:r>
+                      <a:endParaRPr lang="en-US" sz="900" dirty="0">
+                        <a:latin typeface="Calibri" charset="0"/>
+                        <a:ea typeface="Calibri" charset="0"/>
+                        <a:cs typeface="Calibri" charset="0"/>
+                      </a:endParaRPr>
+                    </a:p>
+                  </a:txBody>
+                  <a:tcPr marL="91440" marR="91440" marT="45720" marB="45720">
+                    <a:lnL w="6350" cap="flat" cmpd="sng" algn="ctr">
+                      <a:solidFill>
+                        <a:srgbClr val="CCCCCC"/>
+                      </a:solidFill>
+                      <a:prstDash val="solid"/>
+                      <a:round/>
+                      <a:headEnd type="none" w="med" len="med"/>
+                      <a:tailEnd type="none" w="med" len="med"/>
+                    </a:lnL>
+                    <a:lnR w="6350" cap="flat" cmpd="sng" algn="ctr">
+                      <a:solidFill>
+                        <a:srgbClr val="CCCCCC"/>
+                      </a:solidFill>
+                      <a:prstDash val="solid"/>
+                      <a:round/>
+                      <a:headEnd type="none" w="med" len="med"/>
+                      <a:tailEnd type="none" w="med" len="med"/>
+                    </a:lnR>
+                    <a:lnT w="6350" cap="flat" cmpd="sng" algn="ctr">
+                      <a:solidFill>
+                        <a:srgbClr val="CCCCCC"/>
+                      </a:solidFill>
+                      <a:prstDash val="solid"/>
+                      <a:round/>
+                      <a:headEnd type="none" w="med" len="med"/>
+                      <a:tailEnd type="none" w="med" len="med"/>
+                    </a:lnT>
+                    <a:lnB w="6350" cap="flat" cmpd="sng" algn="ctr">
+                      <a:solidFill>
+                        <a:srgbClr val="CCCCCC"/>
+                      </a:solidFill>
+                      <a:prstDash val="solid"/>
+                      <a:round/>
+                      <a:headEnd type="none" w="med" len="med"/>
+                      <a:tailEnd type="none" w="med" len="med"/>
+                    </a:lnB>
+                  </a:tcPr>
+                </a:tc>
+                <a:tc>
+                  <a:txBody>
+                    <a:bodyPr/>
+                    <a:lstStyle/>
+                    <a:p>
+                      <a:pPr indent="0" marL="0">
+                        <a:buNone/>
+                      </a:pPr>
+                      <a:r>
+                        <a:rPr lang="en-US" sz="900" dirty="0">
+                          <a:solidFill>
+                            <a:srgbClr val="AA6600"/>
+                          </a:solidFill>
+                          <a:latin typeface="Calibri" pitchFamily="34" charset="0"/>
+                          <a:ea typeface="Calibri" pitchFamily="34" charset="-122"/>
+                          <a:cs typeface="Calibri" pitchFamily="34" charset="-120"/>
+                        </a:rPr>
+                        <a:t>10.30.120.36</a:t>
+                      </a:r>
+                      <a:endParaRPr lang="en-US" sz="900" dirty="0">
+                        <a:latin typeface="Calibri" charset="0"/>
+                        <a:ea typeface="Calibri" charset="0"/>
+                        <a:cs typeface="Calibri" charset="0"/>
+                      </a:endParaRPr>
+                    </a:p>
+                    <a:p>
+                      <a:pPr indent="0" marL="0">
+                        <a:buNone/>
+                      </a:pPr>
+                      <a:r>
+                        <a:rPr lang="en-US" sz="900" dirty="0">
+                          <a:solidFill>
+                            <a:srgbClr val="AA6600"/>
+                          </a:solidFill>
+                          <a:latin typeface="Calibri" pitchFamily="34" charset="0"/>
+                          <a:ea typeface="Calibri" pitchFamily="34" charset="-122"/>
+                          <a:cs typeface="Calibri" pitchFamily="34" charset="-120"/>
+                        </a:rPr>
+                        <a:t>(MS管理サーバー)</a:t>
+                      </a:r>
+                      <a:endParaRPr lang="en-US" sz="900" dirty="0">
+                        <a:latin typeface="Calibri" charset="0"/>
+                        <a:ea typeface="Calibri" charset="0"/>
+                        <a:cs typeface="Calibri" charset="0"/>
+                      </a:endParaRPr>
+                    </a:p>
+                  </a:txBody>
+                  <a:tcPr marL="91440" marR="91440" marT="45720" marB="45720">
+                    <a:lnL w="6350" cap="flat" cmpd="sng" algn="ctr">
+                      <a:solidFill>
+                        <a:srgbClr val="CCCCCC"/>
+                      </a:solidFill>
+                      <a:prstDash val="solid"/>
+                      <a:round/>
+                      <a:headEnd type="none" w="med" len="med"/>
+                      <a:tailEnd type="none" w="med" len="med"/>
+                    </a:lnL>
+                    <a:lnR w="6350" cap="flat" cmpd="sng" algn="ctr">
+                      <a:solidFill>
+                        <a:srgbClr val="CCCCCC"/>
+                      </a:solidFill>
+                      <a:prstDash val="solid"/>
+                      <a:round/>
+                      <a:headEnd type="none" w="med" len="med"/>
+                      <a:tailEnd type="none" w="med" len="med"/>
+                    </a:lnR>
+                    <a:lnT w="6350" cap="flat" cmpd="sng" algn="ctr">
+                      <a:solidFill>
+                        <a:srgbClr val="CCCCCC"/>
+                      </a:solidFill>
+                      <a:prstDash val="solid"/>
+                      <a:round/>
+                      <a:headEnd type="none" w="med" len="med"/>
+                      <a:tailEnd type="none" w="med" len="med"/>
+                    </a:lnT>
+                    <a:lnB w="6350" cap="flat" cmpd="sng" algn="ctr">
+                      <a:solidFill>
+                        <a:srgbClr val="CCCCCC"/>
+                      </a:solidFill>
+                      <a:prstDash val="solid"/>
+                      <a:round/>
+                      <a:headEnd type="none" w="med" len="med"/>
+                      <a:tailEnd type="none" w="med" len="med"/>
+                    </a:lnB>
+                    <a:solidFill>
+                      <a:srgbClr val="FFF5EB"/>
+                    </a:solidFill>
+                  </a:tcPr>
+                </a:tc>
+                <a:tc>
+                  <a:txBody>
+                    <a:bodyPr/>
+                    <a:lstStyle/>
+                    <a:p>
+                      <a:pPr indent="0" marL="0">
+                        <a:buNone/>
+                      </a:pPr>
+                      <a:r>
+                        <a:rPr lang="en-US" sz="900" b="1" dirty="0">
+                          <a:solidFill>
+                            <a:srgbClr val="AA6600"/>
+                          </a:solidFill>
+                          <a:latin typeface="Calibri" pitchFamily="34" charset="0"/>
+                          <a:ea typeface="Calibri" pitchFamily="34" charset="-122"/>
+                          <a:cs typeface="Calibri" pitchFamily="34" charset="-120"/>
+                        </a:rPr>
+                        <a:t>LuvinaAWS本番</a:t>
+                      </a:r>
+                      <a:endParaRPr lang="en-US" sz="900" dirty="0">
+                        <a:latin typeface="Calibri" charset="0"/>
+                        <a:ea typeface="Calibri" charset="0"/>
+                        <a:cs typeface="Calibri" charset="0"/>
+                      </a:endParaRPr>
+                    </a:p>
+                    <a:p>
+                      <a:pPr indent="0" marL="0">
+                        <a:buNone/>
+                      </a:pPr>
+                      <a:r>
+                        <a:rPr lang="en-US" sz="900" b="1" dirty="0">
+                          <a:solidFill>
+                            <a:srgbClr val="AA6600"/>
+                          </a:solidFill>
+                          <a:latin typeface="Calibri" pitchFamily="34" charset="0"/>
+                          <a:ea typeface="Calibri" pitchFamily="34" charset="-122"/>
+                          <a:cs typeface="Calibri" pitchFamily="34" charset="-120"/>
+                        </a:rPr>
+                        <a:t>10.238.2.198</a:t>
+                      </a:r>
+                      <a:endParaRPr lang="en-US" sz="900" dirty="0">
+                        <a:latin typeface="Calibri" charset="0"/>
+                        <a:ea typeface="Calibri" charset="0"/>
+                        <a:cs typeface="Calibri" charset="0"/>
+                      </a:endParaRPr>
+                    </a:p>
+                  </a:txBody>
+                  <a:tcPr marL="91440" marR="91440" marT="45720" marB="45720">
+                    <a:lnL w="6350" cap="flat" cmpd="sng" algn="ctr">
+                      <a:solidFill>
+                        <a:srgbClr val="CCCCCC"/>
+                      </a:solidFill>
+                      <a:prstDash val="solid"/>
+                      <a:round/>
+                      <a:headEnd type="none" w="med" len="med"/>
+                      <a:tailEnd type="none" w="med" len="med"/>
+                    </a:lnL>
+                    <a:lnR w="6350" cap="flat" cmpd="sng" algn="ctr">
+                      <a:solidFill>
+                        <a:srgbClr val="CCCCCC"/>
+                      </a:solidFill>
+                      <a:prstDash val="solid"/>
+                      <a:round/>
+                      <a:headEnd type="none" w="med" len="med"/>
+                      <a:tailEnd type="none" w="med" len="med"/>
+                    </a:lnR>
+                    <a:lnT w="6350" cap="flat" cmpd="sng" algn="ctr">
+                      <a:solidFill>
+                        <a:srgbClr val="CCCCCC"/>
+                      </a:solidFill>
+                      <a:prstDash val="solid"/>
+                      <a:round/>
+                      <a:headEnd type="none" w="med" len="med"/>
+                      <a:tailEnd type="none" w="med" len="med"/>
+                    </a:lnT>
+                    <a:lnB w="6350" cap="flat" cmpd="sng" algn="ctr">
+                      <a:solidFill>
+                        <a:srgbClr val="CCCCCC"/>
+                      </a:solidFill>
+                      <a:prstDash val="solid"/>
+                      <a:round/>
+                      <a:headEnd type="none" w="med" len="med"/>
+                      <a:tailEnd type="none" w="med" len="med"/>
+                    </a:lnB>
+                    <a:solidFill>
+                      <a:srgbClr val="FFF5EB"/>
+                    </a:solidFill>
+                  </a:tcPr>
+                </a:tc>
+              </a:tr>
+              <a:tr h="411480">
+                <a:tc>
+                  <a:txBody>
+                    <a:bodyPr/>
+                    <a:lstStyle/>
+                    <a:p>
+                      <a:pPr indent="0" marL="0">
+                        <a:buNone/>
+                      </a:pPr>
+                      <a:r>
+                        <a:rPr lang="en-US" sz="900" dirty="0">
+                          <a:solidFill>
+                            <a:srgbClr val="2D2D2D"/>
+                          </a:solidFill>
+                          <a:latin typeface="Calibri" pitchFamily="34" charset="0"/>
+                          <a:ea typeface="Calibri" pitchFamily="34" charset="-122"/>
+                          <a:cs typeface="Calibri" pitchFamily="34" charset="-120"/>
+                        </a:rPr>
+                        <a:t>ギフト端末(店頭)</a:t>
+                      </a:r>
+                      <a:endParaRPr lang="en-US" sz="900" dirty="0">
+                        <a:latin typeface="Calibri" charset="0"/>
+                        <a:ea typeface="Calibri" charset="0"/>
+                        <a:cs typeface="Calibri" charset="0"/>
+                      </a:endParaRPr>
+                    </a:p>
+                    <a:p>
+                      <a:pPr indent="0" marL="0">
+                        <a:buNone/>
+                      </a:pPr>
+                      <a:r>
+                        <a:rPr lang="en-US" sz="900" dirty="0">
+                          <a:solidFill>
+                            <a:srgbClr val="2D2D2D"/>
+                          </a:solidFill>
+                          <a:latin typeface="Calibri" pitchFamily="34" charset="0"/>
+                          <a:ea typeface="Calibri" pitchFamily="34" charset="-122"/>
+                          <a:cs typeface="Calibri" pitchFamily="34" charset="-120"/>
+                        </a:rPr>
+                        <a:t>10.0.0.0/8</a:t>
                       </a:r>
                       <a:endParaRPr lang="en-US" sz="900" dirty="0">
                         <a:latin typeface="Calibri" charset="0"/>
@@ -7408,7 +10578,7 @@
                           <a:ea typeface="Calibri" pitchFamily="34" charset="-122"/>
                           <a:cs typeface="Calibri" pitchFamily="34" charset="-120"/>
                         </a:rPr>
-                        <a:t>VPC / S3</a:t>
+                        <a:t>10.156.96.214</a:t>
                       </a:r>
                       <a:endParaRPr lang="en-US" sz="900" dirty="0">
                         <a:latin typeface="Calibri" charset="0"/>
@@ -7459,8 +10629,487 @@
                     </a:solidFill>
                   </a:tcPr>
                 </a:tc>
+                <a:tc>
+                  <a:txBody>
+                    <a:bodyPr/>
+                    <a:lstStyle/>
+                    <a:p>
+                      <a:pPr indent="0" marL="0">
+                        <a:buNone/>
+                      </a:pPr>
+                      <a:r>
+                        <a:rPr lang="en-US" sz="900" dirty="0">
+                          <a:solidFill>
+                            <a:srgbClr val="AA6600"/>
+                          </a:solidFill>
+                          <a:latin typeface="Calibri" pitchFamily="34" charset="0"/>
+                          <a:ea typeface="Calibri" pitchFamily="34" charset="-122"/>
+                          <a:cs typeface="Calibri" pitchFamily="34" charset="-120"/>
+                        </a:rPr>
+                        <a:t>10.30.120.35</a:t>
+                      </a:r>
+                      <a:endParaRPr lang="en-US" sz="900" dirty="0">
+                        <a:latin typeface="Calibri" charset="0"/>
+                        <a:ea typeface="Calibri" charset="0"/>
+                        <a:cs typeface="Calibri" charset="0"/>
+                      </a:endParaRPr>
+                    </a:p>
+                    <a:p>
+                      <a:pPr indent="0" marL="0">
+                        <a:buNone/>
+                      </a:pPr>
+                      <a:r>
+                        <a:rPr lang="en-US" sz="900" dirty="0">
+                          <a:solidFill>
+                            <a:srgbClr val="AA6600"/>
+                          </a:solidFill>
+                          <a:latin typeface="Calibri" pitchFamily="34" charset="0"/>
+                          <a:ea typeface="Calibri" pitchFamily="34" charset="-122"/>
+                          <a:cs typeface="Calibri" pitchFamily="34" charset="-120"/>
+                        </a:rPr>
+                        <a:t>(ST管理サーバー)</a:t>
+                      </a:r>
+                      <a:endParaRPr lang="en-US" sz="900" dirty="0">
+                        <a:latin typeface="Calibri" charset="0"/>
+                        <a:ea typeface="Calibri" charset="0"/>
+                        <a:cs typeface="Calibri" charset="0"/>
+                      </a:endParaRPr>
+                    </a:p>
+                  </a:txBody>
+                  <a:tcPr marL="91440" marR="91440" marT="45720" marB="45720">
+                    <a:lnL w="6350" cap="flat" cmpd="sng" algn="ctr">
+                      <a:solidFill>
+                        <a:srgbClr val="CCCCCC"/>
+                      </a:solidFill>
+                      <a:prstDash val="solid"/>
+                      <a:round/>
+                      <a:headEnd type="none" w="med" len="med"/>
+                      <a:tailEnd type="none" w="med" len="med"/>
+                    </a:lnL>
+                    <a:lnR w="6350" cap="flat" cmpd="sng" algn="ctr">
+                      <a:solidFill>
+                        <a:srgbClr val="CCCCCC"/>
+                      </a:solidFill>
+                      <a:prstDash val="solid"/>
+                      <a:round/>
+                      <a:headEnd type="none" w="med" len="med"/>
+                      <a:tailEnd type="none" w="med" len="med"/>
+                    </a:lnR>
+                    <a:lnT w="6350" cap="flat" cmpd="sng" algn="ctr">
+                      <a:solidFill>
+                        <a:srgbClr val="CCCCCC"/>
+                      </a:solidFill>
+                      <a:prstDash val="solid"/>
+                      <a:round/>
+                      <a:headEnd type="none" w="med" len="med"/>
+                      <a:tailEnd type="none" w="med" len="med"/>
+                    </a:lnT>
+                    <a:lnB w="6350" cap="flat" cmpd="sng" algn="ctr">
+                      <a:solidFill>
+                        <a:srgbClr val="CCCCCC"/>
+                      </a:solidFill>
+                      <a:prstDash val="solid"/>
+                      <a:round/>
+                      <a:headEnd type="none" w="med" len="med"/>
+                      <a:tailEnd type="none" w="med" len="med"/>
+                    </a:lnB>
+                    <a:solidFill>
+                      <a:srgbClr val="FFFAEB"/>
+                    </a:solidFill>
+                  </a:tcPr>
+                </a:tc>
+                <a:tc>
+                  <a:txBody>
+                    <a:bodyPr/>
+                    <a:lstStyle/>
+                    <a:p>
+                      <a:pPr indent="0" marL="0">
+                        <a:buNone/>
+                      </a:pPr>
+                      <a:r>
+                        <a:rPr lang="en-US" sz="900" b="1" dirty="0">
+                          <a:solidFill>
+                            <a:srgbClr val="AA6600"/>
+                          </a:solidFill>
+                          <a:latin typeface="Calibri" pitchFamily="34" charset="0"/>
+                          <a:ea typeface="Calibri" pitchFamily="34" charset="-122"/>
+                          <a:cs typeface="Calibri" pitchFamily="34" charset="-120"/>
+                        </a:rPr>
+                        <a:t>LuvinaAWS開発</a:t>
+                      </a:r>
+                      <a:endParaRPr lang="en-US" sz="900" dirty="0">
+                        <a:latin typeface="Calibri" charset="0"/>
+                        <a:ea typeface="Calibri" charset="0"/>
+                        <a:cs typeface="Calibri" charset="0"/>
+                      </a:endParaRPr>
+                    </a:p>
+                    <a:p>
+                      <a:pPr indent="0" marL="0">
+                        <a:buNone/>
+                      </a:pPr>
+                      <a:r>
+                        <a:rPr lang="en-US" sz="900" b="1" dirty="0">
+                          <a:solidFill>
+                            <a:srgbClr val="AA6600"/>
+                          </a:solidFill>
+                          <a:latin typeface="Calibri" pitchFamily="34" charset="0"/>
+                          <a:ea typeface="Calibri" pitchFamily="34" charset="-122"/>
+                          <a:cs typeface="Calibri" pitchFamily="34" charset="-120"/>
+                        </a:rPr>
+                        <a:t>10.239.2.193</a:t>
+                      </a:r>
+                      <a:endParaRPr lang="en-US" sz="900" dirty="0">
+                        <a:latin typeface="Calibri" charset="0"/>
+                        <a:ea typeface="Calibri" charset="0"/>
+                        <a:cs typeface="Calibri" charset="0"/>
+                      </a:endParaRPr>
+                    </a:p>
+                  </a:txBody>
+                  <a:tcPr marL="91440" marR="91440" marT="45720" marB="45720">
+                    <a:lnL w="6350" cap="flat" cmpd="sng" algn="ctr">
+                      <a:solidFill>
+                        <a:srgbClr val="CCCCCC"/>
+                      </a:solidFill>
+                      <a:prstDash val="solid"/>
+                      <a:round/>
+                      <a:headEnd type="none" w="med" len="med"/>
+                      <a:tailEnd type="none" w="med" len="med"/>
+                    </a:lnL>
+                    <a:lnR w="6350" cap="flat" cmpd="sng" algn="ctr">
+                      <a:solidFill>
+                        <a:srgbClr val="CCCCCC"/>
+                      </a:solidFill>
+                      <a:prstDash val="solid"/>
+                      <a:round/>
+                      <a:headEnd type="none" w="med" len="med"/>
+                      <a:tailEnd type="none" w="med" len="med"/>
+                    </a:lnR>
+                    <a:lnT w="6350" cap="flat" cmpd="sng" algn="ctr">
+                      <a:solidFill>
+                        <a:srgbClr val="CCCCCC"/>
+                      </a:solidFill>
+                      <a:prstDash val="solid"/>
+                      <a:round/>
+                      <a:headEnd type="none" w="med" len="med"/>
+                      <a:tailEnd type="none" w="med" len="med"/>
+                    </a:lnT>
+                    <a:lnB w="6350" cap="flat" cmpd="sng" algn="ctr">
+                      <a:solidFill>
+                        <a:srgbClr val="CCCCCC"/>
+                      </a:solidFill>
+                      <a:prstDash val="solid"/>
+                      <a:round/>
+                      <a:headEnd type="none" w="med" len="med"/>
+                      <a:tailEnd type="none" w="med" len="med"/>
+                    </a:lnB>
+                    <a:solidFill>
+                      <a:srgbClr val="FFFAEB"/>
+                    </a:solidFill>
+                  </a:tcPr>
+                </a:tc>
               </a:tr>
-              <a:tr h="347472">
+            </a:tbl>
+          </a:graphicData>
+        </a:graphic>
+      </p:graphicFrame>
+      <p:sp>
+        <p:nvSpPr>
+          <p:cNvPr id="17" name="Shape 10"/>
+          <p:cNvSpPr/>
+          <p:nvPr/>
+        </p:nvSpPr>
+        <p:spPr>
+          <a:xfrm>
+            <a:off x="274320" y="3986784"/>
+            <a:ext cx="9354312" cy="228600"/>
+          </a:xfrm>
+          <a:prstGeom prst="rect">
+            <a:avLst/>
+          </a:prstGeom>
+          <a:solidFill>
+            <a:srgbClr val="4488CC"/>
+          </a:solidFill>
+          <a:ln w="12700">
+            <a:solidFill>
+              <a:srgbClr val="4488CC"/>
+            </a:solidFill>
+            <a:prstDash val="solid"/>
+          </a:ln>
+        </p:spPr>
+      </p:sp>
+      <p:sp>
+        <p:nvSpPr>
+          <p:cNvPr id="18" name="Text 11"/>
+          <p:cNvSpPr/>
+          <p:nvPr/>
+        </p:nvSpPr>
+        <p:spPr>
+          <a:xfrm>
+            <a:off x="274320" y="3986784"/>
+            <a:ext cx="9354312" cy="228600"/>
+          </a:xfrm>
+          <a:prstGeom prst="rect">
+            <a:avLst/>
+          </a:prstGeom>
+          <a:noFill/>
+          <a:ln/>
+        </p:spPr>
+        <p:txBody>
+          <a:bodyPr wrap="square" lIns="0" tIns="0" rIns="76200" bIns="0" rtlCol="0" anchor="ctr"/>
+          <a:lstStyle/>
+          <a:p>
+            <a:pPr algn="l" indent="0" marL="0">
+              <a:buNone/>
+            </a:pPr>
+            <a:r>
+              <a:rPr lang="en-US" sz="1000" b="1" dirty="0">
+                <a:solidFill>
+                  <a:srgbClr val="FFFFFF"/>
+                </a:solidFill>
+                <a:latin typeface="Calibri" pitchFamily="34" charset="0"/>
+                <a:ea typeface="Calibri" pitchFamily="34" charset="-122"/>
+                <a:cs typeface="Calibri" pitchFamily="34" charset="-120"/>
+              </a:rPr>
+              <a:t>③ LuvinaAWS環境 → NTT DATA様CDSセンタへのインターネット経由SFTP通信</a:t>
+            </a:r>
+            <a:endParaRPr lang="en-US" sz="1000" dirty="0"/>
+          </a:p>
+        </p:txBody>
+      </p:sp>
+      <p:graphicFrame>
+        <p:nvGraphicFramePr>
+          <p:cNvPr id="37" name="Table 2"/>
+          <p:cNvGraphicFramePr>
+            <a:graphicFrameLocks noGrp="1"/>
+          </p:cNvGraphicFramePr>
+          <p:nvPr>
+            <p:extLst>
+              <p:ext uri="{D42A27DB-BD31-4B8C-83A1-F6EECF244321}">
+                <p14:modId xmlns:p14="http://schemas.microsoft.com/office/powerpoint/2010/main" val="1579011935"/>
+              </p:ext>
+            </p:extLst>
+          </p:nvPr>
+        </p:nvGraphicFramePr>
+        <p:xfrm>
+          <a:off x="274320" y="4242816"/>
+          <a:ext cx="9354312" cy="914400"/>
+        </p:xfrm>
+        <a:graphic>
+          <a:graphicData uri="http://schemas.openxmlformats.org/drawingml/2006/table">
+            <a:tbl>
+              <a:tblPr/>
+              <a:tblGrid>
+                <a:gridCol w="2560320"/>
+                <a:gridCol w="3401568"/>
+                <a:gridCol w="3392424"/>
+              </a:tblGrid>
+              <a:tr h="411480">
+                <a:tc>
+                  <a:txBody>
+                    <a:bodyPr/>
+                    <a:lstStyle/>
+                    <a:p>
+                      <a:pPr algn="ctr" indent="0" marL="0">
+                        <a:buNone/>
+                      </a:pPr>
+                      <a:r>
+                        <a:rPr lang="en-US" sz="900" b="1" dirty="0">
+                          <a:solidFill>
+                            <a:srgbClr val="4488CC"/>
+                          </a:solidFill>
+                          <a:latin typeface="Calibri" pitchFamily="34" charset="0"/>
+                          <a:ea typeface="Calibri" pitchFamily="34" charset="-122"/>
+                          <a:cs typeface="Calibri" pitchFamily="34" charset="-120"/>
+                        </a:rPr>
+                        <a:t>LuvinaAWSリソース</a:t>
+                      </a:r>
+                      <a:endParaRPr lang="en-US" sz="900" dirty="0">
+                        <a:latin typeface="Calibri" charset="0"/>
+                        <a:ea typeface="Calibri" charset="0"/>
+                        <a:cs typeface="Calibri" charset="0"/>
+                      </a:endParaRPr>
+                    </a:p>
+                  </a:txBody>
+                  <a:tcPr marL="91440" marR="91440" marT="45720" marB="45720">
+                    <a:lnL w="6350" cap="flat" cmpd="sng" algn="ctr">
+                      <a:solidFill>
+                        <a:srgbClr val="CCCCCC"/>
+                      </a:solidFill>
+                      <a:prstDash val="solid"/>
+                      <a:round/>
+                      <a:headEnd type="none" w="med" len="med"/>
+                      <a:tailEnd type="none" w="med" len="med"/>
+                    </a:lnL>
+                    <a:lnR w="6350" cap="flat" cmpd="sng" algn="ctr">
+                      <a:solidFill>
+                        <a:srgbClr val="CCCCCC"/>
+                      </a:solidFill>
+                      <a:prstDash val="solid"/>
+                      <a:round/>
+                      <a:headEnd type="none" w="med" len="med"/>
+                      <a:tailEnd type="none" w="med" len="med"/>
+                    </a:lnR>
+                    <a:lnT w="6350" cap="flat" cmpd="sng" algn="ctr">
+                      <a:solidFill>
+                        <a:srgbClr val="CCCCCC"/>
+                      </a:solidFill>
+                      <a:prstDash val="solid"/>
+                      <a:round/>
+                      <a:headEnd type="none" w="med" len="med"/>
+                      <a:tailEnd type="none" w="med" len="med"/>
+                    </a:lnT>
+                    <a:lnB w="6350" cap="flat" cmpd="sng" algn="ctr">
+                      <a:solidFill>
+                        <a:srgbClr val="CCCCCC"/>
+                      </a:solidFill>
+                      <a:prstDash val="solid"/>
+                      <a:round/>
+                      <a:headEnd type="none" w="med" len="med"/>
+                      <a:tailEnd type="none" w="med" len="med"/>
+                    </a:lnB>
+                    <a:solidFill>
+                      <a:srgbClr val="EBF5FF"/>
+                    </a:solidFill>
+                  </a:tcPr>
+                </a:tc>
+                <a:tc>
+                  <a:txBody>
+                    <a:bodyPr/>
+                    <a:lstStyle/>
+                    <a:p>
+                      <a:pPr algn="ctr" indent="0" marL="0">
+                        <a:buNone/>
+                      </a:pPr>
+                      <a:r>
+                        <a:rPr lang="en-US" sz="900" b="1" dirty="0">
+                          <a:solidFill>
+                            <a:srgbClr val="4488CC"/>
+                          </a:solidFill>
+                          <a:latin typeface="Calibri" pitchFamily="34" charset="0"/>
+                          <a:ea typeface="Calibri" pitchFamily="34" charset="-122"/>
+                          <a:cs typeface="Calibri" pitchFamily="34" charset="-120"/>
+                        </a:rPr>
+                        <a:t>外部インターネットIP</a:t>
+                      </a:r>
+                      <a:endParaRPr lang="en-US" sz="900" dirty="0">
+                        <a:latin typeface="Calibri" charset="0"/>
+                        <a:ea typeface="Calibri" charset="0"/>
+                        <a:cs typeface="Calibri" charset="0"/>
+                      </a:endParaRPr>
+                    </a:p>
+                  </a:txBody>
+                  <a:tcPr marL="91440" marR="91440" marT="45720" marB="45720">
+                    <a:lnL w="6350" cap="flat" cmpd="sng" algn="ctr">
+                      <a:solidFill>
+                        <a:srgbClr val="CCCCCC"/>
+                      </a:solidFill>
+                      <a:prstDash val="solid"/>
+                      <a:round/>
+                      <a:headEnd type="none" w="med" len="med"/>
+                      <a:tailEnd type="none" w="med" len="med"/>
+                    </a:lnL>
+                    <a:lnR w="6350" cap="flat" cmpd="sng" algn="ctr">
+                      <a:solidFill>
+                        <a:srgbClr val="CCCCCC"/>
+                      </a:solidFill>
+                      <a:prstDash val="solid"/>
+                      <a:round/>
+                      <a:headEnd type="none" w="med" len="med"/>
+                      <a:tailEnd type="none" w="med" len="med"/>
+                    </a:lnR>
+                    <a:lnT w="6350" cap="flat" cmpd="sng" algn="ctr">
+                      <a:solidFill>
+                        <a:srgbClr val="CCCCCC"/>
+                      </a:solidFill>
+                      <a:prstDash val="solid"/>
+                      <a:round/>
+                      <a:headEnd type="none" w="med" len="med"/>
+                      <a:tailEnd type="none" w="med" len="med"/>
+                    </a:lnT>
+                    <a:lnB w="6350" cap="flat" cmpd="sng" algn="ctr">
+                      <a:solidFill>
+                        <a:srgbClr val="CCCCCC"/>
+                      </a:solidFill>
+                      <a:prstDash val="solid"/>
+                      <a:round/>
+                      <a:headEnd type="none" w="med" len="med"/>
+                      <a:tailEnd type="none" w="med" len="med"/>
+                    </a:lnB>
+                    <a:solidFill>
+                      <a:srgbClr val="EBF5FF"/>
+                    </a:solidFill>
+                  </a:tcPr>
+                </a:tc>
+                <a:tc>
+                  <a:txBody>
+                    <a:bodyPr/>
+                    <a:lstStyle/>
+                    <a:p>
+                      <a:pPr algn="ctr" indent="0" marL="0">
+                        <a:buNone/>
+                      </a:pPr>
+                      <a:r>
+                        <a:rPr lang="en-US" sz="900" b="1" dirty="0">
+                          <a:solidFill>
+                            <a:srgbClr val="4488CC"/>
+                          </a:solidFill>
+                          <a:latin typeface="Calibri" pitchFamily="34" charset="0"/>
+                          <a:ea typeface="Calibri" pitchFamily="34" charset="-122"/>
+                          <a:cs typeface="Calibri" pitchFamily="34" charset="-120"/>
+                        </a:rPr>
+                        <a:t>NTT DATA様リソース</a:t>
+                      </a:r>
+                      <a:endParaRPr lang="en-US" sz="900" dirty="0">
+                        <a:latin typeface="Calibri" charset="0"/>
+                        <a:ea typeface="Calibri" charset="0"/>
+                        <a:cs typeface="Calibri" charset="0"/>
+                      </a:endParaRPr>
+                    </a:p>
+                  </a:txBody>
+                  <a:tcPr marL="91440" marR="91440" marT="45720" marB="45720">
+                    <a:lnL w="6350" cap="flat" cmpd="sng" algn="ctr">
+                      <a:solidFill>
+                        <a:srgbClr val="CCCCCC"/>
+                      </a:solidFill>
+                      <a:prstDash val="solid"/>
+                      <a:round/>
+                      <a:headEnd type="none" w="med" len="med"/>
+                      <a:tailEnd type="none" w="med" len="med"/>
+                    </a:lnL>
+                    <a:lnR w="6350" cap="flat" cmpd="sng" algn="ctr">
+                      <a:solidFill>
+                        <a:srgbClr val="CCCCCC"/>
+                      </a:solidFill>
+                      <a:prstDash val="solid"/>
+                      <a:round/>
+                      <a:headEnd type="none" w="med" len="med"/>
+                      <a:tailEnd type="none" w="med" len="med"/>
+                    </a:lnR>
+                    <a:lnT w="6350" cap="flat" cmpd="sng" algn="ctr">
+                      <a:solidFill>
+                        <a:srgbClr val="CCCCCC"/>
+                      </a:solidFill>
+                      <a:prstDash val="solid"/>
+                      <a:round/>
+                      <a:headEnd type="none" w="med" len="med"/>
+                      <a:tailEnd type="none" w="med" len="med"/>
+                    </a:lnT>
+                    <a:lnB w="6350" cap="flat" cmpd="sng" algn="ctr">
+                      <a:solidFill>
+                        <a:srgbClr val="CCCCCC"/>
+                      </a:solidFill>
+                      <a:prstDash val="solid"/>
+                      <a:round/>
+                      <a:headEnd type="none" w="med" len="med"/>
+                      <a:tailEnd type="none" w="med" len="med"/>
+                    </a:lnB>
+                    <a:solidFill>
+                      <a:srgbClr val="EBF5FF"/>
+                    </a:solidFill>
+                  </a:tcPr>
+                </a:tc>
+              </a:tr>
+              <a:tr h="411480">
                 <a:tc>
                   <a:txBody>
                     <a:bodyPr/>
@@ -7478,7 +11127,28 @@
                           <a:ea typeface="Calibri" pitchFamily="34" charset="-122"/>
                           <a:cs typeface="Calibri" pitchFamily="34" charset="-120"/>
                         </a:rPr>
-                        <a:t>s-bd974a35aa994c838</a:t>
+                        <a:t>LuvinaAWS本番</a:t>
+                      </a:r>
+                      <a:endParaRPr lang="en-US" sz="900" dirty="0">
+                        <a:latin typeface="Calibri" charset="0"/>
+                        <a:ea typeface="Calibri" charset="0"/>
+                        <a:cs typeface="Calibri" charset="0"/>
+                      </a:endParaRPr>
+                    </a:p>
+                    <a:p>
+                      <a:pPr indent="0" marL="0">
+                        <a:buNone/>
+                      </a:pPr>
+                      <a:r>
+                        <a:rPr lang="en-US" sz="900" dirty="0">
+                          <a:solidFill>
+                            <a:srgbClr val="2D2D2D"/>
+                          </a:solidFill>
+                          <a:latin typeface="Calibri" pitchFamily="34" charset="0"/>
+                          <a:ea typeface="Calibri" pitchFamily="34" charset="-122"/>
+                          <a:cs typeface="Calibri" pitchFamily="34" charset="-120"/>
+                        </a:rPr>
+                        <a:t>10.238.2.198</a:t>
                       </a:r>
                       <a:endParaRPr lang="en-US" sz="900" dirty="0">
                         <a:latin typeface="Calibri" charset="0"/>
@@ -7524,11 +11194,209 @@
                       <a:headEnd type="none" w="med" len="med"/>
                       <a:tailEnd type="none" w="med" len="med"/>
                     </a:lnB>
+                  </a:tcPr>
+                </a:tc>
+                <a:tc>
+                  <a:txBody>
+                    <a:bodyPr/>
+                    <a:lstStyle/>
+                    <a:p>
+                      <a:pPr indent="0" marL="0">
+                        <a:buNone/>
+                      </a:pPr>
+                      <a:r>
+                        <a:rPr lang="en-US" sz="900" dirty="0">
+                          <a:solidFill>
+                            <a:srgbClr val="4488CC"/>
+                          </a:solidFill>
+                          <a:latin typeface="Calibri" pitchFamily="34" charset="0"/>
+                          <a:ea typeface="Calibri" pitchFamily="34" charset="-122"/>
+                          <a:cs typeface="Calibri" pitchFamily="34" charset="-120"/>
+                        </a:rPr>
+                        <a:t>NAT GW経由</a:t>
+                      </a:r>
+                      <a:endParaRPr lang="en-US" sz="900" dirty="0">
+                        <a:latin typeface="Calibri" charset="0"/>
+                        <a:ea typeface="Calibri" charset="0"/>
+                        <a:cs typeface="Calibri" charset="0"/>
+                      </a:endParaRPr>
+                    </a:p>
+                    <a:p>
+                      <a:pPr indent="0" marL="0">
+                        <a:buNone/>
+                      </a:pPr>
+                      <a:r>
+                        <a:rPr lang="en-US" sz="900" dirty="0">
+                          <a:solidFill>
+                            <a:srgbClr val="4488CC"/>
+                          </a:solidFill>
+                          <a:latin typeface="Calibri" pitchFamily="34" charset="0"/>
+                          <a:ea typeface="Calibri" pitchFamily="34" charset="-122"/>
+                          <a:cs typeface="Calibri" pitchFamily="34" charset="-120"/>
+                        </a:rPr>
+                        <a:t>(57.182.174.110)</a:t>
+                      </a:r>
+                      <a:endParaRPr lang="en-US" sz="900" dirty="0">
+                        <a:latin typeface="Calibri" charset="0"/>
+                        <a:ea typeface="Calibri" charset="0"/>
+                        <a:cs typeface="Calibri" charset="0"/>
+                      </a:endParaRPr>
+                    </a:p>
+                    <a:p>
+                      <a:pPr indent="0" marL="0">
+                        <a:buNone/>
+                      </a:pPr>
+                      <a:r>
+                        <a:rPr lang="en-US" sz="900" dirty="0">
+                          <a:solidFill>
+                            <a:srgbClr val="4488CC"/>
+                          </a:solidFill>
+                          <a:latin typeface="Calibri" pitchFamily="34" charset="0"/>
+                          <a:ea typeface="Calibri" pitchFamily="34" charset="-122"/>
+                          <a:cs typeface="Calibri" pitchFamily="34" charset="-120"/>
+                        </a:rPr>
+                        <a:t>※要確認</a:t>
+                      </a:r>
+                      <a:endParaRPr lang="en-US" sz="900" dirty="0">
+                        <a:latin typeface="Calibri" charset="0"/>
+                        <a:ea typeface="Calibri" charset="0"/>
+                        <a:cs typeface="Calibri" charset="0"/>
+                      </a:endParaRPr>
+                    </a:p>
+                  </a:txBody>
+                  <a:tcPr marL="91440" marR="91440" marT="45720" marB="45720">
+                    <a:lnL w="6350" cap="flat" cmpd="sng" algn="ctr">
+                      <a:solidFill>
+                        <a:srgbClr val="CCCCCC"/>
+                      </a:solidFill>
+                      <a:prstDash val="solid"/>
+                      <a:round/>
+                      <a:headEnd type="none" w="med" len="med"/>
+                      <a:tailEnd type="none" w="med" len="med"/>
+                    </a:lnL>
+                    <a:lnR w="6350" cap="flat" cmpd="sng" algn="ctr">
+                      <a:solidFill>
+                        <a:srgbClr val="CCCCCC"/>
+                      </a:solidFill>
+                      <a:prstDash val="solid"/>
+                      <a:round/>
+                      <a:headEnd type="none" w="med" len="med"/>
+                      <a:tailEnd type="none" w="med" len="med"/>
+                    </a:lnR>
+                    <a:lnT w="6350" cap="flat" cmpd="sng" algn="ctr">
+                      <a:solidFill>
+                        <a:srgbClr val="CCCCCC"/>
+                      </a:solidFill>
+                      <a:prstDash val="solid"/>
+                      <a:round/>
+                      <a:headEnd type="none" w="med" len="med"/>
+                      <a:tailEnd type="none" w="med" len="med"/>
+                    </a:lnT>
+                    <a:lnB w="6350" cap="flat" cmpd="sng" algn="ctr">
+                      <a:solidFill>
+                        <a:srgbClr val="CCCCCC"/>
+                      </a:solidFill>
+                      <a:prstDash val="solid"/>
+                      <a:round/>
+                      <a:headEnd type="none" w="med" len="med"/>
+                      <a:tailEnd type="none" w="med" len="med"/>
+                    </a:lnB>
                     <a:solidFill>
-                      <a:srgbClr val="FFFFFF"/>
+                      <a:srgbClr val="F0F8FF"/>
                     </a:solidFill>
                   </a:tcPr>
                 </a:tc>
+                <a:tc>
+                  <a:txBody>
+                    <a:bodyPr/>
+                    <a:lstStyle/>
+                    <a:p>
+                      <a:pPr indent="0" marL="0">
+                        <a:buNone/>
+                      </a:pPr>
+                      <a:r>
+                        <a:rPr lang="en-US" sz="900" dirty="0">
+                          <a:solidFill>
+                            <a:srgbClr val="4488CC"/>
+                          </a:solidFill>
+                          <a:latin typeface="Calibri" pitchFamily="34" charset="0"/>
+                          <a:ea typeface="Calibri" pitchFamily="34" charset="-122"/>
+                          <a:cs typeface="Calibri" pitchFamily="34" charset="-120"/>
+                        </a:rPr>
+                        <a:t>ギフトサーバー本番</a:t>
+                      </a:r>
+                      <a:endParaRPr lang="en-US" sz="900" dirty="0">
+                        <a:latin typeface="Calibri" charset="0"/>
+                        <a:ea typeface="Calibri" charset="0"/>
+                        <a:cs typeface="Calibri" charset="0"/>
+                      </a:endParaRPr>
+                    </a:p>
+                    <a:p>
+                      <a:pPr indent="0" marL="0">
+                        <a:buNone/>
+                      </a:pPr>
+                      <a:r>
+                        <a:rPr lang="en-US" sz="900" dirty="0">
+                          <a:solidFill>
+                            <a:srgbClr val="4488CC"/>
+                          </a:solidFill>
+                          <a:latin typeface="Calibri" pitchFamily="34" charset="0"/>
+                          <a:ea typeface="Calibri" pitchFamily="34" charset="-122"/>
+                          <a:cs typeface="Calibri" pitchFamily="34" charset="-120"/>
+                        </a:rPr>
+                        <a:t>(IPアドレス未確定)</a:t>
+                      </a:r>
+                      <a:endParaRPr lang="en-US" sz="900" dirty="0">
+                        <a:latin typeface="Calibri" charset="0"/>
+                        <a:ea typeface="Calibri" charset="0"/>
+                        <a:cs typeface="Calibri" charset="0"/>
+                      </a:endParaRPr>
+                    </a:p>
+                  </a:txBody>
+                  <a:tcPr marL="91440" marR="91440" marT="45720" marB="45720">
+                    <a:lnL w="6350" cap="flat" cmpd="sng" algn="ctr">
+                      <a:solidFill>
+                        <a:srgbClr val="CCCCCC"/>
+                      </a:solidFill>
+                      <a:prstDash val="solid"/>
+                      <a:round/>
+                      <a:headEnd type="none" w="med" len="med"/>
+                      <a:tailEnd type="none" w="med" len="med"/>
+                    </a:lnL>
+                    <a:lnR w="6350" cap="flat" cmpd="sng" algn="ctr">
+                      <a:solidFill>
+                        <a:srgbClr val="CCCCCC"/>
+                      </a:solidFill>
+                      <a:prstDash val="solid"/>
+                      <a:round/>
+                      <a:headEnd type="none" w="med" len="med"/>
+                      <a:tailEnd type="none" w="med" len="med"/>
+                    </a:lnR>
+                    <a:lnT w="6350" cap="flat" cmpd="sng" algn="ctr">
+                      <a:solidFill>
+                        <a:srgbClr val="CCCCCC"/>
+                      </a:solidFill>
+                      <a:prstDash val="solid"/>
+                      <a:round/>
+                      <a:headEnd type="none" w="med" len="med"/>
+                      <a:tailEnd type="none" w="med" len="med"/>
+                    </a:lnT>
+                    <a:lnB w="6350" cap="flat" cmpd="sng" algn="ctr">
+                      <a:solidFill>
+                        <a:srgbClr val="CCCCCC"/>
+                      </a:solidFill>
+                      <a:prstDash val="solid"/>
+                      <a:round/>
+                      <a:headEnd type="none" w="med" len="med"/>
+                      <a:tailEnd type="none" w="med" len="med"/>
+                    </a:lnB>
+                    <a:solidFill>
+                      <a:srgbClr val="F0F8FF"/>
+                    </a:solidFill>
+                  </a:tcPr>
+                </a:tc>
+              </a:tr>
+              <a:tr h="411480">
                 <a:tc>
                   <a:txBody>
                     <a:bodyPr/>
@@ -7546,7 +11414,7 @@
                           <a:ea typeface="Calibri" pitchFamily="34" charset="-122"/>
                           <a:cs typeface="Calibri" pitchFamily="34" charset="-120"/>
                         </a:rPr>
-                        <a:t>ONLINE</a:t>
+                        <a:t>LuvinaAWS開発</a:t>
                       </a:r>
                       <a:endParaRPr lang="en-US" sz="900" dirty="0">
                         <a:latin typeface="Calibri" charset="0"/>
@@ -7554,53 +11422,6 @@
                         <a:cs typeface="Calibri" charset="0"/>
                       </a:endParaRPr>
                     </a:p>
-                  </a:txBody>
-                  <a:tcPr marL="91440" marR="91440" marT="45720" marB="45720">
-                    <a:lnL w="6350" cap="flat" cmpd="sng" algn="ctr">
-                      <a:solidFill>
-                        <a:srgbClr val="CCCCCC"/>
-                      </a:solidFill>
-                      <a:prstDash val="solid"/>
-                      <a:round/>
-                      <a:headEnd type="none" w="med" len="med"/>
-                      <a:tailEnd type="none" w="med" len="med"/>
-                    </a:lnL>
-                    <a:lnR w="6350" cap="flat" cmpd="sng" algn="ctr">
-                      <a:solidFill>
-                        <a:srgbClr val="CCCCCC"/>
-                      </a:solidFill>
-                      <a:prstDash val="solid"/>
-                      <a:round/>
-                      <a:headEnd type="none" w="med" len="med"/>
-                      <a:tailEnd type="none" w="med" len="med"/>
-                    </a:lnR>
-                    <a:lnT w="6350" cap="flat" cmpd="sng" algn="ctr">
-                      <a:solidFill>
-                        <a:srgbClr val="CCCCCC"/>
-                      </a:solidFill>
-                      <a:prstDash val="solid"/>
-                      <a:round/>
-                      <a:headEnd type="none" w="med" len="med"/>
-                      <a:tailEnd type="none" w="med" len="med"/>
-                    </a:lnT>
-                    <a:lnB w="6350" cap="flat" cmpd="sng" algn="ctr">
-                      <a:solidFill>
-                        <a:srgbClr val="CCCCCC"/>
-                      </a:solidFill>
-                      <a:prstDash val="solid"/>
-                      <a:round/>
-                      <a:headEnd type="none" w="med" len="med"/>
-                      <a:tailEnd type="none" w="med" len="med"/>
-                    </a:lnB>
-                    <a:solidFill>
-                      <a:srgbClr val="FFFFFF"/>
-                    </a:solidFill>
-                  </a:tcPr>
-                </a:tc>
-                <a:tc>
-                  <a:txBody>
-                    <a:bodyPr/>
-                    <a:lstStyle/>
                     <a:p>
                       <a:pPr indent="0" marL="0">
                         <a:buNone/>
@@ -7614,461 +11435,7 @@
                           <a:ea typeface="Calibri" pitchFamily="34" charset="-122"/>
                           <a:cs typeface="Calibri" pitchFamily="34" charset="-120"/>
                         </a:rPr>
-                        <a:t>VPC / S3</a:t>
-                      </a:r>
-                      <a:endParaRPr lang="en-US" sz="900" dirty="0">
-                        <a:latin typeface="Calibri" charset="0"/>
-                        <a:ea typeface="Calibri" charset="0"/>
-                        <a:cs typeface="Calibri" charset="0"/>
-                      </a:endParaRPr>
-                    </a:p>
-                  </a:txBody>
-                  <a:tcPr marL="91440" marR="91440" marT="45720" marB="45720">
-                    <a:lnL w="6350" cap="flat" cmpd="sng" algn="ctr">
-                      <a:solidFill>
-                        <a:srgbClr val="CCCCCC"/>
-                      </a:solidFill>
-                      <a:prstDash val="solid"/>
-                      <a:round/>
-                      <a:headEnd type="none" w="med" len="med"/>
-                      <a:tailEnd type="none" w="med" len="med"/>
-                    </a:lnL>
-                    <a:lnR w="6350" cap="flat" cmpd="sng" algn="ctr">
-                      <a:solidFill>
-                        <a:srgbClr val="CCCCCC"/>
-                      </a:solidFill>
-                      <a:prstDash val="solid"/>
-                      <a:round/>
-                      <a:headEnd type="none" w="med" len="med"/>
-                      <a:tailEnd type="none" w="med" len="med"/>
-                    </a:lnR>
-                    <a:lnT w="6350" cap="flat" cmpd="sng" algn="ctr">
-                      <a:solidFill>
-                        <a:srgbClr val="CCCCCC"/>
-                      </a:solidFill>
-                      <a:prstDash val="solid"/>
-                      <a:round/>
-                      <a:headEnd type="none" w="med" len="med"/>
-                      <a:tailEnd type="none" w="med" len="med"/>
-                    </a:lnT>
-                    <a:lnB w="6350" cap="flat" cmpd="sng" algn="ctr">
-                      <a:solidFill>
-                        <a:srgbClr val="CCCCCC"/>
-                      </a:solidFill>
-                      <a:prstDash val="solid"/>
-                      <a:round/>
-                      <a:headEnd type="none" w="med" len="med"/>
-                      <a:tailEnd type="none" w="med" len="med"/>
-                    </a:lnB>
-                    <a:solidFill>
-                      <a:srgbClr val="FFFFFF"/>
-                    </a:solidFill>
-                  </a:tcPr>
-                </a:tc>
-              </a:tr>
-            </a:tbl>
-          </a:graphicData>
-        </a:graphic>
-      </p:graphicFrame>
-      <p:sp>
-        <p:nvSpPr>
-          <p:cNvPr id="13" name="Text 7"/>
-          <p:cNvSpPr/>
-          <p:nvPr/>
-        </p:nvSpPr>
-        <p:spPr>
-          <a:xfrm>
-            <a:off x="365760" y="2971800"/>
-            <a:ext cx="4389120" cy="256032"/>
-          </a:xfrm>
-          <a:prstGeom prst="rect">
-            <a:avLst/>
-          </a:prstGeom>
-          <a:noFill/>
-          <a:ln/>
-        </p:spPr>
-        <p:txBody>
-          <a:bodyPr wrap="square" lIns="0" tIns="0" rIns="0" bIns="0" rtlCol="0" anchor="ctr"/>
-          <a:lstStyle/>
-          <a:p>
-            <a:pPr indent="0" marL="0">
-              <a:buNone/>
-            </a:pPr>
-            <a:r>
-              <a:rPr lang="en-US" sz="900" dirty="0">
-                <a:solidFill>
-                  <a:srgbClr val="888888"/>
-                </a:solidFill>
-                <a:latin typeface="Calibri" pitchFamily="34" charset="0"/>
-                <a:ea typeface="Calibri" pitchFamily="34" charset="-122"/>
-                <a:cs typeface="Calibri" pitchFamily="34" charset="-120"/>
-              </a:rPr>
-              <a:t>SFTPアクセス元: USMH網 10.156.96.192/26 → sg-ep-tf (TCP 22)</a:t>
-            </a:r>
-            <a:endParaRPr lang="en-US" sz="900" dirty="0"/>
-          </a:p>
-        </p:txBody>
-      </p:sp>
-      <p:sp>
-        <p:nvSpPr>
-          <p:cNvPr id="14" name="Text 8"/>
-          <p:cNvSpPr/>
-          <p:nvPr/>
-        </p:nvSpPr>
-        <p:spPr>
-          <a:xfrm>
-            <a:off x="365760" y="3337560"/>
-            <a:ext cx="4389120" cy="256032"/>
-          </a:xfrm>
-          <a:prstGeom prst="rect">
-            <a:avLst/>
-          </a:prstGeom>
-          <a:noFill/>
-          <a:ln/>
-        </p:spPr>
-        <p:txBody>
-          <a:bodyPr wrap="square" lIns="0" tIns="0" rIns="0" bIns="0" rtlCol="0" anchor="ctr"/>
-          <a:lstStyle/>
-          <a:p>
-            <a:pPr indent="0" marL="0">
-              <a:buNone/>
-            </a:pPr>
-            <a:r>
-              <a:rPr lang="en-US" sz="1200" b="1" dirty="0">
-                <a:solidFill>
-                  <a:srgbClr val="D0232A"/>
-                </a:solidFill>
-                <a:latin typeface="Calibri" pitchFamily="34" charset="0"/>
-                <a:ea typeface="Calibri" pitchFamily="34" charset="-122"/>
-                <a:cs typeface="Calibri" pitchFamily="34" charset="-120"/>
-              </a:rPr>
-              <a:t>Route53 / NAT Gateway</a:t>
-            </a:r>
-            <a:endParaRPr lang="en-US" sz="1200" dirty="0"/>
-          </a:p>
-        </p:txBody>
-      </p:sp>
-      <p:graphicFrame>
-        <p:nvGraphicFramePr>
-          <p:cNvPr id="23" name="Table 1"/>
-          <p:cNvGraphicFramePr>
-            <a:graphicFrameLocks noGrp="1"/>
-          </p:cNvGraphicFramePr>
-          <p:nvPr>
-            <p:extLst>
-              <p:ext uri="{D42A27DB-BD31-4B8C-83A1-F6EECF244321}">
-                <p14:modId xmlns:p14="http://schemas.microsoft.com/office/powerpoint/2010/main" val="1579011935"/>
-              </p:ext>
-            </p:extLst>
-          </p:nvPr>
-        </p:nvGraphicFramePr>
-        <p:xfrm>
-          <a:off x="365760" y="3611880"/>
-          <a:ext cx="4389120" cy="914400"/>
-        </p:xfrm>
-        <a:graphic>
-          <a:graphicData uri="http://schemas.openxmlformats.org/drawingml/2006/table">
-            <a:tbl>
-              <a:tblPr/>
-              <a:tblGrid>
-                <a:gridCol w="1645920"/>
-                <a:gridCol w="2743200"/>
-              </a:tblGrid>
-              <a:tr h="329184">
-                <a:tc>
-                  <a:txBody>
-                    <a:bodyPr/>
-                    <a:lstStyle/>
-                    <a:p>
-                      <a:pPr indent="0" marL="0">
-                        <a:buNone/>
-                      </a:pPr>
-                      <a:r>
-                        <a:rPr lang="en-US" sz="900" b="1" dirty="0">
-                          <a:solidFill>
-                            <a:srgbClr val="FFFFFF"/>
-                          </a:solidFill>
-                          <a:latin typeface="Calibri" pitchFamily="34" charset="0"/>
-                          <a:ea typeface="Calibri" pitchFamily="34" charset="-122"/>
-                          <a:cs typeface="Calibri" pitchFamily="34" charset="-120"/>
-                        </a:rPr>
-                        <a:t>項目</a:t>
-                      </a:r>
-                      <a:endParaRPr lang="en-US" sz="900" dirty="0">
-                        <a:latin typeface="Calibri" charset="0"/>
-                        <a:ea typeface="Calibri" charset="0"/>
-                        <a:cs typeface="Calibri" charset="0"/>
-                      </a:endParaRPr>
-                    </a:p>
-                  </a:txBody>
-                  <a:tcPr marL="91440" marR="91440" marT="45720" marB="45720">
-                    <a:lnL w="6350" cap="flat" cmpd="sng" algn="ctr">
-                      <a:solidFill>
-                        <a:srgbClr val="CCCCCC"/>
-                      </a:solidFill>
-                      <a:prstDash val="solid"/>
-                      <a:round/>
-                      <a:headEnd type="none" w="med" len="med"/>
-                      <a:tailEnd type="none" w="med" len="med"/>
-                    </a:lnL>
-                    <a:lnR w="6350" cap="flat" cmpd="sng" algn="ctr">
-                      <a:solidFill>
-                        <a:srgbClr val="CCCCCC"/>
-                      </a:solidFill>
-                      <a:prstDash val="solid"/>
-                      <a:round/>
-                      <a:headEnd type="none" w="med" len="med"/>
-                      <a:tailEnd type="none" w="med" len="med"/>
-                    </a:lnR>
-                    <a:lnT w="6350" cap="flat" cmpd="sng" algn="ctr">
-                      <a:solidFill>
-                        <a:srgbClr val="CCCCCC"/>
-                      </a:solidFill>
-                      <a:prstDash val="solid"/>
-                      <a:round/>
-                      <a:headEnd type="none" w="med" len="med"/>
-                      <a:tailEnd type="none" w="med" len="med"/>
-                    </a:lnT>
-                    <a:lnB w="6350" cap="flat" cmpd="sng" algn="ctr">
-                      <a:solidFill>
-                        <a:srgbClr val="CCCCCC"/>
-                      </a:solidFill>
-                      <a:prstDash val="solid"/>
-                      <a:round/>
-                      <a:headEnd type="none" w="med" len="med"/>
-                      <a:tailEnd type="none" w="med" len="med"/>
-                    </a:lnB>
-                    <a:solidFill>
-                      <a:srgbClr val="D0232A"/>
-                    </a:solidFill>
-                  </a:tcPr>
-                </a:tc>
-                <a:tc>
-                  <a:txBody>
-                    <a:bodyPr/>
-                    <a:lstStyle/>
-                    <a:p>
-                      <a:pPr indent="0" marL="0">
-                        <a:buNone/>
-                      </a:pPr>
-                      <a:r>
-                        <a:rPr lang="en-US" sz="900" b="1" dirty="0">
-                          <a:solidFill>
-                            <a:srgbClr val="FFFFFF"/>
-                          </a:solidFill>
-                          <a:latin typeface="Calibri" pitchFamily="34" charset="0"/>
-                          <a:ea typeface="Calibri" pitchFamily="34" charset="-122"/>
-                          <a:cs typeface="Calibri" pitchFamily="34" charset="-120"/>
-                        </a:rPr>
-                        <a:t>値</a:t>
-                      </a:r>
-                      <a:endParaRPr lang="en-US" sz="900" dirty="0">
-                        <a:latin typeface="Calibri" charset="0"/>
-                        <a:ea typeface="Calibri" charset="0"/>
-                        <a:cs typeface="Calibri" charset="0"/>
-                      </a:endParaRPr>
-                    </a:p>
-                  </a:txBody>
-                  <a:tcPr marL="91440" marR="91440" marT="45720" marB="45720">
-                    <a:lnL w="6350" cap="flat" cmpd="sng" algn="ctr">
-                      <a:solidFill>
-                        <a:srgbClr val="CCCCCC"/>
-                      </a:solidFill>
-                      <a:prstDash val="solid"/>
-                      <a:round/>
-                      <a:headEnd type="none" w="med" len="med"/>
-                      <a:tailEnd type="none" w="med" len="med"/>
-                    </a:lnL>
-                    <a:lnR w="6350" cap="flat" cmpd="sng" algn="ctr">
-                      <a:solidFill>
-                        <a:srgbClr val="CCCCCC"/>
-                      </a:solidFill>
-                      <a:prstDash val="solid"/>
-                      <a:round/>
-                      <a:headEnd type="none" w="med" len="med"/>
-                      <a:tailEnd type="none" w="med" len="med"/>
-                    </a:lnR>
-                    <a:lnT w="6350" cap="flat" cmpd="sng" algn="ctr">
-                      <a:solidFill>
-                        <a:srgbClr val="CCCCCC"/>
-                      </a:solidFill>
-                      <a:prstDash val="solid"/>
-                      <a:round/>
-                      <a:headEnd type="none" w="med" len="med"/>
-                      <a:tailEnd type="none" w="med" len="med"/>
-                    </a:lnT>
-                    <a:lnB w="6350" cap="flat" cmpd="sng" algn="ctr">
-                      <a:solidFill>
-                        <a:srgbClr val="CCCCCC"/>
-                      </a:solidFill>
-                      <a:prstDash val="solid"/>
-                      <a:round/>
-                      <a:headEnd type="none" w="med" len="med"/>
-                      <a:tailEnd type="none" w="med" len="med"/>
-                    </a:lnB>
-                    <a:solidFill>
-                      <a:srgbClr val="D0232A"/>
-                    </a:solidFill>
-                  </a:tcPr>
-                </a:tc>
-              </a:tr>
-              <a:tr h="329184">
-                <a:tc>
-                  <a:txBody>
-                    <a:bodyPr/>
-                    <a:lstStyle/>
-                    <a:p>
-                      <a:pPr indent="0" marL="0">
-                        <a:buNone/>
-                      </a:pPr>
-                      <a:r>
-                        <a:rPr lang="en-US" sz="900" dirty="0">
-                          <a:solidFill>
-                            <a:srgbClr val="2D2D2D"/>
-                          </a:solidFill>
-                          <a:latin typeface="Calibri" pitchFamily="34" charset="0"/>
-                          <a:ea typeface="Calibri" pitchFamily="34" charset="-122"/>
-                          <a:cs typeface="Calibri" pitchFamily="34" charset="-120"/>
-                        </a:rPr>
-                        <a:t>ホストゾーン</a:t>
-                      </a:r>
-                      <a:endParaRPr lang="en-US" sz="900" dirty="0">
-                        <a:latin typeface="Calibri" charset="0"/>
-                        <a:ea typeface="Calibri" charset="0"/>
-                        <a:cs typeface="Calibri" charset="0"/>
-                      </a:endParaRPr>
-                    </a:p>
-                  </a:txBody>
-                  <a:tcPr marL="91440" marR="91440" marT="45720" marB="45720">
-                    <a:lnL w="6350" cap="flat" cmpd="sng" algn="ctr">
-                      <a:solidFill>
-                        <a:srgbClr val="CCCCCC"/>
-                      </a:solidFill>
-                      <a:prstDash val="solid"/>
-                      <a:round/>
-                      <a:headEnd type="none" w="med" len="med"/>
-                      <a:tailEnd type="none" w="med" len="med"/>
-                    </a:lnL>
-                    <a:lnR w="6350" cap="flat" cmpd="sng" algn="ctr">
-                      <a:solidFill>
-                        <a:srgbClr val="CCCCCC"/>
-                      </a:solidFill>
-                      <a:prstDash val="solid"/>
-                      <a:round/>
-                      <a:headEnd type="none" w="med" len="med"/>
-                      <a:tailEnd type="none" w="med" len="med"/>
-                    </a:lnR>
-                    <a:lnT w="6350" cap="flat" cmpd="sng" algn="ctr">
-                      <a:solidFill>
-                        <a:srgbClr val="CCCCCC"/>
-                      </a:solidFill>
-                      <a:prstDash val="solid"/>
-                      <a:round/>
-                      <a:headEnd type="none" w="med" len="med"/>
-                      <a:tailEnd type="none" w="med" len="med"/>
-                    </a:lnT>
-                    <a:lnB w="6350" cap="flat" cmpd="sng" algn="ctr">
-                      <a:solidFill>
-                        <a:srgbClr val="CCCCCC"/>
-                      </a:solidFill>
-                      <a:prstDash val="solid"/>
-                      <a:round/>
-                      <a:headEnd type="none" w="med" len="med"/>
-                      <a:tailEnd type="none" w="med" len="med"/>
-                    </a:lnB>
-                    <a:solidFill>
-                      <a:srgbClr val="FFFFFF"/>
-                    </a:solidFill>
-                  </a:tcPr>
-                </a:tc>
-                <a:tc>
-                  <a:txBody>
-                    <a:bodyPr/>
-                    <a:lstStyle/>
-                    <a:p>
-                      <a:pPr indent="0" marL="0">
-                        <a:buNone/>
-                      </a:pPr>
-                      <a:r>
-                        <a:rPr lang="en-US" sz="900" dirty="0">
-                          <a:solidFill>
-                            <a:srgbClr val="2D2D2D"/>
-                          </a:solidFill>
-                          <a:latin typeface="Calibri" pitchFamily="34" charset="0"/>
-                          <a:ea typeface="Calibri" pitchFamily="34" charset="-122"/>
-                          <a:cs typeface="Calibri" pitchFamily="34" charset="-120"/>
-                        </a:rPr>
-                        <a:t>ignicapos.com（パブリック）</a:t>
-                      </a:r>
-                      <a:endParaRPr lang="en-US" sz="900" dirty="0">
-                        <a:latin typeface="Calibri" charset="0"/>
-                        <a:ea typeface="Calibri" charset="0"/>
-                        <a:cs typeface="Calibri" charset="0"/>
-                      </a:endParaRPr>
-                    </a:p>
-                  </a:txBody>
-                  <a:tcPr marL="91440" marR="91440" marT="45720" marB="45720">
-                    <a:lnL w="6350" cap="flat" cmpd="sng" algn="ctr">
-                      <a:solidFill>
-                        <a:srgbClr val="CCCCCC"/>
-                      </a:solidFill>
-                      <a:prstDash val="solid"/>
-                      <a:round/>
-                      <a:headEnd type="none" w="med" len="med"/>
-                      <a:tailEnd type="none" w="med" len="med"/>
-                    </a:lnL>
-                    <a:lnR w="6350" cap="flat" cmpd="sng" algn="ctr">
-                      <a:solidFill>
-                        <a:srgbClr val="CCCCCC"/>
-                      </a:solidFill>
-                      <a:prstDash val="solid"/>
-                      <a:round/>
-                      <a:headEnd type="none" w="med" len="med"/>
-                      <a:tailEnd type="none" w="med" len="med"/>
-                    </a:lnR>
-                    <a:lnT w="6350" cap="flat" cmpd="sng" algn="ctr">
-                      <a:solidFill>
-                        <a:srgbClr val="CCCCCC"/>
-                      </a:solidFill>
-                      <a:prstDash val="solid"/>
-                      <a:round/>
-                      <a:headEnd type="none" w="med" len="med"/>
-                      <a:tailEnd type="none" w="med" len="med"/>
-                    </a:lnT>
-                    <a:lnB w="6350" cap="flat" cmpd="sng" algn="ctr">
-                      <a:solidFill>
-                        <a:srgbClr val="CCCCCC"/>
-                      </a:solidFill>
-                      <a:prstDash val="solid"/>
-                      <a:round/>
-                      <a:headEnd type="none" w="med" len="med"/>
-                      <a:tailEnd type="none" w="med" len="med"/>
-                    </a:lnB>
-                    <a:solidFill>
-                      <a:srgbClr val="FFFFFF"/>
-                    </a:solidFill>
-                  </a:tcPr>
-                </a:tc>
-              </a:tr>
-              <a:tr h="329184">
-                <a:tc>
-                  <a:txBody>
-                    <a:bodyPr/>
-                    <a:lstStyle/>
-                    <a:p>
-                      <a:pPr indent="0" marL="0">
-                        <a:buNone/>
-                      </a:pPr>
-                      <a:r>
-                        <a:rPr lang="en-US" sz="900" dirty="0">
-                          <a:solidFill>
-                            <a:srgbClr val="2D2D2D"/>
-                          </a:solidFill>
-                          <a:latin typeface="Calibri" pitchFamily="34" charset="0"/>
-                          <a:ea typeface="Calibri" pitchFamily="34" charset="-122"/>
-                          <a:cs typeface="Calibri" pitchFamily="34" charset="-120"/>
-                        </a:rPr>
-                        <a:t>ゾーンID</a:t>
+                        <a:t>10.239.2.193</a:t>
                       </a:r>
                       <a:endParaRPr lang="en-US" sz="900" dirty="0">
                         <a:latin typeface="Calibri" charset="0"/>
@@ -8130,13 +11497,55 @@
                       <a:r>
                         <a:rPr lang="en-US" sz="900" dirty="0">
                           <a:solidFill>
-                            <a:srgbClr val="2D2D2D"/>
+                            <a:srgbClr val="4488CC"/>
                           </a:solidFill>
                           <a:latin typeface="Calibri" pitchFamily="34" charset="0"/>
                           <a:ea typeface="Calibri" pitchFamily="34" charset="-122"/>
                           <a:cs typeface="Calibri" pitchFamily="34" charset="-120"/>
                         </a:rPr>
-                        <a:t>Z017481510MTQ4HID9VH2</a:t>
+                        <a:t>NAT GW経由</a:t>
+                      </a:r>
+                      <a:endParaRPr lang="en-US" sz="900" dirty="0">
+                        <a:latin typeface="Calibri" charset="0"/>
+                        <a:ea typeface="Calibri" charset="0"/>
+                        <a:cs typeface="Calibri" charset="0"/>
+                      </a:endParaRPr>
+                    </a:p>
+                    <a:p>
+                      <a:pPr indent="0" marL="0">
+                        <a:buNone/>
+                      </a:pPr>
+                      <a:r>
+                        <a:rPr lang="en-US" sz="900" dirty="0">
+                          <a:solidFill>
+                            <a:srgbClr val="4488CC"/>
+                          </a:solidFill>
+                          <a:latin typeface="Calibri" pitchFamily="34" charset="0"/>
+                          <a:ea typeface="Calibri" pitchFamily="34" charset="-122"/>
+                          <a:cs typeface="Calibri" pitchFamily="34" charset="-120"/>
+                        </a:rPr>
+                        <a:t>(STG側IP)</a:t>
+                      </a:r>
+                      <a:endParaRPr lang="en-US" sz="900" dirty="0">
+                        <a:latin typeface="Calibri" charset="0"/>
+                        <a:ea typeface="Calibri" charset="0"/>
+                        <a:cs typeface="Calibri" charset="0"/>
+                      </a:endParaRPr>
+                    </a:p>
+                    <a:p>
+                      <a:pPr indent="0" marL="0">
+                        <a:buNone/>
+                      </a:pPr>
+                      <a:r>
+                        <a:rPr lang="en-US" sz="900" dirty="0">
+                          <a:solidFill>
+                            <a:srgbClr val="4488CC"/>
+                          </a:solidFill>
+                          <a:latin typeface="Calibri" pitchFamily="34" charset="0"/>
+                          <a:ea typeface="Calibri" pitchFamily="34" charset="-122"/>
+                          <a:cs typeface="Calibri" pitchFamily="34" charset="-120"/>
+                        </a:rPr>
+                        <a:t>※要確認</a:t>
                       </a:r>
                       <a:endParaRPr lang="en-US" sz="900" dirty="0">
                         <a:latin typeface="Calibri" charset="0"/>
@@ -8183,77 +11592,7 @@
                       <a:tailEnd type="none" w="med" len="med"/>
                     </a:lnB>
                     <a:solidFill>
-                      <a:srgbClr val="F5F5F5"/>
-                    </a:solidFill>
-                  </a:tcPr>
-                </a:tc>
-              </a:tr>
-              <a:tr h="329184">
-                <a:tc>
-                  <a:txBody>
-                    <a:bodyPr/>
-                    <a:lstStyle/>
-                    <a:p>
-                      <a:pPr indent="0" marL="0">
-                        <a:buNone/>
-                      </a:pPr>
-                      <a:r>
-                        <a:rPr lang="en-US" sz="900" dirty="0">
-                          <a:solidFill>
-                            <a:srgbClr val="2D2D2D"/>
-                          </a:solidFill>
-                          <a:latin typeface="Calibri" pitchFamily="34" charset="0"/>
-                          <a:ea typeface="Calibri" pitchFamily="34" charset="-122"/>
-                          <a:cs typeface="Calibri" pitchFamily="34" charset="-120"/>
-                        </a:rPr>
-                        <a:t>NAT Gateway ID</a:t>
-                      </a:r>
-                      <a:endParaRPr lang="en-US" sz="900" dirty="0">
-                        <a:latin typeface="Calibri" charset="0"/>
-                        <a:ea typeface="Calibri" charset="0"/>
-                        <a:cs typeface="Calibri" charset="0"/>
-                      </a:endParaRPr>
-                    </a:p>
-                  </a:txBody>
-                  <a:tcPr marL="91440" marR="91440" marT="45720" marB="45720">
-                    <a:lnL w="6350" cap="flat" cmpd="sng" algn="ctr">
-                      <a:solidFill>
-                        <a:srgbClr val="CCCCCC"/>
-                      </a:solidFill>
-                      <a:prstDash val="solid"/>
-                      <a:round/>
-                      <a:headEnd type="none" w="med" len="med"/>
-                      <a:tailEnd type="none" w="med" len="med"/>
-                    </a:lnL>
-                    <a:lnR w="6350" cap="flat" cmpd="sng" algn="ctr">
-                      <a:solidFill>
-                        <a:srgbClr val="CCCCCC"/>
-                      </a:solidFill>
-                      <a:prstDash val="solid"/>
-                      <a:round/>
-                      <a:headEnd type="none" w="med" len="med"/>
-                      <a:tailEnd type="none" w="med" len="med"/>
-                    </a:lnR>
-                    <a:lnT w="6350" cap="flat" cmpd="sng" algn="ctr">
-                      <a:solidFill>
-                        <a:srgbClr val="CCCCCC"/>
-                      </a:solidFill>
-                      <a:prstDash val="solid"/>
-                      <a:round/>
-                      <a:headEnd type="none" w="med" len="med"/>
-                      <a:tailEnd type="none" w="med" len="med"/>
-                    </a:lnT>
-                    <a:lnB w="6350" cap="flat" cmpd="sng" algn="ctr">
-                      <a:solidFill>
-                        <a:srgbClr val="CCCCCC"/>
-                      </a:solidFill>
-                      <a:prstDash val="solid"/>
-                      <a:round/>
-                      <a:headEnd type="none" w="med" len="med"/>
-                      <a:tailEnd type="none" w="med" len="med"/>
-                    </a:lnB>
-                    <a:solidFill>
-                      <a:srgbClr val="FFFFFF"/>
+                      <a:srgbClr val="F8FBFF"/>
                     </a:solidFill>
                   </a:tcPr>
                 </a:tc>
@@ -8268,13 +11607,34 @@
                       <a:r>
                         <a:rPr lang="en-US" sz="900" dirty="0">
                           <a:solidFill>
-                            <a:srgbClr val="2D2D2D"/>
+                            <a:srgbClr val="4488CC"/>
                           </a:solidFill>
                           <a:latin typeface="Calibri" pitchFamily="34" charset="0"/>
                           <a:ea typeface="Calibri" pitchFamily="34" charset="-122"/>
                           <a:cs typeface="Calibri" pitchFamily="34" charset="-120"/>
                         </a:rPr>
-                        <a:t>nat-0e97a1bcf24e2e8ef</a:t>
+                        <a:t>ギフトサーバー検証</a:t>
+                      </a:r>
+                      <a:endParaRPr lang="en-US" sz="900" dirty="0">
+                        <a:latin typeface="Calibri" charset="0"/>
+                        <a:ea typeface="Calibri" charset="0"/>
+                        <a:cs typeface="Calibri" charset="0"/>
+                      </a:endParaRPr>
+                    </a:p>
+                    <a:p>
+                      <a:pPr indent="0" marL="0">
+                        <a:buNone/>
+                      </a:pPr>
+                      <a:r>
+                        <a:rPr lang="en-US" sz="900" dirty="0">
+                          <a:solidFill>
+                            <a:srgbClr val="4488CC"/>
+                          </a:solidFill>
+                          <a:latin typeface="Calibri" pitchFamily="34" charset="0"/>
+                          <a:ea typeface="Calibri" pitchFamily="34" charset="-122"/>
+                          <a:cs typeface="Calibri" pitchFamily="34" charset="-120"/>
+                        </a:rPr>
+                        <a:t>(IPアドレス未確定)</a:t>
                       </a:r>
                       <a:endParaRPr lang="en-US" sz="900" dirty="0">
                         <a:latin typeface="Calibri" charset="0"/>
@@ -8321,283 +11681,7 @@
                       <a:tailEnd type="none" w="med" len="med"/>
                     </a:lnB>
                     <a:solidFill>
-                      <a:srgbClr val="FFFFFF"/>
-                    </a:solidFill>
-                  </a:tcPr>
-                </a:tc>
-              </a:tr>
-              <a:tr h="329184">
-                <a:tc>
-                  <a:txBody>
-                    <a:bodyPr/>
-                    <a:lstStyle/>
-                    <a:p>
-                      <a:pPr indent="0" marL="0">
-                        <a:buNone/>
-                      </a:pPr>
-                      <a:r>
-                        <a:rPr lang="en-US" sz="900" dirty="0">
-                          <a:solidFill>
-                            <a:srgbClr val="2D2D2D"/>
-                          </a:solidFill>
-                          <a:latin typeface="Calibri" pitchFamily="34" charset="0"/>
-                          <a:ea typeface="Calibri" pitchFamily="34" charset="-122"/>
-                          <a:cs typeface="Calibri" pitchFamily="34" charset="-120"/>
-                        </a:rPr>
-                        <a:t>NAT Public IP</a:t>
-                      </a:r>
-                      <a:endParaRPr lang="en-US" sz="900" dirty="0">
-                        <a:latin typeface="Calibri" charset="0"/>
-                        <a:ea typeface="Calibri" charset="0"/>
-                        <a:cs typeface="Calibri" charset="0"/>
-                      </a:endParaRPr>
-                    </a:p>
-                  </a:txBody>
-                  <a:tcPr marL="91440" marR="91440" marT="45720" marB="45720">
-                    <a:lnL w="6350" cap="flat" cmpd="sng" algn="ctr">
-                      <a:solidFill>
-                        <a:srgbClr val="CCCCCC"/>
-                      </a:solidFill>
-                      <a:prstDash val="solid"/>
-                      <a:round/>
-                      <a:headEnd type="none" w="med" len="med"/>
-                      <a:tailEnd type="none" w="med" len="med"/>
-                    </a:lnL>
-                    <a:lnR w="6350" cap="flat" cmpd="sng" algn="ctr">
-                      <a:solidFill>
-                        <a:srgbClr val="CCCCCC"/>
-                      </a:solidFill>
-                      <a:prstDash val="solid"/>
-                      <a:round/>
-                      <a:headEnd type="none" w="med" len="med"/>
-                      <a:tailEnd type="none" w="med" len="med"/>
-                    </a:lnR>
-                    <a:lnT w="6350" cap="flat" cmpd="sng" algn="ctr">
-                      <a:solidFill>
-                        <a:srgbClr val="CCCCCC"/>
-                      </a:solidFill>
-                      <a:prstDash val="solid"/>
-                      <a:round/>
-                      <a:headEnd type="none" w="med" len="med"/>
-                      <a:tailEnd type="none" w="med" len="med"/>
-                    </a:lnT>
-                    <a:lnB w="6350" cap="flat" cmpd="sng" algn="ctr">
-                      <a:solidFill>
-                        <a:srgbClr val="CCCCCC"/>
-                      </a:solidFill>
-                      <a:prstDash val="solid"/>
-                      <a:round/>
-                      <a:headEnd type="none" w="med" len="med"/>
-                      <a:tailEnd type="none" w="med" len="med"/>
-                    </a:lnB>
-                    <a:solidFill>
-                      <a:srgbClr val="F5F5F5"/>
-                    </a:solidFill>
-                  </a:tcPr>
-                </a:tc>
-                <a:tc>
-                  <a:txBody>
-                    <a:bodyPr/>
-                    <a:lstStyle/>
-                    <a:p>
-                      <a:pPr indent="0" marL="0">
-                        <a:buNone/>
-                      </a:pPr>
-                      <a:r>
-                        <a:rPr lang="en-US" sz="900" dirty="0">
-                          <a:solidFill>
-                            <a:srgbClr val="2D2D2D"/>
-                          </a:solidFill>
-                          <a:latin typeface="Calibri" pitchFamily="34" charset="0"/>
-                          <a:ea typeface="Calibri" pitchFamily="34" charset="-122"/>
-                          <a:cs typeface="Calibri" pitchFamily="34" charset="-120"/>
-                        </a:rPr>
-                        <a:t>57.182.174.110</a:t>
-                      </a:r>
-                      <a:endParaRPr lang="en-US" sz="900" dirty="0">
-                        <a:latin typeface="Calibri" charset="0"/>
-                        <a:ea typeface="Calibri" charset="0"/>
-                        <a:cs typeface="Calibri" charset="0"/>
-                      </a:endParaRPr>
-                    </a:p>
-                  </a:txBody>
-                  <a:tcPr marL="91440" marR="91440" marT="45720" marB="45720">
-                    <a:lnL w="6350" cap="flat" cmpd="sng" algn="ctr">
-                      <a:solidFill>
-                        <a:srgbClr val="CCCCCC"/>
-                      </a:solidFill>
-                      <a:prstDash val="solid"/>
-                      <a:round/>
-                      <a:headEnd type="none" w="med" len="med"/>
-                      <a:tailEnd type="none" w="med" len="med"/>
-                    </a:lnL>
-                    <a:lnR w="6350" cap="flat" cmpd="sng" algn="ctr">
-                      <a:solidFill>
-                        <a:srgbClr val="CCCCCC"/>
-                      </a:solidFill>
-                      <a:prstDash val="solid"/>
-                      <a:round/>
-                      <a:headEnd type="none" w="med" len="med"/>
-                      <a:tailEnd type="none" w="med" len="med"/>
-                    </a:lnR>
-                    <a:lnT w="6350" cap="flat" cmpd="sng" algn="ctr">
-                      <a:solidFill>
-                        <a:srgbClr val="CCCCCC"/>
-                      </a:solidFill>
-                      <a:prstDash val="solid"/>
-                      <a:round/>
-                      <a:headEnd type="none" w="med" len="med"/>
-                      <a:tailEnd type="none" w="med" len="med"/>
-                    </a:lnT>
-                    <a:lnB w="6350" cap="flat" cmpd="sng" algn="ctr">
-                      <a:solidFill>
-                        <a:srgbClr val="CCCCCC"/>
-                      </a:solidFill>
-                      <a:prstDash val="solid"/>
-                      <a:round/>
-                      <a:headEnd type="none" w="med" len="med"/>
-                      <a:tailEnd type="none" w="med" len="med"/>
-                    </a:lnB>
-                    <a:solidFill>
-                      <a:srgbClr val="F5F5F5"/>
-                    </a:solidFill>
-                  </a:tcPr>
-                </a:tc>
-              </a:tr>
-              <a:tr h="329184">
-                <a:tc>
-                  <a:txBody>
-                    <a:bodyPr/>
-                    <a:lstStyle/>
-                    <a:p>
-                      <a:pPr indent="0" marL="0">
-                        <a:buNone/>
-                      </a:pPr>
-                      <a:r>
-                        <a:rPr lang="en-US" sz="900" dirty="0">
-                          <a:solidFill>
-                            <a:srgbClr val="2D2D2D"/>
-                          </a:solidFill>
-                          <a:latin typeface="Calibri" pitchFamily="34" charset="0"/>
-                          <a:ea typeface="Calibri" pitchFamily="34" charset="-122"/>
-                          <a:cs typeface="Calibri" pitchFamily="34" charset="-120"/>
-                        </a:rPr>
-                        <a:t>Internet Gateway</a:t>
-                      </a:r>
-                      <a:endParaRPr lang="en-US" sz="900" dirty="0">
-                        <a:latin typeface="Calibri" charset="0"/>
-                        <a:ea typeface="Calibri" charset="0"/>
-                        <a:cs typeface="Calibri" charset="0"/>
-                      </a:endParaRPr>
-                    </a:p>
-                  </a:txBody>
-                  <a:tcPr marL="91440" marR="91440" marT="45720" marB="45720">
-                    <a:lnL w="6350" cap="flat" cmpd="sng" algn="ctr">
-                      <a:solidFill>
-                        <a:srgbClr val="CCCCCC"/>
-                      </a:solidFill>
-                      <a:prstDash val="solid"/>
-                      <a:round/>
-                      <a:headEnd type="none" w="med" len="med"/>
-                      <a:tailEnd type="none" w="med" len="med"/>
-                    </a:lnL>
-                    <a:lnR w="6350" cap="flat" cmpd="sng" algn="ctr">
-                      <a:solidFill>
-                        <a:srgbClr val="CCCCCC"/>
-                      </a:solidFill>
-                      <a:prstDash val="solid"/>
-                      <a:round/>
-                      <a:headEnd type="none" w="med" len="med"/>
-                      <a:tailEnd type="none" w="med" len="med"/>
-                    </a:lnR>
-                    <a:lnT w="6350" cap="flat" cmpd="sng" algn="ctr">
-                      <a:solidFill>
-                        <a:srgbClr val="CCCCCC"/>
-                      </a:solidFill>
-                      <a:prstDash val="solid"/>
-                      <a:round/>
-                      <a:headEnd type="none" w="med" len="med"/>
-                      <a:tailEnd type="none" w="med" len="med"/>
-                    </a:lnT>
-                    <a:lnB w="6350" cap="flat" cmpd="sng" algn="ctr">
-                      <a:solidFill>
-                        <a:srgbClr val="CCCCCC"/>
-                      </a:solidFill>
-                      <a:prstDash val="solid"/>
-                      <a:round/>
-                      <a:headEnd type="none" w="med" len="med"/>
-                      <a:tailEnd type="none" w="med" len="med"/>
-                    </a:lnB>
-                    <a:solidFill>
-                      <a:srgbClr val="FFFFFF"/>
-                    </a:solidFill>
-                  </a:tcPr>
-                </a:tc>
-                <a:tc>
-                  <a:txBody>
-                    <a:bodyPr/>
-                    <a:lstStyle/>
-                    <a:p>
-                      <a:pPr indent="0" marL="0">
-                        <a:buNone/>
-                      </a:pPr>
-                      <a:r>
-                        <a:rPr lang="en-US" sz="900" dirty="0">
-                          <a:solidFill>
-                            <a:srgbClr val="2D2D2D"/>
-                          </a:solidFill>
-                          <a:latin typeface="Calibri" pitchFamily="34" charset="0"/>
-                          <a:ea typeface="Calibri" pitchFamily="34" charset="-122"/>
-                          <a:cs typeface="Calibri" pitchFamily="34" charset="-120"/>
-                        </a:rPr>
-                        <a:t>igw-018556e45a0a66598</a:t>
-                      </a:r>
-                      <a:endParaRPr lang="en-US" sz="900" dirty="0">
-                        <a:latin typeface="Calibri" charset="0"/>
-                        <a:ea typeface="Calibri" charset="0"/>
-                        <a:cs typeface="Calibri" charset="0"/>
-                      </a:endParaRPr>
-                    </a:p>
-                  </a:txBody>
-                  <a:tcPr marL="91440" marR="91440" marT="45720" marB="45720">
-                    <a:lnL w="6350" cap="flat" cmpd="sng" algn="ctr">
-                      <a:solidFill>
-                        <a:srgbClr val="CCCCCC"/>
-                      </a:solidFill>
-                      <a:prstDash val="solid"/>
-                      <a:round/>
-                      <a:headEnd type="none" w="med" len="med"/>
-                      <a:tailEnd type="none" w="med" len="med"/>
-                    </a:lnL>
-                    <a:lnR w="6350" cap="flat" cmpd="sng" algn="ctr">
-                      <a:solidFill>
-                        <a:srgbClr val="CCCCCC"/>
-                      </a:solidFill>
-                      <a:prstDash val="solid"/>
-                      <a:round/>
-                      <a:headEnd type="none" w="med" len="med"/>
-                      <a:tailEnd type="none" w="med" len="med"/>
-                    </a:lnR>
-                    <a:lnT w="6350" cap="flat" cmpd="sng" algn="ctr">
-                      <a:solidFill>
-                        <a:srgbClr val="CCCCCC"/>
-                      </a:solidFill>
-                      <a:prstDash val="solid"/>
-                      <a:round/>
-                      <a:headEnd type="none" w="med" len="med"/>
-                      <a:tailEnd type="none" w="med" len="med"/>
-                    </a:lnT>
-                    <a:lnB w="6350" cap="flat" cmpd="sng" algn="ctr">
-                      <a:solidFill>
-                        <a:srgbClr val="CCCCCC"/>
-                      </a:solidFill>
-                      <a:prstDash val="solid"/>
-                      <a:round/>
-                      <a:headEnd type="none" w="med" len="med"/>
-                      <a:tailEnd type="none" w="med" len="med"/>
-                    </a:lnB>
-                    <a:solidFill>
-                      <a:srgbClr val="FFFFFF"/>
+                      <a:srgbClr val="F8FBFF"/>
                     </a:solidFill>
                   </a:tcPr>
                 </a:tc>
@@ -8608,1504 +11692,14 @@
       </p:graphicFrame>
       <p:sp>
         <p:nvSpPr>
-          <p:cNvPr id="16" name="Text 9"/>
+          <p:cNvPr id="20" name="Text 12"/>
           <p:cNvSpPr/>
           <p:nvPr/>
         </p:nvSpPr>
         <p:spPr>
           <a:xfrm>
-            <a:off x="5029200" y="1572768"/>
-            <a:ext cx="4572000" cy="256032"/>
-          </a:xfrm>
-          <a:prstGeom prst="rect">
-            <a:avLst/>
-          </a:prstGeom>
-          <a:noFill/>
-          <a:ln/>
-        </p:spPr>
-        <p:txBody>
-          <a:bodyPr wrap="square" lIns="0" tIns="0" rIns="0" bIns="0" rtlCol="0" anchor="ctr"/>
-          <a:lstStyle/>
-          <a:p>
-            <a:pPr indent="0" marL="0">
-              <a:buNone/>
-            </a:pPr>
-            <a:r>
-              <a:rPr lang="en-US" sz="1200" b="1" dirty="0">
-                <a:solidFill>
-                  <a:srgbClr val="D0232A"/>
-                </a:solidFill>
-                <a:latin typeface="Calibri" pitchFamily="34" charset="0"/>
-                <a:ea typeface="Calibri" pitchFamily="34" charset="-122"/>
-                <a:cs typeface="Calibri" pitchFamily="34" charset="-120"/>
-              </a:rPr>
-              <a:t>USMH網 接続詳細（IPSec VPN）</a:t>
-            </a:r>
-            <a:endParaRPr lang="en-US" sz="1200" dirty="0"/>
-          </a:p>
-        </p:txBody>
-      </p:sp>
-      <p:sp>
-        <p:nvSpPr>
-          <p:cNvPr id="17" name="Shape 10"/>
-          <p:cNvSpPr/>
-          <p:nvPr/>
-        </p:nvSpPr>
-        <p:spPr>
-          <a:xfrm>
-            <a:off x="5120640" y="1920240"/>
-            <a:ext cx="1280160" cy="640080"/>
-          </a:xfrm>
-          <a:prstGeom prst="rect">
-            <a:avLst/>
-          </a:prstGeom>
-          <a:solidFill>
-            <a:srgbClr val="FFF0F0"/>
-          </a:solidFill>
-          <a:ln w="12700">
-            <a:solidFill>
-              <a:srgbClr val="D0232A"/>
-            </a:solidFill>
-            <a:prstDash val="solid"/>
-          </a:ln>
-        </p:spPr>
-      </p:sp>
-      <p:sp>
-        <p:nvSpPr>
-          <p:cNvPr id="18" name="Text 11"/>
-          <p:cNvSpPr/>
-          <p:nvPr/>
-        </p:nvSpPr>
-        <p:spPr>
-          <a:xfrm>
-            <a:off x="5166360" y="1965960"/>
-            <a:ext cx="1188720" cy="548640"/>
-          </a:xfrm>
-          <a:prstGeom prst="rect">
-            <a:avLst/>
-          </a:prstGeom>
-          <a:noFill/>
-          <a:ln/>
-        </p:spPr>
-        <p:txBody>
-          <a:bodyPr wrap="square" lIns="0" tIns="0" rIns="0" bIns="0" rtlCol="0" anchor="ctr"/>
-          <a:lstStyle/>
-          <a:p>
-            <a:pPr algn="ctr" indent="0" marL="0">
-              <a:buNone/>
-            </a:pPr>
-            <a:r>
-              <a:rPr lang="en-US" sz="800" dirty="0">
-                <a:solidFill>
-                  <a:srgbClr val="333333"/>
-                </a:solidFill>
-                <a:latin typeface="Calibri" pitchFamily="34" charset="0"/>
-                <a:ea typeface="Calibri" pitchFamily="34" charset="-122"/>
-                <a:cs typeface="Calibri" pitchFamily="34" charset="-120"/>
-              </a:rPr>
-              <a:t>USMH網</a:t>
-            </a:r>
-            <a:endParaRPr lang="en-US" sz="800" dirty="0"/>
-          </a:p>
-          <a:p>
-            <a:pPr algn="ctr" indent="0" marL="0">
-              <a:buNone/>
-            </a:pPr>
-            <a:r>
-              <a:rPr lang="en-US" sz="800" dirty="0">
-                <a:solidFill>
-                  <a:srgbClr val="333333"/>
-                </a:solidFill>
-                <a:latin typeface="Calibri" pitchFamily="34" charset="0"/>
-                <a:ea typeface="Calibri" pitchFamily="34" charset="-122"/>
-                <a:cs typeface="Calibri" pitchFamily="34" charset="-120"/>
-              </a:rPr>
-              <a:t>(イオン系)</a:t>
-            </a:r>
-            <a:endParaRPr lang="en-US" sz="800" dirty="0"/>
-          </a:p>
-        </p:txBody>
-      </p:sp>
-      <p:sp>
-        <p:nvSpPr>
-          <p:cNvPr id="19" name="Shape 12"/>
-          <p:cNvSpPr/>
-          <p:nvPr/>
-        </p:nvSpPr>
-        <p:spPr>
-          <a:xfrm>
-            <a:off x="6675120" y="1920240"/>
-            <a:ext cx="1920240" cy="640080"/>
-          </a:xfrm>
-          <a:prstGeom prst="rect">
-            <a:avLst/>
-          </a:prstGeom>
-          <a:solidFill>
-            <a:srgbClr val="FFFAEE"/>
-          </a:solidFill>
-          <a:ln w="12700">
-            <a:solidFill>
-              <a:srgbClr val="E8A040"/>
-            </a:solidFill>
-            <a:prstDash val="solid"/>
-          </a:ln>
-        </p:spPr>
-      </p:sp>
-      <p:sp>
-        <p:nvSpPr>
-          <p:cNvPr id="20" name="Text 13"/>
-          <p:cNvSpPr/>
-          <p:nvPr/>
-        </p:nvSpPr>
-        <p:spPr>
-          <a:xfrm>
-            <a:off x="6720840" y="1965960"/>
-            <a:ext cx="1828800" cy="548640"/>
-          </a:xfrm>
-          <a:prstGeom prst="rect">
-            <a:avLst/>
-          </a:prstGeom>
-          <a:noFill/>
-          <a:ln/>
-        </p:spPr>
-        <p:txBody>
-          <a:bodyPr wrap="square" lIns="0" tIns="0" rIns="0" bIns="0" rtlCol="0" anchor="ctr"/>
-          <a:lstStyle/>
-          <a:p>
-            <a:pPr algn="ctr" indent="0" marL="0">
-              <a:buNone/>
-            </a:pPr>
-            <a:r>
-              <a:rPr lang="en-US" sz="800" dirty="0">
-                <a:solidFill>
-                  <a:srgbClr val="333333"/>
-                </a:solidFill>
-                <a:latin typeface="Calibri" pitchFamily="34" charset="0"/>
-                <a:ea typeface="Calibri" pitchFamily="34" charset="-122"/>
-                <a:cs typeface="Calibri" pitchFamily="34" charset="-120"/>
-              </a:rPr>
-              <a:t>IPSec VPN</a:t>
-            </a:r>
-            <a:endParaRPr lang="en-US" sz="800" dirty="0"/>
-          </a:p>
-          <a:p>
-            <a:pPr algn="ctr" indent="0" marL="0">
-              <a:buNone/>
-            </a:pPr>
-            <a:r>
-              <a:rPr lang="en-US" sz="800" dirty="0">
-                <a:solidFill>
-                  <a:srgbClr val="333333"/>
-                </a:solidFill>
-                <a:latin typeface="Calibri" pitchFamily="34" charset="0"/>
-                <a:ea typeface="Calibri" pitchFamily="34" charset="-122"/>
-                <a:cs typeface="Calibri" pitchFamily="34" charset="-120"/>
-              </a:rPr>
-              <a:t>(vpn-0ea9b7895f78e4c7e)</a:t>
-            </a:r>
-            <a:endParaRPr lang="en-US" sz="800" dirty="0"/>
-          </a:p>
-          <a:p>
-            <a:pPr algn="ctr" indent="0" marL="0">
-              <a:buNone/>
-            </a:pPr>
-            <a:r>
-              <a:rPr lang="en-US" sz="800" dirty="0">
-                <a:solidFill>
-                  <a:srgbClr val="333333"/>
-                </a:solidFill>
-                <a:latin typeface="Calibri" pitchFamily="34" charset="0"/>
-                <a:ea typeface="Calibri" pitchFamily="34" charset="-122"/>
-                <a:cs typeface="Calibri" pitchFamily="34" charset="-120"/>
-              </a:rPr>
-              <a:t>CGW: 14.224.146.153</a:t>
-            </a:r>
-            <a:endParaRPr lang="en-US" sz="800" dirty="0"/>
-          </a:p>
-        </p:txBody>
-      </p:sp>
-      <p:sp>
-        <p:nvSpPr>
-          <p:cNvPr id="21" name="Shape 14"/>
-          <p:cNvSpPr/>
-          <p:nvPr/>
-        </p:nvSpPr>
-        <p:spPr>
-          <a:xfrm>
-            <a:off x="8778240" y="1920240"/>
-            <a:ext cx="1463040" cy="640080"/>
-          </a:xfrm>
-          <a:prstGeom prst="rect">
-            <a:avLst/>
-          </a:prstGeom>
-          <a:solidFill>
-            <a:srgbClr val="EBF5FF"/>
-          </a:solidFill>
-          <a:ln w="12700">
-            <a:solidFill>
-              <a:srgbClr val="4488CC"/>
-            </a:solidFill>
-            <a:prstDash val="solid"/>
-          </a:ln>
-        </p:spPr>
-      </p:sp>
-      <p:sp>
-        <p:nvSpPr>
-          <p:cNvPr id="22" name="Text 15"/>
-          <p:cNvSpPr/>
-          <p:nvPr/>
-        </p:nvSpPr>
-        <p:spPr>
-          <a:xfrm>
-            <a:off x="8823960" y="1965960"/>
-            <a:ext cx="1371600" cy="548640"/>
-          </a:xfrm>
-          <a:prstGeom prst="rect">
-            <a:avLst/>
-          </a:prstGeom>
-          <a:noFill/>
-          <a:ln/>
-        </p:spPr>
-        <p:txBody>
-          <a:bodyPr wrap="square" lIns="0" tIns="0" rIns="0" bIns="0" rtlCol="0" anchor="ctr"/>
-          <a:lstStyle/>
-          <a:p>
-            <a:pPr algn="ctr" indent="0" marL="0">
-              <a:buNone/>
-            </a:pPr>
-            <a:r>
-              <a:rPr lang="en-US" sz="800" dirty="0">
-                <a:solidFill>
-                  <a:srgbClr val="333333"/>
-                </a:solidFill>
-                <a:latin typeface="Calibri" pitchFamily="34" charset="0"/>
-                <a:ea typeface="Calibri" pitchFamily="34" charset="-122"/>
-                <a:cs typeface="Calibri" pitchFamily="34" charset="-120"/>
-              </a:rPr>
-              <a:t>AWS VPC</a:t>
-            </a:r>
-            <a:endParaRPr lang="en-US" sz="800" dirty="0"/>
-          </a:p>
-          <a:p>
-            <a:pPr algn="ctr" indent="0" marL="0">
-              <a:buNone/>
-            </a:pPr>
-            <a:r>
-              <a:rPr lang="en-US" sz="800" dirty="0">
-                <a:solidFill>
-                  <a:srgbClr val="333333"/>
-                </a:solidFill>
-                <a:latin typeface="Calibri" pitchFamily="34" charset="0"/>
-                <a:ea typeface="Calibri" pitchFamily="34" charset="-122"/>
-                <a:cs typeface="Calibri" pitchFamily="34" charset="-120"/>
-              </a:rPr>
-              <a:t>(10.238.0.0/16)</a:t>
-            </a:r>
-            <a:endParaRPr lang="en-US" sz="800" dirty="0"/>
-          </a:p>
-          <a:p>
-            <a:pPr algn="ctr" indent="0" marL="0">
-              <a:buNone/>
-            </a:pPr>
-            <a:r>
-              <a:rPr lang="en-US" sz="800" dirty="0">
-                <a:solidFill>
-                  <a:srgbClr val="333333"/>
-                </a:solidFill>
-                <a:latin typeface="Calibri" pitchFamily="34" charset="0"/>
-                <a:ea typeface="Calibri" pitchFamily="34" charset="-122"/>
-                <a:cs typeface="Calibri" pitchFamily="34" charset="-120"/>
-              </a:rPr>
-              <a:t>VGW: vgw-06d8981903cf33c62</a:t>
-            </a:r>
-            <a:endParaRPr lang="en-US" sz="800" dirty="0"/>
-          </a:p>
-        </p:txBody>
-      </p:sp>
-      <p:sp>
-        <p:nvSpPr>
-          <p:cNvPr id="23" name="Shape 16"/>
-          <p:cNvSpPr/>
-          <p:nvPr/>
-        </p:nvSpPr>
-        <p:spPr>
-          <a:xfrm>
-            <a:off x="6419088" y="2240280"/>
-            <a:ext cx="256032" cy="0"/>
-          </a:xfrm>
-          <a:prstGeom prst="line">
-            <a:avLst/>
-          </a:prstGeom>
-          <a:noFill/>
-          <a:ln w="25400">
-            <a:solidFill>
-              <a:srgbClr val="D0232A"/>
-            </a:solidFill>
-            <a:prstDash val="solid"/>
-          </a:ln>
-        </p:spPr>
-      </p:sp>
-      <p:sp>
-        <p:nvSpPr>
-          <p:cNvPr id="24" name="Shape 17"/>
-          <p:cNvSpPr/>
-          <p:nvPr/>
-        </p:nvSpPr>
-        <p:spPr>
-          <a:xfrm>
-            <a:off x="8613648" y="2240280"/>
-            <a:ext cx="164592" cy="0"/>
-          </a:xfrm>
-          <a:prstGeom prst="line">
-            <a:avLst/>
-          </a:prstGeom>
-          <a:noFill/>
-          <a:ln w="25400">
-            <a:solidFill>
-              <a:srgbClr val="D0232A"/>
-            </a:solidFill>
-            <a:prstDash val="solid"/>
-          </a:ln>
-        </p:spPr>
-      </p:sp>
-      <p:graphicFrame>
-        <p:nvGraphicFramePr>
-          <p:cNvPr id="34" name="Table 2"/>
-          <p:cNvGraphicFramePr>
-            <a:graphicFrameLocks noGrp="1"/>
-          </p:cNvGraphicFramePr>
-          <p:nvPr>
-            <p:extLst>
-              <p:ext uri="{D42A27DB-BD31-4B8C-83A1-F6EECF244321}">
-                <p14:modId xmlns:p14="http://schemas.microsoft.com/office/powerpoint/2010/main" val="1579011935"/>
-              </p:ext>
-            </p:extLst>
-          </p:nvPr>
-        </p:nvGraphicFramePr>
-        <p:xfrm>
-          <a:off x="5029200" y="2743200"/>
-          <a:ext cx="4572000" cy="914400"/>
-        </p:xfrm>
-        <a:graphic>
-          <a:graphicData uri="http://schemas.openxmlformats.org/drawingml/2006/table">
-            <a:tbl>
-              <a:tblPr/>
-              <a:tblGrid>
-                <a:gridCol w="1463040"/>
-                <a:gridCol w="1188720"/>
-                <a:gridCol w="822960"/>
-                <a:gridCol w="1097280"/>
-              </a:tblGrid>
-              <a:tr h="347472">
-                <a:tc>
-                  <a:txBody>
-                    <a:bodyPr/>
-                    <a:lstStyle/>
-                    <a:p>
-                      <a:pPr indent="0" marL="0">
-                        <a:buNone/>
-                      </a:pPr>
-                      <a:r>
-                        <a:rPr lang="en-US" sz="900" b="1" dirty="0">
-                          <a:solidFill>
-                            <a:srgbClr val="FFFFFF"/>
-                          </a:solidFill>
-                          <a:latin typeface="Calibri" pitchFamily="34" charset="0"/>
-                          <a:ea typeface="Calibri" pitchFamily="34" charset="-122"/>
-                          <a:cs typeface="Calibri" pitchFamily="34" charset="-120"/>
-                        </a:rPr>
-                        <a:t>アクセス元CIDR</a:t>
-                      </a:r>
-                      <a:endParaRPr lang="en-US" sz="900" dirty="0">
-                        <a:latin typeface="Calibri" charset="0"/>
-                        <a:ea typeface="Calibri" charset="0"/>
-                        <a:cs typeface="Calibri" charset="0"/>
-                      </a:endParaRPr>
-                    </a:p>
-                  </a:txBody>
-                  <a:tcPr marL="91440" marR="91440" marT="45720" marB="45720">
-                    <a:lnL w="6350" cap="flat" cmpd="sng" algn="ctr">
-                      <a:solidFill>
-                        <a:srgbClr val="CCCCCC"/>
-                      </a:solidFill>
-                      <a:prstDash val="solid"/>
-                      <a:round/>
-                      <a:headEnd type="none" w="med" len="med"/>
-                      <a:tailEnd type="none" w="med" len="med"/>
-                    </a:lnL>
-                    <a:lnR w="6350" cap="flat" cmpd="sng" algn="ctr">
-                      <a:solidFill>
-                        <a:srgbClr val="CCCCCC"/>
-                      </a:solidFill>
-                      <a:prstDash val="solid"/>
-                      <a:round/>
-                      <a:headEnd type="none" w="med" len="med"/>
-                      <a:tailEnd type="none" w="med" len="med"/>
-                    </a:lnR>
-                    <a:lnT w="6350" cap="flat" cmpd="sng" algn="ctr">
-                      <a:solidFill>
-                        <a:srgbClr val="CCCCCC"/>
-                      </a:solidFill>
-                      <a:prstDash val="solid"/>
-                      <a:round/>
-                      <a:headEnd type="none" w="med" len="med"/>
-                      <a:tailEnd type="none" w="med" len="med"/>
-                    </a:lnT>
-                    <a:lnB w="6350" cap="flat" cmpd="sng" algn="ctr">
-                      <a:solidFill>
-                        <a:srgbClr val="CCCCCC"/>
-                      </a:solidFill>
-                      <a:prstDash val="solid"/>
-                      <a:round/>
-                      <a:headEnd type="none" w="med" len="med"/>
-                      <a:tailEnd type="none" w="med" len="med"/>
-                    </a:lnB>
-                    <a:solidFill>
-                      <a:srgbClr val="D0232A"/>
-                    </a:solidFill>
-                  </a:tcPr>
-                </a:tc>
-                <a:tc>
-                  <a:txBody>
-                    <a:bodyPr/>
-                    <a:lstStyle/>
-                    <a:p>
-                      <a:pPr indent="0" marL="0">
-                        <a:buNone/>
-                      </a:pPr>
-                      <a:r>
-                        <a:rPr lang="en-US" sz="900" b="1" dirty="0">
-                          <a:solidFill>
-                            <a:srgbClr val="FFFFFF"/>
-                          </a:solidFill>
-                          <a:latin typeface="Calibri" pitchFamily="34" charset="0"/>
-                          <a:ea typeface="Calibri" pitchFamily="34" charset="-122"/>
-                          <a:cs typeface="Calibri" pitchFamily="34" charset="-120"/>
-                        </a:rPr>
-                        <a:t>接続先</a:t>
-                      </a:r>
-                      <a:endParaRPr lang="en-US" sz="900" dirty="0">
-                        <a:latin typeface="Calibri" charset="0"/>
-                        <a:ea typeface="Calibri" charset="0"/>
-                        <a:cs typeface="Calibri" charset="0"/>
-                      </a:endParaRPr>
-                    </a:p>
-                  </a:txBody>
-                  <a:tcPr marL="91440" marR="91440" marT="45720" marB="45720">
-                    <a:lnL w="6350" cap="flat" cmpd="sng" algn="ctr">
-                      <a:solidFill>
-                        <a:srgbClr val="CCCCCC"/>
-                      </a:solidFill>
-                      <a:prstDash val="solid"/>
-                      <a:round/>
-                      <a:headEnd type="none" w="med" len="med"/>
-                      <a:tailEnd type="none" w="med" len="med"/>
-                    </a:lnL>
-                    <a:lnR w="6350" cap="flat" cmpd="sng" algn="ctr">
-                      <a:solidFill>
-                        <a:srgbClr val="CCCCCC"/>
-                      </a:solidFill>
-                      <a:prstDash val="solid"/>
-                      <a:round/>
-                      <a:headEnd type="none" w="med" len="med"/>
-                      <a:tailEnd type="none" w="med" len="med"/>
-                    </a:lnR>
-                    <a:lnT w="6350" cap="flat" cmpd="sng" algn="ctr">
-                      <a:solidFill>
-                        <a:srgbClr val="CCCCCC"/>
-                      </a:solidFill>
-                      <a:prstDash val="solid"/>
-                      <a:round/>
-                      <a:headEnd type="none" w="med" len="med"/>
-                      <a:tailEnd type="none" w="med" len="med"/>
-                    </a:lnT>
-                    <a:lnB w="6350" cap="flat" cmpd="sng" algn="ctr">
-                      <a:solidFill>
-                        <a:srgbClr val="CCCCCC"/>
-                      </a:solidFill>
-                      <a:prstDash val="solid"/>
-                      <a:round/>
-                      <a:headEnd type="none" w="med" len="med"/>
-                      <a:tailEnd type="none" w="med" len="med"/>
-                    </a:lnB>
-                    <a:solidFill>
-                      <a:srgbClr val="D0232A"/>
-                    </a:solidFill>
-                  </a:tcPr>
-                </a:tc>
-                <a:tc>
-                  <a:txBody>
-                    <a:bodyPr/>
-                    <a:lstStyle/>
-                    <a:p>
-                      <a:pPr indent="0" marL="0">
-                        <a:buNone/>
-                      </a:pPr>
-                      <a:r>
-                        <a:rPr lang="en-US" sz="900" b="1" dirty="0">
-                          <a:solidFill>
-                            <a:srgbClr val="FFFFFF"/>
-                          </a:solidFill>
-                          <a:latin typeface="Calibri" pitchFamily="34" charset="0"/>
-                          <a:ea typeface="Calibri" pitchFamily="34" charset="-122"/>
-                          <a:cs typeface="Calibri" pitchFamily="34" charset="-120"/>
-                        </a:rPr>
-                        <a:t>ポート</a:t>
-                      </a:r>
-                      <a:endParaRPr lang="en-US" sz="900" dirty="0">
-                        <a:latin typeface="Calibri" charset="0"/>
-                        <a:ea typeface="Calibri" charset="0"/>
-                        <a:cs typeface="Calibri" charset="0"/>
-                      </a:endParaRPr>
-                    </a:p>
-                  </a:txBody>
-                  <a:tcPr marL="91440" marR="91440" marT="45720" marB="45720">
-                    <a:lnL w="6350" cap="flat" cmpd="sng" algn="ctr">
-                      <a:solidFill>
-                        <a:srgbClr val="CCCCCC"/>
-                      </a:solidFill>
-                      <a:prstDash val="solid"/>
-                      <a:round/>
-                      <a:headEnd type="none" w="med" len="med"/>
-                      <a:tailEnd type="none" w="med" len="med"/>
-                    </a:lnL>
-                    <a:lnR w="6350" cap="flat" cmpd="sng" algn="ctr">
-                      <a:solidFill>
-                        <a:srgbClr val="CCCCCC"/>
-                      </a:solidFill>
-                      <a:prstDash val="solid"/>
-                      <a:round/>
-                      <a:headEnd type="none" w="med" len="med"/>
-                      <a:tailEnd type="none" w="med" len="med"/>
-                    </a:lnR>
-                    <a:lnT w="6350" cap="flat" cmpd="sng" algn="ctr">
-                      <a:solidFill>
-                        <a:srgbClr val="CCCCCC"/>
-                      </a:solidFill>
-                      <a:prstDash val="solid"/>
-                      <a:round/>
-                      <a:headEnd type="none" w="med" len="med"/>
-                      <a:tailEnd type="none" w="med" len="med"/>
-                    </a:lnT>
-                    <a:lnB w="6350" cap="flat" cmpd="sng" algn="ctr">
-                      <a:solidFill>
-                        <a:srgbClr val="CCCCCC"/>
-                      </a:solidFill>
-                      <a:prstDash val="solid"/>
-                      <a:round/>
-                      <a:headEnd type="none" w="med" len="med"/>
-                      <a:tailEnd type="none" w="med" len="med"/>
-                    </a:lnB>
-                    <a:solidFill>
-                      <a:srgbClr val="D0232A"/>
-                    </a:solidFill>
-                  </a:tcPr>
-                </a:tc>
-                <a:tc>
-                  <a:txBody>
-                    <a:bodyPr/>
-                    <a:lstStyle/>
-                    <a:p>
-                      <a:pPr indent="0" marL="0">
-                        <a:buNone/>
-                      </a:pPr>
-                      <a:r>
-                        <a:rPr lang="en-US" sz="900" b="1" dirty="0">
-                          <a:solidFill>
-                            <a:srgbClr val="FFFFFF"/>
-                          </a:solidFill>
-                          <a:latin typeface="Calibri" pitchFamily="34" charset="0"/>
-                          <a:ea typeface="Calibri" pitchFamily="34" charset="-122"/>
-                          <a:cs typeface="Calibri" pitchFamily="34" charset="-120"/>
-                        </a:rPr>
-                        <a:t>用途</a:t>
-                      </a:r>
-                      <a:endParaRPr lang="en-US" sz="900" dirty="0">
-                        <a:latin typeface="Calibri" charset="0"/>
-                        <a:ea typeface="Calibri" charset="0"/>
-                        <a:cs typeface="Calibri" charset="0"/>
-                      </a:endParaRPr>
-                    </a:p>
-                  </a:txBody>
-                  <a:tcPr marL="91440" marR="91440" marT="45720" marB="45720">
-                    <a:lnL w="6350" cap="flat" cmpd="sng" algn="ctr">
-                      <a:solidFill>
-                        <a:srgbClr val="CCCCCC"/>
-                      </a:solidFill>
-                      <a:prstDash val="solid"/>
-                      <a:round/>
-                      <a:headEnd type="none" w="med" len="med"/>
-                      <a:tailEnd type="none" w="med" len="med"/>
-                    </a:lnL>
-                    <a:lnR w="6350" cap="flat" cmpd="sng" algn="ctr">
-                      <a:solidFill>
-                        <a:srgbClr val="CCCCCC"/>
-                      </a:solidFill>
-                      <a:prstDash val="solid"/>
-                      <a:round/>
-                      <a:headEnd type="none" w="med" len="med"/>
-                      <a:tailEnd type="none" w="med" len="med"/>
-                    </a:lnR>
-                    <a:lnT w="6350" cap="flat" cmpd="sng" algn="ctr">
-                      <a:solidFill>
-                        <a:srgbClr val="CCCCCC"/>
-                      </a:solidFill>
-                      <a:prstDash val="solid"/>
-                      <a:round/>
-                      <a:headEnd type="none" w="med" len="med"/>
-                      <a:tailEnd type="none" w="med" len="med"/>
-                    </a:lnT>
-                    <a:lnB w="6350" cap="flat" cmpd="sng" algn="ctr">
-                      <a:solidFill>
-                        <a:srgbClr val="CCCCCC"/>
-                      </a:solidFill>
-                      <a:prstDash val="solid"/>
-                      <a:round/>
-                      <a:headEnd type="none" w="med" len="med"/>
-                      <a:tailEnd type="none" w="med" len="med"/>
-                    </a:lnB>
-                    <a:solidFill>
-                      <a:srgbClr val="D0232A"/>
-                    </a:solidFill>
-                  </a:tcPr>
-                </a:tc>
-              </a:tr>
-              <a:tr h="347472">
-                <a:tc>
-                  <a:txBody>
-                    <a:bodyPr/>
-                    <a:lstStyle/>
-                    <a:p>
-                      <a:pPr indent="0" marL="0">
-                        <a:buNone/>
-                      </a:pPr>
-                      <a:r>
-                        <a:rPr lang="en-US" sz="900" dirty="0">
-                          <a:solidFill>
-                            <a:srgbClr val="2D2D2D"/>
-                          </a:solidFill>
-                          <a:latin typeface="Calibri" pitchFamily="34" charset="0"/>
-                          <a:ea typeface="Calibri" pitchFamily="34" charset="-122"/>
-                          <a:cs typeface="Calibri" pitchFamily="34" charset="-120"/>
-                        </a:rPr>
-                        <a:t>172.21.10.0/24</a:t>
-                      </a:r>
-                      <a:endParaRPr lang="en-US" sz="900" dirty="0">
-                        <a:latin typeface="Calibri" charset="0"/>
-                        <a:ea typeface="Calibri" charset="0"/>
-                        <a:cs typeface="Calibri" charset="0"/>
-                      </a:endParaRPr>
-                    </a:p>
-                  </a:txBody>
-                  <a:tcPr marL="91440" marR="91440" marT="45720" marB="45720">
-                    <a:lnL w="6350" cap="flat" cmpd="sng" algn="ctr">
-                      <a:solidFill>
-                        <a:srgbClr val="CCCCCC"/>
-                      </a:solidFill>
-                      <a:prstDash val="solid"/>
-                      <a:round/>
-                      <a:headEnd type="none" w="med" len="med"/>
-                      <a:tailEnd type="none" w="med" len="med"/>
-                    </a:lnL>
-                    <a:lnR w="6350" cap="flat" cmpd="sng" algn="ctr">
-                      <a:solidFill>
-                        <a:srgbClr val="CCCCCC"/>
-                      </a:solidFill>
-                      <a:prstDash val="solid"/>
-                      <a:round/>
-                      <a:headEnd type="none" w="med" len="med"/>
-                      <a:tailEnd type="none" w="med" len="med"/>
-                    </a:lnR>
-                    <a:lnT w="6350" cap="flat" cmpd="sng" algn="ctr">
-                      <a:solidFill>
-                        <a:srgbClr val="CCCCCC"/>
-                      </a:solidFill>
-                      <a:prstDash val="solid"/>
-                      <a:round/>
-                      <a:headEnd type="none" w="med" len="med"/>
-                      <a:tailEnd type="none" w="med" len="med"/>
-                    </a:lnT>
-                    <a:lnB w="6350" cap="flat" cmpd="sng" algn="ctr">
-                      <a:solidFill>
-                        <a:srgbClr val="CCCCCC"/>
-                      </a:solidFill>
-                      <a:prstDash val="solid"/>
-                      <a:round/>
-                      <a:headEnd type="none" w="med" len="med"/>
-                      <a:tailEnd type="none" w="med" len="med"/>
-                    </a:lnB>
-                    <a:solidFill>
-                      <a:srgbClr val="FFFFFF"/>
-                    </a:solidFill>
-                  </a:tcPr>
-                </a:tc>
-                <a:tc>
-                  <a:txBody>
-                    <a:bodyPr/>
-                    <a:lstStyle/>
-                    <a:p>
-                      <a:pPr indent="0" marL="0">
-                        <a:buNone/>
-                      </a:pPr>
-                      <a:r>
-                        <a:rPr lang="en-US" sz="900" dirty="0">
-                          <a:solidFill>
-                            <a:srgbClr val="2D2D2D"/>
-                          </a:solidFill>
-                          <a:latin typeface="Calibri" pitchFamily="34" charset="0"/>
-                          <a:ea typeface="Calibri" pitchFamily="34" charset="-122"/>
-                          <a:cs typeface="Calibri" pitchFamily="34" charset="-120"/>
-                        </a:rPr>
-                        <a:t>RDS (sg-db)</a:t>
-                      </a:r>
-                      <a:endParaRPr lang="en-US" sz="900" dirty="0">
-                        <a:latin typeface="Calibri" charset="0"/>
-                        <a:ea typeface="Calibri" charset="0"/>
-                        <a:cs typeface="Calibri" charset="0"/>
-                      </a:endParaRPr>
-                    </a:p>
-                  </a:txBody>
-                  <a:tcPr marL="91440" marR="91440" marT="45720" marB="45720">
-                    <a:lnL w="6350" cap="flat" cmpd="sng" algn="ctr">
-                      <a:solidFill>
-                        <a:srgbClr val="CCCCCC"/>
-                      </a:solidFill>
-                      <a:prstDash val="solid"/>
-                      <a:round/>
-                      <a:headEnd type="none" w="med" len="med"/>
-                      <a:tailEnd type="none" w="med" len="med"/>
-                    </a:lnL>
-                    <a:lnR w="6350" cap="flat" cmpd="sng" algn="ctr">
-                      <a:solidFill>
-                        <a:srgbClr val="CCCCCC"/>
-                      </a:solidFill>
-                      <a:prstDash val="solid"/>
-                      <a:round/>
-                      <a:headEnd type="none" w="med" len="med"/>
-                      <a:tailEnd type="none" w="med" len="med"/>
-                    </a:lnR>
-                    <a:lnT w="6350" cap="flat" cmpd="sng" algn="ctr">
-                      <a:solidFill>
-                        <a:srgbClr val="CCCCCC"/>
-                      </a:solidFill>
-                      <a:prstDash val="solid"/>
-                      <a:round/>
-                      <a:headEnd type="none" w="med" len="med"/>
-                      <a:tailEnd type="none" w="med" len="med"/>
-                    </a:lnT>
-                    <a:lnB w="6350" cap="flat" cmpd="sng" algn="ctr">
-                      <a:solidFill>
-                        <a:srgbClr val="CCCCCC"/>
-                      </a:solidFill>
-                      <a:prstDash val="solid"/>
-                      <a:round/>
-                      <a:headEnd type="none" w="med" len="med"/>
-                      <a:tailEnd type="none" w="med" len="med"/>
-                    </a:lnB>
-                    <a:solidFill>
-                      <a:srgbClr val="FFFFFF"/>
-                    </a:solidFill>
-                  </a:tcPr>
-                </a:tc>
-                <a:tc>
-                  <a:txBody>
-                    <a:bodyPr/>
-                    <a:lstStyle/>
-                    <a:p>
-                      <a:pPr indent="0" marL="0">
-                        <a:buNone/>
-                      </a:pPr>
-                      <a:r>
-                        <a:rPr lang="en-US" sz="900" dirty="0">
-                          <a:solidFill>
-                            <a:srgbClr val="2D2D2D"/>
-                          </a:solidFill>
-                          <a:latin typeface="Calibri" pitchFamily="34" charset="0"/>
-                          <a:ea typeface="Calibri" pitchFamily="34" charset="-122"/>
-                          <a:cs typeface="Calibri" pitchFamily="34" charset="-120"/>
-                        </a:rPr>
-                        <a:t>TCP 3306</a:t>
-                      </a:r>
-                      <a:endParaRPr lang="en-US" sz="900" dirty="0">
-                        <a:latin typeface="Calibri" charset="0"/>
-                        <a:ea typeface="Calibri" charset="0"/>
-                        <a:cs typeface="Calibri" charset="0"/>
-                      </a:endParaRPr>
-                    </a:p>
-                  </a:txBody>
-                  <a:tcPr marL="91440" marR="91440" marT="45720" marB="45720">
-                    <a:lnL w="6350" cap="flat" cmpd="sng" algn="ctr">
-                      <a:solidFill>
-                        <a:srgbClr val="CCCCCC"/>
-                      </a:solidFill>
-                      <a:prstDash val="solid"/>
-                      <a:round/>
-                      <a:headEnd type="none" w="med" len="med"/>
-                      <a:tailEnd type="none" w="med" len="med"/>
-                    </a:lnL>
-                    <a:lnR w="6350" cap="flat" cmpd="sng" algn="ctr">
-                      <a:solidFill>
-                        <a:srgbClr val="CCCCCC"/>
-                      </a:solidFill>
-                      <a:prstDash val="solid"/>
-                      <a:round/>
-                      <a:headEnd type="none" w="med" len="med"/>
-                      <a:tailEnd type="none" w="med" len="med"/>
-                    </a:lnR>
-                    <a:lnT w="6350" cap="flat" cmpd="sng" algn="ctr">
-                      <a:solidFill>
-                        <a:srgbClr val="CCCCCC"/>
-                      </a:solidFill>
-                      <a:prstDash val="solid"/>
-                      <a:round/>
-                      <a:headEnd type="none" w="med" len="med"/>
-                      <a:tailEnd type="none" w="med" len="med"/>
-                    </a:lnT>
-                    <a:lnB w="6350" cap="flat" cmpd="sng" algn="ctr">
-                      <a:solidFill>
-                        <a:srgbClr val="CCCCCC"/>
-                      </a:solidFill>
-                      <a:prstDash val="solid"/>
-                      <a:round/>
-                      <a:headEnd type="none" w="med" len="med"/>
-                      <a:tailEnd type="none" w="med" len="med"/>
-                    </a:lnB>
-                    <a:solidFill>
-                      <a:srgbClr val="FFFFFF"/>
-                    </a:solidFill>
-                  </a:tcPr>
-                </a:tc>
-                <a:tc>
-                  <a:txBody>
-                    <a:bodyPr/>
-                    <a:lstStyle/>
-                    <a:p>
-                      <a:pPr indent="0" marL="0">
-                        <a:buNone/>
-                      </a:pPr>
-                      <a:r>
-                        <a:rPr lang="en-US" sz="900" dirty="0">
-                          <a:solidFill>
-                            <a:srgbClr val="2D2D2D"/>
-                          </a:solidFill>
-                          <a:latin typeface="Calibri" pitchFamily="34" charset="0"/>
-                          <a:ea typeface="Calibri" pitchFamily="34" charset="-122"/>
-                          <a:cs typeface="Calibri" pitchFamily="34" charset="-120"/>
-                        </a:rPr>
-                        <a:t>DB直接接続</a:t>
-                      </a:r>
-                      <a:endParaRPr lang="en-US" sz="900" dirty="0">
-                        <a:latin typeface="Calibri" charset="0"/>
-                        <a:ea typeface="Calibri" charset="0"/>
-                        <a:cs typeface="Calibri" charset="0"/>
-                      </a:endParaRPr>
-                    </a:p>
-                  </a:txBody>
-                  <a:tcPr marL="91440" marR="91440" marT="45720" marB="45720">
-                    <a:lnL w="6350" cap="flat" cmpd="sng" algn="ctr">
-                      <a:solidFill>
-                        <a:srgbClr val="CCCCCC"/>
-                      </a:solidFill>
-                      <a:prstDash val="solid"/>
-                      <a:round/>
-                      <a:headEnd type="none" w="med" len="med"/>
-                      <a:tailEnd type="none" w="med" len="med"/>
-                    </a:lnL>
-                    <a:lnR w="6350" cap="flat" cmpd="sng" algn="ctr">
-                      <a:solidFill>
-                        <a:srgbClr val="CCCCCC"/>
-                      </a:solidFill>
-                      <a:prstDash val="solid"/>
-                      <a:round/>
-                      <a:headEnd type="none" w="med" len="med"/>
-                      <a:tailEnd type="none" w="med" len="med"/>
-                    </a:lnR>
-                    <a:lnT w="6350" cap="flat" cmpd="sng" algn="ctr">
-                      <a:solidFill>
-                        <a:srgbClr val="CCCCCC"/>
-                      </a:solidFill>
-                      <a:prstDash val="solid"/>
-                      <a:round/>
-                      <a:headEnd type="none" w="med" len="med"/>
-                      <a:tailEnd type="none" w="med" len="med"/>
-                    </a:lnT>
-                    <a:lnB w="6350" cap="flat" cmpd="sng" algn="ctr">
-                      <a:solidFill>
-                        <a:srgbClr val="CCCCCC"/>
-                      </a:solidFill>
-                      <a:prstDash val="solid"/>
-                      <a:round/>
-                      <a:headEnd type="none" w="med" len="med"/>
-                      <a:tailEnd type="none" w="med" len="med"/>
-                    </a:lnB>
-                    <a:solidFill>
-                      <a:srgbClr val="FFFFFF"/>
-                    </a:solidFill>
-                  </a:tcPr>
-                </a:tc>
-              </a:tr>
-              <a:tr h="347472">
-                <a:tc>
-                  <a:txBody>
-                    <a:bodyPr/>
-                    <a:lstStyle/>
-                    <a:p>
-                      <a:pPr indent="0" marL="0">
-                        <a:buNone/>
-                      </a:pPr>
-                      <a:r>
-                        <a:rPr lang="en-US" sz="900" dirty="0">
-                          <a:solidFill>
-                            <a:srgbClr val="2D2D2D"/>
-                          </a:solidFill>
-                          <a:latin typeface="Calibri" pitchFamily="34" charset="0"/>
-                          <a:ea typeface="Calibri" pitchFamily="34" charset="-122"/>
-                          <a:cs typeface="Calibri" pitchFamily="34" charset="-120"/>
-                        </a:rPr>
-                        <a:t>10.156.96.0/24</a:t>
-                      </a:r>
-                      <a:endParaRPr lang="en-US" sz="900" dirty="0">
-                        <a:latin typeface="Calibri" charset="0"/>
-                        <a:ea typeface="Calibri" charset="0"/>
-                        <a:cs typeface="Calibri" charset="0"/>
-                      </a:endParaRPr>
-                    </a:p>
-                  </a:txBody>
-                  <a:tcPr marL="91440" marR="91440" marT="45720" marB="45720">
-                    <a:lnL w="6350" cap="flat" cmpd="sng" algn="ctr">
-                      <a:solidFill>
-                        <a:srgbClr val="CCCCCC"/>
-                      </a:solidFill>
-                      <a:prstDash val="solid"/>
-                      <a:round/>
-                      <a:headEnd type="none" w="med" len="med"/>
-                      <a:tailEnd type="none" w="med" len="med"/>
-                    </a:lnL>
-                    <a:lnR w="6350" cap="flat" cmpd="sng" algn="ctr">
-                      <a:solidFill>
-                        <a:srgbClr val="CCCCCC"/>
-                      </a:solidFill>
-                      <a:prstDash val="solid"/>
-                      <a:round/>
-                      <a:headEnd type="none" w="med" len="med"/>
-                      <a:tailEnd type="none" w="med" len="med"/>
-                    </a:lnR>
-                    <a:lnT w="6350" cap="flat" cmpd="sng" algn="ctr">
-                      <a:solidFill>
-                        <a:srgbClr val="CCCCCC"/>
-                      </a:solidFill>
-                      <a:prstDash val="solid"/>
-                      <a:round/>
-                      <a:headEnd type="none" w="med" len="med"/>
-                      <a:tailEnd type="none" w="med" len="med"/>
-                    </a:lnT>
-                    <a:lnB w="6350" cap="flat" cmpd="sng" algn="ctr">
-                      <a:solidFill>
-                        <a:srgbClr val="CCCCCC"/>
-                      </a:solidFill>
-                      <a:prstDash val="solid"/>
-                      <a:round/>
-                      <a:headEnd type="none" w="med" len="med"/>
-                      <a:tailEnd type="none" w="med" len="med"/>
-                    </a:lnB>
-                    <a:solidFill>
-                      <a:srgbClr val="F5F5F5"/>
-                    </a:solidFill>
-                  </a:tcPr>
-                </a:tc>
-                <a:tc>
-                  <a:txBody>
-                    <a:bodyPr/>
-                    <a:lstStyle/>
-                    <a:p>
-                      <a:pPr indent="0" marL="0">
-                        <a:buNone/>
-                      </a:pPr>
-                      <a:r>
-                        <a:rPr lang="en-US" sz="900" dirty="0">
-                          <a:solidFill>
-                            <a:srgbClr val="2D2D2D"/>
-                          </a:solidFill>
-                          <a:latin typeface="Calibri" pitchFamily="34" charset="0"/>
-                          <a:ea typeface="Calibri" pitchFamily="34" charset="-122"/>
-                          <a:cs typeface="Calibri" pitchFamily="34" charset="-120"/>
-                        </a:rPr>
-                        <a:t>EC2 Giftcard</a:t>
-                      </a:r>
-                      <a:endParaRPr lang="en-US" sz="900" dirty="0">
-                        <a:latin typeface="Calibri" charset="0"/>
-                        <a:ea typeface="Calibri" charset="0"/>
-                        <a:cs typeface="Calibri" charset="0"/>
-                      </a:endParaRPr>
-                    </a:p>
-                  </a:txBody>
-                  <a:tcPr marL="91440" marR="91440" marT="45720" marB="45720">
-                    <a:lnL w="6350" cap="flat" cmpd="sng" algn="ctr">
-                      <a:solidFill>
-                        <a:srgbClr val="CCCCCC"/>
-                      </a:solidFill>
-                      <a:prstDash val="solid"/>
-                      <a:round/>
-                      <a:headEnd type="none" w="med" len="med"/>
-                      <a:tailEnd type="none" w="med" len="med"/>
-                    </a:lnL>
-                    <a:lnR w="6350" cap="flat" cmpd="sng" algn="ctr">
-                      <a:solidFill>
-                        <a:srgbClr val="CCCCCC"/>
-                      </a:solidFill>
-                      <a:prstDash val="solid"/>
-                      <a:round/>
-                      <a:headEnd type="none" w="med" len="med"/>
-                      <a:tailEnd type="none" w="med" len="med"/>
-                    </a:lnR>
-                    <a:lnT w="6350" cap="flat" cmpd="sng" algn="ctr">
-                      <a:solidFill>
-                        <a:srgbClr val="CCCCCC"/>
-                      </a:solidFill>
-                      <a:prstDash val="solid"/>
-                      <a:round/>
-                      <a:headEnd type="none" w="med" len="med"/>
-                      <a:tailEnd type="none" w="med" len="med"/>
-                    </a:lnT>
-                    <a:lnB w="6350" cap="flat" cmpd="sng" algn="ctr">
-                      <a:solidFill>
-                        <a:srgbClr val="CCCCCC"/>
-                      </a:solidFill>
-                      <a:prstDash val="solid"/>
-                      <a:round/>
-                      <a:headEnd type="none" w="med" len="med"/>
-                      <a:tailEnd type="none" w="med" len="med"/>
-                    </a:lnB>
-                    <a:solidFill>
-                      <a:srgbClr val="F5F5F5"/>
-                    </a:solidFill>
-                  </a:tcPr>
-                </a:tc>
-                <a:tc>
-                  <a:txBody>
-                    <a:bodyPr/>
-                    <a:lstStyle/>
-                    <a:p>
-                      <a:pPr indent="0" marL="0">
-                        <a:buNone/>
-                      </a:pPr>
-                      <a:r>
-                        <a:rPr lang="en-US" sz="900" dirty="0">
-                          <a:solidFill>
-                            <a:srgbClr val="2D2D2D"/>
-                          </a:solidFill>
-                          <a:latin typeface="Calibri" pitchFamily="34" charset="0"/>
-                          <a:ea typeface="Calibri" pitchFamily="34" charset="-122"/>
-                          <a:cs typeface="Calibri" pitchFamily="34" charset="-120"/>
-                        </a:rPr>
-                        <a:t>TCP 80</a:t>
-                      </a:r>
-                      <a:endParaRPr lang="en-US" sz="900" dirty="0">
-                        <a:latin typeface="Calibri" charset="0"/>
-                        <a:ea typeface="Calibri" charset="0"/>
-                        <a:cs typeface="Calibri" charset="0"/>
-                      </a:endParaRPr>
-                    </a:p>
-                  </a:txBody>
-                  <a:tcPr marL="91440" marR="91440" marT="45720" marB="45720">
-                    <a:lnL w="6350" cap="flat" cmpd="sng" algn="ctr">
-                      <a:solidFill>
-                        <a:srgbClr val="CCCCCC"/>
-                      </a:solidFill>
-                      <a:prstDash val="solid"/>
-                      <a:round/>
-                      <a:headEnd type="none" w="med" len="med"/>
-                      <a:tailEnd type="none" w="med" len="med"/>
-                    </a:lnL>
-                    <a:lnR w="6350" cap="flat" cmpd="sng" algn="ctr">
-                      <a:solidFill>
-                        <a:srgbClr val="CCCCCC"/>
-                      </a:solidFill>
-                      <a:prstDash val="solid"/>
-                      <a:round/>
-                      <a:headEnd type="none" w="med" len="med"/>
-                      <a:tailEnd type="none" w="med" len="med"/>
-                    </a:lnR>
-                    <a:lnT w="6350" cap="flat" cmpd="sng" algn="ctr">
-                      <a:solidFill>
-                        <a:srgbClr val="CCCCCC"/>
-                      </a:solidFill>
-                      <a:prstDash val="solid"/>
-                      <a:round/>
-                      <a:headEnd type="none" w="med" len="med"/>
-                      <a:tailEnd type="none" w="med" len="med"/>
-                    </a:lnT>
-                    <a:lnB w="6350" cap="flat" cmpd="sng" algn="ctr">
-                      <a:solidFill>
-                        <a:srgbClr val="CCCCCC"/>
-                      </a:solidFill>
-                      <a:prstDash val="solid"/>
-                      <a:round/>
-                      <a:headEnd type="none" w="med" len="med"/>
-                      <a:tailEnd type="none" w="med" len="med"/>
-                    </a:lnB>
-                    <a:solidFill>
-                      <a:srgbClr val="F5F5F5"/>
-                    </a:solidFill>
-                  </a:tcPr>
-                </a:tc>
-                <a:tc>
-                  <a:txBody>
-                    <a:bodyPr/>
-                    <a:lstStyle/>
-                    <a:p>
-                      <a:pPr indent="0" marL="0">
-                        <a:buNone/>
-                      </a:pPr>
-                      <a:r>
-                        <a:rPr lang="en-US" sz="900" dirty="0">
-                          <a:solidFill>
-                            <a:srgbClr val="2D2D2D"/>
-                          </a:solidFill>
-                          <a:latin typeface="Calibri" pitchFamily="34" charset="0"/>
-                          <a:ea typeface="Calibri" pitchFamily="34" charset="-122"/>
-                          <a:cs typeface="Calibri" pitchFamily="34" charset="-120"/>
-                        </a:rPr>
-                        <a:t>ギフトカード画面</a:t>
-                      </a:r>
-                      <a:endParaRPr lang="en-US" sz="900" dirty="0">
-                        <a:latin typeface="Calibri" charset="0"/>
-                        <a:ea typeface="Calibri" charset="0"/>
-                        <a:cs typeface="Calibri" charset="0"/>
-                      </a:endParaRPr>
-                    </a:p>
-                  </a:txBody>
-                  <a:tcPr marL="91440" marR="91440" marT="45720" marB="45720">
-                    <a:lnL w="6350" cap="flat" cmpd="sng" algn="ctr">
-                      <a:solidFill>
-                        <a:srgbClr val="CCCCCC"/>
-                      </a:solidFill>
-                      <a:prstDash val="solid"/>
-                      <a:round/>
-                      <a:headEnd type="none" w="med" len="med"/>
-                      <a:tailEnd type="none" w="med" len="med"/>
-                    </a:lnL>
-                    <a:lnR w="6350" cap="flat" cmpd="sng" algn="ctr">
-                      <a:solidFill>
-                        <a:srgbClr val="CCCCCC"/>
-                      </a:solidFill>
-                      <a:prstDash val="solid"/>
-                      <a:round/>
-                      <a:headEnd type="none" w="med" len="med"/>
-                      <a:tailEnd type="none" w="med" len="med"/>
-                    </a:lnR>
-                    <a:lnT w="6350" cap="flat" cmpd="sng" algn="ctr">
-                      <a:solidFill>
-                        <a:srgbClr val="CCCCCC"/>
-                      </a:solidFill>
-                      <a:prstDash val="solid"/>
-                      <a:round/>
-                      <a:headEnd type="none" w="med" len="med"/>
-                      <a:tailEnd type="none" w="med" len="med"/>
-                    </a:lnT>
-                    <a:lnB w="6350" cap="flat" cmpd="sng" algn="ctr">
-                      <a:solidFill>
-                        <a:srgbClr val="CCCCCC"/>
-                      </a:solidFill>
-                      <a:prstDash val="solid"/>
-                      <a:round/>
-                      <a:headEnd type="none" w="med" len="med"/>
-                      <a:tailEnd type="none" w="med" len="med"/>
-                    </a:lnB>
-                    <a:solidFill>
-                      <a:srgbClr val="F5F5F5"/>
-                    </a:solidFill>
-                  </a:tcPr>
-                </a:tc>
-              </a:tr>
-              <a:tr h="347472">
-                <a:tc>
-                  <a:txBody>
-                    <a:bodyPr/>
-                    <a:lstStyle/>
-                    <a:p>
-                      <a:pPr indent="0" marL="0">
-                        <a:buNone/>
-                      </a:pPr>
-                      <a:r>
-                        <a:rPr lang="en-US" sz="900" dirty="0">
-                          <a:solidFill>
-                            <a:srgbClr val="2D2D2D"/>
-                          </a:solidFill>
-                          <a:latin typeface="Calibri" pitchFamily="34" charset="0"/>
-                          <a:ea typeface="Calibri" pitchFamily="34" charset="-122"/>
-                          <a:cs typeface="Calibri" pitchFamily="34" charset="-120"/>
-                        </a:rPr>
-                        <a:t>10.156.96.192/26</a:t>
-                      </a:r>
-                      <a:endParaRPr lang="en-US" sz="900" dirty="0">
-                        <a:latin typeface="Calibri" charset="0"/>
-                        <a:ea typeface="Calibri" charset="0"/>
-                        <a:cs typeface="Calibri" charset="0"/>
-                      </a:endParaRPr>
-                    </a:p>
-                  </a:txBody>
-                  <a:tcPr marL="91440" marR="91440" marT="45720" marB="45720">
-                    <a:lnL w="6350" cap="flat" cmpd="sng" algn="ctr">
-                      <a:solidFill>
-                        <a:srgbClr val="CCCCCC"/>
-                      </a:solidFill>
-                      <a:prstDash val="solid"/>
-                      <a:round/>
-                      <a:headEnd type="none" w="med" len="med"/>
-                      <a:tailEnd type="none" w="med" len="med"/>
-                    </a:lnL>
-                    <a:lnR w="6350" cap="flat" cmpd="sng" algn="ctr">
-                      <a:solidFill>
-                        <a:srgbClr val="CCCCCC"/>
-                      </a:solidFill>
-                      <a:prstDash val="solid"/>
-                      <a:round/>
-                      <a:headEnd type="none" w="med" len="med"/>
-                      <a:tailEnd type="none" w="med" len="med"/>
-                    </a:lnR>
-                    <a:lnT w="6350" cap="flat" cmpd="sng" algn="ctr">
-                      <a:solidFill>
-                        <a:srgbClr val="CCCCCC"/>
-                      </a:solidFill>
-                      <a:prstDash val="solid"/>
-                      <a:round/>
-                      <a:headEnd type="none" w="med" len="med"/>
-                      <a:tailEnd type="none" w="med" len="med"/>
-                    </a:lnT>
-                    <a:lnB w="6350" cap="flat" cmpd="sng" algn="ctr">
-                      <a:solidFill>
-                        <a:srgbClr val="CCCCCC"/>
-                      </a:solidFill>
-                      <a:prstDash val="solid"/>
-                      <a:round/>
-                      <a:headEnd type="none" w="med" len="med"/>
-                      <a:tailEnd type="none" w="med" len="med"/>
-                    </a:lnB>
-                    <a:solidFill>
-                      <a:srgbClr val="FFFFFF"/>
-                    </a:solidFill>
-                  </a:tcPr>
-                </a:tc>
-                <a:tc>
-                  <a:txBody>
-                    <a:bodyPr/>
-                    <a:lstStyle/>
-                    <a:p>
-                      <a:pPr indent="0" marL="0">
-                        <a:buNone/>
-                      </a:pPr>
-                      <a:r>
-                        <a:rPr lang="en-US" sz="900" dirty="0">
-                          <a:solidFill>
-                            <a:srgbClr val="2D2D2D"/>
-                          </a:solidFill>
-                          <a:latin typeface="Calibri" pitchFamily="34" charset="0"/>
-                          <a:ea typeface="Calibri" pitchFamily="34" charset="-122"/>
-                          <a:cs typeface="Calibri" pitchFamily="34" charset="-120"/>
-                        </a:rPr>
-                        <a:t>Transfer Family</a:t>
-                      </a:r>
-                      <a:endParaRPr lang="en-US" sz="900" dirty="0">
-                        <a:latin typeface="Calibri" charset="0"/>
-                        <a:ea typeface="Calibri" charset="0"/>
-                        <a:cs typeface="Calibri" charset="0"/>
-                      </a:endParaRPr>
-                    </a:p>
-                  </a:txBody>
-                  <a:tcPr marL="91440" marR="91440" marT="45720" marB="45720">
-                    <a:lnL w="6350" cap="flat" cmpd="sng" algn="ctr">
-                      <a:solidFill>
-                        <a:srgbClr val="CCCCCC"/>
-                      </a:solidFill>
-                      <a:prstDash val="solid"/>
-                      <a:round/>
-                      <a:headEnd type="none" w="med" len="med"/>
-                      <a:tailEnd type="none" w="med" len="med"/>
-                    </a:lnL>
-                    <a:lnR w="6350" cap="flat" cmpd="sng" algn="ctr">
-                      <a:solidFill>
-                        <a:srgbClr val="CCCCCC"/>
-                      </a:solidFill>
-                      <a:prstDash val="solid"/>
-                      <a:round/>
-                      <a:headEnd type="none" w="med" len="med"/>
-                      <a:tailEnd type="none" w="med" len="med"/>
-                    </a:lnR>
-                    <a:lnT w="6350" cap="flat" cmpd="sng" algn="ctr">
-                      <a:solidFill>
-                        <a:srgbClr val="CCCCCC"/>
-                      </a:solidFill>
-                      <a:prstDash val="solid"/>
-                      <a:round/>
-                      <a:headEnd type="none" w="med" len="med"/>
-                      <a:tailEnd type="none" w="med" len="med"/>
-                    </a:lnT>
-                    <a:lnB w="6350" cap="flat" cmpd="sng" algn="ctr">
-                      <a:solidFill>
-                        <a:srgbClr val="CCCCCC"/>
-                      </a:solidFill>
-                      <a:prstDash val="solid"/>
-                      <a:round/>
-                      <a:headEnd type="none" w="med" len="med"/>
-                      <a:tailEnd type="none" w="med" len="med"/>
-                    </a:lnB>
-                    <a:solidFill>
-                      <a:srgbClr val="FFFFFF"/>
-                    </a:solidFill>
-                  </a:tcPr>
-                </a:tc>
-                <a:tc>
-                  <a:txBody>
-                    <a:bodyPr/>
-                    <a:lstStyle/>
-                    <a:p>
-                      <a:pPr indent="0" marL="0">
-                        <a:buNone/>
-                      </a:pPr>
-                      <a:r>
-                        <a:rPr lang="en-US" sz="900" dirty="0">
-                          <a:solidFill>
-                            <a:srgbClr val="2D2D2D"/>
-                          </a:solidFill>
-                          <a:latin typeface="Calibri" pitchFamily="34" charset="0"/>
-                          <a:ea typeface="Calibri" pitchFamily="34" charset="-122"/>
-                          <a:cs typeface="Calibri" pitchFamily="34" charset="-120"/>
-                        </a:rPr>
-                        <a:t>TCP 22</a:t>
-                      </a:r>
-                      <a:endParaRPr lang="en-US" sz="900" dirty="0">
-                        <a:latin typeface="Calibri" charset="0"/>
-                        <a:ea typeface="Calibri" charset="0"/>
-                        <a:cs typeface="Calibri" charset="0"/>
-                      </a:endParaRPr>
-                    </a:p>
-                  </a:txBody>
-                  <a:tcPr marL="91440" marR="91440" marT="45720" marB="45720">
-                    <a:lnL w="6350" cap="flat" cmpd="sng" algn="ctr">
-                      <a:solidFill>
-                        <a:srgbClr val="CCCCCC"/>
-                      </a:solidFill>
-                      <a:prstDash val="solid"/>
-                      <a:round/>
-                      <a:headEnd type="none" w="med" len="med"/>
-                      <a:tailEnd type="none" w="med" len="med"/>
-                    </a:lnL>
-                    <a:lnR w="6350" cap="flat" cmpd="sng" algn="ctr">
-                      <a:solidFill>
-                        <a:srgbClr val="CCCCCC"/>
-                      </a:solidFill>
-                      <a:prstDash val="solid"/>
-                      <a:round/>
-                      <a:headEnd type="none" w="med" len="med"/>
-                      <a:tailEnd type="none" w="med" len="med"/>
-                    </a:lnR>
-                    <a:lnT w="6350" cap="flat" cmpd="sng" algn="ctr">
-                      <a:solidFill>
-                        <a:srgbClr val="CCCCCC"/>
-                      </a:solidFill>
-                      <a:prstDash val="solid"/>
-                      <a:round/>
-                      <a:headEnd type="none" w="med" len="med"/>
-                      <a:tailEnd type="none" w="med" len="med"/>
-                    </a:lnT>
-                    <a:lnB w="6350" cap="flat" cmpd="sng" algn="ctr">
-                      <a:solidFill>
-                        <a:srgbClr val="CCCCCC"/>
-                      </a:solidFill>
-                      <a:prstDash val="solid"/>
-                      <a:round/>
-                      <a:headEnd type="none" w="med" len="med"/>
-                      <a:tailEnd type="none" w="med" len="med"/>
-                    </a:lnB>
-                    <a:solidFill>
-                      <a:srgbClr val="FFFFFF"/>
-                    </a:solidFill>
-                  </a:tcPr>
-                </a:tc>
-                <a:tc>
-                  <a:txBody>
-                    <a:bodyPr/>
-                    <a:lstStyle/>
-                    <a:p>
-                      <a:pPr indent="0" marL="0">
-                        <a:buNone/>
-                      </a:pPr>
-                      <a:r>
-                        <a:rPr lang="en-US" sz="900" dirty="0">
-                          <a:solidFill>
-                            <a:srgbClr val="2D2D2D"/>
-                          </a:solidFill>
-                          <a:latin typeface="Calibri" pitchFamily="34" charset="0"/>
-                          <a:ea typeface="Calibri" pitchFamily="34" charset="-122"/>
-                          <a:cs typeface="Calibri" pitchFamily="34" charset="-120"/>
-                        </a:rPr>
-                        <a:t>SFTPファイル転送</a:t>
-                      </a:r>
-                      <a:endParaRPr lang="en-US" sz="900" dirty="0">
-                        <a:latin typeface="Calibri" charset="0"/>
-                        <a:ea typeface="Calibri" charset="0"/>
-                        <a:cs typeface="Calibri" charset="0"/>
-                      </a:endParaRPr>
-                    </a:p>
-                  </a:txBody>
-                  <a:tcPr marL="91440" marR="91440" marT="45720" marB="45720">
-                    <a:lnL w="6350" cap="flat" cmpd="sng" algn="ctr">
-                      <a:solidFill>
-                        <a:srgbClr val="CCCCCC"/>
-                      </a:solidFill>
-                      <a:prstDash val="solid"/>
-                      <a:round/>
-                      <a:headEnd type="none" w="med" len="med"/>
-                      <a:tailEnd type="none" w="med" len="med"/>
-                    </a:lnL>
-                    <a:lnR w="6350" cap="flat" cmpd="sng" algn="ctr">
-                      <a:solidFill>
-                        <a:srgbClr val="CCCCCC"/>
-                      </a:solidFill>
-                      <a:prstDash val="solid"/>
-                      <a:round/>
-                      <a:headEnd type="none" w="med" len="med"/>
-                      <a:tailEnd type="none" w="med" len="med"/>
-                    </a:lnR>
-                    <a:lnT w="6350" cap="flat" cmpd="sng" algn="ctr">
-                      <a:solidFill>
-                        <a:srgbClr val="CCCCCC"/>
-                      </a:solidFill>
-                      <a:prstDash val="solid"/>
-                      <a:round/>
-                      <a:headEnd type="none" w="med" len="med"/>
-                      <a:tailEnd type="none" w="med" len="med"/>
-                    </a:lnT>
-                    <a:lnB w="6350" cap="flat" cmpd="sng" algn="ctr">
-                      <a:solidFill>
-                        <a:srgbClr val="CCCCCC"/>
-                      </a:solidFill>
-                      <a:prstDash val="solid"/>
-                      <a:round/>
-                      <a:headEnd type="none" w="med" len="med"/>
-                      <a:tailEnd type="none" w="med" len="med"/>
-                    </a:lnB>
-                    <a:solidFill>
-                      <a:srgbClr val="FFFFFF"/>
-                    </a:solidFill>
-                  </a:tcPr>
-                </a:tc>
-              </a:tr>
-            </a:tbl>
-          </a:graphicData>
-        </a:graphic>
-      </p:graphicFrame>
-      <p:sp>
-        <p:nvSpPr>
-          <p:cNvPr id="26" name="Text 18"/>
-          <p:cNvSpPr/>
-          <p:nvPr/>
-        </p:nvSpPr>
-        <p:spPr>
-          <a:xfrm>
-            <a:off x="5029200" y="4206240"/>
-            <a:ext cx="4572000" cy="365760"/>
+            <a:off x="274320" y="5669280"/>
+            <a:ext cx="9354312" cy="256032"/>
           </a:xfrm>
           <a:prstGeom prst="rect">
             <a:avLst/>
@@ -10123,93 +11717,15 @@
             <a:r>
               <a:rPr lang="en-US" sz="800" dirty="0">
                 <a:solidFill>
-                  <a:srgbClr val="AA4400"/>
-                </a:solidFill>
-                <a:latin typeface="Calibri" pitchFamily="34" charset="0"/>
-                <a:ea typeface="Calibri" pitchFamily="34" charset="-122"/>
-                <a:cs typeface="Calibri" pitchFamily="34" charset="-120"/>
-              </a:rPr>
-              <a:t>※ Direct ConnectはこのAWSアカウントには存在しない。USMH側アカウントで管理されている可能性があるため要確認。</a:t>
-            </a:r>
-            <a:endParaRPr lang="en-US" sz="800" dirty="0"/>
-          </a:p>
-        </p:txBody>
-      </p:sp>
-      <p:sp>
-        <p:nvSpPr>
-          <p:cNvPr id="27" name="Text 19"/>
-          <p:cNvSpPr/>
-          <p:nvPr/>
-        </p:nvSpPr>
-        <p:spPr>
-          <a:xfrm>
-            <a:off x="365760" y="5120640"/>
-            <a:ext cx="8988552" cy="228600"/>
-          </a:xfrm>
-          <a:prstGeom prst="rect">
-            <a:avLst/>
-          </a:prstGeom>
-          <a:noFill/>
-          <a:ln/>
-        </p:spPr>
-        <p:txBody>
-          <a:bodyPr wrap="square" lIns="0" tIns="0" rIns="0" bIns="0" rtlCol="0" anchor="ctr"/>
-          <a:lstStyle/>
-          <a:p>
-            <a:pPr indent="0" marL="0">
-              <a:buNone/>
-            </a:pPr>
-            <a:r>
-              <a:rPr lang="en-US" sz="1000" b="1" dirty="0">
-                <a:solidFill>
-                  <a:srgbClr val="D0232A"/>
-                </a:solidFill>
-                <a:latin typeface="Calibri" pitchFamily="34" charset="0"/>
-                <a:ea typeface="Calibri" pitchFamily="34" charset="-122"/>
-                <a:cs typeface="Calibri" pitchFamily="34" charset="-120"/>
-              </a:rPr>
-              <a:t>AWSアカウント情報</a:t>
-            </a:r>
-            <a:endParaRPr lang="en-US" sz="1000" dirty="0"/>
-          </a:p>
-        </p:txBody>
-      </p:sp>
-      <p:sp>
-        <p:nvSpPr>
-          <p:cNvPr id="28" name="Text 20"/>
-          <p:cNvSpPr/>
-          <p:nvPr/>
-        </p:nvSpPr>
-        <p:spPr>
-          <a:xfrm>
-            <a:off x="365760" y="5367528"/>
-            <a:ext cx="8988552" cy="228600"/>
-          </a:xfrm>
-          <a:prstGeom prst="rect">
-            <a:avLst/>
-          </a:prstGeom>
-          <a:noFill/>
-          <a:ln/>
-        </p:spPr>
-        <p:txBody>
-          <a:bodyPr wrap="square" lIns="0" tIns="0" rIns="0" bIns="0" rtlCol="0" anchor="ctr"/>
-          <a:lstStyle/>
-          <a:p>
-            <a:pPr indent="0" marL="0">
-              <a:buNone/>
-            </a:pPr>
-            <a:r>
-              <a:rPr lang="en-US" sz="900" dirty="0">
-                <a:solidFill>
                   <a:srgbClr val="888888"/>
                 </a:solidFill>
                 <a:latin typeface="Calibri" pitchFamily="34" charset="0"/>
                 <a:ea typeface="Calibri" pitchFamily="34" charset="-122"/>
                 <a:cs typeface="Calibri" pitchFamily="34" charset="-120"/>
               </a:rPr>
-              <a:t>アカウントID: 332802448674　|　IAMユーザー: kiyohara　|　リージョン: ap-northeast-1（東京）</a:t>
+              <a:t>※ ③のNTT DATA様CDSセンタへの送信元IPおよび宛先IPは要確認。NAT GW Public IP: 57.182.174.110（本番）</a:t>
             </a:r>
-            <a:endParaRPr lang="en-US" sz="900" dirty="0"/>
+            <a:endParaRPr lang="en-US" sz="800" dirty="0"/>
           </a:p>
         </p:txBody>
       </p:sp>
@@ -10221,9 +11737,9 @@
 </p:sld>
 </file>
 
-<file path=ppt/slides/slide12.xml><?xml version="1.0" encoding="utf-8"?>
+<file path=ppt/slides/slide13.xml><?xml version="1.0" encoding="utf-8"?>
 <p:sld xmlns:a="http://schemas.openxmlformats.org/drawingml/2006/main" xmlns:r="http://schemas.openxmlformats.org/officeDocument/2006/relationships" xmlns:p="http://schemas.openxmlformats.org/presentationml/2006/main">
-  <p:cSld name="Slide 12">
+  <p:cSld name="Slide 13">
     <p:bg>
       <p:bgPr>
         <a:solidFill>
@@ -10448,7 +11964,7 @@
                 <a:ea typeface="Calibri" pitchFamily="34" charset="-122"/>
                 <a:cs typeface="Calibri" pitchFamily="34" charset="-120"/>
               </a:rPr>
-              <a:t>2026年3月 AWS CloudShell調査結果に基づく修正点</a:t>
+              <a:t>2026年3月 AWS CloudShell調査・資料確認に基づく修正点</a:t>
             </a:r>
             <a:endParaRPr lang="en-US" sz="1300" dirty="0"/>
           </a:p>
@@ -10504,7 +12020,7 @@
                   <a:srgbClr val="FFFFFF"/>
                 </a:solidFill>
               </a:rPr>
-              <a:t>12</a:t>
+              <a:t>13</a:t>
             </a:r>
             <a:endParaRPr lang="en-US" sz="1000" dirty="0"/>
           </a:p>
@@ -10512,7 +12028,7 @@
       </p:sp>
       <p:graphicFrame>
         <p:nvGraphicFramePr>
-          <p:cNvPr id="13" name="Table 0"/>
+          <p:cNvPr id="14" name="Table 0"/>
           <p:cNvGraphicFramePr>
             <a:graphicFrameLocks noGrp="1"/>
           </p:cNvGraphicFramePr>
@@ -10533,10 +12049,10 @@
             <a:tbl>
               <a:tblPr/>
               <a:tblGrid>
-                <a:gridCol w="1645920"/>
-                <a:gridCol w="2194560"/>
-                <a:gridCol w="2743200"/>
-                <a:gridCol w="758952"/>
+                <a:gridCol w="1737360"/>
+                <a:gridCol w="2011680"/>
+                <a:gridCol w="2926080"/>
+                <a:gridCol w="667512"/>
               </a:tblGrid>
               <a:tr h="256032">
                 <a:tc>
@@ -11378,7 +12894,7 @@
                           <a:ea typeface="Calibri" pitchFamily="34" charset="-122"/>
                           <a:cs typeface="Calibri" pitchFamily="34" charset="-120"/>
                         </a:rPr>
-                        <a:t>DBクラスター数</a:t>
+                        <a:t>Multi-AZ</a:t>
                       </a:r>
                       <a:endParaRPr lang="en-US" sz="800" dirty="0">
                         <a:latin typeface="Calibri" charset="0"/>
@@ -11446,7 +12962,7 @@
                           <a:ea typeface="Calibri" pitchFamily="34" charset="-122"/>
                           <a:cs typeface="Calibri" pitchFamily="34" charset="-120"/>
                         </a:rPr>
-                        <a:t>1</a:t>
+                        <a:t>True</a:t>
                       </a:r>
                       <a:endParaRPr lang="en-US" sz="800" dirty="0">
                         <a:latin typeface="Calibri" charset="0"/>
@@ -11514,7 +13030,7 @@
                           <a:ea typeface="Calibri" pitchFamily="34" charset="-122"/>
                           <a:cs typeface="Calibri" pitchFamily="34" charset="-120"/>
                         </a:rPr>
-                        <a:t>2クラスター (instance-1/2)</a:t>
+                        <a:t>False</a:t>
                       </a:r>
                       <a:endParaRPr lang="en-US" sz="800" dirty="0">
                         <a:latin typeface="Calibri" charset="0"/>
@@ -11652,7 +13168,7 @@
                           <a:ea typeface="Calibri" pitchFamily="34" charset="-122"/>
                           <a:cs typeface="Calibri" pitchFamily="34" charset="-120"/>
                         </a:rPr>
-                        <a:t>Multi-AZ</a:t>
+                        <a:t>RDS Proxy</a:t>
                       </a:r>
                       <a:endParaRPr lang="en-US" sz="800" dirty="0">
                         <a:latin typeface="Calibri" charset="0"/>
@@ -11720,7 +13236,7 @@
                           <a:ea typeface="Calibri" pitchFamily="34" charset="-122"/>
                           <a:cs typeface="Calibri" pitchFamily="34" charset="-120"/>
                         </a:rPr>
-                        <a:t>True</a:t>
+                        <a:t>あり</a:t>
                       </a:r>
                       <a:endParaRPr lang="en-US" sz="800" dirty="0">
                         <a:latin typeface="Calibri" charset="0"/>
@@ -11788,7 +13304,7 @@
                           <a:ea typeface="Calibri" pitchFamily="34" charset="-122"/>
                           <a:cs typeface="Calibri" pitchFamily="34" charset="-120"/>
                         </a:rPr>
-                        <a:t>False</a:t>
+                        <a:t>なし</a:t>
                       </a:r>
                       <a:endParaRPr lang="en-US" sz="800" dirty="0">
                         <a:latin typeface="Calibri" charset="0"/>
@@ -11926,7 +13442,7 @@
                           <a:ea typeface="Calibri" pitchFamily="34" charset="-122"/>
                           <a:cs typeface="Calibri" pitchFamily="34" charset="-120"/>
                         </a:rPr>
-                        <a:t>RDS Proxy</a:t>
+                        <a:t>EC2構成</a:t>
                       </a:r>
                       <a:endParaRPr lang="en-US" sz="800" dirty="0">
                         <a:latin typeface="Calibri" charset="0"/>
@@ -11994,7 +13510,7 @@
                           <a:ea typeface="Calibri" pitchFamily="34" charset="-122"/>
                           <a:cs typeface="Calibri" pitchFamily="34" charset="-120"/>
                         </a:rPr>
-                        <a:t>あり</a:t>
+                        <a:t>App/Batch Server</a:t>
                       </a:r>
                       <a:endParaRPr lang="en-US" sz="800" dirty="0">
                         <a:latin typeface="Calibri" charset="0"/>
@@ -12062,7 +13578,7 @@
                           <a:ea typeface="Calibri" pitchFamily="34" charset="-122"/>
                           <a:cs typeface="Calibri" pitchFamily="34" charset="-120"/>
                         </a:rPr>
-                        <a:t>なし</a:t>
+                        <a:t>Bastion(t3.xlarge)+Giftcard(t2.large)</a:t>
                       </a:r>
                       <a:endParaRPr lang="en-US" sz="800" dirty="0">
                         <a:latin typeface="Calibri" charset="0"/>
@@ -12200,280 +13716,6 @@
                           <a:ea typeface="Calibri" pitchFamily="34" charset="-122"/>
                           <a:cs typeface="Calibri" pitchFamily="34" charset="-120"/>
                         </a:rPr>
-                        <a:t>EC2構成</a:t>
-                      </a:r>
-                      <a:endParaRPr lang="en-US" sz="800" dirty="0">
-                        <a:latin typeface="Calibri" charset="0"/>
-                        <a:ea typeface="Calibri" charset="0"/>
-                        <a:cs typeface="Calibri" charset="0"/>
-                      </a:endParaRPr>
-                    </a:p>
-                  </a:txBody>
-                  <a:tcPr marL="91440" marR="91440" marT="45720" marB="45720">
-                    <a:lnL w="6350" cap="flat" cmpd="sng" algn="ctr">
-                      <a:solidFill>
-                        <a:srgbClr val="CCCCCC"/>
-                      </a:solidFill>
-                      <a:prstDash val="solid"/>
-                      <a:round/>
-                      <a:headEnd type="none" w="med" len="med"/>
-                      <a:tailEnd type="none" w="med" len="med"/>
-                    </a:lnL>
-                    <a:lnR w="6350" cap="flat" cmpd="sng" algn="ctr">
-                      <a:solidFill>
-                        <a:srgbClr val="CCCCCC"/>
-                      </a:solidFill>
-                      <a:prstDash val="solid"/>
-                      <a:round/>
-                      <a:headEnd type="none" w="med" len="med"/>
-                      <a:tailEnd type="none" w="med" len="med"/>
-                    </a:lnR>
-                    <a:lnT w="6350" cap="flat" cmpd="sng" algn="ctr">
-                      <a:solidFill>
-                        <a:srgbClr val="CCCCCC"/>
-                      </a:solidFill>
-                      <a:prstDash val="solid"/>
-                      <a:round/>
-                      <a:headEnd type="none" w="med" len="med"/>
-                      <a:tailEnd type="none" w="med" len="med"/>
-                    </a:lnT>
-                    <a:lnB w="6350" cap="flat" cmpd="sng" algn="ctr">
-                      <a:solidFill>
-                        <a:srgbClr val="CCCCCC"/>
-                      </a:solidFill>
-                      <a:prstDash val="solid"/>
-                      <a:round/>
-                      <a:headEnd type="none" w="med" len="med"/>
-                      <a:tailEnd type="none" w="med" len="med"/>
-                    </a:lnB>
-                    <a:solidFill>
-                      <a:srgbClr val="F5F5F5"/>
-                    </a:solidFill>
-                  </a:tcPr>
-                </a:tc>
-                <a:tc>
-                  <a:txBody>
-                    <a:bodyPr/>
-                    <a:lstStyle/>
-                    <a:p>
-                      <a:pPr indent="0" marL="0">
-                        <a:buNone/>
-                      </a:pPr>
-                      <a:r>
-                        <a:rPr lang="en-US" sz="800" dirty="0">
-                          <a:solidFill>
-                            <a:srgbClr val="2D2D2D"/>
-                          </a:solidFill>
-                          <a:latin typeface="Calibri" pitchFamily="34" charset="0"/>
-                          <a:ea typeface="Calibri" pitchFamily="34" charset="-122"/>
-                          <a:cs typeface="Calibri" pitchFamily="34" charset="-120"/>
-                        </a:rPr>
-                        <a:t>App/Batch Server (t3.medium)</a:t>
-                      </a:r>
-                      <a:endParaRPr lang="en-US" sz="800" dirty="0">
-                        <a:latin typeface="Calibri" charset="0"/>
-                        <a:ea typeface="Calibri" charset="0"/>
-                        <a:cs typeface="Calibri" charset="0"/>
-                      </a:endParaRPr>
-                    </a:p>
-                  </a:txBody>
-                  <a:tcPr marL="91440" marR="91440" marT="45720" marB="45720">
-                    <a:lnL w="6350" cap="flat" cmpd="sng" algn="ctr">
-                      <a:solidFill>
-                        <a:srgbClr val="CCCCCC"/>
-                      </a:solidFill>
-                      <a:prstDash val="solid"/>
-                      <a:round/>
-                      <a:headEnd type="none" w="med" len="med"/>
-                      <a:tailEnd type="none" w="med" len="med"/>
-                    </a:lnL>
-                    <a:lnR w="6350" cap="flat" cmpd="sng" algn="ctr">
-                      <a:solidFill>
-                        <a:srgbClr val="CCCCCC"/>
-                      </a:solidFill>
-                      <a:prstDash val="solid"/>
-                      <a:round/>
-                      <a:headEnd type="none" w="med" len="med"/>
-                      <a:tailEnd type="none" w="med" len="med"/>
-                    </a:lnR>
-                    <a:lnT w="6350" cap="flat" cmpd="sng" algn="ctr">
-                      <a:solidFill>
-                        <a:srgbClr val="CCCCCC"/>
-                      </a:solidFill>
-                      <a:prstDash val="solid"/>
-                      <a:round/>
-                      <a:headEnd type="none" w="med" len="med"/>
-                      <a:tailEnd type="none" w="med" len="med"/>
-                    </a:lnT>
-                    <a:lnB w="6350" cap="flat" cmpd="sng" algn="ctr">
-                      <a:solidFill>
-                        <a:srgbClr val="CCCCCC"/>
-                      </a:solidFill>
-                      <a:prstDash val="solid"/>
-                      <a:round/>
-                      <a:headEnd type="none" w="med" len="med"/>
-                      <a:tailEnd type="none" w="med" len="med"/>
-                    </a:lnB>
-                    <a:solidFill>
-                      <a:srgbClr val="F5F5F5"/>
-                    </a:solidFill>
-                  </a:tcPr>
-                </a:tc>
-                <a:tc>
-                  <a:txBody>
-                    <a:bodyPr/>
-                    <a:lstStyle/>
-                    <a:p>
-                      <a:pPr indent="0" marL="0">
-                        <a:buNone/>
-                      </a:pPr>
-                      <a:r>
-                        <a:rPr lang="en-US" sz="800" dirty="0">
-                          <a:solidFill>
-                            <a:srgbClr val="2D2D2D"/>
-                          </a:solidFill>
-                          <a:latin typeface="Calibri" pitchFamily="34" charset="0"/>
-                          <a:ea typeface="Calibri" pitchFamily="34" charset="-122"/>
-                          <a:cs typeface="Calibri" pitchFamily="34" charset="-120"/>
-                        </a:rPr>
-                        <a:t>Bastion(t3.xlarge) + Giftcard(t2.large)</a:t>
-                      </a:r>
-                      <a:endParaRPr lang="en-US" sz="800" dirty="0">
-                        <a:latin typeface="Calibri" charset="0"/>
-                        <a:ea typeface="Calibri" charset="0"/>
-                        <a:cs typeface="Calibri" charset="0"/>
-                      </a:endParaRPr>
-                    </a:p>
-                  </a:txBody>
-                  <a:tcPr marL="91440" marR="91440" marT="45720" marB="45720">
-                    <a:lnL w="6350" cap="flat" cmpd="sng" algn="ctr">
-                      <a:solidFill>
-                        <a:srgbClr val="CCCCCC"/>
-                      </a:solidFill>
-                      <a:prstDash val="solid"/>
-                      <a:round/>
-                      <a:headEnd type="none" w="med" len="med"/>
-                      <a:tailEnd type="none" w="med" len="med"/>
-                    </a:lnL>
-                    <a:lnR w="6350" cap="flat" cmpd="sng" algn="ctr">
-                      <a:solidFill>
-                        <a:srgbClr val="CCCCCC"/>
-                      </a:solidFill>
-                      <a:prstDash val="solid"/>
-                      <a:round/>
-                      <a:headEnd type="none" w="med" len="med"/>
-                      <a:tailEnd type="none" w="med" len="med"/>
-                    </a:lnR>
-                    <a:lnT w="6350" cap="flat" cmpd="sng" algn="ctr">
-                      <a:solidFill>
-                        <a:srgbClr val="CCCCCC"/>
-                      </a:solidFill>
-                      <a:prstDash val="solid"/>
-                      <a:round/>
-                      <a:headEnd type="none" w="med" len="med"/>
-                      <a:tailEnd type="none" w="med" len="med"/>
-                    </a:lnT>
-                    <a:lnB w="6350" cap="flat" cmpd="sng" algn="ctr">
-                      <a:solidFill>
-                        <a:srgbClr val="CCCCCC"/>
-                      </a:solidFill>
-                      <a:prstDash val="solid"/>
-                      <a:round/>
-                      <a:headEnd type="none" w="med" len="med"/>
-                      <a:tailEnd type="none" w="med" len="med"/>
-                    </a:lnB>
-                    <a:solidFill>
-                      <a:srgbClr val="F5F5F5"/>
-                    </a:solidFill>
-                  </a:tcPr>
-                </a:tc>
-                <a:tc>
-                  <a:txBody>
-                    <a:bodyPr/>
-                    <a:lstStyle/>
-                    <a:p>
-                      <a:pPr indent="0" marL="0">
-                        <a:buNone/>
-                      </a:pPr>
-                      <a:r>
-                        <a:rPr lang="en-US" sz="800" dirty="0">
-                          <a:solidFill>
-                            <a:srgbClr val="2D2D2D"/>
-                          </a:solidFill>
-                          <a:latin typeface="Calibri" pitchFamily="34" charset="0"/>
-                          <a:ea typeface="Calibri" pitchFamily="34" charset="-122"/>
-                          <a:cs typeface="Calibri" pitchFamily="34" charset="-120"/>
-                        </a:rPr>
-                        <a:t>❌修正</a:t>
-                      </a:r>
-                      <a:endParaRPr lang="en-US" sz="800" dirty="0">
-                        <a:latin typeface="Calibri" charset="0"/>
-                        <a:ea typeface="Calibri" charset="0"/>
-                        <a:cs typeface="Calibri" charset="0"/>
-                      </a:endParaRPr>
-                    </a:p>
-                  </a:txBody>
-                  <a:tcPr marL="91440" marR="91440" marT="45720" marB="45720">
-                    <a:lnL w="6350" cap="flat" cmpd="sng" algn="ctr">
-                      <a:solidFill>
-                        <a:srgbClr val="CCCCCC"/>
-                      </a:solidFill>
-                      <a:prstDash val="solid"/>
-                      <a:round/>
-                      <a:headEnd type="none" w="med" len="med"/>
-                      <a:tailEnd type="none" w="med" len="med"/>
-                    </a:lnL>
-                    <a:lnR w="6350" cap="flat" cmpd="sng" algn="ctr">
-                      <a:solidFill>
-                        <a:srgbClr val="CCCCCC"/>
-                      </a:solidFill>
-                      <a:prstDash val="solid"/>
-                      <a:round/>
-                      <a:headEnd type="none" w="med" len="med"/>
-                      <a:tailEnd type="none" w="med" len="med"/>
-                    </a:lnR>
-                    <a:lnT w="6350" cap="flat" cmpd="sng" algn="ctr">
-                      <a:solidFill>
-                        <a:srgbClr val="CCCCCC"/>
-                      </a:solidFill>
-                      <a:prstDash val="solid"/>
-                      <a:round/>
-                      <a:headEnd type="none" w="med" len="med"/>
-                      <a:tailEnd type="none" w="med" len="med"/>
-                    </a:lnT>
-                    <a:lnB w="6350" cap="flat" cmpd="sng" algn="ctr">
-                      <a:solidFill>
-                        <a:srgbClr val="CCCCCC"/>
-                      </a:solidFill>
-                      <a:prstDash val="solid"/>
-                      <a:round/>
-                      <a:headEnd type="none" w="med" len="med"/>
-                      <a:tailEnd type="none" w="med" len="med"/>
-                    </a:lnB>
-                    <a:solidFill>
-                      <a:srgbClr val="F5F5F5"/>
-                    </a:solidFill>
-                  </a:tcPr>
-                </a:tc>
-              </a:tr>
-              <a:tr h="256032">
-                <a:tc>
-                  <a:txBody>
-                    <a:bodyPr/>
-                    <a:lstStyle/>
-                    <a:p>
-                      <a:pPr indent="0" marL="0">
-                        <a:buNone/>
-                      </a:pPr>
-                      <a:r>
-                        <a:rPr lang="en-US" sz="800" dirty="0">
-                          <a:solidFill>
-                            <a:srgbClr val="2D2D2D"/>
-                          </a:solidFill>
-                          <a:latin typeface="Calibri" pitchFamily="34" charset="0"/>
-                          <a:ea typeface="Calibri" pitchFamily="34" charset="-122"/>
-                          <a:cs typeface="Calibri" pitchFamily="34" charset="-120"/>
-                        </a:rPr>
                         <a:t>Lambda Runtime</a:t>
                       </a:r>
                       <a:endParaRPr lang="en-US" sz="800" dirty="0">
@@ -12521,7 +13763,7 @@
                       <a:tailEnd type="none" w="med" len="med"/>
                     </a:lnB>
                     <a:solidFill>
-                      <a:srgbClr val="FFFFFF"/>
+                      <a:srgbClr val="F5F5F5"/>
                     </a:solidFill>
                   </a:tcPr>
                 </a:tc>
@@ -12589,7 +13831,7 @@
                       <a:tailEnd type="none" w="med" len="med"/>
                     </a:lnB>
                     <a:solidFill>
-                      <a:srgbClr val="FFFFFF"/>
+                      <a:srgbClr val="F5F5F5"/>
                     </a:solidFill>
                   </a:tcPr>
                 </a:tc>
@@ -12611,280 +13853,6 @@
                           <a:cs typeface="Calibri" pitchFamily="34" charset="-120"/>
                         </a:rPr>
                         <a:t>Java 17が主体</a:t>
-                      </a:r>
-                      <a:endParaRPr lang="en-US" sz="800" dirty="0">
-                        <a:latin typeface="Calibri" charset="0"/>
-                        <a:ea typeface="Calibri" charset="0"/>
-                        <a:cs typeface="Calibri" charset="0"/>
-                      </a:endParaRPr>
-                    </a:p>
-                  </a:txBody>
-                  <a:tcPr marL="91440" marR="91440" marT="45720" marB="45720">
-                    <a:lnL w="6350" cap="flat" cmpd="sng" algn="ctr">
-                      <a:solidFill>
-                        <a:srgbClr val="CCCCCC"/>
-                      </a:solidFill>
-                      <a:prstDash val="solid"/>
-                      <a:round/>
-                      <a:headEnd type="none" w="med" len="med"/>
-                      <a:tailEnd type="none" w="med" len="med"/>
-                    </a:lnL>
-                    <a:lnR w="6350" cap="flat" cmpd="sng" algn="ctr">
-                      <a:solidFill>
-                        <a:srgbClr val="CCCCCC"/>
-                      </a:solidFill>
-                      <a:prstDash val="solid"/>
-                      <a:round/>
-                      <a:headEnd type="none" w="med" len="med"/>
-                      <a:tailEnd type="none" w="med" len="med"/>
-                    </a:lnR>
-                    <a:lnT w="6350" cap="flat" cmpd="sng" algn="ctr">
-                      <a:solidFill>
-                        <a:srgbClr val="CCCCCC"/>
-                      </a:solidFill>
-                      <a:prstDash val="solid"/>
-                      <a:round/>
-                      <a:headEnd type="none" w="med" len="med"/>
-                      <a:tailEnd type="none" w="med" len="med"/>
-                    </a:lnT>
-                    <a:lnB w="6350" cap="flat" cmpd="sng" algn="ctr">
-                      <a:solidFill>
-                        <a:srgbClr val="CCCCCC"/>
-                      </a:solidFill>
-                      <a:prstDash val="solid"/>
-                      <a:round/>
-                      <a:headEnd type="none" w="med" len="med"/>
-                      <a:tailEnd type="none" w="med" len="med"/>
-                    </a:lnB>
-                    <a:solidFill>
-                      <a:srgbClr val="FFFFFF"/>
-                    </a:solidFill>
-                  </a:tcPr>
-                </a:tc>
-                <a:tc>
-                  <a:txBody>
-                    <a:bodyPr/>
-                    <a:lstStyle/>
-                    <a:p>
-                      <a:pPr indent="0" marL="0">
-                        <a:buNone/>
-                      </a:pPr>
-                      <a:r>
-                        <a:rPr lang="en-US" sz="800" dirty="0">
-                          <a:solidFill>
-                            <a:srgbClr val="2D2D2D"/>
-                          </a:solidFill>
-                          <a:latin typeface="Calibri" pitchFamily="34" charset="0"/>
-                          <a:ea typeface="Calibri" pitchFamily="34" charset="-122"/>
-                          <a:cs typeface="Calibri" pitchFamily="34" charset="-120"/>
-                        </a:rPr>
-                        <a:t>❌修正</a:t>
-                      </a:r>
-                      <a:endParaRPr lang="en-US" sz="800" dirty="0">
-                        <a:latin typeface="Calibri" charset="0"/>
-                        <a:ea typeface="Calibri" charset="0"/>
-                        <a:cs typeface="Calibri" charset="0"/>
-                      </a:endParaRPr>
-                    </a:p>
-                  </a:txBody>
-                  <a:tcPr marL="91440" marR="91440" marT="45720" marB="45720">
-                    <a:lnL w="6350" cap="flat" cmpd="sng" algn="ctr">
-                      <a:solidFill>
-                        <a:srgbClr val="CCCCCC"/>
-                      </a:solidFill>
-                      <a:prstDash val="solid"/>
-                      <a:round/>
-                      <a:headEnd type="none" w="med" len="med"/>
-                      <a:tailEnd type="none" w="med" len="med"/>
-                    </a:lnL>
-                    <a:lnR w="6350" cap="flat" cmpd="sng" algn="ctr">
-                      <a:solidFill>
-                        <a:srgbClr val="CCCCCC"/>
-                      </a:solidFill>
-                      <a:prstDash val="solid"/>
-                      <a:round/>
-                      <a:headEnd type="none" w="med" len="med"/>
-                      <a:tailEnd type="none" w="med" len="med"/>
-                    </a:lnR>
-                    <a:lnT w="6350" cap="flat" cmpd="sng" algn="ctr">
-                      <a:solidFill>
-                        <a:srgbClr val="CCCCCC"/>
-                      </a:solidFill>
-                      <a:prstDash val="solid"/>
-                      <a:round/>
-                      <a:headEnd type="none" w="med" len="med"/>
-                      <a:tailEnd type="none" w="med" len="med"/>
-                    </a:lnT>
-                    <a:lnB w="6350" cap="flat" cmpd="sng" algn="ctr">
-                      <a:solidFill>
-                        <a:srgbClr val="CCCCCC"/>
-                      </a:solidFill>
-                      <a:prstDash val="solid"/>
-                      <a:round/>
-                      <a:headEnd type="none" w="med" len="med"/>
-                      <a:tailEnd type="none" w="med" len="med"/>
-                    </a:lnB>
-                    <a:solidFill>
-                      <a:srgbClr val="FFFFFF"/>
-                    </a:solidFill>
-                  </a:tcPr>
-                </a:tc>
-              </a:tr>
-              <a:tr h="256032">
-                <a:tc>
-                  <a:txBody>
-                    <a:bodyPr/>
-                    <a:lstStyle/>
-                    <a:p>
-                      <a:pPr indent="0" marL="0">
-                        <a:buNone/>
-                      </a:pPr>
-                      <a:r>
-                        <a:rPr lang="en-US" sz="800" dirty="0">
-                          <a:solidFill>
-                            <a:srgbClr val="2D2D2D"/>
-                          </a:solidFill>
-                          <a:latin typeface="Calibri" pitchFamily="34" charset="0"/>
-                          <a:ea typeface="Calibri" pitchFamily="34" charset="-122"/>
-                          <a:cs typeface="Calibri" pitchFamily="34" charset="-120"/>
-                        </a:rPr>
-                        <a:t>Lambda本数</a:t>
-                      </a:r>
-                      <a:endParaRPr lang="en-US" sz="800" dirty="0">
-                        <a:latin typeface="Calibri" charset="0"/>
-                        <a:ea typeface="Calibri" charset="0"/>
-                        <a:cs typeface="Calibri" charset="0"/>
-                      </a:endParaRPr>
-                    </a:p>
-                  </a:txBody>
-                  <a:tcPr marL="91440" marR="91440" marT="45720" marB="45720">
-                    <a:lnL w="6350" cap="flat" cmpd="sng" algn="ctr">
-                      <a:solidFill>
-                        <a:srgbClr val="CCCCCC"/>
-                      </a:solidFill>
-                      <a:prstDash val="solid"/>
-                      <a:round/>
-                      <a:headEnd type="none" w="med" len="med"/>
-                      <a:tailEnd type="none" w="med" len="med"/>
-                    </a:lnL>
-                    <a:lnR w="6350" cap="flat" cmpd="sng" algn="ctr">
-                      <a:solidFill>
-                        <a:srgbClr val="CCCCCC"/>
-                      </a:solidFill>
-                      <a:prstDash val="solid"/>
-                      <a:round/>
-                      <a:headEnd type="none" w="med" len="med"/>
-                      <a:tailEnd type="none" w="med" len="med"/>
-                    </a:lnR>
-                    <a:lnT w="6350" cap="flat" cmpd="sng" algn="ctr">
-                      <a:solidFill>
-                        <a:srgbClr val="CCCCCC"/>
-                      </a:solidFill>
-                      <a:prstDash val="solid"/>
-                      <a:round/>
-                      <a:headEnd type="none" w="med" len="med"/>
-                      <a:tailEnd type="none" w="med" len="med"/>
-                    </a:lnT>
-                    <a:lnB w="6350" cap="flat" cmpd="sng" algn="ctr">
-                      <a:solidFill>
-                        <a:srgbClr val="CCCCCC"/>
-                      </a:solidFill>
-                      <a:prstDash val="solid"/>
-                      <a:round/>
-                      <a:headEnd type="none" w="med" len="med"/>
-                      <a:tailEnd type="none" w="med" len="med"/>
-                    </a:lnB>
-                    <a:solidFill>
-                      <a:srgbClr val="F5F5F5"/>
-                    </a:solidFill>
-                  </a:tcPr>
-                </a:tc>
-                <a:tc>
-                  <a:txBody>
-                    <a:bodyPr/>
-                    <a:lstStyle/>
-                    <a:p>
-                      <a:pPr indent="0" marL="0">
-                        <a:buNone/>
-                      </a:pPr>
-                      <a:r>
-                        <a:rPr lang="en-US" sz="800" dirty="0">
-                          <a:solidFill>
-                            <a:srgbClr val="2D2D2D"/>
-                          </a:solidFill>
-                          <a:latin typeface="Calibri" pitchFamily="34" charset="0"/>
-                          <a:ea typeface="Calibri" pitchFamily="34" charset="-122"/>
-                          <a:cs typeface="Calibri" pitchFamily="34" charset="-120"/>
-                        </a:rPr>
-                        <a:t>12モジュール</a:t>
-                      </a:r>
-                      <a:endParaRPr lang="en-US" sz="800" dirty="0">
-                        <a:latin typeface="Calibri" charset="0"/>
-                        <a:ea typeface="Calibri" charset="0"/>
-                        <a:cs typeface="Calibri" charset="0"/>
-                      </a:endParaRPr>
-                    </a:p>
-                  </a:txBody>
-                  <a:tcPr marL="91440" marR="91440" marT="45720" marB="45720">
-                    <a:lnL w="6350" cap="flat" cmpd="sng" algn="ctr">
-                      <a:solidFill>
-                        <a:srgbClr val="CCCCCC"/>
-                      </a:solidFill>
-                      <a:prstDash val="solid"/>
-                      <a:round/>
-                      <a:headEnd type="none" w="med" len="med"/>
-                      <a:tailEnd type="none" w="med" len="med"/>
-                    </a:lnL>
-                    <a:lnR w="6350" cap="flat" cmpd="sng" algn="ctr">
-                      <a:solidFill>
-                        <a:srgbClr val="CCCCCC"/>
-                      </a:solidFill>
-                      <a:prstDash val="solid"/>
-                      <a:round/>
-                      <a:headEnd type="none" w="med" len="med"/>
-                      <a:tailEnd type="none" w="med" len="med"/>
-                    </a:lnR>
-                    <a:lnT w="6350" cap="flat" cmpd="sng" algn="ctr">
-                      <a:solidFill>
-                        <a:srgbClr val="CCCCCC"/>
-                      </a:solidFill>
-                      <a:prstDash val="solid"/>
-                      <a:round/>
-                      <a:headEnd type="none" w="med" len="med"/>
-                      <a:tailEnd type="none" w="med" len="med"/>
-                    </a:lnT>
-                    <a:lnB w="6350" cap="flat" cmpd="sng" algn="ctr">
-                      <a:solidFill>
-                        <a:srgbClr val="CCCCCC"/>
-                      </a:solidFill>
-                      <a:prstDash val="solid"/>
-                      <a:round/>
-                      <a:headEnd type="none" w="med" len="med"/>
-                      <a:tailEnd type="none" w="med" len="med"/>
-                    </a:lnB>
-                    <a:solidFill>
-                      <a:srgbClr val="F5F5F5"/>
-                    </a:solidFill>
-                  </a:tcPr>
-                </a:tc>
-                <a:tc>
-                  <a:txBody>
-                    <a:bodyPr/>
-                    <a:lstStyle/>
-                    <a:p>
-                      <a:pPr indent="0" marL="0">
-                        <a:buNone/>
-                      </a:pPr>
-                      <a:r>
-                        <a:rPr lang="en-US" sz="800" dirty="0">
-                          <a:solidFill>
-                            <a:srgbClr val="2D2D2D"/>
-                          </a:solidFill>
-                          <a:latin typeface="Calibri" pitchFamily="34" charset="0"/>
-                          <a:ea typeface="Calibri" pitchFamily="34" charset="-122"/>
-                          <a:cs typeface="Calibri" pitchFamily="34" charset="-120"/>
-                        </a:rPr>
-                        <a:t>21関数</a:t>
                       </a:r>
                       <a:endParaRPr lang="en-US" sz="800" dirty="0">
                         <a:latin typeface="Calibri" charset="0"/>
@@ -13296,7 +14264,7 @@
                           <a:ea typeface="Calibri" pitchFamily="34" charset="-122"/>
                           <a:cs typeface="Calibri" pitchFamily="34" charset="-120"/>
                         </a:rPr>
-                        <a:t>ALB</a:t>
+                        <a:t>ALB / WAF</a:t>
                       </a:r>
                       <a:endParaRPr lang="en-US" sz="800" dirty="0">
                         <a:latin typeface="Calibri" charset="0"/>
@@ -13564,13 +14532,13 @@
                       <a:r>
                         <a:rPr lang="en-US" sz="800" dirty="0">
                           <a:solidFill>
-                            <a:srgbClr val="2D2D2D"/>
+                            <a:srgbClr val="117733"/>
                           </a:solidFill>
                           <a:latin typeface="Calibri" pitchFamily="34" charset="0"/>
                           <a:ea typeface="Calibri" pitchFamily="34" charset="-122"/>
                           <a:cs typeface="Calibri" pitchFamily="34" charset="-120"/>
                         </a:rPr>
-                        <a:t>WAF</a:t>
+                        <a:t>USMH接続方式</a:t>
                       </a:r>
                       <a:endParaRPr lang="en-US" sz="800" dirty="0">
                         <a:latin typeface="Calibri" charset="0"/>
@@ -13632,13 +14600,13 @@
                       <a:r>
                         <a:rPr lang="en-US" sz="800" dirty="0">
                           <a:solidFill>
-                            <a:srgbClr val="2D2D2D"/>
+                            <a:srgbClr val="117733"/>
                           </a:solidFill>
                           <a:latin typeface="Calibri" pitchFamily="34" charset="0"/>
                           <a:ea typeface="Calibri" pitchFamily="34" charset="-122"/>
                           <a:cs typeface="Calibri" pitchFamily="34" charset="-120"/>
                         </a:rPr>
-                        <a:t>あり</a:t>
+                        <a:t>Direct Connect（推定）</a:t>
                       </a:r>
                       <a:endParaRPr lang="en-US" sz="800" dirty="0">
                         <a:latin typeface="Calibri" charset="0"/>
@@ -13700,13 +14668,34 @@
                       <a:r>
                         <a:rPr lang="en-US" sz="800" dirty="0">
                           <a:solidFill>
-                            <a:srgbClr val="2D2D2D"/>
+                            <a:srgbClr val="117733"/>
                           </a:solidFill>
                           <a:latin typeface="Calibri" pitchFamily="34" charset="0"/>
                           <a:ea typeface="Calibri" pitchFamily="34" charset="-122"/>
                           <a:cs typeface="Calibri" pitchFamily="34" charset="-120"/>
                         </a:rPr>
-                        <a:t>なし</a:t>
+                        <a:t>IPSec VPN + Direct Connect</a:t>
+                      </a:r>
+                      <a:endParaRPr lang="en-US" sz="800" dirty="0">
+                        <a:latin typeface="Calibri" charset="0"/>
+                        <a:ea typeface="Calibri" charset="0"/>
+                        <a:cs typeface="Calibri" charset="0"/>
+                      </a:endParaRPr>
+                    </a:p>
+                    <a:p>
+                      <a:pPr indent="0" marL="0">
+                        <a:buNone/>
+                      </a:pPr>
+                      <a:r>
+                        <a:rPr lang="en-US" sz="800" dirty="0">
+                          <a:solidFill>
+                            <a:srgbClr val="117733"/>
+                          </a:solidFill>
+                          <a:latin typeface="Calibri" pitchFamily="34" charset="0"/>
+                          <a:ea typeface="Calibri" pitchFamily="34" charset="-122"/>
+                          <a:cs typeface="Calibri" pitchFamily="34" charset="-120"/>
+                        </a:rPr>
+                        <a:t>(Gateway VPC経由→VPN GW)</a:t>
                       </a:r>
                       <a:endParaRPr lang="en-US" sz="800" dirty="0">
                         <a:latin typeface="Calibri" charset="0"/>
@@ -13768,13 +14757,13 @@
                       <a:r>
                         <a:rPr lang="en-US" sz="800" dirty="0">
                           <a:solidFill>
-                            <a:srgbClr val="2D2D2D"/>
+                            <a:srgbClr val="117733"/>
                           </a:solidFill>
                           <a:latin typeface="Calibri" pitchFamily="34" charset="0"/>
                           <a:ea typeface="Calibri" pitchFamily="34" charset="-122"/>
                           <a:cs typeface="Calibri" pitchFamily="34" charset="-120"/>
                         </a:rPr>
-                        <a:t>❌修正</a:t>
+                        <a:t>✅確認済み</a:t>
                       </a:r>
                       <a:endParaRPr lang="en-US" sz="800" dirty="0">
                         <a:latin typeface="Calibri" charset="0"/>
@@ -13838,13 +14827,13 @@
                       <a:r>
                         <a:rPr lang="en-US" sz="800" dirty="0">
                           <a:solidFill>
-                            <a:srgbClr val="AA6600"/>
+                            <a:srgbClr val="2266AA"/>
                           </a:solidFill>
                           <a:latin typeface="Calibri" pitchFamily="34" charset="0"/>
                           <a:ea typeface="Calibri" pitchFamily="34" charset="-122"/>
                           <a:cs typeface="Calibri" pitchFamily="34" charset="-120"/>
                         </a:rPr>
-                        <a:t>USMH接続</a:t>
+                        <a:t>オーソリ宛先(本番)</a:t>
                       </a:r>
                       <a:endParaRPr lang="en-US" sz="800" dirty="0">
                         <a:latin typeface="Calibri" charset="0"/>
@@ -13906,13 +14895,13 @@
                       <a:r>
                         <a:rPr lang="en-US" sz="800" dirty="0">
                           <a:solidFill>
-                            <a:srgbClr val="AA6600"/>
+                            <a:srgbClr val="2266AA"/>
                           </a:solidFill>
                           <a:latin typeface="Calibri" pitchFamily="34" charset="0"/>
                           <a:ea typeface="Calibri" pitchFamily="34" charset="-122"/>
                           <a:cs typeface="Calibri" pitchFamily="34" charset="-120"/>
                         </a:rPr>
-                        <a:t>Direct Connect</a:t>
+                        <a:t>未記載</a:t>
                       </a:r>
                       <a:endParaRPr lang="en-US" sz="800" dirty="0">
                         <a:latin typeface="Calibri" charset="0"/>
@@ -13974,13 +14963,13 @@
                       <a:r>
                         <a:rPr lang="en-US" sz="800" dirty="0">
                           <a:solidFill>
-                            <a:srgbClr val="AA6600"/>
+                            <a:srgbClr val="2266AA"/>
                           </a:solidFill>
                           <a:latin typeface="Calibri" pitchFamily="34" charset="0"/>
                           <a:ea typeface="Calibri" pitchFamily="34" charset="-122"/>
                           <a:cs typeface="Calibri" pitchFamily="34" charset="-120"/>
                         </a:rPr>
-                        <a:t>IPSec VPN（要確認）</a:t>
+                        <a:t>192.168.60.10:1501-1508</a:t>
                       </a:r>
                       <a:endParaRPr lang="en-US" sz="800" dirty="0">
                         <a:latin typeface="Calibri" charset="0"/>
@@ -14042,13 +15031,13 @@
                       <a:r>
                         <a:rPr lang="en-US" sz="800" dirty="0">
                           <a:solidFill>
-                            <a:srgbClr val="AA6600"/>
+                            <a:srgbClr val="2266AA"/>
                           </a:solidFill>
                           <a:latin typeface="Calibri" pitchFamily="34" charset="0"/>
                           <a:ea typeface="Calibri" pitchFamily="34" charset="-122"/>
                           <a:cs typeface="Calibri" pitchFamily="34" charset="-120"/>
                         </a:rPr>
-                        <a:t>⚠️要確認</a:t>
+                        <a:t>✅新規追加</a:t>
                       </a:r>
                       <a:endParaRPr lang="en-US" sz="800" dirty="0">
                         <a:latin typeface="Calibri" charset="0"/>
@@ -14112,13 +15101,13 @@
                       <a:r>
                         <a:rPr lang="en-US" sz="800" dirty="0">
                           <a:solidFill>
-                            <a:srgbClr val="2D2D2D"/>
+                            <a:srgbClr val="2266AA"/>
                           </a:solidFill>
                           <a:latin typeface="Calibri" pitchFamily="34" charset="0"/>
                           <a:ea typeface="Calibri" pitchFamily="34" charset="-122"/>
                           <a:cs typeface="Calibri" pitchFamily="34" charset="-120"/>
                         </a:rPr>
-                        <a:t>EventBridge 06:00/07:00</a:t>
+                        <a:t>NAT変換後送信元IP</a:t>
                       </a:r>
                       <a:endParaRPr lang="en-US" sz="800" dirty="0">
                         <a:latin typeface="Calibri" charset="0"/>
@@ -14180,13 +15169,13 @@
                       <a:r>
                         <a:rPr lang="en-US" sz="800" dirty="0">
                           <a:solidFill>
-                            <a:srgbClr val="2D2D2D"/>
+                            <a:srgbClr val="2266AA"/>
                           </a:solidFill>
                           <a:latin typeface="Calibri" pitchFamily="34" charset="0"/>
                           <a:ea typeface="Calibri" pitchFamily="34" charset="-122"/>
                           <a:cs typeface="Calibri" pitchFamily="34" charset="-120"/>
                         </a:rPr>
-                        <a:t>ESLDATA/レポート</a:t>
+                        <a:t>未記載</a:t>
                       </a:r>
                       <a:endParaRPr lang="en-US" sz="800" dirty="0">
                         <a:latin typeface="Calibri" charset="0"/>
@@ -14248,13 +15237,13 @@
                       <a:r>
                         <a:rPr lang="en-US" sz="800" dirty="0">
                           <a:solidFill>
-                            <a:srgbClr val="2D2D2D"/>
+                            <a:srgbClr val="2266AA"/>
                           </a:solidFill>
                           <a:latin typeface="Calibri" pitchFamily="34" charset="0"/>
                           <a:ea typeface="Calibri" pitchFamily="34" charset="-122"/>
                           <a:cs typeface="Calibri" pitchFamily="34" charset="-120"/>
                         </a:rPr>
-                        <a:t>該当ルールなし</a:t>
+                        <a:t>本番:10.156.96.220 / 開発:10.156.96.221</a:t>
                       </a:r>
                       <a:endParaRPr lang="en-US" sz="800" dirty="0">
                         <a:latin typeface="Calibri" charset="0"/>
@@ -14316,13 +15305,13 @@
                       <a:r>
                         <a:rPr lang="en-US" sz="800" dirty="0">
                           <a:solidFill>
-                            <a:srgbClr val="2D2D2D"/>
+                            <a:srgbClr val="2266AA"/>
                           </a:solidFill>
                           <a:latin typeface="Calibri" pitchFamily="34" charset="0"/>
                           <a:ea typeface="Calibri" pitchFamily="34" charset="-122"/>
                           <a:cs typeface="Calibri" pitchFamily="34" charset="-120"/>
                         </a:rPr>
-                        <a:t>❌修正</a:t>
+                        <a:t>✅新規追加</a:t>
                       </a:r>
                       <a:endParaRPr lang="en-US" sz="800" dirty="0">
                         <a:latin typeface="Calibri" charset="0"/>
@@ -14370,6 +15359,280 @@
                     </a:lnB>
                     <a:solidFill>
                       <a:srgbClr val="FFFFFF"/>
+                    </a:solidFill>
+                  </a:tcPr>
+                </a:tc>
+              </a:tr>
+              <a:tr h="256032">
+                <a:tc>
+                  <a:txBody>
+                    <a:bodyPr/>
+                    <a:lstStyle/>
+                    <a:p>
+                      <a:pPr indent="0" marL="0">
+                        <a:buNone/>
+                      </a:pPr>
+                      <a:r>
+                        <a:rPr lang="en-US" sz="800" dirty="0">
+                          <a:solidFill>
+                            <a:srgbClr val="2266AA"/>
+                          </a:solidFill>
+                          <a:latin typeface="Calibri" pitchFamily="34" charset="0"/>
+                          <a:ea typeface="Calibri" pitchFamily="34" charset="-122"/>
+                          <a:cs typeface="Calibri" pitchFamily="34" charset="-120"/>
+                        </a:rPr>
+                        <a:t>ギフト端末CIDR</a:t>
+                      </a:r>
+                      <a:endParaRPr lang="en-US" sz="800" dirty="0">
+                        <a:latin typeface="Calibri" charset="0"/>
+                        <a:ea typeface="Calibri" charset="0"/>
+                        <a:cs typeface="Calibri" charset="0"/>
+                      </a:endParaRPr>
+                    </a:p>
+                  </a:txBody>
+                  <a:tcPr marL="91440" marR="91440" marT="45720" marB="45720">
+                    <a:lnL w="6350" cap="flat" cmpd="sng" algn="ctr">
+                      <a:solidFill>
+                        <a:srgbClr val="CCCCCC"/>
+                      </a:solidFill>
+                      <a:prstDash val="solid"/>
+                      <a:round/>
+                      <a:headEnd type="none" w="med" len="med"/>
+                      <a:tailEnd type="none" w="med" len="med"/>
+                    </a:lnL>
+                    <a:lnR w="6350" cap="flat" cmpd="sng" algn="ctr">
+                      <a:solidFill>
+                        <a:srgbClr val="CCCCCC"/>
+                      </a:solidFill>
+                      <a:prstDash val="solid"/>
+                      <a:round/>
+                      <a:headEnd type="none" w="med" len="med"/>
+                      <a:tailEnd type="none" w="med" len="med"/>
+                    </a:lnR>
+                    <a:lnT w="6350" cap="flat" cmpd="sng" algn="ctr">
+                      <a:solidFill>
+                        <a:srgbClr val="CCCCCC"/>
+                      </a:solidFill>
+                      <a:prstDash val="solid"/>
+                      <a:round/>
+                      <a:headEnd type="none" w="med" len="med"/>
+                      <a:tailEnd type="none" w="med" len="med"/>
+                    </a:lnT>
+                    <a:lnB w="6350" cap="flat" cmpd="sng" algn="ctr">
+                      <a:solidFill>
+                        <a:srgbClr val="CCCCCC"/>
+                      </a:solidFill>
+                      <a:prstDash val="solid"/>
+                      <a:round/>
+                      <a:headEnd type="none" w="med" len="med"/>
+                      <a:tailEnd type="none" w="med" len="med"/>
+                    </a:lnB>
+                    <a:solidFill>
+                      <a:srgbClr val="F5F5F5"/>
+                    </a:solidFill>
+                  </a:tcPr>
+                </a:tc>
+                <a:tc>
+                  <a:txBody>
+                    <a:bodyPr/>
+                    <a:lstStyle/>
+                    <a:p>
+                      <a:pPr indent="0" marL="0">
+                        <a:buNone/>
+                      </a:pPr>
+                      <a:r>
+                        <a:rPr lang="en-US" sz="800" dirty="0">
+                          <a:solidFill>
+                            <a:srgbClr val="2266AA"/>
+                          </a:solidFill>
+                          <a:latin typeface="Calibri" pitchFamily="34" charset="0"/>
+                          <a:ea typeface="Calibri" pitchFamily="34" charset="-122"/>
+                          <a:cs typeface="Calibri" pitchFamily="34" charset="-120"/>
+                        </a:rPr>
+                        <a:t>未記載</a:t>
+                      </a:r>
+                      <a:endParaRPr lang="en-US" sz="800" dirty="0">
+                        <a:latin typeface="Calibri" charset="0"/>
+                        <a:ea typeface="Calibri" charset="0"/>
+                        <a:cs typeface="Calibri" charset="0"/>
+                      </a:endParaRPr>
+                    </a:p>
+                  </a:txBody>
+                  <a:tcPr marL="91440" marR="91440" marT="45720" marB="45720">
+                    <a:lnL w="6350" cap="flat" cmpd="sng" algn="ctr">
+                      <a:solidFill>
+                        <a:srgbClr val="CCCCCC"/>
+                      </a:solidFill>
+                      <a:prstDash val="solid"/>
+                      <a:round/>
+                      <a:headEnd type="none" w="med" len="med"/>
+                      <a:tailEnd type="none" w="med" len="med"/>
+                    </a:lnL>
+                    <a:lnR w="6350" cap="flat" cmpd="sng" algn="ctr">
+                      <a:solidFill>
+                        <a:srgbClr val="CCCCCC"/>
+                      </a:solidFill>
+                      <a:prstDash val="solid"/>
+                      <a:round/>
+                      <a:headEnd type="none" w="med" len="med"/>
+                      <a:tailEnd type="none" w="med" len="med"/>
+                    </a:lnR>
+                    <a:lnT w="6350" cap="flat" cmpd="sng" algn="ctr">
+                      <a:solidFill>
+                        <a:srgbClr val="CCCCCC"/>
+                      </a:solidFill>
+                      <a:prstDash val="solid"/>
+                      <a:round/>
+                      <a:headEnd type="none" w="med" len="med"/>
+                      <a:tailEnd type="none" w="med" len="med"/>
+                    </a:lnT>
+                    <a:lnB w="6350" cap="flat" cmpd="sng" algn="ctr">
+                      <a:solidFill>
+                        <a:srgbClr val="CCCCCC"/>
+                      </a:solidFill>
+                      <a:prstDash val="solid"/>
+                      <a:round/>
+                      <a:headEnd type="none" w="med" len="med"/>
+                      <a:tailEnd type="none" w="med" len="med"/>
+                    </a:lnB>
+                    <a:solidFill>
+                      <a:srgbClr val="F5F5F5"/>
+                    </a:solidFill>
+                  </a:tcPr>
+                </a:tc>
+                <a:tc>
+                  <a:txBody>
+                    <a:bodyPr/>
+                    <a:lstStyle/>
+                    <a:p>
+                      <a:pPr indent="0" marL="0">
+                        <a:buNone/>
+                      </a:pPr>
+                      <a:r>
+                        <a:rPr lang="en-US" sz="800" dirty="0">
+                          <a:solidFill>
+                            <a:srgbClr val="2266AA"/>
+                          </a:solidFill>
+                          <a:latin typeface="Calibri" pitchFamily="34" charset="0"/>
+                          <a:ea typeface="Calibri" pitchFamily="34" charset="-122"/>
+                          <a:cs typeface="Calibri" pitchFamily="34" charset="-120"/>
+                        </a:rPr>
+                        <a:t>10.0.0.0/8 (USMH側: 10.156.96.214)</a:t>
+                      </a:r>
+                      <a:endParaRPr lang="en-US" sz="800" dirty="0">
+                        <a:latin typeface="Calibri" charset="0"/>
+                        <a:ea typeface="Calibri" charset="0"/>
+                        <a:cs typeface="Calibri" charset="0"/>
+                      </a:endParaRPr>
+                    </a:p>
+                  </a:txBody>
+                  <a:tcPr marL="91440" marR="91440" marT="45720" marB="45720">
+                    <a:lnL w="6350" cap="flat" cmpd="sng" algn="ctr">
+                      <a:solidFill>
+                        <a:srgbClr val="CCCCCC"/>
+                      </a:solidFill>
+                      <a:prstDash val="solid"/>
+                      <a:round/>
+                      <a:headEnd type="none" w="med" len="med"/>
+                      <a:tailEnd type="none" w="med" len="med"/>
+                    </a:lnL>
+                    <a:lnR w="6350" cap="flat" cmpd="sng" algn="ctr">
+                      <a:solidFill>
+                        <a:srgbClr val="CCCCCC"/>
+                      </a:solidFill>
+                      <a:prstDash val="solid"/>
+                      <a:round/>
+                      <a:headEnd type="none" w="med" len="med"/>
+                      <a:tailEnd type="none" w="med" len="med"/>
+                    </a:lnR>
+                    <a:lnT w="6350" cap="flat" cmpd="sng" algn="ctr">
+                      <a:solidFill>
+                        <a:srgbClr val="CCCCCC"/>
+                      </a:solidFill>
+                      <a:prstDash val="solid"/>
+                      <a:round/>
+                      <a:headEnd type="none" w="med" len="med"/>
+                      <a:tailEnd type="none" w="med" len="med"/>
+                    </a:lnT>
+                    <a:lnB w="6350" cap="flat" cmpd="sng" algn="ctr">
+                      <a:solidFill>
+                        <a:srgbClr val="CCCCCC"/>
+                      </a:solidFill>
+                      <a:prstDash val="solid"/>
+                      <a:round/>
+                      <a:headEnd type="none" w="med" len="med"/>
+                      <a:tailEnd type="none" w="med" len="med"/>
+                    </a:lnB>
+                    <a:solidFill>
+                      <a:srgbClr val="F5F5F5"/>
+                    </a:solidFill>
+                  </a:tcPr>
+                </a:tc>
+                <a:tc>
+                  <a:txBody>
+                    <a:bodyPr/>
+                    <a:lstStyle/>
+                    <a:p>
+                      <a:pPr indent="0" marL="0">
+                        <a:buNone/>
+                      </a:pPr>
+                      <a:r>
+                        <a:rPr lang="en-US" sz="800" dirty="0">
+                          <a:solidFill>
+                            <a:srgbClr val="2266AA"/>
+                          </a:solidFill>
+                          <a:latin typeface="Calibri" pitchFamily="34" charset="0"/>
+                          <a:ea typeface="Calibri" pitchFamily="34" charset="-122"/>
+                          <a:cs typeface="Calibri" pitchFamily="34" charset="-120"/>
+                        </a:rPr>
+                        <a:t>✅新規追加</a:t>
+                      </a:r>
+                      <a:endParaRPr lang="en-US" sz="800" dirty="0">
+                        <a:latin typeface="Calibri" charset="0"/>
+                        <a:ea typeface="Calibri" charset="0"/>
+                        <a:cs typeface="Calibri" charset="0"/>
+                      </a:endParaRPr>
+                    </a:p>
+                  </a:txBody>
+                  <a:tcPr marL="91440" marR="91440" marT="45720" marB="45720">
+                    <a:lnL w="6350" cap="flat" cmpd="sng" algn="ctr">
+                      <a:solidFill>
+                        <a:srgbClr val="CCCCCC"/>
+                      </a:solidFill>
+                      <a:prstDash val="solid"/>
+                      <a:round/>
+                      <a:headEnd type="none" w="med" len="med"/>
+                      <a:tailEnd type="none" w="med" len="med"/>
+                    </a:lnL>
+                    <a:lnR w="6350" cap="flat" cmpd="sng" algn="ctr">
+                      <a:solidFill>
+                        <a:srgbClr val="CCCCCC"/>
+                      </a:solidFill>
+                      <a:prstDash val="solid"/>
+                      <a:round/>
+                      <a:headEnd type="none" w="med" len="med"/>
+                      <a:tailEnd type="none" w="med" len="med"/>
+                    </a:lnR>
+                    <a:lnT w="6350" cap="flat" cmpd="sng" algn="ctr">
+                      <a:solidFill>
+                        <a:srgbClr val="CCCCCC"/>
+                      </a:solidFill>
+                      <a:prstDash val="solid"/>
+                      <a:round/>
+                      <a:headEnd type="none" w="med" len="med"/>
+                      <a:tailEnd type="none" w="med" len="med"/>
+                    </a:lnT>
+                    <a:lnB w="6350" cap="flat" cmpd="sng" algn="ctr">
+                      <a:solidFill>
+                        <a:srgbClr val="CCCCCC"/>
+                      </a:solidFill>
+                      <a:prstDash val="solid"/>
+                      <a:round/>
+                      <a:headEnd type="none" w="med" len="med"/>
+                      <a:tailEnd type="none" w="med" len="med"/>
+                    </a:lnB>
+                    <a:solidFill>
+                      <a:srgbClr val="F5F5F5"/>
                     </a:solidFill>
                   </a:tcPr>
                 </a:tc>
@@ -14439,7 +15702,7 @@
                       <a:tailEnd type="none" w="med" len="med"/>
                     </a:lnB>
                     <a:solidFill>
-                      <a:srgbClr val="F5F5F5"/>
+                      <a:srgbClr val="FFFFFF"/>
                     </a:solidFill>
                   </a:tcPr>
                 </a:tc>
@@ -14507,6 +15770,212 @@
                       <a:tailEnd type="none" w="med" len="med"/>
                     </a:lnB>
                     <a:solidFill>
+                      <a:srgbClr val="FFFFFF"/>
+                    </a:solidFill>
+                  </a:tcPr>
+                </a:tc>
+                <a:tc>
+                  <a:txBody>
+                    <a:bodyPr/>
+                    <a:lstStyle/>
+                    <a:p>
+                      <a:pPr indent="0" marL="0">
+                        <a:buNone/>
+                      </a:pPr>
+                      <a:r>
+                        <a:rPr lang="en-US" sz="800" dirty="0">
+                          <a:solidFill>
+                            <a:srgbClr val="228844"/>
+                          </a:solidFill>
+                          <a:latin typeface="Calibri" pitchFamily="34" charset="0"/>
+                          <a:ea typeface="Calibri" pitchFamily="34" charset="-122"/>
+                          <a:cs typeface="Calibri" pitchFamily="34" charset="-120"/>
+                        </a:rPr>
+                        <a:t>10.238.0.0/16</a:t>
+                      </a:r>
+                      <a:endParaRPr lang="en-US" sz="800" dirty="0">
+                        <a:latin typeface="Calibri" charset="0"/>
+                        <a:ea typeface="Calibri" charset="0"/>
+                        <a:cs typeface="Calibri" charset="0"/>
+                      </a:endParaRPr>
+                    </a:p>
+                  </a:txBody>
+                  <a:tcPr marL="91440" marR="91440" marT="45720" marB="45720">
+                    <a:lnL w="6350" cap="flat" cmpd="sng" algn="ctr">
+                      <a:solidFill>
+                        <a:srgbClr val="CCCCCC"/>
+                      </a:solidFill>
+                      <a:prstDash val="solid"/>
+                      <a:round/>
+                      <a:headEnd type="none" w="med" len="med"/>
+                      <a:tailEnd type="none" w="med" len="med"/>
+                    </a:lnL>
+                    <a:lnR w="6350" cap="flat" cmpd="sng" algn="ctr">
+                      <a:solidFill>
+                        <a:srgbClr val="CCCCCC"/>
+                      </a:solidFill>
+                      <a:prstDash val="solid"/>
+                      <a:round/>
+                      <a:headEnd type="none" w="med" len="med"/>
+                      <a:tailEnd type="none" w="med" len="med"/>
+                    </a:lnR>
+                    <a:lnT w="6350" cap="flat" cmpd="sng" algn="ctr">
+                      <a:solidFill>
+                        <a:srgbClr val="CCCCCC"/>
+                      </a:solidFill>
+                      <a:prstDash val="solid"/>
+                      <a:round/>
+                      <a:headEnd type="none" w="med" len="med"/>
+                      <a:tailEnd type="none" w="med" len="med"/>
+                    </a:lnT>
+                    <a:lnB w="6350" cap="flat" cmpd="sng" algn="ctr">
+                      <a:solidFill>
+                        <a:srgbClr val="CCCCCC"/>
+                      </a:solidFill>
+                      <a:prstDash val="solid"/>
+                      <a:round/>
+                      <a:headEnd type="none" w="med" len="med"/>
+                      <a:tailEnd type="none" w="med" len="med"/>
+                    </a:lnB>
+                    <a:solidFill>
+                      <a:srgbClr val="FFFFFF"/>
+                    </a:solidFill>
+                  </a:tcPr>
+                </a:tc>
+                <a:tc>
+                  <a:txBody>
+                    <a:bodyPr/>
+                    <a:lstStyle/>
+                    <a:p>
+                      <a:pPr indent="0" marL="0">
+                        <a:buNone/>
+                      </a:pPr>
+                      <a:r>
+                        <a:rPr lang="en-US" sz="800" dirty="0">
+                          <a:solidFill>
+                            <a:srgbClr val="228844"/>
+                          </a:solidFill>
+                          <a:latin typeface="Calibri" pitchFamily="34" charset="0"/>
+                          <a:ea typeface="Calibri" pitchFamily="34" charset="-122"/>
+                          <a:cs typeface="Calibri" pitchFamily="34" charset="-120"/>
+                        </a:rPr>
+                        <a:t>✅一致</a:t>
+                      </a:r>
+                      <a:endParaRPr lang="en-US" sz="800" dirty="0">
+                        <a:latin typeface="Calibri" charset="0"/>
+                        <a:ea typeface="Calibri" charset="0"/>
+                        <a:cs typeface="Calibri" charset="0"/>
+                      </a:endParaRPr>
+                    </a:p>
+                  </a:txBody>
+                  <a:tcPr marL="91440" marR="91440" marT="45720" marB="45720">
+                    <a:lnL w="6350" cap="flat" cmpd="sng" algn="ctr">
+                      <a:solidFill>
+                        <a:srgbClr val="CCCCCC"/>
+                      </a:solidFill>
+                      <a:prstDash val="solid"/>
+                      <a:round/>
+                      <a:headEnd type="none" w="med" len="med"/>
+                      <a:tailEnd type="none" w="med" len="med"/>
+                    </a:lnL>
+                    <a:lnR w="6350" cap="flat" cmpd="sng" algn="ctr">
+                      <a:solidFill>
+                        <a:srgbClr val="CCCCCC"/>
+                      </a:solidFill>
+                      <a:prstDash val="solid"/>
+                      <a:round/>
+                      <a:headEnd type="none" w="med" len="med"/>
+                      <a:tailEnd type="none" w="med" len="med"/>
+                    </a:lnR>
+                    <a:lnT w="6350" cap="flat" cmpd="sng" algn="ctr">
+                      <a:solidFill>
+                        <a:srgbClr val="CCCCCC"/>
+                      </a:solidFill>
+                      <a:prstDash val="solid"/>
+                      <a:round/>
+                      <a:headEnd type="none" w="med" len="med"/>
+                      <a:tailEnd type="none" w="med" len="med"/>
+                    </a:lnT>
+                    <a:lnB w="6350" cap="flat" cmpd="sng" algn="ctr">
+                      <a:solidFill>
+                        <a:srgbClr val="CCCCCC"/>
+                      </a:solidFill>
+                      <a:prstDash val="solid"/>
+                      <a:round/>
+                      <a:headEnd type="none" w="med" len="med"/>
+                      <a:tailEnd type="none" w="med" len="med"/>
+                    </a:lnB>
+                    <a:solidFill>
+                      <a:srgbClr val="FFFFFF"/>
+                    </a:solidFill>
+                  </a:tcPr>
+                </a:tc>
+              </a:tr>
+              <a:tr h="256032">
+                <a:tc>
+                  <a:txBody>
+                    <a:bodyPr/>
+                    <a:lstStyle/>
+                    <a:p>
+                      <a:pPr indent="0" marL="0">
+                        <a:buNone/>
+                      </a:pPr>
+                      <a:r>
+                        <a:rPr lang="en-US" sz="800" dirty="0">
+                          <a:solidFill>
+                            <a:srgbClr val="228844"/>
+                          </a:solidFill>
+                          <a:latin typeface="Calibri" pitchFamily="34" charset="0"/>
+                          <a:ea typeface="Calibri" pitchFamily="34" charset="-122"/>
+                          <a:cs typeface="Calibri" pitchFamily="34" charset="-120"/>
+                        </a:rPr>
+                        <a:t>Transfer Family</a:t>
+                      </a:r>
+                      <a:endParaRPr lang="en-US" sz="800" dirty="0">
+                        <a:latin typeface="Calibri" charset="0"/>
+                        <a:ea typeface="Calibri" charset="0"/>
+                        <a:cs typeface="Calibri" charset="0"/>
+                      </a:endParaRPr>
+                    </a:p>
+                  </a:txBody>
+                  <a:tcPr marL="91440" marR="91440" marT="45720" marB="45720">
+                    <a:lnL w="6350" cap="flat" cmpd="sng" algn="ctr">
+                      <a:solidFill>
+                        <a:srgbClr val="CCCCCC"/>
+                      </a:solidFill>
+                      <a:prstDash val="solid"/>
+                      <a:round/>
+                      <a:headEnd type="none" w="med" len="med"/>
+                      <a:tailEnd type="none" w="med" len="med"/>
+                    </a:lnL>
+                    <a:lnR w="6350" cap="flat" cmpd="sng" algn="ctr">
+                      <a:solidFill>
+                        <a:srgbClr val="CCCCCC"/>
+                      </a:solidFill>
+                      <a:prstDash val="solid"/>
+                      <a:round/>
+                      <a:headEnd type="none" w="med" len="med"/>
+                      <a:tailEnd type="none" w="med" len="med"/>
+                    </a:lnR>
+                    <a:lnT w="6350" cap="flat" cmpd="sng" algn="ctr">
+                      <a:solidFill>
+                        <a:srgbClr val="CCCCCC"/>
+                      </a:solidFill>
+                      <a:prstDash val="solid"/>
+                      <a:round/>
+                      <a:headEnd type="none" w="med" len="med"/>
+                      <a:tailEnd type="none" w="med" len="med"/>
+                    </a:lnT>
+                    <a:lnB w="6350" cap="flat" cmpd="sng" algn="ctr">
+                      <a:solidFill>
+                        <a:srgbClr val="CCCCCC"/>
+                      </a:solidFill>
+                      <a:prstDash val="solid"/>
+                      <a:round/>
+                      <a:headEnd type="none" w="med" len="med"/>
+                      <a:tailEnd type="none" w="med" len="med"/>
+                    </a:lnB>
+                    <a:solidFill>
                       <a:srgbClr val="F5F5F5"/>
                     </a:solidFill>
                   </a:tcPr>
@@ -14528,7 +15997,75 @@
                           <a:ea typeface="Calibri" pitchFamily="34" charset="-122"/>
                           <a:cs typeface="Calibri" pitchFamily="34" charset="-120"/>
                         </a:rPr>
-                        <a:t>10.238.0.0/16</a:t>
+                        <a:t>あり</a:t>
+                      </a:r>
+                      <a:endParaRPr lang="en-US" sz="800" dirty="0">
+                        <a:latin typeface="Calibri" charset="0"/>
+                        <a:ea typeface="Calibri" charset="0"/>
+                        <a:cs typeface="Calibri" charset="0"/>
+                      </a:endParaRPr>
+                    </a:p>
+                  </a:txBody>
+                  <a:tcPr marL="91440" marR="91440" marT="45720" marB="45720">
+                    <a:lnL w="6350" cap="flat" cmpd="sng" algn="ctr">
+                      <a:solidFill>
+                        <a:srgbClr val="CCCCCC"/>
+                      </a:solidFill>
+                      <a:prstDash val="solid"/>
+                      <a:round/>
+                      <a:headEnd type="none" w="med" len="med"/>
+                      <a:tailEnd type="none" w="med" len="med"/>
+                    </a:lnL>
+                    <a:lnR w="6350" cap="flat" cmpd="sng" algn="ctr">
+                      <a:solidFill>
+                        <a:srgbClr val="CCCCCC"/>
+                      </a:solidFill>
+                      <a:prstDash val="solid"/>
+                      <a:round/>
+                      <a:headEnd type="none" w="med" len="med"/>
+                      <a:tailEnd type="none" w="med" len="med"/>
+                    </a:lnR>
+                    <a:lnT w="6350" cap="flat" cmpd="sng" algn="ctr">
+                      <a:solidFill>
+                        <a:srgbClr val="CCCCCC"/>
+                      </a:solidFill>
+                      <a:prstDash val="solid"/>
+                      <a:round/>
+                      <a:headEnd type="none" w="med" len="med"/>
+                      <a:tailEnd type="none" w="med" len="med"/>
+                    </a:lnT>
+                    <a:lnB w="6350" cap="flat" cmpd="sng" algn="ctr">
+                      <a:solidFill>
+                        <a:srgbClr val="CCCCCC"/>
+                      </a:solidFill>
+                      <a:prstDash val="solid"/>
+                      <a:round/>
+                      <a:headEnd type="none" w="med" len="med"/>
+                      <a:tailEnd type="none" w="med" len="med"/>
+                    </a:lnB>
+                    <a:solidFill>
+                      <a:srgbClr val="F5F5F5"/>
+                    </a:solidFill>
+                  </a:tcPr>
+                </a:tc>
+                <a:tc>
+                  <a:txBody>
+                    <a:bodyPr/>
+                    <a:lstStyle/>
+                    <a:p>
+                      <a:pPr indent="0" marL="0">
+                        <a:buNone/>
+                      </a:pPr>
+                      <a:r>
+                        <a:rPr lang="en-US" sz="800" dirty="0">
+                          <a:solidFill>
+                            <a:srgbClr val="228844"/>
+                          </a:solidFill>
+                          <a:latin typeface="Calibri" pitchFamily="34" charset="0"/>
+                          <a:ea typeface="Calibri" pitchFamily="34" charset="-122"/>
+                          <a:cs typeface="Calibri" pitchFamily="34" charset="-120"/>
+                        </a:rPr>
+                        <a:t>3サーバー(VPC/S3/ONLINE)</a:t>
                       </a:r>
                       <a:endParaRPr lang="en-US" sz="800" dirty="0">
                         <a:latin typeface="Calibri" charset="0"/>
@@ -14666,7 +16203,7 @@
                           <a:ea typeface="Calibri" pitchFamily="34" charset="-122"/>
                           <a:cs typeface="Calibri" pitchFamily="34" charset="-120"/>
                         </a:rPr>
-                        <a:t>Transfer Family</a:t>
+                        <a:t>CloudWatch</a:t>
                       </a:r>
                       <a:endParaRPr lang="en-US" sz="800" dirty="0">
                         <a:latin typeface="Calibri" charset="0"/>
@@ -14734,7 +16271,7 @@
                           <a:ea typeface="Calibri" pitchFamily="34" charset="-122"/>
                           <a:cs typeface="Calibri" pitchFamily="34" charset="-120"/>
                         </a:rPr>
-                        <a:t>あり</a:t>
+                        <a:t>設定済み</a:t>
                       </a:r>
                       <a:endParaRPr lang="en-US" sz="800" dirty="0">
                         <a:latin typeface="Calibri" charset="0"/>
@@ -14802,7 +16339,7 @@
                           <a:ea typeface="Calibri" pitchFamily="34" charset="-122"/>
                           <a:cs typeface="Calibri" pitchFamily="34" charset="-120"/>
                         </a:rPr>
-                        <a:t>3サーバー(VPC/S3/ONLINE)</a:t>
+                        <a:t>19アラーム / 全OK</a:t>
                       </a:r>
                       <a:endParaRPr lang="en-US" sz="800" dirty="0">
                         <a:latin typeface="Calibri" charset="0"/>
@@ -14918,280 +16455,6 @@
                     </a:lnB>
                     <a:solidFill>
                       <a:srgbClr val="FFFFFF"/>
-                    </a:solidFill>
-                  </a:tcPr>
-                </a:tc>
-              </a:tr>
-              <a:tr h="256032">
-                <a:tc>
-                  <a:txBody>
-                    <a:bodyPr/>
-                    <a:lstStyle/>
-                    <a:p>
-                      <a:pPr indent="0" marL="0">
-                        <a:buNone/>
-                      </a:pPr>
-                      <a:r>
-                        <a:rPr lang="en-US" sz="800" dirty="0">
-                          <a:solidFill>
-                            <a:srgbClr val="228844"/>
-                          </a:solidFill>
-                          <a:latin typeface="Calibri" pitchFamily="34" charset="0"/>
-                          <a:ea typeface="Calibri" pitchFamily="34" charset="-122"/>
-                          <a:cs typeface="Calibri" pitchFamily="34" charset="-120"/>
-                        </a:rPr>
-                        <a:t>CloudWatch</a:t>
-                      </a:r>
-                      <a:endParaRPr lang="en-US" sz="800" dirty="0">
-                        <a:latin typeface="Calibri" charset="0"/>
-                        <a:ea typeface="Calibri" charset="0"/>
-                        <a:cs typeface="Calibri" charset="0"/>
-                      </a:endParaRPr>
-                    </a:p>
-                  </a:txBody>
-                  <a:tcPr marL="91440" marR="91440" marT="45720" marB="45720">
-                    <a:lnL w="6350" cap="flat" cmpd="sng" algn="ctr">
-                      <a:solidFill>
-                        <a:srgbClr val="CCCCCC"/>
-                      </a:solidFill>
-                      <a:prstDash val="solid"/>
-                      <a:round/>
-                      <a:headEnd type="none" w="med" len="med"/>
-                      <a:tailEnd type="none" w="med" len="med"/>
-                    </a:lnL>
-                    <a:lnR w="6350" cap="flat" cmpd="sng" algn="ctr">
-                      <a:solidFill>
-                        <a:srgbClr val="CCCCCC"/>
-                      </a:solidFill>
-                      <a:prstDash val="solid"/>
-                      <a:round/>
-                      <a:headEnd type="none" w="med" len="med"/>
-                      <a:tailEnd type="none" w="med" len="med"/>
-                    </a:lnR>
-                    <a:lnT w="6350" cap="flat" cmpd="sng" algn="ctr">
-                      <a:solidFill>
-                        <a:srgbClr val="CCCCCC"/>
-                      </a:solidFill>
-                      <a:prstDash val="solid"/>
-                      <a:round/>
-                      <a:headEnd type="none" w="med" len="med"/>
-                      <a:tailEnd type="none" w="med" len="med"/>
-                    </a:lnT>
-                    <a:lnB w="6350" cap="flat" cmpd="sng" algn="ctr">
-                      <a:solidFill>
-                        <a:srgbClr val="CCCCCC"/>
-                      </a:solidFill>
-                      <a:prstDash val="solid"/>
-                      <a:round/>
-                      <a:headEnd type="none" w="med" len="med"/>
-                      <a:tailEnd type="none" w="med" len="med"/>
-                    </a:lnB>
-                    <a:solidFill>
-                      <a:srgbClr val="F5F5F5"/>
-                    </a:solidFill>
-                  </a:tcPr>
-                </a:tc>
-                <a:tc>
-                  <a:txBody>
-                    <a:bodyPr/>
-                    <a:lstStyle/>
-                    <a:p>
-                      <a:pPr indent="0" marL="0">
-                        <a:buNone/>
-                      </a:pPr>
-                      <a:r>
-                        <a:rPr lang="en-US" sz="800" dirty="0">
-                          <a:solidFill>
-                            <a:srgbClr val="228844"/>
-                          </a:solidFill>
-                          <a:latin typeface="Calibri" pitchFamily="34" charset="0"/>
-                          <a:ea typeface="Calibri" pitchFamily="34" charset="-122"/>
-                          <a:cs typeface="Calibri" pitchFamily="34" charset="-120"/>
-                        </a:rPr>
-                        <a:t>設定済み</a:t>
-                      </a:r>
-                      <a:endParaRPr lang="en-US" sz="800" dirty="0">
-                        <a:latin typeface="Calibri" charset="0"/>
-                        <a:ea typeface="Calibri" charset="0"/>
-                        <a:cs typeface="Calibri" charset="0"/>
-                      </a:endParaRPr>
-                    </a:p>
-                  </a:txBody>
-                  <a:tcPr marL="91440" marR="91440" marT="45720" marB="45720">
-                    <a:lnL w="6350" cap="flat" cmpd="sng" algn="ctr">
-                      <a:solidFill>
-                        <a:srgbClr val="CCCCCC"/>
-                      </a:solidFill>
-                      <a:prstDash val="solid"/>
-                      <a:round/>
-                      <a:headEnd type="none" w="med" len="med"/>
-                      <a:tailEnd type="none" w="med" len="med"/>
-                    </a:lnL>
-                    <a:lnR w="6350" cap="flat" cmpd="sng" algn="ctr">
-                      <a:solidFill>
-                        <a:srgbClr val="CCCCCC"/>
-                      </a:solidFill>
-                      <a:prstDash val="solid"/>
-                      <a:round/>
-                      <a:headEnd type="none" w="med" len="med"/>
-                      <a:tailEnd type="none" w="med" len="med"/>
-                    </a:lnR>
-                    <a:lnT w="6350" cap="flat" cmpd="sng" algn="ctr">
-                      <a:solidFill>
-                        <a:srgbClr val="CCCCCC"/>
-                      </a:solidFill>
-                      <a:prstDash val="solid"/>
-                      <a:round/>
-                      <a:headEnd type="none" w="med" len="med"/>
-                      <a:tailEnd type="none" w="med" len="med"/>
-                    </a:lnT>
-                    <a:lnB w="6350" cap="flat" cmpd="sng" algn="ctr">
-                      <a:solidFill>
-                        <a:srgbClr val="CCCCCC"/>
-                      </a:solidFill>
-                      <a:prstDash val="solid"/>
-                      <a:round/>
-                      <a:headEnd type="none" w="med" len="med"/>
-                      <a:tailEnd type="none" w="med" len="med"/>
-                    </a:lnB>
-                    <a:solidFill>
-                      <a:srgbClr val="F5F5F5"/>
-                    </a:solidFill>
-                  </a:tcPr>
-                </a:tc>
-                <a:tc>
-                  <a:txBody>
-                    <a:bodyPr/>
-                    <a:lstStyle/>
-                    <a:p>
-                      <a:pPr indent="0" marL="0">
-                        <a:buNone/>
-                      </a:pPr>
-                      <a:r>
-                        <a:rPr lang="en-US" sz="800" dirty="0">
-                          <a:solidFill>
-                            <a:srgbClr val="228844"/>
-                          </a:solidFill>
-                          <a:latin typeface="Calibri" pitchFamily="34" charset="0"/>
-                          <a:ea typeface="Calibri" pitchFamily="34" charset="-122"/>
-                          <a:cs typeface="Calibri" pitchFamily="34" charset="-120"/>
-                        </a:rPr>
-                        <a:t>19アラーム / 全OK</a:t>
-                      </a:r>
-                      <a:endParaRPr lang="en-US" sz="800" dirty="0">
-                        <a:latin typeface="Calibri" charset="0"/>
-                        <a:ea typeface="Calibri" charset="0"/>
-                        <a:cs typeface="Calibri" charset="0"/>
-                      </a:endParaRPr>
-                    </a:p>
-                  </a:txBody>
-                  <a:tcPr marL="91440" marR="91440" marT="45720" marB="45720">
-                    <a:lnL w="6350" cap="flat" cmpd="sng" algn="ctr">
-                      <a:solidFill>
-                        <a:srgbClr val="CCCCCC"/>
-                      </a:solidFill>
-                      <a:prstDash val="solid"/>
-                      <a:round/>
-                      <a:headEnd type="none" w="med" len="med"/>
-                      <a:tailEnd type="none" w="med" len="med"/>
-                    </a:lnL>
-                    <a:lnR w="6350" cap="flat" cmpd="sng" algn="ctr">
-                      <a:solidFill>
-                        <a:srgbClr val="CCCCCC"/>
-                      </a:solidFill>
-                      <a:prstDash val="solid"/>
-                      <a:round/>
-                      <a:headEnd type="none" w="med" len="med"/>
-                      <a:tailEnd type="none" w="med" len="med"/>
-                    </a:lnR>
-                    <a:lnT w="6350" cap="flat" cmpd="sng" algn="ctr">
-                      <a:solidFill>
-                        <a:srgbClr val="CCCCCC"/>
-                      </a:solidFill>
-                      <a:prstDash val="solid"/>
-                      <a:round/>
-                      <a:headEnd type="none" w="med" len="med"/>
-                      <a:tailEnd type="none" w="med" len="med"/>
-                    </a:lnT>
-                    <a:lnB w="6350" cap="flat" cmpd="sng" algn="ctr">
-                      <a:solidFill>
-                        <a:srgbClr val="CCCCCC"/>
-                      </a:solidFill>
-                      <a:prstDash val="solid"/>
-                      <a:round/>
-                      <a:headEnd type="none" w="med" len="med"/>
-                      <a:tailEnd type="none" w="med" len="med"/>
-                    </a:lnB>
-                    <a:solidFill>
-                      <a:srgbClr val="F5F5F5"/>
-                    </a:solidFill>
-                  </a:tcPr>
-                </a:tc>
-                <a:tc>
-                  <a:txBody>
-                    <a:bodyPr/>
-                    <a:lstStyle/>
-                    <a:p>
-                      <a:pPr indent="0" marL="0">
-                        <a:buNone/>
-                      </a:pPr>
-                      <a:r>
-                        <a:rPr lang="en-US" sz="800" dirty="0">
-                          <a:solidFill>
-                            <a:srgbClr val="228844"/>
-                          </a:solidFill>
-                          <a:latin typeface="Calibri" pitchFamily="34" charset="0"/>
-                          <a:ea typeface="Calibri" pitchFamily="34" charset="-122"/>
-                          <a:cs typeface="Calibri" pitchFamily="34" charset="-120"/>
-                        </a:rPr>
-                        <a:t>✅一致</a:t>
-                      </a:r>
-                      <a:endParaRPr lang="en-US" sz="800" dirty="0">
-                        <a:latin typeface="Calibri" charset="0"/>
-                        <a:ea typeface="Calibri" charset="0"/>
-                        <a:cs typeface="Calibri" charset="0"/>
-                      </a:endParaRPr>
-                    </a:p>
-                  </a:txBody>
-                  <a:tcPr marL="91440" marR="91440" marT="45720" marB="45720">
-                    <a:lnL w="6350" cap="flat" cmpd="sng" algn="ctr">
-                      <a:solidFill>
-                        <a:srgbClr val="CCCCCC"/>
-                      </a:solidFill>
-                      <a:prstDash val="solid"/>
-                      <a:round/>
-                      <a:headEnd type="none" w="med" len="med"/>
-                      <a:tailEnd type="none" w="med" len="med"/>
-                    </a:lnL>
-                    <a:lnR w="6350" cap="flat" cmpd="sng" algn="ctr">
-                      <a:solidFill>
-                        <a:srgbClr val="CCCCCC"/>
-                      </a:solidFill>
-                      <a:prstDash val="solid"/>
-                      <a:round/>
-                      <a:headEnd type="none" w="med" len="med"/>
-                      <a:tailEnd type="none" w="med" len="med"/>
-                    </a:lnR>
-                    <a:lnT w="6350" cap="flat" cmpd="sng" algn="ctr">
-                      <a:solidFill>
-                        <a:srgbClr val="CCCCCC"/>
-                      </a:solidFill>
-                      <a:prstDash val="solid"/>
-                      <a:round/>
-                      <a:headEnd type="none" w="med" len="med"/>
-                      <a:tailEnd type="none" w="med" len="med"/>
-                    </a:lnT>
-                    <a:lnB w="6350" cap="flat" cmpd="sng" algn="ctr">
-                      <a:solidFill>
-                        <a:srgbClr val="CCCCCC"/>
-                      </a:solidFill>
-                      <a:prstDash val="solid"/>
-                      <a:round/>
-                      <a:headEnd type="none" w="med" len="med"/>
-                      <a:tailEnd type="none" w="med" len="med"/>
-                    </a:lnB>
-                    <a:solidFill>
-                      <a:srgbClr val="F5F5F5"/>
                     </a:solidFill>
                   </a:tcPr>
                 </a:tc>
@@ -16787,7 +18050,7 @@
                 <a:ea typeface="Calibri" pitchFamily="34" charset="-122"/>
                 <a:cs typeface="Calibri" pitchFamily="34" charset="-120"/>
               </a:rPr>
-              <a:t>CloudWatch / EventBridgeスケジュール / Secrets Manager</a:t>
+              <a:t>CloudWatch / EventBridgeスケジュール</a:t>
             </a:r>
             <a:endParaRPr lang="en-US" sz="800" dirty="0"/>
           </a:p>
@@ -16910,7 +18173,7 @@
                 <a:ea typeface="Calibri" pitchFamily="34" charset="-122"/>
                 <a:cs typeface="Calibri" pitchFamily="34" charset="-120"/>
               </a:rPr>
-              <a:t>外部連携</a:t>
+              <a:t>外部連携（USMH接続詳細）</a:t>
             </a:r>
             <a:endParaRPr lang="en-US" sz="1100" dirty="0"/>
           </a:p>
@@ -16949,7 +18212,7 @@
                 <a:ea typeface="Calibri" pitchFamily="34" charset="-122"/>
                 <a:cs typeface="Calibri" pitchFamily="34" charset="-120"/>
               </a:rPr>
-              <a:t>USMH網(VPN) / Transfer Family(SFTP) / Route53</a:t>
+              <a:t>Direct Connect経路・NAT変換仕様・通信フロー</a:t>
             </a:r>
             <a:endParaRPr lang="en-US" sz="800" dirty="0"/>
           </a:p>
@@ -17644,7 +18907,7 @@
                 <a:ea typeface="Calibri" pitchFamily="34" charset="-122"/>
                 <a:cs typeface="Calibri" pitchFamily="34" charset="-120"/>
               </a:rPr>
-              <a:t>カスミ様向け POSシステム（POS-SERVER）は、AWS 東京リージョン（ap-northeast-1）上に構築されたシステムです。本番・ステージングの2環境を運用し、Java/Tomcat ベースのアプリケーションサーバーと Aurora MySQL 8.0 データベースを中核に、電子棚札（ESL）連携・ギフトカード処理・Scan&amp;Go 機能を提供しています。</a:t>
+              <a:t>カスミ様向け POSシステム（POS-SERVER）は、AWS 東京リージョン（ap-northeast-1）上に構築されたシステムです。Java/Tomcat ベースのアプリケーション、Aurora MySQL 8.0 データベースを中核に、電子棚札（ESL）連携・ギフトカード処理・Scan&amp;Go 機能を提供しています。</a:t>
             </a:r>
             <a:endParaRPr lang="en-US" sz="1000" dirty="0"/>
           </a:p>
@@ -20274,7 +21537,24 @@
                 <a:ea typeface="Calibri" pitchFamily="34" charset="-122"/>
                 <a:cs typeface="Calibri" pitchFamily="34" charset="-120"/>
               </a:rPr>
-              <a:t>(USMH網接続)</a:t>
+              <a:t>→Direct Connect</a:t>
+            </a:r>
+            <a:endParaRPr lang="en-US" sz="800" dirty="0"/>
+          </a:p>
+          <a:p>
+            <a:pPr algn="ctr" indent="0" marL="0">
+              <a:buNone/>
+            </a:pPr>
+            <a:r>
+              <a:rPr lang="en-US" sz="800" dirty="0">
+                <a:solidFill>
+                  <a:srgbClr val="333333"/>
+                </a:solidFill>
+                <a:latin typeface="Calibri" pitchFamily="34" charset="0"/>
+                <a:ea typeface="Calibri" pitchFamily="34" charset="-122"/>
+                <a:cs typeface="Calibri" pitchFamily="34" charset="-120"/>
+              </a:rPr>
+              <a:t>(USMH網)</a:t>
             </a:r>
             <a:endParaRPr lang="en-US" sz="800" dirty="0"/>
           </a:p>
@@ -20695,23 +21975,6 @@
             </a:r>
             <a:endParaRPr lang="en-US" sz="800" dirty="0"/>
           </a:p>
-          <a:p>
-            <a:pPr algn="ctr" indent="0" marL="0">
-              <a:buNone/>
-            </a:pPr>
-            <a:r>
-              <a:rPr lang="en-US" sz="800" dirty="0">
-                <a:solidFill>
-                  <a:srgbClr val="333333"/>
-                </a:solidFill>
-                <a:latin typeface="Calibri" pitchFamily="34" charset="0"/>
-                <a:ea typeface="Calibri" pitchFamily="34" charset="-122"/>
-                <a:cs typeface="Calibri" pitchFamily="34" charset="-120"/>
-              </a:rPr>
-              <a:t>(ksm-posprd系)</a:t>
-            </a:r>
-            <a:endParaRPr lang="en-US" sz="800" dirty="0"/>
-          </a:p>
         </p:txBody>
       </p:sp>
       <p:sp>
@@ -20790,23 +22053,6 @@
                 <a:cs typeface="Calibri" pitchFamily="34" charset="-120"/>
               </a:rPr>
               <a:t>Java17</a:t>
-            </a:r>
-            <a:endParaRPr lang="en-US" sz="800" dirty="0"/>
-          </a:p>
-          <a:p>
-            <a:pPr algn="ctr" indent="0" marL="0">
-              <a:buNone/>
-            </a:pPr>
-            <a:r>
-              <a:rPr lang="en-US" sz="800" dirty="0">
-                <a:solidFill>
-                  <a:srgbClr val="333333"/>
-                </a:solidFill>
-                <a:latin typeface="Calibri" pitchFamily="34" charset="0"/>
-                <a:ea typeface="Calibri" pitchFamily="34" charset="-122"/>
-                <a:cs typeface="Calibri" pitchFamily="34" charset="-120"/>
-              </a:rPr>
-              <a:t>残高照会・売上</a:t>
             </a:r>
             <a:endParaRPr lang="en-US" sz="800" dirty="0"/>
           </a:p>
@@ -20934,7 +22180,7 @@
                 <a:ea typeface="Calibri" pitchFamily="34" charset="-122"/>
                 <a:cs typeface="Calibri" pitchFamily="34" charset="-120"/>
               </a:rPr>
-              <a:t>SQS（ksm-posprd-lmd-trigger-sqs-export/import-sg）</a:t>
+              <a:t>SQS（trigger-sqs-export/import-sg）</a:t>
             </a:r>
             <a:endParaRPr lang="en-US" sz="800" dirty="0"/>
           </a:p>
@@ -21836,23 +23082,6 @@
             </a:r>
             <a:endParaRPr lang="en-US" sz="800" dirty="0"/>
           </a:p>
-          <a:p>
-            <a:pPr algn="ctr" indent="0" marL="0">
-              <a:buNone/>
-            </a:pPr>
-            <a:r>
-              <a:rPr lang="en-US" sz="800" dirty="0">
-                <a:solidFill>
-                  <a:srgbClr val="333333"/>
-                </a:solidFill>
-                <a:latin typeface="Calibri" pitchFamily="34" charset="0"/>
-                <a:ea typeface="Calibri" pitchFamily="34" charset="-122"/>
-                <a:cs typeface="Calibri" pitchFamily="34" charset="-120"/>
-              </a:rPr>
-              <a:t>監査ログ</a:t>
-            </a:r>
-            <a:endParaRPr lang="en-US" sz="800" dirty="0"/>
-          </a:p>
         </p:txBody>
       </p:sp>
       <p:sp>
@@ -21995,23 +23224,6 @@
                 <a:cs typeface="Calibri" pitchFamily="34" charset="-120"/>
               </a:rPr>
               <a:t>KMS</a:t>
-            </a:r>
-            <a:endParaRPr lang="en-US" sz="800" dirty="0"/>
-          </a:p>
-          <a:p>
-            <a:pPr algn="ctr" indent="0" marL="0">
-              <a:buNone/>
-            </a:pPr>
-            <a:r>
-              <a:rPr lang="en-US" sz="800" dirty="0">
-                <a:solidFill>
-                  <a:srgbClr val="333333"/>
-                </a:solidFill>
-                <a:latin typeface="Calibri" pitchFamily="34" charset="0"/>
-                <a:ea typeface="Calibri" pitchFamily="34" charset="-122"/>
-                <a:cs typeface="Calibri" pitchFamily="34" charset="-120"/>
-              </a:rPr>
-              <a:t>暗号化</a:t>
             </a:r>
             <a:endParaRPr lang="en-US" sz="800" dirty="0"/>
           </a:p>
@@ -22628,7 +23840,7 @@
                 <a:ea typeface="Calibri" pitchFamily="34" charset="-122"/>
                 <a:cs typeface="Calibri" pitchFamily="34" charset="-120"/>
               </a:rPr>
-              <a:t>IPSec VPN</a:t>
+              <a:t>Direct Connect経由</a:t>
             </a:r>
             <a:endParaRPr lang="en-US" sz="800" dirty="0"/>
           </a:p>
@@ -22667,7 +23879,7 @@
                 <a:ea typeface="Calibri" pitchFamily="34" charset="-122"/>
                 <a:cs typeface="Calibri" pitchFamily="34" charset="-120"/>
               </a:rPr>
-              <a:t>※ ALB/WAFは未設置。EC2はBastionとGiftcardの2台。DBはRDS Proxyなし。VPCはシングルAZ構成(1a+1c)。</a:t>
+              <a:t>※ ALB/WAFは未設置。EC2はBastionとGiftcardの2台。DBはRDS Proxyなし。USMH接続はDirect Connect(Gateway VPC経由)→VPN GW。</a:t>
             </a:r>
             <a:endParaRPr lang="en-US" sz="700" dirty="0"/>
           </a:p>
@@ -22908,7 +24120,7 @@
                 <a:ea typeface="Calibri" pitchFamily="34" charset="-122"/>
                 <a:cs typeface="Calibri" pitchFamily="34" charset="-120"/>
               </a:rPr>
-              <a:t>VPC / サブネット / セキュリティグループ / USMH接続</a:t>
+              <a:t>VPC / サブネット / セキュリティグループ / USMH接続（IPSec VPN + Direct Connect）</a:t>
             </a:r>
             <a:endParaRPr lang="en-US" sz="1300" dirty="0"/>
           </a:p>
@@ -23260,7 +24472,7 @@
                           <a:ea typeface="Calibri" pitchFamily="34" charset="-122"/>
                           <a:cs typeface="Calibri" pitchFamily="34" charset="-120"/>
                         </a:rPr>
-                        <a:t>com-posprd-vpc (VPC)</a:t>
+                        <a:t>com-posprd-vpc（VPC）</a:t>
                       </a:r>
                       <a:endParaRPr lang="en-US" sz="900" dirty="0">
                         <a:latin typeface="Calibri" charset="0"/>
@@ -23396,7 +24608,7 @@
                           <a:ea typeface="Calibri" pitchFamily="34" charset="-122"/>
                           <a:cs typeface="Calibri" pitchFamily="34" charset="-120"/>
                         </a:rPr>
-                        <a:t>ap-northeast-1</a:t>
+                        <a:t>1a+1c</a:t>
                       </a:r>
                       <a:endParaRPr lang="en-US" sz="900" dirty="0">
                         <a:latin typeface="Calibri" charset="0"/>
@@ -25133,7 +26345,7 @@
                 <a:ea typeface="Calibri" pitchFamily="34" charset="-122"/>
                 <a:cs typeface="Calibri" pitchFamily="34" charset="-120"/>
               </a:rPr>
-              <a:t>USMH網接続（IPSec VPN）</a:t>
+              <a:t>USMH網接続（IPSec VPN + Direct Connect）</a:t>
             </a:r>
             <a:endParaRPr lang="en-US" sz="1200" dirty="0"/>
           </a:p>
@@ -25165,7 +26377,7 @@
                 <a:gridCol w="1920240"/>
                 <a:gridCol w="2651760"/>
               </a:tblGrid>
-              <a:tr h="292608">
+              <a:tr h="347472">
                 <a:tc>
                   <a:txBody>
                     <a:bodyPr/>
@@ -25303,7 +26515,7 @@
                   </a:tcPr>
                 </a:tc>
               </a:tr>
-              <a:tr h="292608">
+              <a:tr h="347472">
                 <a:tc>
                   <a:txBody>
                     <a:bodyPr/>
@@ -25321,7 +26533,7 @@
                           <a:ea typeface="Calibri" pitchFamily="34" charset="-122"/>
                           <a:cs typeface="Calibri" pitchFamily="34" charset="-120"/>
                         </a:rPr>
-                        <a:t>接続方式</a:t>
+                        <a:t>VPN接続ID</a:t>
                       </a:r>
                       <a:endParaRPr lang="en-US" sz="900" dirty="0">
                         <a:latin typeface="Calibri" charset="0"/>
@@ -25369,144 +26581,6 @@
                     </a:lnB>
                     <a:solidFill>
                       <a:srgbClr val="FFFFFF"/>
-                    </a:solidFill>
-                  </a:tcPr>
-                </a:tc>
-                <a:tc>
-                  <a:txBody>
-                    <a:bodyPr/>
-                    <a:lstStyle/>
-                    <a:p>
-                      <a:pPr indent="0" marL="0">
-                        <a:buNone/>
-                      </a:pPr>
-                      <a:r>
-                        <a:rPr lang="en-US" sz="900" dirty="0">
-                          <a:solidFill>
-                            <a:srgbClr val="2D2D2D"/>
-                          </a:solidFill>
-                          <a:latin typeface="Calibri" pitchFamily="34" charset="0"/>
-                          <a:ea typeface="Calibri" pitchFamily="34" charset="-122"/>
-                          <a:cs typeface="Calibri" pitchFamily="34" charset="-120"/>
-                        </a:rPr>
-                        <a:t>IPSec Site-to-Site VPN</a:t>
-                      </a:r>
-                      <a:endParaRPr lang="en-US" sz="900" dirty="0">
-                        <a:latin typeface="Calibri" charset="0"/>
-                        <a:ea typeface="Calibri" charset="0"/>
-                        <a:cs typeface="Calibri" charset="0"/>
-                      </a:endParaRPr>
-                    </a:p>
-                  </a:txBody>
-                  <a:tcPr marL="91440" marR="91440" marT="45720" marB="45720">
-                    <a:lnL w="6350" cap="flat" cmpd="sng" algn="ctr">
-                      <a:solidFill>
-                        <a:srgbClr val="CCCCCC"/>
-                      </a:solidFill>
-                      <a:prstDash val="solid"/>
-                      <a:round/>
-                      <a:headEnd type="none" w="med" len="med"/>
-                      <a:tailEnd type="none" w="med" len="med"/>
-                    </a:lnL>
-                    <a:lnR w="6350" cap="flat" cmpd="sng" algn="ctr">
-                      <a:solidFill>
-                        <a:srgbClr val="CCCCCC"/>
-                      </a:solidFill>
-                      <a:prstDash val="solid"/>
-                      <a:round/>
-                      <a:headEnd type="none" w="med" len="med"/>
-                      <a:tailEnd type="none" w="med" len="med"/>
-                    </a:lnR>
-                    <a:lnT w="6350" cap="flat" cmpd="sng" algn="ctr">
-                      <a:solidFill>
-                        <a:srgbClr val="CCCCCC"/>
-                      </a:solidFill>
-                      <a:prstDash val="solid"/>
-                      <a:round/>
-                      <a:headEnd type="none" w="med" len="med"/>
-                      <a:tailEnd type="none" w="med" len="med"/>
-                    </a:lnT>
-                    <a:lnB w="6350" cap="flat" cmpd="sng" algn="ctr">
-                      <a:solidFill>
-                        <a:srgbClr val="CCCCCC"/>
-                      </a:solidFill>
-                      <a:prstDash val="solid"/>
-                      <a:round/>
-                      <a:headEnd type="none" w="med" len="med"/>
-                      <a:tailEnd type="none" w="med" len="med"/>
-                    </a:lnB>
-                    <a:solidFill>
-                      <a:srgbClr val="FFFFFF"/>
-                    </a:solidFill>
-                  </a:tcPr>
-                </a:tc>
-              </a:tr>
-              <a:tr h="292608">
-                <a:tc>
-                  <a:txBody>
-                    <a:bodyPr/>
-                    <a:lstStyle/>
-                    <a:p>
-                      <a:pPr indent="0" marL="0">
-                        <a:buNone/>
-                      </a:pPr>
-                      <a:r>
-                        <a:rPr lang="en-US" sz="900" dirty="0">
-                          <a:solidFill>
-                            <a:srgbClr val="2D2D2D"/>
-                          </a:solidFill>
-                          <a:latin typeface="Calibri" pitchFamily="34" charset="0"/>
-                          <a:ea typeface="Calibri" pitchFamily="34" charset="-122"/>
-                          <a:cs typeface="Calibri" pitchFamily="34" charset="-120"/>
-                        </a:rPr>
-                        <a:t>VPN ID</a:t>
-                      </a:r>
-                      <a:endParaRPr lang="en-US" sz="900" dirty="0">
-                        <a:latin typeface="Calibri" charset="0"/>
-                        <a:ea typeface="Calibri" charset="0"/>
-                        <a:cs typeface="Calibri" charset="0"/>
-                      </a:endParaRPr>
-                    </a:p>
-                  </a:txBody>
-                  <a:tcPr marL="91440" marR="91440" marT="45720" marB="45720">
-                    <a:lnL w="6350" cap="flat" cmpd="sng" algn="ctr">
-                      <a:solidFill>
-                        <a:srgbClr val="CCCCCC"/>
-                      </a:solidFill>
-                      <a:prstDash val="solid"/>
-                      <a:round/>
-                      <a:headEnd type="none" w="med" len="med"/>
-                      <a:tailEnd type="none" w="med" len="med"/>
-                    </a:lnL>
-                    <a:lnR w="6350" cap="flat" cmpd="sng" algn="ctr">
-                      <a:solidFill>
-                        <a:srgbClr val="CCCCCC"/>
-                      </a:solidFill>
-                      <a:prstDash val="solid"/>
-                      <a:round/>
-                      <a:headEnd type="none" w="med" len="med"/>
-                      <a:tailEnd type="none" w="med" len="med"/>
-                    </a:lnR>
-                    <a:lnT w="6350" cap="flat" cmpd="sng" algn="ctr">
-                      <a:solidFill>
-                        <a:srgbClr val="CCCCCC"/>
-                      </a:solidFill>
-                      <a:prstDash val="solid"/>
-                      <a:round/>
-                      <a:headEnd type="none" w="med" len="med"/>
-                      <a:tailEnd type="none" w="med" len="med"/>
-                    </a:lnT>
-                    <a:lnB w="6350" cap="flat" cmpd="sng" algn="ctr">
-                      <a:solidFill>
-                        <a:srgbClr val="CCCCCC"/>
-                      </a:solidFill>
-                      <a:prstDash val="solid"/>
-                      <a:round/>
-                      <a:headEnd type="none" w="med" len="med"/>
-                      <a:tailEnd type="none" w="med" len="med"/>
-                    </a:lnB>
-                    <a:solidFill>
-                      <a:srgbClr val="F5F5F5"/>
                     </a:solidFill>
                   </a:tcPr>
                 </a:tc>
@@ -25574,12 +26648,12 @@
                       <a:tailEnd type="none" w="med" len="med"/>
                     </a:lnB>
                     <a:solidFill>
-                      <a:srgbClr val="F5F5F5"/>
+                      <a:srgbClr val="FFFFFF"/>
                     </a:solidFill>
                   </a:tcPr>
                 </a:tc>
               </a:tr>
-              <a:tr h="292608">
+              <a:tr h="347472">
                 <a:tc>
                   <a:txBody>
                     <a:bodyPr/>
@@ -25644,7 +26718,7 @@
                       <a:tailEnd type="none" w="med" len="med"/>
                     </a:lnB>
                     <a:solidFill>
-                      <a:srgbClr val="FFFFFF"/>
+                      <a:srgbClr val="F5F5F5"/>
                     </a:solidFill>
                   </a:tcPr>
                 </a:tc>
@@ -25712,12 +26786,12 @@
                       <a:tailEnd type="none" w="med" len="med"/>
                     </a:lnB>
                     <a:solidFill>
-                      <a:srgbClr val="FFFFFF"/>
+                      <a:srgbClr val="F5F5F5"/>
                     </a:solidFill>
                   </a:tcPr>
                 </a:tc>
               </a:tr>
-              <a:tr h="292608">
+              <a:tr h="347472">
                 <a:tc>
                   <a:txBody>
                     <a:bodyPr/>
@@ -25782,7 +26856,7 @@
                       <a:tailEnd type="none" w="med" len="med"/>
                     </a:lnB>
                     <a:solidFill>
-                      <a:srgbClr val="F5F5F5"/>
+                      <a:srgbClr val="FFFFFF"/>
                     </a:solidFill>
                   </a:tcPr>
                 </a:tc>
@@ -25850,12 +26924,12 @@
                       <a:tailEnd type="none" w="med" len="med"/>
                     </a:lnB>
                     <a:solidFill>
-                      <a:srgbClr val="F5F5F5"/>
+                      <a:srgbClr val="FFFFFF"/>
                     </a:solidFill>
                   </a:tcPr>
                 </a:tc>
               </a:tr>
-              <a:tr h="292608">
+              <a:tr h="347472">
                 <a:tc>
                   <a:txBody>
                     <a:bodyPr/>
@@ -25920,7 +26994,7 @@
                       <a:tailEnd type="none" w="med" len="med"/>
                     </a:lnB>
                     <a:solidFill>
-                      <a:srgbClr val="FFFFFF"/>
+                      <a:srgbClr val="F5F5F5"/>
                     </a:solidFill>
                   </a:tcPr>
                 </a:tc>
@@ -25988,12 +27062,330 @@
                       <a:tailEnd type="none" w="med" len="med"/>
                     </a:lnB>
                     <a:solidFill>
+                      <a:srgbClr val="F5F5F5"/>
+                    </a:solidFill>
+                  </a:tcPr>
+                </a:tc>
+              </a:tr>
+              <a:tr h="347472">
+                <a:tc>
+                  <a:txBody>
+                    <a:bodyPr/>
+                    <a:lstStyle/>
+                    <a:p>
+                      <a:pPr indent="0" marL="0">
+                        <a:buNone/>
+                      </a:pPr>
+                      <a:r>
+                        <a:rPr lang="en-US" sz="900" dirty="0">
+                          <a:solidFill>
+                            <a:srgbClr val="2D2D2D"/>
+                          </a:solidFill>
+                          <a:latin typeface="Calibri" pitchFamily="34" charset="0"/>
+                          <a:ea typeface="Calibri" pitchFamily="34" charset="-122"/>
+                          <a:cs typeface="Calibri" pitchFamily="34" charset="-120"/>
+                        </a:rPr>
+                        <a:t>接続帯域（カスミ）</a:t>
+                      </a:r>
+                      <a:endParaRPr lang="en-US" sz="900" dirty="0">
+                        <a:latin typeface="Calibri" charset="0"/>
+                        <a:ea typeface="Calibri" charset="0"/>
+                        <a:cs typeface="Calibri" charset="0"/>
+                      </a:endParaRPr>
+                    </a:p>
+                  </a:txBody>
+                  <a:tcPr marL="91440" marR="91440" marT="45720" marB="45720">
+                    <a:lnL w="6350" cap="flat" cmpd="sng" algn="ctr">
+                      <a:solidFill>
+                        <a:srgbClr val="CCCCCC"/>
+                      </a:solidFill>
+                      <a:prstDash val="solid"/>
+                      <a:round/>
+                      <a:headEnd type="none" w="med" len="med"/>
+                      <a:tailEnd type="none" w="med" len="med"/>
+                    </a:lnL>
+                    <a:lnR w="6350" cap="flat" cmpd="sng" algn="ctr">
+                      <a:solidFill>
+                        <a:srgbClr val="CCCCCC"/>
+                      </a:solidFill>
+                      <a:prstDash val="solid"/>
+                      <a:round/>
+                      <a:headEnd type="none" w="med" len="med"/>
+                      <a:tailEnd type="none" w="med" len="med"/>
+                    </a:lnR>
+                    <a:lnT w="6350" cap="flat" cmpd="sng" algn="ctr">
+                      <a:solidFill>
+                        <a:srgbClr val="CCCCCC"/>
+                      </a:solidFill>
+                      <a:prstDash val="solid"/>
+                      <a:round/>
+                      <a:headEnd type="none" w="med" len="med"/>
+                      <a:tailEnd type="none" w="med" len="med"/>
+                    </a:lnT>
+                    <a:lnB w="6350" cap="flat" cmpd="sng" algn="ctr">
+                      <a:solidFill>
+                        <a:srgbClr val="CCCCCC"/>
+                      </a:solidFill>
+                      <a:prstDash val="solid"/>
+                      <a:round/>
+                      <a:headEnd type="none" w="med" len="med"/>
+                      <a:tailEnd type="none" w="med" len="med"/>
+                    </a:lnB>
+                    <a:solidFill>
+                      <a:srgbClr val="FFFFFF"/>
+                    </a:solidFill>
+                  </a:tcPr>
+                </a:tc>
+                <a:tc>
+                  <a:txBody>
+                    <a:bodyPr/>
+                    <a:lstStyle/>
+                    <a:p>
+                      <a:pPr indent="0" marL="0">
+                        <a:buNone/>
+                      </a:pPr>
+                      <a:r>
+                        <a:rPr lang="en-US" sz="900" dirty="0">
+                          <a:solidFill>
+                            <a:srgbClr val="2D2D2D"/>
+                          </a:solidFill>
+                          <a:latin typeface="Calibri" pitchFamily="34" charset="0"/>
+                          <a:ea typeface="Calibri" pitchFamily="34" charset="-122"/>
+                          <a:cs typeface="Calibri" pitchFamily="34" charset="-120"/>
+                        </a:rPr>
+                        <a:t>10Mbps</a:t>
+                      </a:r>
+                      <a:endParaRPr lang="en-US" sz="900" dirty="0">
+                        <a:latin typeface="Calibri" charset="0"/>
+                        <a:ea typeface="Calibri" charset="0"/>
+                        <a:cs typeface="Calibri" charset="0"/>
+                      </a:endParaRPr>
+                    </a:p>
+                  </a:txBody>
+                  <a:tcPr marL="91440" marR="91440" marT="45720" marB="45720">
+                    <a:lnL w="6350" cap="flat" cmpd="sng" algn="ctr">
+                      <a:solidFill>
+                        <a:srgbClr val="CCCCCC"/>
+                      </a:solidFill>
+                      <a:prstDash val="solid"/>
+                      <a:round/>
+                      <a:headEnd type="none" w="med" len="med"/>
+                      <a:tailEnd type="none" w="med" len="med"/>
+                    </a:lnL>
+                    <a:lnR w="6350" cap="flat" cmpd="sng" algn="ctr">
+                      <a:solidFill>
+                        <a:srgbClr val="CCCCCC"/>
+                      </a:solidFill>
+                      <a:prstDash val="solid"/>
+                      <a:round/>
+                      <a:headEnd type="none" w="med" len="med"/>
+                      <a:tailEnd type="none" w="med" len="med"/>
+                    </a:lnR>
+                    <a:lnT w="6350" cap="flat" cmpd="sng" algn="ctr">
+                      <a:solidFill>
+                        <a:srgbClr val="CCCCCC"/>
+                      </a:solidFill>
+                      <a:prstDash val="solid"/>
+                      <a:round/>
+                      <a:headEnd type="none" w="med" len="med"/>
+                      <a:tailEnd type="none" w="med" len="med"/>
+                    </a:lnT>
+                    <a:lnB w="6350" cap="flat" cmpd="sng" algn="ctr">
+                      <a:solidFill>
+                        <a:srgbClr val="CCCCCC"/>
+                      </a:solidFill>
+                      <a:prstDash val="solid"/>
+                      <a:round/>
+                      <a:headEnd type="none" w="med" len="med"/>
+                      <a:tailEnd type="none" w="med" len="med"/>
+                    </a:lnB>
+                    <a:solidFill>
                       <a:srgbClr val="FFFFFF"/>
                     </a:solidFill>
                   </a:tcPr>
                 </a:tc>
               </a:tr>
-              <a:tr h="292608">
+              <a:tr h="347472">
+                <a:tc>
+                  <a:txBody>
+                    <a:bodyPr/>
+                    <a:lstStyle/>
+                    <a:p>
+                      <a:pPr indent="0" marL="0">
+                        <a:buNone/>
+                      </a:pPr>
+                      <a:r>
+                        <a:rPr lang="en-US" sz="900" dirty="0">
+                          <a:solidFill>
+                            <a:srgbClr val="2D2D2D"/>
+                          </a:solidFill>
+                          <a:latin typeface="Calibri" pitchFamily="34" charset="0"/>
+                          <a:ea typeface="Calibri" pitchFamily="34" charset="-122"/>
+                          <a:cs typeface="Calibri" pitchFamily="34" charset="-120"/>
+                        </a:rPr>
+                        <a:t>Direct Connect経路</a:t>
+                      </a:r>
+                      <a:endParaRPr lang="en-US" sz="900" dirty="0">
+                        <a:latin typeface="Calibri" charset="0"/>
+                        <a:ea typeface="Calibri" charset="0"/>
+                        <a:cs typeface="Calibri" charset="0"/>
+                      </a:endParaRPr>
+                    </a:p>
+                  </a:txBody>
+                  <a:tcPr marL="91440" marR="91440" marT="45720" marB="45720">
+                    <a:lnL w="6350" cap="flat" cmpd="sng" algn="ctr">
+                      <a:solidFill>
+                        <a:srgbClr val="CCCCCC"/>
+                      </a:solidFill>
+                      <a:prstDash val="solid"/>
+                      <a:round/>
+                      <a:headEnd type="none" w="med" len="med"/>
+                      <a:tailEnd type="none" w="med" len="med"/>
+                    </a:lnL>
+                    <a:lnR w="6350" cap="flat" cmpd="sng" algn="ctr">
+                      <a:solidFill>
+                        <a:srgbClr val="CCCCCC"/>
+                      </a:solidFill>
+                      <a:prstDash val="solid"/>
+                      <a:round/>
+                      <a:headEnd type="none" w="med" len="med"/>
+                      <a:tailEnd type="none" w="med" len="med"/>
+                    </a:lnR>
+                    <a:lnT w="6350" cap="flat" cmpd="sng" algn="ctr">
+                      <a:solidFill>
+                        <a:srgbClr val="CCCCCC"/>
+                      </a:solidFill>
+                      <a:prstDash val="solid"/>
+                      <a:round/>
+                      <a:headEnd type="none" w="med" len="med"/>
+                      <a:tailEnd type="none" w="med" len="med"/>
+                    </a:lnT>
+                    <a:lnB w="6350" cap="flat" cmpd="sng" algn="ctr">
+                      <a:solidFill>
+                        <a:srgbClr val="CCCCCC"/>
+                      </a:solidFill>
+                      <a:prstDash val="solid"/>
+                      <a:round/>
+                      <a:headEnd type="none" w="med" len="med"/>
+                      <a:tailEnd type="none" w="med" len="med"/>
+                    </a:lnB>
+                    <a:solidFill>
+                      <a:srgbClr val="F5F5F5"/>
+                    </a:solidFill>
+                  </a:tcPr>
+                </a:tc>
+                <a:tc>
+                  <a:txBody>
+                    <a:bodyPr/>
+                    <a:lstStyle/>
+                    <a:p>
+                      <a:pPr indent="0" marL="0">
+                        <a:buNone/>
+                      </a:pPr>
+                      <a:r>
+                        <a:rPr lang="en-US" sz="900" dirty="0">
+                          <a:solidFill>
+                            <a:srgbClr val="2D2D2D"/>
+                          </a:solidFill>
+                          <a:latin typeface="Calibri" pitchFamily="34" charset="0"/>
+                          <a:ea typeface="Calibri" pitchFamily="34" charset="-122"/>
+                          <a:cs typeface="Calibri" pitchFamily="34" charset="-120"/>
+                        </a:rPr>
+                        <a:t>USMH閉域網→SmartVPN→</a:t>
+                      </a:r>
+                      <a:endParaRPr lang="en-US" sz="900" dirty="0">
+                        <a:latin typeface="Calibri" charset="0"/>
+                        <a:ea typeface="Calibri" charset="0"/>
+                        <a:cs typeface="Calibri" charset="0"/>
+                      </a:endParaRPr>
+                    </a:p>
+                    <a:p>
+                      <a:pPr indent="0" marL="0">
+                        <a:buNone/>
+                      </a:pPr>
+                      <a:r>
+                        <a:rPr lang="en-US" sz="900" dirty="0">
+                          <a:solidFill>
+                            <a:srgbClr val="2D2D2D"/>
+                          </a:solidFill>
+                          <a:latin typeface="Calibri" pitchFamily="34" charset="0"/>
+                          <a:ea typeface="Calibri" pitchFamily="34" charset="-122"/>
+                          <a:cs typeface="Calibri" pitchFamily="34" charset="-120"/>
+                        </a:rPr>
+                        <a:t>AWS Direct Connect(100Mbps)</a:t>
+                      </a:r>
+                      <a:endParaRPr lang="en-US" sz="900" dirty="0">
+                        <a:latin typeface="Calibri" charset="0"/>
+                        <a:ea typeface="Calibri" charset="0"/>
+                        <a:cs typeface="Calibri" charset="0"/>
+                      </a:endParaRPr>
+                    </a:p>
+                    <a:p>
+                      <a:pPr indent="0" marL="0">
+                        <a:buNone/>
+                      </a:pPr>
+                      <a:r>
+                        <a:rPr lang="en-US" sz="900" dirty="0">
+                          <a:solidFill>
+                            <a:srgbClr val="2D2D2D"/>
+                          </a:solidFill>
+                          <a:latin typeface="Calibri" pitchFamily="34" charset="0"/>
+                          <a:ea typeface="Calibri" pitchFamily="34" charset="-122"/>
+                          <a:cs typeface="Calibri" pitchFamily="34" charset="-120"/>
+                        </a:rPr>
+                        <a:t>→Gateway VPC→VPN GW→カスミVPC</a:t>
+                      </a:r>
+                      <a:endParaRPr lang="en-US" sz="900" dirty="0">
+                        <a:latin typeface="Calibri" charset="0"/>
+                        <a:ea typeface="Calibri" charset="0"/>
+                        <a:cs typeface="Calibri" charset="0"/>
+                      </a:endParaRPr>
+                    </a:p>
+                  </a:txBody>
+                  <a:tcPr marL="91440" marR="91440" marT="45720" marB="45720">
+                    <a:lnL w="6350" cap="flat" cmpd="sng" algn="ctr">
+                      <a:solidFill>
+                        <a:srgbClr val="CCCCCC"/>
+                      </a:solidFill>
+                      <a:prstDash val="solid"/>
+                      <a:round/>
+                      <a:headEnd type="none" w="med" len="med"/>
+                      <a:tailEnd type="none" w="med" len="med"/>
+                    </a:lnL>
+                    <a:lnR w="6350" cap="flat" cmpd="sng" algn="ctr">
+                      <a:solidFill>
+                        <a:srgbClr val="CCCCCC"/>
+                      </a:solidFill>
+                      <a:prstDash val="solid"/>
+                      <a:round/>
+                      <a:headEnd type="none" w="med" len="med"/>
+                      <a:tailEnd type="none" w="med" len="med"/>
+                    </a:lnR>
+                    <a:lnT w="6350" cap="flat" cmpd="sng" algn="ctr">
+                      <a:solidFill>
+                        <a:srgbClr val="CCCCCC"/>
+                      </a:solidFill>
+                      <a:prstDash val="solid"/>
+                      <a:round/>
+                      <a:headEnd type="none" w="med" len="med"/>
+                      <a:tailEnd type="none" w="med" len="med"/>
+                    </a:lnT>
+                    <a:lnB w="6350" cap="flat" cmpd="sng" algn="ctr">
+                      <a:solidFill>
+                        <a:srgbClr val="CCCCCC"/>
+                      </a:solidFill>
+                      <a:prstDash val="solid"/>
+                      <a:round/>
+                      <a:headEnd type="none" w="med" len="med"/>
+                      <a:tailEnd type="none" w="med" len="med"/>
+                    </a:lnB>
+                    <a:solidFill>
+                      <a:srgbClr val="F5F5F5"/>
+                    </a:solidFill>
+                  </a:tcPr>
+                </a:tc>
+              </a:tr>
+              <a:tr h="347472">
                 <a:tc>
                   <a:txBody>
                     <a:bodyPr/>
@@ -26058,7 +27450,7 @@
                       <a:tailEnd type="none" w="med" len="med"/>
                     </a:lnB>
                     <a:solidFill>
-                      <a:srgbClr val="F5F5F5"/>
+                      <a:srgbClr val="FFFFFF"/>
                     </a:solidFill>
                   </a:tcPr>
                 </a:tc>
@@ -26079,7 +27471,7 @@
                           <a:ea typeface="Calibri" pitchFamily="34" charset="-122"/>
                           <a:cs typeface="Calibri" pitchFamily="34" charset="-120"/>
                         </a:rPr>
-                        <a:t>172.21.10.0/24 → RDS port 3306</a:t>
+                        <a:t>172.21.10.0/24 → RDS 3306</a:t>
                       </a:r>
                       <a:endParaRPr lang="en-US" sz="900" dirty="0">
                         <a:latin typeface="Calibri" charset="0"/>
@@ -26126,12 +27518,12 @@
                       <a:tailEnd type="none" w="med" len="med"/>
                     </a:lnB>
                     <a:solidFill>
-                      <a:srgbClr val="F5F5F5"/>
+                      <a:srgbClr val="FFFFFF"/>
                     </a:solidFill>
                   </a:tcPr>
                 </a:tc>
               </a:tr>
-              <a:tr h="292608">
+              <a:tr h="347472">
                 <a:tc>
                   <a:txBody>
                     <a:bodyPr/>
@@ -26196,7 +27588,7 @@
                       <a:tailEnd type="none" w="med" len="med"/>
                     </a:lnB>
                     <a:solidFill>
-                      <a:srgbClr val="FFFFFF"/>
+                      <a:srgbClr val="F5F5F5"/>
                     </a:solidFill>
                   </a:tcPr>
                 </a:tc>
@@ -26217,7 +27609,7 @@
                           <a:ea typeface="Calibri" pitchFamily="34" charset="-122"/>
                           <a:cs typeface="Calibri" pitchFamily="34" charset="-120"/>
                         </a:rPr>
-                        <a:t>10.156.96.0/24 → Giftcard port 80</a:t>
+                        <a:t>10.156.96.0/24 → Giftcard 80</a:t>
                       </a:r>
                       <a:endParaRPr lang="en-US" sz="900" dirty="0">
                         <a:latin typeface="Calibri" charset="0"/>
@@ -26264,12 +27656,12 @@
                       <a:tailEnd type="none" w="med" len="med"/>
                     </a:lnB>
                     <a:solidFill>
-                      <a:srgbClr val="FFFFFF"/>
+                      <a:srgbClr val="F5F5F5"/>
                     </a:solidFill>
                   </a:tcPr>
                 </a:tc>
               </a:tr>
-              <a:tr h="292608">
+              <a:tr h="347472">
                 <a:tc>
                   <a:txBody>
                     <a:bodyPr/>
@@ -26334,144 +27726,6 @@
                       <a:tailEnd type="none" w="med" len="med"/>
                     </a:lnB>
                     <a:solidFill>
-                      <a:srgbClr val="F5F5F5"/>
-                    </a:solidFill>
-                  </a:tcPr>
-                </a:tc>
-                <a:tc>
-                  <a:txBody>
-                    <a:bodyPr/>
-                    <a:lstStyle/>
-                    <a:p>
-                      <a:pPr indent="0" marL="0">
-                        <a:buNone/>
-                      </a:pPr>
-                      <a:r>
-                        <a:rPr lang="en-US" sz="900" dirty="0">
-                          <a:solidFill>
-                            <a:srgbClr val="2D2D2D"/>
-                          </a:solidFill>
-                          <a:latin typeface="Calibri" pitchFamily="34" charset="0"/>
-                          <a:ea typeface="Calibri" pitchFamily="34" charset="-122"/>
-                          <a:cs typeface="Calibri" pitchFamily="34" charset="-120"/>
-                        </a:rPr>
-                        <a:t>10.156.96.192/26 → Transfer Family port 22</a:t>
-                      </a:r>
-                      <a:endParaRPr lang="en-US" sz="900" dirty="0">
-                        <a:latin typeface="Calibri" charset="0"/>
-                        <a:ea typeface="Calibri" charset="0"/>
-                        <a:cs typeface="Calibri" charset="0"/>
-                      </a:endParaRPr>
-                    </a:p>
-                  </a:txBody>
-                  <a:tcPr marL="91440" marR="91440" marT="45720" marB="45720">
-                    <a:lnL w="6350" cap="flat" cmpd="sng" algn="ctr">
-                      <a:solidFill>
-                        <a:srgbClr val="CCCCCC"/>
-                      </a:solidFill>
-                      <a:prstDash val="solid"/>
-                      <a:round/>
-                      <a:headEnd type="none" w="med" len="med"/>
-                      <a:tailEnd type="none" w="med" len="med"/>
-                    </a:lnL>
-                    <a:lnR w="6350" cap="flat" cmpd="sng" algn="ctr">
-                      <a:solidFill>
-                        <a:srgbClr val="CCCCCC"/>
-                      </a:solidFill>
-                      <a:prstDash val="solid"/>
-                      <a:round/>
-                      <a:headEnd type="none" w="med" len="med"/>
-                      <a:tailEnd type="none" w="med" len="med"/>
-                    </a:lnR>
-                    <a:lnT w="6350" cap="flat" cmpd="sng" algn="ctr">
-                      <a:solidFill>
-                        <a:srgbClr val="CCCCCC"/>
-                      </a:solidFill>
-                      <a:prstDash val="solid"/>
-                      <a:round/>
-                      <a:headEnd type="none" w="med" len="med"/>
-                      <a:tailEnd type="none" w="med" len="med"/>
-                    </a:lnT>
-                    <a:lnB w="6350" cap="flat" cmpd="sng" algn="ctr">
-                      <a:solidFill>
-                        <a:srgbClr val="CCCCCC"/>
-                      </a:solidFill>
-                      <a:prstDash val="solid"/>
-                      <a:round/>
-                      <a:headEnd type="none" w="med" len="med"/>
-                      <a:tailEnd type="none" w="med" len="med"/>
-                    </a:lnB>
-                    <a:solidFill>
-                      <a:srgbClr val="F5F5F5"/>
-                    </a:solidFill>
-                  </a:tcPr>
-                </a:tc>
-              </a:tr>
-              <a:tr h="292608">
-                <a:tc>
-                  <a:txBody>
-                    <a:bodyPr/>
-                    <a:lstStyle/>
-                    <a:p>
-                      <a:pPr indent="0" marL="0">
-                        <a:buNone/>
-                      </a:pPr>
-                      <a:r>
-                        <a:rPr lang="en-US" sz="900" dirty="0">
-                          <a:solidFill>
-                            <a:srgbClr val="2D2D2D"/>
-                          </a:solidFill>
-                          <a:latin typeface="Calibri" pitchFamily="34" charset="0"/>
-                          <a:ea typeface="Calibri" pitchFamily="34" charset="-122"/>
-                          <a:cs typeface="Calibri" pitchFamily="34" charset="-120"/>
-                        </a:rPr>
-                        <a:t>Direct Connect</a:t>
-                      </a:r>
-                      <a:endParaRPr lang="en-US" sz="900" dirty="0">
-                        <a:latin typeface="Calibri" charset="0"/>
-                        <a:ea typeface="Calibri" charset="0"/>
-                        <a:cs typeface="Calibri" charset="0"/>
-                      </a:endParaRPr>
-                    </a:p>
-                  </a:txBody>
-                  <a:tcPr marL="91440" marR="91440" marT="45720" marB="45720">
-                    <a:lnL w="6350" cap="flat" cmpd="sng" algn="ctr">
-                      <a:solidFill>
-                        <a:srgbClr val="CCCCCC"/>
-                      </a:solidFill>
-                      <a:prstDash val="solid"/>
-                      <a:round/>
-                      <a:headEnd type="none" w="med" len="med"/>
-                      <a:tailEnd type="none" w="med" len="med"/>
-                    </a:lnL>
-                    <a:lnR w="6350" cap="flat" cmpd="sng" algn="ctr">
-                      <a:solidFill>
-                        <a:srgbClr val="CCCCCC"/>
-                      </a:solidFill>
-                      <a:prstDash val="solid"/>
-                      <a:round/>
-                      <a:headEnd type="none" w="med" len="med"/>
-                      <a:tailEnd type="none" w="med" len="med"/>
-                    </a:lnR>
-                    <a:lnT w="6350" cap="flat" cmpd="sng" algn="ctr">
-                      <a:solidFill>
-                        <a:srgbClr val="CCCCCC"/>
-                      </a:solidFill>
-                      <a:prstDash val="solid"/>
-                      <a:round/>
-                      <a:headEnd type="none" w="med" len="med"/>
-                      <a:tailEnd type="none" w="med" len="med"/>
-                    </a:lnT>
-                    <a:lnB w="6350" cap="flat" cmpd="sng" algn="ctr">
-                      <a:solidFill>
-                        <a:srgbClr val="CCCCCC"/>
-                      </a:solidFill>
-                      <a:prstDash val="solid"/>
-                      <a:round/>
-                      <a:headEnd type="none" w="med" len="med"/>
-                      <a:tailEnd type="none" w="med" len="med"/>
-                    </a:lnB>
-                    <a:solidFill>
                       <a:srgbClr val="FFFFFF"/>
                     </a:solidFill>
                   </a:tcPr>
@@ -26493,28 +27747,7 @@
                           <a:ea typeface="Calibri" pitchFamily="34" charset="-122"/>
                           <a:cs typeface="Calibri" pitchFamily="34" charset="-120"/>
                         </a:rPr>
-                        <a:t>このアカウントには未設定</a:t>
-                      </a:r>
-                      <a:endParaRPr lang="en-US" sz="900" dirty="0">
-                        <a:latin typeface="Calibri" charset="0"/>
-                        <a:ea typeface="Calibri" charset="0"/>
-                        <a:cs typeface="Calibri" charset="0"/>
-                      </a:endParaRPr>
-                    </a:p>
-                    <a:p>
-                      <a:pPr indent="0" marL="0">
-                        <a:buNone/>
-                      </a:pPr>
-                      <a:r>
-                        <a:rPr lang="en-US" sz="900" dirty="0">
-                          <a:solidFill>
-                            <a:srgbClr val="2D2D2D"/>
-                          </a:solidFill>
-                          <a:latin typeface="Calibri" pitchFamily="34" charset="0"/>
-                          <a:ea typeface="Calibri" pitchFamily="34" charset="-122"/>
-                          <a:cs typeface="Calibri" pitchFamily="34" charset="-120"/>
-                        </a:rPr>
-                        <a:t>（USMH側管理の可能性あり）</a:t>
+                        <a:t>10.156.96.192/26 → Transfer 22</a:t>
                       </a:r>
                       <a:endParaRPr lang="en-US" sz="900" dirty="0">
                         <a:latin typeface="Calibri" charset="0"/>
@@ -26578,8 +27811,8 @@
         </p:nvSpPr>
         <p:spPr>
           <a:xfrm>
-            <a:off x="365760" y="5120640"/>
-            <a:ext cx="9171432" cy="228600"/>
+            <a:off x="365760" y="5166360"/>
+            <a:ext cx="9171432" cy="274320"/>
           </a:xfrm>
           <a:prstGeom prst="rect">
             <a:avLst/>
@@ -26603,7 +27836,7 @@
                 <a:ea typeface="Calibri" pitchFamily="34" charset="-122"/>
                 <a:cs typeface="Calibri" pitchFamily="34" charset="-120"/>
               </a:rPr>
-              <a:t>※ Bastion EC2（sg-ec2-bastion）: UDP 1194 が開放（OpenVPN経由のメンテナンスアクセス用）</a:t>
+              <a:t>※ Direct ConnectはGateway VPC（別AWSアカウント）で終端。カスミVPCへはVPN Gatewayで接続。カスミへの帯域は10Mbps。</a:t>
             </a:r>
             <a:endParaRPr lang="en-US" sz="800" dirty="0"/>
           </a:p>
@@ -27832,7 +29065,7 @@
                 <a:ea typeface="Calibri" pitchFamily="34" charset="-122"/>
                 <a:cs typeface="Calibri" pitchFamily="34" charset="-120"/>
               </a:rPr>
-              <a:t>※ App Server / Batch Server は現在EC2として存在しない</a:t>
+              <a:t>※ Bastion=ギフトカード管理サーバー(PRD: 10.238.2.39)</a:t>
             </a:r>
             <a:endParaRPr lang="en-US" sz="800" dirty="0"/>
           </a:p>
@@ -27849,7 +29082,7 @@
                 <a:ea typeface="Calibri" pitchFamily="34" charset="-122"/>
                 <a:cs typeface="Calibri" pitchFamily="34" charset="-120"/>
               </a:rPr>
-              <a:t>（Lambda (Java17) でバッチ処理を担当）</a:t>
+              <a:t>　Giftcard=管理サーバー(PRD: 10.238.2.198 / STG: 10.239.2.193)</a:t>
             </a:r>
             <a:endParaRPr lang="en-US" sz="800" dirty="0"/>
           </a:p>
@@ -29283,7 +30516,7 @@
                           <a:ea typeface="Calibri" pitchFamily="34" charset="-122"/>
                           <a:cs typeface="Calibri" pitchFamily="34" charset="-120"/>
                         </a:rPr>
-                        <a:t>Bastion (UDP 1194)</a:t>
+                        <a:t>Bastion (UDP 1194 / OpenVPN)</a:t>
                       </a:r>
                       <a:endParaRPr lang="en-US" sz="900" dirty="0">
                         <a:latin typeface="Calibri" charset="0"/>
@@ -29421,7 +30654,7 @@
                           <a:ea typeface="Calibri" pitchFamily="34" charset="-122"/>
                           <a:cs typeface="Calibri" pitchFamily="34" charset="-120"/>
                         </a:rPr>
-                        <a:t>Giftcard (TCP 80, 3389)</a:t>
+                        <a:t>Giftcard (TCP 80←USMH, TCP 3389)</a:t>
                       </a:r>
                       <a:endParaRPr lang="en-US" sz="900" dirty="0">
                         <a:latin typeface="Calibri" charset="0"/>
@@ -29559,7 +30792,7 @@
                           <a:ea typeface="Calibri" pitchFamily="34" charset="-122"/>
                           <a:cs typeface="Calibri" pitchFamily="34" charset="-120"/>
                         </a:rPr>
-                        <a:t>RDS (TCP 3306)</a:t>
+                        <a:t>RDS (TCP 3306 ← 172.21.10.0/24)</a:t>
                       </a:r>
                       <a:endParaRPr lang="en-US" sz="900" dirty="0">
                         <a:latin typeface="Calibri" charset="0"/>
@@ -29835,7 +31068,7 @@
                           <a:ea typeface="Calibri" pitchFamily="34" charset="-122"/>
                           <a:cs typeface="Calibri" pitchFamily="34" charset="-120"/>
                         </a:rPr>
-                        <a:t>Transfer Family (TCP 22)</a:t>
+                        <a:t>Transfer Family (TCP 22 ← USMH)</a:t>
                       </a:r>
                       <a:endParaRPr lang="en-US" sz="900" dirty="0">
                         <a:latin typeface="Calibri" charset="0"/>
@@ -32198,7 +33431,7 @@
         <p:spPr>
           <a:xfrm>
             <a:off x="365760" y="4480560"/>
-            <a:ext cx="4389120" cy="411480"/>
+            <a:ext cx="4389120" cy="274320"/>
           </a:xfrm>
           <a:prstGeom prst="rect">
             <a:avLst/>
@@ -32222,24 +33455,7 @@
                 <a:ea typeface="Calibri" pitchFamily="34" charset="-122"/>
                 <a:cs typeface="Calibri" pitchFamily="34" charset="-120"/>
               </a:rPr>
-              <a:t>※ PPTXに記載の「pos-master-prod」バケットは存在しない</a:t>
-            </a:r>
-            <a:endParaRPr lang="en-US" sz="800" dirty="0"/>
-          </a:p>
-          <a:p>
-            <a:pPr indent="0" marL="0">
-              <a:buNone/>
-            </a:pPr>
-            <a:r>
-              <a:rPr lang="en-US" sz="800" dirty="0">
-                <a:solidFill>
-                  <a:srgbClr val="AA4400"/>
-                </a:solidFill>
-                <a:latin typeface="Calibri" pitchFamily="34" charset="0"/>
-                <a:ea typeface="Calibri" pitchFamily="34" charset="-122"/>
-                <a:cs typeface="Calibri" pitchFamily="34" charset="-120"/>
-              </a:rPr>
-              <a:t>　実際のメインバケットは「prd-ignica-ksm」</a:t>
+              <a:t>※「pos-master-prod」は存在しない。実際は「prd-ignica-ksm」</a:t>
             </a:r>
             <a:endParaRPr lang="en-US" sz="800" dirty="0"/>
           </a:p>
@@ -35625,7 +36841,7 @@
                           <a:ea typeface="Calibri" pitchFamily="34" charset="-122"/>
                           <a:cs typeface="Calibri" pitchFamily="34" charset="-120"/>
                         </a:rPr>
-                        <a:t>export-polling (stg)</a:t>
+                        <a:t>export-polling(stg)</a:t>
                       </a:r>
                       <a:endParaRPr lang="en-US" sz="800" dirty="0">
                         <a:latin typeface="Calibri" charset="0"/>
@@ -36262,7 +37478,7 @@
                 <a:ea typeface="Calibri" pitchFamily="34" charset="-122"/>
                 <a:cs typeface="Calibri" pitchFamily="34" charset="-120"/>
               </a:rPr>
-              <a:t>※ PPTXに記載の「Python 3.11」は誤り。主ランタイムはJava 17。タイムアウト900s（大半）</a:t>
+              <a:t>※ 主ランタイムはJava 17。タイムアウト900s（大半）</a:t>
             </a:r>
             <a:endParaRPr lang="en-US" sz="800" dirty="0"/>
           </a:p>

--- a/40_AWS/01_構成資料/カスミPOS_AWS構成資料.pptx
+++ b/40_AWS/01_構成資料/カスミPOS_AWS構成資料.pptx
@@ -2361,7 +2361,7 @@
                 <a:ea typeface="Calibri" pitchFamily="34" charset="-122"/>
                 <a:cs typeface="Calibri" pitchFamily="34" charset="-120"/>
               </a:rPr>
-              <a:t>2026年3月</a:t>
+              <a:t>2026年3月　　Ver0.1（お客様確認中）</a:t>
             </a:r>
             <a:endParaRPr lang="en-US" sz="1200" dirty="0"/>
           </a:p>

--- a/40_AWS/01_構成資料/カスミPOS_AWS構成資料.pptx
+++ b/40_AWS/01_構成資料/カスミPOS_AWS構成資料.pptx
@@ -18,9 +18,10 @@
     <p:sldId id="266" r:id="rId12"/>
     <p:sldId id="267" r:id="rId13"/>
     <p:sldId id="268" r:id="rId14"/>
+    <p:sldId id="269" r:id="rId15"/>
   </p:sldIdLst>
   <p:notesMasterIdLst>
-    <p:notesMasterId r:id="rId15"/>
+    <p:notesMasterId r:id="rId16"/>
   </p:notesMasterIdLst>
   <p:sldSz cx="9902952" cy="6858000"/>
   <p:notesSz cx="6858000" cy="9902952"/>
@@ -890,6 +891,94 @@
             <a:fld id="{F7021451-1387-4CA6-816F-3879F97B5CBC}" type="slidenum">
               <a:rPr lang="en-US"/>
               <a:t>13</a:t>
+            </a:fld>
+            <a:endParaRPr lang="en-US"/>
+          </a:p>
+        </p:txBody>
+      </p:sp>
+    </p:spTree>
+    <p:extLst>
+      <p:ext uri="{BB962C8B-B14F-4D97-AF65-F5344CB8AC3E}">
+        <p14:creationId xmlns:p14="http://schemas.microsoft.com/office/powerpoint/2010/main" val="1024086991"/>
+      </p:ext>
+    </p:extLst>
+  </p:cSld>
+  <p:clrMapOvr>
+    <a:masterClrMapping/>
+  </p:clrMapOvr>
+</p:notes>
+</file>
+
+<file path=ppt/notesSlides/notesSlide14.xml><?xml version="1.0" encoding="utf-8"?>
+<p:notes xmlns:a="http://schemas.openxmlformats.org/drawingml/2006/main" xmlns:r="http://schemas.openxmlformats.org/officeDocument/2006/relationships" xmlns:p="http://schemas.openxmlformats.org/presentationml/2006/main">
+  <p:cSld>
+    <p:spTree>
+      <p:nvGrpSpPr>
+        <p:cNvPr id="1" name=""/>
+        <p:cNvGrpSpPr/>
+        <p:nvPr/>
+      </p:nvGrpSpPr>
+      <p:grpSpPr>
+        <a:xfrm>
+          <a:off x="0" y="0"/>
+          <a:ext cx="0" cy="0"/>
+          <a:chOff x="0" y="0"/>
+          <a:chExt cx="0" cy="0"/>
+        </a:xfrm>
+      </p:grpSpPr>
+      <p:sp>
+        <p:nvSpPr>
+          <p:cNvPr id="2" name="Slide Image Placeholder 1"/>
+          <p:cNvSpPr>
+            <a:spLocks noGrp="1" noRot="1" noChangeAspect="1"/>
+          </p:cNvSpPr>
+          <p:nvPr>
+            <p:ph type="sldImg"/>
+          </p:nvPr>
+        </p:nvSpPr>
+        <p:spPr/>
+      </p:sp>
+      <p:sp>
+        <p:nvSpPr>
+          <p:cNvPr id="3" name="Notes Placeholder 2"/>
+          <p:cNvSpPr>
+            <a:spLocks noGrp="1"/>
+          </p:cNvSpPr>
+          <p:nvPr>
+            <p:ph type="body" idx="1"/>
+          </p:nvPr>
+        </p:nvSpPr>
+        <p:spPr/>
+        <p:txBody>
+          <a:bodyPr/>
+          <a:lstStyle/>
+          <a:p>
+            <a:r>
+              <a:rPr lang="en-US" dirty="0"/>
+              <a:t/>
+            </a:r>
+            <a:endParaRPr lang="en-US" dirty="0"/>
+          </a:p>
+        </p:txBody>
+      </p:sp>
+      <p:sp>
+        <p:nvSpPr>
+          <p:cNvPr id="4" name="Slide Number Placeholder 3"/>
+          <p:cNvSpPr>
+            <a:spLocks noGrp="1"/>
+          </p:cNvSpPr>
+          <p:nvPr>
+            <p:ph type="sldNum" sz="quarter" idx="10"/>
+          </p:nvPr>
+        </p:nvSpPr>
+        <p:spPr/>
+        <p:txBody>
+          <a:bodyPr/>
+          <a:lstStyle/>
+          <a:p>
+            <a:fld id="{F7021451-1387-4CA6-816F-3879F97B5CBC}" type="slidenum">
+              <a:rPr lang="en-US"/>
+              <a:t>14</a:t>
             </a:fld>
             <a:endParaRPr lang="en-US"/>
           </a:p>
@@ -6764,6 +6853,1813 @@
                 <a:ea typeface="Calibri" pitchFamily="34" charset="-122"/>
                 <a:cs typeface="Calibri" pitchFamily="34" charset="-120"/>
               </a:rPr>
+              <a:t>10. 外部連携ファイル受信 → MySQL インポートフロー</a:t>
+            </a:r>
+            <a:endParaRPr lang="en-US" sz="2000" dirty="0"/>
+          </a:p>
+        </p:txBody>
+      </p:sp>
+      <p:sp>
+        <p:nvSpPr>
+          <p:cNvPr id="8" name="Text 3"/>
+          <p:cNvSpPr/>
+          <p:nvPr/>
+        </p:nvSpPr>
+        <p:spPr>
+          <a:xfrm>
+            <a:off x="493776" y="1307592"/>
+            <a:ext cx="8915400" cy="173736"/>
+          </a:xfrm>
+          <a:prstGeom prst="rect">
+            <a:avLst/>
+          </a:prstGeom>
+          <a:noFill/>
+          <a:ln/>
+        </p:spPr>
+        <p:txBody>
+          <a:bodyPr wrap="square" lIns="0" tIns="0" rIns="0" bIns="0" rtlCol="0" anchor="ctr"/>
+          <a:lstStyle/>
+          <a:p>
+            <a:pPr indent="0" marL="0">
+              <a:buNone/>
+            </a:pPr>
+            <a:r>
+              <a:rPr lang="en-US" sz="1300" dirty="0">
+                <a:solidFill>
+                  <a:srgbClr val="555555"/>
+                </a:solidFill>
+                <a:latin typeface="Calibri" pitchFamily="34" charset="0"/>
+                <a:ea typeface="Calibri" pitchFamily="34" charset="-122"/>
+                <a:cs typeface="Calibri" pitchFamily="34" charset="-120"/>
+              </a:rPr>
+              <a:t>S3 pos-original/ の3系統（OC / SG / SH）を Aurora MySQL へインポート</a:t>
+            </a:r>
+            <a:endParaRPr lang="en-US" sz="1300" dirty="0"/>
+          </a:p>
+        </p:txBody>
+      </p:sp>
+      <p:sp>
+        <p:nvSpPr>
+          <p:cNvPr id="9" name="Shape 4"/>
+          <p:cNvSpPr/>
+          <p:nvPr/>
+        </p:nvSpPr>
+        <p:spPr>
+          <a:xfrm>
+            <a:off x="0" y="6483096"/>
+            <a:ext cx="9902952" cy="393192"/>
+          </a:xfrm>
+          <a:prstGeom prst="rect">
+            <a:avLst/>
+          </a:prstGeom>
+          <a:solidFill>
+            <a:srgbClr val="D0232A"/>
+          </a:solidFill>
+          <a:ln/>
+        </p:spPr>
+      </p:sp>
+      <p:sp>
+        <p:nvSpPr>
+          <p:cNvPr id="10" name="Text 5"/>
+          <p:cNvSpPr/>
+          <p:nvPr/>
+        </p:nvSpPr>
+        <p:spPr>
+          <a:xfrm>
+            <a:off x="109728" y="6583680"/>
+            <a:ext cx="457200" cy="219456"/>
+          </a:xfrm>
+          <a:prstGeom prst="rect">
+            <a:avLst/>
+          </a:prstGeom>
+          <a:noFill/>
+          <a:ln/>
+        </p:spPr>
+        <p:txBody>
+          <a:bodyPr wrap="square" lIns="0" tIns="0" rIns="0" bIns="0" rtlCol="0" anchor="ctr"/>
+          <a:lstStyle/>
+          <a:p>
+            <a:pPr indent="0" marL="0">
+              <a:buNone/>
+            </a:pPr>
+            <a:r>
+              <a:rPr lang="en-US" sz="1000" dirty="0">
+                <a:solidFill>
+                  <a:srgbClr val="FFFFFF"/>
+                </a:solidFill>
+              </a:rPr>
+              <a:t>11</a:t>
+            </a:r>
+            <a:endParaRPr lang="en-US" sz="1000" dirty="0"/>
+          </a:p>
+        </p:txBody>
+      </p:sp>
+      <p:sp>
+        <p:nvSpPr>
+          <p:cNvPr id="11" name="Shape 6"/>
+          <p:cNvSpPr/>
+          <p:nvPr/>
+        </p:nvSpPr>
+        <p:spPr>
+          <a:xfrm>
+            <a:off x="320040" y="1508760"/>
+            <a:ext cx="2834640" cy="274320"/>
+          </a:xfrm>
+          <a:prstGeom prst="rect">
+            <a:avLst/>
+          </a:prstGeom>
+          <a:solidFill>
+            <a:srgbClr val="1E6E9F"/>
+          </a:solidFill>
+          <a:ln w="12700">
+            <a:solidFill>
+              <a:srgbClr val="1E6E9F"/>
+            </a:solidFill>
+            <a:prstDash val="solid"/>
+          </a:ln>
+        </p:spPr>
+      </p:sp>
+      <p:sp>
+        <p:nvSpPr>
+          <p:cNvPr id="12" name="Text 7"/>
+          <p:cNvSpPr/>
+          <p:nvPr/>
+        </p:nvSpPr>
+        <p:spPr>
+          <a:xfrm>
+            <a:off x="320040" y="1508760"/>
+            <a:ext cx="2834640" cy="274320"/>
+          </a:xfrm>
+          <a:prstGeom prst="rect">
+            <a:avLst/>
+          </a:prstGeom>
+          <a:noFill/>
+          <a:ln/>
+        </p:spPr>
+        <p:txBody>
+          <a:bodyPr wrap="square" lIns="0" tIns="0" rIns="0" bIns="0" rtlCol="0" anchor="ctr"/>
+          <a:lstStyle/>
+          <a:p>
+            <a:pPr algn="ctr" indent="0" marL="0">
+              <a:buNone/>
+            </a:pPr>
+            <a:r>
+              <a:rPr lang="en-US" sz="1100" b="1" dirty="0">
+                <a:solidFill>
+                  <a:srgbClr val="FFFFFF"/>
+                </a:solidFill>
+                <a:latin typeface="Calibri" pitchFamily="34" charset="0"/>
+                <a:ea typeface="Calibri" pitchFamily="34" charset="-122"/>
+                <a:cs typeface="Calibri" pitchFamily="34" charset="-120"/>
+              </a:rPr>
+              <a:t>OC フロー</a:t>
+            </a:r>
+            <a:endParaRPr lang="en-US" sz="1100" dirty="0"/>
+          </a:p>
+        </p:txBody>
+      </p:sp>
+      <p:sp>
+        <p:nvSpPr>
+          <p:cNvPr id="13" name="Shape 8"/>
+          <p:cNvSpPr/>
+          <p:nvPr/>
+        </p:nvSpPr>
+        <p:spPr>
+          <a:xfrm>
+            <a:off x="320040" y="1828800"/>
+            <a:ext cx="2834640" cy="502920"/>
+          </a:xfrm>
+          <a:prstGeom prst="rect">
+            <a:avLst/>
+          </a:prstGeom>
+          <a:solidFill>
+            <a:srgbClr val="EBF5FB"/>
+          </a:solidFill>
+          <a:ln w="12700">
+            <a:solidFill>
+              <a:srgbClr val="1E6E9F"/>
+            </a:solidFill>
+            <a:prstDash val="solid"/>
+          </a:ln>
+        </p:spPr>
+      </p:sp>
+      <p:sp>
+        <p:nvSpPr>
+          <p:cNvPr id="14" name="Text 9"/>
+          <p:cNvSpPr/>
+          <p:nvPr/>
+        </p:nvSpPr>
+        <p:spPr>
+          <a:xfrm>
+            <a:off x="365760" y="1847088"/>
+            <a:ext cx="2743200" cy="466344"/>
+          </a:xfrm>
+          <a:prstGeom prst="rect">
+            <a:avLst/>
+          </a:prstGeom>
+          <a:noFill/>
+          <a:ln/>
+        </p:spPr>
+        <p:txBody>
+          <a:bodyPr wrap="square" lIns="0" tIns="0" rIns="0" bIns="0" rtlCol="0" anchor="ctr"/>
+          <a:lstStyle/>
+          <a:p>
+            <a:pPr indent="0" marL="0">
+              <a:buNone/>
+            </a:pPr>
+            <a:r>
+              <a:rPr lang="en-US" sz="900" dirty="0">
+                <a:solidFill>
+                  <a:srgbClr val="1E6E9F"/>
+                </a:solidFill>
+                <a:latin typeface="Calibri" pitchFamily="34" charset="0"/>
+                <a:ea typeface="Calibri" pitchFamily="34" charset="-122"/>
+                <a:cs typeface="Calibri" pitchFamily="34" charset="-120"/>
+              </a:rPr>
+              <a:t>連携元: 基幹データ / BIPROGY・OpenCentral</a:t>
+            </a:r>
+            <a:endParaRPr lang="en-US" sz="900" dirty="0"/>
+          </a:p>
+        </p:txBody>
+      </p:sp>
+      <p:sp>
+        <p:nvSpPr>
+          <p:cNvPr id="15" name="Shape 10"/>
+          <p:cNvSpPr/>
+          <p:nvPr/>
+        </p:nvSpPr>
+        <p:spPr>
+          <a:xfrm>
+            <a:off x="320040" y="2377440"/>
+            <a:ext cx="2834640" cy="320040"/>
+          </a:xfrm>
+          <a:prstGeom prst="rect">
+            <a:avLst/>
+          </a:prstGeom>
+          <a:solidFill>
+            <a:srgbClr val="FFF9E6"/>
+          </a:solidFill>
+          <a:ln w="12700">
+            <a:solidFill>
+              <a:srgbClr val="CCAA00"/>
+            </a:solidFill>
+            <a:prstDash val="solid"/>
+          </a:ln>
+        </p:spPr>
+      </p:sp>
+      <p:sp>
+        <p:nvSpPr>
+          <p:cNvPr id="16" name="Text 11"/>
+          <p:cNvSpPr/>
+          <p:nvPr/>
+        </p:nvSpPr>
+        <p:spPr>
+          <a:xfrm>
+            <a:off x="365760" y="2395728"/>
+            <a:ext cx="2743200" cy="283464"/>
+          </a:xfrm>
+          <a:prstGeom prst="rect">
+            <a:avLst/>
+          </a:prstGeom>
+          <a:noFill/>
+          <a:ln/>
+        </p:spPr>
+        <p:txBody>
+          <a:bodyPr wrap="square" lIns="0" tIns="0" rIns="0" bIns="0" rtlCol="0" anchor="ctr"/>
+          <a:lstStyle/>
+          <a:p>
+            <a:pPr indent="0" marL="0">
+              <a:buNone/>
+            </a:pPr>
+            <a:r>
+              <a:rPr lang="en-US" sz="850" dirty="0">
+                <a:solidFill>
+                  <a:srgbClr val="7A6000"/>
+                </a:solidFill>
+                <a:latin typeface="Calibri" pitchFamily="34" charset="0"/>
+                <a:ea typeface="Calibri" pitchFamily="34" charset="-122"/>
+                <a:cs typeface="Calibri" pitchFamily="34" charset="-120"/>
+              </a:rPr>
+              <a:t>S3: pos-original/oc/</a:t>
+            </a:r>
+            <a:endParaRPr lang="en-US" sz="850" dirty="0"/>
+          </a:p>
+        </p:txBody>
+      </p:sp>
+      <p:sp>
+        <p:nvSpPr>
+          <p:cNvPr id="17" name="Shape 12"/>
+          <p:cNvSpPr/>
+          <p:nvPr/>
+        </p:nvSpPr>
+        <p:spPr>
+          <a:xfrm>
+            <a:off x="320040" y="2743200"/>
+            <a:ext cx="2834640" cy="320040"/>
+          </a:xfrm>
+          <a:prstGeom prst="rect">
+            <a:avLst/>
+          </a:prstGeom>
+          <a:solidFill>
+            <a:srgbClr val="FDEDEC"/>
+          </a:solidFill>
+          <a:ln w="12700">
+            <a:solidFill>
+              <a:srgbClr val="E74C3C"/>
+            </a:solidFill>
+            <a:prstDash val="solid"/>
+          </a:ln>
+        </p:spPr>
+      </p:sp>
+      <p:sp>
+        <p:nvSpPr>
+          <p:cNvPr id="18" name="Text 13"/>
+          <p:cNvSpPr/>
+          <p:nvPr/>
+        </p:nvSpPr>
+        <p:spPr>
+          <a:xfrm>
+            <a:off x="365760" y="2761488"/>
+            <a:ext cx="2743200" cy="283464"/>
+          </a:xfrm>
+          <a:prstGeom prst="rect">
+            <a:avLst/>
+          </a:prstGeom>
+          <a:noFill/>
+          <a:ln/>
+        </p:spPr>
+        <p:txBody>
+          <a:bodyPr wrap="square" lIns="0" tIns="0" rIns="0" bIns="0" rtlCol="0" anchor="ctr"/>
+          <a:lstStyle/>
+          <a:p>
+            <a:pPr indent="0" marL="0">
+              <a:buNone/>
+            </a:pPr>
+            <a:r>
+              <a:rPr lang="en-US" sz="850" dirty="0">
+                <a:solidFill>
+                  <a:srgbClr val="C0392B"/>
+                </a:solidFill>
+                <a:latin typeface="Calibri" pitchFamily="34" charset="0"/>
+                <a:ea typeface="Calibri" pitchFamily="34" charset="-122"/>
+                <a:cs typeface="Calibri" pitchFamily="34" charset="-120"/>
+              </a:rPr>
+              <a:t>S3 Object Created: P001.END ファイル着地</a:t>
+            </a:r>
+            <a:endParaRPr lang="en-US" sz="850" dirty="0"/>
+          </a:p>
+        </p:txBody>
+      </p:sp>
+      <p:sp>
+        <p:nvSpPr>
+          <p:cNvPr id="19" name="Text 14"/>
+          <p:cNvSpPr/>
+          <p:nvPr/>
+        </p:nvSpPr>
+        <p:spPr>
+          <a:xfrm>
+            <a:off x="320040" y="3099816"/>
+            <a:ext cx="2834640" cy="228600"/>
+          </a:xfrm>
+          <a:prstGeom prst="rect">
+            <a:avLst/>
+          </a:prstGeom>
+          <a:noFill/>
+          <a:ln/>
+        </p:spPr>
+        <p:txBody>
+          <a:bodyPr wrap="square" lIns="0" tIns="0" rIns="0" bIns="0" rtlCol="0" anchor="ctr"/>
+          <a:lstStyle/>
+          <a:p>
+            <a:pPr algn="ctr" indent="0" marL="0">
+              <a:buNone/>
+            </a:pPr>
+            <a:r>
+              <a:rPr lang="en-US" sz="800" dirty="0">
+                <a:solidFill>
+                  <a:srgbClr val="555555"/>
+                </a:solidFill>
+                <a:latin typeface="Calibri" pitchFamily="34" charset="0"/>
+                <a:ea typeface="Calibri" pitchFamily="34" charset="-122"/>
+                <a:cs typeface="Calibri" pitchFamily="34" charset="-120"/>
+              </a:rPr>
+              <a:t>▼ EventBridge → StepFunction</a:t>
+            </a:r>
+            <a:endParaRPr lang="en-US" sz="800" dirty="0"/>
+          </a:p>
+        </p:txBody>
+      </p:sp>
+      <p:sp>
+        <p:nvSpPr>
+          <p:cNvPr id="20" name="Shape 15"/>
+          <p:cNvSpPr/>
+          <p:nvPr/>
+        </p:nvSpPr>
+        <p:spPr>
+          <a:xfrm>
+            <a:off x="320040" y="3346704"/>
+            <a:ext cx="2834640" cy="960120"/>
+          </a:xfrm>
+          <a:prstGeom prst="rect">
+            <a:avLst/>
+          </a:prstGeom>
+          <a:solidFill>
+            <a:srgbClr val="F0FFF0"/>
+          </a:solidFill>
+          <a:ln w="12700">
+            <a:solidFill>
+              <a:srgbClr val="1E6E9F"/>
+            </a:solidFill>
+            <a:prstDash val="solid"/>
+          </a:ln>
+        </p:spPr>
+      </p:sp>
+      <p:sp>
+        <p:nvSpPr>
+          <p:cNvPr id="21" name="Text 16"/>
+          <p:cNvSpPr/>
+          <p:nvPr/>
+        </p:nvSpPr>
+        <p:spPr>
+          <a:xfrm>
+            <a:off x="365760" y="3364992"/>
+            <a:ext cx="2743200" cy="923544"/>
+          </a:xfrm>
+          <a:prstGeom prst="rect">
+            <a:avLst/>
+          </a:prstGeom>
+          <a:noFill/>
+          <a:ln/>
+        </p:spPr>
+        <p:txBody>
+          <a:bodyPr wrap="square" lIns="0" tIns="0" rIns="0" bIns="0" rtlCol="0" anchor="ctr"/>
+          <a:lstStyle/>
+          <a:p>
+            <a:pPr indent="0" marL="0">
+              <a:buNone/>
+            </a:pPr>
+            <a:r>
+              <a:rPr lang="en-US" sz="850" dirty="0">
+                <a:solidFill>
+                  <a:srgbClr val="333333"/>
+                </a:solidFill>
+                <a:latin typeface="Calibri" pitchFamily="34" charset="0"/>
+                <a:ea typeface="Calibri" pitchFamily="34" charset="-122"/>
+                <a:cs typeface="Calibri" pitchFamily="34" charset="-120"/>
+              </a:rPr>
+              <a:t>Lambda: CSV分割(店舗別)</a:t>
+            </a:r>
+            <a:endParaRPr lang="en-US" sz="850" dirty="0"/>
+          </a:p>
+          <a:p>
+            <a:pPr indent="0" marL="0">
+              <a:buNone/>
+            </a:pPr>
+            <a:r>
+              <a:rPr lang="en-US" sz="850" dirty="0">
+                <a:solidFill>
+                  <a:srgbClr val="333333"/>
+                </a:solidFill>
+                <a:latin typeface="Calibri" pitchFamily="34" charset="0"/>
+                <a:ea typeface="Calibri" pitchFamily="34" charset="-122"/>
+                <a:cs typeface="Calibri" pitchFamily="34" charset="-120"/>
+              </a:rPr>
+              <a:t>ECS: Aurora MySQL INSERT/UPDATE</a:t>
+            </a:r>
+            <a:endParaRPr lang="en-US" sz="850" dirty="0"/>
+          </a:p>
+          <a:p>
+            <a:pPr indent="0" marL="0">
+              <a:buNone/>
+            </a:pPr>
+            <a:r>
+              <a:rPr lang="en-US" sz="850" dirty="0">
+                <a:solidFill>
+                  <a:srgbClr val="333333"/>
+                </a:solidFill>
+                <a:latin typeface="Calibri" pitchFamily="34" charset="0"/>
+                <a:ea typeface="Calibri" pitchFamily="34" charset="-122"/>
+                <a:cs typeface="Calibri" pitchFamily="34" charset="-120"/>
+              </a:rPr>
+              <a:t>ENDIMPORT生成 → BOX-PCへTXT送信</a:t>
+            </a:r>
+            <a:endParaRPr lang="en-US" sz="850" dirty="0"/>
+          </a:p>
+        </p:txBody>
+      </p:sp>
+      <p:sp>
+        <p:nvSpPr>
+          <p:cNvPr id="22" name="Text 17"/>
+          <p:cNvSpPr/>
+          <p:nvPr/>
+        </p:nvSpPr>
+        <p:spPr>
+          <a:xfrm>
+            <a:off x="320040" y="4343400"/>
+            <a:ext cx="2834640" cy="201168"/>
+          </a:xfrm>
+          <a:prstGeom prst="rect">
+            <a:avLst/>
+          </a:prstGeom>
+          <a:noFill/>
+          <a:ln/>
+        </p:spPr>
+        <p:txBody>
+          <a:bodyPr wrap="square" lIns="0" tIns="0" rIns="0" bIns="0" rtlCol="0" anchor="ctr"/>
+          <a:lstStyle/>
+          <a:p>
+            <a:pPr algn="ctr" indent="0" marL="0">
+              <a:buNone/>
+            </a:pPr>
+            <a:r>
+              <a:rPr lang="en-US" sz="1000" dirty="0">
+                <a:solidFill>
+                  <a:srgbClr val="1E6E9F"/>
+                </a:solidFill>
+                <a:latin typeface="Calibri" pitchFamily="34" charset="0"/>
+                <a:ea typeface="Calibri" pitchFamily="34" charset="-122"/>
+                <a:cs typeface="Calibri" pitchFamily="34" charset="-120"/>
+              </a:rPr>
+              <a:t>▼</a:t>
+            </a:r>
+            <a:endParaRPr lang="en-US" sz="1000" dirty="0"/>
+          </a:p>
+        </p:txBody>
+      </p:sp>
+      <p:sp>
+        <p:nvSpPr>
+          <p:cNvPr id="23" name="Shape 18"/>
+          <p:cNvSpPr/>
+          <p:nvPr/>
+        </p:nvSpPr>
+        <p:spPr>
+          <a:xfrm>
+            <a:off x="320040" y="4544568"/>
+            <a:ext cx="2834640" cy="347472"/>
+          </a:xfrm>
+          <a:prstGeom prst="rect">
+            <a:avLst/>
+          </a:prstGeom>
+          <a:solidFill>
+            <a:srgbClr val="D0232A"/>
+          </a:solidFill>
+          <a:ln w="12700">
+            <a:solidFill>
+              <a:srgbClr val="D0232A"/>
+            </a:solidFill>
+            <a:prstDash val="solid"/>
+          </a:ln>
+        </p:spPr>
+      </p:sp>
+      <p:sp>
+        <p:nvSpPr>
+          <p:cNvPr id="24" name="Text 19"/>
+          <p:cNvSpPr/>
+          <p:nvPr/>
+        </p:nvSpPr>
+        <p:spPr>
+          <a:xfrm>
+            <a:off x="320040" y="4544568"/>
+            <a:ext cx="2834640" cy="347472"/>
+          </a:xfrm>
+          <a:prstGeom prst="rect">
+            <a:avLst/>
+          </a:prstGeom>
+          <a:noFill/>
+          <a:ln/>
+        </p:spPr>
+        <p:txBody>
+          <a:bodyPr wrap="square" lIns="0" tIns="0" rIns="0" bIns="0" rtlCol="0" anchor="ctr"/>
+          <a:lstStyle/>
+          <a:p>
+            <a:pPr algn="ctr" indent="0" marL="0">
+              <a:buNone/>
+            </a:pPr>
+            <a:r>
+              <a:rPr lang="en-US" sz="850" b="1" dirty="0">
+                <a:solidFill>
+                  <a:srgbClr val="FFFFFF"/>
+                </a:solidFill>
+                <a:latin typeface="Calibri" pitchFamily="34" charset="0"/>
+                <a:ea typeface="Calibri" pitchFamily="34" charset="-122"/>
+                <a:cs typeface="Calibri" pitchFamily="34" charset="-120"/>
+              </a:rPr>
+              <a:t>Aurora MySQL 8.0 (Replica_Kasumi)</a:t>
+            </a:r>
+            <a:endParaRPr lang="en-US" sz="850" dirty="0"/>
+          </a:p>
+        </p:txBody>
+      </p:sp>
+      <p:sp>
+        <p:nvSpPr>
+          <p:cNvPr id="25" name="Shape 20"/>
+          <p:cNvSpPr/>
+          <p:nvPr/>
+        </p:nvSpPr>
+        <p:spPr>
+          <a:xfrm>
+            <a:off x="3429000" y="1508760"/>
+            <a:ext cx="2834640" cy="274320"/>
+          </a:xfrm>
+          <a:prstGeom prst="rect">
+            <a:avLst/>
+          </a:prstGeom>
+          <a:solidFill>
+            <a:srgbClr val="2E7D32"/>
+          </a:solidFill>
+          <a:ln w="12700">
+            <a:solidFill>
+              <a:srgbClr val="2E7D32"/>
+            </a:solidFill>
+            <a:prstDash val="solid"/>
+          </a:ln>
+        </p:spPr>
+      </p:sp>
+      <p:sp>
+        <p:nvSpPr>
+          <p:cNvPr id="26" name="Text 21"/>
+          <p:cNvSpPr/>
+          <p:nvPr/>
+        </p:nvSpPr>
+        <p:spPr>
+          <a:xfrm>
+            <a:off x="3429000" y="1508760"/>
+            <a:ext cx="2834640" cy="274320"/>
+          </a:xfrm>
+          <a:prstGeom prst="rect">
+            <a:avLst/>
+          </a:prstGeom>
+          <a:noFill/>
+          <a:ln/>
+        </p:spPr>
+        <p:txBody>
+          <a:bodyPr wrap="square" lIns="0" tIns="0" rIns="0" bIns="0" rtlCol="0" anchor="ctr"/>
+          <a:lstStyle/>
+          <a:p>
+            <a:pPr algn="ctr" indent="0" marL="0">
+              <a:buNone/>
+            </a:pPr>
+            <a:r>
+              <a:rPr lang="en-US" sz="1100" b="1" dirty="0">
+                <a:solidFill>
+                  <a:srgbClr val="FFFFFF"/>
+                </a:solidFill>
+                <a:latin typeface="Calibri" pitchFamily="34" charset="0"/>
+                <a:ea typeface="Calibri" pitchFamily="34" charset="-122"/>
+                <a:cs typeface="Calibri" pitchFamily="34" charset="-120"/>
+              </a:rPr>
+              <a:t>SG フロー</a:t>
+            </a:r>
+            <a:endParaRPr lang="en-US" sz="1100" dirty="0"/>
+          </a:p>
+        </p:txBody>
+      </p:sp>
+      <p:sp>
+        <p:nvSpPr>
+          <p:cNvPr id="27" name="Shape 22"/>
+          <p:cNvSpPr/>
+          <p:nvPr/>
+        </p:nvSpPr>
+        <p:spPr>
+          <a:xfrm>
+            <a:off x="3429000" y="1828800"/>
+            <a:ext cx="2834640" cy="502920"/>
+          </a:xfrm>
+          <a:prstGeom prst="rect">
+            <a:avLst/>
+          </a:prstGeom>
+          <a:solidFill>
+            <a:srgbClr val="EBF5FB"/>
+          </a:solidFill>
+          <a:ln w="12700">
+            <a:solidFill>
+              <a:srgbClr val="2E7D32"/>
+            </a:solidFill>
+            <a:prstDash val="solid"/>
+          </a:ln>
+        </p:spPr>
+      </p:sp>
+      <p:sp>
+        <p:nvSpPr>
+          <p:cNvPr id="28" name="Text 23"/>
+          <p:cNvSpPr/>
+          <p:nvPr/>
+        </p:nvSpPr>
+        <p:spPr>
+          <a:xfrm>
+            <a:off x="3474720" y="1847088"/>
+            <a:ext cx="2743200" cy="466344"/>
+          </a:xfrm>
+          <a:prstGeom prst="rect">
+            <a:avLst/>
+          </a:prstGeom>
+          <a:noFill/>
+          <a:ln/>
+        </p:spPr>
+        <p:txBody>
+          <a:bodyPr wrap="square" lIns="0" tIns="0" rIns="0" bIns="0" rtlCol="0" anchor="ctr"/>
+          <a:lstStyle/>
+          <a:p>
+            <a:pPr indent="0" marL="0">
+              <a:buNone/>
+            </a:pPr>
+            <a:r>
+              <a:rPr lang="en-US" sz="900" dirty="0">
+                <a:solidFill>
+                  <a:srgbClr val="2E7D32"/>
+                </a:solidFill>
+                <a:latin typeface="Calibri" pitchFamily="34" charset="0"/>
+                <a:ea typeface="Calibri" pitchFamily="34" charset="-122"/>
+                <a:cs typeface="Calibri" pitchFamily="34" charset="-120"/>
+              </a:rPr>
+              <a:t>連携元: POSデータ / VINX・PosSserver</a:t>
+            </a:r>
+            <a:endParaRPr lang="en-US" sz="900" dirty="0"/>
+          </a:p>
+        </p:txBody>
+      </p:sp>
+      <p:sp>
+        <p:nvSpPr>
+          <p:cNvPr id="29" name="Shape 24"/>
+          <p:cNvSpPr/>
+          <p:nvPr/>
+        </p:nvSpPr>
+        <p:spPr>
+          <a:xfrm>
+            <a:off x="3429000" y="2377440"/>
+            <a:ext cx="2834640" cy="320040"/>
+          </a:xfrm>
+          <a:prstGeom prst="rect">
+            <a:avLst/>
+          </a:prstGeom>
+          <a:solidFill>
+            <a:srgbClr val="FFF9E6"/>
+          </a:solidFill>
+          <a:ln w="12700">
+            <a:solidFill>
+              <a:srgbClr val="CCAA00"/>
+            </a:solidFill>
+            <a:prstDash val="solid"/>
+          </a:ln>
+        </p:spPr>
+      </p:sp>
+      <p:sp>
+        <p:nvSpPr>
+          <p:cNvPr id="30" name="Text 25"/>
+          <p:cNvSpPr/>
+          <p:nvPr/>
+        </p:nvSpPr>
+        <p:spPr>
+          <a:xfrm>
+            <a:off x="3474720" y="2395728"/>
+            <a:ext cx="2743200" cy="283464"/>
+          </a:xfrm>
+          <a:prstGeom prst="rect">
+            <a:avLst/>
+          </a:prstGeom>
+          <a:noFill/>
+          <a:ln/>
+        </p:spPr>
+        <p:txBody>
+          <a:bodyPr wrap="square" lIns="0" tIns="0" rIns="0" bIns="0" rtlCol="0" anchor="ctr"/>
+          <a:lstStyle/>
+          <a:p>
+            <a:pPr indent="0" marL="0">
+              <a:buNone/>
+            </a:pPr>
+            <a:r>
+              <a:rPr lang="en-US" sz="850" dirty="0">
+                <a:solidFill>
+                  <a:srgbClr val="7A6000"/>
+                </a:solidFill>
+                <a:latin typeface="Calibri" pitchFamily="34" charset="0"/>
+                <a:ea typeface="Calibri" pitchFamily="34" charset="-122"/>
+                <a:cs typeface="Calibri" pitchFamily="34" charset="-120"/>
+              </a:rPr>
+              <a:t>S3: pos-original/sg/receive/</a:t>
+            </a:r>
+            <a:endParaRPr lang="en-US" sz="850" dirty="0"/>
+          </a:p>
+        </p:txBody>
+      </p:sp>
+      <p:sp>
+        <p:nvSpPr>
+          <p:cNvPr id="31" name="Shape 26"/>
+          <p:cNvSpPr/>
+          <p:nvPr/>
+        </p:nvSpPr>
+        <p:spPr>
+          <a:xfrm>
+            <a:off x="3429000" y="2743200"/>
+            <a:ext cx="2834640" cy="320040"/>
+          </a:xfrm>
+          <a:prstGeom prst="rect">
+            <a:avLst/>
+          </a:prstGeom>
+          <a:solidFill>
+            <a:srgbClr val="FDEDEC"/>
+          </a:solidFill>
+          <a:ln w="12700">
+            <a:solidFill>
+              <a:srgbClr val="E74C3C"/>
+            </a:solidFill>
+            <a:prstDash val="solid"/>
+          </a:ln>
+        </p:spPr>
+      </p:sp>
+      <p:sp>
+        <p:nvSpPr>
+          <p:cNvPr id="32" name="Text 27"/>
+          <p:cNvSpPr/>
+          <p:nvPr/>
+        </p:nvSpPr>
+        <p:spPr>
+          <a:xfrm>
+            <a:off x="3474720" y="2761488"/>
+            <a:ext cx="2743200" cy="283464"/>
+          </a:xfrm>
+          <a:prstGeom prst="rect">
+            <a:avLst/>
+          </a:prstGeom>
+          <a:noFill/>
+          <a:ln/>
+        </p:spPr>
+        <p:txBody>
+          <a:bodyPr wrap="square" lIns="0" tIns="0" rIns="0" bIns="0" rtlCol="0" anchor="ctr"/>
+          <a:lstStyle/>
+          <a:p>
+            <a:pPr indent="0" marL="0">
+              <a:buNone/>
+            </a:pPr>
+            <a:r>
+              <a:rPr lang="en-US" sz="850" dirty="0">
+                <a:solidFill>
+                  <a:srgbClr val="C0392B"/>
+                </a:solidFill>
+                <a:latin typeface="Calibri" pitchFamily="34" charset="0"/>
+                <a:ea typeface="Calibri" pitchFamily="34" charset="-122"/>
+                <a:cs typeface="Calibri" pitchFamily="34" charset="-120"/>
+              </a:rPr>
+              <a:t>S3 Object Created: *.ZIP ファイル着地</a:t>
+            </a:r>
+            <a:endParaRPr lang="en-US" sz="850" dirty="0"/>
+          </a:p>
+        </p:txBody>
+      </p:sp>
+      <p:sp>
+        <p:nvSpPr>
+          <p:cNvPr id="33" name="Text 28"/>
+          <p:cNvSpPr/>
+          <p:nvPr/>
+        </p:nvSpPr>
+        <p:spPr>
+          <a:xfrm>
+            <a:off x="3429000" y="3099816"/>
+            <a:ext cx="2834640" cy="228600"/>
+          </a:xfrm>
+          <a:prstGeom prst="rect">
+            <a:avLst/>
+          </a:prstGeom>
+          <a:noFill/>
+          <a:ln/>
+        </p:spPr>
+        <p:txBody>
+          <a:bodyPr wrap="square" lIns="0" tIns="0" rIns="0" bIns="0" rtlCol="0" anchor="ctr"/>
+          <a:lstStyle/>
+          <a:p>
+            <a:pPr algn="ctr" indent="0" marL="0">
+              <a:buNone/>
+            </a:pPr>
+            <a:r>
+              <a:rPr lang="en-US" sz="800" dirty="0">
+                <a:solidFill>
+                  <a:srgbClr val="555555"/>
+                </a:solidFill>
+                <a:latin typeface="Calibri" pitchFamily="34" charset="0"/>
+                <a:ea typeface="Calibri" pitchFamily="34" charset="-122"/>
+                <a:cs typeface="Calibri" pitchFamily="34" charset="-120"/>
+              </a:rPr>
+              <a:t>▼ EventBridge → StepFunction</a:t>
+            </a:r>
+            <a:endParaRPr lang="en-US" sz="800" dirty="0"/>
+          </a:p>
+        </p:txBody>
+      </p:sp>
+      <p:sp>
+        <p:nvSpPr>
+          <p:cNvPr id="34" name="Shape 29"/>
+          <p:cNvSpPr/>
+          <p:nvPr/>
+        </p:nvSpPr>
+        <p:spPr>
+          <a:xfrm>
+            <a:off x="3429000" y="3346704"/>
+            <a:ext cx="2834640" cy="960120"/>
+          </a:xfrm>
+          <a:prstGeom prst="rect">
+            <a:avLst/>
+          </a:prstGeom>
+          <a:solidFill>
+            <a:srgbClr val="F0FFF0"/>
+          </a:solidFill>
+          <a:ln w="12700">
+            <a:solidFill>
+              <a:srgbClr val="2E7D32"/>
+            </a:solidFill>
+            <a:prstDash val="solid"/>
+          </a:ln>
+        </p:spPr>
+      </p:sp>
+      <p:sp>
+        <p:nvSpPr>
+          <p:cNvPr id="35" name="Text 30"/>
+          <p:cNvSpPr/>
+          <p:nvPr/>
+        </p:nvSpPr>
+        <p:spPr>
+          <a:xfrm>
+            <a:off x="3474720" y="3364992"/>
+            <a:ext cx="2743200" cy="923544"/>
+          </a:xfrm>
+          <a:prstGeom prst="rect">
+            <a:avLst/>
+          </a:prstGeom>
+          <a:noFill/>
+          <a:ln/>
+        </p:spPr>
+        <p:txBody>
+          <a:bodyPr wrap="square" lIns="0" tIns="0" rIns="0" bIns="0" rtlCol="0" anchor="ctr"/>
+          <a:lstStyle/>
+          <a:p>
+            <a:pPr indent="0" marL="0">
+              <a:buNone/>
+            </a:pPr>
+            <a:r>
+              <a:rPr lang="en-US" sz="850" dirty="0">
+                <a:solidFill>
+                  <a:srgbClr val="333333"/>
+                </a:solidFill>
+                <a:latin typeface="Calibri" pitchFamily="34" charset="0"/>
+                <a:ea typeface="Calibri" pitchFamily="34" charset="-122"/>
+                <a:cs typeface="Calibri" pitchFamily="34" charset="-120"/>
+              </a:rPr>
+              <a:t>Lambda: ZIP展開・テーブル別移動</a:t>
+            </a:r>
+            <a:endParaRPr lang="en-US" sz="850" dirty="0"/>
+          </a:p>
+          <a:p>
+            <a:pPr indent="0" marL="0">
+              <a:buNone/>
+            </a:pPr>
+            <a:r>
+              <a:rPr lang="en-US" sz="850" dirty="0">
+                <a:solidFill>
+                  <a:srgbClr val="333333"/>
+                </a:solidFill>
+                <a:latin typeface="Calibri" pitchFamily="34" charset="0"/>
+                <a:ea typeface="Calibri" pitchFamily="34" charset="-122"/>
+                <a:cs typeface="Calibri" pitchFamily="34" charset="-120"/>
+              </a:rPr>
+              <a:t>ECS: Aurora MySQL INSERT/UPDATE</a:t>
+            </a:r>
+            <a:endParaRPr lang="en-US" sz="850" dirty="0"/>
+          </a:p>
+          <a:p>
+            <a:pPr indent="0" marL="0">
+              <a:buNone/>
+            </a:pPr>
+            <a:r>
+              <a:rPr lang="en-US" sz="850" dirty="0">
+                <a:solidFill>
+                  <a:srgbClr val="333333"/>
+                </a:solidFill>
+                <a:latin typeface="Calibri" pitchFamily="34" charset="0"/>
+                <a:ea typeface="Calibri" pitchFamily="34" charset="-122"/>
+                <a:cs typeface="Calibri" pitchFamily="34" charset="-120"/>
+              </a:rPr>
+              <a:t>ENDEXPORT生成 → BOX-PCへTXT送信</a:t>
+            </a:r>
+            <a:endParaRPr lang="en-US" sz="850" dirty="0"/>
+          </a:p>
+        </p:txBody>
+      </p:sp>
+      <p:sp>
+        <p:nvSpPr>
+          <p:cNvPr id="36" name="Text 31"/>
+          <p:cNvSpPr/>
+          <p:nvPr/>
+        </p:nvSpPr>
+        <p:spPr>
+          <a:xfrm>
+            <a:off x="3429000" y="4343400"/>
+            <a:ext cx="2834640" cy="201168"/>
+          </a:xfrm>
+          <a:prstGeom prst="rect">
+            <a:avLst/>
+          </a:prstGeom>
+          <a:noFill/>
+          <a:ln/>
+        </p:spPr>
+        <p:txBody>
+          <a:bodyPr wrap="square" lIns="0" tIns="0" rIns="0" bIns="0" rtlCol="0" anchor="ctr"/>
+          <a:lstStyle/>
+          <a:p>
+            <a:pPr algn="ctr" indent="0" marL="0">
+              <a:buNone/>
+            </a:pPr>
+            <a:r>
+              <a:rPr lang="en-US" sz="1000" dirty="0">
+                <a:solidFill>
+                  <a:srgbClr val="2E7D32"/>
+                </a:solidFill>
+                <a:latin typeface="Calibri" pitchFamily="34" charset="0"/>
+                <a:ea typeface="Calibri" pitchFamily="34" charset="-122"/>
+                <a:cs typeface="Calibri" pitchFamily="34" charset="-120"/>
+              </a:rPr>
+              <a:t>▼</a:t>
+            </a:r>
+            <a:endParaRPr lang="en-US" sz="1000" dirty="0"/>
+          </a:p>
+        </p:txBody>
+      </p:sp>
+      <p:sp>
+        <p:nvSpPr>
+          <p:cNvPr id="37" name="Shape 32"/>
+          <p:cNvSpPr/>
+          <p:nvPr/>
+        </p:nvSpPr>
+        <p:spPr>
+          <a:xfrm>
+            <a:off x="3429000" y="4544568"/>
+            <a:ext cx="2834640" cy="347472"/>
+          </a:xfrm>
+          <a:prstGeom prst="rect">
+            <a:avLst/>
+          </a:prstGeom>
+          <a:solidFill>
+            <a:srgbClr val="D0232A"/>
+          </a:solidFill>
+          <a:ln w="12700">
+            <a:solidFill>
+              <a:srgbClr val="D0232A"/>
+            </a:solidFill>
+            <a:prstDash val="solid"/>
+          </a:ln>
+        </p:spPr>
+      </p:sp>
+      <p:sp>
+        <p:nvSpPr>
+          <p:cNvPr id="38" name="Text 33"/>
+          <p:cNvSpPr/>
+          <p:nvPr/>
+        </p:nvSpPr>
+        <p:spPr>
+          <a:xfrm>
+            <a:off x="3429000" y="4544568"/>
+            <a:ext cx="2834640" cy="347472"/>
+          </a:xfrm>
+          <a:prstGeom prst="rect">
+            <a:avLst/>
+          </a:prstGeom>
+          <a:noFill/>
+          <a:ln/>
+        </p:spPr>
+        <p:txBody>
+          <a:bodyPr wrap="square" lIns="0" tIns="0" rIns="0" bIns="0" rtlCol="0" anchor="ctr"/>
+          <a:lstStyle/>
+          <a:p>
+            <a:pPr algn="ctr" indent="0" marL="0">
+              <a:buNone/>
+            </a:pPr>
+            <a:r>
+              <a:rPr lang="en-US" sz="850" b="1" dirty="0">
+                <a:solidFill>
+                  <a:srgbClr val="FFFFFF"/>
+                </a:solidFill>
+                <a:latin typeface="Calibri" pitchFamily="34" charset="0"/>
+                <a:ea typeface="Calibri" pitchFamily="34" charset="-122"/>
+                <a:cs typeface="Calibri" pitchFamily="34" charset="-120"/>
+              </a:rPr>
+              <a:t>Aurora MySQL 8.0 (Replica_Kasumi)</a:t>
+            </a:r>
+            <a:endParaRPr lang="en-US" sz="850" dirty="0"/>
+          </a:p>
+        </p:txBody>
+      </p:sp>
+      <p:sp>
+        <p:nvSpPr>
+          <p:cNvPr id="39" name="Shape 34"/>
+          <p:cNvSpPr/>
+          <p:nvPr/>
+        </p:nvSpPr>
+        <p:spPr>
+          <a:xfrm>
+            <a:off x="6537960" y="1508760"/>
+            <a:ext cx="2834640" cy="274320"/>
+          </a:xfrm>
+          <a:prstGeom prst="rect">
+            <a:avLst/>
+          </a:prstGeom>
+          <a:solidFill>
+            <a:srgbClr val="7B3F00"/>
+          </a:solidFill>
+          <a:ln w="12700">
+            <a:solidFill>
+              <a:srgbClr val="7B3F00"/>
+            </a:solidFill>
+            <a:prstDash val="solid"/>
+          </a:ln>
+        </p:spPr>
+      </p:sp>
+      <p:sp>
+        <p:nvSpPr>
+          <p:cNvPr id="40" name="Text 35"/>
+          <p:cNvSpPr/>
+          <p:nvPr/>
+        </p:nvSpPr>
+        <p:spPr>
+          <a:xfrm>
+            <a:off x="6537960" y="1508760"/>
+            <a:ext cx="2834640" cy="274320"/>
+          </a:xfrm>
+          <a:prstGeom prst="rect">
+            <a:avLst/>
+          </a:prstGeom>
+          <a:noFill/>
+          <a:ln/>
+        </p:spPr>
+        <p:txBody>
+          <a:bodyPr wrap="square" lIns="0" tIns="0" rIns="0" bIns="0" rtlCol="0" anchor="ctr"/>
+          <a:lstStyle/>
+          <a:p>
+            <a:pPr algn="ctr" indent="0" marL="0">
+              <a:buNone/>
+            </a:pPr>
+            <a:r>
+              <a:rPr lang="en-US" sz="1100" b="1" dirty="0">
+                <a:solidFill>
+                  <a:srgbClr val="FFFFFF"/>
+                </a:solidFill>
+                <a:latin typeface="Calibri" pitchFamily="34" charset="0"/>
+                <a:ea typeface="Calibri" pitchFamily="34" charset="-122"/>
+                <a:cs typeface="Calibri" pitchFamily="34" charset="-120"/>
+              </a:rPr>
+              <a:t>SH フロー</a:t>
+            </a:r>
+            <a:endParaRPr lang="en-US" sz="1100" dirty="0"/>
+          </a:p>
+        </p:txBody>
+      </p:sp>
+      <p:sp>
+        <p:nvSpPr>
+          <p:cNvPr id="41" name="Shape 36"/>
+          <p:cNvSpPr/>
+          <p:nvPr/>
+        </p:nvSpPr>
+        <p:spPr>
+          <a:xfrm>
+            <a:off x="6537960" y="1828800"/>
+            <a:ext cx="2834640" cy="502920"/>
+          </a:xfrm>
+          <a:prstGeom prst="rect">
+            <a:avLst/>
+          </a:prstGeom>
+          <a:solidFill>
+            <a:srgbClr val="EBF5FB"/>
+          </a:solidFill>
+          <a:ln w="12700">
+            <a:solidFill>
+              <a:srgbClr val="7B3F00"/>
+            </a:solidFill>
+            <a:prstDash val="solid"/>
+          </a:ln>
+        </p:spPr>
+      </p:sp>
+      <p:sp>
+        <p:nvSpPr>
+          <p:cNvPr id="42" name="Text 37"/>
+          <p:cNvSpPr/>
+          <p:nvPr/>
+        </p:nvSpPr>
+        <p:spPr>
+          <a:xfrm>
+            <a:off x="6583680" y="1847088"/>
+            <a:ext cx="2743200" cy="466344"/>
+          </a:xfrm>
+          <a:prstGeom prst="rect">
+            <a:avLst/>
+          </a:prstGeom>
+          <a:noFill/>
+          <a:ln/>
+        </p:spPr>
+        <p:txBody>
+          <a:bodyPr wrap="square" lIns="0" tIns="0" rIns="0" bIns="0" rtlCol="0" anchor="ctr"/>
+          <a:lstStyle/>
+          <a:p>
+            <a:pPr indent="0" marL="0">
+              <a:buNone/>
+            </a:pPr>
+            <a:r>
+              <a:rPr lang="en-US" sz="900" dirty="0">
+                <a:solidFill>
+                  <a:srgbClr val="7B3F00"/>
+                </a:solidFill>
+                <a:latin typeface="Calibri" pitchFamily="34" charset="0"/>
+                <a:ea typeface="Calibri" pitchFamily="34" charset="-122"/>
+                <a:cs typeface="Calibri" pitchFamily="34" charset="-120"/>
+              </a:rPr>
+              <a:t>連携元: 棚情報 / SHARP・P003</a:t>
+            </a:r>
+            <a:endParaRPr lang="en-US" sz="900" dirty="0"/>
+          </a:p>
+        </p:txBody>
+      </p:sp>
+      <p:sp>
+        <p:nvSpPr>
+          <p:cNvPr id="43" name="Shape 38"/>
+          <p:cNvSpPr/>
+          <p:nvPr/>
+        </p:nvSpPr>
+        <p:spPr>
+          <a:xfrm>
+            <a:off x="6537960" y="2377440"/>
+            <a:ext cx="2834640" cy="320040"/>
+          </a:xfrm>
+          <a:prstGeom prst="rect">
+            <a:avLst/>
+          </a:prstGeom>
+          <a:solidFill>
+            <a:srgbClr val="FFF9E6"/>
+          </a:solidFill>
+          <a:ln w="12700">
+            <a:solidFill>
+              <a:srgbClr val="CCAA00"/>
+            </a:solidFill>
+            <a:prstDash val="solid"/>
+          </a:ln>
+        </p:spPr>
+      </p:sp>
+      <p:sp>
+        <p:nvSpPr>
+          <p:cNvPr id="44" name="Text 39"/>
+          <p:cNvSpPr/>
+          <p:nvPr/>
+        </p:nvSpPr>
+        <p:spPr>
+          <a:xfrm>
+            <a:off x="6583680" y="2395728"/>
+            <a:ext cx="2743200" cy="283464"/>
+          </a:xfrm>
+          <a:prstGeom prst="rect">
+            <a:avLst/>
+          </a:prstGeom>
+          <a:noFill/>
+          <a:ln/>
+        </p:spPr>
+        <p:txBody>
+          <a:bodyPr wrap="square" lIns="0" tIns="0" rIns="0" bIns="0" rtlCol="0" anchor="ctr"/>
+          <a:lstStyle/>
+          <a:p>
+            <a:pPr indent="0" marL="0">
+              <a:buNone/>
+            </a:pPr>
+            <a:r>
+              <a:rPr lang="en-US" sz="850" dirty="0">
+                <a:solidFill>
+                  <a:srgbClr val="7A6000"/>
+                </a:solidFill>
+                <a:latin typeface="Calibri" pitchFamily="34" charset="0"/>
+                <a:ea typeface="Calibri" pitchFamily="34" charset="-122"/>
+                <a:cs typeface="Calibri" pitchFamily="34" charset="-120"/>
+              </a:rPr>
+              <a:t>S3: pos-original/sh/</a:t>
+            </a:r>
+            <a:endParaRPr lang="en-US" sz="850" dirty="0"/>
+          </a:p>
+        </p:txBody>
+      </p:sp>
+      <p:sp>
+        <p:nvSpPr>
+          <p:cNvPr id="45" name="Shape 40"/>
+          <p:cNvSpPr/>
+          <p:nvPr/>
+        </p:nvSpPr>
+        <p:spPr>
+          <a:xfrm>
+            <a:off x="6537960" y="2743200"/>
+            <a:ext cx="2834640" cy="320040"/>
+          </a:xfrm>
+          <a:prstGeom prst="rect">
+            <a:avLst/>
+          </a:prstGeom>
+          <a:solidFill>
+            <a:srgbClr val="FDEDEC"/>
+          </a:solidFill>
+          <a:ln w="12700">
+            <a:solidFill>
+              <a:srgbClr val="E74C3C"/>
+            </a:solidFill>
+            <a:prstDash val="solid"/>
+          </a:ln>
+        </p:spPr>
+      </p:sp>
+      <p:sp>
+        <p:nvSpPr>
+          <p:cNvPr id="46" name="Text 41"/>
+          <p:cNvSpPr/>
+          <p:nvPr/>
+        </p:nvSpPr>
+        <p:spPr>
+          <a:xfrm>
+            <a:off x="6583680" y="2761488"/>
+            <a:ext cx="2743200" cy="283464"/>
+          </a:xfrm>
+          <a:prstGeom prst="rect">
+            <a:avLst/>
+          </a:prstGeom>
+          <a:noFill/>
+          <a:ln/>
+        </p:spPr>
+        <p:txBody>
+          <a:bodyPr wrap="square" lIns="0" tIns="0" rIns="0" bIns="0" rtlCol="0" anchor="ctr"/>
+          <a:lstStyle/>
+          <a:p>
+            <a:pPr indent="0" marL="0">
+              <a:buNone/>
+            </a:pPr>
+            <a:r>
+              <a:rPr lang="en-US" sz="850" dirty="0">
+                <a:solidFill>
+                  <a:srgbClr val="C0392B"/>
+                </a:solidFill>
+                <a:latin typeface="Calibri" pitchFamily="34" charset="0"/>
+                <a:ea typeface="Calibri" pitchFamily="34" charset="-122"/>
+                <a:cs typeface="Calibri" pitchFamily="34" charset="-120"/>
+              </a:rPr>
+              <a:t>S3 Object Created: .end/.END ファイル着地</a:t>
+            </a:r>
+            <a:endParaRPr lang="en-US" sz="850" dirty="0"/>
+          </a:p>
+        </p:txBody>
+      </p:sp>
+      <p:sp>
+        <p:nvSpPr>
+          <p:cNvPr id="47" name="Text 42"/>
+          <p:cNvSpPr/>
+          <p:nvPr/>
+        </p:nvSpPr>
+        <p:spPr>
+          <a:xfrm>
+            <a:off x="6537960" y="3099816"/>
+            <a:ext cx="2834640" cy="228600"/>
+          </a:xfrm>
+          <a:prstGeom prst="rect">
+            <a:avLst/>
+          </a:prstGeom>
+          <a:noFill/>
+          <a:ln/>
+        </p:spPr>
+        <p:txBody>
+          <a:bodyPr wrap="square" lIns="0" tIns="0" rIns="0" bIns="0" rtlCol="0" anchor="ctr"/>
+          <a:lstStyle/>
+          <a:p>
+            <a:pPr algn="ctr" indent="0" marL="0">
+              <a:buNone/>
+            </a:pPr>
+            <a:r>
+              <a:rPr lang="en-US" sz="800" dirty="0">
+                <a:solidFill>
+                  <a:srgbClr val="555555"/>
+                </a:solidFill>
+                <a:latin typeface="Calibri" pitchFamily="34" charset="0"/>
+                <a:ea typeface="Calibri" pitchFamily="34" charset="-122"/>
+                <a:cs typeface="Calibri" pitchFamily="34" charset="-120"/>
+              </a:rPr>
+              <a:t>▼ EventBridge → StepFunction</a:t>
+            </a:r>
+            <a:endParaRPr lang="en-US" sz="800" dirty="0"/>
+          </a:p>
+        </p:txBody>
+      </p:sp>
+      <p:sp>
+        <p:nvSpPr>
+          <p:cNvPr id="48" name="Shape 43"/>
+          <p:cNvSpPr/>
+          <p:nvPr/>
+        </p:nvSpPr>
+        <p:spPr>
+          <a:xfrm>
+            <a:off x="6537960" y="3346704"/>
+            <a:ext cx="2834640" cy="960120"/>
+          </a:xfrm>
+          <a:prstGeom prst="rect">
+            <a:avLst/>
+          </a:prstGeom>
+          <a:solidFill>
+            <a:srgbClr val="F0FFF0"/>
+          </a:solidFill>
+          <a:ln w="12700">
+            <a:solidFill>
+              <a:srgbClr val="7B3F00"/>
+            </a:solidFill>
+            <a:prstDash val="solid"/>
+          </a:ln>
+        </p:spPr>
+      </p:sp>
+      <p:sp>
+        <p:nvSpPr>
+          <p:cNvPr id="49" name="Text 44"/>
+          <p:cNvSpPr/>
+          <p:nvPr/>
+        </p:nvSpPr>
+        <p:spPr>
+          <a:xfrm>
+            <a:off x="6583680" y="3364992"/>
+            <a:ext cx="2743200" cy="923544"/>
+          </a:xfrm>
+          <a:prstGeom prst="rect">
+            <a:avLst/>
+          </a:prstGeom>
+          <a:noFill/>
+          <a:ln/>
+        </p:spPr>
+        <p:txBody>
+          <a:bodyPr wrap="square" lIns="0" tIns="0" rIns="0" bIns="0" rtlCol="0" anchor="ctr"/>
+          <a:lstStyle/>
+          <a:p>
+            <a:pPr indent="0" marL="0">
+              <a:buNone/>
+            </a:pPr>
+            <a:r>
+              <a:rPr lang="en-US" sz="850" dirty="0">
+                <a:solidFill>
+                  <a:srgbClr val="333333"/>
+                </a:solidFill>
+                <a:latin typeface="Calibri" pitchFamily="34" charset="0"/>
+                <a:ea typeface="Calibri" pitchFamily="34" charset="-122"/>
+                <a:cs typeface="Calibri" pitchFamily="34" charset="-120"/>
+              </a:rPr>
+              <a:t>Lambda: トリガー</a:t>
+            </a:r>
+            <a:endParaRPr lang="en-US" sz="850" dirty="0"/>
+          </a:p>
+          <a:p>
+            <a:pPr indent="0" marL="0">
+              <a:buNone/>
+            </a:pPr>
+            <a:r>
+              <a:rPr lang="en-US" sz="850" dirty="0">
+                <a:solidFill>
+                  <a:srgbClr val="333333"/>
+                </a:solidFill>
+                <a:latin typeface="Calibri" pitchFamily="34" charset="0"/>
+                <a:ea typeface="Calibri" pitchFamily="34" charset="-122"/>
+                <a:cs typeface="Calibri" pitchFamily="34" charset="-120"/>
+              </a:rPr>
+              <a:t>ECS: Aurora MySQL INSERT/UPDATE</a:t>
+            </a:r>
+            <a:endParaRPr lang="en-US" sz="850" dirty="0"/>
+          </a:p>
+        </p:txBody>
+      </p:sp>
+      <p:sp>
+        <p:nvSpPr>
+          <p:cNvPr id="50" name="Text 45"/>
+          <p:cNvSpPr/>
+          <p:nvPr/>
+        </p:nvSpPr>
+        <p:spPr>
+          <a:xfrm>
+            <a:off x="6537960" y="4343400"/>
+            <a:ext cx="2834640" cy="201168"/>
+          </a:xfrm>
+          <a:prstGeom prst="rect">
+            <a:avLst/>
+          </a:prstGeom>
+          <a:noFill/>
+          <a:ln/>
+        </p:spPr>
+        <p:txBody>
+          <a:bodyPr wrap="square" lIns="0" tIns="0" rIns="0" bIns="0" rtlCol="0" anchor="ctr"/>
+          <a:lstStyle/>
+          <a:p>
+            <a:pPr algn="ctr" indent="0" marL="0">
+              <a:buNone/>
+            </a:pPr>
+            <a:r>
+              <a:rPr lang="en-US" sz="1000" dirty="0">
+                <a:solidFill>
+                  <a:srgbClr val="7B3F00"/>
+                </a:solidFill>
+                <a:latin typeface="Calibri" pitchFamily="34" charset="0"/>
+                <a:ea typeface="Calibri" pitchFamily="34" charset="-122"/>
+                <a:cs typeface="Calibri" pitchFamily="34" charset="-120"/>
+              </a:rPr>
+              <a:t>▼</a:t>
+            </a:r>
+            <a:endParaRPr lang="en-US" sz="1000" dirty="0"/>
+          </a:p>
+        </p:txBody>
+      </p:sp>
+      <p:sp>
+        <p:nvSpPr>
+          <p:cNvPr id="51" name="Shape 46"/>
+          <p:cNvSpPr/>
+          <p:nvPr/>
+        </p:nvSpPr>
+        <p:spPr>
+          <a:xfrm>
+            <a:off x="6537960" y="4544568"/>
+            <a:ext cx="2834640" cy="347472"/>
+          </a:xfrm>
+          <a:prstGeom prst="rect">
+            <a:avLst/>
+          </a:prstGeom>
+          <a:solidFill>
+            <a:srgbClr val="D0232A"/>
+          </a:solidFill>
+          <a:ln w="12700">
+            <a:solidFill>
+              <a:srgbClr val="D0232A"/>
+            </a:solidFill>
+            <a:prstDash val="solid"/>
+          </a:ln>
+        </p:spPr>
+      </p:sp>
+      <p:sp>
+        <p:nvSpPr>
+          <p:cNvPr id="52" name="Text 47"/>
+          <p:cNvSpPr/>
+          <p:nvPr/>
+        </p:nvSpPr>
+        <p:spPr>
+          <a:xfrm>
+            <a:off x="6537960" y="4544568"/>
+            <a:ext cx="2834640" cy="347472"/>
+          </a:xfrm>
+          <a:prstGeom prst="rect">
+            <a:avLst/>
+          </a:prstGeom>
+          <a:noFill/>
+          <a:ln/>
+        </p:spPr>
+        <p:txBody>
+          <a:bodyPr wrap="square" lIns="0" tIns="0" rIns="0" bIns="0" rtlCol="0" anchor="ctr"/>
+          <a:lstStyle/>
+          <a:p>
+            <a:pPr algn="ctr" indent="0" marL="0">
+              <a:buNone/>
+            </a:pPr>
+            <a:r>
+              <a:rPr lang="en-US" sz="850" b="1" dirty="0">
+                <a:solidFill>
+                  <a:srgbClr val="FFFFFF"/>
+                </a:solidFill>
+                <a:latin typeface="Calibri" pitchFamily="34" charset="0"/>
+                <a:ea typeface="Calibri" pitchFamily="34" charset="-122"/>
+                <a:cs typeface="Calibri" pitchFamily="34" charset="-120"/>
+              </a:rPr>
+              <a:t>Aurora MySQL 8.0 (Replica_Kasumi)</a:t>
+            </a:r>
+            <a:endParaRPr lang="en-US" sz="850" dirty="0"/>
+          </a:p>
+        </p:txBody>
+      </p:sp>
+      <p:sp>
+        <p:nvSpPr>
+          <p:cNvPr id="53" name="Text 48"/>
+          <p:cNvSpPr/>
+          <p:nvPr/>
+        </p:nvSpPr>
+        <p:spPr>
+          <a:xfrm>
+            <a:off x="320040" y="4983480"/>
+            <a:ext cx="9144000" cy="256032"/>
+          </a:xfrm>
+          <a:prstGeom prst="rect">
+            <a:avLst/>
+          </a:prstGeom>
+          <a:noFill/>
+          <a:ln/>
+        </p:spPr>
+        <p:txBody>
+          <a:bodyPr wrap="square" lIns="0" tIns="0" rIns="0" bIns="0" rtlCol="0" anchor="ctr"/>
+          <a:lstStyle/>
+          <a:p>
+            <a:pPr indent="0" marL="0">
+              <a:buNone/>
+            </a:pPr>
+            <a:r>
+              <a:rPr lang="en-US" sz="800" dirty="0">
+                <a:solidFill>
+                  <a:srgbClr val="888888"/>
+                </a:solidFill>
+                <a:latin typeface="Calibri" pitchFamily="34" charset="0"/>
+                <a:ea typeface="Calibri" pitchFamily="34" charset="-122"/>
+                <a:cs typeface="Calibri" pitchFamily="34" charset="-120"/>
+              </a:rPr>
+              <a:t>共通: S3バケット = prd-ignica-ksm  /  バックアップ先 = pos-original/{oc|sg|sh}/backup/  /  監視 = CloudWatch</a:t>
+            </a:r>
+            <a:endParaRPr lang="en-US" sz="800" dirty="0"/>
+          </a:p>
+        </p:txBody>
+      </p:sp>
+    </p:spTree>
+  </p:cSld>
+  <p:clrMapOvr>
+    <a:masterClrMapping/>
+  </p:clrMapOvr>
+</p:sld>
+</file>
+
+<file path=ppt/slides/slide12.xml><?xml version="1.0" encoding="utf-8"?>
+<p:sld xmlns:a="http://schemas.openxmlformats.org/drawingml/2006/main" xmlns:r="http://schemas.openxmlformats.org/officeDocument/2006/relationships" xmlns:p="http://schemas.openxmlformats.org/presentationml/2006/main">
+  <p:cSld name="Slide 12">
+    <p:bg>
+      <p:bgPr>
+        <a:solidFill>
+          <a:srgbClr val="FFFFFF"/>
+        </a:solidFill>
+      </p:bgPr>
+    </p:bg>
+    <p:spTree>
+      <p:nvGrpSpPr>
+        <p:cNvPr id="1" name=""/>
+        <p:cNvGrpSpPr/>
+        <p:nvPr/>
+      </p:nvGrpSpPr>
+      <p:grpSpPr>
+        <a:xfrm>
+          <a:off x="0" y="0"/>
+          <a:ext cx="0" cy="0"/>
+          <a:chOff x="0" y="0"/>
+          <a:chExt cx="0" cy="0"/>
+        </a:xfrm>
+      </p:grpSpPr>
+      <p:pic>
+        <p:nvPicPr>
+          <p:cNvPr id="2" name="Image 0" descr="/mnt/skills/user/luvina-ppt/assets/decoration_dots.png">    </p:cNvPr>
+          <p:cNvPicPr>
+            <a:picLocks noChangeAspect="1"/>
+          </p:cNvPicPr>
+          <p:nvPr/>
+        </p:nvPicPr>
+        <p:blipFill>
+          <a:blip r:embed="rId1"/>
+          <a:stretch>
+            <a:fillRect/>
+          </a:stretch>
+        </p:blipFill>
+        <p:spPr>
+          <a:xfrm>
+            <a:off x="0" y="0"/>
+            <a:ext cx="3904488" cy="2880360"/>
+          </a:xfrm>
+          <a:prstGeom prst="rect">
+            <a:avLst/>
+          </a:prstGeom>
+        </p:spPr>
+      </p:pic>
+      <p:pic>
+        <p:nvPicPr>
+          <p:cNvPr id="3" name="Image 1" descr="/mnt/skills/user/luvina-ppt/assets/luvina_badge.png">    </p:cNvPr>
+          <p:cNvPicPr>
+            <a:picLocks noChangeAspect="1"/>
+          </p:cNvPicPr>
+          <p:nvPr/>
+        </p:nvPicPr>
+        <p:blipFill>
+          <a:blip r:embed="rId2"/>
+          <a:stretch>
+            <a:fillRect/>
+          </a:stretch>
+        </p:blipFill>
+        <p:spPr>
+          <a:xfrm>
+            <a:off x="109728" y="109728"/>
+            <a:ext cx="1874520" cy="466344"/>
+          </a:xfrm>
+          <a:prstGeom prst="rect">
+            <a:avLst/>
+          </a:prstGeom>
+        </p:spPr>
+      </p:pic>
+      <p:sp>
+        <p:nvSpPr>
+          <p:cNvPr id="4" name="Text 0"/>
+          <p:cNvSpPr/>
+          <p:nvPr/>
+        </p:nvSpPr>
+        <p:spPr>
+          <a:xfrm>
+            <a:off x="438912" y="173736"/>
+            <a:ext cx="1216152" cy="329184"/>
+          </a:xfrm>
+          <a:prstGeom prst="rect">
+            <a:avLst/>
+          </a:prstGeom>
+          <a:noFill/>
+          <a:ln/>
+        </p:spPr>
+        <p:txBody>
+          <a:bodyPr wrap="square" lIns="0" tIns="0" rIns="0" bIns="0" rtlCol="0" anchor="ctr"/>
+          <a:lstStyle/>
+          <a:p>
+            <a:pPr indent="0" marL="0">
+              <a:buNone/>
+            </a:pPr>
+            <a:r>
+              <a:rPr lang="en-US" sz="1600" b="1" dirty="0">
+                <a:solidFill>
+                  <a:srgbClr val="FFFFFF"/>
+                </a:solidFill>
+                <a:latin typeface="Arial Black" pitchFamily="34" charset="0"/>
+                <a:ea typeface="Arial Black" pitchFamily="34" charset="-122"/>
+                <a:cs typeface="Arial Black" pitchFamily="34" charset="-120"/>
+              </a:rPr>
+              <a:t>LUVINA</a:t>
+            </a:r>
+            <a:endParaRPr lang="en-US" sz="1600" dirty="0"/>
+          </a:p>
+        </p:txBody>
+      </p:sp>
+      <p:pic>
+        <p:nvPicPr>
+          <p:cNvPr id="5" name="Image 2" descr="/mnt/skills/user/luvina-ppt/assets/luvina_logo.png">    </p:cNvPr>
+          <p:cNvPicPr>
+            <a:picLocks noChangeAspect="1"/>
+          </p:cNvPicPr>
+          <p:nvPr/>
+        </p:nvPicPr>
+        <p:blipFill>
+          <a:blip r:embed="rId3"/>
+          <a:stretch>
+            <a:fillRect/>
+          </a:stretch>
+        </p:blipFill>
+        <p:spPr>
+          <a:xfrm>
+            <a:off x="8924544" y="109728"/>
+            <a:ext cx="932688" cy="466344"/>
+          </a:xfrm>
+          <a:prstGeom prst="rect">
+            <a:avLst/>
+          </a:prstGeom>
+        </p:spPr>
+      </p:pic>
+      <p:sp>
+        <p:nvSpPr>
+          <p:cNvPr id="6" name="Shape 1"/>
+          <p:cNvSpPr/>
+          <p:nvPr/>
+        </p:nvSpPr>
+        <p:spPr>
+          <a:xfrm>
+            <a:off x="0" y="640080"/>
+            <a:ext cx="9902952" cy="548640"/>
+          </a:xfrm>
+          <a:prstGeom prst="rect">
+            <a:avLst/>
+          </a:prstGeom>
+          <a:solidFill>
+            <a:srgbClr val="D0232A"/>
+          </a:solidFill>
+          <a:ln/>
+        </p:spPr>
+      </p:sp>
+      <p:sp>
+        <p:nvSpPr>
+          <p:cNvPr id="7" name="Text 2"/>
+          <p:cNvSpPr/>
+          <p:nvPr/>
+        </p:nvSpPr>
+        <p:spPr>
+          <a:xfrm>
+            <a:off x="301752" y="786384"/>
+            <a:ext cx="9144000" cy="356616"/>
+          </a:xfrm>
+          <a:prstGeom prst="rect">
+            <a:avLst/>
+          </a:prstGeom>
+          <a:noFill/>
+          <a:ln/>
+        </p:spPr>
+        <p:txBody>
+          <a:bodyPr wrap="square" lIns="0" tIns="0" rIns="0" bIns="0" rtlCol="0" anchor="ctr"/>
+          <a:lstStyle/>
+          <a:p>
+            <a:pPr indent="0" marL="0">
+              <a:buNone/>
+            </a:pPr>
+            <a:r>
+              <a:rPr lang="en-US" sz="2000" b="1" dirty="0">
+                <a:solidFill>
+                  <a:srgbClr val="FFFFFF"/>
+                </a:solidFill>
+                <a:latin typeface="Calibri" pitchFamily="34" charset="0"/>
+                <a:ea typeface="Calibri" pitchFamily="34" charset="-122"/>
+                <a:cs typeface="Calibri" pitchFamily="34" charset="-120"/>
+              </a:rPr>
               <a:t>9-1. 外部連携 — USMH閉域網とLUVINA AWS環境の接続構成</a:t>
             </a:r>
             <a:endParaRPr lang="en-US" sz="2000" dirty="0"/>
@@ -8489,9 +10385,9 @@
 </p:sld>
 </file>
 
-<file path=ppt/slides/slide12.xml><?xml version="1.0" encoding="utf-8"?>
+<file path=ppt/slides/slide13.xml><?xml version="1.0" encoding="utf-8"?>
 <p:sld xmlns:a="http://schemas.openxmlformats.org/drawingml/2006/main" xmlns:r="http://schemas.openxmlformats.org/officeDocument/2006/relationships" xmlns:p="http://schemas.openxmlformats.org/presentationml/2006/main">
-  <p:cSld name="Slide 12">
+  <p:cSld name="Slide 13">
     <p:bg>
       <p:bgPr>
         <a:solidFill>
@@ -8844,7 +10740,7 @@
       </p:sp>
       <p:graphicFrame>
         <p:nvGraphicFramePr>
-          <p:cNvPr id="13" name="Table 0"/>
+          <p:cNvPr id="14" name="Table 0"/>
           <p:cNvGraphicFramePr>
             <a:graphicFrameLocks noGrp="1"/>
           </p:cNvGraphicFramePr>
@@ -9840,7 +11736,7 @@
       </p:sp>
       <p:graphicFrame>
         <p:nvGraphicFramePr>
-          <p:cNvPr id="25" name="Table 1"/>
+          <p:cNvPr id="27" name="Table 1"/>
           <p:cNvGraphicFramePr>
             <a:graphicFrameLocks noGrp="1"/>
           </p:cNvGraphicFramePr>
@@ -10878,7 +12774,7 @@
       </p:sp>
       <p:graphicFrame>
         <p:nvGraphicFramePr>
-          <p:cNvPr id="37" name="Table 2"/>
+          <p:cNvPr id="40" name="Table 2"/>
           <p:cNvGraphicFramePr>
             <a:graphicFrameLocks noGrp="1"/>
           </p:cNvGraphicFramePr>
@@ -11737,9 +13633,9 @@
 </p:sld>
 </file>
 
-<file path=ppt/slides/slide13.xml><?xml version="1.0" encoding="utf-8"?>
+<file path=ppt/slides/slide14.xml><?xml version="1.0" encoding="utf-8"?>
 <p:sld xmlns:a="http://schemas.openxmlformats.org/drawingml/2006/main" xmlns:r="http://schemas.openxmlformats.org/officeDocument/2006/relationships" xmlns:p="http://schemas.openxmlformats.org/presentationml/2006/main">
-  <p:cSld name="Slide 13">
+  <p:cSld name="Slide 14">
     <p:bg>
       <p:bgPr>
         <a:solidFill>
@@ -12028,7 +13924,7 @@
       </p:sp>
       <p:graphicFrame>
         <p:nvGraphicFramePr>
-          <p:cNvPr id="14" name="Table 0"/>
+          <p:cNvPr id="15" name="Table 0"/>
           <p:cNvGraphicFramePr>
             <a:graphicFrameLocks noGrp="1"/>
           </p:cNvGraphicFramePr>
@@ -18218,6 +20114,168 @@
           </a:p>
         </p:txBody>
       </p:sp>
+      <p:sp>
+        <p:nvSpPr>
+          <p:cNvPr id="56" name="Shape 51"/>
+          <p:cNvSpPr/>
+          <p:nvPr/>
+        </p:nvSpPr>
+        <p:spPr>
+          <a:xfrm>
+            <a:off x="457200" y="3749040"/>
+            <a:ext cx="2670048" cy="621792"/>
+          </a:xfrm>
+          <a:prstGeom prst="rect">
+            <a:avLst/>
+          </a:prstGeom>
+          <a:solidFill>
+            <a:srgbClr val="F5F5F5"/>
+          </a:solidFill>
+          <a:ln w="12700">
+            <a:solidFill>
+              <a:srgbClr val="DDDDDD"/>
+            </a:solidFill>
+            <a:prstDash val="solid"/>
+          </a:ln>
+        </p:spPr>
+      </p:sp>
+      <p:sp>
+        <p:nvSpPr>
+          <p:cNvPr id="57" name="Shape 52"/>
+          <p:cNvSpPr/>
+          <p:nvPr/>
+        </p:nvSpPr>
+        <p:spPr>
+          <a:xfrm>
+            <a:off x="566928" y="3877056"/>
+            <a:ext cx="365760" cy="365760"/>
+          </a:xfrm>
+          <a:prstGeom prst="ellipse">
+            <a:avLst/>
+          </a:prstGeom>
+          <a:solidFill>
+            <a:srgbClr val="D0232A"/>
+          </a:solidFill>
+          <a:ln/>
+        </p:spPr>
+      </p:sp>
+      <p:sp>
+        <p:nvSpPr>
+          <p:cNvPr id="58" name="Text 53"/>
+          <p:cNvSpPr/>
+          <p:nvPr/>
+        </p:nvSpPr>
+        <p:spPr>
+          <a:xfrm>
+            <a:off x="566928" y="3877056"/>
+            <a:ext cx="365760" cy="365760"/>
+          </a:xfrm>
+          <a:prstGeom prst="rect">
+            <a:avLst/>
+          </a:prstGeom>
+          <a:noFill/>
+          <a:ln/>
+        </p:spPr>
+        <p:txBody>
+          <a:bodyPr wrap="square" lIns="0" tIns="0" rIns="0" bIns="0" rtlCol="0" anchor="ctr"/>
+          <a:lstStyle/>
+          <a:p>
+            <a:pPr algn="ctr" indent="0" marL="0">
+              <a:buNone/>
+            </a:pPr>
+            <a:r>
+              <a:rPr lang="en-US" sz="1400" b="1" dirty="0">
+                <a:solidFill>
+                  <a:srgbClr val="FFFFFF"/>
+                </a:solidFill>
+                <a:latin typeface="Arial" pitchFamily="34" charset="0"/>
+                <a:ea typeface="Arial" pitchFamily="34" charset="-122"/>
+                <a:cs typeface="Arial" pitchFamily="34" charset="-120"/>
+              </a:rPr>
+              <a:t>10</a:t>
+            </a:r>
+            <a:endParaRPr lang="en-US" sz="1400" dirty="0"/>
+          </a:p>
+        </p:txBody>
+      </p:sp>
+      <p:sp>
+        <p:nvSpPr>
+          <p:cNvPr id="59" name="Text 54"/>
+          <p:cNvSpPr/>
+          <p:nvPr/>
+        </p:nvSpPr>
+        <p:spPr>
+          <a:xfrm>
+            <a:off x="1024128" y="3803904"/>
+            <a:ext cx="2029968" cy="256032"/>
+          </a:xfrm>
+          <a:prstGeom prst="rect">
+            <a:avLst/>
+          </a:prstGeom>
+          <a:noFill/>
+          <a:ln/>
+        </p:spPr>
+        <p:txBody>
+          <a:bodyPr wrap="square" lIns="0" tIns="0" rIns="0" bIns="0" rtlCol="0" anchor="ctr"/>
+          <a:lstStyle/>
+          <a:p>
+            <a:pPr indent="0" marL="0">
+              <a:buNone/>
+            </a:pPr>
+            <a:r>
+              <a:rPr lang="en-US" sz="1100" b="1" dirty="0">
+                <a:solidFill>
+                  <a:srgbClr val="2D2D2D"/>
+                </a:solidFill>
+                <a:latin typeface="Calibri" pitchFamily="34" charset="0"/>
+                <a:ea typeface="Calibri" pitchFamily="34" charset="-122"/>
+                <a:cs typeface="Calibri" pitchFamily="34" charset="-120"/>
+              </a:rPr>
+              <a:t>外部連携ファイル受信→MySQLインポートフロー</a:t>
+            </a:r>
+            <a:endParaRPr lang="en-US" sz="1100" dirty="0"/>
+          </a:p>
+        </p:txBody>
+      </p:sp>
+      <p:sp>
+        <p:nvSpPr>
+          <p:cNvPr id="60" name="Text 55"/>
+          <p:cNvSpPr/>
+          <p:nvPr/>
+        </p:nvSpPr>
+        <p:spPr>
+          <a:xfrm>
+            <a:off x="1024128" y="4059936"/>
+            <a:ext cx="2029968" cy="274320"/>
+          </a:xfrm>
+          <a:prstGeom prst="rect">
+            <a:avLst/>
+          </a:prstGeom>
+          <a:noFill/>
+          <a:ln/>
+        </p:spPr>
+        <p:txBody>
+          <a:bodyPr wrap="square" lIns="0" tIns="0" rIns="0" bIns="0" rtlCol="0" anchor="ctr"/>
+          <a:lstStyle/>
+          <a:p>
+            <a:pPr indent="0" marL="0">
+              <a:buNone/>
+            </a:pPr>
+            <a:r>
+              <a:rPr lang="en-US" sz="800" dirty="0">
+                <a:solidFill>
+                  <a:srgbClr val="666666"/>
+                </a:solidFill>
+                <a:latin typeface="Calibri" pitchFamily="34" charset="0"/>
+                <a:ea typeface="Calibri" pitchFamily="34" charset="-122"/>
+                <a:cs typeface="Calibri" pitchFamily="34" charset="-120"/>
+              </a:rPr>
+              <a:t>OC(基幹/BIPROGY) / SG(POS/VINX) / SH(棚情報/SHARP)</a:t>
+            </a:r>
+            <a:endParaRPr lang="en-US" sz="800" dirty="0"/>
+          </a:p>
+        </p:txBody>
+      </p:sp>
     </p:spTree>
   </p:cSld>
   <p:clrMapOvr>
@@ -19451,7 +21509,7 @@
                 <a:ea typeface="Calibri" pitchFamily="34" charset="-122"/>
                 <a:cs typeface="Calibri" pitchFamily="34" charset="-120"/>
               </a:rPr>
-              <a:t>BIPROGY</a:t>
+              <a:t>外部連携</a:t>
             </a:r>
             <a:endParaRPr lang="en-US" sz="1200" dirty="0"/>
           </a:p>
@@ -19490,7 +21548,7 @@
                 <a:ea typeface="Calibri" pitchFamily="34" charset="-122"/>
                 <a:cs typeface="Calibri" pitchFamily="34" charset="-120"/>
               </a:rPr>
-              <a:t>外部連携</a:t>
+              <a:t>OC: 基幹(BIPROGY)</a:t>
             </a:r>
             <a:endParaRPr lang="en-US" sz="900" dirty="0"/>
           </a:p>
@@ -19507,7 +21565,24 @@
                 <a:ea typeface="Calibri" pitchFamily="34" charset="-122"/>
                 <a:cs typeface="Calibri" pitchFamily="34" charset="-120"/>
               </a:rPr>
-              <a:t>マスタ連携</a:t>
+              <a:t>SG: POS(VINX)</a:t>
+            </a:r>
+            <a:endParaRPr lang="en-US" sz="900" dirty="0"/>
+          </a:p>
+          <a:p>
+            <a:pPr algn="ctr" indent="0" marL="0">
+              <a:buNone/>
+            </a:pPr>
+            <a:r>
+              <a:rPr lang="en-US" sz="900" dirty="0">
+                <a:solidFill>
+                  <a:srgbClr val="666666"/>
+                </a:solidFill>
+                <a:latin typeface="Calibri" pitchFamily="34" charset="0"/>
+                <a:ea typeface="Calibri" pitchFamily="34" charset="-122"/>
+                <a:cs typeface="Calibri" pitchFamily="34" charset="-120"/>
+              </a:rPr>
+              <a:t>SH: 棚情報(SHARP)</a:t>
             </a:r>
             <a:endParaRPr lang="en-US" sz="900" dirty="0"/>
           </a:p>
@@ -23499,7 +25574,7 @@
                 <a:ea typeface="Calibri" pitchFamily="34" charset="-122"/>
                 <a:cs typeface="Calibri" pitchFamily="34" charset="-120"/>
               </a:rPr>
-              <a:t>BIPROGY</a:t>
+              <a:t>OC: 基幹データ</a:t>
             </a:r>
             <a:endParaRPr lang="en-US" sz="800" dirty="0"/>
           </a:p>
@@ -23516,7 +25591,7 @@
                 <a:ea typeface="Calibri" pitchFamily="34" charset="-122"/>
                 <a:cs typeface="Calibri" pitchFamily="34" charset="-120"/>
               </a:rPr>
-              <a:t>マスタ連携</a:t>
+              <a:t>BIPROGY/OpenCentral</a:t>
             </a:r>
             <a:endParaRPr lang="en-US" sz="800" dirty="0"/>
           </a:p>
@@ -23580,7 +25655,7 @@
                 <a:ea typeface="Calibri" pitchFamily="34" charset="-122"/>
                 <a:cs typeface="Calibri" pitchFamily="34" charset="-120"/>
               </a:rPr>
-              <a:t>ISHIDA</a:t>
+              <a:t>SG: POSデータ</a:t>
             </a:r>
             <a:endParaRPr lang="en-US" sz="800" dirty="0"/>
           </a:p>
@@ -23597,7 +25672,7 @@
                 <a:ea typeface="Calibri" pitchFamily="34" charset="-122"/>
                 <a:cs typeface="Calibri" pitchFamily="34" charset="-120"/>
               </a:rPr>
-              <a:t>ESL機器送信</a:t>
+              <a:t>VINX/PosSserver</a:t>
             </a:r>
             <a:endParaRPr lang="en-US" sz="800" dirty="0"/>
           </a:p>
@@ -23637,6 +25712,87 @@
         <p:spPr>
           <a:xfrm>
             <a:off x="4147718" y="5184648"/>
+            <a:ext cx="1607515" cy="182880"/>
+          </a:xfrm>
+          <a:prstGeom prst="rect">
+            <a:avLst/>
+          </a:prstGeom>
+          <a:noFill/>
+          <a:ln/>
+        </p:spPr>
+        <p:txBody>
+          <a:bodyPr wrap="square" lIns="0" tIns="0" rIns="0" bIns="0" rtlCol="0" anchor="ctr"/>
+          <a:lstStyle/>
+          <a:p>
+            <a:pPr algn="ctr" indent="0" marL="0">
+              <a:buNone/>
+            </a:pPr>
+            <a:r>
+              <a:rPr lang="en-US" sz="800" dirty="0">
+                <a:solidFill>
+                  <a:srgbClr val="333333"/>
+                </a:solidFill>
+                <a:latin typeface="Calibri" pitchFamily="34" charset="0"/>
+                <a:ea typeface="Calibri" pitchFamily="34" charset="-122"/>
+                <a:cs typeface="Calibri" pitchFamily="34" charset="-120"/>
+              </a:rPr>
+              <a:t>SH: 棚情報</a:t>
+            </a:r>
+            <a:endParaRPr lang="en-US" sz="800" dirty="0"/>
+          </a:p>
+          <a:p>
+            <a:pPr algn="ctr" indent="0" marL="0">
+              <a:buNone/>
+            </a:pPr>
+            <a:r>
+              <a:rPr lang="en-US" sz="800" dirty="0">
+                <a:solidFill>
+                  <a:srgbClr val="333333"/>
+                </a:solidFill>
+                <a:latin typeface="Calibri" pitchFamily="34" charset="0"/>
+                <a:ea typeface="Calibri" pitchFamily="34" charset="-122"/>
+                <a:cs typeface="Calibri" pitchFamily="34" charset="-120"/>
+              </a:rPr>
+              <a:t>SHARP/P003</a:t>
+            </a:r>
+            <a:endParaRPr lang="en-US" sz="800" dirty="0"/>
+          </a:p>
+        </p:txBody>
+      </p:sp>
+      <p:sp>
+        <p:nvSpPr>
+          <p:cNvPr id="95" name="Shape 90"/>
+          <p:cNvSpPr/>
+          <p:nvPr/>
+        </p:nvSpPr>
+        <p:spPr>
+          <a:xfrm>
+            <a:off x="5883250" y="5184648"/>
+            <a:ext cx="1662379" cy="182880"/>
+          </a:xfrm>
+          <a:prstGeom prst="rect">
+            <a:avLst/>
+          </a:prstGeom>
+          <a:solidFill>
+            <a:srgbClr val="FFFFFF"/>
+          </a:solidFill>
+          <a:ln w="12700">
+            <a:solidFill>
+              <a:srgbClr val="DDBB88"/>
+            </a:solidFill>
+            <a:prstDash val="solid"/>
+          </a:ln>
+        </p:spPr>
+      </p:sp>
+      <p:sp>
+        <p:nvSpPr>
+          <p:cNvPr id="96" name="Text 91"/>
+          <p:cNvSpPr/>
+          <p:nvPr/>
+        </p:nvSpPr>
+        <p:spPr>
+          <a:xfrm>
+            <a:off x="5910682" y="5184648"/>
             <a:ext cx="1607515" cy="182880"/>
           </a:xfrm>
           <a:prstGeom prst="rect">
@@ -23686,13 +25842,13 @@
       </p:sp>
       <p:sp>
         <p:nvSpPr>
-          <p:cNvPr id="95" name="Shape 90"/>
+          <p:cNvPr id="97" name="Shape 92"/>
           <p:cNvSpPr/>
           <p:nvPr/>
         </p:nvSpPr>
         <p:spPr>
           <a:xfrm>
-            <a:off x="5883250" y="5184648"/>
+            <a:off x="7646213" y="5184648"/>
             <a:ext cx="1662379" cy="182880"/>
           </a:xfrm>
           <a:prstGeom prst="rect">
@@ -23711,13 +25867,13 @@
       </p:sp>
       <p:sp>
         <p:nvSpPr>
-          <p:cNvPr id="96" name="Text 91"/>
+          <p:cNvPr id="98" name="Text 93"/>
           <p:cNvSpPr/>
           <p:nvPr/>
         </p:nvSpPr>
         <p:spPr>
           <a:xfrm>
-            <a:off x="5910682" y="5184648"/>
+            <a:off x="7673645" y="5184648"/>
             <a:ext cx="1607515" cy="182880"/>
           </a:xfrm>
           <a:prstGeom prst="rect">
@@ -23760,87 +25916,6 @@
                 <a:cs typeface="Calibri" pitchFamily="34" charset="-120"/>
               </a:rPr>
               <a:t>SFTP(3サーバー)</a:t>
-            </a:r>
-            <a:endParaRPr lang="en-US" sz="800" dirty="0"/>
-          </a:p>
-        </p:txBody>
-      </p:sp>
-      <p:sp>
-        <p:nvSpPr>
-          <p:cNvPr id="97" name="Shape 92"/>
-          <p:cNvSpPr/>
-          <p:nvPr/>
-        </p:nvSpPr>
-        <p:spPr>
-          <a:xfrm>
-            <a:off x="7646213" y="5184648"/>
-            <a:ext cx="1662379" cy="182880"/>
-          </a:xfrm>
-          <a:prstGeom prst="rect">
-            <a:avLst/>
-          </a:prstGeom>
-          <a:solidFill>
-            <a:srgbClr val="FFFFFF"/>
-          </a:solidFill>
-          <a:ln w="12700">
-            <a:solidFill>
-              <a:srgbClr val="DDBB88"/>
-            </a:solidFill>
-            <a:prstDash val="solid"/>
-          </a:ln>
-        </p:spPr>
-      </p:sp>
-      <p:sp>
-        <p:nvSpPr>
-          <p:cNvPr id="98" name="Text 93"/>
-          <p:cNvSpPr/>
-          <p:nvPr/>
-        </p:nvSpPr>
-        <p:spPr>
-          <a:xfrm>
-            <a:off x="7673645" y="5184648"/>
-            <a:ext cx="1607515" cy="182880"/>
-          </a:xfrm>
-          <a:prstGeom prst="rect">
-            <a:avLst/>
-          </a:prstGeom>
-          <a:noFill/>
-          <a:ln/>
-        </p:spPr>
-        <p:txBody>
-          <a:bodyPr wrap="square" lIns="0" tIns="0" rIns="0" bIns="0" rtlCol="0" anchor="ctr"/>
-          <a:lstStyle/>
-          <a:p>
-            <a:pPr algn="ctr" indent="0" marL="0">
-              <a:buNone/>
-            </a:pPr>
-            <a:r>
-              <a:rPr lang="en-US" sz="800" dirty="0">
-                <a:solidFill>
-                  <a:srgbClr val="333333"/>
-                </a:solidFill>
-                <a:latin typeface="Calibri" pitchFamily="34" charset="0"/>
-                <a:ea typeface="Calibri" pitchFamily="34" charset="-122"/>
-                <a:cs typeface="Calibri" pitchFamily="34" charset="-120"/>
-              </a:rPr>
-              <a:t>USMH網</a:t>
-            </a:r>
-            <a:endParaRPr lang="en-US" sz="800" dirty="0"/>
-          </a:p>
-          <a:p>
-            <a:pPr algn="ctr" indent="0" marL="0">
-              <a:buNone/>
-            </a:pPr>
-            <a:r>
-              <a:rPr lang="en-US" sz="800" dirty="0">
-                <a:solidFill>
-                  <a:srgbClr val="333333"/>
-                </a:solidFill>
-                <a:latin typeface="Calibri" pitchFamily="34" charset="0"/>
-                <a:ea typeface="Calibri" pitchFamily="34" charset="-122"/>
-                <a:cs typeface="Calibri" pitchFamily="34" charset="-120"/>
-              </a:rPr>
-              <a:t>Direct Connect経由</a:t>
             </a:r>
             <a:endParaRPr lang="en-US" sz="800" dirty="0"/>
           </a:p>
@@ -32400,7 +34475,7 @@
                           <a:ea typeface="Calibri" pitchFamily="34" charset="-122"/>
                           <a:cs typeface="Calibri" pitchFamily="34" charset="-120"/>
                         </a:rPr>
-                        <a:t>メインバケット（OC/SG/ISHIDA/ログ）</a:t>
+                        <a:t>メインバケット（oc:基幹/sg:POS/sh:棚情報/ログ）</a:t>
                       </a:r>
                       <a:endParaRPr lang="en-US" sz="900" dirty="0">
                         <a:latin typeface="Calibri" charset="0"/>

--- a/40_AWS/01_構成資料/カスミPOS_AWS構成資料.pptx
+++ b/40_AWS/01_構成資料/カスミPOS_AWS構成資料.pptx
@@ -6037,6 +6037,45 @@
         </p:nvSpPr>
         <p:spPr>
           <a:xfrm>
+            <a:off x="5029200" y="4187952"/>
+            <a:ext cx="4572000" cy="256032"/>
+          </a:xfrm>
+          <a:prstGeom prst="rect">
+            <a:avLst/>
+          </a:prstGeom>
+          <a:noFill/>
+          <a:ln/>
+        </p:spPr>
+        <p:txBody>
+          <a:bodyPr wrap="square" lIns="0" tIns="0" rIns="0" bIns="0" rtlCol="0" anchor="ctr"/>
+          <a:lstStyle/>
+          <a:p>
+            <a:pPr indent="0" marL="0">
+              <a:buNone/>
+            </a:pPr>
+            <a:r>
+              <a:rPr lang="en-US" sz="800" dirty="0">
+                <a:solidFill>
+                  <a:srgbClr val="225577"/>
+                </a:solidFill>
+                <a:latin typeface="Calibri" pitchFamily="34" charset="0"/>
+                <a:ea typeface="Calibri" pitchFamily="34" charset="-122"/>
+                <a:cs typeface="Calibri" pitchFamily="34" charset="-120"/>
+              </a:rPr>
+              <a:t>StepFunctions: 7SM (oc系×3 / sg系×2 / sh系×1 / 共通sent-txt-file×1)  SQS: 2 FIFOキュー (sg専用)</a:t>
+            </a:r>
+            <a:endParaRPr lang="en-US" sz="800" dirty="0"/>
+          </a:p>
+        </p:txBody>
+      </p:sp>
+      <p:sp>
+        <p:nvSpPr>
+          <p:cNvPr id="17" name="Text 10"/>
+          <p:cNvSpPr/>
+          <p:nvPr/>
+        </p:nvSpPr>
+        <p:spPr>
+          <a:xfrm>
             <a:off x="5029200" y="4206240"/>
             <a:ext cx="4572000" cy="256032"/>
           </a:xfrm>
@@ -7307,7 +7346,7 @@
                 <a:ea typeface="Calibri" pitchFamily="34" charset="-122"/>
                 <a:cs typeface="Calibri" pitchFamily="34" charset="-120"/>
               </a:rPr>
-              <a:t>Lambda: CSV分割(店舗別)</a:t>
+              <a:t>SF: receive-pos-master-oc</a:t>
             </a:r>
             <a:endParaRPr lang="en-US" sz="850" dirty="0"/>
           </a:p>
@@ -7324,7 +7363,7 @@
                 <a:ea typeface="Calibri" pitchFamily="34" charset="-122"/>
                 <a:cs typeface="Calibri" pitchFamily="34" charset="-120"/>
               </a:rPr>
-              <a:t>ECS: Aurora MySQL INSERT/UPDATE</a:t>
+              <a:t>SF: import-pos-master-oc</a:t>
             </a:r>
             <a:endParaRPr lang="en-US" sz="850" dirty="0"/>
           </a:p>
@@ -7341,7 +7380,41 @@
                 <a:ea typeface="Calibri" pitchFamily="34" charset="-122"/>
                 <a:cs typeface="Calibri" pitchFamily="34" charset="-120"/>
               </a:rPr>
-              <a:t>ENDIMPORT生成 → BOX-PCへTXT送信</a:t>
+              <a:t>→ Aurora MySQL INSERT/UPDATE</a:t>
+            </a:r>
+            <a:endParaRPr lang="en-US" sz="850" dirty="0"/>
+          </a:p>
+          <a:p>
+            <a:pPr indent="0" marL="0">
+              <a:buNone/>
+            </a:pPr>
+            <a:r>
+              <a:rPr lang="en-US" sz="850" dirty="0">
+                <a:solidFill>
+                  <a:srgbClr val="333333"/>
+                </a:solidFill>
+                <a:latin typeface="Calibri" pitchFamily="34" charset="0"/>
+                <a:ea typeface="Calibri" pitchFamily="34" charset="-122"/>
+                <a:cs typeface="Calibri" pitchFamily="34" charset="-120"/>
+              </a:rPr>
+              <a:t>SF: create-txt-file-oc</a:t>
+            </a:r>
+            <a:endParaRPr lang="en-US" sz="850" dirty="0"/>
+          </a:p>
+          <a:p>
+            <a:pPr indent="0" marL="0">
+              <a:buNone/>
+            </a:pPr>
+            <a:r>
+              <a:rPr lang="en-US" sz="850" dirty="0">
+                <a:solidFill>
+                  <a:srgbClr val="333333"/>
+                </a:solidFill>
+                <a:latin typeface="Calibri" pitchFamily="34" charset="0"/>
+                <a:ea typeface="Calibri" pitchFamily="34" charset="-122"/>
+                <a:cs typeface="Calibri" pitchFamily="34" charset="-120"/>
+              </a:rPr>
+              <a:t>SF: sent-txt-file → BOX-PC</a:t>
             </a:r>
             <a:endParaRPr lang="en-US" sz="850" dirty="0"/>
           </a:p>
@@ -7803,7 +7876,7 @@
                 <a:ea typeface="Calibri" pitchFamily="34" charset="-122"/>
                 <a:cs typeface="Calibri" pitchFamily="34" charset="-120"/>
               </a:rPr>
-              <a:t>Lambda: ZIP展開・テーブル別移動</a:t>
+              <a:t>SF: receive-and-import-pos-master-sg</a:t>
             </a:r>
             <a:endParaRPr lang="en-US" sz="850" dirty="0"/>
           </a:p>
@@ -7820,7 +7893,7 @@
                 <a:ea typeface="Calibri" pitchFamily="34" charset="-122"/>
                 <a:cs typeface="Calibri" pitchFamily="34" charset="-120"/>
               </a:rPr>
-              <a:t>ECS: Aurora MySQL INSERT/UPDATE</a:t>
+              <a:t>SQS: store-code-queue-sg.fifo</a:t>
             </a:r>
             <a:endParaRPr lang="en-US" sz="850" dirty="0"/>
           </a:p>
@@ -7837,7 +7910,58 @@
                 <a:ea typeface="Calibri" pitchFamily="34" charset="-122"/>
                 <a:cs typeface="Calibri" pitchFamily="34" charset="-120"/>
               </a:rPr>
-              <a:t>ENDEXPORT生成 → BOX-PCへTXT送信</a:t>
+              <a:t>→ Aurora MySQL INSERT/UPDATE</a:t>
+            </a:r>
+            <a:endParaRPr lang="en-US" sz="850" dirty="0"/>
+          </a:p>
+          <a:p>
+            <a:pPr indent="0" marL="0">
+              <a:buNone/>
+            </a:pPr>
+            <a:r>
+              <a:rPr lang="en-US" sz="850" dirty="0">
+                <a:solidFill>
+                  <a:srgbClr val="333333"/>
+                </a:solidFill>
+                <a:latin typeface="Calibri" pitchFamily="34" charset="0"/>
+                <a:ea typeface="Calibri" pitchFamily="34" charset="-122"/>
+                <a:cs typeface="Calibri" pitchFamily="34" charset="-120"/>
+              </a:rPr>
+              <a:t>SQS: export-queue-sg.fifo</a:t>
+            </a:r>
+            <a:endParaRPr lang="en-US" sz="850" dirty="0"/>
+          </a:p>
+          <a:p>
+            <a:pPr indent="0" marL="0">
+              <a:buNone/>
+            </a:pPr>
+            <a:r>
+              <a:rPr lang="en-US" sz="850" dirty="0">
+                <a:solidFill>
+                  <a:srgbClr val="333333"/>
+                </a:solidFill>
+                <a:latin typeface="Calibri" pitchFamily="34" charset="0"/>
+                <a:ea typeface="Calibri" pitchFamily="34" charset="-122"/>
+                <a:cs typeface="Calibri" pitchFamily="34" charset="-120"/>
+              </a:rPr>
+              <a:t>SF: create-txt-file-sg</a:t>
+            </a:r>
+            <a:endParaRPr lang="en-US" sz="850" dirty="0"/>
+          </a:p>
+          <a:p>
+            <a:pPr indent="0" marL="0">
+              <a:buNone/>
+            </a:pPr>
+            <a:r>
+              <a:rPr lang="en-US" sz="850" dirty="0">
+                <a:solidFill>
+                  <a:srgbClr val="333333"/>
+                </a:solidFill>
+                <a:latin typeface="Calibri" pitchFamily="34" charset="0"/>
+                <a:ea typeface="Calibri" pitchFamily="34" charset="-122"/>
+                <a:cs typeface="Calibri" pitchFamily="34" charset="-120"/>
+              </a:rPr>
+              <a:t>SF: sent-txt-file → BOX-PC</a:t>
             </a:r>
             <a:endParaRPr lang="en-US" sz="850" dirty="0"/>
           </a:p>
@@ -8299,7 +8423,7 @@
                 <a:ea typeface="Calibri" pitchFamily="34" charset="-122"/>
                 <a:cs typeface="Calibri" pitchFamily="34" charset="-120"/>
               </a:rPr>
-              <a:t>Lambda: トリガー</a:t>
+              <a:t>SF: import-pos-master-sh</a:t>
             </a:r>
             <a:endParaRPr lang="en-US" sz="850" dirty="0"/>
           </a:p>
@@ -8316,7 +8440,24 @@
                 <a:ea typeface="Calibri" pitchFamily="34" charset="-122"/>
                 <a:cs typeface="Calibri" pitchFamily="34" charset="-120"/>
               </a:rPr>
-              <a:t>ECS: Aurora MySQL INSERT/UPDATE</a:t>
+              <a:t>→ Aurora MySQL INSERT/UPDATE</a:t>
+            </a:r>
+            <a:endParaRPr lang="en-US" sz="850" dirty="0"/>
+          </a:p>
+          <a:p>
+            <a:pPr indent="0" marL="0">
+              <a:buNone/>
+            </a:pPr>
+            <a:r>
+              <a:rPr lang="en-US" sz="850" dirty="0">
+                <a:solidFill>
+                  <a:srgbClr val="333333"/>
+                </a:solidFill>
+                <a:latin typeface="Calibri" pitchFamily="34" charset="0"/>
+                <a:ea typeface="Calibri" pitchFamily="34" charset="-122"/>
+                <a:cs typeface="Calibri" pitchFamily="34" charset="-120"/>
+              </a:rPr>
+              <a:t>SF: sent-txt-file → BOX-PC</a:t>
             </a:r>
             <a:endParaRPr lang="en-US" sz="850" dirty="0"/>
           </a:p>

--- a/40_AWS/01_構成資料/カスミPOS_AWS構成資料.pptx
+++ b/40_AWS/01_構成資料/カスミPOS_AWS構成資料.pptx
@@ -7001,8 +7001,8 @@
         </p:nvSpPr>
         <p:spPr>
           <a:xfrm>
-            <a:off x="320040" y="1508760"/>
-            <a:ext cx="2834640" cy="274320"/>
+            <a:off x="274320" y="1481328"/>
+            <a:ext cx="2944368" cy="256032"/>
           </a:xfrm>
           <a:prstGeom prst="rect">
             <a:avLst/>
@@ -7026,8 +7026,8 @@
         </p:nvSpPr>
         <p:spPr>
           <a:xfrm>
-            <a:off x="320040" y="1508760"/>
-            <a:ext cx="2834640" cy="274320"/>
+            <a:off x="274320" y="1481328"/>
+            <a:ext cx="2944368" cy="256032"/>
           </a:xfrm>
           <a:prstGeom prst="rect">
             <a:avLst/>
@@ -7043,7 +7043,7 @@
               <a:buNone/>
             </a:pPr>
             <a:r>
-              <a:rPr lang="en-US" sz="1100" b="1" dirty="0">
+              <a:rPr lang="en-US" sz="1050" b="1" dirty="0">
                 <a:solidFill>
                   <a:srgbClr val="FFFFFF"/>
                 </a:solidFill>
@@ -7053,7 +7053,7 @@
               </a:rPr>
               <a:t>OC フロー</a:t>
             </a:r>
-            <a:endParaRPr lang="en-US" sz="1100" dirty="0"/>
+            <a:endParaRPr lang="en-US" sz="1050" dirty="0"/>
           </a:p>
         </p:txBody>
       </p:sp>
@@ -7065,8 +7065,8 @@
         </p:nvSpPr>
         <p:spPr>
           <a:xfrm>
-            <a:off x="320040" y="1828800"/>
-            <a:ext cx="2834640" cy="502920"/>
+            <a:off x="274320" y="1764792"/>
+            <a:ext cx="2944368" cy="384048"/>
           </a:xfrm>
           <a:prstGeom prst="rect">
             <a:avLst/>
@@ -7090,1492 +7090,8 @@
         </p:nvSpPr>
         <p:spPr>
           <a:xfrm>
-            <a:off x="365760" y="1847088"/>
-            <a:ext cx="2743200" cy="466344"/>
-          </a:xfrm>
-          <a:prstGeom prst="rect">
-            <a:avLst/>
-          </a:prstGeom>
-          <a:noFill/>
-          <a:ln/>
-        </p:spPr>
-        <p:txBody>
-          <a:bodyPr wrap="square" lIns="0" tIns="0" rIns="0" bIns="0" rtlCol="0" anchor="ctr"/>
-          <a:lstStyle/>
-          <a:p>
-            <a:pPr indent="0" marL="0">
-              <a:buNone/>
-            </a:pPr>
-            <a:r>
-              <a:rPr lang="en-US" sz="900" dirty="0">
-                <a:solidFill>
-                  <a:srgbClr val="1E6E9F"/>
-                </a:solidFill>
-                <a:latin typeface="Calibri" pitchFamily="34" charset="0"/>
-                <a:ea typeface="Calibri" pitchFamily="34" charset="-122"/>
-                <a:cs typeface="Calibri" pitchFamily="34" charset="-120"/>
-              </a:rPr>
-              <a:t>連携元: 基幹データ / BIPROGY・OpenCentral</a:t>
-            </a:r>
-            <a:endParaRPr lang="en-US" sz="900" dirty="0"/>
-          </a:p>
-        </p:txBody>
-      </p:sp>
-      <p:sp>
-        <p:nvSpPr>
-          <p:cNvPr id="15" name="Shape 10"/>
-          <p:cNvSpPr/>
-          <p:nvPr/>
-        </p:nvSpPr>
-        <p:spPr>
-          <a:xfrm>
-            <a:off x="320040" y="2377440"/>
-            <a:ext cx="2834640" cy="320040"/>
-          </a:xfrm>
-          <a:prstGeom prst="rect">
-            <a:avLst/>
-          </a:prstGeom>
-          <a:solidFill>
-            <a:srgbClr val="FFF9E6"/>
-          </a:solidFill>
-          <a:ln w="12700">
-            <a:solidFill>
-              <a:srgbClr val="CCAA00"/>
-            </a:solidFill>
-            <a:prstDash val="solid"/>
-          </a:ln>
-        </p:spPr>
-      </p:sp>
-      <p:sp>
-        <p:nvSpPr>
-          <p:cNvPr id="16" name="Text 11"/>
-          <p:cNvSpPr/>
-          <p:nvPr/>
-        </p:nvSpPr>
-        <p:spPr>
-          <a:xfrm>
-            <a:off x="365760" y="2395728"/>
-            <a:ext cx="2743200" cy="283464"/>
-          </a:xfrm>
-          <a:prstGeom prst="rect">
-            <a:avLst/>
-          </a:prstGeom>
-          <a:noFill/>
-          <a:ln/>
-        </p:spPr>
-        <p:txBody>
-          <a:bodyPr wrap="square" lIns="0" tIns="0" rIns="0" bIns="0" rtlCol="0" anchor="ctr"/>
-          <a:lstStyle/>
-          <a:p>
-            <a:pPr indent="0" marL="0">
-              <a:buNone/>
-            </a:pPr>
-            <a:r>
-              <a:rPr lang="en-US" sz="850" dirty="0">
-                <a:solidFill>
-                  <a:srgbClr val="7A6000"/>
-                </a:solidFill>
-                <a:latin typeface="Calibri" pitchFamily="34" charset="0"/>
-                <a:ea typeface="Calibri" pitchFamily="34" charset="-122"/>
-                <a:cs typeface="Calibri" pitchFamily="34" charset="-120"/>
-              </a:rPr>
-              <a:t>S3: pos-original/oc/</a:t>
-            </a:r>
-            <a:endParaRPr lang="en-US" sz="850" dirty="0"/>
-          </a:p>
-        </p:txBody>
-      </p:sp>
-      <p:sp>
-        <p:nvSpPr>
-          <p:cNvPr id="17" name="Shape 12"/>
-          <p:cNvSpPr/>
-          <p:nvPr/>
-        </p:nvSpPr>
-        <p:spPr>
-          <a:xfrm>
-            <a:off x="320040" y="2743200"/>
-            <a:ext cx="2834640" cy="320040"/>
-          </a:xfrm>
-          <a:prstGeom prst="rect">
-            <a:avLst/>
-          </a:prstGeom>
-          <a:solidFill>
-            <a:srgbClr val="FDEDEC"/>
-          </a:solidFill>
-          <a:ln w="12700">
-            <a:solidFill>
-              <a:srgbClr val="E74C3C"/>
-            </a:solidFill>
-            <a:prstDash val="solid"/>
-          </a:ln>
-        </p:spPr>
-      </p:sp>
-      <p:sp>
-        <p:nvSpPr>
-          <p:cNvPr id="18" name="Text 13"/>
-          <p:cNvSpPr/>
-          <p:nvPr/>
-        </p:nvSpPr>
-        <p:spPr>
-          <a:xfrm>
-            <a:off x="365760" y="2761488"/>
-            <a:ext cx="2743200" cy="283464"/>
-          </a:xfrm>
-          <a:prstGeom prst="rect">
-            <a:avLst/>
-          </a:prstGeom>
-          <a:noFill/>
-          <a:ln/>
-        </p:spPr>
-        <p:txBody>
-          <a:bodyPr wrap="square" lIns="0" tIns="0" rIns="0" bIns="0" rtlCol="0" anchor="ctr"/>
-          <a:lstStyle/>
-          <a:p>
-            <a:pPr indent="0" marL="0">
-              <a:buNone/>
-            </a:pPr>
-            <a:r>
-              <a:rPr lang="en-US" sz="850" dirty="0">
-                <a:solidFill>
-                  <a:srgbClr val="C0392B"/>
-                </a:solidFill>
-                <a:latin typeface="Calibri" pitchFamily="34" charset="0"/>
-                <a:ea typeface="Calibri" pitchFamily="34" charset="-122"/>
-                <a:cs typeface="Calibri" pitchFamily="34" charset="-120"/>
-              </a:rPr>
-              <a:t>S3 Object Created: P001.END ファイル着地</a:t>
-            </a:r>
-            <a:endParaRPr lang="en-US" sz="850" dirty="0"/>
-          </a:p>
-        </p:txBody>
-      </p:sp>
-      <p:sp>
-        <p:nvSpPr>
-          <p:cNvPr id="19" name="Text 14"/>
-          <p:cNvSpPr/>
-          <p:nvPr/>
-        </p:nvSpPr>
-        <p:spPr>
-          <a:xfrm>
-            <a:off x="320040" y="3099816"/>
-            <a:ext cx="2834640" cy="228600"/>
-          </a:xfrm>
-          <a:prstGeom prst="rect">
-            <a:avLst/>
-          </a:prstGeom>
-          <a:noFill/>
-          <a:ln/>
-        </p:spPr>
-        <p:txBody>
-          <a:bodyPr wrap="square" lIns="0" tIns="0" rIns="0" bIns="0" rtlCol="0" anchor="ctr"/>
-          <a:lstStyle/>
-          <a:p>
-            <a:pPr algn="ctr" indent="0" marL="0">
-              <a:buNone/>
-            </a:pPr>
-            <a:r>
-              <a:rPr lang="en-US" sz="800" dirty="0">
-                <a:solidFill>
-                  <a:srgbClr val="555555"/>
-                </a:solidFill>
-                <a:latin typeface="Calibri" pitchFamily="34" charset="0"/>
-                <a:ea typeface="Calibri" pitchFamily="34" charset="-122"/>
-                <a:cs typeface="Calibri" pitchFamily="34" charset="-120"/>
-              </a:rPr>
-              <a:t>▼ EventBridge → StepFunction</a:t>
-            </a:r>
-            <a:endParaRPr lang="en-US" sz="800" dirty="0"/>
-          </a:p>
-        </p:txBody>
-      </p:sp>
-      <p:sp>
-        <p:nvSpPr>
-          <p:cNvPr id="20" name="Shape 15"/>
-          <p:cNvSpPr/>
-          <p:nvPr/>
-        </p:nvSpPr>
-        <p:spPr>
-          <a:xfrm>
-            <a:off x="320040" y="3346704"/>
-            <a:ext cx="2834640" cy="960120"/>
-          </a:xfrm>
-          <a:prstGeom prst="rect">
-            <a:avLst/>
-          </a:prstGeom>
-          <a:solidFill>
-            <a:srgbClr val="F0FFF0"/>
-          </a:solidFill>
-          <a:ln w="12700">
-            <a:solidFill>
-              <a:srgbClr val="1E6E9F"/>
-            </a:solidFill>
-            <a:prstDash val="solid"/>
-          </a:ln>
-        </p:spPr>
-      </p:sp>
-      <p:sp>
-        <p:nvSpPr>
-          <p:cNvPr id="21" name="Text 16"/>
-          <p:cNvSpPr/>
-          <p:nvPr/>
-        </p:nvSpPr>
-        <p:spPr>
-          <a:xfrm>
-            <a:off x="365760" y="3364992"/>
-            <a:ext cx="2743200" cy="923544"/>
-          </a:xfrm>
-          <a:prstGeom prst="rect">
-            <a:avLst/>
-          </a:prstGeom>
-          <a:noFill/>
-          <a:ln/>
-        </p:spPr>
-        <p:txBody>
-          <a:bodyPr wrap="square" lIns="0" tIns="0" rIns="0" bIns="0" rtlCol="0" anchor="ctr"/>
-          <a:lstStyle/>
-          <a:p>
-            <a:pPr indent="0" marL="0">
-              <a:buNone/>
-            </a:pPr>
-            <a:r>
-              <a:rPr lang="en-US" sz="850" dirty="0">
-                <a:solidFill>
-                  <a:srgbClr val="333333"/>
-                </a:solidFill>
-                <a:latin typeface="Calibri" pitchFamily="34" charset="0"/>
-                <a:ea typeface="Calibri" pitchFamily="34" charset="-122"/>
-                <a:cs typeface="Calibri" pitchFamily="34" charset="-120"/>
-              </a:rPr>
-              <a:t>SF: receive-pos-master-oc</a:t>
-            </a:r>
-            <a:endParaRPr lang="en-US" sz="850" dirty="0"/>
-          </a:p>
-          <a:p>
-            <a:pPr indent="0" marL="0">
-              <a:buNone/>
-            </a:pPr>
-            <a:r>
-              <a:rPr lang="en-US" sz="850" dirty="0">
-                <a:solidFill>
-                  <a:srgbClr val="333333"/>
-                </a:solidFill>
-                <a:latin typeface="Calibri" pitchFamily="34" charset="0"/>
-                <a:ea typeface="Calibri" pitchFamily="34" charset="-122"/>
-                <a:cs typeface="Calibri" pitchFamily="34" charset="-120"/>
-              </a:rPr>
-              <a:t>SF: import-pos-master-oc</a:t>
-            </a:r>
-            <a:endParaRPr lang="en-US" sz="850" dirty="0"/>
-          </a:p>
-          <a:p>
-            <a:pPr indent="0" marL="0">
-              <a:buNone/>
-            </a:pPr>
-            <a:r>
-              <a:rPr lang="en-US" sz="850" dirty="0">
-                <a:solidFill>
-                  <a:srgbClr val="333333"/>
-                </a:solidFill>
-                <a:latin typeface="Calibri" pitchFamily="34" charset="0"/>
-                <a:ea typeface="Calibri" pitchFamily="34" charset="-122"/>
-                <a:cs typeface="Calibri" pitchFamily="34" charset="-120"/>
-              </a:rPr>
-              <a:t>→ Aurora MySQL INSERT/UPDATE</a:t>
-            </a:r>
-            <a:endParaRPr lang="en-US" sz="850" dirty="0"/>
-          </a:p>
-          <a:p>
-            <a:pPr indent="0" marL="0">
-              <a:buNone/>
-            </a:pPr>
-            <a:r>
-              <a:rPr lang="en-US" sz="850" dirty="0">
-                <a:solidFill>
-                  <a:srgbClr val="333333"/>
-                </a:solidFill>
-                <a:latin typeface="Calibri" pitchFamily="34" charset="0"/>
-                <a:ea typeface="Calibri" pitchFamily="34" charset="-122"/>
-                <a:cs typeface="Calibri" pitchFamily="34" charset="-120"/>
-              </a:rPr>
-              <a:t>SF: create-txt-file-oc</a:t>
-            </a:r>
-            <a:endParaRPr lang="en-US" sz="850" dirty="0"/>
-          </a:p>
-          <a:p>
-            <a:pPr indent="0" marL="0">
-              <a:buNone/>
-            </a:pPr>
-            <a:r>
-              <a:rPr lang="en-US" sz="850" dirty="0">
-                <a:solidFill>
-                  <a:srgbClr val="333333"/>
-                </a:solidFill>
-                <a:latin typeface="Calibri" pitchFamily="34" charset="0"/>
-                <a:ea typeface="Calibri" pitchFamily="34" charset="-122"/>
-                <a:cs typeface="Calibri" pitchFamily="34" charset="-120"/>
-              </a:rPr>
-              <a:t>SF: sent-txt-file → BOX-PC</a:t>
-            </a:r>
-            <a:endParaRPr lang="en-US" sz="850" dirty="0"/>
-          </a:p>
-        </p:txBody>
-      </p:sp>
-      <p:sp>
-        <p:nvSpPr>
-          <p:cNvPr id="22" name="Text 17"/>
-          <p:cNvSpPr/>
-          <p:nvPr/>
-        </p:nvSpPr>
-        <p:spPr>
-          <a:xfrm>
-            <a:off x="320040" y="4343400"/>
-            <a:ext cx="2834640" cy="201168"/>
-          </a:xfrm>
-          <a:prstGeom prst="rect">
-            <a:avLst/>
-          </a:prstGeom>
-          <a:noFill/>
-          <a:ln/>
-        </p:spPr>
-        <p:txBody>
-          <a:bodyPr wrap="square" lIns="0" tIns="0" rIns="0" bIns="0" rtlCol="0" anchor="ctr"/>
-          <a:lstStyle/>
-          <a:p>
-            <a:pPr algn="ctr" indent="0" marL="0">
-              <a:buNone/>
-            </a:pPr>
-            <a:r>
-              <a:rPr lang="en-US" sz="1000" dirty="0">
-                <a:solidFill>
-                  <a:srgbClr val="1E6E9F"/>
-                </a:solidFill>
-                <a:latin typeface="Calibri" pitchFamily="34" charset="0"/>
-                <a:ea typeface="Calibri" pitchFamily="34" charset="-122"/>
-                <a:cs typeface="Calibri" pitchFamily="34" charset="-120"/>
-              </a:rPr>
-              <a:t>▼</a:t>
-            </a:r>
-            <a:endParaRPr lang="en-US" sz="1000" dirty="0"/>
-          </a:p>
-        </p:txBody>
-      </p:sp>
-      <p:sp>
-        <p:nvSpPr>
-          <p:cNvPr id="23" name="Shape 18"/>
-          <p:cNvSpPr/>
-          <p:nvPr/>
-        </p:nvSpPr>
-        <p:spPr>
-          <a:xfrm>
-            <a:off x="320040" y="4544568"/>
-            <a:ext cx="2834640" cy="347472"/>
-          </a:xfrm>
-          <a:prstGeom prst="rect">
-            <a:avLst/>
-          </a:prstGeom>
-          <a:solidFill>
-            <a:srgbClr val="D0232A"/>
-          </a:solidFill>
-          <a:ln w="12700">
-            <a:solidFill>
-              <a:srgbClr val="D0232A"/>
-            </a:solidFill>
-            <a:prstDash val="solid"/>
-          </a:ln>
-        </p:spPr>
-      </p:sp>
-      <p:sp>
-        <p:nvSpPr>
-          <p:cNvPr id="24" name="Text 19"/>
-          <p:cNvSpPr/>
-          <p:nvPr/>
-        </p:nvSpPr>
-        <p:spPr>
-          <a:xfrm>
-            <a:off x="320040" y="4544568"/>
-            <a:ext cx="2834640" cy="347472"/>
-          </a:xfrm>
-          <a:prstGeom prst="rect">
-            <a:avLst/>
-          </a:prstGeom>
-          <a:noFill/>
-          <a:ln/>
-        </p:spPr>
-        <p:txBody>
-          <a:bodyPr wrap="square" lIns="0" tIns="0" rIns="0" bIns="0" rtlCol="0" anchor="ctr"/>
-          <a:lstStyle/>
-          <a:p>
-            <a:pPr algn="ctr" indent="0" marL="0">
-              <a:buNone/>
-            </a:pPr>
-            <a:r>
-              <a:rPr lang="en-US" sz="850" b="1" dirty="0">
-                <a:solidFill>
-                  <a:srgbClr val="FFFFFF"/>
-                </a:solidFill>
-                <a:latin typeface="Calibri" pitchFamily="34" charset="0"/>
-                <a:ea typeface="Calibri" pitchFamily="34" charset="-122"/>
-                <a:cs typeface="Calibri" pitchFamily="34" charset="-120"/>
-              </a:rPr>
-              <a:t>Aurora MySQL 8.0 (Replica_Kasumi)</a:t>
-            </a:r>
-            <a:endParaRPr lang="en-US" sz="850" dirty="0"/>
-          </a:p>
-        </p:txBody>
-      </p:sp>
-      <p:sp>
-        <p:nvSpPr>
-          <p:cNvPr id="25" name="Shape 20"/>
-          <p:cNvSpPr/>
-          <p:nvPr/>
-        </p:nvSpPr>
-        <p:spPr>
-          <a:xfrm>
-            <a:off x="3429000" y="1508760"/>
-            <a:ext cx="2834640" cy="274320"/>
-          </a:xfrm>
-          <a:prstGeom prst="rect">
-            <a:avLst/>
-          </a:prstGeom>
-          <a:solidFill>
-            <a:srgbClr val="2E7D32"/>
-          </a:solidFill>
-          <a:ln w="12700">
-            <a:solidFill>
-              <a:srgbClr val="2E7D32"/>
-            </a:solidFill>
-            <a:prstDash val="solid"/>
-          </a:ln>
-        </p:spPr>
-      </p:sp>
-      <p:sp>
-        <p:nvSpPr>
-          <p:cNvPr id="26" name="Text 21"/>
-          <p:cNvSpPr/>
-          <p:nvPr/>
-        </p:nvSpPr>
-        <p:spPr>
-          <a:xfrm>
-            <a:off x="3429000" y="1508760"/>
-            <a:ext cx="2834640" cy="274320"/>
-          </a:xfrm>
-          <a:prstGeom prst="rect">
-            <a:avLst/>
-          </a:prstGeom>
-          <a:noFill/>
-          <a:ln/>
-        </p:spPr>
-        <p:txBody>
-          <a:bodyPr wrap="square" lIns="0" tIns="0" rIns="0" bIns="0" rtlCol="0" anchor="ctr"/>
-          <a:lstStyle/>
-          <a:p>
-            <a:pPr algn="ctr" indent="0" marL="0">
-              <a:buNone/>
-            </a:pPr>
-            <a:r>
-              <a:rPr lang="en-US" sz="1100" b="1" dirty="0">
-                <a:solidFill>
-                  <a:srgbClr val="FFFFFF"/>
-                </a:solidFill>
-                <a:latin typeface="Calibri" pitchFamily="34" charset="0"/>
-                <a:ea typeface="Calibri" pitchFamily="34" charset="-122"/>
-                <a:cs typeface="Calibri" pitchFamily="34" charset="-120"/>
-              </a:rPr>
-              <a:t>SG フロー</a:t>
-            </a:r>
-            <a:endParaRPr lang="en-US" sz="1100" dirty="0"/>
-          </a:p>
-        </p:txBody>
-      </p:sp>
-      <p:sp>
-        <p:nvSpPr>
-          <p:cNvPr id="27" name="Shape 22"/>
-          <p:cNvSpPr/>
-          <p:nvPr/>
-        </p:nvSpPr>
-        <p:spPr>
-          <a:xfrm>
-            <a:off x="3429000" y="1828800"/>
-            <a:ext cx="2834640" cy="502920"/>
-          </a:xfrm>
-          <a:prstGeom prst="rect">
-            <a:avLst/>
-          </a:prstGeom>
-          <a:solidFill>
-            <a:srgbClr val="EBF5FB"/>
-          </a:solidFill>
-          <a:ln w="12700">
-            <a:solidFill>
-              <a:srgbClr val="2E7D32"/>
-            </a:solidFill>
-            <a:prstDash val="solid"/>
-          </a:ln>
-        </p:spPr>
-      </p:sp>
-      <p:sp>
-        <p:nvSpPr>
-          <p:cNvPr id="28" name="Text 23"/>
-          <p:cNvSpPr/>
-          <p:nvPr/>
-        </p:nvSpPr>
-        <p:spPr>
-          <a:xfrm>
-            <a:off x="3474720" y="1847088"/>
-            <a:ext cx="2743200" cy="466344"/>
-          </a:xfrm>
-          <a:prstGeom prst="rect">
-            <a:avLst/>
-          </a:prstGeom>
-          <a:noFill/>
-          <a:ln/>
-        </p:spPr>
-        <p:txBody>
-          <a:bodyPr wrap="square" lIns="0" tIns="0" rIns="0" bIns="0" rtlCol="0" anchor="ctr"/>
-          <a:lstStyle/>
-          <a:p>
-            <a:pPr indent="0" marL="0">
-              <a:buNone/>
-            </a:pPr>
-            <a:r>
-              <a:rPr lang="en-US" sz="900" dirty="0">
-                <a:solidFill>
-                  <a:srgbClr val="2E7D32"/>
-                </a:solidFill>
-                <a:latin typeface="Calibri" pitchFamily="34" charset="0"/>
-                <a:ea typeface="Calibri" pitchFamily="34" charset="-122"/>
-                <a:cs typeface="Calibri" pitchFamily="34" charset="-120"/>
-              </a:rPr>
-              <a:t>連携元: POSデータ / VINX・PosSserver</a:t>
-            </a:r>
-            <a:endParaRPr lang="en-US" sz="900" dirty="0"/>
-          </a:p>
-        </p:txBody>
-      </p:sp>
-      <p:sp>
-        <p:nvSpPr>
-          <p:cNvPr id="29" name="Shape 24"/>
-          <p:cNvSpPr/>
-          <p:nvPr/>
-        </p:nvSpPr>
-        <p:spPr>
-          <a:xfrm>
-            <a:off x="3429000" y="2377440"/>
-            <a:ext cx="2834640" cy="320040"/>
-          </a:xfrm>
-          <a:prstGeom prst="rect">
-            <a:avLst/>
-          </a:prstGeom>
-          <a:solidFill>
-            <a:srgbClr val="FFF9E6"/>
-          </a:solidFill>
-          <a:ln w="12700">
-            <a:solidFill>
-              <a:srgbClr val="CCAA00"/>
-            </a:solidFill>
-            <a:prstDash val="solid"/>
-          </a:ln>
-        </p:spPr>
-      </p:sp>
-      <p:sp>
-        <p:nvSpPr>
-          <p:cNvPr id="30" name="Text 25"/>
-          <p:cNvSpPr/>
-          <p:nvPr/>
-        </p:nvSpPr>
-        <p:spPr>
-          <a:xfrm>
-            <a:off x="3474720" y="2395728"/>
-            <a:ext cx="2743200" cy="283464"/>
-          </a:xfrm>
-          <a:prstGeom prst="rect">
-            <a:avLst/>
-          </a:prstGeom>
-          <a:noFill/>
-          <a:ln/>
-        </p:spPr>
-        <p:txBody>
-          <a:bodyPr wrap="square" lIns="0" tIns="0" rIns="0" bIns="0" rtlCol="0" anchor="ctr"/>
-          <a:lstStyle/>
-          <a:p>
-            <a:pPr indent="0" marL="0">
-              <a:buNone/>
-            </a:pPr>
-            <a:r>
-              <a:rPr lang="en-US" sz="850" dirty="0">
-                <a:solidFill>
-                  <a:srgbClr val="7A6000"/>
-                </a:solidFill>
-                <a:latin typeface="Calibri" pitchFamily="34" charset="0"/>
-                <a:ea typeface="Calibri" pitchFamily="34" charset="-122"/>
-                <a:cs typeface="Calibri" pitchFamily="34" charset="-120"/>
-              </a:rPr>
-              <a:t>S3: pos-original/sg/receive/</a:t>
-            </a:r>
-            <a:endParaRPr lang="en-US" sz="850" dirty="0"/>
-          </a:p>
-        </p:txBody>
-      </p:sp>
-      <p:sp>
-        <p:nvSpPr>
-          <p:cNvPr id="31" name="Shape 26"/>
-          <p:cNvSpPr/>
-          <p:nvPr/>
-        </p:nvSpPr>
-        <p:spPr>
-          <a:xfrm>
-            <a:off x="3429000" y="2743200"/>
-            <a:ext cx="2834640" cy="320040"/>
-          </a:xfrm>
-          <a:prstGeom prst="rect">
-            <a:avLst/>
-          </a:prstGeom>
-          <a:solidFill>
-            <a:srgbClr val="FDEDEC"/>
-          </a:solidFill>
-          <a:ln w="12700">
-            <a:solidFill>
-              <a:srgbClr val="E74C3C"/>
-            </a:solidFill>
-            <a:prstDash val="solid"/>
-          </a:ln>
-        </p:spPr>
-      </p:sp>
-      <p:sp>
-        <p:nvSpPr>
-          <p:cNvPr id="32" name="Text 27"/>
-          <p:cNvSpPr/>
-          <p:nvPr/>
-        </p:nvSpPr>
-        <p:spPr>
-          <a:xfrm>
-            <a:off x="3474720" y="2761488"/>
-            <a:ext cx="2743200" cy="283464"/>
-          </a:xfrm>
-          <a:prstGeom prst="rect">
-            <a:avLst/>
-          </a:prstGeom>
-          <a:noFill/>
-          <a:ln/>
-        </p:spPr>
-        <p:txBody>
-          <a:bodyPr wrap="square" lIns="0" tIns="0" rIns="0" bIns="0" rtlCol="0" anchor="ctr"/>
-          <a:lstStyle/>
-          <a:p>
-            <a:pPr indent="0" marL="0">
-              <a:buNone/>
-            </a:pPr>
-            <a:r>
-              <a:rPr lang="en-US" sz="850" dirty="0">
-                <a:solidFill>
-                  <a:srgbClr val="C0392B"/>
-                </a:solidFill>
-                <a:latin typeface="Calibri" pitchFamily="34" charset="0"/>
-                <a:ea typeface="Calibri" pitchFamily="34" charset="-122"/>
-                <a:cs typeface="Calibri" pitchFamily="34" charset="-120"/>
-              </a:rPr>
-              <a:t>S3 Object Created: *.ZIP ファイル着地</a:t>
-            </a:r>
-            <a:endParaRPr lang="en-US" sz="850" dirty="0"/>
-          </a:p>
-        </p:txBody>
-      </p:sp>
-      <p:sp>
-        <p:nvSpPr>
-          <p:cNvPr id="33" name="Text 28"/>
-          <p:cNvSpPr/>
-          <p:nvPr/>
-        </p:nvSpPr>
-        <p:spPr>
-          <a:xfrm>
-            <a:off x="3429000" y="3099816"/>
-            <a:ext cx="2834640" cy="228600"/>
-          </a:xfrm>
-          <a:prstGeom prst="rect">
-            <a:avLst/>
-          </a:prstGeom>
-          <a:noFill/>
-          <a:ln/>
-        </p:spPr>
-        <p:txBody>
-          <a:bodyPr wrap="square" lIns="0" tIns="0" rIns="0" bIns="0" rtlCol="0" anchor="ctr"/>
-          <a:lstStyle/>
-          <a:p>
-            <a:pPr algn="ctr" indent="0" marL="0">
-              <a:buNone/>
-            </a:pPr>
-            <a:r>
-              <a:rPr lang="en-US" sz="800" dirty="0">
-                <a:solidFill>
-                  <a:srgbClr val="555555"/>
-                </a:solidFill>
-                <a:latin typeface="Calibri" pitchFamily="34" charset="0"/>
-                <a:ea typeface="Calibri" pitchFamily="34" charset="-122"/>
-                <a:cs typeface="Calibri" pitchFamily="34" charset="-120"/>
-              </a:rPr>
-              <a:t>▼ EventBridge → StepFunction</a:t>
-            </a:r>
-            <a:endParaRPr lang="en-US" sz="800" dirty="0"/>
-          </a:p>
-        </p:txBody>
-      </p:sp>
-      <p:sp>
-        <p:nvSpPr>
-          <p:cNvPr id="34" name="Shape 29"/>
-          <p:cNvSpPr/>
-          <p:nvPr/>
-        </p:nvSpPr>
-        <p:spPr>
-          <a:xfrm>
-            <a:off x="3429000" y="3346704"/>
-            <a:ext cx="2834640" cy="960120"/>
-          </a:xfrm>
-          <a:prstGeom prst="rect">
-            <a:avLst/>
-          </a:prstGeom>
-          <a:solidFill>
-            <a:srgbClr val="F0FFF0"/>
-          </a:solidFill>
-          <a:ln w="12700">
-            <a:solidFill>
-              <a:srgbClr val="2E7D32"/>
-            </a:solidFill>
-            <a:prstDash val="solid"/>
-          </a:ln>
-        </p:spPr>
-      </p:sp>
-      <p:sp>
-        <p:nvSpPr>
-          <p:cNvPr id="35" name="Text 30"/>
-          <p:cNvSpPr/>
-          <p:nvPr/>
-        </p:nvSpPr>
-        <p:spPr>
-          <a:xfrm>
-            <a:off x="3474720" y="3364992"/>
-            <a:ext cx="2743200" cy="923544"/>
-          </a:xfrm>
-          <a:prstGeom prst="rect">
-            <a:avLst/>
-          </a:prstGeom>
-          <a:noFill/>
-          <a:ln/>
-        </p:spPr>
-        <p:txBody>
-          <a:bodyPr wrap="square" lIns="0" tIns="0" rIns="0" bIns="0" rtlCol="0" anchor="ctr"/>
-          <a:lstStyle/>
-          <a:p>
-            <a:pPr indent="0" marL="0">
-              <a:buNone/>
-            </a:pPr>
-            <a:r>
-              <a:rPr lang="en-US" sz="850" dirty="0">
-                <a:solidFill>
-                  <a:srgbClr val="333333"/>
-                </a:solidFill>
-                <a:latin typeface="Calibri" pitchFamily="34" charset="0"/>
-                <a:ea typeface="Calibri" pitchFamily="34" charset="-122"/>
-                <a:cs typeface="Calibri" pitchFamily="34" charset="-120"/>
-              </a:rPr>
-              <a:t>SF: receive-and-import-pos-master-sg</a:t>
-            </a:r>
-            <a:endParaRPr lang="en-US" sz="850" dirty="0"/>
-          </a:p>
-          <a:p>
-            <a:pPr indent="0" marL="0">
-              <a:buNone/>
-            </a:pPr>
-            <a:r>
-              <a:rPr lang="en-US" sz="850" dirty="0">
-                <a:solidFill>
-                  <a:srgbClr val="333333"/>
-                </a:solidFill>
-                <a:latin typeface="Calibri" pitchFamily="34" charset="0"/>
-                <a:ea typeface="Calibri" pitchFamily="34" charset="-122"/>
-                <a:cs typeface="Calibri" pitchFamily="34" charset="-120"/>
-              </a:rPr>
-              <a:t>SQS: store-code-queue-sg.fifo</a:t>
-            </a:r>
-            <a:endParaRPr lang="en-US" sz="850" dirty="0"/>
-          </a:p>
-          <a:p>
-            <a:pPr indent="0" marL="0">
-              <a:buNone/>
-            </a:pPr>
-            <a:r>
-              <a:rPr lang="en-US" sz="850" dirty="0">
-                <a:solidFill>
-                  <a:srgbClr val="333333"/>
-                </a:solidFill>
-                <a:latin typeface="Calibri" pitchFamily="34" charset="0"/>
-                <a:ea typeface="Calibri" pitchFamily="34" charset="-122"/>
-                <a:cs typeface="Calibri" pitchFamily="34" charset="-120"/>
-              </a:rPr>
-              <a:t>→ Aurora MySQL INSERT/UPDATE</a:t>
-            </a:r>
-            <a:endParaRPr lang="en-US" sz="850" dirty="0"/>
-          </a:p>
-          <a:p>
-            <a:pPr indent="0" marL="0">
-              <a:buNone/>
-            </a:pPr>
-            <a:r>
-              <a:rPr lang="en-US" sz="850" dirty="0">
-                <a:solidFill>
-                  <a:srgbClr val="333333"/>
-                </a:solidFill>
-                <a:latin typeface="Calibri" pitchFamily="34" charset="0"/>
-                <a:ea typeface="Calibri" pitchFamily="34" charset="-122"/>
-                <a:cs typeface="Calibri" pitchFamily="34" charset="-120"/>
-              </a:rPr>
-              <a:t>SQS: export-queue-sg.fifo</a:t>
-            </a:r>
-            <a:endParaRPr lang="en-US" sz="850" dirty="0"/>
-          </a:p>
-          <a:p>
-            <a:pPr indent="0" marL="0">
-              <a:buNone/>
-            </a:pPr>
-            <a:r>
-              <a:rPr lang="en-US" sz="850" dirty="0">
-                <a:solidFill>
-                  <a:srgbClr val="333333"/>
-                </a:solidFill>
-                <a:latin typeface="Calibri" pitchFamily="34" charset="0"/>
-                <a:ea typeface="Calibri" pitchFamily="34" charset="-122"/>
-                <a:cs typeface="Calibri" pitchFamily="34" charset="-120"/>
-              </a:rPr>
-              <a:t>SF: create-txt-file-sg</a:t>
-            </a:r>
-            <a:endParaRPr lang="en-US" sz="850" dirty="0"/>
-          </a:p>
-          <a:p>
-            <a:pPr indent="0" marL="0">
-              <a:buNone/>
-            </a:pPr>
-            <a:r>
-              <a:rPr lang="en-US" sz="850" dirty="0">
-                <a:solidFill>
-                  <a:srgbClr val="333333"/>
-                </a:solidFill>
-                <a:latin typeface="Calibri" pitchFamily="34" charset="0"/>
-                <a:ea typeface="Calibri" pitchFamily="34" charset="-122"/>
-                <a:cs typeface="Calibri" pitchFamily="34" charset="-120"/>
-              </a:rPr>
-              <a:t>SF: sent-txt-file → BOX-PC</a:t>
-            </a:r>
-            <a:endParaRPr lang="en-US" sz="850" dirty="0"/>
-          </a:p>
-        </p:txBody>
-      </p:sp>
-      <p:sp>
-        <p:nvSpPr>
-          <p:cNvPr id="36" name="Text 31"/>
-          <p:cNvSpPr/>
-          <p:nvPr/>
-        </p:nvSpPr>
-        <p:spPr>
-          <a:xfrm>
-            <a:off x="3429000" y="4343400"/>
-            <a:ext cx="2834640" cy="201168"/>
-          </a:xfrm>
-          <a:prstGeom prst="rect">
-            <a:avLst/>
-          </a:prstGeom>
-          <a:noFill/>
-          <a:ln/>
-        </p:spPr>
-        <p:txBody>
-          <a:bodyPr wrap="square" lIns="0" tIns="0" rIns="0" bIns="0" rtlCol="0" anchor="ctr"/>
-          <a:lstStyle/>
-          <a:p>
-            <a:pPr algn="ctr" indent="0" marL="0">
-              <a:buNone/>
-            </a:pPr>
-            <a:r>
-              <a:rPr lang="en-US" sz="1000" dirty="0">
-                <a:solidFill>
-                  <a:srgbClr val="2E7D32"/>
-                </a:solidFill>
-                <a:latin typeface="Calibri" pitchFamily="34" charset="0"/>
-                <a:ea typeface="Calibri" pitchFamily="34" charset="-122"/>
-                <a:cs typeface="Calibri" pitchFamily="34" charset="-120"/>
-              </a:rPr>
-              <a:t>▼</a:t>
-            </a:r>
-            <a:endParaRPr lang="en-US" sz="1000" dirty="0"/>
-          </a:p>
-        </p:txBody>
-      </p:sp>
-      <p:sp>
-        <p:nvSpPr>
-          <p:cNvPr id="37" name="Shape 32"/>
-          <p:cNvSpPr/>
-          <p:nvPr/>
-        </p:nvSpPr>
-        <p:spPr>
-          <a:xfrm>
-            <a:off x="3429000" y="4544568"/>
-            <a:ext cx="2834640" cy="347472"/>
-          </a:xfrm>
-          <a:prstGeom prst="rect">
-            <a:avLst/>
-          </a:prstGeom>
-          <a:solidFill>
-            <a:srgbClr val="D0232A"/>
-          </a:solidFill>
-          <a:ln w="12700">
-            <a:solidFill>
-              <a:srgbClr val="D0232A"/>
-            </a:solidFill>
-            <a:prstDash val="solid"/>
-          </a:ln>
-        </p:spPr>
-      </p:sp>
-      <p:sp>
-        <p:nvSpPr>
-          <p:cNvPr id="38" name="Text 33"/>
-          <p:cNvSpPr/>
-          <p:nvPr/>
-        </p:nvSpPr>
-        <p:spPr>
-          <a:xfrm>
-            <a:off x="3429000" y="4544568"/>
-            <a:ext cx="2834640" cy="347472"/>
-          </a:xfrm>
-          <a:prstGeom prst="rect">
-            <a:avLst/>
-          </a:prstGeom>
-          <a:noFill/>
-          <a:ln/>
-        </p:spPr>
-        <p:txBody>
-          <a:bodyPr wrap="square" lIns="0" tIns="0" rIns="0" bIns="0" rtlCol="0" anchor="ctr"/>
-          <a:lstStyle/>
-          <a:p>
-            <a:pPr algn="ctr" indent="0" marL="0">
-              <a:buNone/>
-            </a:pPr>
-            <a:r>
-              <a:rPr lang="en-US" sz="850" b="1" dirty="0">
-                <a:solidFill>
-                  <a:srgbClr val="FFFFFF"/>
-                </a:solidFill>
-                <a:latin typeface="Calibri" pitchFamily="34" charset="0"/>
-                <a:ea typeface="Calibri" pitchFamily="34" charset="-122"/>
-                <a:cs typeface="Calibri" pitchFamily="34" charset="-120"/>
-              </a:rPr>
-              <a:t>Aurora MySQL 8.0 (Replica_Kasumi)</a:t>
-            </a:r>
-            <a:endParaRPr lang="en-US" sz="850" dirty="0"/>
-          </a:p>
-        </p:txBody>
-      </p:sp>
-      <p:sp>
-        <p:nvSpPr>
-          <p:cNvPr id="39" name="Shape 34"/>
-          <p:cNvSpPr/>
-          <p:nvPr/>
-        </p:nvSpPr>
-        <p:spPr>
-          <a:xfrm>
-            <a:off x="6537960" y="1508760"/>
-            <a:ext cx="2834640" cy="274320"/>
-          </a:xfrm>
-          <a:prstGeom prst="rect">
-            <a:avLst/>
-          </a:prstGeom>
-          <a:solidFill>
-            <a:srgbClr val="7B3F00"/>
-          </a:solidFill>
-          <a:ln w="12700">
-            <a:solidFill>
-              <a:srgbClr val="7B3F00"/>
-            </a:solidFill>
-            <a:prstDash val="solid"/>
-          </a:ln>
-        </p:spPr>
-      </p:sp>
-      <p:sp>
-        <p:nvSpPr>
-          <p:cNvPr id="40" name="Text 35"/>
-          <p:cNvSpPr/>
-          <p:nvPr/>
-        </p:nvSpPr>
-        <p:spPr>
-          <a:xfrm>
-            <a:off x="6537960" y="1508760"/>
-            <a:ext cx="2834640" cy="274320"/>
-          </a:xfrm>
-          <a:prstGeom prst="rect">
-            <a:avLst/>
-          </a:prstGeom>
-          <a:noFill/>
-          <a:ln/>
-        </p:spPr>
-        <p:txBody>
-          <a:bodyPr wrap="square" lIns="0" tIns="0" rIns="0" bIns="0" rtlCol="0" anchor="ctr"/>
-          <a:lstStyle/>
-          <a:p>
-            <a:pPr algn="ctr" indent="0" marL="0">
-              <a:buNone/>
-            </a:pPr>
-            <a:r>
-              <a:rPr lang="en-US" sz="1100" b="1" dirty="0">
-                <a:solidFill>
-                  <a:srgbClr val="FFFFFF"/>
-                </a:solidFill>
-                <a:latin typeface="Calibri" pitchFamily="34" charset="0"/>
-                <a:ea typeface="Calibri" pitchFamily="34" charset="-122"/>
-                <a:cs typeface="Calibri" pitchFamily="34" charset="-120"/>
-              </a:rPr>
-              <a:t>SH フロー</a:t>
-            </a:r>
-            <a:endParaRPr lang="en-US" sz="1100" dirty="0"/>
-          </a:p>
-        </p:txBody>
-      </p:sp>
-      <p:sp>
-        <p:nvSpPr>
-          <p:cNvPr id="41" name="Shape 36"/>
-          <p:cNvSpPr/>
-          <p:nvPr/>
-        </p:nvSpPr>
-        <p:spPr>
-          <a:xfrm>
-            <a:off x="6537960" y="1828800"/>
-            <a:ext cx="2834640" cy="502920"/>
-          </a:xfrm>
-          <a:prstGeom prst="rect">
-            <a:avLst/>
-          </a:prstGeom>
-          <a:solidFill>
-            <a:srgbClr val="EBF5FB"/>
-          </a:solidFill>
-          <a:ln w="12700">
-            <a:solidFill>
-              <a:srgbClr val="7B3F00"/>
-            </a:solidFill>
-            <a:prstDash val="solid"/>
-          </a:ln>
-        </p:spPr>
-      </p:sp>
-      <p:sp>
-        <p:nvSpPr>
-          <p:cNvPr id="42" name="Text 37"/>
-          <p:cNvSpPr/>
-          <p:nvPr/>
-        </p:nvSpPr>
-        <p:spPr>
-          <a:xfrm>
-            <a:off x="6583680" y="1847088"/>
-            <a:ext cx="2743200" cy="466344"/>
-          </a:xfrm>
-          <a:prstGeom prst="rect">
-            <a:avLst/>
-          </a:prstGeom>
-          <a:noFill/>
-          <a:ln/>
-        </p:spPr>
-        <p:txBody>
-          <a:bodyPr wrap="square" lIns="0" tIns="0" rIns="0" bIns="0" rtlCol="0" anchor="ctr"/>
-          <a:lstStyle/>
-          <a:p>
-            <a:pPr indent="0" marL="0">
-              <a:buNone/>
-            </a:pPr>
-            <a:r>
-              <a:rPr lang="en-US" sz="900" dirty="0">
-                <a:solidFill>
-                  <a:srgbClr val="7B3F00"/>
-                </a:solidFill>
-                <a:latin typeface="Calibri" pitchFamily="34" charset="0"/>
-                <a:ea typeface="Calibri" pitchFamily="34" charset="-122"/>
-                <a:cs typeface="Calibri" pitchFamily="34" charset="-120"/>
-              </a:rPr>
-              <a:t>連携元: 棚情報 / SHARP・P003</a:t>
-            </a:r>
-            <a:endParaRPr lang="en-US" sz="900" dirty="0"/>
-          </a:p>
-        </p:txBody>
-      </p:sp>
-      <p:sp>
-        <p:nvSpPr>
-          <p:cNvPr id="43" name="Shape 38"/>
-          <p:cNvSpPr/>
-          <p:nvPr/>
-        </p:nvSpPr>
-        <p:spPr>
-          <a:xfrm>
-            <a:off x="6537960" y="2377440"/>
-            <a:ext cx="2834640" cy="320040"/>
-          </a:xfrm>
-          <a:prstGeom prst="rect">
-            <a:avLst/>
-          </a:prstGeom>
-          <a:solidFill>
-            <a:srgbClr val="FFF9E6"/>
-          </a:solidFill>
-          <a:ln w="12700">
-            <a:solidFill>
-              <a:srgbClr val="CCAA00"/>
-            </a:solidFill>
-            <a:prstDash val="solid"/>
-          </a:ln>
-        </p:spPr>
-      </p:sp>
-      <p:sp>
-        <p:nvSpPr>
-          <p:cNvPr id="44" name="Text 39"/>
-          <p:cNvSpPr/>
-          <p:nvPr/>
-        </p:nvSpPr>
-        <p:spPr>
-          <a:xfrm>
-            <a:off x="6583680" y="2395728"/>
-            <a:ext cx="2743200" cy="283464"/>
-          </a:xfrm>
-          <a:prstGeom prst="rect">
-            <a:avLst/>
-          </a:prstGeom>
-          <a:noFill/>
-          <a:ln/>
-        </p:spPr>
-        <p:txBody>
-          <a:bodyPr wrap="square" lIns="0" tIns="0" rIns="0" bIns="0" rtlCol="0" anchor="ctr"/>
-          <a:lstStyle/>
-          <a:p>
-            <a:pPr indent="0" marL="0">
-              <a:buNone/>
-            </a:pPr>
-            <a:r>
-              <a:rPr lang="en-US" sz="850" dirty="0">
-                <a:solidFill>
-                  <a:srgbClr val="7A6000"/>
-                </a:solidFill>
-                <a:latin typeface="Calibri" pitchFamily="34" charset="0"/>
-                <a:ea typeface="Calibri" pitchFamily="34" charset="-122"/>
-                <a:cs typeface="Calibri" pitchFamily="34" charset="-120"/>
-              </a:rPr>
-              <a:t>S3: pos-original/sh/</a:t>
-            </a:r>
-            <a:endParaRPr lang="en-US" sz="850" dirty="0"/>
-          </a:p>
-        </p:txBody>
-      </p:sp>
-      <p:sp>
-        <p:nvSpPr>
-          <p:cNvPr id="45" name="Shape 40"/>
-          <p:cNvSpPr/>
-          <p:nvPr/>
-        </p:nvSpPr>
-        <p:spPr>
-          <a:xfrm>
-            <a:off x="6537960" y="2743200"/>
-            <a:ext cx="2834640" cy="320040"/>
-          </a:xfrm>
-          <a:prstGeom prst="rect">
-            <a:avLst/>
-          </a:prstGeom>
-          <a:solidFill>
-            <a:srgbClr val="FDEDEC"/>
-          </a:solidFill>
-          <a:ln w="12700">
-            <a:solidFill>
-              <a:srgbClr val="E74C3C"/>
-            </a:solidFill>
-            <a:prstDash val="solid"/>
-          </a:ln>
-        </p:spPr>
-      </p:sp>
-      <p:sp>
-        <p:nvSpPr>
-          <p:cNvPr id="46" name="Text 41"/>
-          <p:cNvSpPr/>
-          <p:nvPr/>
-        </p:nvSpPr>
-        <p:spPr>
-          <a:xfrm>
-            <a:off x="6583680" y="2761488"/>
-            <a:ext cx="2743200" cy="283464"/>
-          </a:xfrm>
-          <a:prstGeom prst="rect">
-            <a:avLst/>
-          </a:prstGeom>
-          <a:noFill/>
-          <a:ln/>
-        </p:spPr>
-        <p:txBody>
-          <a:bodyPr wrap="square" lIns="0" tIns="0" rIns="0" bIns="0" rtlCol="0" anchor="ctr"/>
-          <a:lstStyle/>
-          <a:p>
-            <a:pPr indent="0" marL="0">
-              <a:buNone/>
-            </a:pPr>
-            <a:r>
-              <a:rPr lang="en-US" sz="850" dirty="0">
-                <a:solidFill>
-                  <a:srgbClr val="C0392B"/>
-                </a:solidFill>
-                <a:latin typeface="Calibri" pitchFamily="34" charset="0"/>
-                <a:ea typeface="Calibri" pitchFamily="34" charset="-122"/>
-                <a:cs typeface="Calibri" pitchFamily="34" charset="-120"/>
-              </a:rPr>
-              <a:t>S3 Object Created: .end/.END ファイル着地</a:t>
-            </a:r>
-            <a:endParaRPr lang="en-US" sz="850" dirty="0"/>
-          </a:p>
-        </p:txBody>
-      </p:sp>
-      <p:sp>
-        <p:nvSpPr>
-          <p:cNvPr id="47" name="Text 42"/>
-          <p:cNvSpPr/>
-          <p:nvPr/>
-        </p:nvSpPr>
-        <p:spPr>
-          <a:xfrm>
-            <a:off x="6537960" y="3099816"/>
-            <a:ext cx="2834640" cy="228600"/>
-          </a:xfrm>
-          <a:prstGeom prst="rect">
-            <a:avLst/>
-          </a:prstGeom>
-          <a:noFill/>
-          <a:ln/>
-        </p:spPr>
-        <p:txBody>
-          <a:bodyPr wrap="square" lIns="0" tIns="0" rIns="0" bIns="0" rtlCol="0" anchor="ctr"/>
-          <a:lstStyle/>
-          <a:p>
-            <a:pPr algn="ctr" indent="0" marL="0">
-              <a:buNone/>
-            </a:pPr>
-            <a:r>
-              <a:rPr lang="en-US" sz="800" dirty="0">
-                <a:solidFill>
-                  <a:srgbClr val="555555"/>
-                </a:solidFill>
-                <a:latin typeface="Calibri" pitchFamily="34" charset="0"/>
-                <a:ea typeface="Calibri" pitchFamily="34" charset="-122"/>
-                <a:cs typeface="Calibri" pitchFamily="34" charset="-120"/>
-              </a:rPr>
-              <a:t>▼ EventBridge → StepFunction</a:t>
-            </a:r>
-            <a:endParaRPr lang="en-US" sz="800" dirty="0"/>
-          </a:p>
-        </p:txBody>
-      </p:sp>
-      <p:sp>
-        <p:nvSpPr>
-          <p:cNvPr id="48" name="Shape 43"/>
-          <p:cNvSpPr/>
-          <p:nvPr/>
-        </p:nvSpPr>
-        <p:spPr>
-          <a:xfrm>
-            <a:off x="6537960" y="3346704"/>
-            <a:ext cx="2834640" cy="960120"/>
-          </a:xfrm>
-          <a:prstGeom prst="rect">
-            <a:avLst/>
-          </a:prstGeom>
-          <a:solidFill>
-            <a:srgbClr val="F0FFF0"/>
-          </a:solidFill>
-          <a:ln w="12700">
-            <a:solidFill>
-              <a:srgbClr val="7B3F00"/>
-            </a:solidFill>
-            <a:prstDash val="solid"/>
-          </a:ln>
-        </p:spPr>
-      </p:sp>
-      <p:sp>
-        <p:nvSpPr>
-          <p:cNvPr id="49" name="Text 44"/>
-          <p:cNvSpPr/>
-          <p:nvPr/>
-        </p:nvSpPr>
-        <p:spPr>
-          <a:xfrm>
-            <a:off x="6583680" y="3364992"/>
-            <a:ext cx="2743200" cy="923544"/>
-          </a:xfrm>
-          <a:prstGeom prst="rect">
-            <a:avLst/>
-          </a:prstGeom>
-          <a:noFill/>
-          <a:ln/>
-        </p:spPr>
-        <p:txBody>
-          <a:bodyPr wrap="square" lIns="0" tIns="0" rIns="0" bIns="0" rtlCol="0" anchor="ctr"/>
-          <a:lstStyle/>
-          <a:p>
-            <a:pPr indent="0" marL="0">
-              <a:buNone/>
-            </a:pPr>
-            <a:r>
-              <a:rPr lang="en-US" sz="850" dirty="0">
-                <a:solidFill>
-                  <a:srgbClr val="333333"/>
-                </a:solidFill>
-                <a:latin typeface="Calibri" pitchFamily="34" charset="0"/>
-                <a:ea typeface="Calibri" pitchFamily="34" charset="-122"/>
-                <a:cs typeface="Calibri" pitchFamily="34" charset="-120"/>
-              </a:rPr>
-              <a:t>SF: import-pos-master-sh</a:t>
-            </a:r>
-            <a:endParaRPr lang="en-US" sz="850" dirty="0"/>
-          </a:p>
-          <a:p>
-            <a:pPr indent="0" marL="0">
-              <a:buNone/>
-            </a:pPr>
-            <a:r>
-              <a:rPr lang="en-US" sz="850" dirty="0">
-                <a:solidFill>
-                  <a:srgbClr val="333333"/>
-                </a:solidFill>
-                <a:latin typeface="Calibri" pitchFamily="34" charset="0"/>
-                <a:ea typeface="Calibri" pitchFamily="34" charset="-122"/>
-                <a:cs typeface="Calibri" pitchFamily="34" charset="-120"/>
-              </a:rPr>
-              <a:t>→ Aurora MySQL INSERT/UPDATE</a:t>
-            </a:r>
-            <a:endParaRPr lang="en-US" sz="850" dirty="0"/>
-          </a:p>
-          <a:p>
-            <a:pPr indent="0" marL="0">
-              <a:buNone/>
-            </a:pPr>
-            <a:r>
-              <a:rPr lang="en-US" sz="850" dirty="0">
-                <a:solidFill>
-                  <a:srgbClr val="333333"/>
-                </a:solidFill>
-                <a:latin typeface="Calibri" pitchFamily="34" charset="0"/>
-                <a:ea typeface="Calibri" pitchFamily="34" charset="-122"/>
-                <a:cs typeface="Calibri" pitchFamily="34" charset="-120"/>
-              </a:rPr>
-              <a:t>SF: sent-txt-file → BOX-PC</a:t>
-            </a:r>
-            <a:endParaRPr lang="en-US" sz="850" dirty="0"/>
-          </a:p>
-        </p:txBody>
-      </p:sp>
-      <p:sp>
-        <p:nvSpPr>
-          <p:cNvPr id="50" name="Text 45"/>
-          <p:cNvSpPr/>
-          <p:nvPr/>
-        </p:nvSpPr>
-        <p:spPr>
-          <a:xfrm>
-            <a:off x="6537960" y="4343400"/>
-            <a:ext cx="2834640" cy="201168"/>
-          </a:xfrm>
-          <a:prstGeom prst="rect">
-            <a:avLst/>
-          </a:prstGeom>
-          <a:noFill/>
-          <a:ln/>
-        </p:spPr>
-        <p:txBody>
-          <a:bodyPr wrap="square" lIns="0" tIns="0" rIns="0" bIns="0" rtlCol="0" anchor="ctr"/>
-          <a:lstStyle/>
-          <a:p>
-            <a:pPr algn="ctr" indent="0" marL="0">
-              <a:buNone/>
-            </a:pPr>
-            <a:r>
-              <a:rPr lang="en-US" sz="1000" dirty="0">
-                <a:solidFill>
-                  <a:srgbClr val="7B3F00"/>
-                </a:solidFill>
-                <a:latin typeface="Calibri" pitchFamily="34" charset="0"/>
-                <a:ea typeface="Calibri" pitchFamily="34" charset="-122"/>
-                <a:cs typeface="Calibri" pitchFamily="34" charset="-120"/>
-              </a:rPr>
-              <a:t>▼</a:t>
-            </a:r>
-            <a:endParaRPr lang="en-US" sz="1000" dirty="0"/>
-          </a:p>
-        </p:txBody>
-      </p:sp>
-      <p:sp>
-        <p:nvSpPr>
-          <p:cNvPr id="51" name="Shape 46"/>
-          <p:cNvSpPr/>
-          <p:nvPr/>
-        </p:nvSpPr>
-        <p:spPr>
-          <a:xfrm>
-            <a:off x="6537960" y="4544568"/>
-            <a:ext cx="2834640" cy="347472"/>
-          </a:xfrm>
-          <a:prstGeom prst="rect">
-            <a:avLst/>
-          </a:prstGeom>
-          <a:solidFill>
-            <a:srgbClr val="D0232A"/>
-          </a:solidFill>
-          <a:ln w="12700">
-            <a:solidFill>
-              <a:srgbClr val="D0232A"/>
-            </a:solidFill>
-            <a:prstDash val="solid"/>
-          </a:ln>
-        </p:spPr>
-      </p:sp>
-      <p:sp>
-        <p:nvSpPr>
-          <p:cNvPr id="52" name="Text 47"/>
-          <p:cNvSpPr/>
-          <p:nvPr/>
-        </p:nvSpPr>
-        <p:spPr>
-          <a:xfrm>
-            <a:off x="6537960" y="4544568"/>
-            <a:ext cx="2834640" cy="347472"/>
-          </a:xfrm>
-          <a:prstGeom prst="rect">
-            <a:avLst/>
-          </a:prstGeom>
-          <a:noFill/>
-          <a:ln/>
-        </p:spPr>
-        <p:txBody>
-          <a:bodyPr wrap="square" lIns="0" tIns="0" rIns="0" bIns="0" rtlCol="0" anchor="ctr"/>
-          <a:lstStyle/>
-          <a:p>
-            <a:pPr algn="ctr" indent="0" marL="0">
-              <a:buNone/>
-            </a:pPr>
-            <a:r>
-              <a:rPr lang="en-US" sz="850" b="1" dirty="0">
-                <a:solidFill>
-                  <a:srgbClr val="FFFFFF"/>
-                </a:solidFill>
-                <a:latin typeface="Calibri" pitchFamily="34" charset="0"/>
-                <a:ea typeface="Calibri" pitchFamily="34" charset="-122"/>
-                <a:cs typeface="Calibri" pitchFamily="34" charset="-120"/>
-              </a:rPr>
-              <a:t>Aurora MySQL 8.0 (Replica_Kasumi)</a:t>
-            </a:r>
-            <a:endParaRPr lang="en-US" sz="850" dirty="0"/>
-          </a:p>
-        </p:txBody>
-      </p:sp>
-      <p:sp>
-        <p:nvSpPr>
-          <p:cNvPr id="53" name="Text 48"/>
-          <p:cNvSpPr/>
-          <p:nvPr/>
-        </p:nvSpPr>
-        <p:spPr>
-          <a:xfrm>
-            <a:off x="320040" y="4983480"/>
-            <a:ext cx="9144000" cy="256032"/>
+            <a:off x="310896" y="1783080"/>
+            <a:ext cx="2871216" cy="347472"/>
           </a:xfrm>
           <a:prstGeom prst="rect">
             <a:avLst/>
@@ -8593,15 +7109,2433 @@
             <a:r>
               <a:rPr lang="en-US" sz="800" dirty="0">
                 <a:solidFill>
+                  <a:srgbClr val="1E6E9F"/>
+                </a:solidFill>
+                <a:latin typeface="Calibri" pitchFamily="34" charset="0"/>
+                <a:ea typeface="Calibri" pitchFamily="34" charset="-122"/>
+                <a:cs typeface="Calibri" pitchFamily="34" charset="-120"/>
+              </a:rPr>
+              <a:t>連携元: 基幹データ</a:t>
+            </a:r>
+            <a:endParaRPr lang="en-US" sz="800" dirty="0"/>
+          </a:p>
+          <a:p>
+            <a:pPr indent="0" marL="0">
+              <a:buNone/>
+            </a:pPr>
+            <a:r>
+              <a:rPr lang="en-US" sz="800" dirty="0">
+                <a:solidFill>
+                  <a:srgbClr val="1E6E9F"/>
+                </a:solidFill>
+                <a:latin typeface="Calibri" pitchFamily="34" charset="0"/>
+                <a:ea typeface="Calibri" pitchFamily="34" charset="-122"/>
+                <a:cs typeface="Calibri" pitchFamily="34" charset="-120"/>
+              </a:rPr>
+              <a:t>BIPROGY / OpenCentral</a:t>
+            </a:r>
+            <a:endParaRPr lang="en-US" sz="800" dirty="0"/>
+          </a:p>
+        </p:txBody>
+      </p:sp>
+      <p:sp>
+        <p:nvSpPr>
+          <p:cNvPr id="15" name="Shape 10"/>
+          <p:cNvSpPr/>
+          <p:nvPr/>
+        </p:nvSpPr>
+        <p:spPr>
+          <a:xfrm>
+            <a:off x="274320" y="2176272"/>
+            <a:ext cx="2944368" cy="365760"/>
+          </a:xfrm>
+          <a:prstGeom prst="rect">
+            <a:avLst/>
+          </a:prstGeom>
+          <a:solidFill>
+            <a:srgbClr val="FFF9E6"/>
+          </a:solidFill>
+          <a:ln w="12700">
+            <a:solidFill>
+              <a:srgbClr val="CCAA00"/>
+            </a:solidFill>
+            <a:prstDash val="solid"/>
+          </a:ln>
+        </p:spPr>
+      </p:sp>
+      <p:sp>
+        <p:nvSpPr>
+          <p:cNvPr id="16" name="Text 11"/>
+          <p:cNvSpPr/>
+          <p:nvPr/>
+        </p:nvSpPr>
+        <p:spPr>
+          <a:xfrm>
+            <a:off x="310896" y="2194560"/>
+            <a:ext cx="2871216" cy="329184"/>
+          </a:xfrm>
+          <a:prstGeom prst="rect">
+            <a:avLst/>
+          </a:prstGeom>
+          <a:noFill/>
+          <a:ln/>
+        </p:spPr>
+        <p:txBody>
+          <a:bodyPr wrap="square" lIns="0" tIns="0" rIns="0" bIns="0" rtlCol="0" anchor="ctr"/>
+          <a:lstStyle/>
+          <a:p>
+            <a:pPr indent="0" marL="0">
+              <a:buNone/>
+            </a:pPr>
+            <a:r>
+              <a:rPr lang="en-US" sz="750" dirty="0">
+                <a:solidFill>
+                  <a:srgbClr val="7A6000"/>
+                </a:solidFill>
+                <a:latin typeface="Calibri" pitchFamily="34" charset="0"/>
+                <a:ea typeface="Calibri" pitchFamily="34" charset="-122"/>
+                <a:cs typeface="Calibri" pitchFamily="34" charset="-120"/>
+              </a:rPr>
+              <a:t>S3: pos-original/oc/receive/</a:t>
+            </a:r>
+            <a:endParaRPr lang="en-US" sz="750" dirty="0"/>
+          </a:p>
+          <a:p>
+            <a:pPr indent="0" marL="0">
+              <a:buNone/>
+            </a:pPr>
+            <a:r>
+              <a:rPr lang="en-US" sz="750" dirty="0">
+                <a:solidFill>
+                  <a:srgbClr val="7A6000"/>
+                </a:solidFill>
+                <a:latin typeface="Calibri" pitchFamily="34" charset="0"/>
+                <a:ea typeface="Calibri" pitchFamily="34" charset="-122"/>
+                <a:cs typeface="Calibri" pitchFamily="34" charset="-120"/>
+              </a:rPr>
+              <a:t>{table_name}.csv + .END</a:t>
+            </a:r>
+            <a:endParaRPr lang="en-US" sz="750" dirty="0"/>
+          </a:p>
+        </p:txBody>
+      </p:sp>
+      <p:sp>
+        <p:nvSpPr>
+          <p:cNvPr id="17" name="Shape 12"/>
+          <p:cNvSpPr/>
+          <p:nvPr/>
+        </p:nvSpPr>
+        <p:spPr>
+          <a:xfrm>
+            <a:off x="274320" y="2569464"/>
+            <a:ext cx="2944368" cy="347472"/>
+          </a:xfrm>
+          <a:prstGeom prst="rect">
+            <a:avLst/>
+          </a:prstGeom>
+          <a:solidFill>
+            <a:srgbClr val="FDEDEC"/>
+          </a:solidFill>
+          <a:ln w="12700">
+            <a:solidFill>
+              <a:srgbClr val="E74C3C"/>
+            </a:solidFill>
+            <a:prstDash val="solid"/>
+          </a:ln>
+        </p:spPr>
+      </p:sp>
+      <p:sp>
+        <p:nvSpPr>
+          <p:cNvPr id="18" name="Text 13"/>
+          <p:cNvSpPr/>
+          <p:nvPr/>
+        </p:nvSpPr>
+        <p:spPr>
+          <a:xfrm>
+            <a:off x="310896" y="2587752"/>
+            <a:ext cx="2871216" cy="310896"/>
+          </a:xfrm>
+          <a:prstGeom prst="rect">
+            <a:avLst/>
+          </a:prstGeom>
+          <a:noFill/>
+          <a:ln/>
+        </p:spPr>
+        <p:txBody>
+          <a:bodyPr wrap="square" lIns="0" tIns="0" rIns="0" bIns="0" rtlCol="0" anchor="ctr"/>
+          <a:lstStyle/>
+          <a:p>
+            <a:pPr indent="0" marL="0">
+              <a:buNone/>
+            </a:pPr>
+            <a:r>
+              <a:rPr lang="en-US" sz="750" dirty="0">
+                <a:solidFill>
+                  <a:srgbClr val="C0392B"/>
+                </a:solidFill>
+                <a:latin typeface="Calibri" pitchFamily="34" charset="0"/>
+                <a:ea typeface="Calibri" pitchFamily="34" charset="-122"/>
+                <a:cs typeface="Calibri" pitchFamily="34" charset="-120"/>
+              </a:rPr>
+              <a:t>*.END 着地 → EventBridge</a:t>
+            </a:r>
+            <a:endParaRPr lang="en-US" sz="750" dirty="0"/>
+          </a:p>
+          <a:p>
+            <a:pPr indent="0" marL="0">
+              <a:buNone/>
+            </a:pPr>
+            <a:r>
+              <a:rPr lang="en-US" sz="750" dirty="0">
+                <a:solidFill>
+                  <a:srgbClr val="C0392B"/>
+                </a:solidFill>
+                <a:latin typeface="Calibri" pitchFamily="34" charset="0"/>
+                <a:ea typeface="Calibri" pitchFamily="34" charset="-122"/>
+                <a:cs typeface="Calibri" pitchFamily="34" charset="-120"/>
+              </a:rPr>
+              <a:t>→ SF: receive-pos-master-oc</a:t>
+            </a:r>
+            <a:endParaRPr lang="en-US" sz="750" dirty="0"/>
+          </a:p>
+        </p:txBody>
+      </p:sp>
+      <p:sp>
+        <p:nvSpPr>
+          <p:cNvPr id="19" name="Shape 14"/>
+          <p:cNvSpPr/>
+          <p:nvPr/>
+        </p:nvSpPr>
+        <p:spPr>
+          <a:xfrm>
+            <a:off x="274320" y="2953512"/>
+            <a:ext cx="2944368" cy="429768"/>
+          </a:xfrm>
+          <a:prstGeom prst="rect">
+            <a:avLst/>
+          </a:prstGeom>
+          <a:solidFill>
+            <a:srgbClr val="F0FFF0"/>
+          </a:solidFill>
+          <a:ln w="12700">
+            <a:solidFill>
+              <a:srgbClr val="1E6E9F"/>
+            </a:solidFill>
+            <a:prstDash val="solid"/>
+          </a:ln>
+        </p:spPr>
+      </p:sp>
+      <p:sp>
+        <p:nvSpPr>
+          <p:cNvPr id="20" name="Text 15"/>
+          <p:cNvSpPr/>
+          <p:nvPr/>
+        </p:nvSpPr>
+        <p:spPr>
+          <a:xfrm>
+            <a:off x="310896" y="2962656"/>
+            <a:ext cx="2871216" cy="393192"/>
+          </a:xfrm>
+          <a:prstGeom prst="rect">
+            <a:avLst/>
+          </a:prstGeom>
+          <a:noFill/>
+          <a:ln/>
+        </p:spPr>
+        <p:txBody>
+          <a:bodyPr wrap="square" lIns="0" tIns="0" rIns="0" bIns="0" rtlCol="0" anchor="ctr"/>
+          <a:lstStyle/>
+          <a:p>
+            <a:pPr indent="0" marL="0">
+              <a:buNone/>
+            </a:pPr>
+            <a:r>
+              <a:rPr lang="en-US" sz="750" dirty="0">
+                <a:solidFill>
+                  <a:srgbClr val="222222"/>
+                </a:solidFill>
+                <a:latin typeface="Calibri" pitchFamily="34" charset="0"/>
+                <a:ea typeface="Calibri" pitchFamily="34" charset="-122"/>
+                <a:cs typeface="Calibri" pitchFamily="34" charset="-120"/>
+              </a:rPr>
+              <a:t>1. Lambda: split-csv</a:t>
+            </a:r>
+            <a:endParaRPr lang="en-US" sz="750" dirty="0"/>
+          </a:p>
+          <a:p>
+            <a:pPr indent="0" marL="0">
+              <a:buNone/>
+            </a:pPr>
+            <a:r>
+              <a:rPr lang="en-US" sz="750" dirty="0">
+                <a:solidFill>
+                  <a:srgbClr val="222222"/>
+                </a:solidFill>
+                <a:latin typeface="Calibri" pitchFamily="34" charset="0"/>
+                <a:ea typeface="Calibri" pitchFamily="34" charset="-122"/>
+                <a:cs typeface="Calibri" pitchFamily="34" charset="-120"/>
+              </a:rPr>
+              <a:t>（店舗別CSV分割、.ENDIMPORT生成）</a:t>
+            </a:r>
+            <a:endParaRPr lang="en-US" sz="750" dirty="0"/>
+          </a:p>
+        </p:txBody>
+      </p:sp>
+      <p:sp>
+        <p:nvSpPr>
+          <p:cNvPr id="21" name="Shape 16"/>
+          <p:cNvSpPr/>
+          <p:nvPr/>
+        </p:nvSpPr>
+        <p:spPr>
+          <a:xfrm>
+            <a:off x="274320" y="3410712"/>
+            <a:ext cx="2944368" cy="429768"/>
+          </a:xfrm>
+          <a:prstGeom prst="rect">
+            <a:avLst/>
+          </a:prstGeom>
+          <a:solidFill>
+            <a:srgbClr val="E8F8E8"/>
+          </a:solidFill>
+          <a:ln w="12700">
+            <a:solidFill>
+              <a:srgbClr val="1E6E9F"/>
+            </a:solidFill>
+            <a:prstDash val="solid"/>
+          </a:ln>
+        </p:spPr>
+      </p:sp>
+      <p:sp>
+        <p:nvSpPr>
+          <p:cNvPr id="22" name="Text 17"/>
+          <p:cNvSpPr/>
+          <p:nvPr/>
+        </p:nvSpPr>
+        <p:spPr>
+          <a:xfrm>
+            <a:off x="310896" y="3419856"/>
+            <a:ext cx="2871216" cy="393192"/>
+          </a:xfrm>
+          <a:prstGeom prst="rect">
+            <a:avLst/>
+          </a:prstGeom>
+          <a:noFill/>
+          <a:ln/>
+        </p:spPr>
+        <p:txBody>
+          <a:bodyPr wrap="square" lIns="0" tIns="0" rIns="0" bIns="0" rtlCol="0" anchor="ctr"/>
+          <a:lstStyle/>
+          <a:p>
+            <a:pPr indent="0" marL="0">
+              <a:buNone/>
+            </a:pPr>
+            <a:r>
+              <a:rPr lang="en-US" sz="750" dirty="0">
+                <a:solidFill>
+                  <a:srgbClr val="222222"/>
+                </a:solidFill>
+                <a:latin typeface="Calibri" pitchFamily="34" charset="0"/>
+                <a:ea typeface="Calibri" pitchFamily="34" charset="-122"/>
+                <a:cs typeface="Calibri" pitchFamily="34" charset="-120"/>
+              </a:rPr>
+              <a:t>2. Lambda: oc-import-data</a:t>
+            </a:r>
+            <a:endParaRPr lang="en-US" sz="750" dirty="0"/>
+          </a:p>
+          <a:p>
+            <a:pPr indent="0" marL="0">
+              <a:buNone/>
+            </a:pPr>
+            <a:r>
+              <a:rPr lang="en-US" sz="750" dirty="0">
+                <a:solidFill>
+                  <a:srgbClr val="222222"/>
+                </a:solidFill>
+                <a:latin typeface="Calibri" pitchFamily="34" charset="0"/>
+                <a:ea typeface="Calibri" pitchFamily="34" charset="-122"/>
+                <a:cs typeface="Calibri" pitchFamily="34" charset="-120"/>
+              </a:rPr>
+              <a:t>→ Replica_Kasumi.41_P001</a:t>
+            </a:r>
+            <a:endParaRPr lang="en-US" sz="750" dirty="0"/>
+          </a:p>
+        </p:txBody>
+      </p:sp>
+      <p:sp>
+        <p:nvSpPr>
+          <p:cNvPr id="23" name="Shape 18"/>
+          <p:cNvSpPr/>
+          <p:nvPr/>
+        </p:nvSpPr>
+        <p:spPr>
+          <a:xfrm>
+            <a:off x="274320" y="3867912"/>
+            <a:ext cx="2944368" cy="429768"/>
+          </a:xfrm>
+          <a:prstGeom prst="rect">
+            <a:avLst/>
+          </a:prstGeom>
+          <a:solidFill>
+            <a:srgbClr val="F0FFF0"/>
+          </a:solidFill>
+          <a:ln w="12700">
+            <a:solidFill>
+              <a:srgbClr val="1E6E9F"/>
+            </a:solidFill>
+            <a:prstDash val="solid"/>
+          </a:ln>
+        </p:spPr>
+      </p:sp>
+      <p:sp>
+        <p:nvSpPr>
+          <p:cNvPr id="24" name="Text 19"/>
+          <p:cNvSpPr/>
+          <p:nvPr/>
+        </p:nvSpPr>
+        <p:spPr>
+          <a:xfrm>
+            <a:off x="310896" y="3877056"/>
+            <a:ext cx="2871216" cy="393192"/>
+          </a:xfrm>
+          <a:prstGeom prst="rect">
+            <a:avLst/>
+          </a:prstGeom>
+          <a:noFill/>
+          <a:ln/>
+        </p:spPr>
+        <p:txBody>
+          <a:bodyPr wrap="square" lIns="0" tIns="0" rIns="0" bIns="0" rtlCol="0" anchor="ctr"/>
+          <a:lstStyle/>
+          <a:p>
+            <a:pPr indent="0" marL="0">
+              <a:buNone/>
+            </a:pPr>
+            <a:r>
+              <a:rPr lang="en-US" sz="750" dirty="0">
+                <a:solidFill>
+                  <a:srgbClr val="222222"/>
+                </a:solidFill>
+                <a:latin typeface="Calibri" pitchFamily="34" charset="0"/>
+                <a:ea typeface="Calibri" pitchFamily="34" charset="-122"/>
+                <a:cs typeface="Calibri" pitchFamily="34" charset="-120"/>
+              </a:rPr>
+              <a:t>3. Lambda: backup-file</a:t>
+            </a:r>
+            <a:endParaRPr lang="en-US" sz="750" dirty="0"/>
+          </a:p>
+          <a:p>
+            <a:pPr indent="0" marL="0">
+              <a:buNone/>
+            </a:pPr>
+            <a:r>
+              <a:rPr lang="en-US" sz="750" dirty="0">
+                <a:solidFill>
+                  <a:srgbClr val="222222"/>
+                </a:solidFill>
+                <a:latin typeface="Calibri" pitchFamily="34" charset="0"/>
+                <a:ea typeface="Calibri" pitchFamily="34" charset="-122"/>
+                <a:cs typeface="Calibri" pitchFamily="34" charset="-120"/>
+              </a:rPr>
+              <a:t>（バックアップ移動）</a:t>
+            </a:r>
+            <a:endParaRPr lang="en-US" sz="750" dirty="0"/>
+          </a:p>
+        </p:txBody>
+      </p:sp>
+      <p:sp>
+        <p:nvSpPr>
+          <p:cNvPr id="25" name="Shape 20"/>
+          <p:cNvSpPr/>
+          <p:nvPr/>
+        </p:nvSpPr>
+        <p:spPr>
+          <a:xfrm>
+            <a:off x="274320" y="4325112"/>
+            <a:ext cx="2944368" cy="429768"/>
+          </a:xfrm>
+          <a:prstGeom prst="rect">
+            <a:avLst/>
+          </a:prstGeom>
+          <a:solidFill>
+            <a:srgbClr val="E8F8E8"/>
+          </a:solidFill>
+          <a:ln w="12700">
+            <a:solidFill>
+              <a:srgbClr val="1E6E9F"/>
+            </a:solidFill>
+            <a:prstDash val="solid"/>
+          </a:ln>
+        </p:spPr>
+      </p:sp>
+      <p:sp>
+        <p:nvSpPr>
+          <p:cNvPr id="26" name="Text 21"/>
+          <p:cNvSpPr/>
+          <p:nvPr/>
+        </p:nvSpPr>
+        <p:spPr>
+          <a:xfrm>
+            <a:off x="310896" y="4334256"/>
+            <a:ext cx="2871216" cy="393192"/>
+          </a:xfrm>
+          <a:prstGeom prst="rect">
+            <a:avLst/>
+          </a:prstGeom>
+          <a:noFill/>
+          <a:ln/>
+        </p:spPr>
+        <p:txBody>
+          <a:bodyPr wrap="square" lIns="0" tIns="0" rIns="0" bIns="0" rtlCol="0" anchor="ctr"/>
+          <a:lstStyle/>
+          <a:p>
+            <a:pPr indent="0" marL="0">
+              <a:buNone/>
+            </a:pPr>
+            <a:r>
+              <a:rPr lang="en-US" sz="750" dirty="0">
+                <a:solidFill>
+                  <a:srgbClr val="222222"/>
+                </a:solidFill>
+                <a:latin typeface="Calibri" pitchFamily="34" charset="0"/>
+                <a:ea typeface="Calibri" pitchFamily="34" charset="-122"/>
+                <a:cs typeface="Calibri" pitchFamily="34" charset="-120"/>
+              </a:rPr>
+              <a:t>4. EventBridge → SF: create-txt-file-oc</a:t>
+            </a:r>
+            <a:endParaRPr lang="en-US" sz="750" dirty="0"/>
+          </a:p>
+          <a:p>
+            <a:pPr indent="0" marL="0">
+              <a:buNone/>
+            </a:pPr>
+            <a:r>
+              <a:rPr lang="en-US" sz="750" dirty="0">
+                <a:solidFill>
+                  <a:srgbClr val="222222"/>
+                </a:solidFill>
+                <a:latin typeface="Calibri" pitchFamily="34" charset="0"/>
+                <a:ea typeface="Calibri" pitchFamily="34" charset="-122"/>
+                <a:cs typeface="Calibri" pitchFamily="34" charset="-120"/>
+              </a:rPr>
+              <a:t>ECS: oc-export-data → SHOHIN.TXT生成</a:t>
+            </a:r>
+            <a:endParaRPr lang="en-US" sz="750" dirty="0"/>
+          </a:p>
+        </p:txBody>
+      </p:sp>
+      <p:sp>
+        <p:nvSpPr>
+          <p:cNvPr id="27" name="Shape 22"/>
+          <p:cNvSpPr/>
+          <p:nvPr/>
+        </p:nvSpPr>
+        <p:spPr>
+          <a:xfrm>
+            <a:off x="274320" y="4782312"/>
+            <a:ext cx="2944368" cy="429768"/>
+          </a:xfrm>
+          <a:prstGeom prst="rect">
+            <a:avLst/>
+          </a:prstGeom>
+          <a:solidFill>
+            <a:srgbClr val="F0FFF0"/>
+          </a:solidFill>
+          <a:ln w="12700">
+            <a:solidFill>
+              <a:srgbClr val="1E6E9F"/>
+            </a:solidFill>
+            <a:prstDash val="solid"/>
+          </a:ln>
+        </p:spPr>
+      </p:sp>
+      <p:sp>
+        <p:nvSpPr>
+          <p:cNvPr id="28" name="Text 23"/>
+          <p:cNvSpPr/>
+          <p:nvPr/>
+        </p:nvSpPr>
+        <p:spPr>
+          <a:xfrm>
+            <a:off x="310896" y="4791456"/>
+            <a:ext cx="2871216" cy="393192"/>
+          </a:xfrm>
+          <a:prstGeom prst="rect">
+            <a:avLst/>
+          </a:prstGeom>
+          <a:noFill/>
+          <a:ln/>
+        </p:spPr>
+        <p:txBody>
+          <a:bodyPr wrap="square" lIns="0" tIns="0" rIns="0" bIns="0" rtlCol="0" anchor="ctr"/>
+          <a:lstStyle/>
+          <a:p>
+            <a:pPr indent="0" marL="0">
+              <a:buNone/>
+            </a:pPr>
+            <a:r>
+              <a:rPr lang="en-US" sz="750" dirty="0">
+                <a:solidFill>
+                  <a:srgbClr val="222222"/>
+                </a:solidFill>
+                <a:latin typeface="Calibri" pitchFamily="34" charset="0"/>
+                <a:ea typeface="Calibri" pitchFamily="34" charset="-122"/>
+                <a:cs typeface="Calibri" pitchFamily="34" charset="-120"/>
+              </a:rPr>
+              <a:t>5. SF: sent-txt-file</a:t>
+            </a:r>
+            <a:endParaRPr lang="en-US" sz="750" dirty="0"/>
+          </a:p>
+          <a:p>
+            <a:pPr indent="0" marL="0">
+              <a:buNone/>
+            </a:pPr>
+            <a:r>
+              <a:rPr lang="en-US" sz="750" dirty="0">
+                <a:solidFill>
+                  <a:srgbClr val="222222"/>
+                </a:solidFill>
+                <a:latin typeface="Calibri" pitchFamily="34" charset="0"/>
+                <a:ea typeface="Calibri" pitchFamily="34" charset="-122"/>
+                <a:cs typeface="Calibri" pitchFamily="34" charset="-120"/>
+              </a:rPr>
+              <a:t>Lambda: sent-txt-file → BOX-PC FTP送信</a:t>
+            </a:r>
+            <a:endParaRPr lang="en-US" sz="750" dirty="0"/>
+          </a:p>
+        </p:txBody>
+      </p:sp>
+      <p:sp>
+        <p:nvSpPr>
+          <p:cNvPr id="29" name="Shape 24"/>
+          <p:cNvSpPr/>
+          <p:nvPr/>
+        </p:nvSpPr>
+        <p:spPr>
+          <a:xfrm>
+            <a:off x="274320" y="5303520"/>
+            <a:ext cx="2944368" cy="438912"/>
+          </a:xfrm>
+          <a:prstGeom prst="rect">
+            <a:avLst/>
+          </a:prstGeom>
+          <a:solidFill>
+            <a:srgbClr val="D0232A"/>
+          </a:solidFill>
+          <a:ln w="12700">
+            <a:solidFill>
+              <a:srgbClr val="D0232A"/>
+            </a:solidFill>
+            <a:prstDash val="solid"/>
+          </a:ln>
+        </p:spPr>
+      </p:sp>
+      <p:sp>
+        <p:nvSpPr>
+          <p:cNvPr id="30" name="Text 25"/>
+          <p:cNvSpPr/>
+          <p:nvPr/>
+        </p:nvSpPr>
+        <p:spPr>
+          <a:xfrm>
+            <a:off x="310896" y="5321808"/>
+            <a:ext cx="2871216" cy="402336"/>
+          </a:xfrm>
+          <a:prstGeom prst="rect">
+            <a:avLst/>
+          </a:prstGeom>
+          <a:noFill/>
+          <a:ln/>
+        </p:spPr>
+        <p:txBody>
+          <a:bodyPr wrap="square" lIns="0" tIns="0" rIns="0" bIns="0" rtlCol="0" anchor="ctr"/>
+          <a:lstStyle/>
+          <a:p>
+            <a:pPr indent="0" marL="0">
+              <a:buNone/>
+            </a:pPr>
+            <a:r>
+              <a:rPr lang="en-US" sz="750" dirty="0">
+                <a:solidFill>
+                  <a:srgbClr val="FFFFFF"/>
+                </a:solidFill>
+                <a:latin typeface="Calibri" pitchFamily="34" charset="0"/>
+                <a:ea typeface="Calibri" pitchFamily="34" charset="-122"/>
+                <a:cs typeface="Calibri" pitchFamily="34" charset="-120"/>
+              </a:rPr>
+              <a:t>DB: Replica_Kasumi</a:t>
+            </a:r>
+            <a:endParaRPr lang="en-US" sz="750" dirty="0"/>
+          </a:p>
+          <a:p>
+            <a:pPr indent="0" marL="0">
+              <a:buNone/>
+            </a:pPr>
+            <a:r>
+              <a:rPr lang="en-US" sz="750" dirty="0">
+                <a:solidFill>
+                  <a:srgbClr val="FFFFFF"/>
+                </a:solidFill>
+                <a:latin typeface="Calibri" pitchFamily="34" charset="0"/>
+                <a:ea typeface="Calibri" pitchFamily="34" charset="-122"/>
+                <a:cs typeface="Calibri" pitchFamily="34" charset="-120"/>
+              </a:rPr>
+              <a:t>・41_P001</a:t>
+            </a:r>
+            <a:endParaRPr lang="en-US" sz="750" dirty="0"/>
+          </a:p>
+        </p:txBody>
+      </p:sp>
+      <p:sp>
+        <p:nvSpPr>
+          <p:cNvPr id="31" name="Shape 26"/>
+          <p:cNvSpPr/>
+          <p:nvPr/>
+        </p:nvSpPr>
+        <p:spPr>
+          <a:xfrm>
+            <a:off x="274320" y="5779008"/>
+            <a:ext cx="2944368" cy="228600"/>
+          </a:xfrm>
+          <a:prstGeom prst="rect">
+            <a:avLst/>
+          </a:prstGeom>
+          <a:solidFill>
+            <a:srgbClr val="1E6E9F"/>
+          </a:solidFill>
+          <a:ln w="12700">
+            <a:solidFill>
+              <a:srgbClr val="1E6E9F"/>
+            </a:solidFill>
+            <a:prstDash val="solid"/>
+          </a:ln>
+        </p:spPr>
+      </p:sp>
+      <p:sp>
+        <p:nvSpPr>
+          <p:cNvPr id="32" name="Text 27"/>
+          <p:cNvSpPr/>
+          <p:nvPr/>
+        </p:nvSpPr>
+        <p:spPr>
+          <a:xfrm>
+            <a:off x="310896" y="5779008"/>
+            <a:ext cx="2871216" cy="228600"/>
+          </a:xfrm>
+          <a:prstGeom prst="rect">
+            <a:avLst/>
+          </a:prstGeom>
+          <a:noFill/>
+          <a:ln/>
+        </p:spPr>
+        <p:txBody>
+          <a:bodyPr wrap="square" lIns="0" tIns="0" rIns="0" bIns="0" rtlCol="0" anchor="ctr"/>
+          <a:lstStyle/>
+          <a:p>
+            <a:pPr algn="ctr" indent="0" marL="0">
+              <a:buNone/>
+            </a:pPr>
+            <a:r>
+              <a:rPr lang="en-US" sz="750" b="1" dirty="0">
+                <a:solidFill>
+                  <a:srgbClr val="FFFFFF"/>
+                </a:solidFill>
+                <a:latin typeface="Calibri" pitchFamily="34" charset="0"/>
+                <a:ea typeface="Calibri" pitchFamily="34" charset="-122"/>
+                <a:cs typeface="Calibri" pitchFamily="34" charset="-120"/>
+              </a:rPr>
+              <a:t>出力: SHOHIN.TXT → BOX-PC</a:t>
+            </a:r>
+            <a:endParaRPr lang="en-US" sz="750" dirty="0"/>
+          </a:p>
+        </p:txBody>
+      </p:sp>
+      <p:sp>
+        <p:nvSpPr>
+          <p:cNvPr id="33" name="Shape 28"/>
+          <p:cNvSpPr/>
+          <p:nvPr/>
+        </p:nvSpPr>
+        <p:spPr>
+          <a:xfrm>
+            <a:off x="3401568" y="1481328"/>
+            <a:ext cx="2944368" cy="256032"/>
+          </a:xfrm>
+          <a:prstGeom prst="rect">
+            <a:avLst/>
+          </a:prstGeom>
+          <a:solidFill>
+            <a:srgbClr val="2E7D32"/>
+          </a:solidFill>
+          <a:ln w="12700">
+            <a:solidFill>
+              <a:srgbClr val="2E7D32"/>
+            </a:solidFill>
+            <a:prstDash val="solid"/>
+          </a:ln>
+        </p:spPr>
+      </p:sp>
+      <p:sp>
+        <p:nvSpPr>
+          <p:cNvPr id="34" name="Text 29"/>
+          <p:cNvSpPr/>
+          <p:nvPr/>
+        </p:nvSpPr>
+        <p:spPr>
+          <a:xfrm>
+            <a:off x="3401568" y="1481328"/>
+            <a:ext cx="2944368" cy="256032"/>
+          </a:xfrm>
+          <a:prstGeom prst="rect">
+            <a:avLst/>
+          </a:prstGeom>
+          <a:noFill/>
+          <a:ln/>
+        </p:spPr>
+        <p:txBody>
+          <a:bodyPr wrap="square" lIns="0" tIns="0" rIns="0" bIns="0" rtlCol="0" anchor="ctr"/>
+          <a:lstStyle/>
+          <a:p>
+            <a:pPr algn="ctr" indent="0" marL="0">
+              <a:buNone/>
+            </a:pPr>
+            <a:r>
+              <a:rPr lang="en-US" sz="1050" b="1" dirty="0">
+                <a:solidFill>
+                  <a:srgbClr val="FFFFFF"/>
+                </a:solidFill>
+                <a:latin typeface="Calibri" pitchFamily="34" charset="0"/>
+                <a:ea typeface="Calibri" pitchFamily="34" charset="-122"/>
+                <a:cs typeface="Calibri" pitchFamily="34" charset="-120"/>
+              </a:rPr>
+              <a:t>SG フロー</a:t>
+            </a:r>
+            <a:endParaRPr lang="en-US" sz="1050" dirty="0"/>
+          </a:p>
+        </p:txBody>
+      </p:sp>
+      <p:sp>
+        <p:nvSpPr>
+          <p:cNvPr id="35" name="Shape 30"/>
+          <p:cNvSpPr/>
+          <p:nvPr/>
+        </p:nvSpPr>
+        <p:spPr>
+          <a:xfrm>
+            <a:off x="3401568" y="1764792"/>
+            <a:ext cx="2944368" cy="384048"/>
+          </a:xfrm>
+          <a:prstGeom prst="rect">
+            <a:avLst/>
+          </a:prstGeom>
+          <a:solidFill>
+            <a:srgbClr val="EBF5FB"/>
+          </a:solidFill>
+          <a:ln w="12700">
+            <a:solidFill>
+              <a:srgbClr val="2E7D32"/>
+            </a:solidFill>
+            <a:prstDash val="solid"/>
+          </a:ln>
+        </p:spPr>
+      </p:sp>
+      <p:sp>
+        <p:nvSpPr>
+          <p:cNvPr id="36" name="Text 31"/>
+          <p:cNvSpPr/>
+          <p:nvPr/>
+        </p:nvSpPr>
+        <p:spPr>
+          <a:xfrm>
+            <a:off x="3438144" y="1783080"/>
+            <a:ext cx="2871216" cy="347472"/>
+          </a:xfrm>
+          <a:prstGeom prst="rect">
+            <a:avLst/>
+          </a:prstGeom>
+          <a:noFill/>
+          <a:ln/>
+        </p:spPr>
+        <p:txBody>
+          <a:bodyPr wrap="square" lIns="0" tIns="0" rIns="0" bIns="0" rtlCol="0" anchor="ctr"/>
+          <a:lstStyle/>
+          <a:p>
+            <a:pPr indent="0" marL="0">
+              <a:buNone/>
+            </a:pPr>
+            <a:r>
+              <a:rPr lang="en-US" sz="800" dirty="0">
+                <a:solidFill>
+                  <a:srgbClr val="2E7D32"/>
+                </a:solidFill>
+                <a:latin typeface="Calibri" pitchFamily="34" charset="0"/>
+                <a:ea typeface="Calibri" pitchFamily="34" charset="-122"/>
+                <a:cs typeface="Calibri" pitchFamily="34" charset="-120"/>
+              </a:rPr>
+              <a:t>連携元: POSデータ</a:t>
+            </a:r>
+            <a:endParaRPr lang="en-US" sz="800" dirty="0"/>
+          </a:p>
+          <a:p>
+            <a:pPr indent="0" marL="0">
+              <a:buNone/>
+            </a:pPr>
+            <a:r>
+              <a:rPr lang="en-US" sz="800" dirty="0">
+                <a:solidFill>
+                  <a:srgbClr val="2E7D32"/>
+                </a:solidFill>
+                <a:latin typeface="Calibri" pitchFamily="34" charset="0"/>
+                <a:ea typeface="Calibri" pitchFamily="34" charset="-122"/>
+                <a:cs typeface="Calibri" pitchFamily="34" charset="-120"/>
+              </a:rPr>
+              <a:t>VINX / PosSserver</a:t>
+            </a:r>
+            <a:endParaRPr lang="en-US" sz="800" dirty="0"/>
+          </a:p>
+        </p:txBody>
+      </p:sp>
+      <p:sp>
+        <p:nvSpPr>
+          <p:cNvPr id="37" name="Shape 32"/>
+          <p:cNvSpPr/>
+          <p:nvPr/>
+        </p:nvSpPr>
+        <p:spPr>
+          <a:xfrm>
+            <a:off x="3401568" y="2176272"/>
+            <a:ext cx="2944368" cy="365760"/>
+          </a:xfrm>
+          <a:prstGeom prst="rect">
+            <a:avLst/>
+          </a:prstGeom>
+          <a:solidFill>
+            <a:srgbClr val="FFF9E6"/>
+          </a:solidFill>
+          <a:ln w="12700">
+            <a:solidFill>
+              <a:srgbClr val="CCAA00"/>
+            </a:solidFill>
+            <a:prstDash val="solid"/>
+          </a:ln>
+        </p:spPr>
+      </p:sp>
+      <p:sp>
+        <p:nvSpPr>
+          <p:cNvPr id="38" name="Text 33"/>
+          <p:cNvSpPr/>
+          <p:nvPr/>
+        </p:nvSpPr>
+        <p:spPr>
+          <a:xfrm>
+            <a:off x="3438144" y="2194560"/>
+            <a:ext cx="2871216" cy="329184"/>
+          </a:xfrm>
+          <a:prstGeom prst="rect">
+            <a:avLst/>
+          </a:prstGeom>
+          <a:noFill/>
+          <a:ln/>
+        </p:spPr>
+        <p:txBody>
+          <a:bodyPr wrap="square" lIns="0" tIns="0" rIns="0" bIns="0" rtlCol="0" anchor="ctr"/>
+          <a:lstStyle/>
+          <a:p>
+            <a:pPr indent="0" marL="0">
+              <a:buNone/>
+            </a:pPr>
+            <a:r>
+              <a:rPr lang="en-US" sz="750" dirty="0">
+                <a:solidFill>
+                  <a:srgbClr val="7A6000"/>
+                </a:solidFill>
+                <a:latin typeface="Calibri" pitchFamily="34" charset="0"/>
+                <a:ea typeface="Calibri" pitchFamily="34" charset="-122"/>
+                <a:cs typeface="Calibri" pitchFamily="34" charset="-120"/>
+              </a:rPr>
+              <a:t>S3: pos-original/sg/receive/</a:t>
+            </a:r>
+            <a:endParaRPr lang="en-US" sz="750" dirty="0"/>
+          </a:p>
+          <a:p>
+            <a:pPr indent="0" marL="0">
+              <a:buNone/>
+            </a:pPr>
+            <a:r>
+              <a:rPr lang="en-US" sz="750" dirty="0">
+                <a:solidFill>
+                  <a:srgbClr val="7A6000"/>
+                </a:solidFill>
+                <a:latin typeface="Calibri" pitchFamily="34" charset="0"/>
+                <a:ea typeface="Calibri" pitchFamily="34" charset="-122"/>
+                <a:cs typeface="Calibri" pitchFamily="34" charset="-120"/>
+              </a:rPr>
+              <a:t>{company}_{store}_yyyymmdd.ZIP</a:t>
+            </a:r>
+            <a:endParaRPr lang="en-US" sz="750" dirty="0"/>
+          </a:p>
+        </p:txBody>
+      </p:sp>
+      <p:sp>
+        <p:nvSpPr>
+          <p:cNvPr id="39" name="Shape 34"/>
+          <p:cNvSpPr/>
+          <p:nvPr/>
+        </p:nvSpPr>
+        <p:spPr>
+          <a:xfrm>
+            <a:off x="3401568" y="2569464"/>
+            <a:ext cx="2944368" cy="347472"/>
+          </a:xfrm>
+          <a:prstGeom prst="rect">
+            <a:avLst/>
+          </a:prstGeom>
+          <a:solidFill>
+            <a:srgbClr val="FDEDEC"/>
+          </a:solidFill>
+          <a:ln w="12700">
+            <a:solidFill>
+              <a:srgbClr val="E74C3C"/>
+            </a:solidFill>
+            <a:prstDash val="solid"/>
+          </a:ln>
+        </p:spPr>
+      </p:sp>
+      <p:sp>
+        <p:nvSpPr>
+          <p:cNvPr id="40" name="Text 35"/>
+          <p:cNvSpPr/>
+          <p:nvPr/>
+        </p:nvSpPr>
+        <p:spPr>
+          <a:xfrm>
+            <a:off x="3438144" y="2587752"/>
+            <a:ext cx="2871216" cy="310896"/>
+          </a:xfrm>
+          <a:prstGeom prst="rect">
+            <a:avLst/>
+          </a:prstGeom>
+          <a:noFill/>
+          <a:ln/>
+        </p:spPr>
+        <p:txBody>
+          <a:bodyPr wrap="square" lIns="0" tIns="0" rIns="0" bIns="0" rtlCol="0" anchor="ctr"/>
+          <a:lstStyle/>
+          <a:p>
+            <a:pPr indent="0" marL="0">
+              <a:buNone/>
+            </a:pPr>
+            <a:r>
+              <a:rPr lang="en-US" sz="750" dirty="0">
+                <a:solidFill>
+                  <a:srgbClr val="C0392B"/>
+                </a:solidFill>
+                <a:latin typeface="Calibri" pitchFamily="34" charset="0"/>
+                <a:ea typeface="Calibri" pitchFamily="34" charset="-122"/>
+                <a:cs typeface="Calibri" pitchFamily="34" charset="-120"/>
+              </a:rPr>
+              <a:t>*.ZIP 着地 → EventBridge</a:t>
+            </a:r>
+            <a:endParaRPr lang="en-US" sz="750" dirty="0"/>
+          </a:p>
+          <a:p>
+            <a:pPr indent="0" marL="0">
+              <a:buNone/>
+            </a:pPr>
+            <a:r>
+              <a:rPr lang="en-US" sz="750" dirty="0">
+                <a:solidFill>
+                  <a:srgbClr val="C0392B"/>
+                </a:solidFill>
+                <a:latin typeface="Calibri" pitchFamily="34" charset="0"/>
+                <a:ea typeface="Calibri" pitchFamily="34" charset="-122"/>
+                <a:cs typeface="Calibri" pitchFamily="34" charset="-120"/>
+              </a:rPr>
+              <a:t>→ SF: receive-and-import-pos-master-sg</a:t>
+            </a:r>
+            <a:endParaRPr lang="en-US" sz="750" dirty="0"/>
+          </a:p>
+        </p:txBody>
+      </p:sp>
+      <p:sp>
+        <p:nvSpPr>
+          <p:cNvPr id="41" name="Shape 36"/>
+          <p:cNvSpPr/>
+          <p:nvPr/>
+        </p:nvSpPr>
+        <p:spPr>
+          <a:xfrm>
+            <a:off x="3401568" y="2953512"/>
+            <a:ext cx="2944368" cy="429768"/>
+          </a:xfrm>
+          <a:prstGeom prst="rect">
+            <a:avLst/>
+          </a:prstGeom>
+          <a:solidFill>
+            <a:srgbClr val="F0FFF0"/>
+          </a:solidFill>
+          <a:ln w="12700">
+            <a:solidFill>
+              <a:srgbClr val="2E7D32"/>
+            </a:solidFill>
+            <a:prstDash val="solid"/>
+          </a:ln>
+        </p:spPr>
+      </p:sp>
+      <p:sp>
+        <p:nvSpPr>
+          <p:cNvPr id="42" name="Text 37"/>
+          <p:cNvSpPr/>
+          <p:nvPr/>
+        </p:nvSpPr>
+        <p:spPr>
+          <a:xfrm>
+            <a:off x="3438144" y="2962656"/>
+            <a:ext cx="2871216" cy="393192"/>
+          </a:xfrm>
+          <a:prstGeom prst="rect">
+            <a:avLst/>
+          </a:prstGeom>
+          <a:noFill/>
+          <a:ln/>
+        </p:spPr>
+        <p:txBody>
+          <a:bodyPr wrap="square" lIns="0" tIns="0" rIns="0" bIns="0" rtlCol="0" anchor="ctr"/>
+          <a:lstStyle/>
+          <a:p>
+            <a:pPr indent="0" marL="0">
+              <a:buNone/>
+            </a:pPr>
+            <a:r>
+              <a:rPr lang="en-US" sz="750" dirty="0">
+                <a:solidFill>
+                  <a:srgbClr val="222222"/>
+                </a:solidFill>
+                <a:latin typeface="Calibri" pitchFamily="34" charset="0"/>
+                <a:ea typeface="Calibri" pitchFamily="34" charset="-122"/>
+                <a:cs typeface="Calibri" pitchFamily="34" charset="-120"/>
+              </a:rPr>
+              <a:t>1. Lambda: unzip-file</a:t>
+            </a:r>
+            <a:endParaRPr lang="en-US" sz="750" dirty="0"/>
+          </a:p>
+          <a:p>
+            <a:pPr indent="0" marL="0">
+              <a:buNone/>
+            </a:pPr>
+            <a:r>
+              <a:rPr lang="en-US" sz="750" dirty="0">
+                <a:solidFill>
+                  <a:srgbClr val="222222"/>
+                </a:solidFill>
+                <a:latin typeface="Calibri" pitchFamily="34" charset="0"/>
+                <a:ea typeface="Calibri" pitchFamily="34" charset="-122"/>
+                <a:cs typeface="Calibri" pitchFamily="34" charset="-120"/>
+              </a:rPr>
+              <a:t>（ZIP展開、テーブル別フォルダ移動）</a:t>
+            </a:r>
+            <a:endParaRPr lang="en-US" sz="750" dirty="0"/>
+          </a:p>
+        </p:txBody>
+      </p:sp>
+      <p:sp>
+        <p:nvSpPr>
+          <p:cNvPr id="43" name="Shape 38"/>
+          <p:cNvSpPr/>
+          <p:nvPr/>
+        </p:nvSpPr>
+        <p:spPr>
+          <a:xfrm>
+            <a:off x="3401568" y="3410712"/>
+            <a:ext cx="2944368" cy="429768"/>
+          </a:xfrm>
+          <a:prstGeom prst="rect">
+            <a:avLst/>
+          </a:prstGeom>
+          <a:solidFill>
+            <a:srgbClr val="E8F8E8"/>
+          </a:solidFill>
+          <a:ln w="12700">
+            <a:solidFill>
+              <a:srgbClr val="2E7D32"/>
+            </a:solidFill>
+            <a:prstDash val="solid"/>
+          </a:ln>
+        </p:spPr>
+      </p:sp>
+      <p:sp>
+        <p:nvSpPr>
+          <p:cNvPr id="44" name="Text 39"/>
+          <p:cNvSpPr/>
+          <p:nvPr/>
+        </p:nvSpPr>
+        <p:spPr>
+          <a:xfrm>
+            <a:off x="3438144" y="3419856"/>
+            <a:ext cx="2871216" cy="393192"/>
+          </a:xfrm>
+          <a:prstGeom prst="rect">
+            <a:avLst/>
+          </a:prstGeom>
+          <a:noFill/>
+          <a:ln/>
+        </p:spPr>
+        <p:txBody>
+          <a:bodyPr wrap="square" lIns="0" tIns="0" rIns="0" bIns="0" rtlCol="0" anchor="ctr"/>
+          <a:lstStyle/>
+          <a:p>
+            <a:pPr indent="0" marL="0">
+              <a:buNone/>
+            </a:pPr>
+            <a:r>
+              <a:rPr lang="en-US" sz="750" dirty="0">
+                <a:solidFill>
+                  <a:srgbClr val="222222"/>
+                </a:solidFill>
+                <a:latin typeface="Calibri" pitchFamily="34" charset="0"/>
+                <a:ea typeface="Calibri" pitchFamily="34" charset="-122"/>
+                <a:cs typeface="Calibri" pitchFamily="34" charset="-120"/>
+              </a:rPr>
+              <a:t>2. Lambda: sg-import-data [Parallel/Map]</a:t>
+            </a:r>
+            <a:endParaRPr lang="en-US" sz="750" dirty="0"/>
+          </a:p>
+          <a:p>
+            <a:pPr indent="0" marL="0">
+              <a:buNone/>
+            </a:pPr>
+            <a:r>
+              <a:rPr lang="en-US" sz="750" dirty="0">
+                <a:solidFill>
+                  <a:srgbClr val="222222"/>
+                </a:solidFill>
+                <a:latin typeface="Calibri" pitchFamily="34" charset="0"/>
+                <a:ea typeface="Calibri" pitchFamily="34" charset="-122"/>
+                <a:cs typeface="Calibri" pitchFamily="34" charset="-120"/>
+              </a:rPr>
+              <a:t>→ Replica_Kasumi (11/13/16)</a:t>
+            </a:r>
+            <a:endParaRPr lang="en-US" sz="750" dirty="0"/>
+          </a:p>
+        </p:txBody>
+      </p:sp>
+      <p:sp>
+        <p:nvSpPr>
+          <p:cNvPr id="45" name="Shape 40"/>
+          <p:cNvSpPr/>
+          <p:nvPr/>
+        </p:nvSpPr>
+        <p:spPr>
+          <a:xfrm>
+            <a:off x="3401568" y="3867912"/>
+            <a:ext cx="2944368" cy="429768"/>
+          </a:xfrm>
+          <a:prstGeom prst="rect">
+            <a:avLst/>
+          </a:prstGeom>
+          <a:solidFill>
+            <a:srgbClr val="F0FFF0"/>
+          </a:solidFill>
+          <a:ln w="12700">
+            <a:solidFill>
+              <a:srgbClr val="2E7D32"/>
+            </a:solidFill>
+            <a:prstDash val="solid"/>
+          </a:ln>
+        </p:spPr>
+      </p:sp>
+      <p:sp>
+        <p:nvSpPr>
+          <p:cNvPr id="46" name="Text 41"/>
+          <p:cNvSpPr/>
+          <p:nvPr/>
+        </p:nvSpPr>
+        <p:spPr>
+          <a:xfrm>
+            <a:off x="3438144" y="3877056"/>
+            <a:ext cx="2871216" cy="393192"/>
+          </a:xfrm>
+          <a:prstGeom prst="rect">
+            <a:avLst/>
+          </a:prstGeom>
+          <a:noFill/>
+          <a:ln/>
+        </p:spPr>
+        <p:txBody>
+          <a:bodyPr wrap="square" lIns="0" tIns="0" rIns="0" bIns="0" rtlCol="0" anchor="ctr"/>
+          <a:lstStyle/>
+          <a:p>
+            <a:pPr indent="0" marL="0">
+              <a:buNone/>
+            </a:pPr>
+            <a:r>
+              <a:rPr lang="en-US" sz="750" dirty="0">
+                <a:solidFill>
+                  <a:srgbClr val="222222"/>
+                </a:solidFill>
+                <a:latin typeface="Calibri" pitchFamily="34" charset="0"/>
+                <a:ea typeface="Calibri" pitchFamily="34" charset="-122"/>
+                <a:cs typeface="Calibri" pitchFamily="34" charset="-120"/>
+              </a:rPr>
+              <a:t>3. Lambda: create-file-end → .ENDEXPORT</a:t>
+            </a:r>
+            <a:endParaRPr lang="en-US" sz="750" dirty="0"/>
+          </a:p>
+          <a:p>
+            <a:pPr indent="0" marL="0">
+              <a:buNone/>
+            </a:pPr>
+            <a:r>
+              <a:rPr lang="en-US" sz="750" dirty="0">
+                <a:solidFill>
+                  <a:srgbClr val="222222"/>
+                </a:solidFill>
+                <a:latin typeface="Calibri" pitchFamily="34" charset="0"/>
+                <a:ea typeface="Calibri" pitchFamily="34" charset="-122"/>
+                <a:cs typeface="Calibri" pitchFamily="34" charset="-120"/>
+              </a:rPr>
+              <a:t>SQS: store-code-queue-sg.fifo</a:t>
+            </a:r>
+            <a:endParaRPr lang="en-US" sz="750" dirty="0"/>
+          </a:p>
+        </p:txBody>
+      </p:sp>
+      <p:sp>
+        <p:nvSpPr>
+          <p:cNvPr id="47" name="Shape 42"/>
+          <p:cNvSpPr/>
+          <p:nvPr/>
+        </p:nvSpPr>
+        <p:spPr>
+          <a:xfrm>
+            <a:off x="3401568" y="4325112"/>
+            <a:ext cx="2944368" cy="429768"/>
+          </a:xfrm>
+          <a:prstGeom prst="rect">
+            <a:avLst/>
+          </a:prstGeom>
+          <a:solidFill>
+            <a:srgbClr val="E8F8E8"/>
+          </a:solidFill>
+          <a:ln w="12700">
+            <a:solidFill>
+              <a:srgbClr val="2E7D32"/>
+            </a:solidFill>
+            <a:prstDash val="solid"/>
+          </a:ln>
+        </p:spPr>
+      </p:sp>
+      <p:sp>
+        <p:nvSpPr>
+          <p:cNvPr id="48" name="Text 43"/>
+          <p:cNvSpPr/>
+          <p:nvPr/>
+        </p:nvSpPr>
+        <p:spPr>
+          <a:xfrm>
+            <a:off x="3438144" y="4334256"/>
+            <a:ext cx="2871216" cy="393192"/>
+          </a:xfrm>
+          <a:prstGeom prst="rect">
+            <a:avLst/>
+          </a:prstGeom>
+          <a:noFill/>
+          <a:ln/>
+        </p:spPr>
+        <p:txBody>
+          <a:bodyPr wrap="square" lIns="0" tIns="0" rIns="0" bIns="0" rtlCol="0" anchor="ctr"/>
+          <a:lstStyle/>
+          <a:p>
+            <a:pPr indent="0" marL="0">
+              <a:buNone/>
+            </a:pPr>
+            <a:r>
+              <a:rPr lang="en-US" sz="750" dirty="0">
+                <a:solidFill>
+                  <a:srgbClr val="222222"/>
+                </a:solidFill>
+                <a:latin typeface="Calibri" pitchFamily="34" charset="0"/>
+                <a:ea typeface="Calibri" pitchFamily="34" charset="-122"/>
+                <a:cs typeface="Calibri" pitchFamily="34" charset="-120"/>
+              </a:rPr>
+              <a:t>4. EventBridge → SF: create-txt-file-sg</a:t>
+            </a:r>
+            <a:endParaRPr lang="en-US" sz="750" dirty="0"/>
+          </a:p>
+          <a:p>
+            <a:pPr indent="0" marL="0">
+              <a:buNone/>
+            </a:pPr>
+            <a:r>
+              <a:rPr lang="en-US" sz="750" dirty="0">
+                <a:solidFill>
+                  <a:srgbClr val="222222"/>
+                </a:solidFill>
+                <a:latin typeface="Calibri" pitchFamily="34" charset="0"/>
+                <a:ea typeface="Calibri" pitchFamily="34" charset="-122"/>
+                <a:cs typeface="Calibri" pitchFamily="34" charset="-120"/>
+              </a:rPr>
+              <a:t>ECS: sg-export-data → ESLDATA.TXT生成</a:t>
+            </a:r>
+            <a:endParaRPr lang="en-US" sz="750" dirty="0"/>
+          </a:p>
+        </p:txBody>
+      </p:sp>
+      <p:sp>
+        <p:nvSpPr>
+          <p:cNvPr id="49" name="Shape 44"/>
+          <p:cNvSpPr/>
+          <p:nvPr/>
+        </p:nvSpPr>
+        <p:spPr>
+          <a:xfrm>
+            <a:off x="3401568" y="4782312"/>
+            <a:ext cx="2944368" cy="429768"/>
+          </a:xfrm>
+          <a:prstGeom prst="rect">
+            <a:avLst/>
+          </a:prstGeom>
+          <a:solidFill>
+            <a:srgbClr val="F0FFF0"/>
+          </a:solidFill>
+          <a:ln w="12700">
+            <a:solidFill>
+              <a:srgbClr val="2E7D32"/>
+            </a:solidFill>
+            <a:prstDash val="solid"/>
+          </a:ln>
+        </p:spPr>
+      </p:sp>
+      <p:sp>
+        <p:nvSpPr>
+          <p:cNvPr id="50" name="Text 45"/>
+          <p:cNvSpPr/>
+          <p:nvPr/>
+        </p:nvSpPr>
+        <p:spPr>
+          <a:xfrm>
+            <a:off x="3438144" y="4791456"/>
+            <a:ext cx="2871216" cy="393192"/>
+          </a:xfrm>
+          <a:prstGeom prst="rect">
+            <a:avLst/>
+          </a:prstGeom>
+          <a:noFill/>
+          <a:ln/>
+        </p:spPr>
+        <p:txBody>
+          <a:bodyPr wrap="square" lIns="0" tIns="0" rIns="0" bIns="0" rtlCol="0" anchor="ctr"/>
+          <a:lstStyle/>
+          <a:p>
+            <a:pPr indent="0" marL="0">
+              <a:buNone/>
+            </a:pPr>
+            <a:r>
+              <a:rPr lang="en-US" sz="750" dirty="0">
+                <a:solidFill>
+                  <a:srgbClr val="222222"/>
+                </a:solidFill>
+                <a:latin typeface="Calibri" pitchFamily="34" charset="0"/>
+                <a:ea typeface="Calibri" pitchFamily="34" charset="-122"/>
+                <a:cs typeface="Calibri" pitchFamily="34" charset="-120"/>
+              </a:rPr>
+              <a:t>5. SF: sent-txt-file</a:t>
+            </a:r>
+            <a:endParaRPr lang="en-US" sz="750" dirty="0"/>
+          </a:p>
+          <a:p>
+            <a:pPr indent="0" marL="0">
+              <a:buNone/>
+            </a:pPr>
+            <a:r>
+              <a:rPr lang="en-US" sz="750" dirty="0">
+                <a:solidFill>
+                  <a:srgbClr val="222222"/>
+                </a:solidFill>
+                <a:latin typeface="Calibri" pitchFamily="34" charset="0"/>
+                <a:ea typeface="Calibri" pitchFamily="34" charset="-122"/>
+                <a:cs typeface="Calibri" pitchFamily="34" charset="-120"/>
+              </a:rPr>
+              <a:t>Lambda: sent-txt-file → BOX-PC FTP送信</a:t>
+            </a:r>
+            <a:endParaRPr lang="en-US" sz="750" dirty="0"/>
+          </a:p>
+        </p:txBody>
+      </p:sp>
+      <p:sp>
+        <p:nvSpPr>
+          <p:cNvPr id="51" name="Shape 46"/>
+          <p:cNvSpPr/>
+          <p:nvPr/>
+        </p:nvSpPr>
+        <p:spPr>
+          <a:xfrm>
+            <a:off x="3401568" y="5303520"/>
+            <a:ext cx="2944368" cy="438912"/>
+          </a:xfrm>
+          <a:prstGeom prst="rect">
+            <a:avLst/>
+          </a:prstGeom>
+          <a:solidFill>
+            <a:srgbClr val="D0232A"/>
+          </a:solidFill>
+          <a:ln w="12700">
+            <a:solidFill>
+              <a:srgbClr val="D0232A"/>
+            </a:solidFill>
+            <a:prstDash val="solid"/>
+          </a:ln>
+        </p:spPr>
+      </p:sp>
+      <p:sp>
+        <p:nvSpPr>
+          <p:cNvPr id="52" name="Text 47"/>
+          <p:cNvSpPr/>
+          <p:nvPr/>
+        </p:nvSpPr>
+        <p:spPr>
+          <a:xfrm>
+            <a:off x="3438144" y="5321808"/>
+            <a:ext cx="2871216" cy="402336"/>
+          </a:xfrm>
+          <a:prstGeom prst="rect">
+            <a:avLst/>
+          </a:prstGeom>
+          <a:noFill/>
+          <a:ln/>
+        </p:spPr>
+        <p:txBody>
+          <a:bodyPr wrap="square" lIns="0" tIns="0" rIns="0" bIns="0" rtlCol="0" anchor="ctr"/>
+          <a:lstStyle/>
+          <a:p>
+            <a:pPr indent="0" marL="0">
+              <a:buNone/>
+            </a:pPr>
+            <a:r>
+              <a:rPr lang="en-US" sz="750" dirty="0">
+                <a:solidFill>
+                  <a:srgbClr val="FFFFFF"/>
+                </a:solidFill>
+                <a:latin typeface="Calibri" pitchFamily="34" charset="0"/>
+                <a:ea typeface="Calibri" pitchFamily="34" charset="-122"/>
+                <a:cs typeface="Calibri" pitchFamily="34" charset="-120"/>
+              </a:rPr>
+              <a:t>DB: Replica_Kasumi</a:t>
+            </a:r>
+            <a:endParaRPr lang="en-US" sz="750" dirty="0"/>
+          </a:p>
+          <a:p>
+            <a:pPr indent="0" marL="0">
+              <a:buNone/>
+            </a:pPr>
+            <a:r>
+              <a:rPr lang="en-US" sz="750" dirty="0">
+                <a:solidFill>
+                  <a:srgbClr val="FFFFFF"/>
+                </a:solidFill>
+                <a:latin typeface="Calibri" pitchFamily="34" charset="0"/>
+                <a:ea typeface="Calibri" pitchFamily="34" charset="-122"/>
+                <a:cs typeface="Calibri" pitchFamily="34" charset="-120"/>
+              </a:rPr>
+              <a:t>・11_ItemMaster</a:t>
+            </a:r>
+            <a:endParaRPr lang="en-US" sz="750" dirty="0"/>
+          </a:p>
+          <a:p>
+            <a:pPr indent="0" marL="0">
+              <a:buNone/>
+            </a:pPr>
+            <a:r>
+              <a:rPr lang="en-US" sz="750" dirty="0">
+                <a:solidFill>
+                  <a:srgbClr val="FFFFFF"/>
+                </a:solidFill>
+                <a:latin typeface="Calibri" pitchFamily="34" charset="0"/>
+                <a:ea typeface="Calibri" pitchFamily="34" charset="-122"/>
+                <a:cs typeface="Calibri" pitchFamily="34" charset="-120"/>
+              </a:rPr>
+              <a:t>・13_SpecicalPriceKsmMaster</a:t>
+            </a:r>
+            <a:endParaRPr lang="en-US" sz="750" dirty="0"/>
+          </a:p>
+          <a:p>
+            <a:pPr indent="0" marL="0">
+              <a:buNone/>
+            </a:pPr>
+            <a:r>
+              <a:rPr lang="en-US" sz="750" dirty="0">
+                <a:solidFill>
+                  <a:srgbClr val="FFFFFF"/>
+                </a:solidFill>
+                <a:latin typeface="Calibri" pitchFamily="34" charset="0"/>
+                <a:ea typeface="Calibri" pitchFamily="34" charset="-122"/>
+                <a:cs typeface="Calibri" pitchFamily="34" charset="-120"/>
+              </a:rPr>
+              <a:t>・16_ForcePriceMaster</a:t>
+            </a:r>
+            <a:endParaRPr lang="en-US" sz="750" dirty="0"/>
+          </a:p>
+        </p:txBody>
+      </p:sp>
+      <p:sp>
+        <p:nvSpPr>
+          <p:cNvPr id="53" name="Shape 48"/>
+          <p:cNvSpPr/>
+          <p:nvPr/>
+        </p:nvSpPr>
+        <p:spPr>
+          <a:xfrm>
+            <a:off x="3401568" y="5779008"/>
+            <a:ext cx="2944368" cy="228600"/>
+          </a:xfrm>
+          <a:prstGeom prst="rect">
+            <a:avLst/>
+          </a:prstGeom>
+          <a:solidFill>
+            <a:srgbClr val="2E7D32"/>
+          </a:solidFill>
+          <a:ln w="12700">
+            <a:solidFill>
+              <a:srgbClr val="2E7D32"/>
+            </a:solidFill>
+            <a:prstDash val="solid"/>
+          </a:ln>
+        </p:spPr>
+      </p:sp>
+      <p:sp>
+        <p:nvSpPr>
+          <p:cNvPr id="54" name="Text 49"/>
+          <p:cNvSpPr/>
+          <p:nvPr/>
+        </p:nvSpPr>
+        <p:spPr>
+          <a:xfrm>
+            <a:off x="3438144" y="5779008"/>
+            <a:ext cx="2871216" cy="228600"/>
+          </a:xfrm>
+          <a:prstGeom prst="rect">
+            <a:avLst/>
+          </a:prstGeom>
+          <a:noFill/>
+          <a:ln/>
+        </p:spPr>
+        <p:txBody>
+          <a:bodyPr wrap="square" lIns="0" tIns="0" rIns="0" bIns="0" rtlCol="0" anchor="ctr"/>
+          <a:lstStyle/>
+          <a:p>
+            <a:pPr algn="ctr" indent="0" marL="0">
+              <a:buNone/>
+            </a:pPr>
+            <a:r>
+              <a:rPr lang="en-US" sz="750" b="1" dirty="0">
+                <a:solidFill>
+                  <a:srgbClr val="FFFFFF"/>
+                </a:solidFill>
+                <a:latin typeface="Calibri" pitchFamily="34" charset="0"/>
+                <a:ea typeface="Calibri" pitchFamily="34" charset="-122"/>
+                <a:cs typeface="Calibri" pitchFamily="34" charset="-120"/>
+              </a:rPr>
+              <a:t>出力: ESLDATA.TXT → BOX-PC</a:t>
+            </a:r>
+            <a:endParaRPr lang="en-US" sz="750" dirty="0"/>
+          </a:p>
+        </p:txBody>
+      </p:sp>
+      <p:sp>
+        <p:nvSpPr>
+          <p:cNvPr id="55" name="Shape 50"/>
+          <p:cNvSpPr/>
+          <p:nvPr/>
+        </p:nvSpPr>
+        <p:spPr>
+          <a:xfrm>
+            <a:off x="6528816" y="1481328"/>
+            <a:ext cx="2944368" cy="256032"/>
+          </a:xfrm>
+          <a:prstGeom prst="rect">
+            <a:avLst/>
+          </a:prstGeom>
+          <a:solidFill>
+            <a:srgbClr val="7B3F00"/>
+          </a:solidFill>
+          <a:ln w="12700">
+            <a:solidFill>
+              <a:srgbClr val="7B3F00"/>
+            </a:solidFill>
+            <a:prstDash val="solid"/>
+          </a:ln>
+        </p:spPr>
+      </p:sp>
+      <p:sp>
+        <p:nvSpPr>
+          <p:cNvPr id="56" name="Text 51"/>
+          <p:cNvSpPr/>
+          <p:nvPr/>
+        </p:nvSpPr>
+        <p:spPr>
+          <a:xfrm>
+            <a:off x="6528816" y="1481328"/>
+            <a:ext cx="2944368" cy="256032"/>
+          </a:xfrm>
+          <a:prstGeom prst="rect">
+            <a:avLst/>
+          </a:prstGeom>
+          <a:noFill/>
+          <a:ln/>
+        </p:spPr>
+        <p:txBody>
+          <a:bodyPr wrap="square" lIns="0" tIns="0" rIns="0" bIns="0" rtlCol="0" anchor="ctr"/>
+          <a:lstStyle/>
+          <a:p>
+            <a:pPr algn="ctr" indent="0" marL="0">
+              <a:buNone/>
+            </a:pPr>
+            <a:r>
+              <a:rPr lang="en-US" sz="1050" b="1" dirty="0">
+                <a:solidFill>
+                  <a:srgbClr val="FFFFFF"/>
+                </a:solidFill>
+                <a:latin typeface="Calibri" pitchFamily="34" charset="0"/>
+                <a:ea typeface="Calibri" pitchFamily="34" charset="-122"/>
+                <a:cs typeface="Calibri" pitchFamily="34" charset="-120"/>
+              </a:rPr>
+              <a:t>SH フロー</a:t>
+            </a:r>
+            <a:endParaRPr lang="en-US" sz="1050" dirty="0"/>
+          </a:p>
+        </p:txBody>
+      </p:sp>
+      <p:sp>
+        <p:nvSpPr>
+          <p:cNvPr id="57" name="Shape 52"/>
+          <p:cNvSpPr/>
+          <p:nvPr/>
+        </p:nvSpPr>
+        <p:spPr>
+          <a:xfrm>
+            <a:off x="6528816" y="1764792"/>
+            <a:ext cx="2944368" cy="384048"/>
+          </a:xfrm>
+          <a:prstGeom prst="rect">
+            <a:avLst/>
+          </a:prstGeom>
+          <a:solidFill>
+            <a:srgbClr val="EBF5FB"/>
+          </a:solidFill>
+          <a:ln w="12700">
+            <a:solidFill>
+              <a:srgbClr val="7B3F00"/>
+            </a:solidFill>
+            <a:prstDash val="solid"/>
+          </a:ln>
+        </p:spPr>
+      </p:sp>
+      <p:sp>
+        <p:nvSpPr>
+          <p:cNvPr id="58" name="Text 53"/>
+          <p:cNvSpPr/>
+          <p:nvPr/>
+        </p:nvSpPr>
+        <p:spPr>
+          <a:xfrm>
+            <a:off x="6565392" y="1783080"/>
+            <a:ext cx="2871216" cy="347472"/>
+          </a:xfrm>
+          <a:prstGeom prst="rect">
+            <a:avLst/>
+          </a:prstGeom>
+          <a:noFill/>
+          <a:ln/>
+        </p:spPr>
+        <p:txBody>
+          <a:bodyPr wrap="square" lIns="0" tIns="0" rIns="0" bIns="0" rtlCol="0" anchor="ctr"/>
+          <a:lstStyle/>
+          <a:p>
+            <a:pPr indent="0" marL="0">
+              <a:buNone/>
+            </a:pPr>
+            <a:r>
+              <a:rPr lang="en-US" sz="800" dirty="0">
+                <a:solidFill>
+                  <a:srgbClr val="7B3F00"/>
+                </a:solidFill>
+                <a:latin typeface="Calibri" pitchFamily="34" charset="0"/>
+                <a:ea typeface="Calibri" pitchFamily="34" charset="-122"/>
+                <a:cs typeface="Calibri" pitchFamily="34" charset="-120"/>
+              </a:rPr>
+              <a:t>連携元: 棚情報</a:t>
+            </a:r>
+            <a:endParaRPr lang="en-US" sz="800" dirty="0"/>
+          </a:p>
+          <a:p>
+            <a:pPr indent="0" marL="0">
+              <a:buNone/>
+            </a:pPr>
+            <a:r>
+              <a:rPr lang="en-US" sz="800" dirty="0">
+                <a:solidFill>
+                  <a:srgbClr val="7B3F00"/>
+                </a:solidFill>
+                <a:latin typeface="Calibri" pitchFamily="34" charset="0"/>
+                <a:ea typeface="Calibri" pitchFamily="34" charset="-122"/>
+                <a:cs typeface="Calibri" pitchFamily="34" charset="-120"/>
+              </a:rPr>
+              <a:t>SHARP / P003</a:t>
+            </a:r>
+            <a:endParaRPr lang="en-US" sz="800" dirty="0"/>
+          </a:p>
+        </p:txBody>
+      </p:sp>
+      <p:sp>
+        <p:nvSpPr>
+          <p:cNvPr id="59" name="Shape 54"/>
+          <p:cNvSpPr/>
+          <p:nvPr/>
+        </p:nvSpPr>
+        <p:spPr>
+          <a:xfrm>
+            <a:off x="6528816" y="2176272"/>
+            <a:ext cx="2944368" cy="365760"/>
+          </a:xfrm>
+          <a:prstGeom prst="rect">
+            <a:avLst/>
+          </a:prstGeom>
+          <a:solidFill>
+            <a:srgbClr val="FFF9E6"/>
+          </a:solidFill>
+          <a:ln w="12700">
+            <a:solidFill>
+              <a:srgbClr val="CCAA00"/>
+            </a:solidFill>
+            <a:prstDash val="solid"/>
+          </a:ln>
+        </p:spPr>
+      </p:sp>
+      <p:sp>
+        <p:nvSpPr>
+          <p:cNvPr id="60" name="Text 55"/>
+          <p:cNvSpPr/>
+          <p:nvPr/>
+        </p:nvSpPr>
+        <p:spPr>
+          <a:xfrm>
+            <a:off x="6565392" y="2194560"/>
+            <a:ext cx="2871216" cy="329184"/>
+          </a:xfrm>
+          <a:prstGeom prst="rect">
+            <a:avLst/>
+          </a:prstGeom>
+          <a:noFill/>
+          <a:ln/>
+        </p:spPr>
+        <p:txBody>
+          <a:bodyPr wrap="square" lIns="0" tIns="0" rIns="0" bIns="0" rtlCol="0" anchor="ctr"/>
+          <a:lstStyle/>
+          <a:p>
+            <a:pPr indent="0" marL="0">
+              <a:buNone/>
+            </a:pPr>
+            <a:r>
+              <a:rPr lang="en-US" sz="750" dirty="0">
+                <a:solidFill>
+                  <a:srgbClr val="7A6000"/>
+                </a:solidFill>
+                <a:latin typeface="Calibri" pitchFamily="34" charset="0"/>
+                <a:ea typeface="Calibri" pitchFamily="34" charset="-122"/>
+                <a:cs typeface="Calibri" pitchFamily="34" charset="-120"/>
+              </a:rPr>
+              <a:t>S3: pos-original/sh/receive/</a:t>
+            </a:r>
+            <a:endParaRPr lang="en-US" sz="750" dirty="0"/>
+          </a:p>
+          <a:p>
+            <a:pPr indent="0" marL="0">
+              <a:buNone/>
+            </a:pPr>
+            <a:r>
+              <a:rPr lang="en-US" sz="750" dirty="0">
+                <a:solidFill>
+                  <a:srgbClr val="7A6000"/>
+                </a:solidFill>
+                <a:latin typeface="Calibri" pitchFamily="34" charset="0"/>
+                <a:ea typeface="Calibri" pitchFamily="34" charset="-122"/>
+                <a:cs typeface="Calibri" pitchFamily="34" charset="-120"/>
+              </a:rPr>
+              <a:t>{table_name}.csv + .END</a:t>
+            </a:r>
+            <a:endParaRPr lang="en-US" sz="750" dirty="0"/>
+          </a:p>
+        </p:txBody>
+      </p:sp>
+      <p:sp>
+        <p:nvSpPr>
+          <p:cNvPr id="61" name="Shape 56"/>
+          <p:cNvSpPr/>
+          <p:nvPr/>
+        </p:nvSpPr>
+        <p:spPr>
+          <a:xfrm>
+            <a:off x="6528816" y="2569464"/>
+            <a:ext cx="2944368" cy="347472"/>
+          </a:xfrm>
+          <a:prstGeom prst="rect">
+            <a:avLst/>
+          </a:prstGeom>
+          <a:solidFill>
+            <a:srgbClr val="FDEDEC"/>
+          </a:solidFill>
+          <a:ln w="12700">
+            <a:solidFill>
+              <a:srgbClr val="E74C3C"/>
+            </a:solidFill>
+            <a:prstDash val="solid"/>
+          </a:ln>
+        </p:spPr>
+      </p:sp>
+      <p:sp>
+        <p:nvSpPr>
+          <p:cNvPr id="62" name="Text 57"/>
+          <p:cNvSpPr/>
+          <p:nvPr/>
+        </p:nvSpPr>
+        <p:spPr>
+          <a:xfrm>
+            <a:off x="6565392" y="2587752"/>
+            <a:ext cx="2871216" cy="310896"/>
+          </a:xfrm>
+          <a:prstGeom prst="rect">
+            <a:avLst/>
+          </a:prstGeom>
+          <a:noFill/>
+          <a:ln/>
+        </p:spPr>
+        <p:txBody>
+          <a:bodyPr wrap="square" lIns="0" tIns="0" rIns="0" bIns="0" rtlCol="0" anchor="ctr"/>
+          <a:lstStyle/>
+          <a:p>
+            <a:pPr indent="0" marL="0">
+              <a:buNone/>
+            </a:pPr>
+            <a:r>
+              <a:rPr lang="en-US" sz="750" dirty="0">
+                <a:solidFill>
+                  <a:srgbClr val="C0392B"/>
+                </a:solidFill>
+                <a:latin typeface="Calibri" pitchFamily="34" charset="0"/>
+                <a:ea typeface="Calibri" pitchFamily="34" charset="-122"/>
+                <a:cs typeface="Calibri" pitchFamily="34" charset="-120"/>
+              </a:rPr>
+              <a:t>*.END 着地 → EventBridge</a:t>
+            </a:r>
+            <a:endParaRPr lang="en-US" sz="750" dirty="0"/>
+          </a:p>
+          <a:p>
+            <a:pPr indent="0" marL="0">
+              <a:buNone/>
+            </a:pPr>
+            <a:r>
+              <a:rPr lang="en-US" sz="750" dirty="0">
+                <a:solidFill>
+                  <a:srgbClr val="C0392B"/>
+                </a:solidFill>
+                <a:latin typeface="Calibri" pitchFamily="34" charset="0"/>
+                <a:ea typeface="Calibri" pitchFamily="34" charset="-122"/>
+                <a:cs typeface="Calibri" pitchFamily="34" charset="-120"/>
+              </a:rPr>
+              <a:t>→ SF: import-pos-master-sh</a:t>
+            </a:r>
+            <a:endParaRPr lang="en-US" sz="750" dirty="0"/>
+          </a:p>
+        </p:txBody>
+      </p:sp>
+      <p:sp>
+        <p:nvSpPr>
+          <p:cNvPr id="63" name="Shape 58"/>
+          <p:cNvSpPr/>
+          <p:nvPr/>
+        </p:nvSpPr>
+        <p:spPr>
+          <a:xfrm>
+            <a:off x="6528816" y="2953512"/>
+            <a:ext cx="2944368" cy="429768"/>
+          </a:xfrm>
+          <a:prstGeom prst="rect">
+            <a:avLst/>
+          </a:prstGeom>
+          <a:solidFill>
+            <a:srgbClr val="F0FFF0"/>
+          </a:solidFill>
+          <a:ln w="12700">
+            <a:solidFill>
+              <a:srgbClr val="7B3F00"/>
+            </a:solidFill>
+            <a:prstDash val="solid"/>
+          </a:ln>
+        </p:spPr>
+      </p:sp>
+      <p:sp>
+        <p:nvSpPr>
+          <p:cNvPr id="64" name="Text 59"/>
+          <p:cNvSpPr/>
+          <p:nvPr/>
+        </p:nvSpPr>
+        <p:spPr>
+          <a:xfrm>
+            <a:off x="6565392" y="2962656"/>
+            <a:ext cx="2871216" cy="393192"/>
+          </a:xfrm>
+          <a:prstGeom prst="rect">
+            <a:avLst/>
+          </a:prstGeom>
+          <a:noFill/>
+          <a:ln/>
+        </p:spPr>
+        <p:txBody>
+          <a:bodyPr wrap="square" lIns="0" tIns="0" rIns="0" bIns="0" rtlCol="0" anchor="ctr"/>
+          <a:lstStyle/>
+          <a:p>
+            <a:pPr indent="0" marL="0">
+              <a:buNone/>
+            </a:pPr>
+            <a:r>
+              <a:rPr lang="en-US" sz="750" dirty="0">
+                <a:solidFill>
+                  <a:srgbClr val="222222"/>
+                </a:solidFill>
+                <a:latin typeface="Calibri" pitchFamily="34" charset="0"/>
+                <a:ea typeface="Calibri" pitchFamily="34" charset="-122"/>
+                <a:cs typeface="Calibri" pitchFamily="34" charset="-120"/>
+              </a:rPr>
+              <a:t>1. Lambda: import-pos-master-sh</a:t>
+            </a:r>
+            <a:endParaRPr lang="en-US" sz="750" dirty="0"/>
+          </a:p>
+          <a:p>
+            <a:pPr indent="0" marL="0">
+              <a:buNone/>
+            </a:pPr>
+            <a:r>
+              <a:rPr lang="en-US" sz="750" dirty="0">
+                <a:solidFill>
+                  <a:srgbClr val="222222"/>
+                </a:solidFill>
+                <a:latin typeface="Calibri" pitchFamily="34" charset="0"/>
+                <a:ea typeface="Calibri" pitchFamily="34" charset="-122"/>
+                <a:cs typeface="Calibri" pitchFamily="34" charset="-120"/>
+              </a:rPr>
+              <a:t>（DB接続・ファイルダウンロード）</a:t>
+            </a:r>
+            <a:endParaRPr lang="en-US" sz="750" dirty="0"/>
+          </a:p>
+        </p:txBody>
+      </p:sp>
+      <p:sp>
+        <p:nvSpPr>
+          <p:cNvPr id="65" name="Shape 60"/>
+          <p:cNvSpPr/>
+          <p:nvPr/>
+        </p:nvSpPr>
+        <p:spPr>
+          <a:xfrm>
+            <a:off x="6528816" y="3410712"/>
+            <a:ext cx="2944368" cy="429768"/>
+          </a:xfrm>
+          <a:prstGeom prst="rect">
+            <a:avLst/>
+          </a:prstGeom>
+          <a:solidFill>
+            <a:srgbClr val="E8F8E8"/>
+          </a:solidFill>
+          <a:ln w="12700">
+            <a:solidFill>
+              <a:srgbClr val="7B3F00"/>
+            </a:solidFill>
+            <a:prstDash val="solid"/>
+          </a:ln>
+        </p:spPr>
+      </p:sp>
+      <p:sp>
+        <p:nvSpPr>
+          <p:cNvPr id="66" name="Text 61"/>
+          <p:cNvSpPr/>
+          <p:nvPr/>
+        </p:nvSpPr>
+        <p:spPr>
+          <a:xfrm>
+            <a:off x="6565392" y="3419856"/>
+            <a:ext cx="2871216" cy="393192"/>
+          </a:xfrm>
+          <a:prstGeom prst="rect">
+            <a:avLst/>
+          </a:prstGeom>
+          <a:noFill/>
+          <a:ln/>
+        </p:spPr>
+        <p:txBody>
+          <a:bodyPr wrap="square" lIns="0" tIns="0" rIns="0" bIns="0" rtlCol="0" anchor="ctr"/>
+          <a:lstStyle/>
+          <a:p>
+            <a:pPr indent="0" marL="0">
+              <a:buNone/>
+            </a:pPr>
+            <a:r>
+              <a:rPr lang="en-US" sz="750" dirty="0">
+                <a:solidFill>
+                  <a:srgbClr val="222222"/>
+                </a:solidFill>
+                <a:latin typeface="Calibri" pitchFamily="34" charset="0"/>
+                <a:ea typeface="Calibri" pitchFamily="34" charset="-122"/>
+                <a:cs typeface="Calibri" pitchFamily="34" charset="-120"/>
+              </a:rPr>
+              <a:t>2. → Replica_Kasumi.41_P001</a:t>
+            </a:r>
+            <a:endParaRPr lang="en-US" sz="750" dirty="0"/>
+          </a:p>
+          <a:p>
+            <a:pPr indent="0" marL="0">
+              <a:buNone/>
+            </a:pPr>
+            <a:r>
+              <a:rPr lang="en-US" sz="750" dirty="0">
+                <a:solidFill>
+                  <a:srgbClr val="222222"/>
+                </a:solidFill>
+                <a:latin typeface="Calibri" pitchFamily="34" charset="0"/>
+                <a:ea typeface="Calibri" pitchFamily="34" charset="-122"/>
+                <a:cs typeface="Calibri" pitchFamily="34" charset="-120"/>
+              </a:rPr>
+              <a:t>バッチステータス更新</a:t>
+            </a:r>
+            <a:endParaRPr lang="en-US" sz="750" dirty="0"/>
+          </a:p>
+        </p:txBody>
+      </p:sp>
+      <p:sp>
+        <p:nvSpPr>
+          <p:cNvPr id="67" name="Shape 62"/>
+          <p:cNvSpPr/>
+          <p:nvPr/>
+        </p:nvSpPr>
+        <p:spPr>
+          <a:xfrm>
+            <a:off x="6528816" y="3867912"/>
+            <a:ext cx="2944368" cy="429768"/>
+          </a:xfrm>
+          <a:prstGeom prst="rect">
+            <a:avLst/>
+          </a:prstGeom>
+          <a:solidFill>
+            <a:srgbClr val="F0FFF0"/>
+          </a:solidFill>
+          <a:ln w="12700">
+            <a:solidFill>
+              <a:srgbClr val="7B3F00"/>
+            </a:solidFill>
+            <a:prstDash val="solid"/>
+          </a:ln>
+        </p:spPr>
+      </p:sp>
+      <p:sp>
+        <p:nvSpPr>
+          <p:cNvPr id="68" name="Text 63"/>
+          <p:cNvSpPr/>
+          <p:nvPr/>
+        </p:nvSpPr>
+        <p:spPr>
+          <a:xfrm>
+            <a:off x="6565392" y="3877056"/>
+            <a:ext cx="2871216" cy="393192"/>
+          </a:xfrm>
+          <a:prstGeom prst="rect">
+            <a:avLst/>
+          </a:prstGeom>
+          <a:noFill/>
+          <a:ln/>
+        </p:spPr>
+        <p:txBody>
+          <a:bodyPr wrap="square" lIns="0" tIns="0" rIns="0" bIns="0" rtlCol="0" anchor="ctr"/>
+          <a:lstStyle/>
+          <a:p>
+            <a:pPr indent="0" marL="0">
+              <a:buNone/>
+            </a:pPr>
+            <a:r>
+              <a:rPr lang="en-US" sz="750" dirty="0">
+                <a:solidFill>
+                  <a:srgbClr val="222222"/>
+                </a:solidFill>
+                <a:latin typeface="Calibri" pitchFamily="34" charset="0"/>
+                <a:ea typeface="Calibri" pitchFamily="34" charset="-122"/>
+                <a:cs typeface="Calibri" pitchFamily="34" charset="-120"/>
+              </a:rPr>
+              <a:t>3. Lambda: backup-file</a:t>
+            </a:r>
+            <a:endParaRPr lang="en-US" sz="750" dirty="0"/>
+          </a:p>
+          <a:p>
+            <a:pPr indent="0" marL="0">
+              <a:buNone/>
+            </a:pPr>
+            <a:r>
+              <a:rPr lang="en-US" sz="750" dirty="0">
+                <a:solidFill>
+                  <a:srgbClr val="222222"/>
+                </a:solidFill>
+                <a:latin typeface="Calibri" pitchFamily="34" charset="0"/>
+                <a:ea typeface="Calibri" pitchFamily="34" charset="-122"/>
+                <a:cs typeface="Calibri" pitchFamily="34" charset="-120"/>
+              </a:rPr>
+              <a:t>（バックアップ移動）</a:t>
+            </a:r>
+            <a:endParaRPr lang="en-US" sz="750" dirty="0"/>
+          </a:p>
+        </p:txBody>
+      </p:sp>
+      <p:sp>
+        <p:nvSpPr>
+          <p:cNvPr id="69" name="Shape 64"/>
+          <p:cNvSpPr/>
+          <p:nvPr/>
+        </p:nvSpPr>
+        <p:spPr>
+          <a:xfrm>
+            <a:off x="6528816" y="4325112"/>
+            <a:ext cx="2944368" cy="429768"/>
+          </a:xfrm>
+          <a:prstGeom prst="rect">
+            <a:avLst/>
+          </a:prstGeom>
+          <a:solidFill>
+            <a:srgbClr val="E8F8E8"/>
+          </a:solidFill>
+          <a:ln w="12700">
+            <a:solidFill>
+              <a:srgbClr val="7B3F00"/>
+            </a:solidFill>
+            <a:prstDash val="solid"/>
+          </a:ln>
+        </p:spPr>
+      </p:sp>
+      <p:sp>
+        <p:nvSpPr>
+          <p:cNvPr id="70" name="Text 65"/>
+          <p:cNvSpPr/>
+          <p:nvPr/>
+        </p:nvSpPr>
+        <p:spPr>
+          <a:xfrm>
+            <a:off x="6565392" y="4334256"/>
+            <a:ext cx="2871216" cy="393192"/>
+          </a:xfrm>
+          <a:prstGeom prst="rect">
+            <a:avLst/>
+          </a:prstGeom>
+          <a:noFill/>
+          <a:ln/>
+        </p:spPr>
+        <p:txBody>
+          <a:bodyPr wrap="square" lIns="0" tIns="0" rIns="0" bIns="0" rtlCol="0" anchor="ctr"/>
+          <a:lstStyle/>
+          <a:p>
+            <a:pPr indent="0" marL="0">
+              <a:buNone/>
+            </a:pPr>
+            <a:r>
+              <a:rPr lang="en-US" sz="750" dirty="0">
+                <a:solidFill>
+                  <a:srgbClr val="222222"/>
+                </a:solidFill>
+                <a:latin typeface="Calibri" pitchFamily="34" charset="0"/>
+                <a:ea typeface="Calibri" pitchFamily="34" charset="-122"/>
+                <a:cs typeface="Calibri" pitchFamily="34" charset="-120"/>
+              </a:rPr>
+              <a:t>4. （SHはTXTエクスポートなし）</a:t>
+            </a:r>
+            <a:endParaRPr lang="en-US" sz="750" dirty="0"/>
+          </a:p>
+        </p:txBody>
+      </p:sp>
+      <p:sp>
+        <p:nvSpPr>
+          <p:cNvPr id="71" name="Shape 66"/>
+          <p:cNvSpPr/>
+          <p:nvPr/>
+        </p:nvSpPr>
+        <p:spPr>
+          <a:xfrm>
+            <a:off x="6528816" y="5303520"/>
+            <a:ext cx="2944368" cy="438912"/>
+          </a:xfrm>
+          <a:prstGeom prst="rect">
+            <a:avLst/>
+          </a:prstGeom>
+          <a:solidFill>
+            <a:srgbClr val="D0232A"/>
+          </a:solidFill>
+          <a:ln w="12700">
+            <a:solidFill>
+              <a:srgbClr val="D0232A"/>
+            </a:solidFill>
+            <a:prstDash val="solid"/>
+          </a:ln>
+        </p:spPr>
+      </p:sp>
+      <p:sp>
+        <p:nvSpPr>
+          <p:cNvPr id="72" name="Text 67"/>
+          <p:cNvSpPr/>
+          <p:nvPr/>
+        </p:nvSpPr>
+        <p:spPr>
+          <a:xfrm>
+            <a:off x="6565392" y="5321808"/>
+            <a:ext cx="2871216" cy="402336"/>
+          </a:xfrm>
+          <a:prstGeom prst="rect">
+            <a:avLst/>
+          </a:prstGeom>
+          <a:noFill/>
+          <a:ln/>
+        </p:spPr>
+        <p:txBody>
+          <a:bodyPr wrap="square" lIns="0" tIns="0" rIns="0" bIns="0" rtlCol="0" anchor="ctr"/>
+          <a:lstStyle/>
+          <a:p>
+            <a:pPr indent="0" marL="0">
+              <a:buNone/>
+            </a:pPr>
+            <a:r>
+              <a:rPr lang="en-US" sz="750" dirty="0">
+                <a:solidFill>
+                  <a:srgbClr val="FFFFFF"/>
+                </a:solidFill>
+                <a:latin typeface="Calibri" pitchFamily="34" charset="0"/>
+                <a:ea typeface="Calibri" pitchFamily="34" charset="-122"/>
+                <a:cs typeface="Calibri" pitchFamily="34" charset="-120"/>
+              </a:rPr>
+              <a:t>DB: Replica_Kasumi</a:t>
+            </a:r>
+            <a:endParaRPr lang="en-US" sz="750" dirty="0"/>
+          </a:p>
+          <a:p>
+            <a:pPr indent="0" marL="0">
+              <a:buNone/>
+            </a:pPr>
+            <a:r>
+              <a:rPr lang="en-US" sz="750" dirty="0">
+                <a:solidFill>
+                  <a:srgbClr val="FFFFFF"/>
+                </a:solidFill>
+                <a:latin typeface="Calibri" pitchFamily="34" charset="0"/>
+                <a:ea typeface="Calibri" pitchFamily="34" charset="-122"/>
+                <a:cs typeface="Calibri" pitchFamily="34" charset="-120"/>
+              </a:rPr>
+              <a:t>・41_P001</a:t>
+            </a:r>
+            <a:endParaRPr lang="en-US" sz="750" dirty="0"/>
+          </a:p>
+        </p:txBody>
+      </p:sp>
+      <p:sp>
+        <p:nvSpPr>
+          <p:cNvPr id="73" name="Shape 68"/>
+          <p:cNvSpPr/>
+          <p:nvPr/>
+        </p:nvSpPr>
+        <p:spPr>
+          <a:xfrm>
+            <a:off x="6528816" y="5779008"/>
+            <a:ext cx="2944368" cy="228600"/>
+          </a:xfrm>
+          <a:prstGeom prst="rect">
+            <a:avLst/>
+          </a:prstGeom>
+          <a:solidFill>
+            <a:srgbClr val="7B3F00"/>
+          </a:solidFill>
+          <a:ln w="12700">
+            <a:solidFill>
+              <a:srgbClr val="7B3F00"/>
+            </a:solidFill>
+            <a:prstDash val="solid"/>
+          </a:ln>
+        </p:spPr>
+      </p:sp>
+      <p:sp>
+        <p:nvSpPr>
+          <p:cNvPr id="74" name="Text 69"/>
+          <p:cNvSpPr/>
+          <p:nvPr/>
+        </p:nvSpPr>
+        <p:spPr>
+          <a:xfrm>
+            <a:off x="6565392" y="5779008"/>
+            <a:ext cx="2871216" cy="228600"/>
+          </a:xfrm>
+          <a:prstGeom prst="rect">
+            <a:avLst/>
+          </a:prstGeom>
+          <a:noFill/>
+          <a:ln/>
+        </p:spPr>
+        <p:txBody>
+          <a:bodyPr wrap="square" lIns="0" tIns="0" rIns="0" bIns="0" rtlCol="0" anchor="ctr"/>
+          <a:lstStyle/>
+          <a:p>
+            <a:pPr algn="ctr" indent="0" marL="0">
+              <a:buNone/>
+            </a:pPr>
+            <a:r>
+              <a:rPr lang="en-US" sz="750" b="1" dirty="0">
+                <a:solidFill>
+                  <a:srgbClr val="FFFFFF"/>
+                </a:solidFill>
+                <a:latin typeface="Calibri" pitchFamily="34" charset="0"/>
+                <a:ea typeface="Calibri" pitchFamily="34" charset="-122"/>
+                <a:cs typeface="Calibri" pitchFamily="34" charset="-120"/>
+              </a:rPr>
+              <a:t>出力: （送信なし）</a:t>
+            </a:r>
+            <a:endParaRPr lang="en-US" sz="750" dirty="0"/>
+          </a:p>
+        </p:txBody>
+      </p:sp>
+      <p:sp>
+        <p:nvSpPr>
+          <p:cNvPr id="75" name="Text 70"/>
+          <p:cNvSpPr/>
+          <p:nvPr/>
+        </p:nvSpPr>
+        <p:spPr>
+          <a:xfrm>
+            <a:off x="274320" y="6053328"/>
+            <a:ext cx="9144000" cy="219456"/>
+          </a:xfrm>
+          <a:prstGeom prst="rect">
+            <a:avLst/>
+          </a:prstGeom>
+          <a:noFill/>
+          <a:ln/>
+        </p:spPr>
+        <p:txBody>
+          <a:bodyPr wrap="square" lIns="0" tIns="0" rIns="0" bIns="0" rtlCol="0" anchor="ctr"/>
+          <a:lstStyle/>
+          <a:p>
+            <a:pPr indent="0" marL="0">
+              <a:buNone/>
+            </a:pPr>
+            <a:r>
+              <a:rPr lang="en-US" sz="750" dirty="0">
+                <a:solidFill>
                   <a:srgbClr val="888888"/>
                 </a:solidFill>
                 <a:latin typeface="Calibri" pitchFamily="34" charset="0"/>
                 <a:ea typeface="Calibri" pitchFamily="34" charset="-122"/>
                 <a:cs typeface="Calibri" pitchFamily="34" charset="-120"/>
               </a:rPr>
-              <a:t>共通: S3バケット = prd-ignica-ksm  /  バックアップ先 = pos-original/{oc|sg|sh}/backup/  /  監視 = CloudWatch</a:t>
+              <a:t>BOX-PC FTP送信先: PRD=10.156.96.210 / STG=10.156.96.211  |  FTP ID/PW: ishida/ishida  |  Sent path: /{store_code 5char}/Recv/</a:t>
             </a:r>
-            <a:endParaRPr lang="en-US" sz="800" dirty="0"/>
+            <a:endParaRPr lang="en-US" sz="750" dirty="0"/>
           </a:p>
         </p:txBody>
       </p:sp>

--- a/40_AWS/01_構成資料/カスミPOS_AWS構成資料.pptx
+++ b/40_AWS/01_構成資料/カスミPOS_AWS構成資料.pptx
@@ -6076,6 +6076,45 @@
         </p:nvSpPr>
         <p:spPr>
           <a:xfrm>
+            <a:off x="5029200" y="4462272"/>
+            <a:ext cx="4572000" cy="256032"/>
+          </a:xfrm>
+          <a:prstGeom prst="rect">
+            <a:avLst/>
+          </a:prstGeom>
+          <a:noFill/>
+          <a:ln/>
+        </p:spPr>
+        <p:txBody>
+          <a:bodyPr wrap="square" lIns="0" tIns="0" rIns="0" bIns="0" rtlCol="0" anchor="ctr"/>
+          <a:lstStyle/>
+          <a:p>
+            <a:pPr indent="0" marL="0">
+              <a:buNone/>
+            </a:pPr>
+            <a:r>
+              <a:rPr lang="en-US" sz="800" dirty="0">
+                <a:solidFill>
+                  <a:srgbClr val="225577"/>
+                </a:solidFill>
+                <a:latin typeface="Calibri" pitchFamily="34" charset="0"/>
+                <a:ea typeface="Calibri" pitchFamily="34" charset="-122"/>
+                <a:cs typeface="Calibri" pitchFamily="34" charset="-120"/>
+              </a:rPr>
+              <a:t>ECS: posprd-cluster (FARGATE)  TaskDef: oc-export-data:2 / sg-export-data  QueryLanguage: JSONata  Retry: MaxAttempts:3</a:t>
+            </a:r>
+            <a:endParaRPr lang="en-US" sz="800" dirty="0"/>
+          </a:p>
+        </p:txBody>
+      </p:sp>
+      <p:sp>
+        <p:nvSpPr>
+          <p:cNvPr id="18" name="Text 11"/>
+          <p:cNvSpPr/>
+          <p:nvPr/>
+        </p:nvSpPr>
+        <p:spPr>
+          <a:xfrm>
             <a:off x="5029200" y="4206240"/>
             <a:ext cx="4572000" cy="256032"/>
           </a:xfrm>
@@ -7213,7 +7252,7 @@
                 <a:ea typeface="Calibri" pitchFamily="34" charset="-122"/>
                 <a:cs typeface="Calibri" pitchFamily="34" charset="-120"/>
               </a:rPr>
-              <a:t>{table_name}.csv + .END</a:t>
+              <a:t>{table_name}.END 着地</a:t>
             </a:r>
             <a:endParaRPr lang="en-US" sz="750" dirty="0"/>
           </a:p>
@@ -7277,7 +7316,7 @@
                 <a:ea typeface="Calibri" pitchFamily="34" charset="-122"/>
                 <a:cs typeface="Calibri" pitchFamily="34" charset="-120"/>
               </a:rPr>
-              <a:t>*.END 着地 → EventBridge</a:t>
+              <a:t>EventBridge: Object Created</a:t>
             </a:r>
             <a:endParaRPr lang="en-US" sz="750" dirty="0"/>
           </a:p>
@@ -7294,7 +7333,7 @@
                 <a:ea typeface="Calibri" pitchFamily="34" charset="-122"/>
                 <a:cs typeface="Calibri" pitchFamily="34" charset="-120"/>
               </a:rPr>
-              <a:t>→ SF: receive-pos-master-oc</a:t>
+              <a:t>*.END → SF: receive-pos-master-oc</a:t>
             </a:r>
             <a:endParaRPr lang="en-US" sz="750" dirty="0"/>
           </a:p>
@@ -7358,7 +7397,7 @@
                 <a:ea typeface="Calibri" pitchFamily="34" charset="-122"/>
                 <a:cs typeface="Calibri" pitchFamily="34" charset="-120"/>
               </a:rPr>
-              <a:t>1. Lambda: split-csv</a:t>
+              <a:t>1. SF①: split-csv</a:t>
             </a:r>
             <a:endParaRPr lang="en-US" sz="750" dirty="0"/>
           </a:p>
@@ -7375,7 +7414,24 @@
                 <a:ea typeface="Calibri" pitchFamily="34" charset="-122"/>
                 <a:cs typeface="Calibri" pitchFamily="34" charset="-120"/>
               </a:rPr>
-              <a:t>（店舗別CSV分割、.ENDIMPORT生成）</a:t>
+              <a:t>(店舗別CSV分割 + .ENDIMPORT生成)</a:t>
+            </a:r>
+            <a:endParaRPr lang="en-US" sz="750" dirty="0"/>
+          </a:p>
+          <a:p>
+            <a:pPr indent="0" marL="0">
+              <a:buNone/>
+            </a:pPr>
+            <a:r>
+              <a:rPr lang="en-US" sz="750" dirty="0">
+                <a:solidFill>
+                  <a:srgbClr val="222222"/>
+                </a:solidFill>
+                <a:latin typeface="Calibri" pitchFamily="34" charset="0"/>
+                <a:ea typeface="Calibri" pitchFamily="34" charset="-122"/>
+                <a:cs typeface="Calibri" pitchFamily="34" charset="-120"/>
+              </a:rPr>
+              <a:t>[Parallel: backup-file + Map:create-file-end]</a:t>
             </a:r>
             <a:endParaRPr lang="en-US" sz="750" dirty="0"/>
           </a:p>
@@ -7439,7 +7495,24 @@
                 <a:ea typeface="Calibri" pitchFamily="34" charset="-122"/>
                 <a:cs typeface="Calibri" pitchFamily="34" charset="-120"/>
               </a:rPr>
-              <a:t>2. Lambda: oc-import-data</a:t>
+              <a:t>2. SF②: import-pos-master-oc</a:t>
+            </a:r>
+            <a:endParaRPr lang="en-US" sz="750" dirty="0"/>
+          </a:p>
+          <a:p>
+            <a:pPr indent="0" marL="0">
+              <a:buNone/>
+            </a:pPr>
+            <a:r>
+              <a:rPr lang="en-US" sz="750" dirty="0">
+                <a:solidFill>
+                  <a:srgbClr val="222222"/>
+                </a:solidFill>
+                <a:latin typeface="Calibri" pitchFamily="34" charset="0"/>
+                <a:ea typeface="Calibri" pitchFamily="34" charset="-122"/>
+                <a:cs typeface="Calibri" pitchFamily="34" charset="-120"/>
+              </a:rPr>
+              <a:t>Lambda: oc-import-data:$LATEST</a:t>
             </a:r>
             <a:endParaRPr lang="en-US" sz="750" dirty="0"/>
           </a:p>
@@ -7520,7 +7593,7 @@
                 <a:ea typeface="Calibri" pitchFamily="34" charset="-122"/>
                 <a:cs typeface="Calibri" pitchFamily="34" charset="-120"/>
               </a:rPr>
-              <a:t>3. Lambda: backup-file</a:t>
+              <a:t>3. SF③: create-txt-file-oc</a:t>
             </a:r>
             <a:endParaRPr lang="en-US" sz="750" dirty="0"/>
           </a:p>
@@ -7537,7 +7610,41 @@
                 <a:ea typeface="Calibri" pitchFamily="34" charset="-122"/>
                 <a:cs typeface="Calibri" pitchFamily="34" charset="-120"/>
               </a:rPr>
-              <a:t>（バックアップ移動）</a:t>
+              <a:t>Lambda: get-sync-store(同期店舗確認)</a:t>
+            </a:r>
+            <a:endParaRPr lang="en-US" sz="750" dirty="0"/>
+          </a:p>
+          <a:p>
+            <a:pPr indent="0" marL="0">
+              <a:buNone/>
+            </a:pPr>
+            <a:r>
+              <a:rPr lang="en-US" sz="750" dirty="0">
+                <a:solidFill>
+                  <a:srgbClr val="222222"/>
+                </a:solidFill>
+                <a:latin typeface="Calibri" pitchFamily="34" charset="0"/>
+                <a:ea typeface="Calibri" pitchFamily="34" charset="-122"/>
+                <a:cs typeface="Calibri" pitchFamily="34" charset="-120"/>
+              </a:rPr>
+              <a:t>ECS FARGATE: oc-export-data</a:t>
+            </a:r>
+            <a:endParaRPr lang="en-US" sz="750" dirty="0"/>
+          </a:p>
+          <a:p>
+            <a:pPr indent="0" marL="0">
+              <a:buNone/>
+            </a:pPr>
+            <a:r>
+              <a:rPr lang="en-US" sz="750" dirty="0">
+                <a:solidFill>
+                  <a:srgbClr val="222222"/>
+                </a:solidFill>
+                <a:latin typeface="Calibri" pitchFamily="34" charset="0"/>
+                <a:ea typeface="Calibri" pitchFamily="34" charset="-122"/>
+                <a:cs typeface="Calibri" pitchFamily="34" charset="-120"/>
+              </a:rPr>
+              <a:t>(posprd-cluster, TaskDef:v2)</a:t>
             </a:r>
             <a:endParaRPr lang="en-US" sz="750" dirty="0"/>
           </a:p>
@@ -7601,7 +7708,7 @@
                 <a:ea typeface="Calibri" pitchFamily="34" charset="-122"/>
                 <a:cs typeface="Calibri" pitchFamily="34" charset="-120"/>
               </a:rPr>
-              <a:t>4. EventBridge → SF: create-txt-file-oc</a:t>
+              <a:t>4. Lambda: split-txt-by-sent-time</a:t>
             </a:r>
             <a:endParaRPr lang="en-US" sz="750" dirty="0"/>
           </a:p>
@@ -7618,7 +7725,7 @@
                 <a:ea typeface="Calibri" pitchFamily="34" charset="-122"/>
                 <a:cs typeface="Calibri" pitchFamily="34" charset="-120"/>
               </a:rPr>
-              <a:t>ECS: oc-export-data → SHOHIN.TXT生成</a:t>
+              <a:t>(TXT分割 + 送信スケジュール設定)</a:t>
             </a:r>
             <a:endParaRPr lang="en-US" sz="750" dirty="0"/>
           </a:p>
@@ -7682,7 +7789,7 @@
                 <a:ea typeface="Calibri" pitchFamily="34" charset="-122"/>
                 <a:cs typeface="Calibri" pitchFamily="34" charset="-120"/>
               </a:rPr>
-              <a:t>5. SF: sent-txt-file</a:t>
+              <a:t>5. SF④: sent-txt-file</a:t>
             </a:r>
             <a:endParaRPr lang="en-US" sz="750" dirty="0"/>
           </a:p>
@@ -7699,7 +7806,7 @@
                 <a:ea typeface="Calibri" pitchFamily="34" charset="-122"/>
                 <a:cs typeface="Calibri" pitchFamily="34" charset="-120"/>
               </a:rPr>
-              <a:t>Lambda: sent-txt-file → BOX-PC FTP送信</a:t>
+              <a:t>→ BOX-PC FTP送信 + backup-file</a:t>
             </a:r>
             <a:endParaRPr lang="en-US" sz="750" dirty="0"/>
           </a:p>
@@ -7844,7 +7951,7 @@
                 <a:ea typeface="Calibri" pitchFamily="34" charset="-122"/>
                 <a:cs typeface="Calibri" pitchFamily="34" charset="-120"/>
               </a:rPr>
-              <a:t>出力: SHOHIN.TXT → BOX-PC</a:t>
+              <a:t>出力: SHOHIN.TXT</a:t>
             </a:r>
             <a:endParaRPr lang="en-US" sz="750" dirty="0"/>
           </a:p>
@@ -8070,7 +8177,7 @@
                 <a:ea typeface="Calibri" pitchFamily="34" charset="-122"/>
                 <a:cs typeface="Calibri" pitchFamily="34" charset="-120"/>
               </a:rPr>
-              <a:t>{company}_{store}_yyyymmdd.ZIP</a:t>
+              <a:t>*.ZIP 着地</a:t>
             </a:r>
             <a:endParaRPr lang="en-US" sz="750" dirty="0"/>
           </a:p>
@@ -8134,7 +8241,7 @@
                 <a:ea typeface="Calibri" pitchFamily="34" charset="-122"/>
                 <a:cs typeface="Calibri" pitchFamily="34" charset="-120"/>
               </a:rPr>
-              <a:t>*.ZIP 着地 → EventBridge</a:t>
+              <a:t>EventBridge: Object Created</a:t>
             </a:r>
             <a:endParaRPr lang="en-US" sz="750" dirty="0"/>
           </a:p>
@@ -8151,7 +8258,24 @@
                 <a:ea typeface="Calibri" pitchFamily="34" charset="-122"/>
                 <a:cs typeface="Calibri" pitchFamily="34" charset="-120"/>
               </a:rPr>
-              <a:t>→ SF: receive-and-import-pos-master-sg</a:t>
+              <a:t>*.ZIP → SQS: store-code-queue.fifo</a:t>
+            </a:r>
+            <a:endParaRPr lang="en-US" sz="750" dirty="0"/>
+          </a:p>
+          <a:p>
+            <a:pPr indent="0" marL="0">
+              <a:buNone/>
+            </a:pPr>
+            <a:r>
+              <a:rPr lang="en-US" sz="750" dirty="0">
+                <a:solidFill>
+                  <a:srgbClr val="C0392B"/>
+                </a:solidFill>
+                <a:latin typeface="Calibri" pitchFamily="34" charset="0"/>
+                <a:ea typeface="Calibri" pitchFamily="34" charset="-122"/>
+                <a:cs typeface="Calibri" pitchFamily="34" charset="-120"/>
+              </a:rPr>
+              <a:t>→ SF: receive-and-import-sg</a:t>
             </a:r>
             <a:endParaRPr lang="en-US" sz="750" dirty="0"/>
           </a:p>
@@ -8215,7 +8339,7 @@
                 <a:ea typeface="Calibri" pitchFamily="34" charset="-122"/>
                 <a:cs typeface="Calibri" pitchFamily="34" charset="-120"/>
               </a:rPr>
-              <a:t>1. Lambda: unzip-file</a:t>
+              <a:t>1. SF①: receive-and-import-sg</a:t>
             </a:r>
             <a:endParaRPr lang="en-US" sz="750" dirty="0"/>
           </a:p>
@@ -8232,7 +8356,24 @@
                 <a:ea typeface="Calibri" pitchFamily="34" charset="-122"/>
                 <a:cs typeface="Calibri" pitchFamily="34" charset="-120"/>
               </a:rPr>
-              <a:t>（ZIP展開、テーブル別フォルダ移動）</a:t>
+              <a:t>Lambda: unzip-file</a:t>
+            </a:r>
+            <a:endParaRPr lang="en-US" sz="750" dirty="0"/>
+          </a:p>
+          <a:p>
+            <a:pPr indent="0" marL="0">
+              <a:buNone/>
+            </a:pPr>
+            <a:r>
+              <a:rPr lang="en-US" sz="750" dirty="0">
+                <a:solidFill>
+                  <a:srgbClr val="222222"/>
+                </a:solidFill>
+                <a:latin typeface="Calibri" pitchFamily="34" charset="0"/>
+                <a:ea typeface="Calibri" pitchFamily="34" charset="-122"/>
+                <a:cs typeface="Calibri" pitchFamily="34" charset="-120"/>
+              </a:rPr>
+              <a:t>(ZIP展開 + テーブル別移動)</a:t>
             </a:r>
             <a:endParaRPr lang="en-US" sz="750" dirty="0"/>
           </a:p>
@@ -8296,7 +8437,7 @@
                 <a:ea typeface="Calibri" pitchFamily="34" charset="-122"/>
                 <a:cs typeface="Calibri" pitchFamily="34" charset="-120"/>
               </a:rPr>
-              <a:t>2. Lambda: sg-import-data [Parallel/Map]</a:t>
+              <a:t>2. [Parallel]</a:t>
             </a:r>
             <a:endParaRPr lang="en-US" sz="750" dirty="0"/>
           </a:p>
@@ -8313,7 +8454,58 @@
                 <a:ea typeface="Calibri" pitchFamily="34" charset="-122"/>
                 <a:cs typeface="Calibri" pitchFamily="34" charset="-120"/>
               </a:rPr>
-              <a:t>→ Replica_Kasumi (11/13/16)</a:t>
+              <a:t>① backup-file (ZIPバックアップ)</a:t>
+            </a:r>
+            <a:endParaRPr lang="en-US" sz="750" dirty="0"/>
+          </a:p>
+          <a:p>
+            <a:pPr indent="0" marL="0">
+              <a:buNone/>
+            </a:pPr>
+            <a:r>
+              <a:rPr lang="en-US" sz="750" dirty="0">
+                <a:solidFill>
+                  <a:srgbClr val="222222"/>
+                </a:solidFill>
+                <a:latin typeface="Calibri" pitchFamily="34" charset="0"/>
+                <a:ea typeface="Calibri" pitchFamily="34" charset="-122"/>
+                <a:cs typeface="Calibri" pitchFamily="34" charset="-120"/>
+              </a:rPr>
+              <a:t>② Map: sg-import-data:$LATEST</a:t>
+            </a:r>
+            <a:endParaRPr lang="en-US" sz="750" dirty="0"/>
+          </a:p>
+          <a:p>
+            <a:pPr indent="0" marL="0">
+              <a:buNone/>
+            </a:pPr>
+            <a:r>
+              <a:rPr lang="en-US" sz="750" dirty="0">
+                <a:solidFill>
+                  <a:srgbClr val="222222"/>
+                </a:solidFill>
+                <a:latin typeface="Calibri" pitchFamily="34" charset="0"/>
+                <a:ea typeface="Calibri" pitchFamily="34" charset="-122"/>
+                <a:cs typeface="Calibri" pitchFamily="34" charset="-120"/>
+              </a:rPr>
+              <a:t>  → Replica_Kasumi (11/13/16)</a:t>
+            </a:r>
+            <a:endParaRPr lang="en-US" sz="750" dirty="0"/>
+          </a:p>
+          <a:p>
+            <a:pPr indent="0" marL="0">
+              <a:buNone/>
+            </a:pPr>
+            <a:r>
+              <a:rPr lang="en-US" sz="750" dirty="0">
+                <a:solidFill>
+                  <a:srgbClr val="222222"/>
+                </a:solidFill>
+                <a:latin typeface="Calibri" pitchFamily="34" charset="0"/>
+                <a:ea typeface="Calibri" pitchFamily="34" charset="-122"/>
+                <a:cs typeface="Calibri" pitchFamily="34" charset="-120"/>
+              </a:rPr>
+              <a:t>  ※エラー時SQS deleteMessage</a:t>
             </a:r>
             <a:endParaRPr lang="en-US" sz="750" dirty="0"/>
           </a:p>
@@ -8377,7 +8569,7 @@
                 <a:ea typeface="Calibri" pitchFamily="34" charset="-122"/>
                 <a:cs typeface="Calibri" pitchFamily="34" charset="-120"/>
               </a:rPr>
-              <a:t>3. Lambda: create-file-end → .ENDEXPORT</a:t>
+              <a:t>3. .ENDEXPORT生成</a:t>
             </a:r>
             <a:endParaRPr lang="en-US" sz="750" dirty="0"/>
           </a:p>
@@ -8394,7 +8586,24 @@
                 <a:ea typeface="Calibri" pitchFamily="34" charset="-122"/>
                 <a:cs typeface="Calibri" pitchFamily="34" charset="-120"/>
               </a:rPr>
-              <a:t>SQS: store-code-queue-sg.fifo</a:t>
+              <a:t>→ EventBridge: Object Created</a:t>
+            </a:r>
+            <a:endParaRPr lang="en-US" sz="750" dirty="0"/>
+          </a:p>
+          <a:p>
+            <a:pPr indent="0" marL="0">
+              <a:buNone/>
+            </a:pPr>
+            <a:r>
+              <a:rPr lang="en-US" sz="750" dirty="0">
+                <a:solidFill>
+                  <a:srgbClr val="222222"/>
+                </a:solidFill>
+                <a:latin typeface="Calibri" pitchFamily="34" charset="0"/>
+                <a:ea typeface="Calibri" pitchFamily="34" charset="-122"/>
+                <a:cs typeface="Calibri" pitchFamily="34" charset="-120"/>
+              </a:rPr>
+              <a:t>→ SF: create-txt-file-sg</a:t>
             </a:r>
             <a:endParaRPr lang="en-US" sz="750" dirty="0"/>
           </a:p>
@@ -8458,7 +8667,7 @@
                 <a:ea typeface="Calibri" pitchFamily="34" charset="-122"/>
                 <a:cs typeface="Calibri" pitchFamily="34" charset="-120"/>
               </a:rPr>
-              <a:t>4. EventBridge → SF: create-txt-file-sg</a:t>
+              <a:t>4. ECS FARGATE: sg-export-data</a:t>
             </a:r>
             <a:endParaRPr lang="en-US" sz="750" dirty="0"/>
           </a:p>
@@ -8475,7 +8684,24 @@
                 <a:ea typeface="Calibri" pitchFamily="34" charset="-122"/>
                 <a:cs typeface="Calibri" pitchFamily="34" charset="-120"/>
               </a:rPr>
-              <a:t>ECS: sg-export-data → ESLDATA.TXT生成</a:t>
+              <a:t>(posprd-cluster)</a:t>
+            </a:r>
+            <a:endParaRPr lang="en-US" sz="750" dirty="0"/>
+          </a:p>
+          <a:p>
+            <a:pPr indent="0" marL="0">
+              <a:buNone/>
+            </a:pPr>
+            <a:r>
+              <a:rPr lang="en-US" sz="750" dirty="0">
+                <a:solidFill>
+                  <a:srgbClr val="222222"/>
+                </a:solidFill>
+                <a:latin typeface="Calibri" pitchFamily="34" charset="0"/>
+                <a:ea typeface="Calibri" pitchFamily="34" charset="-122"/>
+                <a:cs typeface="Calibri" pitchFamily="34" charset="-120"/>
+              </a:rPr>
+              <a:t>Lambda: split-txt-by-sent-time</a:t>
             </a:r>
             <a:endParaRPr lang="en-US" sz="750" dirty="0"/>
           </a:p>
@@ -8539,7 +8765,7 @@
                 <a:ea typeface="Calibri" pitchFamily="34" charset="-122"/>
                 <a:cs typeface="Calibri" pitchFamily="34" charset="-120"/>
               </a:rPr>
-              <a:t>5. SF: sent-txt-file</a:t>
+              <a:t>5. SF②: sent-txt-file</a:t>
             </a:r>
             <a:endParaRPr lang="en-US" sz="750" dirty="0"/>
           </a:p>
@@ -8556,7 +8782,7 @@
                 <a:ea typeface="Calibri" pitchFamily="34" charset="-122"/>
                 <a:cs typeface="Calibri" pitchFamily="34" charset="-120"/>
               </a:rPr>
-              <a:t>Lambda: sent-txt-file → BOX-PC FTP送信</a:t>
+              <a:t>→ BOX-PC FTP送信 + backup-file</a:t>
             </a:r>
             <a:endParaRPr lang="en-US" sz="750" dirty="0"/>
           </a:p>
@@ -8654,7 +8880,7 @@
                 <a:ea typeface="Calibri" pitchFamily="34" charset="-122"/>
                 <a:cs typeface="Calibri" pitchFamily="34" charset="-120"/>
               </a:rPr>
-              <a:t>・13_SpecicalPriceKsmMaster</a:t>
+              <a:t>・13_SpecialPriceMaster</a:t>
             </a:r>
             <a:endParaRPr lang="en-US" sz="750" dirty="0"/>
           </a:p>
@@ -8735,7 +8961,7 @@
                 <a:ea typeface="Calibri" pitchFamily="34" charset="-122"/>
                 <a:cs typeface="Calibri" pitchFamily="34" charset="-120"/>
               </a:rPr>
-              <a:t>出力: ESLDATA.TXT → BOX-PC</a:t>
+              <a:t>出力: ESLDATA.TXT</a:t>
             </a:r>
             <a:endParaRPr lang="en-US" sz="750" dirty="0"/>
           </a:p>
@@ -8961,7 +9187,7 @@
                 <a:ea typeface="Calibri" pitchFamily="34" charset="-122"/>
                 <a:cs typeface="Calibri" pitchFamily="34" charset="-120"/>
               </a:rPr>
-              <a:t>{table_name}.csv + .END</a:t>
+              <a:t>{table_name}.END 着地</a:t>
             </a:r>
             <a:endParaRPr lang="en-US" sz="750" dirty="0"/>
           </a:p>
@@ -9025,7 +9251,7 @@
                 <a:ea typeface="Calibri" pitchFamily="34" charset="-122"/>
                 <a:cs typeface="Calibri" pitchFamily="34" charset="-120"/>
               </a:rPr>
-              <a:t>*.END 着地 → EventBridge</a:t>
+              <a:t>EventBridge: Object Created</a:t>
             </a:r>
             <a:endParaRPr lang="en-US" sz="750" dirty="0"/>
           </a:p>
@@ -9042,7 +9268,7 @@
                 <a:ea typeface="Calibri" pitchFamily="34" charset="-122"/>
                 <a:cs typeface="Calibri" pitchFamily="34" charset="-120"/>
               </a:rPr>
-              <a:t>→ SF: import-pos-master-sh</a:t>
+              <a:t>*.END → SF: import-pos-master-sh</a:t>
             </a:r>
             <a:endParaRPr lang="en-US" sz="750" dirty="0"/>
           </a:p>
@@ -9106,7 +9332,7 @@
                 <a:ea typeface="Calibri" pitchFamily="34" charset="-122"/>
                 <a:cs typeface="Calibri" pitchFamily="34" charset="-120"/>
               </a:rPr>
-              <a:t>1. Lambda: import-pos-master-sh</a:t>
+              <a:t>1. SF①: import-pos-master-sh</a:t>
             </a:r>
             <a:endParaRPr lang="en-US" sz="750" dirty="0"/>
           </a:p>
@@ -9123,7 +9349,24 @@
                 <a:ea typeface="Calibri" pitchFamily="34" charset="-122"/>
                 <a:cs typeface="Calibri" pitchFamily="34" charset="-120"/>
               </a:rPr>
-              <a:t>（DB接続・ファイルダウンロード）</a:t>
+              <a:t>Lambda: import-pos-master-sh</a:t>
+            </a:r>
+            <a:endParaRPr lang="en-US" sz="750" dirty="0"/>
+          </a:p>
+          <a:p>
+            <a:pPr indent="0" marL="0">
+              <a:buNone/>
+            </a:pPr>
+            <a:r>
+              <a:rPr lang="en-US" sz="750" dirty="0">
+                <a:solidFill>
+                  <a:srgbClr val="222222"/>
+                </a:solidFill>
+                <a:latin typeface="Calibri" pitchFamily="34" charset="0"/>
+                <a:ea typeface="Calibri" pitchFamily="34" charset="-122"/>
+                <a:cs typeface="Calibri" pitchFamily="34" charset="-120"/>
+              </a:rPr>
+              <a:t>(DB接続・S3ダウンロード)</a:t>
             </a:r>
             <a:endParaRPr lang="en-US" sz="750" dirty="0"/>
           </a:p>
@@ -9204,6 +9447,23 @@
                 <a:ea typeface="Calibri" pitchFamily="34" charset="-122"/>
                 <a:cs typeface="Calibri" pitchFamily="34" charset="-120"/>
               </a:rPr>
+              <a:t>(INSERT/UPDATE)</a:t>
+            </a:r>
+            <a:endParaRPr lang="en-US" sz="750" dirty="0"/>
+          </a:p>
+          <a:p>
+            <a:pPr indent="0" marL="0">
+              <a:buNone/>
+            </a:pPr>
+            <a:r>
+              <a:rPr lang="en-US" sz="750" dirty="0">
+                <a:solidFill>
+                  <a:srgbClr val="222222"/>
+                </a:solidFill>
+                <a:latin typeface="Calibri" pitchFamily="34" charset="0"/>
+                <a:ea typeface="Calibri" pitchFamily="34" charset="-122"/>
+                <a:cs typeface="Calibri" pitchFamily="34" charset="-120"/>
+              </a:rPr>
               <a:t>バッチステータス更新</a:t>
             </a:r>
             <a:endParaRPr lang="en-US" sz="750" dirty="0"/>
@@ -9285,7 +9545,7 @@
                 <a:ea typeface="Calibri" pitchFamily="34" charset="-122"/>
                 <a:cs typeface="Calibri" pitchFamily="34" charset="-120"/>
               </a:rPr>
-              <a:t>（バックアップ移動）</a:t>
+              <a:t>(バックアップ移動)</a:t>
             </a:r>
             <a:endParaRPr lang="en-US" sz="750" dirty="0"/>
           </a:p>
@@ -9349,7 +9609,24 @@
                 <a:ea typeface="Calibri" pitchFamily="34" charset="-122"/>
                 <a:cs typeface="Calibri" pitchFamily="34" charset="-120"/>
               </a:rPr>
-              <a:t>4. （SHはTXTエクスポートなし）</a:t>
+              <a:t>4. （SHはTXT出力・</a:t>
+            </a:r>
+            <a:endParaRPr lang="en-US" sz="750" dirty="0"/>
+          </a:p>
+          <a:p>
+            <a:pPr indent="0" marL="0">
+              <a:buNone/>
+            </a:pPr>
+            <a:r>
+              <a:rPr lang="en-US" sz="750" dirty="0">
+                <a:solidFill>
+                  <a:srgbClr val="222222"/>
+                </a:solidFill>
+                <a:latin typeface="Calibri" pitchFamily="34" charset="0"/>
+                <a:ea typeface="Calibri" pitchFamily="34" charset="-122"/>
+                <a:cs typeface="Calibri" pitchFamily="34" charset="-120"/>
+              </a:rPr>
+              <a:t>BOX-PC送信なし）</a:t>
             </a:r>
             <a:endParaRPr lang="en-US" sz="750" dirty="0"/>
           </a:p>

--- a/40_AWS/01_構成資料/カスミPOS_AWS構成資料.pptx
+++ b/40_AWS/01_構成資料/カスミPOS_AWS構成資料.pptx
@@ -7090,7 +7090,7 @@
                 <a:ea typeface="Calibri" pitchFamily="34" charset="-122"/>
                 <a:cs typeface="Calibri" pitchFamily="34" charset="-120"/>
               </a:rPr>
-              <a:t>OC フロー</a:t>
+              <a:t>OC フロー（確認済）</a:t>
             </a:r>
             <a:endParaRPr lang="en-US" sz="1050" dirty="0"/>
           </a:p>
@@ -7397,7 +7397,7 @@
                 <a:ea typeface="Calibri" pitchFamily="34" charset="-122"/>
                 <a:cs typeface="Calibri" pitchFamily="34" charset="-120"/>
               </a:rPr>
-              <a:t>1. SF①: split-csv</a:t>
+              <a:t>1. ① SF: receive-pos-master-oc</a:t>
             </a:r>
             <a:endParaRPr lang="en-US" sz="750" dirty="0"/>
           </a:p>
@@ -7414,7 +7414,7 @@
                 <a:ea typeface="Calibri" pitchFamily="34" charset="-122"/>
                 <a:cs typeface="Calibri" pitchFamily="34" charset="-120"/>
               </a:rPr>
-              <a:t>(店舗別CSV分割 + .ENDIMPORT生成)</a:t>
+              <a:t>Lambda: split-csv</a:t>
             </a:r>
             <a:endParaRPr lang="en-US" sz="750" dirty="0"/>
           </a:p>
@@ -7431,7 +7431,7 @@
                 <a:ea typeface="Calibri" pitchFamily="34" charset="-122"/>
                 <a:cs typeface="Calibri" pitchFamily="34" charset="-120"/>
               </a:rPr>
-              <a:t>[Parallel: backup-file + Map:create-file-end]</a:t>
+              <a:t>Parallel: ①backup-file②Map:create-file-end(.ENDIMPORT生成)</a:t>
             </a:r>
             <a:endParaRPr lang="en-US" sz="750" dirty="0"/>
           </a:p>
@@ -7495,7 +7495,7 @@
                 <a:ea typeface="Calibri" pitchFamily="34" charset="-122"/>
                 <a:cs typeface="Calibri" pitchFamily="34" charset="-120"/>
               </a:rPr>
-              <a:t>2. SF②: import-pos-master-oc</a:t>
+              <a:t>2. ② SF: import-pos-master-oc</a:t>
             </a:r>
             <a:endParaRPr lang="en-US" sz="750" dirty="0"/>
           </a:p>
@@ -7529,7 +7529,24 @@
                 <a:ea typeface="Calibri" pitchFamily="34" charset="-122"/>
                 <a:cs typeface="Calibri" pitchFamily="34" charset="-120"/>
               </a:rPr>
-              <a:t>→ Replica_Kasumi.41_P001</a:t>
+              <a:t>Catch: DBConnectionException</a:t>
+            </a:r>
+            <a:endParaRPr lang="en-US" sz="750" dirty="0"/>
+          </a:p>
+          <a:p>
+            <a:pPr indent="0" marL="0">
+              <a:buNone/>
+            </a:pPr>
+            <a:r>
+              <a:rPr lang="en-US" sz="750" dirty="0">
+                <a:solidFill>
+                  <a:srgbClr val="222222"/>
+                </a:solidFill>
+                <a:latin typeface="Calibri" pitchFamily="34" charset="0"/>
+                <a:ea typeface="Calibri" pitchFamily="34" charset="-122"/>
+                <a:cs typeface="Calibri" pitchFamily="34" charset="-120"/>
+              </a:rPr>
+              <a:t>      S3DownloadException/S3ConnectionException</a:t>
             </a:r>
             <a:endParaRPr lang="en-US" sz="750" dirty="0"/>
           </a:p>
@@ -7593,7 +7610,7 @@
                 <a:ea typeface="Calibri" pitchFamily="34" charset="-122"/>
                 <a:cs typeface="Calibri" pitchFamily="34" charset="-120"/>
               </a:rPr>
-              <a:t>3. SF③: create-txt-file-oc</a:t>
+              <a:t>3. ③ SF: create-txt-file-oc</a:t>
             </a:r>
             <a:endParaRPr lang="en-US" sz="750" dirty="0"/>
           </a:p>
@@ -7610,7 +7627,7 @@
                 <a:ea typeface="Calibri" pitchFamily="34" charset="-122"/>
                 <a:cs typeface="Calibri" pitchFamily="34" charset="-120"/>
               </a:rPr>
-              <a:t>Lambda: get-sync-store(同期店舗確認)</a:t>
+              <a:t>Lambda: get-sync-store（同期店舗確認）</a:t>
             </a:r>
             <a:endParaRPr lang="en-US" sz="750" dirty="0"/>
           </a:p>
@@ -7627,7 +7644,7 @@
                 <a:ea typeface="Calibri" pitchFamily="34" charset="-122"/>
                 <a:cs typeface="Calibri" pitchFamily="34" charset="-120"/>
               </a:rPr>
-              <a:t>ECS FARGATE: oc-export-data</a:t>
+              <a:t>ECS FARGATE: oc-export-data (waitForTaskToken)</a:t>
             </a:r>
             <a:endParaRPr lang="en-US" sz="750" dirty="0"/>
           </a:p>
@@ -7644,7 +7661,7 @@
                 <a:ea typeface="Calibri" pitchFamily="34" charset="-122"/>
                 <a:cs typeface="Calibri" pitchFamily="34" charset="-120"/>
               </a:rPr>
-              <a:t>(posprd-cluster, TaskDef:v2)</a:t>
+              <a:t>TaskDef: oc-export-data:2  HeartbeatSec:300</a:t>
             </a:r>
             <a:endParaRPr lang="en-US" sz="750" dirty="0"/>
           </a:p>
@@ -7725,7 +7742,7 @@
                 <a:ea typeface="Calibri" pitchFamily="34" charset="-122"/>
                 <a:cs typeface="Calibri" pitchFamily="34" charset="-120"/>
               </a:rPr>
-              <a:t>(TXT分割 + 送信スケジュール設定)</a:t>
+              <a:t>（TXTを送信時刻で分割 + EB Scheduleルール生成）</a:t>
             </a:r>
             <a:endParaRPr lang="en-US" sz="750" dirty="0"/>
           </a:p>
@@ -7789,7 +7806,7 @@
                 <a:ea typeface="Calibri" pitchFamily="34" charset="-122"/>
                 <a:cs typeface="Calibri" pitchFamily="34" charset="-120"/>
               </a:rPr>
-              <a:t>5. SF④: sent-txt-file</a:t>
+              <a:t>5. ④ SF: sent-txt-file</a:t>
             </a:r>
             <a:endParaRPr lang="en-US" sz="750" dirty="0"/>
           </a:p>
@@ -7806,7 +7823,7 @@
                 <a:ea typeface="Calibri" pitchFamily="34" charset="-122"/>
                 <a:cs typeface="Calibri" pitchFamily="34" charset="-120"/>
               </a:rPr>
-              <a:t>→ BOX-PC FTP送信 + backup-file</a:t>
+              <a:t>→ BOX-PC FTP送信 → backup-file</a:t>
             </a:r>
             <a:endParaRPr lang="en-US" sz="750" dirty="0"/>
           </a:p>
@@ -7814,14 +7831,87 @@
       </p:sp>
       <p:sp>
         <p:nvSpPr>
-          <p:cNvPr id="29" name="Shape 24"/>
+          <p:cNvPr id="29" name="Text 24"/>
           <p:cNvSpPr/>
           <p:nvPr/>
         </p:nvSpPr>
         <p:spPr>
           <a:xfrm>
-            <a:off x="274320" y="5303520"/>
-            <a:ext cx="2944368" cy="438912"/>
+            <a:off x="310896" y="5065776"/>
+            <a:ext cx="2871216" cy="347472"/>
+          </a:xfrm>
+          <a:prstGeom prst="rect">
+            <a:avLst/>
+          </a:prstGeom>
+          <a:noFill/>
+          <a:ln/>
+        </p:spPr>
+        <p:txBody>
+          <a:bodyPr wrap="square" lIns="0" tIns="0" rIns="0" bIns="0" rtlCol="0" anchor="ctr"/>
+          <a:lstStyle/>
+          <a:p>
+            <a:pPr indent="0" marL="0">
+              <a:buNone/>
+            </a:pPr>
+            <a:r>
+              <a:rPr lang="en-US" sz="650" dirty="0">
+                <a:solidFill>
+                  <a:srgbClr val="555555"/>
+                </a:solidFill>
+                <a:latin typeface="Calibri" pitchFamily="34" charset="0"/>
+                <a:ea typeface="Calibri" pitchFamily="34" charset="-122"/>
+                <a:cs typeface="Calibri" pitchFamily="34" charset="-120"/>
+              </a:rPr>
+              <a:t>Subnet: subnet-0d125718b8c5c5a23</a:t>
+            </a:r>
+            <a:endParaRPr lang="en-US" sz="650" dirty="0"/>
+          </a:p>
+          <a:p>
+            <a:pPr indent="0" marL="0">
+              <a:buNone/>
+            </a:pPr>
+            <a:r>
+              <a:rPr lang="en-US" sz="650" dirty="0">
+                <a:solidFill>
+                  <a:srgbClr val="555555"/>
+                </a:solidFill>
+                <a:latin typeface="Calibri" pitchFamily="34" charset="0"/>
+                <a:ea typeface="Calibri" pitchFamily="34" charset="-122"/>
+                <a:cs typeface="Calibri" pitchFamily="34" charset="-120"/>
+              </a:rPr>
+              <a:t>       subnet-030f7db5506682c07</a:t>
+            </a:r>
+            <a:endParaRPr lang="en-US" sz="650" dirty="0"/>
+          </a:p>
+          <a:p>
+            <a:pPr indent="0" marL="0">
+              <a:buNone/>
+            </a:pPr>
+            <a:r>
+              <a:rPr lang="en-US" sz="650" dirty="0">
+                <a:solidFill>
+                  <a:srgbClr val="555555"/>
+                </a:solidFill>
+                <a:latin typeface="Calibri" pitchFamily="34" charset="0"/>
+                <a:ea typeface="Calibri" pitchFamily="34" charset="-122"/>
+                <a:cs typeface="Calibri" pitchFamily="34" charset="-120"/>
+              </a:rPr>
+              <a:t>SG: sg-053d249f0086f8733  AssignPublicIp: DISABLED</a:t>
+            </a:r>
+            <a:endParaRPr lang="en-US" sz="650" dirty="0"/>
+          </a:p>
+        </p:txBody>
+      </p:sp>
+      <p:sp>
+        <p:nvSpPr>
+          <p:cNvPr id="30" name="Shape 25"/>
+          <p:cNvSpPr/>
+          <p:nvPr/>
+        </p:nvSpPr>
+        <p:spPr>
+          <a:xfrm>
+            <a:off x="274320" y="5449824"/>
+            <a:ext cx="2944368" cy="402336"/>
           </a:xfrm>
           <a:prstGeom prst="rect">
             <a:avLst/>
@@ -7839,7 +7929,7 @@
       </p:sp>
       <p:sp>
         <p:nvSpPr>
-          <p:cNvPr id="30" name="Text 25"/>
+          <p:cNvPr id="31" name="Text 26"/>
           <p:cNvSpPr/>
           <p:nvPr/>
         </p:nvSpPr>
@@ -7895,7 +7985,7 @@
       </p:sp>
       <p:sp>
         <p:nvSpPr>
-          <p:cNvPr id="31" name="Shape 26"/>
+          <p:cNvPr id="32" name="Shape 27"/>
           <p:cNvSpPr/>
           <p:nvPr/>
         </p:nvSpPr>
@@ -7920,7 +8010,7 @@
       </p:sp>
       <p:sp>
         <p:nvSpPr>
-          <p:cNvPr id="32" name="Text 27"/>
+          <p:cNvPr id="33" name="Text 28"/>
           <p:cNvSpPr/>
           <p:nvPr/>
         </p:nvSpPr>
@@ -7959,7 +8049,7 @@
       </p:sp>
       <p:sp>
         <p:nvSpPr>
-          <p:cNvPr id="33" name="Shape 28"/>
+          <p:cNvPr id="34" name="Shape 29"/>
           <p:cNvSpPr/>
           <p:nvPr/>
         </p:nvSpPr>
@@ -7984,7 +8074,7 @@
       </p:sp>
       <p:sp>
         <p:nvSpPr>
-          <p:cNvPr id="34" name="Text 29"/>
+          <p:cNvPr id="35" name="Text 30"/>
           <p:cNvSpPr/>
           <p:nvPr/>
         </p:nvSpPr>
@@ -8015,7 +8105,7 @@
                 <a:ea typeface="Calibri" pitchFamily="34" charset="-122"/>
                 <a:cs typeface="Calibri" pitchFamily="34" charset="-120"/>
               </a:rPr>
-              <a:t>SG フロー</a:t>
+              <a:t>SG フロー（確認済）</a:t>
             </a:r>
             <a:endParaRPr lang="en-US" sz="1050" dirty="0"/>
           </a:p>
@@ -8023,7 +8113,7 @@
       </p:sp>
       <p:sp>
         <p:nvSpPr>
-          <p:cNvPr id="35" name="Shape 30"/>
+          <p:cNvPr id="36" name="Shape 31"/>
           <p:cNvSpPr/>
           <p:nvPr/>
         </p:nvSpPr>
@@ -8048,7 +8138,7 @@
       </p:sp>
       <p:sp>
         <p:nvSpPr>
-          <p:cNvPr id="36" name="Text 31"/>
+          <p:cNvPr id="37" name="Text 32"/>
           <p:cNvSpPr/>
           <p:nvPr/>
         </p:nvSpPr>
@@ -8104,7 +8194,7 @@
       </p:sp>
       <p:sp>
         <p:nvSpPr>
-          <p:cNvPr id="37" name="Shape 32"/>
+          <p:cNvPr id="38" name="Shape 33"/>
           <p:cNvSpPr/>
           <p:nvPr/>
         </p:nvSpPr>
@@ -8129,7 +8219,7 @@
       </p:sp>
       <p:sp>
         <p:nvSpPr>
-          <p:cNvPr id="38" name="Text 33"/>
+          <p:cNvPr id="39" name="Text 34"/>
           <p:cNvSpPr/>
           <p:nvPr/>
         </p:nvSpPr>
@@ -8185,7 +8275,7 @@
       </p:sp>
       <p:sp>
         <p:nvSpPr>
-          <p:cNvPr id="39" name="Shape 34"/>
+          <p:cNvPr id="40" name="Shape 35"/>
           <p:cNvSpPr/>
           <p:nvPr/>
         </p:nvSpPr>
@@ -8210,7 +8300,7 @@
       </p:sp>
       <p:sp>
         <p:nvSpPr>
-          <p:cNvPr id="40" name="Text 35"/>
+          <p:cNvPr id="41" name="Text 36"/>
           <p:cNvSpPr/>
           <p:nvPr/>
         </p:nvSpPr>
@@ -8241,7 +8331,7 @@
                 <a:ea typeface="Calibri" pitchFamily="34" charset="-122"/>
                 <a:cs typeface="Calibri" pitchFamily="34" charset="-120"/>
               </a:rPr>
-              <a:t>EventBridge: Object Created</a:t>
+              <a:t>EventBridge: Object Created *.ZIP</a:t>
             </a:r>
             <a:endParaRPr lang="en-US" sz="750" dirty="0"/>
           </a:p>
@@ -8258,7 +8348,24 @@
                 <a:ea typeface="Calibri" pitchFamily="34" charset="-122"/>
                 <a:cs typeface="Calibri" pitchFamily="34" charset="-120"/>
               </a:rPr>
-              <a:t>*.ZIP → SQS: store-code-queue.fifo</a:t>
+              <a:t>Lambda: trigger-sqs-import-sg</a:t>
+            </a:r>
+            <a:endParaRPr lang="en-US" sz="750" dirty="0"/>
+          </a:p>
+          <a:p>
+            <a:pPr indent="0" marL="0">
+              <a:buNone/>
+            </a:pPr>
+            <a:r>
+              <a:rPr lang="en-US" sz="750" dirty="0">
+                <a:solidFill>
+                  <a:srgbClr val="C0392B"/>
+                </a:solidFill>
+                <a:latin typeface="Calibri" pitchFamily="34" charset="0"/>
+                <a:ea typeface="Calibri" pitchFamily="34" charset="-122"/>
+                <a:cs typeface="Calibri" pitchFamily="34" charset="-120"/>
+              </a:rPr>
+              <a:t>→ SQS: store-code-queue-sg.fifo</a:t>
             </a:r>
             <a:endParaRPr lang="en-US" sz="750" dirty="0"/>
           </a:p>
@@ -8283,7 +8390,7 @@
       </p:sp>
       <p:sp>
         <p:nvSpPr>
-          <p:cNvPr id="41" name="Shape 36"/>
+          <p:cNvPr id="42" name="Shape 37"/>
           <p:cNvSpPr/>
           <p:nvPr/>
         </p:nvSpPr>
@@ -8308,7 +8415,7 @@
       </p:sp>
       <p:sp>
         <p:nvSpPr>
-          <p:cNvPr id="42" name="Text 37"/>
+          <p:cNvPr id="43" name="Text 38"/>
           <p:cNvSpPr/>
           <p:nvPr/>
         </p:nvSpPr>
@@ -8339,7 +8446,7 @@
                 <a:ea typeface="Calibri" pitchFamily="34" charset="-122"/>
                 <a:cs typeface="Calibri" pitchFamily="34" charset="-120"/>
               </a:rPr>
-              <a:t>1. SF①: receive-and-import-sg</a:t>
+              <a:t>1. ① SF: receive-and-import-sg</a:t>
             </a:r>
             <a:endParaRPr lang="en-US" sz="750" dirty="0"/>
           </a:p>
@@ -8356,7 +8463,7 @@
                 <a:ea typeface="Calibri" pitchFamily="34" charset="-122"/>
                 <a:cs typeface="Calibri" pitchFamily="34" charset="-120"/>
               </a:rPr>
-              <a:t>Lambda: unzip-file</a:t>
+              <a:t>Lambda: unzip-file → Choice(paths[0]確認)</a:t>
             </a:r>
             <a:endParaRPr lang="en-US" sz="750" dirty="0"/>
           </a:p>
@@ -8373,7 +8480,7 @@
                 <a:ea typeface="Calibri" pitchFamily="34" charset="-122"/>
                 <a:cs typeface="Calibri" pitchFamily="34" charset="-120"/>
               </a:rPr>
-              <a:t>(ZIP展開 + テーブル別移動)</a:t>
+              <a:t>LogStream Key: object.etag（ETag使用）</a:t>
             </a:r>
             <a:endParaRPr lang="en-US" sz="750" dirty="0"/>
           </a:p>
@@ -8381,7 +8488,7 @@
       </p:sp>
       <p:sp>
         <p:nvSpPr>
-          <p:cNvPr id="43" name="Shape 38"/>
+          <p:cNvPr id="44" name="Shape 39"/>
           <p:cNvSpPr/>
           <p:nvPr/>
         </p:nvSpPr>
@@ -8406,7 +8513,7 @@
       </p:sp>
       <p:sp>
         <p:nvSpPr>
-          <p:cNvPr id="44" name="Text 39"/>
+          <p:cNvPr id="45" name="Text 40"/>
           <p:cNvSpPr/>
           <p:nvPr/>
         </p:nvSpPr>
@@ -8437,7 +8544,7 @@
                 <a:ea typeface="Calibri" pitchFamily="34" charset="-122"/>
                 <a:cs typeface="Calibri" pitchFamily="34" charset="-120"/>
               </a:rPr>
-              <a:t>2. [Parallel]</a:t>
+              <a:t>2. Parallel:</a:t>
             </a:r>
             <a:endParaRPr lang="en-US" sz="750" dirty="0"/>
           </a:p>
@@ -8454,7 +8561,7 @@
                 <a:ea typeface="Calibri" pitchFamily="34" charset="-122"/>
                 <a:cs typeface="Calibri" pitchFamily="34" charset="-120"/>
               </a:rPr>
-              <a:t>① backup-file (ZIPバックアップ)</a:t>
+              <a:t>① backup-file → エラー時SQS deleteMessage</a:t>
             </a:r>
             <a:endParaRPr lang="en-US" sz="750" dirty="0"/>
           </a:p>
@@ -8488,7 +8595,7 @@
                 <a:ea typeface="Calibri" pitchFamily="34" charset="-122"/>
                 <a:cs typeface="Calibri" pitchFamily="34" charset="-120"/>
               </a:rPr>
-              <a:t>  → Replica_Kasumi (11/13/16)</a:t>
+              <a:t>   Catch: DBConnectionException</a:t>
             </a:r>
             <a:endParaRPr lang="en-US" sz="750" dirty="0"/>
           </a:p>
@@ -8505,7 +8612,24 @@
                 <a:ea typeface="Calibri" pitchFamily="34" charset="-122"/>
                 <a:cs typeface="Calibri" pitchFamily="34" charset="-120"/>
               </a:rPr>
-              <a:t>  ※エラー時SQS deleteMessage</a:t>
+              <a:t>         S3DownloadException</a:t>
+            </a:r>
+            <a:endParaRPr lang="en-US" sz="750" dirty="0"/>
+          </a:p>
+          <a:p>
+            <a:pPr indent="0" marL="0">
+              <a:buNone/>
+            </a:pPr>
+            <a:r>
+              <a:rPr lang="en-US" sz="750" dirty="0">
+                <a:solidFill>
+                  <a:srgbClr val="222222"/>
+                </a:solidFill>
+                <a:latin typeface="Calibri" pitchFamily="34" charset="0"/>
+                <a:ea typeface="Calibri" pitchFamily="34" charset="-122"/>
+                <a:cs typeface="Calibri" pitchFamily="34" charset="-120"/>
+              </a:rPr>
+              <a:t>   エラー時SQS deleteMessage</a:t>
             </a:r>
             <a:endParaRPr lang="en-US" sz="750" dirty="0"/>
           </a:p>
@@ -8513,7 +8637,7 @@
       </p:sp>
       <p:sp>
         <p:nvSpPr>
-          <p:cNvPr id="45" name="Shape 40"/>
+          <p:cNvPr id="46" name="Shape 41"/>
           <p:cNvSpPr/>
           <p:nvPr/>
         </p:nvSpPr>
@@ -8538,7 +8662,7 @@
       </p:sp>
       <p:sp>
         <p:nvSpPr>
-          <p:cNvPr id="46" name="Text 41"/>
+          <p:cNvPr id="47" name="Text 42"/>
           <p:cNvSpPr/>
           <p:nvPr/>
         </p:nvSpPr>
@@ -8586,7 +8710,7 @@
                 <a:ea typeface="Calibri" pitchFamily="34" charset="-122"/>
                 <a:cs typeface="Calibri" pitchFamily="34" charset="-120"/>
               </a:rPr>
-              <a:t>→ EventBridge: Object Created</a:t>
+              <a:t>→ EventBridge: Object Created *.ENDEXPORT</a:t>
             </a:r>
             <a:endParaRPr lang="en-US" sz="750" dirty="0"/>
           </a:p>
@@ -8607,11 +8731,28 @@
             </a:r>
             <a:endParaRPr lang="en-US" sz="750" dirty="0"/>
           </a:p>
+          <a:p>
+            <a:pPr indent="0" marL="0">
+              <a:buNone/>
+            </a:pPr>
+            <a:r>
+              <a:rPr lang="en-US" sz="750" dirty="0">
+                <a:solidFill>
+                  <a:srgbClr val="222222"/>
+                </a:solidFill>
+                <a:latin typeface="Calibri" pitchFamily="34" charset="0"/>
+                <a:ea typeface="Calibri" pitchFamily="34" charset="-122"/>
+                <a:cs typeface="Calibri" pitchFamily="34" charset="-120"/>
+              </a:rPr>
+              <a:t>Lambda: get-sync-store(同期確認)</a:t>
+            </a:r>
+            <a:endParaRPr lang="en-US" sz="750" dirty="0"/>
+          </a:p>
         </p:txBody>
       </p:sp>
       <p:sp>
         <p:nvSpPr>
-          <p:cNvPr id="47" name="Shape 42"/>
+          <p:cNvPr id="48" name="Shape 43"/>
           <p:cNvSpPr/>
           <p:nvPr/>
         </p:nvSpPr>
@@ -8636,7 +8777,7 @@
       </p:sp>
       <p:sp>
         <p:nvSpPr>
-          <p:cNvPr id="48" name="Text 43"/>
+          <p:cNvPr id="49" name="Text 44"/>
           <p:cNvSpPr/>
           <p:nvPr/>
         </p:nvSpPr>
@@ -8684,7 +8825,7 @@
                 <a:ea typeface="Calibri" pitchFamily="34" charset="-122"/>
                 <a:cs typeface="Calibri" pitchFamily="34" charset="-120"/>
               </a:rPr>
-              <a:t>(posprd-cluster)</a:t>
+              <a:t>(posprd-cluster, waitForTaskToken)</a:t>
             </a:r>
             <a:endParaRPr lang="en-US" sz="750" dirty="0"/>
           </a:p>
@@ -8709,7 +8850,7 @@
       </p:sp>
       <p:sp>
         <p:nvSpPr>
-          <p:cNvPr id="49" name="Shape 44"/>
+          <p:cNvPr id="50" name="Shape 45"/>
           <p:cNvSpPr/>
           <p:nvPr/>
         </p:nvSpPr>
@@ -8734,7 +8875,7 @@
       </p:sp>
       <p:sp>
         <p:nvSpPr>
-          <p:cNvPr id="50" name="Text 45"/>
+          <p:cNvPr id="51" name="Text 46"/>
           <p:cNvSpPr/>
           <p:nvPr/>
         </p:nvSpPr>
@@ -8765,7 +8906,7 @@
                 <a:ea typeface="Calibri" pitchFamily="34" charset="-122"/>
                 <a:cs typeface="Calibri" pitchFamily="34" charset="-120"/>
               </a:rPr>
-              <a:t>5. SF②: sent-txt-file</a:t>
+              <a:t>5. ② SF: sent-txt-file</a:t>
             </a:r>
             <a:endParaRPr lang="en-US" sz="750" dirty="0"/>
           </a:p>
@@ -8782,7 +8923,7 @@
                 <a:ea typeface="Calibri" pitchFamily="34" charset="-122"/>
                 <a:cs typeface="Calibri" pitchFamily="34" charset="-120"/>
               </a:rPr>
-              <a:t>→ BOX-PC FTP送信 + backup-file</a:t>
+              <a:t>→ BOX-PC FTP送信 → backup-file</a:t>
             </a:r>
             <a:endParaRPr lang="en-US" sz="750" dirty="0"/>
           </a:p>
@@ -8790,14 +8931,87 @@
       </p:sp>
       <p:sp>
         <p:nvSpPr>
-          <p:cNvPr id="51" name="Shape 46"/>
+          <p:cNvPr id="52" name="Text 47"/>
           <p:cNvSpPr/>
           <p:nvPr/>
         </p:nvSpPr>
         <p:spPr>
           <a:xfrm>
-            <a:off x="3401568" y="5303520"/>
-            <a:ext cx="2944368" cy="438912"/>
+            <a:off x="3438144" y="5065776"/>
+            <a:ext cx="2871216" cy="347472"/>
+          </a:xfrm>
+          <a:prstGeom prst="rect">
+            <a:avLst/>
+          </a:prstGeom>
+          <a:noFill/>
+          <a:ln/>
+        </p:spPr>
+        <p:txBody>
+          <a:bodyPr wrap="square" lIns="0" tIns="0" rIns="0" bIns="0" rtlCol="0" anchor="ctr"/>
+          <a:lstStyle/>
+          <a:p>
+            <a:pPr indent="0" marL="0">
+              <a:buNone/>
+            </a:pPr>
+            <a:r>
+              <a:rPr lang="en-US" sz="650" dirty="0">
+                <a:solidFill>
+                  <a:srgbClr val="555555"/>
+                </a:solidFill>
+                <a:latin typeface="Calibri" pitchFamily="34" charset="0"/>
+                <a:ea typeface="Calibri" pitchFamily="34" charset="-122"/>
+                <a:cs typeface="Calibri" pitchFamily="34" charset="-120"/>
+              </a:rPr>
+              <a:t>SQS deleteMessage: エラー発生時に</a:t>
+            </a:r>
+            <a:endParaRPr lang="en-US" sz="650" dirty="0"/>
+          </a:p>
+          <a:p>
+            <a:pPr indent="0" marL="0">
+              <a:buNone/>
+            </a:pPr>
+            <a:r>
+              <a:rPr lang="en-US" sz="650" dirty="0">
+                <a:solidFill>
+                  <a:srgbClr val="555555"/>
+                </a:solidFill>
+                <a:latin typeface="Calibri" pitchFamily="34" charset="0"/>
+                <a:ea typeface="Calibri" pitchFamily="34" charset="-122"/>
+                <a:cs typeface="Calibri" pitchFamily="34" charset="-120"/>
+              </a:rPr>
+              <a:t>store-code-queue-sg.fifoから</a:t>
+            </a:r>
+            <a:endParaRPr lang="en-US" sz="650" dirty="0"/>
+          </a:p>
+          <a:p>
+            <a:pPr indent="0" marL="0">
+              <a:buNone/>
+            </a:pPr>
+            <a:r>
+              <a:rPr lang="en-US" sz="650" dirty="0">
+                <a:solidFill>
+                  <a:srgbClr val="555555"/>
+                </a:solidFill>
+                <a:latin typeface="Calibri" pitchFamily="34" charset="0"/>
+                <a:ea typeface="Calibri" pitchFamily="34" charset="-122"/>
+                <a:cs typeface="Calibri" pitchFamily="34" charset="-120"/>
+              </a:rPr>
+              <a:t>メッセージ削除してFail</a:t>
+            </a:r>
+            <a:endParaRPr lang="en-US" sz="650" dirty="0"/>
+          </a:p>
+        </p:txBody>
+      </p:sp>
+      <p:sp>
+        <p:nvSpPr>
+          <p:cNvPr id="53" name="Shape 48"/>
+          <p:cNvSpPr/>
+          <p:nvPr/>
+        </p:nvSpPr>
+        <p:spPr>
+          <a:xfrm>
+            <a:off x="3401568" y="5449824"/>
+            <a:ext cx="2944368" cy="402336"/>
           </a:xfrm>
           <a:prstGeom prst="rect">
             <a:avLst/>
@@ -8815,7 +9029,7 @@
       </p:sp>
       <p:sp>
         <p:nvSpPr>
-          <p:cNvPr id="52" name="Text 47"/>
+          <p:cNvPr id="54" name="Text 49"/>
           <p:cNvSpPr/>
           <p:nvPr/>
         </p:nvSpPr>
@@ -8905,7 +9119,7 @@
       </p:sp>
       <p:sp>
         <p:nvSpPr>
-          <p:cNvPr id="53" name="Shape 48"/>
+          <p:cNvPr id="55" name="Shape 50"/>
           <p:cNvSpPr/>
           <p:nvPr/>
         </p:nvSpPr>
@@ -8930,7 +9144,7 @@
       </p:sp>
       <p:sp>
         <p:nvSpPr>
-          <p:cNvPr id="54" name="Text 49"/>
+          <p:cNvPr id="56" name="Text 51"/>
           <p:cNvSpPr/>
           <p:nvPr/>
         </p:nvSpPr>
@@ -8969,7 +9183,7 @@
       </p:sp>
       <p:sp>
         <p:nvSpPr>
-          <p:cNvPr id="55" name="Shape 50"/>
+          <p:cNvPr id="57" name="Shape 52"/>
           <p:cNvSpPr/>
           <p:nvPr/>
         </p:nvSpPr>
@@ -8994,7 +9208,7 @@
       </p:sp>
       <p:sp>
         <p:nvSpPr>
-          <p:cNvPr id="56" name="Text 51"/>
+          <p:cNvPr id="58" name="Text 53"/>
           <p:cNvSpPr/>
           <p:nvPr/>
         </p:nvSpPr>
@@ -9025,7 +9239,7 @@
                 <a:ea typeface="Calibri" pitchFamily="34" charset="-122"/>
                 <a:cs typeface="Calibri" pitchFamily="34" charset="-120"/>
               </a:rPr>
-              <a:t>SH フロー</a:t>
+              <a:t>SH フロー（確認済）</a:t>
             </a:r>
             <a:endParaRPr lang="en-US" sz="1050" dirty="0"/>
           </a:p>
@@ -9033,7 +9247,7 @@
       </p:sp>
       <p:sp>
         <p:nvSpPr>
-          <p:cNvPr id="57" name="Shape 52"/>
+          <p:cNvPr id="59" name="Shape 54"/>
           <p:cNvSpPr/>
           <p:nvPr/>
         </p:nvSpPr>
@@ -9058,7 +9272,7 @@
       </p:sp>
       <p:sp>
         <p:nvSpPr>
-          <p:cNvPr id="58" name="Text 53"/>
+          <p:cNvPr id="60" name="Text 55"/>
           <p:cNvSpPr/>
           <p:nvPr/>
         </p:nvSpPr>
@@ -9114,7 +9328,7 @@
       </p:sp>
       <p:sp>
         <p:nvSpPr>
-          <p:cNvPr id="59" name="Shape 54"/>
+          <p:cNvPr id="61" name="Shape 56"/>
           <p:cNvSpPr/>
           <p:nvPr/>
         </p:nvSpPr>
@@ -9139,7 +9353,7 @@
       </p:sp>
       <p:sp>
         <p:nvSpPr>
-          <p:cNvPr id="60" name="Text 55"/>
+          <p:cNvPr id="62" name="Text 57"/>
           <p:cNvSpPr/>
           <p:nvPr/>
         </p:nvSpPr>
@@ -9195,7 +9409,7 @@
       </p:sp>
       <p:sp>
         <p:nvSpPr>
-          <p:cNvPr id="61" name="Shape 56"/>
+          <p:cNvPr id="63" name="Shape 58"/>
           <p:cNvSpPr/>
           <p:nvPr/>
         </p:nvSpPr>
@@ -9220,7 +9434,7 @@
       </p:sp>
       <p:sp>
         <p:nvSpPr>
-          <p:cNvPr id="62" name="Text 57"/>
+          <p:cNvPr id="64" name="Text 59"/>
           <p:cNvSpPr/>
           <p:nvPr/>
         </p:nvSpPr>
@@ -9276,7 +9490,7 @@
       </p:sp>
       <p:sp>
         <p:nvSpPr>
-          <p:cNvPr id="63" name="Shape 58"/>
+          <p:cNvPr id="65" name="Shape 60"/>
           <p:cNvSpPr/>
           <p:nvPr/>
         </p:nvSpPr>
@@ -9301,7 +9515,7 @@
       </p:sp>
       <p:sp>
         <p:nvSpPr>
-          <p:cNvPr id="64" name="Text 59"/>
+          <p:cNvPr id="66" name="Text 61"/>
           <p:cNvSpPr/>
           <p:nvPr/>
         </p:nvSpPr>
@@ -9332,7 +9546,7 @@
                 <a:ea typeface="Calibri" pitchFamily="34" charset="-122"/>
                 <a:cs typeface="Calibri" pitchFamily="34" charset="-120"/>
               </a:rPr>
-              <a:t>1. SF①: import-pos-master-sh</a:t>
+              <a:t>1. ① SF: import-pos-master-sh</a:t>
             </a:r>
             <a:endParaRPr lang="en-US" sz="750" dirty="0"/>
           </a:p>
@@ -9366,7 +9580,7 @@
                 <a:ea typeface="Calibri" pitchFamily="34" charset="-122"/>
                 <a:cs typeface="Calibri" pitchFamily="34" charset="-120"/>
               </a:rPr>
-              <a:t>(DB接続・S3ダウンロード)</a:t>
+              <a:t>（DB接続・S3ダウンロード）</a:t>
             </a:r>
             <a:endParaRPr lang="en-US" sz="750" dirty="0"/>
           </a:p>
@@ -9374,7 +9588,7 @@
       </p:sp>
       <p:sp>
         <p:nvSpPr>
-          <p:cNvPr id="65" name="Shape 60"/>
+          <p:cNvPr id="67" name="Shape 62"/>
           <p:cNvSpPr/>
           <p:nvPr/>
         </p:nvSpPr>
@@ -9399,7 +9613,7 @@
       </p:sp>
       <p:sp>
         <p:nvSpPr>
-          <p:cNvPr id="66" name="Text 61"/>
+          <p:cNvPr id="68" name="Text 63"/>
           <p:cNvSpPr/>
           <p:nvPr/>
         </p:nvSpPr>
@@ -9447,7 +9661,7 @@
                 <a:ea typeface="Calibri" pitchFamily="34" charset="-122"/>
                 <a:cs typeface="Calibri" pitchFamily="34" charset="-120"/>
               </a:rPr>
-              <a:t>(INSERT/UPDATE)</a:t>
+              <a:t>INSERT/UPDATE</a:t>
             </a:r>
             <a:endParaRPr lang="en-US" sz="750" dirty="0"/>
           </a:p>
@@ -9464,7 +9678,7 @@
                 <a:ea typeface="Calibri" pitchFamily="34" charset="-122"/>
                 <a:cs typeface="Calibri" pitchFamily="34" charset="-120"/>
               </a:rPr>
-              <a:t>バッチステータス更新</a:t>
+              <a:t>Batch_Kasumi.batch_convert_history更新</a:t>
             </a:r>
             <a:endParaRPr lang="en-US" sz="750" dirty="0"/>
           </a:p>
@@ -9472,7 +9686,7 @@
       </p:sp>
       <p:sp>
         <p:nvSpPr>
-          <p:cNvPr id="67" name="Shape 62"/>
+          <p:cNvPr id="69" name="Shape 64"/>
           <p:cNvSpPr/>
           <p:nvPr/>
         </p:nvSpPr>
@@ -9497,7 +9711,7 @@
       </p:sp>
       <p:sp>
         <p:nvSpPr>
-          <p:cNvPr id="68" name="Text 63"/>
+          <p:cNvPr id="70" name="Text 65"/>
           <p:cNvSpPr/>
           <p:nvPr/>
         </p:nvSpPr>
@@ -9545,7 +9759,7 @@
                 <a:ea typeface="Calibri" pitchFamily="34" charset="-122"/>
                 <a:cs typeface="Calibri" pitchFamily="34" charset="-120"/>
               </a:rPr>
-              <a:t>(バックアップ移動)</a:t>
+              <a:t>（受信ファイルをbackupフォルダへ移動）</a:t>
             </a:r>
             <a:endParaRPr lang="en-US" sz="750" dirty="0"/>
           </a:p>
@@ -9553,7 +9767,7 @@
       </p:sp>
       <p:sp>
         <p:nvSpPr>
-          <p:cNvPr id="69" name="Shape 64"/>
+          <p:cNvPr id="71" name="Shape 66"/>
           <p:cNvSpPr/>
           <p:nvPr/>
         </p:nvSpPr>
@@ -9578,7 +9792,7 @@
       </p:sp>
       <p:sp>
         <p:nvSpPr>
-          <p:cNvPr id="70" name="Text 65"/>
+          <p:cNvPr id="72" name="Text 67"/>
           <p:cNvSpPr/>
           <p:nvPr/>
         </p:nvSpPr>
@@ -9609,7 +9823,7 @@
                 <a:ea typeface="Calibri" pitchFamily="34" charset="-122"/>
                 <a:cs typeface="Calibri" pitchFamily="34" charset="-120"/>
               </a:rPr>
-              <a:t>4. （SHはTXT出力・</a:t>
+              <a:t>4. ※ SHはTXTエクスポート・</a:t>
             </a:r>
             <a:endParaRPr lang="en-US" sz="750" dirty="0"/>
           </a:p>
@@ -9626,7 +9840,7 @@
                 <a:ea typeface="Calibri" pitchFamily="34" charset="-122"/>
                 <a:cs typeface="Calibri" pitchFamily="34" charset="-120"/>
               </a:rPr>
-              <a:t>BOX-PC送信なし）</a:t>
+              <a:t>BOX-PC送信なし</a:t>
             </a:r>
             <a:endParaRPr lang="en-US" sz="750" dirty="0"/>
           </a:p>
@@ -9634,14 +9848,70 @@
       </p:sp>
       <p:sp>
         <p:nvSpPr>
-          <p:cNvPr id="71" name="Shape 66"/>
+          <p:cNvPr id="73" name="Text 68"/>
           <p:cNvSpPr/>
           <p:nvPr/>
         </p:nvSpPr>
         <p:spPr>
           <a:xfrm>
-            <a:off x="6528816" y="5303520"/>
-            <a:ext cx="2944368" cy="438912"/>
+            <a:off x="6565392" y="5065776"/>
+            <a:ext cx="2871216" cy="347472"/>
+          </a:xfrm>
+          <a:prstGeom prst="rect">
+            <a:avLst/>
+          </a:prstGeom>
+          <a:noFill/>
+          <a:ln/>
+        </p:spPr>
+        <p:txBody>
+          <a:bodyPr wrap="square" lIns="0" tIns="0" rIns="0" bIns="0" rtlCol="0" anchor="ctr"/>
+          <a:lstStyle/>
+          <a:p>
+            <a:pPr indent="0" marL="0">
+              <a:buNone/>
+            </a:pPr>
+            <a:r>
+              <a:rPr lang="en-US" sz="650" dirty="0">
+                <a:solidFill>
+                  <a:srgbClr val="555555"/>
+                </a:solidFill>
+                <a:latin typeface="Calibri" pitchFamily="34" charset="0"/>
+                <a:ea typeface="Calibri" pitchFamily="34" charset="-122"/>
+                <a:cs typeface="Calibri" pitchFamily="34" charset="-120"/>
+              </a:rPr>
+              <a:t>create_date: 2026-01-13</a:t>
+            </a:r>
+            <a:endParaRPr lang="en-US" sz="650" dirty="0"/>
+          </a:p>
+          <a:p>
+            <a:pPr indent="0" marL="0">
+              <a:buNone/>
+            </a:pPr>
+            <a:r>
+              <a:rPr lang="en-US" sz="650" dirty="0">
+                <a:solidFill>
+                  <a:srgbClr val="555555"/>
+                </a:solidFill>
+                <a:latin typeface="Calibri" pitchFamily="34" charset="0"/>
+                <a:ea typeface="Calibri" pitchFamily="34" charset="-122"/>
+                <a:cs typeface="Calibri" pitchFamily="34" charset="-120"/>
+              </a:rPr>
+              <a:t>(OC/SGより後に追加されたSM)</a:t>
+            </a:r>
+            <a:endParaRPr lang="en-US" sz="650" dirty="0"/>
+          </a:p>
+        </p:txBody>
+      </p:sp>
+      <p:sp>
+        <p:nvSpPr>
+          <p:cNvPr id="74" name="Shape 69"/>
+          <p:cNvSpPr/>
+          <p:nvPr/>
+        </p:nvSpPr>
+        <p:spPr>
+          <a:xfrm>
+            <a:off x="6528816" y="5449824"/>
+            <a:ext cx="2944368" cy="402336"/>
           </a:xfrm>
           <a:prstGeom prst="rect">
             <a:avLst/>
@@ -9659,7 +9929,7 @@
       </p:sp>
       <p:sp>
         <p:nvSpPr>
-          <p:cNvPr id="72" name="Text 67"/>
+          <p:cNvPr id="75" name="Text 70"/>
           <p:cNvSpPr/>
           <p:nvPr/>
         </p:nvSpPr>
@@ -9715,7 +9985,7 @@
       </p:sp>
       <p:sp>
         <p:nvSpPr>
-          <p:cNvPr id="73" name="Shape 68"/>
+          <p:cNvPr id="76" name="Shape 71"/>
           <p:cNvSpPr/>
           <p:nvPr/>
         </p:nvSpPr>
@@ -9740,7 +10010,7 @@
       </p:sp>
       <p:sp>
         <p:nvSpPr>
-          <p:cNvPr id="74" name="Text 69"/>
+          <p:cNvPr id="77" name="Text 72"/>
           <p:cNvSpPr/>
           <p:nvPr/>
         </p:nvSpPr>
@@ -9779,13 +10049,13 @@
       </p:sp>
       <p:sp>
         <p:nvSpPr>
-          <p:cNvPr id="75" name="Text 70"/>
+          <p:cNvPr id="78" name="Text 73"/>
           <p:cNvSpPr/>
           <p:nvPr/>
         </p:nvSpPr>
         <p:spPr>
           <a:xfrm>
-            <a:off x="274320" y="6053328"/>
+            <a:off x="274320" y="6144768"/>
             <a:ext cx="9144000" cy="219456"/>
           </a:xfrm>
           <a:prstGeom prst="rect">

--- a/40_AWS/01_構成資料/カスミPOS_AWS構成資料.pptx
+++ b/40_AWS/01_構成資料/カスミPOS_AWS構成資料.pptx
@@ -6101,7 +6101,7 @@
                 <a:ea typeface="Calibri" pitchFamily="34" charset="-122"/>
                 <a:cs typeface="Calibri" pitchFamily="34" charset="-120"/>
               </a:rPr>
-              <a:t>ECS: posprd-cluster (FARGATE)  TaskDef: oc-export-data:2 / sg-export-data  QueryLanguage: JSONata  Retry: MaxAttempts:3</a:t>
+              <a:t>ECS FARGATE: OC=posprd-cluster(TaskDef:oc-export-data:2, HB:300s) / SG=ksm-posprd-ecs-cluster(TaskDef:sg-export-data:5, HB/TO:2400s)  SM QueryLang: JSONata</a:t>
             </a:r>
             <a:endParaRPr lang="en-US" sz="800" dirty="0"/>
           </a:p>
@@ -7090,7 +7090,7 @@
                 <a:ea typeface="Calibri" pitchFamily="34" charset="-122"/>
                 <a:cs typeface="Calibri" pitchFamily="34" charset="-120"/>
               </a:rPr>
-              <a:t>OC フロー（確認済）</a:t>
+              <a:t>OC フロー</a:t>
             </a:r>
             <a:endParaRPr lang="en-US" sz="1050" dirty="0"/>
           </a:p>
@@ -7154,24 +7154,7 @@
                 <a:ea typeface="Calibri" pitchFamily="34" charset="-122"/>
                 <a:cs typeface="Calibri" pitchFamily="34" charset="-120"/>
               </a:rPr>
-              <a:t>連携元: 基幹データ</a:t>
-            </a:r>
-            <a:endParaRPr lang="en-US" sz="800" dirty="0"/>
-          </a:p>
-          <a:p>
-            <a:pPr indent="0" marL="0">
-              <a:buNone/>
-            </a:pPr>
-            <a:r>
-              <a:rPr lang="en-US" sz="800" dirty="0">
-                <a:solidFill>
-                  <a:srgbClr val="1E6E9F"/>
-                </a:solidFill>
-                <a:latin typeface="Calibri" pitchFamily="34" charset="0"/>
-                <a:ea typeface="Calibri" pitchFamily="34" charset="-122"/>
-                <a:cs typeface="Calibri" pitchFamily="34" charset="-120"/>
-              </a:rPr>
-              <a:t>BIPROGY / OpenCentral</a:t>
+              <a:t>連携元: 基幹データ / BIPROGY</a:t>
             </a:r>
             <a:endParaRPr lang="en-US" sz="800" dirty="0"/>
           </a:p>
@@ -7235,24 +7218,7 @@
                 <a:ea typeface="Calibri" pitchFamily="34" charset="-122"/>
                 <a:cs typeface="Calibri" pitchFamily="34" charset="-120"/>
               </a:rPr>
-              <a:t>S3: pos-original/oc/receive/</a:t>
-            </a:r>
-            <a:endParaRPr lang="en-US" sz="750" dirty="0"/>
-          </a:p>
-          <a:p>
-            <a:pPr indent="0" marL="0">
-              <a:buNone/>
-            </a:pPr>
-            <a:r>
-              <a:rPr lang="en-US" sz="750" dirty="0">
-                <a:solidFill>
-                  <a:srgbClr val="7A6000"/>
-                </a:solidFill>
-                <a:latin typeface="Calibri" pitchFamily="34" charset="0"/>
-                <a:ea typeface="Calibri" pitchFamily="34" charset="-122"/>
-                <a:cs typeface="Calibri" pitchFamily="34" charset="-120"/>
-              </a:rPr>
-              <a:t>{table_name}.END 着地</a:t>
+              <a:t>S3: undefined</a:t>
             </a:r>
             <a:endParaRPr lang="en-US" sz="750" dirty="0"/>
           </a:p>
@@ -7316,7 +7282,7 @@
                 <a:ea typeface="Calibri" pitchFamily="34" charset="-122"/>
                 <a:cs typeface="Calibri" pitchFamily="34" charset="-120"/>
               </a:rPr>
-              <a:t>EventBridge: Object Created</a:t>
+              <a:t>EB: *.END着地</a:t>
             </a:r>
             <a:endParaRPr lang="en-US" sz="750" dirty="0"/>
           </a:p>
@@ -7333,7 +7299,7 @@
                 <a:ea typeface="Calibri" pitchFamily="34" charset="-122"/>
                 <a:cs typeface="Calibri" pitchFamily="34" charset="-120"/>
               </a:rPr>
-              <a:t>*.END → SF: receive-pos-master-oc</a:t>
+              <a:t>→ SF: receive-pos-master-oc</a:t>
             </a:r>
             <a:endParaRPr lang="en-US" sz="750" dirty="0"/>
           </a:p>
@@ -7397,7 +7363,7 @@
                 <a:ea typeface="Calibri" pitchFamily="34" charset="-122"/>
                 <a:cs typeface="Calibri" pitchFamily="34" charset="-120"/>
               </a:rPr>
-              <a:t>1. ① SF: receive-pos-master-oc</a:t>
+              <a:t>1. ① receive-pos-master-oc</a:t>
             </a:r>
             <a:endParaRPr lang="en-US" sz="750" dirty="0"/>
           </a:p>
@@ -7431,7 +7397,41 @@
                 <a:ea typeface="Calibri" pitchFamily="34" charset="-122"/>
                 <a:cs typeface="Calibri" pitchFamily="34" charset="-120"/>
               </a:rPr>
-              <a:t>Parallel: ①backup-file②Map:create-file-end(.ENDIMPORT生成)</a:t>
+              <a:t>[Parallel]</a:t>
+            </a:r>
+            <a:endParaRPr lang="en-US" sz="750" dirty="0"/>
+          </a:p>
+          <a:p>
+            <a:pPr indent="0" marL="0">
+              <a:buNone/>
+            </a:pPr>
+            <a:r>
+              <a:rPr lang="en-US" sz="750" dirty="0">
+                <a:solidFill>
+                  <a:srgbClr val="222222"/>
+                </a:solidFill>
+                <a:latin typeface="Calibri" pitchFamily="34" charset="0"/>
+                <a:ea typeface="Calibri" pitchFamily="34" charset="-122"/>
+                <a:cs typeface="Calibri" pitchFamily="34" charset="-120"/>
+              </a:rPr>
+              <a:t>  ①backup-file</a:t>
+            </a:r>
+            <a:endParaRPr lang="en-US" sz="750" dirty="0"/>
+          </a:p>
+          <a:p>
+            <a:pPr indent="0" marL="0">
+              <a:buNone/>
+            </a:pPr>
+            <a:r>
+              <a:rPr lang="en-US" sz="750" dirty="0">
+                <a:solidFill>
+                  <a:srgbClr val="222222"/>
+                </a:solidFill>
+                <a:latin typeface="Calibri" pitchFamily="34" charset="0"/>
+                <a:ea typeface="Calibri" pitchFamily="34" charset="-122"/>
+                <a:cs typeface="Calibri" pitchFamily="34" charset="-120"/>
+              </a:rPr>
+              <a:t>  ②Map: create-file-end(.ENDIMPORT生成)</a:t>
             </a:r>
             <a:endParaRPr lang="en-US" sz="750" dirty="0"/>
           </a:p>
@@ -7495,7 +7495,7 @@
                 <a:ea typeface="Calibri" pitchFamily="34" charset="-122"/>
                 <a:cs typeface="Calibri" pitchFamily="34" charset="-120"/>
               </a:rPr>
-              <a:t>2. ② SF: import-pos-master-oc</a:t>
+              <a:t>2. ② import-pos-master-oc</a:t>
             </a:r>
             <a:endParaRPr lang="en-US" sz="750" dirty="0"/>
           </a:p>
@@ -7529,6 +7529,23 @@
                 <a:ea typeface="Calibri" pitchFamily="34" charset="-122"/>
                 <a:cs typeface="Calibri" pitchFamily="34" charset="-120"/>
               </a:rPr>
+              <a:t>→ Replica_Kasumi.41_P001</a:t>
+            </a:r>
+            <a:endParaRPr lang="en-US" sz="750" dirty="0"/>
+          </a:p>
+          <a:p>
+            <a:pPr indent="0" marL="0">
+              <a:buNone/>
+            </a:pPr>
+            <a:r>
+              <a:rPr lang="en-US" sz="750" dirty="0">
+                <a:solidFill>
+                  <a:srgbClr val="222222"/>
+                </a:solidFill>
+                <a:latin typeface="Calibri" pitchFamily="34" charset="0"/>
+                <a:ea typeface="Calibri" pitchFamily="34" charset="-122"/>
+                <a:cs typeface="Calibri" pitchFamily="34" charset="-120"/>
+              </a:rPr>
               <a:t>Catch: DBConnectionException</a:t>
             </a:r>
             <a:endParaRPr lang="en-US" sz="750" dirty="0"/>
@@ -7546,7 +7563,7 @@
                 <a:ea typeface="Calibri" pitchFamily="34" charset="-122"/>
                 <a:cs typeface="Calibri" pitchFamily="34" charset="-120"/>
               </a:rPr>
-              <a:t>      S3DownloadException/S3ConnectionException</a:t>
+              <a:t>       S3DownloadException</a:t>
             </a:r>
             <a:endParaRPr lang="en-US" sz="750" dirty="0"/>
           </a:p>
@@ -7610,7 +7627,7 @@
                 <a:ea typeface="Calibri" pitchFamily="34" charset="-122"/>
                 <a:cs typeface="Calibri" pitchFamily="34" charset="-120"/>
               </a:rPr>
-              <a:t>3. ③ SF: create-txt-file-oc</a:t>
+              <a:t>3. ③ create-txt-file-oc</a:t>
             </a:r>
             <a:endParaRPr lang="en-US" sz="750" dirty="0"/>
           </a:p>
@@ -7627,7 +7644,7 @@
                 <a:ea typeface="Calibri" pitchFamily="34" charset="-122"/>
                 <a:cs typeface="Calibri" pitchFamily="34" charset="-120"/>
               </a:rPr>
-              <a:t>Lambda: get-sync-store（同期店舗確認）</a:t>
+              <a:t>Lambda: get-sync-store</a:t>
             </a:r>
             <a:endParaRPr lang="en-US" sz="750" dirty="0"/>
           </a:p>
@@ -7644,7 +7661,7 @@
                 <a:ea typeface="Calibri" pitchFamily="34" charset="-122"/>
                 <a:cs typeface="Calibri" pitchFamily="34" charset="-120"/>
               </a:rPr>
-              <a:t>ECS FARGATE: oc-export-data (waitForTaskToken)</a:t>
+              <a:t>ECS FARGATE: oc-export-data</a:t>
             </a:r>
             <a:endParaRPr lang="en-US" sz="750" dirty="0"/>
           </a:p>
@@ -7661,7 +7678,41 @@
                 <a:ea typeface="Calibri" pitchFamily="34" charset="-122"/>
                 <a:cs typeface="Calibri" pitchFamily="34" charset="-120"/>
               </a:rPr>
-              <a:t>TaskDef: oc-export-data:2  HeartbeatSec:300</a:t>
+              <a:t>Cluster: posprd-cluster</a:t>
+            </a:r>
+            <a:endParaRPr lang="en-US" sz="750" dirty="0"/>
+          </a:p>
+          <a:p>
+            <a:pPr indent="0" marL="0">
+              <a:buNone/>
+            </a:pPr>
+            <a:r>
+              <a:rPr lang="en-US" sz="750" dirty="0">
+                <a:solidFill>
+                  <a:srgbClr val="222222"/>
+                </a:solidFill>
+                <a:latin typeface="Calibri" pitchFamily="34" charset="0"/>
+                <a:ea typeface="Calibri" pitchFamily="34" charset="-122"/>
+                <a:cs typeface="Calibri" pitchFamily="34" charset="-120"/>
+              </a:rPr>
+              <a:t>TaskDef: oc-export-data:2</a:t>
+            </a:r>
+            <a:endParaRPr lang="en-US" sz="750" dirty="0"/>
+          </a:p>
+          <a:p>
+            <a:pPr indent="0" marL="0">
+              <a:buNone/>
+            </a:pPr>
+            <a:r>
+              <a:rPr lang="en-US" sz="750" dirty="0">
+                <a:solidFill>
+                  <a:srgbClr val="222222"/>
+                </a:solidFill>
+                <a:latin typeface="Calibri" pitchFamily="34" charset="0"/>
+                <a:ea typeface="Calibri" pitchFamily="34" charset="-122"/>
+                <a:cs typeface="Calibri" pitchFamily="34" charset="-120"/>
+              </a:rPr>
+              <a:t>Heartbeat: 300s</a:t>
             </a:r>
             <a:endParaRPr lang="en-US" sz="750" dirty="0"/>
           </a:p>
@@ -7742,7 +7793,7 @@
                 <a:ea typeface="Calibri" pitchFamily="34" charset="-122"/>
                 <a:cs typeface="Calibri" pitchFamily="34" charset="-120"/>
               </a:rPr>
-              <a:t>（TXTを送信時刻で分割 + EB Scheduleルール生成）</a:t>
+              <a:t>(TXT分割+EBスケジュール生成)</a:t>
             </a:r>
             <a:endParaRPr lang="en-US" sz="750" dirty="0"/>
           </a:p>
@@ -7806,7 +7857,7 @@
                 <a:ea typeface="Calibri" pitchFamily="34" charset="-122"/>
                 <a:cs typeface="Calibri" pitchFamily="34" charset="-120"/>
               </a:rPr>
-              <a:t>5. ④ SF: sent-txt-file</a:t>
+              <a:t>5. ④ sent-txt-file</a:t>
             </a:r>
             <a:endParaRPr lang="en-US" sz="750" dirty="0"/>
           </a:p>
@@ -7823,7 +7874,75 @@
                 <a:ea typeface="Calibri" pitchFamily="34" charset="-122"/>
                 <a:cs typeface="Calibri" pitchFamily="34" charset="-120"/>
               </a:rPr>
-              <a:t>→ BOX-PC FTP送信 → backup-file</a:t>
+              <a:t>Lambda: get-sync-store(Retry:なし)</a:t>
+            </a:r>
+            <a:endParaRPr lang="en-US" sz="750" dirty="0"/>
+          </a:p>
+          <a:p>
+            <a:pPr indent="0" marL="0">
+              <a:buNone/>
+            </a:pPr>
+            <a:r>
+              <a:rPr lang="en-US" sz="750" dirty="0">
+                <a:solidFill>
+                  <a:srgbClr val="222222"/>
+                </a:solidFill>
+                <a:latin typeface="Calibri" pitchFamily="34" charset="0"/>
+                <a:ea typeface="Calibri" pitchFamily="34" charset="-122"/>
+                <a:cs typeface="Calibri" pitchFamily="34" charset="-120"/>
+              </a:rPr>
+              <a:t>Lambda: sent-txt-file</a:t>
+            </a:r>
+            <a:endParaRPr lang="en-US" sz="750" dirty="0"/>
+          </a:p>
+          <a:p>
+            <a:pPr indent="0" marL="0">
+              <a:buNone/>
+            </a:pPr>
+            <a:r>
+              <a:rPr lang="en-US" sz="750" dirty="0">
+                <a:solidFill>
+                  <a:srgbClr val="222222"/>
+                </a:solidFill>
+                <a:latin typeface="Calibri" pitchFamily="34" charset="0"/>
+                <a:ea typeface="Calibri" pitchFamily="34" charset="-122"/>
+                <a:cs typeface="Calibri" pitchFamily="34" charset="-120"/>
+              </a:rPr>
+              <a:t>FTP先: SftpHost/Port/User/Pass</a:t>
+            </a:r>
+            <a:endParaRPr lang="en-US" sz="750" dirty="0"/>
+          </a:p>
+          <a:p>
+            <a:pPr indent="0" marL="0">
+              <a:buNone/>
+            </a:pPr>
+            <a:r>
+              <a:rPr lang="en-US" sz="750" dirty="0">
+                <a:solidFill>
+                  <a:srgbClr val="222222"/>
+                </a:solidFill>
+                <a:latin typeface="Calibri" pitchFamily="34" charset="0"/>
+                <a:ea typeface="Calibri" pitchFamily="34" charset="-122"/>
+                <a:cs typeface="Calibri" pitchFamily="34" charset="-120"/>
+              </a:rPr>
+              <a:t>(DB動的取得)</a:t>
+            </a:r>
+            <a:endParaRPr lang="en-US" sz="750" dirty="0"/>
+          </a:p>
+          <a:p>
+            <a:pPr indent="0" marL="0">
+              <a:buNone/>
+            </a:pPr>
+            <a:r>
+              <a:rPr lang="en-US" sz="750" dirty="0">
+                <a:solidFill>
+                  <a:srgbClr val="222222"/>
+                </a:solidFill>
+                <a:latin typeface="Calibri" pitchFamily="34" charset="0"/>
+                <a:ea typeface="Calibri" pitchFamily="34" charset="-122"/>
+                <a:cs typeface="Calibri" pitchFamily="34" charset="-120"/>
+              </a:rPr>
+              <a:t>→ backup-file</a:t>
             </a:r>
             <a:endParaRPr lang="en-US" sz="750" dirty="0"/>
           </a:p>
@@ -7862,7 +7981,7 @@
                 <a:ea typeface="Calibri" pitchFamily="34" charset="-122"/>
                 <a:cs typeface="Calibri" pitchFamily="34" charset="-120"/>
               </a:rPr>
-              <a:t>Subnet: subnet-0d125718b8c5c5a23</a:t>
+              <a:t>ECS Subnet:</a:t>
             </a:r>
             <a:endParaRPr lang="en-US" sz="650" dirty="0"/>
           </a:p>
@@ -7879,7 +7998,7 @@
                 <a:ea typeface="Calibri" pitchFamily="34" charset="-122"/>
                 <a:cs typeface="Calibri" pitchFamily="34" charset="-120"/>
               </a:rPr>
-              <a:t>       subnet-030f7db5506682c07</a:t>
+              <a:t>subnet-0d125718b8c5c5a23</a:t>
             </a:r>
             <a:endParaRPr lang="en-US" sz="650" dirty="0"/>
           </a:p>
@@ -7896,7 +8015,24 @@
                 <a:ea typeface="Calibri" pitchFamily="34" charset="-122"/>
                 <a:cs typeface="Calibri" pitchFamily="34" charset="-120"/>
               </a:rPr>
-              <a:t>SG: sg-053d249f0086f8733  AssignPublicIp: DISABLED</a:t>
+              <a:t>subnet-030f7db5506682c07</a:t>
+            </a:r>
+            <a:endParaRPr lang="en-US" sz="650" dirty="0"/>
+          </a:p>
+          <a:p>
+            <a:pPr indent="0" marL="0">
+              <a:buNone/>
+            </a:pPr>
+            <a:r>
+              <a:rPr lang="en-US" sz="650" dirty="0">
+                <a:solidFill>
+                  <a:srgbClr val="555555"/>
+                </a:solidFill>
+                <a:latin typeface="Calibri" pitchFamily="34" charset="0"/>
+                <a:ea typeface="Calibri" pitchFamily="34" charset="-122"/>
+                <a:cs typeface="Calibri" pitchFamily="34" charset="-120"/>
+              </a:rPr>
+              <a:t>SG: sg-053d249f0086f8733</a:t>
             </a:r>
             <a:endParaRPr lang="en-US" sz="650" dirty="0"/>
           </a:p>
@@ -7960,24 +8096,7 @@
                 <a:ea typeface="Calibri" pitchFamily="34" charset="-122"/>
                 <a:cs typeface="Calibri" pitchFamily="34" charset="-120"/>
               </a:rPr>
-              <a:t>DB: Replica_Kasumi</a:t>
-            </a:r>
-            <a:endParaRPr lang="en-US" sz="750" dirty="0"/>
-          </a:p>
-          <a:p>
-            <a:pPr indent="0" marL="0">
-              <a:buNone/>
-            </a:pPr>
-            <a:r>
-              <a:rPr lang="en-US" sz="750" dirty="0">
-                <a:solidFill>
-                  <a:srgbClr val="FFFFFF"/>
-                </a:solidFill>
-                <a:latin typeface="Calibri" pitchFamily="34" charset="0"/>
-                <a:ea typeface="Calibri" pitchFamily="34" charset="-122"/>
-                <a:cs typeface="Calibri" pitchFamily="34" charset="-120"/>
-              </a:rPr>
-              <a:t>・41_P001</a:t>
+              <a:t>DB: Replica_Kasumi: 41_P001</a:t>
             </a:r>
             <a:endParaRPr lang="en-US" sz="750" dirty="0"/>
           </a:p>
@@ -8041,7 +8160,7 @@
                 <a:ea typeface="Calibri" pitchFamily="34" charset="-122"/>
                 <a:cs typeface="Calibri" pitchFamily="34" charset="-120"/>
               </a:rPr>
-              <a:t>出力: SHOHIN.TXT</a:t>
+              <a:t>出力: SHOHIN.TXT → BOX-PC FTP</a:t>
             </a:r>
             <a:endParaRPr lang="en-US" sz="750" dirty="0"/>
           </a:p>
@@ -8105,7 +8224,7 @@
                 <a:ea typeface="Calibri" pitchFamily="34" charset="-122"/>
                 <a:cs typeface="Calibri" pitchFamily="34" charset="-120"/>
               </a:rPr>
-              <a:t>SG フロー（確認済）</a:t>
+              <a:t>SG フロー</a:t>
             </a:r>
             <a:endParaRPr lang="en-US" sz="1050" dirty="0"/>
           </a:p>
@@ -8169,24 +8288,7 @@
                 <a:ea typeface="Calibri" pitchFamily="34" charset="-122"/>
                 <a:cs typeface="Calibri" pitchFamily="34" charset="-120"/>
               </a:rPr>
-              <a:t>連携元: POSデータ</a:t>
-            </a:r>
-            <a:endParaRPr lang="en-US" sz="800" dirty="0"/>
-          </a:p>
-          <a:p>
-            <a:pPr indent="0" marL="0">
-              <a:buNone/>
-            </a:pPr>
-            <a:r>
-              <a:rPr lang="en-US" sz="800" dirty="0">
-                <a:solidFill>
-                  <a:srgbClr val="2E7D32"/>
-                </a:solidFill>
-                <a:latin typeface="Calibri" pitchFamily="34" charset="0"/>
-                <a:ea typeface="Calibri" pitchFamily="34" charset="-122"/>
-                <a:cs typeface="Calibri" pitchFamily="34" charset="-120"/>
-              </a:rPr>
-              <a:t>VINX / PosSserver</a:t>
+              <a:t>連携元: POSデータ / VINX</a:t>
             </a:r>
             <a:endParaRPr lang="en-US" sz="800" dirty="0"/>
           </a:p>
@@ -8250,24 +8352,7 @@
                 <a:ea typeface="Calibri" pitchFamily="34" charset="-122"/>
                 <a:cs typeface="Calibri" pitchFamily="34" charset="-120"/>
               </a:rPr>
-              <a:t>S3: pos-original/sg/receive/</a:t>
-            </a:r>
-            <a:endParaRPr lang="en-US" sz="750" dirty="0"/>
-          </a:p>
-          <a:p>
-            <a:pPr indent="0" marL="0">
-              <a:buNone/>
-            </a:pPr>
-            <a:r>
-              <a:rPr lang="en-US" sz="750" dirty="0">
-                <a:solidFill>
-                  <a:srgbClr val="7A6000"/>
-                </a:solidFill>
-                <a:latin typeface="Calibri" pitchFamily="34" charset="0"/>
-                <a:ea typeface="Calibri" pitchFamily="34" charset="-122"/>
-                <a:cs typeface="Calibri" pitchFamily="34" charset="-120"/>
-              </a:rPr>
-              <a:t>*.ZIP 着地</a:t>
+              <a:t>S3: undefined</a:t>
             </a:r>
             <a:endParaRPr lang="en-US" sz="750" dirty="0"/>
           </a:p>
@@ -8331,7 +8416,7 @@
                 <a:ea typeface="Calibri" pitchFamily="34" charset="-122"/>
                 <a:cs typeface="Calibri" pitchFamily="34" charset="-120"/>
               </a:rPr>
-              <a:t>EventBridge: Object Created *.ZIP</a:t>
+              <a:t>EB: *.ZIP着地 → Lambda: trigger-sqs</a:t>
             </a:r>
             <a:endParaRPr lang="en-US" sz="750" dirty="0"/>
           </a:p>
@@ -8348,24 +8433,7 @@
                 <a:ea typeface="Calibri" pitchFamily="34" charset="-122"/>
                 <a:cs typeface="Calibri" pitchFamily="34" charset="-120"/>
               </a:rPr>
-              <a:t>Lambda: trigger-sqs-import-sg</a:t>
-            </a:r>
-            <a:endParaRPr lang="en-US" sz="750" dirty="0"/>
-          </a:p>
-          <a:p>
-            <a:pPr indent="0" marL="0">
-              <a:buNone/>
-            </a:pPr>
-            <a:r>
-              <a:rPr lang="en-US" sz="750" dirty="0">
-                <a:solidFill>
-                  <a:srgbClr val="C0392B"/>
-                </a:solidFill>
-                <a:latin typeface="Calibri" pitchFamily="34" charset="0"/>
-                <a:ea typeface="Calibri" pitchFamily="34" charset="-122"/>
-                <a:cs typeface="Calibri" pitchFamily="34" charset="-120"/>
-              </a:rPr>
-              <a:t>→ SQS: store-code-queue-sg.fifo</a:t>
+              <a:t>→ SQS: store-code-queue.fifo</a:t>
             </a:r>
             <a:endParaRPr lang="en-US" sz="750" dirty="0"/>
           </a:p>
@@ -8446,7 +8514,7 @@
                 <a:ea typeface="Calibri" pitchFamily="34" charset="-122"/>
                 <a:cs typeface="Calibri" pitchFamily="34" charset="-120"/>
               </a:rPr>
-              <a:t>1. ① SF: receive-and-import-sg</a:t>
+              <a:t>1. ① receive-and-import-sg</a:t>
             </a:r>
             <a:endParaRPr lang="en-US" sz="750" dirty="0"/>
           </a:p>
@@ -8463,7 +8531,7 @@
                 <a:ea typeface="Calibri" pitchFamily="34" charset="-122"/>
                 <a:cs typeface="Calibri" pitchFamily="34" charset="-120"/>
               </a:rPr>
-              <a:t>Lambda: unzip-file → Choice(paths[0]確認)</a:t>
+              <a:t>Lambda: unzip-file</a:t>
             </a:r>
             <a:endParaRPr lang="en-US" sz="750" dirty="0"/>
           </a:p>
@@ -8480,7 +8548,75 @@
                 <a:ea typeface="Calibri" pitchFamily="34" charset="-122"/>
                 <a:cs typeface="Calibri" pitchFamily="34" charset="-120"/>
               </a:rPr>
-              <a:t>LogStream Key: object.etag（ETag使用）</a:t>
+              <a:t>LogStream: object.etag</a:t>
+            </a:r>
+            <a:endParaRPr lang="en-US" sz="750" dirty="0"/>
+          </a:p>
+          <a:p>
+            <a:pPr indent="0" marL="0">
+              <a:buNone/>
+            </a:pPr>
+            <a:r>
+              <a:rPr lang="en-US" sz="750" dirty="0">
+                <a:solidFill>
+                  <a:srgbClr val="222222"/>
+                </a:solidFill>
+                <a:latin typeface="Calibri" pitchFamily="34" charset="0"/>
+                <a:ea typeface="Calibri" pitchFamily="34" charset="-122"/>
+                <a:cs typeface="Calibri" pitchFamily="34" charset="-120"/>
+              </a:rPr>
+              <a:t>[Parallel]</a:t>
+            </a:r>
+            <a:endParaRPr lang="en-US" sz="750" dirty="0"/>
+          </a:p>
+          <a:p>
+            <a:pPr indent="0" marL="0">
+              <a:buNone/>
+            </a:pPr>
+            <a:r>
+              <a:rPr lang="en-US" sz="750" dirty="0">
+                <a:solidFill>
+                  <a:srgbClr val="222222"/>
+                </a:solidFill>
+                <a:latin typeface="Calibri" pitchFamily="34" charset="0"/>
+                <a:ea typeface="Calibri" pitchFamily="34" charset="-122"/>
+                <a:cs typeface="Calibri" pitchFamily="34" charset="-120"/>
+              </a:rPr>
+              <a:t>  ①backup-file(エラー→SQS del)</a:t>
+            </a:r>
+            <a:endParaRPr lang="en-US" sz="750" dirty="0"/>
+          </a:p>
+          <a:p>
+            <a:pPr indent="0" marL="0">
+              <a:buNone/>
+            </a:pPr>
+            <a:r>
+              <a:rPr lang="en-US" sz="750" dirty="0">
+                <a:solidFill>
+                  <a:srgbClr val="222222"/>
+                </a:solidFill>
+                <a:latin typeface="Calibri" pitchFamily="34" charset="0"/>
+                <a:ea typeface="Calibri" pitchFamily="34" charset="-122"/>
+                <a:cs typeface="Calibri" pitchFamily="34" charset="-120"/>
+              </a:rPr>
+              <a:t>  ②Map: sg-import-data:$LATEST</a:t>
+            </a:r>
+            <a:endParaRPr lang="en-US" sz="750" dirty="0"/>
+          </a:p>
+          <a:p>
+            <a:pPr indent="0" marL="0">
+              <a:buNone/>
+            </a:pPr>
+            <a:r>
+              <a:rPr lang="en-US" sz="750" dirty="0">
+                <a:solidFill>
+                  <a:srgbClr val="222222"/>
+                </a:solidFill>
+                <a:latin typeface="Calibri" pitchFamily="34" charset="0"/>
+                <a:ea typeface="Calibri" pitchFamily="34" charset="-122"/>
+                <a:cs typeface="Calibri" pitchFamily="34" charset="-120"/>
+              </a:rPr>
+              <a:t>    (エラー→SQS del)</a:t>
             </a:r>
             <a:endParaRPr lang="en-US" sz="750" dirty="0"/>
           </a:p>
@@ -8544,7 +8680,7 @@
                 <a:ea typeface="Calibri" pitchFamily="34" charset="-122"/>
                 <a:cs typeface="Calibri" pitchFamily="34" charset="-120"/>
               </a:rPr>
-              <a:t>2. Parallel:</a:t>
+              <a:t>2. Replica_Kasumi:</a:t>
             </a:r>
             <a:endParaRPr lang="en-US" sz="750" dirty="0"/>
           </a:p>
@@ -8561,7 +8697,7 @@
                 <a:ea typeface="Calibri" pitchFamily="34" charset="-122"/>
                 <a:cs typeface="Calibri" pitchFamily="34" charset="-120"/>
               </a:rPr>
-              <a:t>① backup-file → エラー時SQS deleteMessage</a:t>
+              <a:t>  11_ItemMaster</a:t>
             </a:r>
             <a:endParaRPr lang="en-US" sz="750" dirty="0"/>
           </a:p>
@@ -8578,7 +8714,7 @@
                 <a:ea typeface="Calibri" pitchFamily="34" charset="-122"/>
                 <a:cs typeface="Calibri" pitchFamily="34" charset="-120"/>
               </a:rPr>
-              <a:t>② Map: sg-import-data:$LATEST</a:t>
+              <a:t>  13_SpecialPriceMaster</a:t>
             </a:r>
             <a:endParaRPr lang="en-US" sz="750" dirty="0"/>
           </a:p>
@@ -8595,7 +8731,7 @@
                 <a:ea typeface="Calibri" pitchFamily="34" charset="-122"/>
                 <a:cs typeface="Calibri" pitchFamily="34" charset="-120"/>
               </a:rPr>
-              <a:t>   Catch: DBConnectionException</a:t>
+              <a:t>  16_ForcePriceMaster</a:t>
             </a:r>
             <a:endParaRPr lang="en-US" sz="750" dirty="0"/>
           </a:p>
@@ -8612,7 +8748,7 @@
                 <a:ea typeface="Calibri" pitchFamily="34" charset="-122"/>
                 <a:cs typeface="Calibri" pitchFamily="34" charset="-120"/>
               </a:rPr>
-              <a:t>         S3DownloadException</a:t>
+              <a:t>.ENDEXPORT生成</a:t>
             </a:r>
             <a:endParaRPr lang="en-US" sz="750" dirty="0"/>
           </a:p>
@@ -8629,7 +8765,7 @@
                 <a:ea typeface="Calibri" pitchFamily="34" charset="-122"/>
                 <a:cs typeface="Calibri" pitchFamily="34" charset="-120"/>
               </a:rPr>
-              <a:t>   エラー時SQS deleteMessage</a:t>
+              <a:t>→ SQS: export-queue.fifo</a:t>
             </a:r>
             <a:endParaRPr lang="en-US" sz="750" dirty="0"/>
           </a:p>
@@ -8693,7 +8829,7 @@
                 <a:ea typeface="Calibri" pitchFamily="34" charset="-122"/>
                 <a:cs typeface="Calibri" pitchFamily="34" charset="-120"/>
               </a:rPr>
-              <a:t>3. .ENDEXPORT生成</a:t>
+              <a:t>3. ② create-txt-file-sg</a:t>
             </a:r>
             <a:endParaRPr lang="en-US" sz="750" dirty="0"/>
           </a:p>
@@ -8710,7 +8846,7 @@
                 <a:ea typeface="Calibri" pitchFamily="34" charset="-122"/>
                 <a:cs typeface="Calibri" pitchFamily="34" charset="-120"/>
               </a:rPr>
-              <a:t>→ EventBridge: Object Created *.ENDEXPORT</a:t>
+              <a:t>Lambda: get-sync-store</a:t>
             </a:r>
             <a:endParaRPr lang="en-US" sz="750" dirty="0"/>
           </a:p>
@@ -8727,7 +8863,7 @@
                 <a:ea typeface="Calibri" pitchFamily="34" charset="-122"/>
                 <a:cs typeface="Calibri" pitchFamily="34" charset="-120"/>
               </a:rPr>
-              <a:t>→ SF: create-txt-file-sg</a:t>
+              <a:t>ECS FARGATE: sg-export-data</a:t>
             </a:r>
             <a:endParaRPr lang="en-US" sz="750" dirty="0"/>
           </a:p>
@@ -8744,7 +8880,58 @@
                 <a:ea typeface="Calibri" pitchFamily="34" charset="-122"/>
                 <a:cs typeface="Calibri" pitchFamily="34" charset="-120"/>
               </a:rPr>
-              <a:t>Lambda: get-sync-store(同期確認)</a:t>
+              <a:t>Cluster: ksm-posprd-ecs-cluster</a:t>
+            </a:r>
+            <a:endParaRPr lang="en-US" sz="750" dirty="0"/>
+          </a:p>
+          <a:p>
+            <a:pPr indent="0" marL="0">
+              <a:buNone/>
+            </a:pPr>
+            <a:r>
+              <a:rPr lang="en-US" sz="750" dirty="0">
+                <a:solidFill>
+                  <a:srgbClr val="222222"/>
+                </a:solidFill>
+                <a:latin typeface="Calibri" pitchFamily="34" charset="0"/>
+                <a:ea typeface="Calibri" pitchFamily="34" charset="-122"/>
+                <a:cs typeface="Calibri" pitchFamily="34" charset="-120"/>
+              </a:rPr>
+              <a:t>  ★OCと別クラスター★</a:t>
+            </a:r>
+            <a:endParaRPr lang="en-US" sz="750" dirty="0"/>
+          </a:p>
+          <a:p>
+            <a:pPr indent="0" marL="0">
+              <a:buNone/>
+            </a:pPr>
+            <a:r>
+              <a:rPr lang="en-US" sz="750" dirty="0">
+                <a:solidFill>
+                  <a:srgbClr val="222222"/>
+                </a:solidFill>
+                <a:latin typeface="Calibri" pitchFamily="34" charset="0"/>
+                <a:ea typeface="Calibri" pitchFamily="34" charset="-122"/>
+                <a:cs typeface="Calibri" pitchFamily="34" charset="-120"/>
+              </a:rPr>
+              <a:t>TaskDef: sg-export-data:5</a:t>
+            </a:r>
+            <a:endParaRPr lang="en-US" sz="750" dirty="0"/>
+          </a:p>
+          <a:p>
+            <a:pPr indent="0" marL="0">
+              <a:buNone/>
+            </a:pPr>
+            <a:r>
+              <a:rPr lang="en-US" sz="750" dirty="0">
+                <a:solidFill>
+                  <a:srgbClr val="222222"/>
+                </a:solidFill>
+                <a:latin typeface="Calibri" pitchFamily="34" charset="0"/>
+                <a:ea typeface="Calibri" pitchFamily="34" charset="-122"/>
+                <a:cs typeface="Calibri" pitchFamily="34" charset="-120"/>
+              </a:rPr>
+              <a:t>Heartbeat/Timeout: 2400s</a:t>
             </a:r>
             <a:endParaRPr lang="en-US" sz="750" dirty="0"/>
           </a:p>
@@ -8808,7 +8995,7 @@
                 <a:ea typeface="Calibri" pitchFamily="34" charset="-122"/>
                 <a:cs typeface="Calibri" pitchFamily="34" charset="-120"/>
               </a:rPr>
-              <a:t>4. ECS FARGATE: sg-export-data</a:t>
+              <a:t>4. ECS env: DB_BATCH=prd/Batch_Kasumi</a:t>
             </a:r>
             <a:endParaRPr lang="en-US" sz="750" dirty="0"/>
           </a:p>
@@ -8825,7 +9012,7 @@
                 <a:ea typeface="Calibri" pitchFamily="34" charset="-122"/>
                 <a:cs typeface="Calibri" pitchFamily="34" charset="-120"/>
               </a:rPr>
-              <a:t>(posprd-cluster, waitForTaskToken)</a:t>
+              <a:t>         DB_KASUMI=prd/Replica_Kasumi</a:t>
             </a:r>
             <a:endParaRPr lang="en-US" sz="750" dirty="0"/>
           </a:p>
@@ -8846,6 +9033,40 @@
             </a:r>
             <a:endParaRPr lang="en-US" sz="750" dirty="0"/>
           </a:p>
+          <a:p>
+            <a:pPr indent="0" marL="0">
+              <a:buNone/>
+            </a:pPr>
+            <a:r>
+              <a:rPr lang="en-US" sz="750" dirty="0">
+                <a:solidFill>
+                  <a:srgbClr val="222222"/>
+                </a:solidFill>
+                <a:latin typeface="Calibri" pitchFamily="34" charset="0"/>
+                <a:ea typeface="Calibri" pitchFamily="34" charset="-122"/>
+                <a:cs typeface="Calibri" pitchFamily="34" charset="-120"/>
+              </a:rPr>
+              <a:t>成功/失敗 全てSQS deleteMessage</a:t>
+            </a:r>
+            <a:endParaRPr lang="en-US" sz="750" dirty="0"/>
+          </a:p>
+          <a:p>
+            <a:pPr indent="0" marL="0">
+              <a:buNone/>
+            </a:pPr>
+            <a:r>
+              <a:rPr lang="en-US" sz="750" dirty="0">
+                <a:solidFill>
+                  <a:srgbClr val="222222"/>
+                </a:solidFill>
+                <a:latin typeface="Calibri" pitchFamily="34" charset="0"/>
+                <a:ea typeface="Calibri" pitchFamily="34" charset="-122"/>
+                <a:cs typeface="Calibri" pitchFamily="34" charset="-120"/>
+              </a:rPr>
+              <a:t>(export-queue-sg.fifo)</a:t>
+            </a:r>
+            <a:endParaRPr lang="en-US" sz="750" dirty="0"/>
+          </a:p>
         </p:txBody>
       </p:sp>
       <p:sp>
@@ -8906,7 +9127,7 @@
                 <a:ea typeface="Calibri" pitchFamily="34" charset="-122"/>
                 <a:cs typeface="Calibri" pitchFamily="34" charset="-120"/>
               </a:rPr>
-              <a:t>5. ② SF: sent-txt-file</a:t>
+              <a:t>5. ③ sent-txt-file（OC/SGで共用）</a:t>
             </a:r>
             <a:endParaRPr lang="en-US" sz="750" dirty="0"/>
           </a:p>
@@ -8923,7 +9144,58 @@
                 <a:ea typeface="Calibri" pitchFamily="34" charset="-122"/>
                 <a:cs typeface="Calibri" pitchFamily="34" charset="-120"/>
               </a:rPr>
-              <a:t>→ BOX-PC FTP送信 → backup-file</a:t>
+              <a:t>FTP情報: get-sync-storeから動的取得</a:t>
+            </a:r>
+            <a:endParaRPr lang="en-US" sz="750" dirty="0"/>
+          </a:p>
+          <a:p>
+            <a:pPr indent="0" marL="0">
+              <a:buNone/>
+            </a:pPr>
+            <a:r>
+              <a:rPr lang="en-US" sz="750" dirty="0">
+                <a:solidFill>
+                  <a:srgbClr val="222222"/>
+                </a:solidFill>
+                <a:latin typeface="Calibri" pitchFamily="34" charset="0"/>
+                <a:ea typeface="Calibri" pitchFamily="34" charset="-122"/>
+                <a:cs typeface="Calibri" pitchFamily="34" charset="-120"/>
+              </a:rPr>
+              <a:t>(SftpHost/Port/UserName/Password)</a:t>
+            </a:r>
+            <a:endParaRPr lang="en-US" sz="750" dirty="0"/>
+          </a:p>
+          <a:p>
+            <a:pPr indent="0" marL="0">
+              <a:buNone/>
+            </a:pPr>
+            <a:r>
+              <a:rPr lang="en-US" sz="750" dirty="0">
+                <a:solidFill>
+                  <a:srgbClr val="222222"/>
+                </a:solidFill>
+                <a:latin typeface="Calibri" pitchFamily="34" charset="0"/>
+                <a:ea typeface="Calibri" pitchFamily="34" charset="-122"/>
+                <a:cs typeface="Calibri" pitchFamily="34" charset="-120"/>
+              </a:rPr>
+              <a:t>送信後: backup-file</a:t>
+            </a:r>
+            <a:endParaRPr lang="en-US" sz="750" dirty="0"/>
+          </a:p>
+          <a:p>
+            <a:pPr indent="0" marL="0">
+              <a:buNone/>
+            </a:pPr>
+            <a:r>
+              <a:rPr lang="en-US" sz="750" dirty="0">
+                <a:solidFill>
+                  <a:srgbClr val="222222"/>
+                </a:solidFill>
+                <a:latin typeface="Calibri" pitchFamily="34" charset="0"/>
+                <a:ea typeface="Calibri" pitchFamily="34" charset="-122"/>
+                <a:cs typeface="Calibri" pitchFamily="34" charset="-120"/>
+              </a:rPr>
+              <a:t>Log: /pos/log/sent/all|error</a:t>
             </a:r>
             <a:endParaRPr lang="en-US" sz="750" dirty="0"/>
           </a:p>
@@ -8962,7 +9234,7 @@
                 <a:ea typeface="Calibri" pitchFamily="34" charset="-122"/>
                 <a:cs typeface="Calibri" pitchFamily="34" charset="-120"/>
               </a:rPr>
-              <a:t>SQS deleteMessage: エラー発生時に</a:t>
+              <a:t>SQS deleteMessage:</a:t>
             </a:r>
             <a:endParaRPr lang="en-US" sz="650" dirty="0"/>
           </a:p>
@@ -8979,7 +9251,7 @@
                 <a:ea typeface="Calibri" pitchFamily="34" charset="-122"/>
                 <a:cs typeface="Calibri" pitchFamily="34" charset="-120"/>
               </a:rPr>
-              <a:t>store-code-queue-sg.fifoから</a:t>
+              <a:t>全エラーパスと成功時に</a:t>
             </a:r>
             <a:endParaRPr lang="en-US" sz="650" dirty="0"/>
           </a:p>
@@ -8996,7 +9268,7 @@
                 <a:ea typeface="Calibri" pitchFamily="34" charset="-122"/>
                 <a:cs typeface="Calibri" pitchFamily="34" charset="-120"/>
               </a:rPr>
-              <a:t>メッセージ削除してFail</a:t>
+              <a:t>export-queue-sg.fifoから削除</a:t>
             </a:r>
             <a:endParaRPr lang="en-US" sz="650" dirty="0"/>
           </a:p>
@@ -9060,58 +9332,7 @@
                 <a:ea typeface="Calibri" pitchFamily="34" charset="-122"/>
                 <a:cs typeface="Calibri" pitchFamily="34" charset="-120"/>
               </a:rPr>
-              <a:t>DB: Replica_Kasumi</a:t>
-            </a:r>
-            <a:endParaRPr lang="en-US" sz="750" dirty="0"/>
-          </a:p>
-          <a:p>
-            <a:pPr indent="0" marL="0">
-              <a:buNone/>
-            </a:pPr>
-            <a:r>
-              <a:rPr lang="en-US" sz="750" dirty="0">
-                <a:solidFill>
-                  <a:srgbClr val="FFFFFF"/>
-                </a:solidFill>
-                <a:latin typeface="Calibri" pitchFamily="34" charset="0"/>
-                <a:ea typeface="Calibri" pitchFamily="34" charset="-122"/>
-                <a:cs typeface="Calibri" pitchFamily="34" charset="-120"/>
-              </a:rPr>
-              <a:t>・11_ItemMaster</a:t>
-            </a:r>
-            <a:endParaRPr lang="en-US" sz="750" dirty="0"/>
-          </a:p>
-          <a:p>
-            <a:pPr indent="0" marL="0">
-              <a:buNone/>
-            </a:pPr>
-            <a:r>
-              <a:rPr lang="en-US" sz="750" dirty="0">
-                <a:solidFill>
-                  <a:srgbClr val="FFFFFF"/>
-                </a:solidFill>
-                <a:latin typeface="Calibri" pitchFamily="34" charset="0"/>
-                <a:ea typeface="Calibri" pitchFamily="34" charset="-122"/>
-                <a:cs typeface="Calibri" pitchFamily="34" charset="-120"/>
-              </a:rPr>
-              <a:t>・13_SpecialPriceMaster</a:t>
-            </a:r>
-            <a:endParaRPr lang="en-US" sz="750" dirty="0"/>
-          </a:p>
-          <a:p>
-            <a:pPr indent="0" marL="0">
-              <a:buNone/>
-            </a:pPr>
-            <a:r>
-              <a:rPr lang="en-US" sz="750" dirty="0">
-                <a:solidFill>
-                  <a:srgbClr val="FFFFFF"/>
-                </a:solidFill>
-                <a:latin typeface="Calibri" pitchFamily="34" charset="0"/>
-                <a:ea typeface="Calibri" pitchFamily="34" charset="-122"/>
-                <a:cs typeface="Calibri" pitchFamily="34" charset="-120"/>
-              </a:rPr>
-              <a:t>・16_ForcePriceMaster</a:t>
+              <a:t>DB: Replica_Kasumi: 11/13/16</a:t>
             </a:r>
             <a:endParaRPr lang="en-US" sz="750" dirty="0"/>
           </a:p>
@@ -9175,7 +9396,7 @@
                 <a:ea typeface="Calibri" pitchFamily="34" charset="-122"/>
                 <a:cs typeface="Calibri" pitchFamily="34" charset="-120"/>
               </a:rPr>
-              <a:t>出力: ESLDATA.TXT</a:t>
+              <a:t>出力: ESLDATA.TXT → BOX-PC FTP</a:t>
             </a:r>
             <a:endParaRPr lang="en-US" sz="750" dirty="0"/>
           </a:p>
@@ -9239,7 +9460,7 @@
                 <a:ea typeface="Calibri" pitchFamily="34" charset="-122"/>
                 <a:cs typeface="Calibri" pitchFamily="34" charset="-120"/>
               </a:rPr>
-              <a:t>SH フロー（確認済）</a:t>
+              <a:t>SH フロー</a:t>
             </a:r>
             <a:endParaRPr lang="en-US" sz="1050" dirty="0"/>
           </a:p>
@@ -9303,24 +9524,7 @@
                 <a:ea typeface="Calibri" pitchFamily="34" charset="-122"/>
                 <a:cs typeface="Calibri" pitchFamily="34" charset="-120"/>
               </a:rPr>
-              <a:t>連携元: 棚情報</a:t>
-            </a:r>
-            <a:endParaRPr lang="en-US" sz="800" dirty="0"/>
-          </a:p>
-          <a:p>
-            <a:pPr indent="0" marL="0">
-              <a:buNone/>
-            </a:pPr>
-            <a:r>
-              <a:rPr lang="en-US" sz="800" dirty="0">
-                <a:solidFill>
-                  <a:srgbClr val="7B3F00"/>
-                </a:solidFill>
-                <a:latin typeface="Calibri" pitchFamily="34" charset="0"/>
-                <a:ea typeface="Calibri" pitchFamily="34" charset="-122"/>
-                <a:cs typeface="Calibri" pitchFamily="34" charset="-120"/>
-              </a:rPr>
-              <a:t>SHARP / P003</a:t>
+              <a:t>連携元: 棚情報 / SHARP</a:t>
             </a:r>
             <a:endParaRPr lang="en-US" sz="800" dirty="0"/>
           </a:p>
@@ -9384,24 +9588,7 @@
                 <a:ea typeface="Calibri" pitchFamily="34" charset="-122"/>
                 <a:cs typeface="Calibri" pitchFamily="34" charset="-120"/>
               </a:rPr>
-              <a:t>S3: pos-original/sh/receive/</a:t>
-            </a:r>
-            <a:endParaRPr lang="en-US" sz="750" dirty="0"/>
-          </a:p>
-          <a:p>
-            <a:pPr indent="0" marL="0">
-              <a:buNone/>
-            </a:pPr>
-            <a:r>
-              <a:rPr lang="en-US" sz="750" dirty="0">
-                <a:solidFill>
-                  <a:srgbClr val="7A6000"/>
-                </a:solidFill>
-                <a:latin typeface="Calibri" pitchFamily="34" charset="0"/>
-                <a:ea typeface="Calibri" pitchFamily="34" charset="-122"/>
-                <a:cs typeface="Calibri" pitchFamily="34" charset="-120"/>
-              </a:rPr>
-              <a:t>{table_name}.END 着地</a:t>
+              <a:t>S3: undefined</a:t>
             </a:r>
             <a:endParaRPr lang="en-US" sz="750" dirty="0"/>
           </a:p>
@@ -9465,7 +9652,7 @@
                 <a:ea typeface="Calibri" pitchFamily="34" charset="-122"/>
                 <a:cs typeface="Calibri" pitchFamily="34" charset="-120"/>
               </a:rPr>
-              <a:t>EventBridge: Object Created</a:t>
+              <a:t>EB: *.END着地</a:t>
             </a:r>
             <a:endParaRPr lang="en-US" sz="750" dirty="0"/>
           </a:p>
@@ -9482,7 +9669,7 @@
                 <a:ea typeface="Calibri" pitchFamily="34" charset="-122"/>
                 <a:cs typeface="Calibri" pitchFamily="34" charset="-120"/>
               </a:rPr>
-              <a:t>*.END → SF: import-pos-master-sh</a:t>
+              <a:t>→ SF: import-pos-master-sh</a:t>
             </a:r>
             <a:endParaRPr lang="en-US" sz="750" dirty="0"/>
           </a:p>
@@ -9546,7 +9733,7 @@
                 <a:ea typeface="Calibri" pitchFamily="34" charset="-122"/>
                 <a:cs typeface="Calibri" pitchFamily="34" charset="-120"/>
               </a:rPr>
-              <a:t>1. ① SF: import-pos-master-sh</a:t>
+              <a:t>1. ① import-pos-master-sh</a:t>
             </a:r>
             <a:endParaRPr lang="en-US" sz="750" dirty="0"/>
           </a:p>
@@ -9563,7 +9750,7 @@
                 <a:ea typeface="Calibri" pitchFamily="34" charset="-122"/>
                 <a:cs typeface="Calibri" pitchFamily="34" charset="-120"/>
               </a:rPr>
-              <a:t>Lambda: import-pos-master-sh</a:t>
+              <a:t>Lambda: lmd-import-pos-master-sh</a:t>
             </a:r>
             <a:endParaRPr lang="en-US" sz="750" dirty="0"/>
           </a:p>
@@ -9580,7 +9767,41 @@
                 <a:ea typeface="Calibri" pitchFamily="34" charset="-122"/>
                 <a:cs typeface="Calibri" pitchFamily="34" charset="-120"/>
               </a:rPr>
-              <a:t>（DB接続・S3ダウンロード）</a:t>
+              <a:t>  ★他は lmd-function-xxx★</a:t>
+            </a:r>
+            <a:endParaRPr lang="en-US" sz="750" dirty="0"/>
+          </a:p>
+          <a:p>
+            <a:pPr indent="0" marL="0">
+              <a:buNone/>
+            </a:pPr>
+            <a:r>
+              <a:rPr lang="en-US" sz="750" dirty="0">
+                <a:solidFill>
+                  <a:srgbClr val="222222"/>
+                </a:solidFill>
+                <a:latin typeface="Calibri" pitchFamily="34" charset="0"/>
+                <a:ea typeface="Calibri" pitchFamily="34" charset="-122"/>
+                <a:cs typeface="Calibri" pitchFamily="34" charset="-120"/>
+              </a:rPr>
+              <a:t>  ★store_code = 'None'(固定)★</a:t>
+            </a:r>
+            <a:endParaRPr lang="en-US" sz="750" dirty="0"/>
+          </a:p>
+          <a:p>
+            <a:pPr indent="0" marL="0">
+              <a:buNone/>
+            </a:pPr>
+            <a:r>
+              <a:rPr lang="en-US" sz="750" dirty="0">
+                <a:solidFill>
+                  <a:srgbClr val="222222"/>
+                </a:solidFill>
+                <a:latin typeface="Calibri" pitchFamily="34" charset="0"/>
+                <a:ea typeface="Calibri" pitchFamily="34" charset="-122"/>
+                <a:cs typeface="Calibri" pitchFamily="34" charset="-120"/>
+              </a:rPr>
+              <a:t>  table_name: path[3]</a:t>
             </a:r>
             <a:endParaRPr lang="en-US" sz="750" dirty="0"/>
           </a:p>
@@ -9644,7 +9865,7 @@
                 <a:ea typeface="Calibri" pitchFamily="34" charset="-122"/>
                 <a:cs typeface="Calibri" pitchFamily="34" charset="-120"/>
               </a:rPr>
-              <a:t>2. → Replica_Kasumi.41_P001</a:t>
+              <a:t>2. Catch: DBConnectionException</a:t>
             </a:r>
             <a:endParaRPr lang="en-US" sz="750" dirty="0"/>
           </a:p>
@@ -9661,7 +9882,7 @@
                 <a:ea typeface="Calibri" pitchFamily="34" charset="-122"/>
                 <a:cs typeface="Calibri" pitchFamily="34" charset="-120"/>
               </a:rPr>
-              <a:t>INSERT/UPDATE</a:t>
+              <a:t>       S3DownloadException</a:t>
             </a:r>
             <a:endParaRPr lang="en-US" sz="750" dirty="0"/>
           </a:p>
@@ -9678,7 +9899,41 @@
                 <a:ea typeface="Calibri" pitchFamily="34" charset="-122"/>
                 <a:cs typeface="Calibri" pitchFamily="34" charset="-120"/>
               </a:rPr>
-              <a:t>Batch_Kasumi.batch_convert_history更新</a:t>
+              <a:t>       States.ALL</a:t>
+            </a:r>
+            <a:endParaRPr lang="en-US" sz="750" dirty="0"/>
+          </a:p>
+          <a:p>
+            <a:pPr indent="0" marL="0">
+              <a:buNone/>
+            </a:pPr>
+            <a:r>
+              <a:rPr lang="en-US" sz="750" dirty="0">
+                <a:solidFill>
+                  <a:srgbClr val="222222"/>
+                </a:solidFill>
+                <a:latin typeface="Calibri" pitchFamily="34" charset="0"/>
+                <a:ea typeface="Calibri" pitchFamily="34" charset="-122"/>
+                <a:cs typeface="Calibri" pitchFamily="34" charset="-120"/>
+              </a:rPr>
+              <a:t>→ Replica_Kasumi.41_P001</a:t>
+            </a:r>
+            <a:endParaRPr lang="en-US" sz="750" dirty="0"/>
+          </a:p>
+          <a:p>
+            <a:pPr indent="0" marL="0">
+              <a:buNone/>
+            </a:pPr>
+            <a:r>
+              <a:rPr lang="en-US" sz="750" dirty="0">
+                <a:solidFill>
+                  <a:srgbClr val="222222"/>
+                </a:solidFill>
+                <a:latin typeface="Calibri" pitchFamily="34" charset="0"/>
+                <a:ea typeface="Calibri" pitchFamily="34" charset="-122"/>
+                <a:cs typeface="Calibri" pitchFamily="34" charset="-120"/>
+              </a:rPr>
+              <a:t>  INSERT/UPDATE</a:t>
             </a:r>
             <a:endParaRPr lang="en-US" sz="750" dirty="0"/>
           </a:p>
@@ -9742,7 +9997,7 @@
                 <a:ea typeface="Calibri" pitchFamily="34" charset="-122"/>
                 <a:cs typeface="Calibri" pitchFamily="34" charset="-120"/>
               </a:rPr>
-              <a:t>3. Lambda: backup-file</a:t>
+              <a:t>3. Batch_Kasumi.batch_convert_history</a:t>
             </a:r>
             <a:endParaRPr lang="en-US" sz="750" dirty="0"/>
           </a:p>
@@ -9759,7 +10014,24 @@
                 <a:ea typeface="Calibri" pitchFamily="34" charset="-122"/>
                 <a:cs typeface="Calibri" pitchFamily="34" charset="-120"/>
               </a:rPr>
-              <a:t>（受信ファイルをbackupフォルダへ移動）</a:t>
+              <a:t>更新</a:t>
+            </a:r>
+            <a:endParaRPr lang="en-US" sz="750" dirty="0"/>
+          </a:p>
+          <a:p>
+            <a:pPr indent="0" marL="0">
+              <a:buNone/>
+            </a:pPr>
+            <a:r>
+              <a:rPr lang="en-US" sz="750" dirty="0">
+                <a:solidFill>
+                  <a:srgbClr val="222222"/>
+                </a:solidFill>
+                <a:latin typeface="Calibri" pitchFamily="34" charset="0"/>
+                <a:ea typeface="Calibri" pitchFamily="34" charset="-122"/>
+                <a:cs typeface="Calibri" pitchFamily="34" charset="-120"/>
+              </a:rPr>
+              <a:t>backup-file（内部処理）</a:t>
             </a:r>
             <a:endParaRPr lang="en-US" sz="750" dirty="0"/>
           </a:p>
@@ -9823,7 +10095,7 @@
                 <a:ea typeface="Calibri" pitchFamily="34" charset="-122"/>
                 <a:cs typeface="Calibri" pitchFamily="34" charset="-120"/>
               </a:rPr>
-              <a:t>4. ※ SHはTXTエクスポート・</a:t>
+              <a:t>4. ※ TXTエクスポートなし</a:t>
             </a:r>
             <a:endParaRPr lang="en-US" sz="750" dirty="0"/>
           </a:p>
@@ -9840,7 +10112,41 @@
                 <a:ea typeface="Calibri" pitchFamily="34" charset="-122"/>
                 <a:cs typeface="Calibri" pitchFamily="34" charset="-120"/>
               </a:rPr>
-              <a:t>BOX-PC送信なし</a:t>
+              <a:t>※ BOX-PC送信なし</a:t>
+            </a:r>
+            <a:endParaRPr lang="en-US" sz="750" dirty="0"/>
+          </a:p>
+          <a:p>
+            <a:pPr indent="0" marL="0">
+              <a:buNone/>
+            </a:pPr>
+            <a:r>
+              <a:rPr lang="en-US" sz="750" dirty="0">
+                <a:solidFill>
+                  <a:srgbClr val="222222"/>
+                </a:solidFill>
+                <a:latin typeface="Calibri" pitchFamily="34" charset="0"/>
+                <a:ea typeface="Calibri" pitchFamily="34" charset="-122"/>
+                <a:cs typeface="Calibri" pitchFamily="34" charset="-120"/>
+              </a:rPr>
+              <a:t>※ 作成日: 2026-01-13</a:t>
+            </a:r>
+            <a:endParaRPr lang="en-US" sz="750" dirty="0"/>
+          </a:p>
+          <a:p>
+            <a:pPr indent="0" marL="0">
+              <a:buNone/>
+            </a:pPr>
+            <a:r>
+              <a:rPr lang="en-US" sz="750" dirty="0">
+                <a:solidFill>
+                  <a:srgbClr val="222222"/>
+                </a:solidFill>
+                <a:latin typeface="Calibri" pitchFamily="34" charset="0"/>
+                <a:ea typeface="Calibri" pitchFamily="34" charset="-122"/>
+                <a:cs typeface="Calibri" pitchFamily="34" charset="-120"/>
+              </a:rPr>
+              <a:t>  (OC/SGより後に追加)</a:t>
             </a:r>
             <a:endParaRPr lang="en-US" sz="750" dirty="0"/>
           </a:p>
@@ -9879,7 +10185,7 @@
                 <a:ea typeface="Calibri" pitchFamily="34" charset="-122"/>
                 <a:cs typeface="Calibri" pitchFamily="34" charset="-120"/>
               </a:rPr>
-              <a:t>create_date: 2026-01-13</a:t>
+              <a:t>SH は import のみ</a:t>
             </a:r>
             <a:endParaRPr lang="en-US" sz="650" dirty="0"/>
           </a:p>
@@ -9896,7 +10202,24 @@
                 <a:ea typeface="Calibri" pitchFamily="34" charset="-122"/>
                 <a:cs typeface="Calibri" pitchFamily="34" charset="-120"/>
               </a:rPr>
-              <a:t>(OC/SGより後に追加されたSM)</a:t>
+              <a:t>ECS不使用 / SQS不使用</a:t>
+            </a:r>
+            <a:endParaRPr lang="en-US" sz="650" dirty="0"/>
+          </a:p>
+          <a:p>
+            <a:pPr indent="0" marL="0">
+              <a:buNone/>
+            </a:pPr>
+            <a:r>
+              <a:rPr lang="en-US" sz="650" dirty="0">
+                <a:solidFill>
+                  <a:srgbClr val="555555"/>
+                </a:solidFill>
+                <a:latin typeface="Calibri" pitchFamily="34" charset="0"/>
+                <a:ea typeface="Calibri" pitchFamily="34" charset="-122"/>
+                <a:cs typeface="Calibri" pitchFamily="34" charset="-120"/>
+              </a:rPr>
+              <a:t>store_codeなし（全店舗共通）</a:t>
             </a:r>
             <a:endParaRPr lang="en-US" sz="650" dirty="0"/>
           </a:p>
@@ -9960,24 +10283,7 @@
                 <a:ea typeface="Calibri" pitchFamily="34" charset="-122"/>
                 <a:cs typeface="Calibri" pitchFamily="34" charset="-120"/>
               </a:rPr>
-              <a:t>DB: Replica_Kasumi</a:t>
-            </a:r>
-            <a:endParaRPr lang="en-US" sz="750" dirty="0"/>
-          </a:p>
-          <a:p>
-            <a:pPr indent="0" marL="0">
-              <a:buNone/>
-            </a:pPr>
-            <a:r>
-              <a:rPr lang="en-US" sz="750" dirty="0">
-                <a:solidFill>
-                  <a:srgbClr val="FFFFFF"/>
-                </a:solidFill>
-                <a:latin typeface="Calibri" pitchFamily="34" charset="0"/>
-                <a:ea typeface="Calibri" pitchFamily="34" charset="-122"/>
-                <a:cs typeface="Calibri" pitchFamily="34" charset="-120"/>
-              </a:rPr>
-              <a:t>・41_P001</a:t>
+              <a:t>DB: Replica_Kasumi: 41_P001</a:t>
             </a:r>
             <a:endParaRPr lang="en-US" sz="750" dirty="0"/>
           </a:p>

--- a/40_AWS/01_構成資料/カスミPOS_AWS構成資料.pptx
+++ b/40_AWS/01_構成資料/カスミPOS_AWS構成資料.pptx
@@ -16,6 +16,7 @@
     <p:sldId id="264" r:id="rId10"/>
     <p:sldId id="265" r:id="rId11"/>
     <p:sldId id="266" r:id="rId12"/>
+    <p:sldId id="270" r:id="rId21"/>
     <p:sldId id="267" r:id="rId13"/>
     <p:sldId id="268" r:id="rId14"/>
     <p:sldId id="269" r:id="rId15"/>
@@ -2034,7 +2035,7 @@
       </p:grpSpPr>
       <p:pic>
         <p:nvPicPr>
-          <p:cNvPr id="2" name="Image 0" descr="/mnt/skills/user/luvina-ppt/assets/decoration_dots.png">    </p:cNvPr>
+          <p:cNvPr id="2" name="Image 0" descr="/mnt/skills/user/luvina-ppt/assets/decoration_dots.png"/>
           <p:cNvPicPr>
             <a:picLocks noChangeAspect="1"/>
           </p:cNvPicPr>
@@ -2058,7 +2059,7 @@
       </p:pic>
       <p:pic>
         <p:nvPicPr>
-          <p:cNvPr id="3" name="Image 1" descr="/mnt/skills/user/luvina-ppt/assets/luvina_badge.png">    </p:cNvPr>
+          <p:cNvPr id="3" name="Image 1" descr="/mnt/skills/user/luvina-ppt/assets/luvina_badge.png"/>
           <p:cNvPicPr>
             <a:picLocks noChangeAspect="1"/>
           </p:cNvPicPr>
@@ -2121,7 +2122,7 @@
       </p:sp>
       <p:pic>
         <p:nvPicPr>
-          <p:cNvPr id="5" name="Image 2" descr="/mnt/skills/user/luvina-ppt/assets/luvina_logo.png">    </p:cNvPr>
+          <p:cNvPr id="5" name="Image 2" descr="/mnt/skills/user/luvina-ppt/assets/luvina_logo.png"/>
           <p:cNvPicPr>
             <a:picLocks noChangeAspect="1"/>
           </p:cNvPicPr>
@@ -2490,7 +2491,7 @@
       </p:grpSpPr>
       <p:pic>
         <p:nvPicPr>
-          <p:cNvPr id="2" name="Image 0" descr="/mnt/skills/user/luvina-ppt/assets/decoration_dots.png">    </p:cNvPr>
+          <p:cNvPr id="2" name="Image 0" descr="/mnt/skills/user/luvina-ppt/assets/decoration_dots.png"/>
           <p:cNvPicPr>
             <a:picLocks noChangeAspect="1"/>
           </p:cNvPicPr>
@@ -2514,7 +2515,7 @@
       </p:pic>
       <p:pic>
         <p:nvPicPr>
-          <p:cNvPr id="3" name="Image 1" descr="/mnt/skills/user/luvina-ppt/assets/luvina_badge.png">    </p:cNvPr>
+          <p:cNvPr id="3" name="Image 1" descr="/mnt/skills/user/luvina-ppt/assets/luvina_badge.png"/>
           <p:cNvPicPr>
             <a:picLocks noChangeAspect="1"/>
           </p:cNvPicPr>
@@ -2577,7 +2578,7 @@
       </p:sp>
       <p:pic>
         <p:nvPicPr>
-          <p:cNvPr id="5" name="Image 2" descr="/mnt/skills/user/luvina-ppt/assets/luvina_logo.png">    </p:cNvPr>
+          <p:cNvPr id="5" name="Image 2" descr="/mnt/skills/user/luvina-ppt/assets/luvina_logo.png"/>
           <p:cNvPicPr>
             <a:picLocks noChangeAspect="1"/>
           </p:cNvPicPr>
@@ -6769,7 +6770,7 @@
       </p:grpSpPr>
       <p:pic>
         <p:nvPicPr>
-          <p:cNvPr id="2" name="Image 0" descr="/mnt/skills/user/luvina-ppt/assets/decoration_dots.png">    </p:cNvPr>
+          <p:cNvPr id="2" name="Image 0" descr="/mnt/skills/user/luvina-ppt/assets/decoration_dots.png"/>
           <p:cNvPicPr>
             <a:picLocks noChangeAspect="1"/>
           </p:cNvPicPr>
@@ -6793,7 +6794,7 @@
       </p:pic>
       <p:pic>
         <p:nvPicPr>
-          <p:cNvPr id="3" name="Image 1" descr="/mnt/skills/user/luvina-ppt/assets/luvina_badge.png">    </p:cNvPr>
+          <p:cNvPr id="3" name="Image 1" descr="/mnt/skills/user/luvina-ppt/assets/luvina_badge.png"/>
           <p:cNvPicPr>
             <a:picLocks noChangeAspect="1"/>
           </p:cNvPicPr>
@@ -6856,7 +6857,7 @@
       </p:sp>
       <p:pic>
         <p:nvPicPr>
-          <p:cNvPr id="5" name="Image 2" descr="/mnt/skills/user/luvina-ppt/assets/luvina_logo.png">    </p:cNvPr>
+          <p:cNvPr id="5" name="Image 2" descr="/mnt/skills/user/luvina-ppt/assets/luvina_logo.png"/>
           <p:cNvPicPr>
             <a:picLocks noChangeAspect="1"/>
           </p:cNvPicPr>
@@ -7414,7 +7415,7 @@
                 <a:ea typeface="Calibri" pitchFamily="34" charset="-122"/>
                 <a:cs typeface="Calibri" pitchFamily="34" charset="-120"/>
               </a:rPr>
-              <a:t>  ①backup-file</a:t>
+              <a:t xml:space="preserve">  ①backup-file</a:t>
             </a:r>
             <a:endParaRPr lang="en-US" sz="750" dirty="0"/>
           </a:p>
@@ -7431,7 +7432,7 @@
                 <a:ea typeface="Calibri" pitchFamily="34" charset="-122"/>
                 <a:cs typeface="Calibri" pitchFamily="34" charset="-120"/>
               </a:rPr>
-              <a:t>  ②Map: create-file-end(.ENDIMPORT生成)</a:t>
+              <a:t xml:space="preserve">  ②Map: create-file-end(.ENDIMPORT生成)</a:t>
             </a:r>
             <a:endParaRPr lang="en-US" sz="750" dirty="0"/>
           </a:p>
@@ -7563,7 +7564,7 @@
                 <a:ea typeface="Calibri" pitchFamily="34" charset="-122"/>
                 <a:cs typeface="Calibri" pitchFamily="34" charset="-120"/>
               </a:rPr>
-              <a:t>       S3DownloadException</a:t>
+              <a:t xml:space="preserve">       S3DownloadException</a:t>
             </a:r>
             <a:endParaRPr lang="en-US" sz="750" dirty="0"/>
           </a:p>
@@ -8582,7 +8583,7 @@
                 <a:ea typeface="Calibri" pitchFamily="34" charset="-122"/>
                 <a:cs typeface="Calibri" pitchFamily="34" charset="-120"/>
               </a:rPr>
-              <a:t>  ①backup-file(エラー→SQS del)</a:t>
+              <a:t xml:space="preserve">  ①backup-file(エラー→SQS del)</a:t>
             </a:r>
             <a:endParaRPr lang="en-US" sz="750" dirty="0"/>
           </a:p>
@@ -8599,7 +8600,7 @@
                 <a:ea typeface="Calibri" pitchFamily="34" charset="-122"/>
                 <a:cs typeface="Calibri" pitchFamily="34" charset="-120"/>
               </a:rPr>
-              <a:t>  ②Map: sg-import-data:$LATEST</a:t>
+              <a:t xml:space="preserve">  ②Map: sg-import-data:$LATEST</a:t>
             </a:r>
             <a:endParaRPr lang="en-US" sz="750" dirty="0"/>
           </a:p>
@@ -8616,7 +8617,7 @@
                 <a:ea typeface="Calibri" pitchFamily="34" charset="-122"/>
                 <a:cs typeface="Calibri" pitchFamily="34" charset="-120"/>
               </a:rPr>
-              <a:t>    (エラー→SQS del)</a:t>
+              <a:t xml:space="preserve">    (エラー→SQS del)</a:t>
             </a:r>
             <a:endParaRPr lang="en-US" sz="750" dirty="0"/>
           </a:p>
@@ -8697,7 +8698,7 @@
                 <a:ea typeface="Calibri" pitchFamily="34" charset="-122"/>
                 <a:cs typeface="Calibri" pitchFamily="34" charset="-120"/>
               </a:rPr>
-              <a:t>  11_ItemMaster</a:t>
+              <a:t xml:space="preserve">  11_ItemMaster</a:t>
             </a:r>
             <a:endParaRPr lang="en-US" sz="750" dirty="0"/>
           </a:p>
@@ -8714,7 +8715,7 @@
                 <a:ea typeface="Calibri" pitchFamily="34" charset="-122"/>
                 <a:cs typeface="Calibri" pitchFamily="34" charset="-120"/>
               </a:rPr>
-              <a:t>  13_SpecialPriceMaster</a:t>
+              <a:t xml:space="preserve">  13_SpecialPriceMaster</a:t>
             </a:r>
             <a:endParaRPr lang="en-US" sz="750" dirty="0"/>
           </a:p>
@@ -8731,7 +8732,7 @@
                 <a:ea typeface="Calibri" pitchFamily="34" charset="-122"/>
                 <a:cs typeface="Calibri" pitchFamily="34" charset="-120"/>
               </a:rPr>
-              <a:t>  16_ForcePriceMaster</a:t>
+              <a:t xml:space="preserve">  16_ForcePriceMaster</a:t>
             </a:r>
             <a:endParaRPr lang="en-US" sz="750" dirty="0"/>
           </a:p>
@@ -8897,7 +8898,7 @@
                 <a:ea typeface="Calibri" pitchFamily="34" charset="-122"/>
                 <a:cs typeface="Calibri" pitchFamily="34" charset="-120"/>
               </a:rPr>
-              <a:t>  ★OCと別クラスター★</a:t>
+              <a:t xml:space="preserve">  ★OCと別クラスター★</a:t>
             </a:r>
             <a:endParaRPr lang="en-US" sz="750" dirty="0"/>
           </a:p>
@@ -9012,7 +9013,7 @@
                 <a:ea typeface="Calibri" pitchFamily="34" charset="-122"/>
                 <a:cs typeface="Calibri" pitchFamily="34" charset="-120"/>
               </a:rPr>
-              <a:t>         DB_KASUMI=prd/Replica_Kasumi</a:t>
+              <a:t xml:space="preserve">         DB_KASUMI=prd/Replica_Kasumi</a:t>
             </a:r>
             <a:endParaRPr lang="en-US" sz="750" dirty="0"/>
           </a:p>
@@ -9767,7 +9768,7 @@
                 <a:ea typeface="Calibri" pitchFamily="34" charset="-122"/>
                 <a:cs typeface="Calibri" pitchFamily="34" charset="-120"/>
               </a:rPr>
-              <a:t>  ★他は lmd-function-xxx★</a:t>
+              <a:t xml:space="preserve">  ★他は lmd-function-xxx★</a:t>
             </a:r>
             <a:endParaRPr lang="en-US" sz="750" dirty="0"/>
           </a:p>
@@ -9784,7 +9785,7 @@
                 <a:ea typeface="Calibri" pitchFamily="34" charset="-122"/>
                 <a:cs typeface="Calibri" pitchFamily="34" charset="-120"/>
               </a:rPr>
-              <a:t>  ★store_code = 'None'(固定)★</a:t>
+              <a:t xml:space="preserve">  ★store_code = 'None'(固定)★</a:t>
             </a:r>
             <a:endParaRPr lang="en-US" sz="750" dirty="0"/>
           </a:p>
@@ -9801,7 +9802,7 @@
                 <a:ea typeface="Calibri" pitchFamily="34" charset="-122"/>
                 <a:cs typeface="Calibri" pitchFamily="34" charset="-120"/>
               </a:rPr>
-              <a:t>  table_name: path[3]</a:t>
+              <a:t xml:space="preserve">  table_name: path[3]</a:t>
             </a:r>
             <a:endParaRPr lang="en-US" sz="750" dirty="0"/>
           </a:p>
@@ -9882,7 +9883,7 @@
                 <a:ea typeface="Calibri" pitchFamily="34" charset="-122"/>
                 <a:cs typeface="Calibri" pitchFamily="34" charset="-120"/>
               </a:rPr>
-              <a:t>       S3DownloadException</a:t>
+              <a:t xml:space="preserve">       S3DownloadException</a:t>
             </a:r>
             <a:endParaRPr lang="en-US" sz="750" dirty="0"/>
           </a:p>
@@ -9899,7 +9900,7 @@
                 <a:ea typeface="Calibri" pitchFamily="34" charset="-122"/>
                 <a:cs typeface="Calibri" pitchFamily="34" charset="-120"/>
               </a:rPr>
-              <a:t>       States.ALL</a:t>
+              <a:t xml:space="preserve">       States.ALL</a:t>
             </a:r>
             <a:endParaRPr lang="en-US" sz="750" dirty="0"/>
           </a:p>
@@ -9933,7 +9934,7 @@
                 <a:ea typeface="Calibri" pitchFamily="34" charset="-122"/>
                 <a:cs typeface="Calibri" pitchFamily="34" charset="-120"/>
               </a:rPr>
-              <a:t>  INSERT/UPDATE</a:t>
+              <a:t xml:space="preserve">  INSERT/UPDATE</a:t>
             </a:r>
             <a:endParaRPr lang="en-US" sz="750" dirty="0"/>
           </a:p>
@@ -10146,7 +10147,7 @@
                 <a:ea typeface="Calibri" pitchFamily="34" charset="-122"/>
                 <a:cs typeface="Calibri" pitchFamily="34" charset="-120"/>
               </a:rPr>
-              <a:t>  (OC/SGより後に追加)</a:t>
+              <a:t xml:space="preserve">  (OC/SGより後に追加)</a:t>
             </a:r>
             <a:endParaRPr lang="en-US" sz="750" dirty="0"/>
           </a:p>
@@ -10426,7 +10427,7 @@
       </p:grpSpPr>
       <p:pic>
         <p:nvPicPr>
-          <p:cNvPr id="2" name="Image 0" descr="/mnt/skills/user/luvina-ppt/assets/decoration_dots.png">    </p:cNvPr>
+          <p:cNvPr id="2" name="Image 0" descr="/mnt/skills/user/luvina-ppt/assets/decoration_dots.png"/>
           <p:cNvPicPr>
             <a:picLocks noChangeAspect="1"/>
           </p:cNvPicPr>
@@ -10450,7 +10451,7 @@
       </p:pic>
       <p:pic>
         <p:nvPicPr>
-          <p:cNvPr id="3" name="Image 1" descr="/mnt/skills/user/luvina-ppt/assets/luvina_badge.png">    </p:cNvPr>
+          <p:cNvPr id="3" name="Image 1" descr="/mnt/skills/user/luvina-ppt/assets/luvina_badge.png"/>
           <p:cNvPicPr>
             <a:picLocks noChangeAspect="1"/>
           </p:cNvPicPr>
@@ -10513,7 +10514,7 @@
       </p:sp>
       <p:pic>
         <p:nvPicPr>
-          <p:cNvPr id="5" name="Image 2" descr="/mnt/skills/user/luvina-ppt/assets/luvina_logo.png">    </p:cNvPr>
+          <p:cNvPr id="5" name="Image 2" descr="/mnt/skills/user/luvina-ppt/assets/luvina_logo.png"/>
           <p:cNvPicPr>
             <a:picLocks noChangeAspect="1"/>
           </p:cNvPicPr>
@@ -12339,7 +12340,7 @@
       </p:grpSpPr>
       <p:pic>
         <p:nvPicPr>
-          <p:cNvPr id="2" name="Image 0" descr="/mnt/skills/user/luvina-ppt/assets/decoration_dots.png">    </p:cNvPr>
+          <p:cNvPr id="2" name="Image 0" descr="/mnt/skills/user/luvina-ppt/assets/decoration_dots.png"/>
           <p:cNvPicPr>
             <a:picLocks noChangeAspect="1"/>
           </p:cNvPicPr>
@@ -12363,7 +12364,7 @@
       </p:pic>
       <p:pic>
         <p:nvPicPr>
-          <p:cNvPr id="3" name="Image 1" descr="/mnt/skills/user/luvina-ppt/assets/luvina_badge.png">    </p:cNvPr>
+          <p:cNvPr id="3" name="Image 1" descr="/mnt/skills/user/luvina-ppt/assets/luvina_badge.png"/>
           <p:cNvPicPr>
             <a:picLocks noChangeAspect="1"/>
           </p:cNvPicPr>
@@ -12426,7 +12427,7 @@
       </p:sp>
       <p:pic>
         <p:nvPicPr>
-          <p:cNvPr id="5" name="Image 2" descr="/mnt/skills/user/luvina-ppt/assets/luvina_logo.png">    </p:cNvPr>
+          <p:cNvPr id="5" name="Image 2" descr="/mnt/skills/user/luvina-ppt/assets/luvina_logo.png"/>
           <p:cNvPicPr>
             <a:picLocks noChangeAspect="1"/>
           </p:cNvPicPr>
@@ -15587,7 +15588,7 @@
       </p:grpSpPr>
       <p:pic>
         <p:nvPicPr>
-          <p:cNvPr id="2" name="Image 0" descr="/mnt/skills/user/luvina-ppt/assets/decoration_dots.png">    </p:cNvPr>
+          <p:cNvPr id="2" name="Image 0" descr="/mnt/skills/user/luvina-ppt/assets/decoration_dots.png"/>
           <p:cNvPicPr>
             <a:picLocks noChangeAspect="1"/>
           </p:cNvPicPr>
@@ -15611,7 +15612,7 @@
       </p:pic>
       <p:pic>
         <p:nvPicPr>
-          <p:cNvPr id="3" name="Image 1" descr="/mnt/skills/user/luvina-ppt/assets/luvina_badge.png">    </p:cNvPr>
+          <p:cNvPr id="3" name="Image 1" descr="/mnt/skills/user/luvina-ppt/assets/luvina_badge.png"/>
           <p:cNvPicPr>
             <a:picLocks noChangeAspect="1"/>
           </p:cNvPicPr>
@@ -15674,7 +15675,7 @@
       </p:sp>
       <p:pic>
         <p:nvPicPr>
-          <p:cNvPr id="5" name="Image 2" descr="/mnt/skills/user/luvina-ppt/assets/luvina_logo.png">    </p:cNvPr>
+          <p:cNvPr id="5" name="Image 2" descr="/mnt/skills/user/luvina-ppt/assets/luvina_logo.png"/>
           <p:cNvPicPr>
             <a:picLocks noChangeAspect="1"/>
           </p:cNvPicPr>
@@ -20295,9 +20296,9 @@
 </p:sld>
 </file>
 
-<file path=ppt/slides/slide2.xml><?xml version="1.0" encoding="utf-8"?>
+<file path=ppt/slides/slide15.xml><?xml version="1.0" encoding="utf-8"?>
 <p:sld xmlns:a="http://schemas.openxmlformats.org/drawingml/2006/main" xmlns:r="http://schemas.openxmlformats.org/officeDocument/2006/relationships" xmlns:p="http://schemas.openxmlformats.org/presentationml/2006/main">
-  <p:cSld name="Slide 2">
+  <p:cSld name="Slide 9">
     <p:bg>
       <p:bgPr>
         <a:solidFill>
@@ -20321,7 +20322,7 @@
       </p:grpSpPr>
       <p:pic>
         <p:nvPicPr>
-          <p:cNvPr id="2" name="Image 0" descr="/mnt/skills/user/luvina-ppt/assets/decoration_dots.png">    </p:cNvPr>
+          <p:cNvPr id="2" name="Image 0" descr="/mnt/skills/user/luvina-ppt/assets/decoration_dots.png"/>
           <p:cNvPicPr>
             <a:picLocks noChangeAspect="1"/>
           </p:cNvPicPr>
@@ -20345,7 +20346,7 @@
       </p:pic>
       <p:pic>
         <p:nvPicPr>
-          <p:cNvPr id="3" name="Image 1" descr="/mnt/skills/user/luvina-ppt/assets/luvina_badge.png">    </p:cNvPr>
+          <p:cNvPr id="3" name="Image 1" descr="/mnt/skills/user/luvina-ppt/assets/luvina_badge.png"/>
           <p:cNvPicPr>
             <a:picLocks noChangeAspect="1"/>
           </p:cNvPicPr>
@@ -20408,7 +20409,5677 @@
       </p:sp>
       <p:pic>
         <p:nvPicPr>
-          <p:cNvPr id="5" name="Image 2" descr="/mnt/skills/user/luvina-ppt/assets/luvina_logo.png">    </p:cNvPr>
+          <p:cNvPr id="5" name="Image 2" descr="/mnt/skills/user/luvina-ppt/assets/luvina_logo.png"/>
+          <p:cNvPicPr>
+            <a:picLocks noChangeAspect="1"/>
+          </p:cNvPicPr>
+          <p:nvPr/>
+        </p:nvPicPr>
+        <p:blipFill>
+          <a:blip r:embed="rId3"/>
+          <a:stretch>
+            <a:fillRect/>
+          </a:stretch>
+        </p:blipFill>
+        <p:spPr>
+          <a:xfrm>
+            <a:off x="8924544" y="109728"/>
+            <a:ext cx="932688" cy="466344"/>
+          </a:xfrm>
+          <a:prstGeom prst="rect">
+            <a:avLst/>
+          </a:prstGeom>
+        </p:spPr>
+      </p:pic>
+      <p:sp>
+        <p:nvSpPr>
+          <p:cNvPr id="6" name="Shape 1"/>
+          <p:cNvSpPr/>
+          <p:nvPr/>
+        </p:nvSpPr>
+        <p:spPr>
+          <a:xfrm>
+            <a:off x="0" y="640080"/>
+            <a:ext cx="9902952" cy="548640"/>
+          </a:xfrm>
+          <a:prstGeom prst="rect">
+            <a:avLst/>
+          </a:prstGeom>
+          <a:solidFill>
+            <a:srgbClr val="D0232A"/>
+          </a:solidFill>
+          <a:ln/>
+        </p:spPr>
+      </p:sp>
+      <p:sp>
+        <p:nvSpPr>
+          <p:cNvPr id="7" name="Text 2"/>
+          <p:cNvSpPr/>
+          <p:nvPr/>
+        </p:nvSpPr>
+        <p:spPr>
+          <a:xfrm>
+            <a:off x="301752" y="786384"/>
+            <a:ext cx="9144000" cy="356616"/>
+          </a:xfrm>
+          <a:prstGeom prst="rect">
+            <a:avLst/>
+          </a:prstGeom>
+          <a:noFill/>
+          <a:ln/>
+        </p:spPr>
+        <p:txBody>
+          <a:bodyPr wrap="square" lIns="0" tIns="0" rIns="0" bIns="0" rtlCol="0" anchor="ctr"/>
+          <a:lstStyle/>
+          <a:p>
+            <a:pPr indent="0" marL="0">
+              <a:buNone/>
+            </a:pPr>
+            <a:r>
+              <a:rPr lang="en-US" sz="2000" b="1" dirty="0">
+                <a:solidFill>
+                  <a:srgbClr val="FFFFFF"/>
+                </a:solidFill>
+                <a:latin typeface="Calibri" pitchFamily="34" charset="0"/>
+                <a:ea typeface="Calibri" pitchFamily="34" charset="-122"/>
+                <a:cs typeface="Calibri" pitchFamily="34" charset="-120"/>
+              </a:rPr>
+              <a:t>11. OC取込定義 — GHマスタ取込テーブル一覧</a:t>
+            </a:r>
+            <a:endParaRPr lang="en-US" sz="2000" dirty="0"/>
+          </a:p>
+        </p:txBody>
+      </p:sp>
+      <p:sp>
+        <p:nvSpPr>
+          <p:cNvPr id="8" name="Text 3"/>
+          <p:cNvSpPr/>
+          <p:nvPr/>
+        </p:nvSpPr>
+        <p:spPr>
+          <a:xfrm>
+            <a:off x="493776" y="1307592"/>
+            <a:ext cx="8915400" cy="173736"/>
+          </a:xfrm>
+          <a:prstGeom prst="rect">
+            <a:avLst/>
+          </a:prstGeom>
+          <a:noFill/>
+          <a:ln/>
+        </p:spPr>
+        <p:txBody>
+          <a:bodyPr wrap="square" lIns="0" tIns="0" rIns="0" bIns="0" rtlCol="0" anchor="ctr"/>
+          <a:lstStyle/>
+          <a:p>
+            <a:pPr indent="0" marL="0">
+              <a:buNone/>
+            </a:pPr>
+            <a:r>
+              <a:rPr lang="en-US" sz="1300" dirty="0">
+                <a:solidFill>
+                  <a:srgbClr val="555555"/>
+                </a:solidFill>
+                <a:latin typeface="Calibri" pitchFamily="34" charset="0"/>
+                <a:ea typeface="Calibri" pitchFamily="34" charset="-122"/>
+                <a:cs typeface="Calibri" pitchFamily="34" charset="-120"/>
+              </a:rPr>
+              <a:t>外部連携（BIPROGY/OpenCentral）→ Replica_Kasumi_CHK 取込テーブル（5種類）</a:t>
+            </a:r>
+            <a:endParaRPr lang="en-US" sz="1300" dirty="0"/>
+          </a:p>
+        </p:txBody>
+      </p:sp>
+      <p:sp>
+        <p:nvSpPr>
+          <p:cNvPr id="9" name="Shape 4"/>
+          <p:cNvSpPr/>
+          <p:nvPr/>
+        </p:nvSpPr>
+        <p:spPr>
+          <a:xfrm>
+            <a:off x="0" y="6483096"/>
+            <a:ext cx="9902952" cy="393192"/>
+          </a:xfrm>
+          <a:prstGeom prst="rect">
+            <a:avLst/>
+          </a:prstGeom>
+          <a:solidFill>
+            <a:srgbClr val="D0232A"/>
+          </a:solidFill>
+          <a:ln/>
+        </p:spPr>
+      </p:sp>
+      <p:sp>
+        <p:nvSpPr>
+          <p:cNvPr id="10" name="Text 5"/>
+          <p:cNvSpPr/>
+          <p:nvPr/>
+        </p:nvSpPr>
+        <p:spPr>
+          <a:xfrm>
+            <a:off x="109728" y="6583680"/>
+            <a:ext cx="457200" cy="219456"/>
+          </a:xfrm>
+          <a:prstGeom prst="rect">
+            <a:avLst/>
+          </a:prstGeom>
+          <a:noFill/>
+          <a:ln/>
+        </p:spPr>
+        <p:txBody>
+          <a:bodyPr wrap="square" lIns="0" tIns="0" rIns="0" bIns="0" rtlCol="0" anchor="ctr"/>
+          <a:lstStyle/>
+          <a:p>
+            <a:pPr indent="0" marL="0">
+              <a:buNone/>
+            </a:pPr>
+            <a:r>
+              <a:rPr lang="en-US" sz="1000" dirty="0">
+                <a:solidFill>
+                  <a:srgbClr val="FFFFFF"/>
+                </a:solidFill>
+              </a:rPr>
+              <a:t>12</a:t>
+            </a:r>
+            <a:endParaRPr lang="en-US" sz="1000" dirty="0"/>
+          </a:p>
+        </p:txBody>
+      </p:sp>
+      <p:sp>
+        <p:nvSpPr>
+          <p:cNvPr id="11" name="Text 6"/>
+          <p:cNvSpPr/>
+          <p:nvPr/>
+        </p:nvSpPr>
+        <p:spPr>
+          <a:xfrm>
+            <a:off x="365760" y="1572768"/>
+            <a:ext cx="4389120" cy="256032"/>
+          </a:xfrm>
+          <a:prstGeom prst="rect">
+            <a:avLst/>
+          </a:prstGeom>
+          <a:noFill/>
+          <a:ln/>
+        </p:spPr>
+        <p:txBody>
+          <a:bodyPr wrap="square" lIns="0" tIns="0" rIns="0" bIns="0" rtlCol="0" anchor="ctr"/>
+          <a:lstStyle/>
+          <a:p>
+            <a:pPr indent="0" marL="0">
+              <a:buNone/>
+            </a:pPr>
+            <a:r>
+              <a:rPr lang="en-US" sz="1200" b="1" dirty="0">
+                <a:solidFill>
+                  <a:srgbClr val="D0232A"/>
+                </a:solidFill>
+                <a:latin typeface="Calibri" pitchFamily="34" charset="0"/>
+                <a:ea typeface="Calibri" pitchFamily="34" charset="-122"/>
+                <a:cs typeface="Calibri" pitchFamily="34" charset="-120"/>
+              </a:rPr>
+              <a:t>GH取込テーブル一覧（取込順）</a:t>
+            </a:r>
+            <a:endParaRPr lang="en-US" sz="1200" dirty="0"/>
+          </a:p>
+        </p:txBody>
+      </p:sp>
+      <p:graphicFrame>
+        <p:nvGraphicFramePr>
+          <p:cNvPr id="10" name="Table 0"/>
+          <p:cNvGraphicFramePr>
+            <a:graphicFrameLocks noGrp="1"/>
+          </p:cNvGraphicFramePr>
+          <p:nvPr>
+            <p:extLst>
+              <p:ext uri="{D42A27DB-BD31-4B8C-83A1-F6EECF244321}">
+                <p14:modId xmlns:p14="http://schemas.microsoft.com/office/powerpoint/2010/main" val="1579011935"/>
+              </p:ext>
+            </p:extLst>
+          </p:nvPr>
+        </p:nvGraphicFramePr>
+        <p:xfrm>
+          <a:off x="365760" y="1847088"/>
+          <a:ext cx="4389120" cy="914400"/>
+        </p:xfrm>
+        <a:graphic>
+          <a:graphicData uri="http://schemas.openxmlformats.org/drawingml/2006/table">
+            <a:tbl>
+              <a:tblPr/>
+              <a:tblGrid>
+                <a:gridCol w="2011680"/>
+                <a:gridCol w="2377440"/>
+              </a:tblGrid>
+              <a:tr h="310896">
+                <a:tc>
+                  <a:txBody>
+                    <a:bodyPr/>
+                    <a:lstStyle/>
+                    <a:p>
+                      <a:pPr indent="0" marL="0">
+                        <a:buNone/>
+                      </a:pPr>
+                      <a:r>
+                        <a:rPr lang="en-US" sz="900" b="1" dirty="0">
+                          <a:solidFill>
+                            <a:srgbClr val="FFFFFF"/>
+                          </a:solidFill>
+                          <a:latin typeface="Calibri" pitchFamily="34" charset="0"/>
+                          <a:ea typeface="Calibri" pitchFamily="34" charset="-122"/>
+                          <a:cs typeface="Calibri" pitchFamily="34" charset="-120"/>
+                        </a:rPr>
+                        <a:t>テーブル名</a:t>
+                      </a:r>
+                      <a:endParaRPr lang="en-US" sz="900" dirty="0">
+                        <a:latin typeface="Calibri" charset="0"/>
+                        <a:ea typeface="Calibri" charset="0"/>
+                        <a:cs typeface="Calibri" charset="0"/>
+                      </a:endParaRPr>
+                    </a:p>
+                  </a:txBody>
+                  <a:tcPr marL="91440" marR="91440" marT="45720" marB="45720">
+                    <a:lnL w="6350" cap="flat" cmpd="sng" algn="ctr">
+                      <a:solidFill>
+                        <a:srgbClr val="CCCCCC"/>
+                      </a:solidFill>
+                      <a:prstDash val="solid"/>
+                      <a:round/>
+                      <a:headEnd type="none" w="med" len="med"/>
+                      <a:tailEnd type="none" w="med" len="med"/>
+                    </a:lnL>
+                    <a:lnR w="6350" cap="flat" cmpd="sng" algn="ctr">
+                      <a:solidFill>
+                        <a:srgbClr val="CCCCCC"/>
+                      </a:solidFill>
+                      <a:prstDash val="solid"/>
+                      <a:round/>
+                      <a:headEnd type="none" w="med" len="med"/>
+                      <a:tailEnd type="none" w="med" len="med"/>
+                    </a:lnR>
+                    <a:lnT w="6350" cap="flat" cmpd="sng" algn="ctr">
+                      <a:solidFill>
+                        <a:srgbClr val="CCCCCC"/>
+                      </a:solidFill>
+                      <a:prstDash val="solid"/>
+                      <a:round/>
+                      <a:headEnd type="none" w="med" len="med"/>
+                      <a:tailEnd type="none" w="med" len="med"/>
+                    </a:lnT>
+                    <a:lnB w="6350" cap="flat" cmpd="sng" algn="ctr">
+                      <a:solidFill>
+                        <a:srgbClr val="CCCCCC"/>
+                      </a:solidFill>
+                      <a:prstDash val="solid"/>
+                      <a:round/>
+                      <a:headEnd type="none" w="med" len="med"/>
+                      <a:tailEnd type="none" w="med" len="med"/>
+                    </a:lnB>
+                    <a:solidFill>
+                      <a:srgbClr val="D0232A"/>
+                    </a:solidFill>
+                  </a:tcPr>
+                </a:tc>
+                <a:tc>
+                  <a:txBody>
+                    <a:bodyPr/>
+                    <a:lstStyle/>
+                    <a:p>
+                      <a:pPr indent="0" marL="0">
+                        <a:buNone/>
+                      </a:pPr>
+                      <a:r>
+                        <a:rPr lang="en-US" sz="900" b="1" dirty="0">
+                          <a:solidFill>
+                            <a:srgbClr val="FFFFFF"/>
+                          </a:solidFill>
+                          <a:latin typeface="Calibri" pitchFamily="34" charset="0"/>
+                          <a:ea typeface="Calibri" pitchFamily="34" charset="-122"/>
+                          <a:cs typeface="Calibri" pitchFamily="34" charset="-120"/>
+                        </a:rPr>
+                        <a:t>内容・主キー</a:t>
+                      </a:r>
+                      <a:endParaRPr lang="en-US" sz="900" dirty="0">
+                        <a:latin typeface="Calibri" charset="0"/>
+                        <a:ea typeface="Calibri" charset="0"/>
+                        <a:cs typeface="Calibri" charset="0"/>
+                      </a:endParaRPr>
+                    </a:p>
+                  </a:txBody>
+                  <a:tcPr marL="91440" marR="91440" marT="45720" marB="45720">
+                    <a:lnL w="6350" cap="flat" cmpd="sng" algn="ctr">
+                      <a:solidFill>
+                        <a:srgbClr val="CCCCCC"/>
+                      </a:solidFill>
+                      <a:prstDash val="solid"/>
+                      <a:round/>
+                      <a:headEnd type="none" w="med" len="med"/>
+                      <a:tailEnd type="none" w="med" len="med"/>
+                    </a:lnL>
+                    <a:lnR w="6350" cap="flat" cmpd="sng" algn="ctr">
+                      <a:solidFill>
+                        <a:srgbClr val="CCCCCC"/>
+                      </a:solidFill>
+                      <a:prstDash val="solid"/>
+                      <a:round/>
+                      <a:headEnd type="none" w="med" len="med"/>
+                      <a:tailEnd type="none" w="med" len="med"/>
+                    </a:lnR>
+                    <a:lnT w="6350" cap="flat" cmpd="sng" algn="ctr">
+                      <a:solidFill>
+                        <a:srgbClr val="CCCCCC"/>
+                      </a:solidFill>
+                      <a:prstDash val="solid"/>
+                      <a:round/>
+                      <a:headEnd type="none" w="med" len="med"/>
+                      <a:tailEnd type="none" w="med" len="med"/>
+                    </a:lnT>
+                    <a:lnB w="6350" cap="flat" cmpd="sng" algn="ctr">
+                      <a:solidFill>
+                        <a:srgbClr val="CCCCCC"/>
+                      </a:solidFill>
+                      <a:prstDash val="solid"/>
+                      <a:round/>
+                      <a:headEnd type="none" w="med" len="med"/>
+                      <a:tailEnd type="none" w="med" len="med"/>
+                    </a:lnB>
+                    <a:solidFill>
+                      <a:srgbClr val="D0232A"/>
+                    </a:solidFill>
+                  </a:tcPr>
+                </a:tc>
+              </a:tr>
+              <a:tr h="310896">
+                <a:tc>
+                  <a:txBody>
+                    <a:bodyPr/>
+                    <a:lstStyle/>
+                    <a:p>
+                      <a:pPr indent="0" marL="0">
+                        <a:buNone/>
+                      </a:pPr>
+                      <a:r>
+                        <a:rPr lang="en-US" sz="900" dirty="0">
+                          <a:solidFill>
+                            <a:srgbClr val="2D2D2D"/>
+                          </a:solidFill>
+                          <a:latin typeface="Calibri" pitchFamily="34" charset="0"/>
+                          <a:ea typeface="Calibri" pitchFamily="34" charset="-122"/>
+                          <a:cs typeface="Calibri" pitchFamily="34" charset="-120"/>
+                        </a:rPr>
+                        <a:t>01_GHPLUM  ✅実装済み</a:t>
+                      </a:r>
+                      <a:endParaRPr lang="en-US" sz="900" dirty="0">
+                        <a:latin typeface="Calibri" charset="0"/>
+                        <a:ea typeface="Calibri" charset="0"/>
+                        <a:cs typeface="Calibri" charset="0"/>
+                      </a:endParaRPr>
+                    </a:p>
+                  </a:txBody>
+                  <a:tcPr marL="91440" marR="91440" marT="45720" marB="45720">
+                    <a:lnL w="6350" cap="flat" cmpd="sng" algn="ctr">
+                      <a:solidFill>
+                        <a:srgbClr val="CCCCCC"/>
+                      </a:solidFill>
+                      <a:prstDash val="solid"/>
+                      <a:round/>
+                      <a:headEnd type="none" w="med" len="med"/>
+                      <a:tailEnd type="none" w="med" len="med"/>
+                    </a:lnL>
+                    <a:lnR w="6350" cap="flat" cmpd="sng" algn="ctr">
+                      <a:solidFill>
+                        <a:srgbClr val="CCCCCC"/>
+                      </a:solidFill>
+                      <a:prstDash val="solid"/>
+                      <a:round/>
+                      <a:headEnd type="none" w="med" len="med"/>
+                      <a:tailEnd type="none" w="med" len="med"/>
+                    </a:lnR>
+                    <a:lnT w="6350" cap="flat" cmpd="sng" algn="ctr">
+                      <a:solidFill>
+                        <a:srgbClr val="CCCCCC"/>
+                      </a:solidFill>
+                      <a:prstDash val="solid"/>
+                      <a:round/>
+                      <a:headEnd type="none" w="med" len="med"/>
+                      <a:tailEnd type="none" w="med" len="med"/>
+                    </a:lnT>
+                    <a:lnB w="6350" cap="flat" cmpd="sng" algn="ctr">
+                      <a:solidFill>
+                        <a:srgbClr val="CCCCCC"/>
+                      </a:solidFill>
+                      <a:prstDash val="solid"/>
+                      <a:round/>
+                      <a:headEnd type="none" w="med" len="med"/>
+                      <a:tailEnd type="none" w="med" len="med"/>
+                    </a:lnB>
+                    <a:solidFill>
+                      <a:srgbClr val="FFFFFF"/>
+                    </a:solidFill>
+                  </a:tcPr>
+                </a:tc>
+                <a:tc>
+                  <a:txBody>
+                    <a:bodyPr/>
+                    <a:lstStyle/>
+                    <a:p>
+                      <a:pPr indent="0" marL="0">
+                        <a:buNone/>
+                      </a:pPr>
+                      <a:r>
+                        <a:rPr lang="en-US" sz="900" dirty="0">
+                          <a:solidFill>
+                            <a:srgbClr val="2D2D2D"/>
+                          </a:solidFill>
+                          <a:latin typeface="Calibri" pitchFamily="34" charset="0"/>
+                          <a:ea typeface="Calibri" pitchFamily="34" charset="-122"/>
+                          <a:cs typeface="Calibri" pitchFamily="34" charset="-120"/>
+                        </a:rPr>
+                        <a:t>PLU/商品マスタ  PK: STR_ID + SCAN_ID</a:t>
+                      </a:r>
+                      <a:endParaRPr lang="en-US" sz="900" dirty="0">
+                        <a:latin typeface="Calibri" charset="0"/>
+                        <a:ea typeface="Calibri" charset="0"/>
+                        <a:cs typeface="Calibri" charset="0"/>
+                      </a:endParaRPr>
+                    </a:p>
+                  </a:txBody>
+                  <a:tcPr marL="91440" marR="91440" marT="45720" marB="45720">
+                    <a:lnL w="6350" cap="flat" cmpd="sng" algn="ctr">
+                      <a:solidFill>
+                        <a:srgbClr val="CCCCCC"/>
+                      </a:solidFill>
+                      <a:prstDash val="solid"/>
+                      <a:round/>
+                      <a:headEnd type="none" w="med" len="med"/>
+                      <a:tailEnd type="none" w="med" len="med"/>
+                    </a:lnL>
+                    <a:lnR w="6350" cap="flat" cmpd="sng" algn="ctr">
+                      <a:solidFill>
+                        <a:srgbClr val="CCCCCC"/>
+                      </a:solidFill>
+                      <a:prstDash val="solid"/>
+                      <a:round/>
+                      <a:headEnd type="none" w="med" len="med"/>
+                      <a:tailEnd type="none" w="med" len="med"/>
+                    </a:lnR>
+                    <a:lnT w="6350" cap="flat" cmpd="sng" algn="ctr">
+                      <a:solidFill>
+                        <a:srgbClr val="CCCCCC"/>
+                      </a:solidFill>
+                      <a:prstDash val="solid"/>
+                      <a:round/>
+                      <a:headEnd type="none" w="med" len="med"/>
+                      <a:tailEnd type="none" w="med" len="med"/>
+                    </a:lnT>
+                    <a:lnB w="6350" cap="flat" cmpd="sng" algn="ctr">
+                      <a:solidFill>
+                        <a:srgbClr val="CCCCCC"/>
+                      </a:solidFill>
+                      <a:prstDash val="solid"/>
+                      <a:round/>
+                      <a:headEnd type="none" w="med" len="med"/>
+                      <a:tailEnd type="none" w="med" len="med"/>
+                    </a:lnB>
+                    <a:solidFill>
+                      <a:srgbClr val="FFFFFF"/>
+                    </a:solidFill>
+                  </a:tcPr>
+                </a:tc>
+              </a:tr>
+              <a:tr h="310896">
+                <a:tc>
+                  <a:txBody>
+                    <a:bodyPr/>
+                    <a:lstStyle/>
+                    <a:p>
+                      <a:pPr indent="0" marL="0">
+                        <a:buNone/>
+                      </a:pPr>
+                      <a:r>
+                        <a:rPr lang="en-US" sz="900" dirty="0">
+                          <a:solidFill>
+                            <a:srgbClr val="2D2D2D"/>
+                          </a:solidFill>
+                          <a:latin typeface="Calibri" pitchFamily="34" charset="0"/>
+                          <a:ea typeface="Calibri" pitchFamily="34" charset="-122"/>
+                          <a:cs typeface="Calibri" pitchFamily="34" charset="-120"/>
+                        </a:rPr>
+                        <a:t>02_GHDISCOUNTM  【未実装】</a:t>
+                      </a:r>
+                      <a:endParaRPr lang="en-US" sz="900" dirty="0">
+                        <a:latin typeface="Calibri" charset="0"/>
+                        <a:ea typeface="Calibri" charset="0"/>
+                        <a:cs typeface="Calibri" charset="0"/>
+                      </a:endParaRPr>
+                    </a:p>
+                  </a:txBody>
+                  <a:tcPr marL="91440" marR="91440" marT="45720" marB="45720">
+                    <a:lnL w="6350" cap="flat" cmpd="sng" algn="ctr">
+                      <a:solidFill>
+                        <a:srgbClr val="CCCCCC"/>
+                      </a:solidFill>
+                      <a:prstDash val="solid"/>
+                      <a:round/>
+                      <a:headEnd type="none" w="med" len="med"/>
+                      <a:tailEnd type="none" w="med" len="med"/>
+                    </a:lnL>
+                    <a:lnR w="6350" cap="flat" cmpd="sng" algn="ctr">
+                      <a:solidFill>
+                        <a:srgbClr val="CCCCCC"/>
+                      </a:solidFill>
+                      <a:prstDash val="solid"/>
+                      <a:round/>
+                      <a:headEnd type="none" w="med" len="med"/>
+                      <a:tailEnd type="none" w="med" len="med"/>
+                    </a:lnR>
+                    <a:lnT w="6350" cap="flat" cmpd="sng" algn="ctr">
+                      <a:solidFill>
+                        <a:srgbClr val="CCCCCC"/>
+                      </a:solidFill>
+                      <a:prstDash val="solid"/>
+                      <a:round/>
+                      <a:headEnd type="none" w="med" len="med"/>
+                      <a:tailEnd type="none" w="med" len="med"/>
+                    </a:lnT>
+                    <a:lnB w="6350" cap="flat" cmpd="sng" algn="ctr">
+                      <a:solidFill>
+                        <a:srgbClr val="CCCCCC"/>
+                      </a:solidFill>
+                      <a:prstDash val="solid"/>
+                      <a:round/>
+                      <a:headEnd type="none" w="med" len="med"/>
+                      <a:tailEnd type="none" w="med" len="med"/>
+                    </a:lnB>
+                    <a:solidFill>
+                      <a:srgbClr val="F5F5F5"/>
+                    </a:solidFill>
+                  </a:tcPr>
+                </a:tc>
+                <a:tc>
+                  <a:txBody>
+                    <a:bodyPr/>
+                    <a:lstStyle/>
+                    <a:p>
+                      <a:pPr indent="0" marL="0">
+                        <a:buNone/>
+                      </a:pPr>
+                      <a:r>
+                        <a:rPr lang="en-US" sz="900" dirty="0">
+                          <a:solidFill>
+                            <a:srgbClr val="2D2D2D"/>
+                          </a:solidFill>
+                          <a:latin typeface="Calibri" pitchFamily="34" charset="0"/>
+                          <a:ea typeface="Calibri" pitchFamily="34" charset="-122"/>
+                          <a:cs typeface="Calibri" pitchFamily="34" charset="-120"/>
+                        </a:rPr>
+                        <a:t>特売値引マスタ  PK: STR_ID + EVNT_NBR + MBR_FG + PLU_ID</a:t>
+                      </a:r>
+                      <a:endParaRPr lang="en-US" sz="900" dirty="0">
+                        <a:latin typeface="Calibri" charset="0"/>
+                        <a:ea typeface="Calibri" charset="0"/>
+                        <a:cs typeface="Calibri" charset="0"/>
+                      </a:endParaRPr>
+                    </a:p>
+                  </a:txBody>
+                  <a:tcPr marL="91440" marR="91440" marT="45720" marB="45720">
+                    <a:lnL w="6350" cap="flat" cmpd="sng" algn="ctr">
+                      <a:solidFill>
+                        <a:srgbClr val="CCCCCC"/>
+                      </a:solidFill>
+                      <a:prstDash val="solid"/>
+                      <a:round/>
+                      <a:headEnd type="none" w="med" len="med"/>
+                      <a:tailEnd type="none" w="med" len="med"/>
+                    </a:lnL>
+                    <a:lnR w="6350" cap="flat" cmpd="sng" algn="ctr">
+                      <a:solidFill>
+                        <a:srgbClr val="CCCCCC"/>
+                      </a:solidFill>
+                      <a:prstDash val="solid"/>
+                      <a:round/>
+                      <a:headEnd type="none" w="med" len="med"/>
+                      <a:tailEnd type="none" w="med" len="med"/>
+                    </a:lnR>
+                    <a:lnT w="6350" cap="flat" cmpd="sng" algn="ctr">
+                      <a:solidFill>
+                        <a:srgbClr val="CCCCCC"/>
+                      </a:solidFill>
+                      <a:prstDash val="solid"/>
+                      <a:round/>
+                      <a:headEnd type="none" w="med" len="med"/>
+                      <a:tailEnd type="none" w="med" len="med"/>
+                    </a:lnT>
+                    <a:lnB w="6350" cap="flat" cmpd="sng" algn="ctr">
+                      <a:solidFill>
+                        <a:srgbClr val="CCCCCC"/>
+                      </a:solidFill>
+                      <a:prstDash val="solid"/>
+                      <a:round/>
+                      <a:headEnd type="none" w="med" len="med"/>
+                      <a:tailEnd type="none" w="med" len="med"/>
+                    </a:lnB>
+                    <a:solidFill>
+                      <a:srgbClr val="F5F5F5"/>
+                    </a:solidFill>
+                  </a:tcPr>
+                </a:tc>
+              </a:tr>
+              <a:tr h="310896">
+                <a:tc>
+                  <a:txBody>
+                    <a:bodyPr/>
+                    <a:lstStyle/>
+                    <a:p>
+                      <a:pPr indent="0" marL="0">
+                        <a:buNone/>
+                      </a:pPr>
+                      <a:r>
+                        <a:rPr lang="en-US" sz="900" dirty="0">
+                          <a:solidFill>
+                            <a:srgbClr val="2D2D2D"/>
+                          </a:solidFill>
+                          <a:latin typeface="Calibri" pitchFamily="34" charset="0"/>
+                          <a:ea typeface="Calibri" pitchFamily="34" charset="-122"/>
+                          <a:cs typeface="Calibri" pitchFamily="34" charset="-120"/>
+                        </a:rPr>
+                        <a:t>03_GHBUNDLEM  【未実装】</a:t>
+                      </a:r>
+                      <a:endParaRPr lang="en-US" sz="900" dirty="0">
+                        <a:latin typeface="Calibri" charset="0"/>
+                        <a:ea typeface="Calibri" charset="0"/>
+                        <a:cs typeface="Calibri" charset="0"/>
+                      </a:endParaRPr>
+                    </a:p>
+                  </a:txBody>
+                  <a:tcPr marL="91440" marR="91440" marT="45720" marB="45720">
+                    <a:lnL w="6350" cap="flat" cmpd="sng" algn="ctr">
+                      <a:solidFill>
+                        <a:srgbClr val="CCCCCC"/>
+                      </a:solidFill>
+                      <a:prstDash val="solid"/>
+                      <a:round/>
+                      <a:headEnd type="none" w="med" len="med"/>
+                      <a:tailEnd type="none" w="med" len="med"/>
+                    </a:lnL>
+                    <a:lnR w="6350" cap="flat" cmpd="sng" algn="ctr">
+                      <a:solidFill>
+                        <a:srgbClr val="CCCCCC"/>
+                      </a:solidFill>
+                      <a:prstDash val="solid"/>
+                      <a:round/>
+                      <a:headEnd type="none" w="med" len="med"/>
+                      <a:tailEnd type="none" w="med" len="med"/>
+                    </a:lnR>
+                    <a:lnT w="6350" cap="flat" cmpd="sng" algn="ctr">
+                      <a:solidFill>
+                        <a:srgbClr val="CCCCCC"/>
+                      </a:solidFill>
+                      <a:prstDash val="solid"/>
+                      <a:round/>
+                      <a:headEnd type="none" w="med" len="med"/>
+                      <a:tailEnd type="none" w="med" len="med"/>
+                    </a:lnT>
+                    <a:lnB w="6350" cap="flat" cmpd="sng" algn="ctr">
+                      <a:solidFill>
+                        <a:srgbClr val="CCCCCC"/>
+                      </a:solidFill>
+                      <a:prstDash val="solid"/>
+                      <a:round/>
+                      <a:headEnd type="none" w="med" len="med"/>
+                      <a:tailEnd type="none" w="med" len="med"/>
+                    </a:lnB>
+                    <a:solidFill>
+                      <a:srgbClr val="FFFFFF"/>
+                    </a:solidFill>
+                  </a:tcPr>
+                </a:tc>
+                <a:tc>
+                  <a:txBody>
+                    <a:bodyPr/>
+                    <a:lstStyle/>
+                    <a:p>
+                      <a:pPr indent="0" marL="0">
+                        <a:buNone/>
+                      </a:pPr>
+                      <a:r>
+                        <a:rPr lang="en-US" sz="900" dirty="0">
+                          <a:solidFill>
+                            <a:srgbClr val="2D2D2D"/>
+                          </a:solidFill>
+                          <a:latin typeface="Calibri" pitchFamily="34" charset="0"/>
+                          <a:ea typeface="Calibri" pitchFamily="34" charset="-122"/>
+                          <a:cs typeface="Calibri" pitchFamily="34" charset="-120"/>
+                        </a:rPr>
+                        <a:t>組合せ(M&amp;M)マスタ  PK: STR_ID + EVNT_NBR + PLU_ID</a:t>
+                      </a:r>
+                      <a:endParaRPr lang="en-US" sz="900" dirty="0">
+                        <a:latin typeface="Calibri" charset="0"/>
+                        <a:ea typeface="Calibri" charset="0"/>
+                        <a:cs typeface="Calibri" charset="0"/>
+                      </a:endParaRPr>
+                    </a:p>
+                  </a:txBody>
+                  <a:tcPr marL="91440" marR="91440" marT="45720" marB="45720">
+                    <a:lnL w="6350" cap="flat" cmpd="sng" algn="ctr">
+                      <a:solidFill>
+                        <a:srgbClr val="CCCCCC"/>
+                      </a:solidFill>
+                      <a:prstDash val="solid"/>
+                      <a:round/>
+                      <a:headEnd type="none" w="med" len="med"/>
+                      <a:tailEnd type="none" w="med" len="med"/>
+                    </a:lnL>
+                    <a:lnR w="6350" cap="flat" cmpd="sng" algn="ctr">
+                      <a:solidFill>
+                        <a:srgbClr val="CCCCCC"/>
+                      </a:solidFill>
+                      <a:prstDash val="solid"/>
+                      <a:round/>
+                      <a:headEnd type="none" w="med" len="med"/>
+                      <a:tailEnd type="none" w="med" len="med"/>
+                    </a:lnR>
+                    <a:lnT w="6350" cap="flat" cmpd="sng" algn="ctr">
+                      <a:solidFill>
+                        <a:srgbClr val="CCCCCC"/>
+                      </a:solidFill>
+                      <a:prstDash val="solid"/>
+                      <a:round/>
+                      <a:headEnd type="none" w="med" len="med"/>
+                      <a:tailEnd type="none" w="med" len="med"/>
+                    </a:lnT>
+                    <a:lnB w="6350" cap="flat" cmpd="sng" algn="ctr">
+                      <a:solidFill>
+                        <a:srgbClr val="CCCCCC"/>
+                      </a:solidFill>
+                      <a:prstDash val="solid"/>
+                      <a:round/>
+                      <a:headEnd type="none" w="med" len="med"/>
+                      <a:tailEnd type="none" w="med" len="med"/>
+                    </a:lnB>
+                    <a:solidFill>
+                      <a:srgbClr val="FFFFFF"/>
+                    </a:solidFill>
+                  </a:tcPr>
+                </a:tc>
+              </a:tr>
+              <a:tr h="310896">
+                <a:tc>
+                  <a:txBody>
+                    <a:bodyPr/>
+                    <a:lstStyle/>
+                    <a:p>
+                      <a:pPr indent="0" marL="0">
+                        <a:buNone/>
+                      </a:pPr>
+                      <a:r>
+                        <a:rPr lang="en-US" sz="900" dirty="0">
+                          <a:solidFill>
+                            <a:srgbClr val="2D2D2D"/>
+                          </a:solidFill>
+                          <a:latin typeface="Calibri" pitchFamily="34" charset="0"/>
+                          <a:ea typeface="Calibri" pitchFamily="34" charset="-122"/>
+                          <a:cs typeface="Calibri" pitchFamily="34" charset="-120"/>
+                        </a:rPr>
+                        <a:t>04_GHEVENTM  【未実装】</a:t>
+                      </a:r>
+                      <a:endParaRPr lang="en-US" sz="900" dirty="0">
+                        <a:latin typeface="Calibri" charset="0"/>
+                        <a:ea typeface="Calibri" charset="0"/>
+                        <a:cs typeface="Calibri" charset="0"/>
+                      </a:endParaRPr>
+                    </a:p>
+                  </a:txBody>
+                  <a:tcPr marL="91440" marR="91440" marT="45720" marB="45720">
+                    <a:lnL w="6350" cap="flat" cmpd="sng" algn="ctr">
+                      <a:solidFill>
+                        <a:srgbClr val="CCCCCC"/>
+                      </a:solidFill>
+                      <a:prstDash val="solid"/>
+                      <a:round/>
+                      <a:headEnd type="none" w="med" len="med"/>
+                      <a:tailEnd type="none" w="med" len="med"/>
+                    </a:lnL>
+                    <a:lnR w="6350" cap="flat" cmpd="sng" algn="ctr">
+                      <a:solidFill>
+                        <a:srgbClr val="CCCCCC"/>
+                      </a:solidFill>
+                      <a:prstDash val="solid"/>
+                      <a:round/>
+                      <a:headEnd type="none" w="med" len="med"/>
+                      <a:tailEnd type="none" w="med" len="med"/>
+                    </a:lnR>
+                    <a:lnT w="6350" cap="flat" cmpd="sng" algn="ctr">
+                      <a:solidFill>
+                        <a:srgbClr val="CCCCCC"/>
+                      </a:solidFill>
+                      <a:prstDash val="solid"/>
+                      <a:round/>
+                      <a:headEnd type="none" w="med" len="med"/>
+                      <a:tailEnd type="none" w="med" len="med"/>
+                    </a:lnT>
+                    <a:lnB w="6350" cap="flat" cmpd="sng" algn="ctr">
+                      <a:solidFill>
+                        <a:srgbClr val="CCCCCC"/>
+                      </a:solidFill>
+                      <a:prstDash val="solid"/>
+                      <a:round/>
+                      <a:headEnd type="none" w="med" len="med"/>
+                      <a:tailEnd type="none" w="med" len="med"/>
+                    </a:lnB>
+                    <a:solidFill>
+                      <a:srgbClr val="F5F5F5"/>
+                    </a:solidFill>
+                  </a:tcPr>
+                </a:tc>
+                <a:tc>
+                  <a:txBody>
+                    <a:bodyPr/>
+                    <a:lstStyle/>
+                    <a:p>
+                      <a:pPr indent="0" marL="0">
+                        <a:buNone/>
+                      </a:pPr>
+                      <a:r>
+                        <a:rPr lang="en-US" sz="900" dirty="0">
+                          <a:solidFill>
+                            <a:srgbClr val="2D2D2D"/>
+                          </a:solidFill>
+                          <a:latin typeface="Calibri" pitchFamily="34" charset="0"/>
+                          <a:ea typeface="Calibri" pitchFamily="34" charset="-122"/>
+                          <a:cs typeface="Calibri" pitchFamily="34" charset="-120"/>
+                        </a:rPr>
+                        <a:t>企画マスタ  PK: STR_ID + EVNT_NBR</a:t>
+                      </a:r>
+                      <a:endParaRPr lang="en-US" sz="900" dirty="0">
+                        <a:latin typeface="Calibri" charset="0"/>
+                        <a:ea typeface="Calibri" charset="0"/>
+                        <a:cs typeface="Calibri" charset="0"/>
+                      </a:endParaRPr>
+                    </a:p>
+                  </a:txBody>
+                  <a:tcPr marL="91440" marR="91440" marT="45720" marB="45720">
+                    <a:lnL w="6350" cap="flat" cmpd="sng" algn="ctr">
+                      <a:solidFill>
+                        <a:srgbClr val="CCCCCC"/>
+                      </a:solidFill>
+                      <a:prstDash val="solid"/>
+                      <a:round/>
+                      <a:headEnd type="none" w="med" len="med"/>
+                      <a:tailEnd type="none" w="med" len="med"/>
+                    </a:lnL>
+                    <a:lnR w="6350" cap="flat" cmpd="sng" algn="ctr">
+                      <a:solidFill>
+                        <a:srgbClr val="CCCCCC"/>
+                      </a:solidFill>
+                      <a:prstDash val="solid"/>
+                      <a:round/>
+                      <a:headEnd type="none" w="med" len="med"/>
+                      <a:tailEnd type="none" w="med" len="med"/>
+                    </a:lnR>
+                    <a:lnT w="6350" cap="flat" cmpd="sng" algn="ctr">
+                      <a:solidFill>
+                        <a:srgbClr val="CCCCCC"/>
+                      </a:solidFill>
+                      <a:prstDash val="solid"/>
+                      <a:round/>
+                      <a:headEnd type="none" w="med" len="med"/>
+                      <a:tailEnd type="none" w="med" len="med"/>
+                    </a:lnT>
+                    <a:lnB w="6350" cap="flat" cmpd="sng" algn="ctr">
+                      <a:solidFill>
+                        <a:srgbClr val="CCCCCC"/>
+                      </a:solidFill>
+                      <a:prstDash val="solid"/>
+                      <a:round/>
+                      <a:headEnd type="none" w="med" len="med"/>
+                      <a:tailEnd type="none" w="med" len="med"/>
+                    </a:lnB>
+                    <a:solidFill>
+                      <a:srgbClr val="F5F5F5"/>
+                    </a:solidFill>
+                  </a:tcPr>
+                </a:tc>
+              </a:tr>
+              <a:tr h="310896">
+                <a:tc>
+                  <a:txBody>
+                    <a:bodyPr/>
+                    <a:lstStyle/>
+                    <a:p>
+                      <a:pPr indent="0" marL="0">
+                        <a:buNone/>
+                      </a:pPr>
+                      <a:r>
+                        <a:rPr lang="en-US" sz="900" dirty="0">
+                          <a:solidFill>
+                            <a:srgbClr val="2D2D2D"/>
+                          </a:solidFill>
+                          <a:latin typeface="Calibri" pitchFamily="34" charset="0"/>
+                          <a:ea typeface="Calibri" pitchFamily="34" charset="-122"/>
+                          <a:cs typeface="Calibri" pitchFamily="34" charset="-120"/>
+                        </a:rPr>
+                        <a:t>05_GMMDSEM  【未実装】</a:t>
+                      </a:r>
+                      <a:endParaRPr lang="en-US" sz="900" dirty="0">
+                        <a:latin typeface="Calibri" charset="0"/>
+                        <a:ea typeface="Calibri" charset="0"/>
+                        <a:cs typeface="Calibri" charset="0"/>
+                      </a:endParaRPr>
+                    </a:p>
+                  </a:txBody>
+                  <a:tcPr marL="91440" marR="91440" marT="45720" marB="45720">
+                    <a:lnL w="6350" cap="flat" cmpd="sng" algn="ctr">
+                      <a:solidFill>
+                        <a:srgbClr val="CCCCCC"/>
+                      </a:solidFill>
+                      <a:prstDash val="solid"/>
+                      <a:round/>
+                      <a:headEnd type="none" w="med" len="med"/>
+                      <a:tailEnd type="none" w="med" len="med"/>
+                    </a:lnL>
+                    <a:lnR w="6350" cap="flat" cmpd="sng" algn="ctr">
+                      <a:solidFill>
+                        <a:srgbClr val="CCCCCC"/>
+                      </a:solidFill>
+                      <a:prstDash val="solid"/>
+                      <a:round/>
+                      <a:headEnd type="none" w="med" len="med"/>
+                      <a:tailEnd type="none" w="med" len="med"/>
+                    </a:lnR>
+                    <a:lnT w="6350" cap="flat" cmpd="sng" algn="ctr">
+                      <a:solidFill>
+                        <a:srgbClr val="CCCCCC"/>
+                      </a:solidFill>
+                      <a:prstDash val="solid"/>
+                      <a:round/>
+                      <a:headEnd type="none" w="med" len="med"/>
+                      <a:tailEnd type="none" w="med" len="med"/>
+                    </a:lnT>
+                    <a:lnB w="6350" cap="flat" cmpd="sng" algn="ctr">
+                      <a:solidFill>
+                        <a:srgbClr val="CCCCCC"/>
+                      </a:solidFill>
+                      <a:prstDash val="solid"/>
+                      <a:round/>
+                      <a:headEnd type="none" w="med" len="med"/>
+                      <a:tailEnd type="none" w="med" len="med"/>
+                    </a:lnB>
+                    <a:solidFill>
+                      <a:srgbClr val="FFFFFF"/>
+                    </a:solidFill>
+                  </a:tcPr>
+                </a:tc>
+                <a:tc>
+                  <a:txBody>
+                    <a:bodyPr/>
+                    <a:lstStyle/>
+                    <a:p>
+                      <a:pPr indent="0" marL="0">
+                        <a:buNone/>
+                      </a:pPr>
+                      <a:r>
+                        <a:rPr lang="en-US" sz="900" dirty="0">
+                          <a:solidFill>
+                            <a:srgbClr val="2D2D2D"/>
+                          </a:solidFill>
+                          <a:latin typeface="Calibri" pitchFamily="34" charset="0"/>
+                          <a:ea typeface="Calibri" pitchFamily="34" charset="-122"/>
+                          <a:cs typeface="Calibri" pitchFamily="34" charset="-120"/>
+                        </a:rPr>
+                        <a:t>商品階層マスタ  PK: STR_ID + MDSE_NBR1〜6</a:t>
+                      </a:r>
+                      <a:endParaRPr lang="en-US" sz="900" dirty="0">
+                        <a:latin typeface="Calibri" charset="0"/>
+                        <a:ea typeface="Calibri" charset="0"/>
+                        <a:cs typeface="Calibri" charset="0"/>
+                      </a:endParaRPr>
+                    </a:p>
+                  </a:txBody>
+                  <a:tcPr marL="91440" marR="91440" marT="45720" marB="45720">
+                    <a:lnL w="6350" cap="flat" cmpd="sng" algn="ctr">
+                      <a:solidFill>
+                        <a:srgbClr val="CCCCCC"/>
+                      </a:solidFill>
+                      <a:prstDash val="solid"/>
+                      <a:round/>
+                      <a:headEnd type="none" w="med" len="med"/>
+                      <a:tailEnd type="none" w="med" len="med"/>
+                    </a:lnL>
+                    <a:lnR w="6350" cap="flat" cmpd="sng" algn="ctr">
+                      <a:solidFill>
+                        <a:srgbClr val="CCCCCC"/>
+                      </a:solidFill>
+                      <a:prstDash val="solid"/>
+                      <a:round/>
+                      <a:headEnd type="none" w="med" len="med"/>
+                      <a:tailEnd type="none" w="med" len="med"/>
+                    </a:lnR>
+                    <a:lnT w="6350" cap="flat" cmpd="sng" algn="ctr">
+                      <a:solidFill>
+                        <a:srgbClr val="CCCCCC"/>
+                      </a:solidFill>
+                      <a:prstDash val="solid"/>
+                      <a:round/>
+                      <a:headEnd type="none" w="med" len="med"/>
+                      <a:tailEnd type="none" w="med" len="med"/>
+                    </a:lnT>
+                    <a:lnB w="6350" cap="flat" cmpd="sng" algn="ctr">
+                      <a:solidFill>
+                        <a:srgbClr val="CCCCCC"/>
+                      </a:solidFill>
+                      <a:prstDash val="solid"/>
+                      <a:round/>
+                      <a:headEnd type="none" w="med" len="med"/>
+                      <a:tailEnd type="none" w="med" len="med"/>
+                    </a:lnB>
+                    <a:solidFill>
+                      <a:srgbClr val="FFFFFF"/>
+                    </a:solidFill>
+                  </a:tcPr>
+                </a:tc>
+              </a:tr>
+              <a:tr h="310896">
+                <a:tc>
+                  <a:txBody>
+                    <a:bodyPr/>
+                    <a:lstStyle/>
+                    <a:p>
+                      <a:pPr indent="0" marL="0">
+                        <a:buNone/>
+                      </a:pPr>
+                      <a:r>
+                        <a:rPr lang="en-US" sz="900" dirty="0">
+                          <a:solidFill>
+                            <a:srgbClr val="2D2D2D"/>
+                          </a:solidFill>
+                          <a:latin typeface="Calibri" pitchFamily="34" charset="0"/>
+                          <a:ea typeface="Calibri" pitchFamily="34" charset="-122"/>
+                          <a:cs typeface="Calibri" pitchFamily="34" charset="-120"/>
+                        </a:rPr>
+                        <a:t/>
+                      </a:r>
+                      <a:endParaRPr lang="en-US" sz="900" dirty="0">
+                        <a:latin typeface="Calibri" charset="0"/>
+                        <a:ea typeface="Calibri" charset="0"/>
+                        <a:cs typeface="Calibri" charset="0"/>
+                      </a:endParaRPr>
+                    </a:p>
+                  </a:txBody>
+                  <a:tcPr marL="91440" marR="91440" marT="45720" marB="45720">
+                    <a:lnL w="6350" cap="flat" cmpd="sng" algn="ctr">
+                      <a:solidFill>
+                        <a:srgbClr val="CCCCCC"/>
+                      </a:solidFill>
+                      <a:prstDash val="solid"/>
+                      <a:round/>
+                      <a:headEnd type="none" w="med" len="med"/>
+                      <a:tailEnd type="none" w="med" len="med"/>
+                    </a:lnL>
+                    <a:lnR w="6350" cap="flat" cmpd="sng" algn="ctr">
+                      <a:solidFill>
+                        <a:srgbClr val="CCCCCC"/>
+                      </a:solidFill>
+                      <a:prstDash val="solid"/>
+                      <a:round/>
+                      <a:headEnd type="none" w="med" len="med"/>
+                      <a:tailEnd type="none" w="med" len="med"/>
+                    </a:lnR>
+                    <a:lnT w="6350" cap="flat" cmpd="sng" algn="ctr">
+                      <a:solidFill>
+                        <a:srgbClr val="CCCCCC"/>
+                      </a:solidFill>
+                      <a:prstDash val="solid"/>
+                      <a:round/>
+                      <a:headEnd type="none" w="med" len="med"/>
+                      <a:tailEnd type="none" w="med" len="med"/>
+                    </a:lnT>
+                    <a:lnB w="6350" cap="flat" cmpd="sng" algn="ctr">
+                      <a:solidFill>
+                        <a:srgbClr val="CCCCCC"/>
+                      </a:solidFill>
+                      <a:prstDash val="solid"/>
+                      <a:round/>
+                      <a:headEnd type="none" w="med" len="med"/>
+                      <a:tailEnd type="none" w="med" len="med"/>
+                    </a:lnB>
+                    <a:solidFill>
+                      <a:srgbClr val="F5F5F5"/>
+                    </a:solidFill>
+                  </a:tcPr>
+                </a:tc>
+                <a:tc>
+                  <a:txBody>
+                    <a:bodyPr/>
+                    <a:lstStyle/>
+                    <a:p>
+                      <a:pPr indent="0" marL="0">
+                        <a:buNone/>
+                      </a:pPr>
+                      <a:r>
+                        <a:rPr lang="en-US" sz="900" dirty="0">
+                          <a:solidFill>
+                            <a:srgbClr val="2D2D2D"/>
+                          </a:solidFill>
+                          <a:latin typeface="Calibri" pitchFamily="34" charset="0"/>
+                          <a:ea typeface="Calibri" pitchFamily="34" charset="-122"/>
+                          <a:cs typeface="Calibri" pitchFamily="34" charset="-120"/>
+                        </a:rPr>
+                        <a:t/>
+                      </a:r>
+                      <a:endParaRPr lang="en-US" sz="900" dirty="0">
+                        <a:latin typeface="Calibri" charset="0"/>
+                        <a:ea typeface="Calibri" charset="0"/>
+                        <a:cs typeface="Calibri" charset="0"/>
+                      </a:endParaRPr>
+                    </a:p>
+                  </a:txBody>
+                  <a:tcPr marL="91440" marR="91440" marT="45720" marB="45720">
+                    <a:lnL w="6350" cap="flat" cmpd="sng" algn="ctr">
+                      <a:solidFill>
+                        <a:srgbClr val="CCCCCC"/>
+                      </a:solidFill>
+                      <a:prstDash val="solid"/>
+                      <a:round/>
+                      <a:headEnd type="none" w="med" len="med"/>
+                      <a:tailEnd type="none" w="med" len="med"/>
+                    </a:lnL>
+                    <a:lnR w="6350" cap="flat" cmpd="sng" algn="ctr">
+                      <a:solidFill>
+                        <a:srgbClr val="CCCCCC"/>
+                      </a:solidFill>
+                      <a:prstDash val="solid"/>
+                      <a:round/>
+                      <a:headEnd type="none" w="med" len="med"/>
+                      <a:tailEnd type="none" w="med" len="med"/>
+                    </a:lnR>
+                    <a:lnT w="6350" cap="flat" cmpd="sng" algn="ctr">
+                      <a:solidFill>
+                        <a:srgbClr val="CCCCCC"/>
+                      </a:solidFill>
+                      <a:prstDash val="solid"/>
+                      <a:round/>
+                      <a:headEnd type="none" w="med" len="med"/>
+                      <a:tailEnd type="none" w="med" len="med"/>
+                    </a:lnT>
+                    <a:lnB w="6350" cap="flat" cmpd="sng" algn="ctr">
+                      <a:solidFill>
+                        <a:srgbClr val="CCCCCC"/>
+                      </a:solidFill>
+                      <a:prstDash val="solid"/>
+                      <a:round/>
+                      <a:headEnd type="none" w="med" len="med"/>
+                      <a:tailEnd type="none" w="med" len="med"/>
+                    </a:lnB>
+                    <a:solidFill>
+                      <a:srgbClr val="F5F5F5"/>
+                    </a:solidFill>
+                  </a:tcPr>
+                </a:tc>
+              </a:tr>
+              <a:tr h="310896">
+                <a:tc>
+                  <a:txBody>
+                    <a:bodyPr/>
+                    <a:lstStyle/>
+                    <a:p>
+                      <a:pPr indent="0" marL="0">
+                        <a:buNone/>
+                      </a:pPr>
+                      <a:r>
+                        <a:rPr lang="en-US" sz="900" dirty="0">
+                          <a:solidFill>
+                            <a:srgbClr val="2D2D2D"/>
+                          </a:solidFill>
+                          <a:latin typeface="Calibri" pitchFamily="34" charset="0"/>
+                          <a:ea typeface="Calibri" pitchFamily="34" charset="-122"/>
+                          <a:cs typeface="Calibri" pitchFamily="34" charset="-120"/>
+                        </a:rPr>
+                        <a:t/>
+                      </a:r>
+                      <a:endParaRPr lang="en-US" sz="900" dirty="0">
+                        <a:latin typeface="Calibri" charset="0"/>
+                        <a:ea typeface="Calibri" charset="0"/>
+                        <a:cs typeface="Calibri" charset="0"/>
+                      </a:endParaRPr>
+                    </a:p>
+                  </a:txBody>
+                  <a:tcPr marL="91440" marR="91440" marT="45720" marB="45720">
+                    <a:lnL w="6350" cap="flat" cmpd="sng" algn="ctr">
+                      <a:solidFill>
+                        <a:srgbClr val="CCCCCC"/>
+                      </a:solidFill>
+                      <a:prstDash val="solid"/>
+                      <a:round/>
+                      <a:headEnd type="none" w="med" len="med"/>
+                      <a:tailEnd type="none" w="med" len="med"/>
+                    </a:lnL>
+                    <a:lnR w="6350" cap="flat" cmpd="sng" algn="ctr">
+                      <a:solidFill>
+                        <a:srgbClr val="CCCCCC"/>
+                      </a:solidFill>
+                      <a:prstDash val="solid"/>
+                      <a:round/>
+                      <a:headEnd type="none" w="med" len="med"/>
+                      <a:tailEnd type="none" w="med" len="med"/>
+                    </a:lnR>
+                    <a:lnT w="6350" cap="flat" cmpd="sng" algn="ctr">
+                      <a:solidFill>
+                        <a:srgbClr val="CCCCCC"/>
+                      </a:solidFill>
+                      <a:prstDash val="solid"/>
+                      <a:round/>
+                      <a:headEnd type="none" w="med" len="med"/>
+                      <a:tailEnd type="none" w="med" len="med"/>
+                    </a:lnT>
+                    <a:lnB w="6350" cap="flat" cmpd="sng" algn="ctr">
+                      <a:solidFill>
+                        <a:srgbClr val="CCCCCC"/>
+                      </a:solidFill>
+                      <a:prstDash val="solid"/>
+                      <a:round/>
+                      <a:headEnd type="none" w="med" len="med"/>
+                      <a:tailEnd type="none" w="med" len="med"/>
+                    </a:lnB>
+                    <a:solidFill>
+                      <a:srgbClr val="FFFFFF"/>
+                    </a:solidFill>
+                  </a:tcPr>
+                </a:tc>
+                <a:tc>
+                  <a:txBody>
+                    <a:bodyPr/>
+                    <a:lstStyle/>
+                    <a:p>
+                      <a:pPr indent="0" marL="0">
+                        <a:buNone/>
+                      </a:pPr>
+                      <a:r>
+                        <a:rPr lang="en-US" sz="900" dirty="0">
+                          <a:solidFill>
+                            <a:srgbClr val="2D2D2D"/>
+                          </a:solidFill>
+                          <a:latin typeface="Calibri" pitchFamily="34" charset="0"/>
+                          <a:ea typeface="Calibri" pitchFamily="34" charset="-122"/>
+                          <a:cs typeface="Calibri" pitchFamily="34" charset="-120"/>
+                        </a:rPr>
+                        <a:t/>
+                      </a:r>
+                      <a:endParaRPr lang="en-US" sz="900" dirty="0">
+                        <a:latin typeface="Calibri" charset="0"/>
+                        <a:ea typeface="Calibri" charset="0"/>
+                        <a:cs typeface="Calibri" charset="0"/>
+                      </a:endParaRPr>
+                    </a:p>
+                  </a:txBody>
+                  <a:tcPr marL="91440" marR="91440" marT="45720" marB="45720">
+                    <a:lnL w="6350" cap="flat" cmpd="sng" algn="ctr">
+                      <a:solidFill>
+                        <a:srgbClr val="CCCCCC"/>
+                      </a:solidFill>
+                      <a:prstDash val="solid"/>
+                      <a:round/>
+                      <a:headEnd type="none" w="med" len="med"/>
+                      <a:tailEnd type="none" w="med" len="med"/>
+                    </a:lnL>
+                    <a:lnR w="6350" cap="flat" cmpd="sng" algn="ctr">
+                      <a:solidFill>
+                        <a:srgbClr val="CCCCCC"/>
+                      </a:solidFill>
+                      <a:prstDash val="solid"/>
+                      <a:round/>
+                      <a:headEnd type="none" w="med" len="med"/>
+                      <a:tailEnd type="none" w="med" len="med"/>
+                    </a:lnR>
+                    <a:lnT w="6350" cap="flat" cmpd="sng" algn="ctr">
+                      <a:solidFill>
+                        <a:srgbClr val="CCCCCC"/>
+                      </a:solidFill>
+                      <a:prstDash val="solid"/>
+                      <a:round/>
+                      <a:headEnd type="none" w="med" len="med"/>
+                      <a:tailEnd type="none" w="med" len="med"/>
+                    </a:lnT>
+                    <a:lnB w="6350" cap="flat" cmpd="sng" algn="ctr">
+                      <a:solidFill>
+                        <a:srgbClr val="CCCCCC"/>
+                      </a:solidFill>
+                      <a:prstDash val="solid"/>
+                      <a:round/>
+                      <a:headEnd type="none" w="med" len="med"/>
+                      <a:tailEnd type="none" w="med" len="med"/>
+                    </a:lnB>
+                    <a:solidFill>
+                      <a:srgbClr val="FFFFFF"/>
+                    </a:solidFill>
+                  </a:tcPr>
+                </a:tc>
+              </a:tr>
+              <a:tr h="310896">
+                <a:tc>
+                  <a:txBody>
+                    <a:bodyPr/>
+                    <a:lstStyle/>
+                    <a:p>
+                      <a:pPr indent="0" marL="0">
+                        <a:buNone/>
+                      </a:pPr>
+                      <a:r>
+                        <a:rPr lang="en-US" sz="900" dirty="0">
+                          <a:solidFill>
+                            <a:srgbClr val="2D2D2D"/>
+                          </a:solidFill>
+                          <a:latin typeface="Calibri" pitchFamily="34" charset="0"/>
+                          <a:ea typeface="Calibri" pitchFamily="34" charset="-122"/>
+                          <a:cs typeface="Calibri" pitchFamily="34" charset="-120"/>
+                        </a:rPr>
+                        <a:t/>
+                      </a:r>
+                      <a:endParaRPr lang="en-US" sz="900" dirty="0">
+                        <a:latin typeface="Calibri" charset="0"/>
+                        <a:ea typeface="Calibri" charset="0"/>
+                        <a:cs typeface="Calibri" charset="0"/>
+                      </a:endParaRPr>
+                    </a:p>
+                  </a:txBody>
+                  <a:tcPr marL="91440" marR="91440" marT="45720" marB="45720">
+                    <a:lnL w="6350" cap="flat" cmpd="sng" algn="ctr">
+                      <a:solidFill>
+                        <a:srgbClr val="CCCCCC"/>
+                      </a:solidFill>
+                      <a:prstDash val="solid"/>
+                      <a:round/>
+                      <a:headEnd type="none" w="med" len="med"/>
+                      <a:tailEnd type="none" w="med" len="med"/>
+                    </a:lnL>
+                    <a:lnR w="6350" cap="flat" cmpd="sng" algn="ctr">
+                      <a:solidFill>
+                        <a:srgbClr val="CCCCCC"/>
+                      </a:solidFill>
+                      <a:prstDash val="solid"/>
+                      <a:round/>
+                      <a:headEnd type="none" w="med" len="med"/>
+                      <a:tailEnd type="none" w="med" len="med"/>
+                    </a:lnR>
+                    <a:lnT w="6350" cap="flat" cmpd="sng" algn="ctr">
+                      <a:solidFill>
+                        <a:srgbClr val="CCCCCC"/>
+                      </a:solidFill>
+                      <a:prstDash val="solid"/>
+                      <a:round/>
+                      <a:headEnd type="none" w="med" len="med"/>
+                      <a:tailEnd type="none" w="med" len="med"/>
+                    </a:lnT>
+                    <a:lnB w="6350" cap="flat" cmpd="sng" algn="ctr">
+                      <a:solidFill>
+                        <a:srgbClr val="CCCCCC"/>
+                      </a:solidFill>
+                      <a:prstDash val="solid"/>
+                      <a:round/>
+                      <a:headEnd type="none" w="med" len="med"/>
+                      <a:tailEnd type="none" w="med" len="med"/>
+                    </a:lnB>
+                    <a:solidFill>
+                      <a:srgbClr val="F5F5F5"/>
+                    </a:solidFill>
+                  </a:tcPr>
+                </a:tc>
+                <a:tc>
+                  <a:txBody>
+                    <a:bodyPr/>
+                    <a:lstStyle/>
+                    <a:p>
+                      <a:pPr indent="0" marL="0">
+                        <a:buNone/>
+                      </a:pPr>
+                      <a:r>
+                        <a:rPr lang="en-US" sz="900" dirty="0">
+                          <a:solidFill>
+                            <a:srgbClr val="2D2D2D"/>
+                          </a:solidFill>
+                          <a:latin typeface="Calibri" pitchFamily="34" charset="0"/>
+                          <a:ea typeface="Calibri" pitchFamily="34" charset="-122"/>
+                          <a:cs typeface="Calibri" pitchFamily="34" charset="-120"/>
+                        </a:rPr>
+                        <a:t/>
+                      </a:r>
+                      <a:endParaRPr lang="en-US" sz="900" dirty="0">
+                        <a:latin typeface="Calibri" charset="0"/>
+                        <a:ea typeface="Calibri" charset="0"/>
+                        <a:cs typeface="Calibri" charset="0"/>
+                      </a:endParaRPr>
+                    </a:p>
+                  </a:txBody>
+                  <a:tcPr marL="91440" marR="91440" marT="45720" marB="45720">
+                    <a:lnL w="6350" cap="flat" cmpd="sng" algn="ctr">
+                      <a:solidFill>
+                        <a:srgbClr val="CCCCCC"/>
+                      </a:solidFill>
+                      <a:prstDash val="solid"/>
+                      <a:round/>
+                      <a:headEnd type="none" w="med" len="med"/>
+                      <a:tailEnd type="none" w="med" len="med"/>
+                    </a:lnL>
+                    <a:lnR w="6350" cap="flat" cmpd="sng" algn="ctr">
+                      <a:solidFill>
+                        <a:srgbClr val="CCCCCC"/>
+                      </a:solidFill>
+                      <a:prstDash val="solid"/>
+                      <a:round/>
+                      <a:headEnd type="none" w="med" len="med"/>
+                      <a:tailEnd type="none" w="med" len="med"/>
+                    </a:lnR>
+                    <a:lnT w="6350" cap="flat" cmpd="sng" algn="ctr">
+                      <a:solidFill>
+                        <a:srgbClr val="CCCCCC"/>
+                      </a:solidFill>
+                      <a:prstDash val="solid"/>
+                      <a:round/>
+                      <a:headEnd type="none" w="med" len="med"/>
+                      <a:tailEnd type="none" w="med" len="med"/>
+                    </a:lnT>
+                    <a:lnB w="6350" cap="flat" cmpd="sng" algn="ctr">
+                      <a:solidFill>
+                        <a:srgbClr val="CCCCCC"/>
+                      </a:solidFill>
+                      <a:prstDash val="solid"/>
+                      <a:round/>
+                      <a:headEnd type="none" w="med" len="med"/>
+                      <a:tailEnd type="none" w="med" len="med"/>
+                    </a:lnB>
+                    <a:solidFill>
+                      <a:srgbClr val="F5F5F5"/>
+                    </a:solidFill>
+                  </a:tcPr>
+                </a:tc>
+              </a:tr>
+            </a:tbl>
+          </a:graphicData>
+        </a:graphic>
+      </p:graphicFrame>
+      <p:sp>
+        <p:nvSpPr>
+          <p:cNvPr id="13" name="Text 7"/>
+          <p:cNvSpPr/>
+          <p:nvPr/>
+        </p:nvSpPr>
+        <p:spPr>
+          <a:xfrm>
+            <a:off x="365760" y="4480560"/>
+            <a:ext cx="4389120" cy="274320"/>
+          </a:xfrm>
+          <a:prstGeom prst="rect">
+            <a:avLst/>
+          </a:prstGeom>
+          <a:noFill/>
+          <a:ln/>
+        </p:spPr>
+        <p:txBody>
+          <a:bodyPr wrap="square" lIns="0" tIns="0" rIns="0" bIns="0" rtlCol="0" anchor="ctr"/>
+          <a:lstStyle/>
+          <a:p>
+            <a:pPr indent="0" marL="0">
+              <a:buNone/>
+            </a:pPr>
+            <a:r>
+              <a:rPr lang="en-US" sz="800" dirty="0">
+                <a:solidFill>
+                  <a:srgbClr val="AA4400"/>
+                </a:solidFill>
+                <a:latin typeface="Calibri" pitchFamily="34" charset="0"/>
+                <a:ea typeface="Calibri" pitchFamily="34" charset="-122"/>
+                <a:cs typeface="Calibri" pitchFamily="34" charset="-120"/>
+              </a:rPr>
+              <a:t>※ 41_P001 は別途 OC フローで使用（PRD Aurora 実装済み）  開発環境テーブル名: MST_プレフィックス付き</a:t>
+            </a:r>
+            <a:endParaRPr lang="en-US" sz="800" dirty="0"/>
+          </a:p>
+        </p:txBody>
+      </p:sp>
+      <p:sp>
+        <p:nvSpPr>
+          <p:cNvPr id="14" name="Text 8"/>
+          <p:cNvSpPr/>
+          <p:nvPr/>
+        </p:nvSpPr>
+        <p:spPr>
+          <a:xfrm>
+            <a:off x="5029200" y="1572768"/>
+            <a:ext cx="4572000" cy="256032"/>
+          </a:xfrm>
+          <a:prstGeom prst="rect">
+            <a:avLst/>
+          </a:prstGeom>
+          <a:noFill/>
+          <a:ln/>
+        </p:spPr>
+        <p:txBody>
+          <a:bodyPr wrap="square" lIns="0" tIns="0" rIns="0" bIns="0" rtlCol="0" anchor="ctr"/>
+          <a:lstStyle/>
+          <a:p>
+            <a:pPr indent="0" marL="0">
+              <a:buNone/>
+            </a:pPr>
+            <a:r>
+              <a:rPr lang="en-US" sz="1200" b="1" dirty="0">
+                <a:solidFill>
+                  <a:srgbClr val="D0232A"/>
+                </a:solidFill>
+                <a:latin typeface="Calibri" pitchFamily="34" charset="0"/>
+                <a:ea typeface="Calibri" pitchFamily="34" charset="-122"/>
+                <a:cs typeface="Calibri" pitchFamily="34" charset="-120"/>
+              </a:rPr>
+              <a:t>01_GHPLUM 主要カラム定義</a:t>
+            </a:r>
+            <a:endParaRPr lang="en-US" sz="1200" dirty="0"/>
+          </a:p>
+        </p:txBody>
+      </p:sp>
+      <p:graphicFrame>
+        <p:nvGraphicFramePr>
+          <p:cNvPr id="19" name="Table 1"/>
+          <p:cNvGraphicFramePr>
+            <a:graphicFrameLocks noGrp="1"/>
+          </p:cNvGraphicFramePr>
+          <p:nvPr>
+            <p:extLst>
+              <p:ext uri="{D42A27DB-BD31-4B8C-83A1-F6EECF244321}">
+                <p14:modId xmlns:p14="http://schemas.microsoft.com/office/powerpoint/2010/main" val="1579011935"/>
+              </p:ext>
+            </p:extLst>
+          </p:nvPr>
+        </p:nvGraphicFramePr>
+        <p:xfrm>
+          <a:off x="5029200" y="1847088"/>
+          <a:ext cx="4572000" cy="914400"/>
+        </p:xfrm>
+        <a:graphic>
+          <a:graphicData uri="http://schemas.openxmlformats.org/drawingml/2006/table">
+            <a:tbl>
+              <a:tblPr/>
+              <a:tblGrid>
+                <a:gridCol w="2377440"/>
+                <a:gridCol w="1097280"/>
+                <a:gridCol w="1097280"/>
+              </a:tblGrid>
+              <a:tr h="228600">
+                <a:tc>
+                  <a:txBody>
+                    <a:bodyPr/>
+                    <a:lstStyle/>
+                    <a:p>
+                      <a:pPr indent="0" marL="0">
+                        <a:buNone/>
+                      </a:pPr>
+                      <a:r>
+                        <a:rPr lang="en-US" sz="800" b="1" dirty="0">
+                          <a:solidFill>
+                            <a:srgbClr val="FFFFFF"/>
+                          </a:solidFill>
+                          <a:latin typeface="Calibri" pitchFamily="34" charset="0"/>
+                          <a:ea typeface="Calibri" pitchFamily="34" charset="-122"/>
+                          <a:cs typeface="Calibri" pitchFamily="34" charset="-120"/>
+                        </a:rPr>
+                        <a:t>カラム名</a:t>
+                      </a:r>
+                      <a:endParaRPr lang="en-US" sz="800" dirty="0">
+                        <a:latin typeface="Calibri" charset="0"/>
+                        <a:ea typeface="Calibri" charset="0"/>
+                        <a:cs typeface="Calibri" charset="0"/>
+                      </a:endParaRPr>
+                    </a:p>
+                  </a:txBody>
+                  <a:tcPr marL="91440" marR="91440" marT="45720" marB="45720">
+                    <a:lnL w="6350" cap="flat" cmpd="sng" algn="ctr">
+                      <a:solidFill>
+                        <a:srgbClr val="CCCCCC"/>
+                      </a:solidFill>
+                      <a:prstDash val="solid"/>
+                      <a:round/>
+                      <a:headEnd type="none" w="med" len="med"/>
+                      <a:tailEnd type="none" w="med" len="med"/>
+                    </a:lnL>
+                    <a:lnR w="6350" cap="flat" cmpd="sng" algn="ctr">
+                      <a:solidFill>
+                        <a:srgbClr val="CCCCCC"/>
+                      </a:solidFill>
+                      <a:prstDash val="solid"/>
+                      <a:round/>
+                      <a:headEnd type="none" w="med" len="med"/>
+                      <a:tailEnd type="none" w="med" len="med"/>
+                    </a:lnR>
+                    <a:lnT w="6350" cap="flat" cmpd="sng" algn="ctr">
+                      <a:solidFill>
+                        <a:srgbClr val="CCCCCC"/>
+                      </a:solidFill>
+                      <a:prstDash val="solid"/>
+                      <a:round/>
+                      <a:headEnd type="none" w="med" len="med"/>
+                      <a:tailEnd type="none" w="med" len="med"/>
+                    </a:lnT>
+                    <a:lnB w="6350" cap="flat" cmpd="sng" algn="ctr">
+                      <a:solidFill>
+                        <a:srgbClr val="CCCCCC"/>
+                      </a:solidFill>
+                      <a:prstDash val="solid"/>
+                      <a:round/>
+                      <a:headEnd type="none" w="med" len="med"/>
+                      <a:tailEnd type="none" w="med" len="med"/>
+                    </a:lnB>
+                    <a:solidFill>
+                      <a:srgbClr val="D0232A"/>
+                    </a:solidFill>
+                  </a:tcPr>
+                </a:tc>
+                <a:tc>
+                  <a:txBody>
+                    <a:bodyPr/>
+                    <a:lstStyle/>
+                    <a:p>
+                      <a:pPr indent="0" marL="0">
+                        <a:buNone/>
+                      </a:pPr>
+                      <a:r>
+                        <a:rPr lang="en-US" sz="800" b="1" dirty="0">
+                          <a:solidFill>
+                            <a:srgbClr val="FFFFFF"/>
+                          </a:solidFill>
+                          <a:latin typeface="Calibri" pitchFamily="34" charset="0"/>
+                          <a:ea typeface="Calibri" pitchFamily="34" charset="-122"/>
+                          <a:cs typeface="Calibri" pitchFamily="34" charset="-120"/>
+                        </a:rPr>
+                        <a:t>型</a:t>
+                      </a:r>
+                      <a:endParaRPr lang="en-US" sz="800" dirty="0">
+                        <a:latin typeface="Calibri" charset="0"/>
+                        <a:ea typeface="Calibri" charset="0"/>
+                        <a:cs typeface="Calibri" charset="0"/>
+                      </a:endParaRPr>
+                    </a:p>
+                  </a:txBody>
+                  <a:tcPr marL="91440" marR="91440" marT="45720" marB="45720">
+                    <a:lnL w="6350" cap="flat" cmpd="sng" algn="ctr">
+                      <a:solidFill>
+                        <a:srgbClr val="CCCCCC"/>
+                      </a:solidFill>
+                      <a:prstDash val="solid"/>
+                      <a:round/>
+                      <a:headEnd type="none" w="med" len="med"/>
+                      <a:tailEnd type="none" w="med" len="med"/>
+                    </a:lnL>
+                    <a:lnR w="6350" cap="flat" cmpd="sng" algn="ctr">
+                      <a:solidFill>
+                        <a:srgbClr val="CCCCCC"/>
+                      </a:solidFill>
+                      <a:prstDash val="solid"/>
+                      <a:round/>
+                      <a:headEnd type="none" w="med" len="med"/>
+                      <a:tailEnd type="none" w="med" len="med"/>
+                    </a:lnR>
+                    <a:lnT w="6350" cap="flat" cmpd="sng" algn="ctr">
+                      <a:solidFill>
+                        <a:srgbClr val="CCCCCC"/>
+                      </a:solidFill>
+                      <a:prstDash val="solid"/>
+                      <a:round/>
+                      <a:headEnd type="none" w="med" len="med"/>
+                      <a:tailEnd type="none" w="med" len="med"/>
+                    </a:lnT>
+                    <a:lnB w="6350" cap="flat" cmpd="sng" algn="ctr">
+                      <a:solidFill>
+                        <a:srgbClr val="CCCCCC"/>
+                      </a:solidFill>
+                      <a:prstDash val="solid"/>
+                      <a:round/>
+                      <a:headEnd type="none" w="med" len="med"/>
+                      <a:tailEnd type="none" w="med" len="med"/>
+                    </a:lnB>
+                    <a:solidFill>
+                      <a:srgbClr val="D0232A"/>
+                    </a:solidFill>
+                  </a:tcPr>
+                </a:tc>
+                <a:tc>
+                  <a:txBody>
+                    <a:bodyPr/>
+                    <a:lstStyle/>
+                    <a:p>
+                      <a:pPr indent="0" marL="0">
+                        <a:buNone/>
+                      </a:pPr>
+                      <a:r>
+                        <a:rPr lang="en-US" sz="800" b="1" dirty="0">
+                          <a:solidFill>
+                            <a:srgbClr val="FFFFFF"/>
+                          </a:solidFill>
+                          <a:latin typeface="Calibri" pitchFamily="34" charset="0"/>
+                          <a:ea typeface="Calibri" pitchFamily="34" charset="-122"/>
+                          <a:cs typeface="Calibri" pitchFamily="34" charset="-120"/>
+                        </a:rPr>
+                        <a:t>内容</a:t>
+                      </a:r>
+                      <a:endParaRPr lang="en-US" sz="800" dirty="0">
+                        <a:latin typeface="Calibri" charset="0"/>
+                        <a:ea typeface="Calibri" charset="0"/>
+                        <a:cs typeface="Calibri" charset="0"/>
+                      </a:endParaRPr>
+                    </a:p>
+                  </a:txBody>
+                  <a:tcPr marL="91440" marR="91440" marT="45720" marB="45720">
+                    <a:lnL w="6350" cap="flat" cmpd="sng" algn="ctr">
+                      <a:solidFill>
+                        <a:srgbClr val="CCCCCC"/>
+                      </a:solidFill>
+                      <a:prstDash val="solid"/>
+                      <a:round/>
+                      <a:headEnd type="none" w="med" len="med"/>
+                      <a:tailEnd type="none" w="med" len="med"/>
+                    </a:lnL>
+                    <a:lnR w="6350" cap="flat" cmpd="sng" algn="ctr">
+                      <a:solidFill>
+                        <a:srgbClr val="CCCCCC"/>
+                      </a:solidFill>
+                      <a:prstDash val="solid"/>
+                      <a:round/>
+                      <a:headEnd type="none" w="med" len="med"/>
+                      <a:tailEnd type="none" w="med" len="med"/>
+                    </a:lnR>
+                    <a:lnT w="6350" cap="flat" cmpd="sng" algn="ctr">
+                      <a:solidFill>
+                        <a:srgbClr val="CCCCCC"/>
+                      </a:solidFill>
+                      <a:prstDash val="solid"/>
+                      <a:round/>
+                      <a:headEnd type="none" w="med" len="med"/>
+                      <a:tailEnd type="none" w="med" len="med"/>
+                    </a:lnT>
+                    <a:lnB w="6350" cap="flat" cmpd="sng" algn="ctr">
+                      <a:solidFill>
+                        <a:srgbClr val="CCCCCC"/>
+                      </a:solidFill>
+                      <a:prstDash val="solid"/>
+                      <a:round/>
+                      <a:headEnd type="none" w="med" len="med"/>
+                      <a:tailEnd type="none" w="med" len="med"/>
+                    </a:lnB>
+                    <a:solidFill>
+                      <a:srgbClr val="D0232A"/>
+                    </a:solidFill>
+                  </a:tcPr>
+                </a:tc>
+              </a:tr>
+              <a:tr h="228600">
+                <a:tc>
+                  <a:txBody>
+                    <a:bodyPr/>
+                    <a:lstStyle/>
+                    <a:p>
+                      <a:pPr indent="0" marL="0">
+                        <a:buNone/>
+                      </a:pPr>
+                      <a:r>
+                        <a:rPr lang="en-US" sz="800" dirty="0">
+                          <a:solidFill>
+                            <a:srgbClr val="2D2D2D"/>
+                          </a:solidFill>
+                          <a:latin typeface="Calibri" pitchFamily="34" charset="0"/>
+                          <a:ea typeface="Calibri" pitchFamily="34" charset="-122"/>
+                          <a:cs typeface="Calibri" pitchFamily="34" charset="-120"/>
+                        </a:rPr>
+                        <a:t>STR_ID</a:t>
+                      </a:r>
+                      <a:endParaRPr lang="en-US" sz="800" dirty="0">
+                        <a:latin typeface="Calibri" charset="0"/>
+                        <a:ea typeface="Calibri" charset="0"/>
+                        <a:cs typeface="Calibri" charset="0"/>
+                      </a:endParaRPr>
+                    </a:p>
+                  </a:txBody>
+                  <a:tcPr marL="91440" marR="91440" marT="45720" marB="45720">
+                    <a:lnL w="6350" cap="flat" cmpd="sng" algn="ctr">
+                      <a:solidFill>
+                        <a:srgbClr val="CCCCCC"/>
+                      </a:solidFill>
+                      <a:prstDash val="solid"/>
+                      <a:round/>
+                      <a:headEnd type="none" w="med" len="med"/>
+                      <a:tailEnd type="none" w="med" len="med"/>
+                    </a:lnL>
+                    <a:lnR w="6350" cap="flat" cmpd="sng" algn="ctr">
+                      <a:solidFill>
+                        <a:srgbClr val="CCCCCC"/>
+                      </a:solidFill>
+                      <a:prstDash val="solid"/>
+                      <a:round/>
+                      <a:headEnd type="none" w="med" len="med"/>
+                      <a:tailEnd type="none" w="med" len="med"/>
+                    </a:lnR>
+                    <a:lnT w="6350" cap="flat" cmpd="sng" algn="ctr">
+                      <a:solidFill>
+                        <a:srgbClr val="CCCCCC"/>
+                      </a:solidFill>
+                      <a:prstDash val="solid"/>
+                      <a:round/>
+                      <a:headEnd type="none" w="med" len="med"/>
+                      <a:tailEnd type="none" w="med" len="med"/>
+                    </a:lnT>
+                    <a:lnB w="6350" cap="flat" cmpd="sng" algn="ctr">
+                      <a:solidFill>
+                        <a:srgbClr val="CCCCCC"/>
+                      </a:solidFill>
+                      <a:prstDash val="solid"/>
+                      <a:round/>
+                      <a:headEnd type="none" w="med" len="med"/>
+                      <a:tailEnd type="none" w="med" len="med"/>
+                    </a:lnB>
+                    <a:solidFill>
+                      <a:srgbClr val="FFFFFF"/>
+                    </a:solidFill>
+                  </a:tcPr>
+                </a:tc>
+                <a:tc>
+                  <a:txBody>
+                    <a:bodyPr/>
+                    <a:lstStyle/>
+                    <a:p>
+                      <a:pPr indent="0" marL="0">
+                        <a:buNone/>
+                      </a:pPr>
+                      <a:r>
+                        <a:rPr lang="en-US" sz="800" dirty="0">
+                          <a:solidFill>
+                            <a:srgbClr val="2D2D2D"/>
+                          </a:solidFill>
+                          <a:latin typeface="Calibri" pitchFamily="34" charset="0"/>
+                          <a:ea typeface="Calibri" pitchFamily="34" charset="-122"/>
+                          <a:cs typeface="Calibri" pitchFamily="34" charset="-120"/>
+                        </a:rPr>
+                        <a:t>int</a:t>
+                      </a:r>
+                      <a:endParaRPr lang="en-US" sz="800" dirty="0">
+                        <a:latin typeface="Calibri" charset="0"/>
+                        <a:ea typeface="Calibri" charset="0"/>
+                        <a:cs typeface="Calibri" charset="0"/>
+                      </a:endParaRPr>
+                    </a:p>
+                  </a:txBody>
+                  <a:tcPr marL="91440" marR="91440" marT="45720" marB="45720">
+                    <a:lnL w="6350" cap="flat" cmpd="sng" algn="ctr">
+                      <a:solidFill>
+                        <a:srgbClr val="CCCCCC"/>
+                      </a:solidFill>
+                      <a:prstDash val="solid"/>
+                      <a:round/>
+                      <a:headEnd type="none" w="med" len="med"/>
+                      <a:tailEnd type="none" w="med" len="med"/>
+                    </a:lnL>
+                    <a:lnR w="6350" cap="flat" cmpd="sng" algn="ctr">
+                      <a:solidFill>
+                        <a:srgbClr val="CCCCCC"/>
+                      </a:solidFill>
+                      <a:prstDash val="solid"/>
+                      <a:round/>
+                      <a:headEnd type="none" w="med" len="med"/>
+                      <a:tailEnd type="none" w="med" len="med"/>
+                    </a:lnR>
+                    <a:lnT w="6350" cap="flat" cmpd="sng" algn="ctr">
+                      <a:solidFill>
+                        <a:srgbClr val="CCCCCC"/>
+                      </a:solidFill>
+                      <a:prstDash val="solid"/>
+                      <a:round/>
+                      <a:headEnd type="none" w="med" len="med"/>
+                      <a:tailEnd type="none" w="med" len="med"/>
+                    </a:lnT>
+                    <a:lnB w="6350" cap="flat" cmpd="sng" algn="ctr">
+                      <a:solidFill>
+                        <a:srgbClr val="CCCCCC"/>
+                      </a:solidFill>
+                      <a:prstDash val="solid"/>
+                      <a:round/>
+                      <a:headEnd type="none" w="med" len="med"/>
+                      <a:tailEnd type="none" w="med" len="med"/>
+                    </a:lnB>
+                    <a:solidFill>
+                      <a:srgbClr val="FFFFFF"/>
+                    </a:solidFill>
+                  </a:tcPr>
+                </a:tc>
+                <a:tc>
+                  <a:txBody>
+                    <a:bodyPr/>
+                    <a:lstStyle/>
+                    <a:p>
+                      <a:pPr indent="0" marL="0">
+                        <a:buNone/>
+                      </a:pPr>
+                      <a:r>
+                        <a:rPr lang="en-US" sz="800" dirty="0">
+                          <a:solidFill>
+                            <a:srgbClr val="2D2D2D"/>
+                          </a:solidFill>
+                          <a:latin typeface="Calibri" pitchFamily="34" charset="0"/>
+                          <a:ea typeface="Calibri" pitchFamily="34" charset="-122"/>
+                          <a:cs typeface="Calibri" pitchFamily="34" charset="-120"/>
+                        </a:rPr>
+                        <a:t>店舗コード (PK)</a:t>
+                      </a:r>
+                      <a:endParaRPr lang="en-US" sz="800" dirty="0">
+                        <a:latin typeface="Calibri" charset="0"/>
+                        <a:ea typeface="Calibri" charset="0"/>
+                        <a:cs typeface="Calibri" charset="0"/>
+                      </a:endParaRPr>
+                    </a:p>
+                  </a:txBody>
+                  <a:tcPr marL="91440" marR="91440" marT="45720" marB="45720">
+                    <a:lnL w="6350" cap="flat" cmpd="sng" algn="ctr">
+                      <a:solidFill>
+                        <a:srgbClr val="CCCCCC"/>
+                      </a:solidFill>
+                      <a:prstDash val="solid"/>
+                      <a:round/>
+                      <a:headEnd type="none" w="med" len="med"/>
+                      <a:tailEnd type="none" w="med" len="med"/>
+                    </a:lnL>
+                    <a:lnR w="6350" cap="flat" cmpd="sng" algn="ctr">
+                      <a:solidFill>
+                        <a:srgbClr val="CCCCCC"/>
+                      </a:solidFill>
+                      <a:prstDash val="solid"/>
+                      <a:round/>
+                      <a:headEnd type="none" w="med" len="med"/>
+                      <a:tailEnd type="none" w="med" len="med"/>
+                    </a:lnR>
+                    <a:lnT w="6350" cap="flat" cmpd="sng" algn="ctr">
+                      <a:solidFill>
+                        <a:srgbClr val="CCCCCC"/>
+                      </a:solidFill>
+                      <a:prstDash val="solid"/>
+                      <a:round/>
+                      <a:headEnd type="none" w="med" len="med"/>
+                      <a:tailEnd type="none" w="med" len="med"/>
+                    </a:lnT>
+                    <a:lnB w="6350" cap="flat" cmpd="sng" algn="ctr">
+                      <a:solidFill>
+                        <a:srgbClr val="CCCCCC"/>
+                      </a:solidFill>
+                      <a:prstDash val="solid"/>
+                      <a:round/>
+                      <a:headEnd type="none" w="med" len="med"/>
+                      <a:tailEnd type="none" w="med" len="med"/>
+                    </a:lnB>
+                    <a:solidFill>
+                      <a:srgbClr val="FFFFFF"/>
+                    </a:solidFill>
+                  </a:tcPr>
+                </a:tc>
+              </a:tr>
+              <a:tr h="228600">
+                <a:tc>
+                  <a:txBody>
+                    <a:bodyPr/>
+                    <a:lstStyle/>
+                    <a:p>
+                      <a:pPr indent="0" marL="0">
+                        <a:buNone/>
+                      </a:pPr>
+                      <a:r>
+                        <a:rPr lang="en-US" sz="800" dirty="0">
+                          <a:solidFill>
+                            <a:srgbClr val="2D2D2D"/>
+                          </a:solidFill>
+                          <a:latin typeface="Calibri" pitchFamily="34" charset="0"/>
+                          <a:ea typeface="Calibri" pitchFamily="34" charset="-122"/>
+                          <a:cs typeface="Calibri" pitchFamily="34" charset="-120"/>
+                        </a:rPr>
+                        <a:t>SCAN_ID</a:t>
+                      </a:r>
+                      <a:endParaRPr lang="en-US" sz="800" dirty="0">
+                        <a:latin typeface="Calibri" charset="0"/>
+                        <a:ea typeface="Calibri" charset="0"/>
+                        <a:cs typeface="Calibri" charset="0"/>
+                      </a:endParaRPr>
+                    </a:p>
+                  </a:txBody>
+                  <a:tcPr marL="91440" marR="91440" marT="45720" marB="45720">
+                    <a:lnL w="6350" cap="flat" cmpd="sng" algn="ctr">
+                      <a:solidFill>
+                        <a:srgbClr val="CCCCCC"/>
+                      </a:solidFill>
+                      <a:prstDash val="solid"/>
+                      <a:round/>
+                      <a:headEnd type="none" w="med" len="med"/>
+                      <a:tailEnd type="none" w="med" len="med"/>
+                    </a:lnL>
+                    <a:lnR w="6350" cap="flat" cmpd="sng" algn="ctr">
+                      <a:solidFill>
+                        <a:srgbClr val="CCCCCC"/>
+                      </a:solidFill>
+                      <a:prstDash val="solid"/>
+                      <a:round/>
+                      <a:headEnd type="none" w="med" len="med"/>
+                      <a:tailEnd type="none" w="med" len="med"/>
+                    </a:lnR>
+                    <a:lnT w="6350" cap="flat" cmpd="sng" algn="ctr">
+                      <a:solidFill>
+                        <a:srgbClr val="CCCCCC"/>
+                      </a:solidFill>
+                      <a:prstDash val="solid"/>
+                      <a:round/>
+                      <a:headEnd type="none" w="med" len="med"/>
+                      <a:tailEnd type="none" w="med" len="med"/>
+                    </a:lnT>
+                    <a:lnB w="6350" cap="flat" cmpd="sng" algn="ctr">
+                      <a:solidFill>
+                        <a:srgbClr val="CCCCCC"/>
+                      </a:solidFill>
+                      <a:prstDash val="solid"/>
+                      <a:round/>
+                      <a:headEnd type="none" w="med" len="med"/>
+                      <a:tailEnd type="none" w="med" len="med"/>
+                    </a:lnB>
+                    <a:solidFill>
+                      <a:srgbClr val="F5F5F5"/>
+                    </a:solidFill>
+                  </a:tcPr>
+                </a:tc>
+                <a:tc>
+                  <a:txBody>
+                    <a:bodyPr/>
+                    <a:lstStyle/>
+                    <a:p>
+                      <a:pPr indent="0" marL="0">
+                        <a:buNone/>
+                      </a:pPr>
+                      <a:r>
+                        <a:rPr lang="en-US" sz="800" dirty="0">
+                          <a:solidFill>
+                            <a:srgbClr val="2D2D2D"/>
+                          </a:solidFill>
+                          <a:latin typeface="Calibri" pitchFamily="34" charset="0"/>
+                          <a:ea typeface="Calibri" pitchFamily="34" charset="-122"/>
+                          <a:cs typeface="Calibri" pitchFamily="34" charset="-120"/>
+                        </a:rPr>
+                        <a:t>varchar(24)</a:t>
+                      </a:r>
+                      <a:endParaRPr lang="en-US" sz="800" dirty="0">
+                        <a:latin typeface="Calibri" charset="0"/>
+                        <a:ea typeface="Calibri" charset="0"/>
+                        <a:cs typeface="Calibri" charset="0"/>
+                      </a:endParaRPr>
+                    </a:p>
+                  </a:txBody>
+                  <a:tcPr marL="91440" marR="91440" marT="45720" marB="45720">
+                    <a:lnL w="6350" cap="flat" cmpd="sng" algn="ctr">
+                      <a:solidFill>
+                        <a:srgbClr val="CCCCCC"/>
+                      </a:solidFill>
+                      <a:prstDash val="solid"/>
+                      <a:round/>
+                      <a:headEnd type="none" w="med" len="med"/>
+                      <a:tailEnd type="none" w="med" len="med"/>
+                    </a:lnL>
+                    <a:lnR w="6350" cap="flat" cmpd="sng" algn="ctr">
+                      <a:solidFill>
+                        <a:srgbClr val="CCCCCC"/>
+                      </a:solidFill>
+                      <a:prstDash val="solid"/>
+                      <a:round/>
+                      <a:headEnd type="none" w="med" len="med"/>
+                      <a:tailEnd type="none" w="med" len="med"/>
+                    </a:lnR>
+                    <a:lnT w="6350" cap="flat" cmpd="sng" algn="ctr">
+                      <a:solidFill>
+                        <a:srgbClr val="CCCCCC"/>
+                      </a:solidFill>
+                      <a:prstDash val="solid"/>
+                      <a:round/>
+                      <a:headEnd type="none" w="med" len="med"/>
+                      <a:tailEnd type="none" w="med" len="med"/>
+                    </a:lnT>
+                    <a:lnB w="6350" cap="flat" cmpd="sng" algn="ctr">
+                      <a:solidFill>
+                        <a:srgbClr val="CCCCCC"/>
+                      </a:solidFill>
+                      <a:prstDash val="solid"/>
+                      <a:round/>
+                      <a:headEnd type="none" w="med" len="med"/>
+                      <a:tailEnd type="none" w="med" len="med"/>
+                    </a:lnB>
+                    <a:solidFill>
+                      <a:srgbClr val="F5F5F5"/>
+                    </a:solidFill>
+                  </a:tcPr>
+                </a:tc>
+                <a:tc>
+                  <a:txBody>
+                    <a:bodyPr/>
+                    <a:lstStyle/>
+                    <a:p>
+                      <a:pPr indent="0" marL="0">
+                        <a:buNone/>
+                      </a:pPr>
+                      <a:r>
+                        <a:rPr lang="en-US" sz="800" dirty="0">
+                          <a:solidFill>
+                            <a:srgbClr val="2D2D2D"/>
+                          </a:solidFill>
+                          <a:latin typeface="Calibri" pitchFamily="34" charset="0"/>
+                          <a:ea typeface="Calibri" pitchFamily="34" charset="-122"/>
+                          <a:cs typeface="Calibri" pitchFamily="34" charset="-120"/>
+                        </a:rPr>
+                        <a:t>スキャンコード (PK)</a:t>
+                      </a:r>
+                      <a:endParaRPr lang="en-US" sz="800" dirty="0">
+                        <a:latin typeface="Calibri" charset="0"/>
+                        <a:ea typeface="Calibri" charset="0"/>
+                        <a:cs typeface="Calibri" charset="0"/>
+                      </a:endParaRPr>
+                    </a:p>
+                  </a:txBody>
+                  <a:tcPr marL="91440" marR="91440" marT="45720" marB="45720">
+                    <a:lnL w="6350" cap="flat" cmpd="sng" algn="ctr">
+                      <a:solidFill>
+                        <a:srgbClr val="CCCCCC"/>
+                      </a:solidFill>
+                      <a:prstDash val="solid"/>
+                      <a:round/>
+                      <a:headEnd type="none" w="med" len="med"/>
+                      <a:tailEnd type="none" w="med" len="med"/>
+                    </a:lnL>
+                    <a:lnR w="6350" cap="flat" cmpd="sng" algn="ctr">
+                      <a:solidFill>
+                        <a:srgbClr val="CCCCCC"/>
+                      </a:solidFill>
+                      <a:prstDash val="solid"/>
+                      <a:round/>
+                      <a:headEnd type="none" w="med" len="med"/>
+                      <a:tailEnd type="none" w="med" len="med"/>
+                    </a:lnR>
+                    <a:lnT w="6350" cap="flat" cmpd="sng" algn="ctr">
+                      <a:solidFill>
+                        <a:srgbClr val="CCCCCC"/>
+                      </a:solidFill>
+                      <a:prstDash val="solid"/>
+                      <a:round/>
+                      <a:headEnd type="none" w="med" len="med"/>
+                      <a:tailEnd type="none" w="med" len="med"/>
+                    </a:lnT>
+                    <a:lnB w="6350" cap="flat" cmpd="sng" algn="ctr">
+                      <a:solidFill>
+                        <a:srgbClr val="CCCCCC"/>
+                      </a:solidFill>
+                      <a:prstDash val="solid"/>
+                      <a:round/>
+                      <a:headEnd type="none" w="med" len="med"/>
+                      <a:tailEnd type="none" w="med" len="med"/>
+                    </a:lnB>
+                    <a:solidFill>
+                      <a:srgbClr val="F5F5F5"/>
+                    </a:solidFill>
+                  </a:tcPr>
+                </a:tc>
+              </a:tr>
+              <a:tr h="228600">
+                <a:tc>
+                  <a:txBody>
+                    <a:bodyPr/>
+                    <a:lstStyle/>
+                    <a:p>
+                      <a:pPr indent="0" marL="0">
+                        <a:buNone/>
+                      </a:pPr>
+                      <a:r>
+                        <a:rPr lang="en-US" sz="800" dirty="0">
+                          <a:solidFill>
+                            <a:srgbClr val="2D2D2D"/>
+                          </a:solidFill>
+                          <a:latin typeface="Calibri" pitchFamily="34" charset="0"/>
+                          <a:ea typeface="Calibri" pitchFamily="34" charset="-122"/>
+                          <a:cs typeface="Calibri" pitchFamily="34" charset="-120"/>
+                        </a:rPr>
+                        <a:t>PLU_ID</a:t>
+                      </a:r>
+                      <a:endParaRPr lang="en-US" sz="800" dirty="0">
+                        <a:latin typeface="Calibri" charset="0"/>
+                        <a:ea typeface="Calibri" charset="0"/>
+                        <a:cs typeface="Calibri" charset="0"/>
+                      </a:endParaRPr>
+                    </a:p>
+                  </a:txBody>
+                  <a:tcPr marL="91440" marR="91440" marT="45720" marB="45720">
+                    <a:lnL w="6350" cap="flat" cmpd="sng" algn="ctr">
+                      <a:solidFill>
+                        <a:srgbClr val="CCCCCC"/>
+                      </a:solidFill>
+                      <a:prstDash val="solid"/>
+                      <a:round/>
+                      <a:headEnd type="none" w="med" len="med"/>
+                      <a:tailEnd type="none" w="med" len="med"/>
+                    </a:lnL>
+                    <a:lnR w="6350" cap="flat" cmpd="sng" algn="ctr">
+                      <a:solidFill>
+                        <a:srgbClr val="CCCCCC"/>
+                      </a:solidFill>
+                      <a:prstDash val="solid"/>
+                      <a:round/>
+                      <a:headEnd type="none" w="med" len="med"/>
+                      <a:tailEnd type="none" w="med" len="med"/>
+                    </a:lnR>
+                    <a:lnT w="6350" cap="flat" cmpd="sng" algn="ctr">
+                      <a:solidFill>
+                        <a:srgbClr val="CCCCCC"/>
+                      </a:solidFill>
+                      <a:prstDash val="solid"/>
+                      <a:round/>
+                      <a:headEnd type="none" w="med" len="med"/>
+                      <a:tailEnd type="none" w="med" len="med"/>
+                    </a:lnT>
+                    <a:lnB w="6350" cap="flat" cmpd="sng" algn="ctr">
+                      <a:solidFill>
+                        <a:srgbClr val="CCCCCC"/>
+                      </a:solidFill>
+                      <a:prstDash val="solid"/>
+                      <a:round/>
+                      <a:headEnd type="none" w="med" len="med"/>
+                      <a:tailEnd type="none" w="med" len="med"/>
+                    </a:lnB>
+                    <a:solidFill>
+                      <a:srgbClr val="FFFFFF"/>
+                    </a:solidFill>
+                  </a:tcPr>
+                </a:tc>
+                <a:tc>
+                  <a:txBody>
+                    <a:bodyPr/>
+                    <a:lstStyle/>
+                    <a:p>
+                      <a:pPr indent="0" marL="0">
+                        <a:buNone/>
+                      </a:pPr>
+                      <a:r>
+                        <a:rPr lang="en-US" sz="800" dirty="0">
+                          <a:solidFill>
+                            <a:srgbClr val="2D2D2D"/>
+                          </a:solidFill>
+                          <a:latin typeface="Calibri" pitchFamily="34" charset="0"/>
+                          <a:ea typeface="Calibri" pitchFamily="34" charset="-122"/>
+                          <a:cs typeface="Calibri" pitchFamily="34" charset="-120"/>
+                        </a:rPr>
+                        <a:t>varchar(24)</a:t>
+                      </a:r>
+                      <a:endParaRPr lang="en-US" sz="800" dirty="0">
+                        <a:latin typeface="Calibri" charset="0"/>
+                        <a:ea typeface="Calibri" charset="0"/>
+                        <a:cs typeface="Calibri" charset="0"/>
+                      </a:endParaRPr>
+                    </a:p>
+                  </a:txBody>
+                  <a:tcPr marL="91440" marR="91440" marT="45720" marB="45720">
+                    <a:lnL w="6350" cap="flat" cmpd="sng" algn="ctr">
+                      <a:solidFill>
+                        <a:srgbClr val="CCCCCC"/>
+                      </a:solidFill>
+                      <a:prstDash val="solid"/>
+                      <a:round/>
+                      <a:headEnd type="none" w="med" len="med"/>
+                      <a:tailEnd type="none" w="med" len="med"/>
+                    </a:lnL>
+                    <a:lnR w="6350" cap="flat" cmpd="sng" algn="ctr">
+                      <a:solidFill>
+                        <a:srgbClr val="CCCCCC"/>
+                      </a:solidFill>
+                      <a:prstDash val="solid"/>
+                      <a:round/>
+                      <a:headEnd type="none" w="med" len="med"/>
+                      <a:tailEnd type="none" w="med" len="med"/>
+                    </a:lnR>
+                    <a:lnT w="6350" cap="flat" cmpd="sng" algn="ctr">
+                      <a:solidFill>
+                        <a:srgbClr val="CCCCCC"/>
+                      </a:solidFill>
+                      <a:prstDash val="solid"/>
+                      <a:round/>
+                      <a:headEnd type="none" w="med" len="med"/>
+                      <a:tailEnd type="none" w="med" len="med"/>
+                    </a:lnT>
+                    <a:lnB w="6350" cap="flat" cmpd="sng" algn="ctr">
+                      <a:solidFill>
+                        <a:srgbClr val="CCCCCC"/>
+                      </a:solidFill>
+                      <a:prstDash val="solid"/>
+                      <a:round/>
+                      <a:headEnd type="none" w="med" len="med"/>
+                      <a:tailEnd type="none" w="med" len="med"/>
+                    </a:lnB>
+                    <a:solidFill>
+                      <a:srgbClr val="FFFFFF"/>
+                    </a:solidFill>
+                  </a:tcPr>
+                </a:tc>
+                <a:tc>
+                  <a:txBody>
+                    <a:bodyPr/>
+                    <a:lstStyle/>
+                    <a:p>
+                      <a:pPr indent="0" marL="0">
+                        <a:buNone/>
+                      </a:pPr>
+                      <a:r>
+                        <a:rPr lang="en-US" sz="800" dirty="0">
+                          <a:solidFill>
+                            <a:srgbClr val="2D2D2D"/>
+                          </a:solidFill>
+                          <a:latin typeface="Calibri" pitchFamily="34" charset="0"/>
+                          <a:ea typeface="Calibri" pitchFamily="34" charset="-122"/>
+                          <a:cs typeface="Calibri" pitchFamily="34" charset="-120"/>
+                        </a:rPr>
+                        <a:t>商品コード</a:t>
+                      </a:r>
+                      <a:endParaRPr lang="en-US" sz="800" dirty="0">
+                        <a:latin typeface="Calibri" charset="0"/>
+                        <a:ea typeface="Calibri" charset="0"/>
+                        <a:cs typeface="Calibri" charset="0"/>
+                      </a:endParaRPr>
+                    </a:p>
+                  </a:txBody>
+                  <a:tcPr marL="91440" marR="91440" marT="45720" marB="45720">
+                    <a:lnL w="6350" cap="flat" cmpd="sng" algn="ctr">
+                      <a:solidFill>
+                        <a:srgbClr val="CCCCCC"/>
+                      </a:solidFill>
+                      <a:prstDash val="solid"/>
+                      <a:round/>
+                      <a:headEnd type="none" w="med" len="med"/>
+                      <a:tailEnd type="none" w="med" len="med"/>
+                    </a:lnL>
+                    <a:lnR w="6350" cap="flat" cmpd="sng" algn="ctr">
+                      <a:solidFill>
+                        <a:srgbClr val="CCCCCC"/>
+                      </a:solidFill>
+                      <a:prstDash val="solid"/>
+                      <a:round/>
+                      <a:headEnd type="none" w="med" len="med"/>
+                      <a:tailEnd type="none" w="med" len="med"/>
+                    </a:lnR>
+                    <a:lnT w="6350" cap="flat" cmpd="sng" algn="ctr">
+                      <a:solidFill>
+                        <a:srgbClr val="CCCCCC"/>
+                      </a:solidFill>
+                      <a:prstDash val="solid"/>
+                      <a:round/>
+                      <a:headEnd type="none" w="med" len="med"/>
+                      <a:tailEnd type="none" w="med" len="med"/>
+                    </a:lnT>
+                    <a:lnB w="6350" cap="flat" cmpd="sng" algn="ctr">
+                      <a:solidFill>
+                        <a:srgbClr val="CCCCCC"/>
+                      </a:solidFill>
+                      <a:prstDash val="solid"/>
+                      <a:round/>
+                      <a:headEnd type="none" w="med" len="med"/>
+                      <a:tailEnd type="none" w="med" len="med"/>
+                    </a:lnB>
+                    <a:solidFill>
+                      <a:srgbClr val="FFFFFF"/>
+                    </a:solidFill>
+                  </a:tcPr>
+                </a:tc>
+              </a:tr>
+              <a:tr h="228600">
+                <a:tc>
+                  <a:txBody>
+                    <a:bodyPr/>
+                    <a:lstStyle/>
+                    <a:p>
+                      <a:pPr indent="0" marL="0">
+                        <a:buNone/>
+                      </a:pPr>
+                      <a:r>
+                        <a:rPr lang="en-US" sz="800" dirty="0">
+                          <a:solidFill>
+                            <a:srgbClr val="2D2D2D"/>
+                          </a:solidFill>
+                          <a:latin typeface="Calibri" pitchFamily="34" charset="0"/>
+                          <a:ea typeface="Calibri" pitchFamily="34" charset="-122"/>
+                          <a:cs typeface="Calibri" pitchFamily="34" charset="-120"/>
+                        </a:rPr>
+                        <a:t>DSPL_DESCR</a:t>
+                      </a:r>
+                      <a:endParaRPr lang="en-US" sz="800" dirty="0">
+                        <a:latin typeface="Calibri" charset="0"/>
+                        <a:ea typeface="Calibri" charset="0"/>
+                        <a:cs typeface="Calibri" charset="0"/>
+                      </a:endParaRPr>
+                    </a:p>
+                  </a:txBody>
+                  <a:tcPr marL="91440" marR="91440" marT="45720" marB="45720">
+                    <a:lnL w="6350" cap="flat" cmpd="sng" algn="ctr">
+                      <a:solidFill>
+                        <a:srgbClr val="CCCCCC"/>
+                      </a:solidFill>
+                      <a:prstDash val="solid"/>
+                      <a:round/>
+                      <a:headEnd type="none" w="med" len="med"/>
+                      <a:tailEnd type="none" w="med" len="med"/>
+                    </a:lnL>
+                    <a:lnR w="6350" cap="flat" cmpd="sng" algn="ctr">
+                      <a:solidFill>
+                        <a:srgbClr val="CCCCCC"/>
+                      </a:solidFill>
+                      <a:prstDash val="solid"/>
+                      <a:round/>
+                      <a:headEnd type="none" w="med" len="med"/>
+                      <a:tailEnd type="none" w="med" len="med"/>
+                    </a:lnR>
+                    <a:lnT w="6350" cap="flat" cmpd="sng" algn="ctr">
+                      <a:solidFill>
+                        <a:srgbClr val="CCCCCC"/>
+                      </a:solidFill>
+                      <a:prstDash val="solid"/>
+                      <a:round/>
+                      <a:headEnd type="none" w="med" len="med"/>
+                      <a:tailEnd type="none" w="med" len="med"/>
+                    </a:lnT>
+                    <a:lnB w="6350" cap="flat" cmpd="sng" algn="ctr">
+                      <a:solidFill>
+                        <a:srgbClr val="CCCCCC"/>
+                      </a:solidFill>
+                      <a:prstDash val="solid"/>
+                      <a:round/>
+                      <a:headEnd type="none" w="med" len="med"/>
+                      <a:tailEnd type="none" w="med" len="med"/>
+                    </a:lnB>
+                    <a:solidFill>
+                      <a:srgbClr val="F5F5F5"/>
+                    </a:solidFill>
+                  </a:tcPr>
+                </a:tc>
+                <a:tc>
+                  <a:txBody>
+                    <a:bodyPr/>
+                    <a:lstStyle/>
+                    <a:p>
+                      <a:pPr indent="0" marL="0">
+                        <a:buNone/>
+                      </a:pPr>
+                      <a:r>
+                        <a:rPr lang="en-US" sz="800" dirty="0">
+                          <a:solidFill>
+                            <a:srgbClr val="2D2D2D"/>
+                          </a:solidFill>
+                          <a:latin typeface="Calibri" pitchFamily="34" charset="0"/>
+                          <a:ea typeface="Calibri" pitchFamily="34" charset="-122"/>
+                          <a:cs typeface="Calibri" pitchFamily="34" charset="-120"/>
+                        </a:rPr>
+                        <a:t>varchar(40)</a:t>
+                      </a:r>
+                      <a:endParaRPr lang="en-US" sz="800" dirty="0">
+                        <a:latin typeface="Calibri" charset="0"/>
+                        <a:ea typeface="Calibri" charset="0"/>
+                        <a:cs typeface="Calibri" charset="0"/>
+                      </a:endParaRPr>
+                    </a:p>
+                  </a:txBody>
+                  <a:tcPr marL="91440" marR="91440" marT="45720" marB="45720">
+                    <a:lnL w="6350" cap="flat" cmpd="sng" algn="ctr">
+                      <a:solidFill>
+                        <a:srgbClr val="CCCCCC"/>
+                      </a:solidFill>
+                      <a:prstDash val="solid"/>
+                      <a:round/>
+                      <a:headEnd type="none" w="med" len="med"/>
+                      <a:tailEnd type="none" w="med" len="med"/>
+                    </a:lnL>
+                    <a:lnR w="6350" cap="flat" cmpd="sng" algn="ctr">
+                      <a:solidFill>
+                        <a:srgbClr val="CCCCCC"/>
+                      </a:solidFill>
+                      <a:prstDash val="solid"/>
+                      <a:round/>
+                      <a:headEnd type="none" w="med" len="med"/>
+                      <a:tailEnd type="none" w="med" len="med"/>
+                    </a:lnR>
+                    <a:lnT w="6350" cap="flat" cmpd="sng" algn="ctr">
+                      <a:solidFill>
+                        <a:srgbClr val="CCCCCC"/>
+                      </a:solidFill>
+                      <a:prstDash val="solid"/>
+                      <a:round/>
+                      <a:headEnd type="none" w="med" len="med"/>
+                      <a:tailEnd type="none" w="med" len="med"/>
+                    </a:lnT>
+                    <a:lnB w="6350" cap="flat" cmpd="sng" algn="ctr">
+                      <a:solidFill>
+                        <a:srgbClr val="CCCCCC"/>
+                      </a:solidFill>
+                      <a:prstDash val="solid"/>
+                      <a:round/>
+                      <a:headEnd type="none" w="med" len="med"/>
+                      <a:tailEnd type="none" w="med" len="med"/>
+                    </a:lnB>
+                    <a:solidFill>
+                      <a:srgbClr val="F5F5F5"/>
+                    </a:solidFill>
+                  </a:tcPr>
+                </a:tc>
+                <a:tc>
+                  <a:txBody>
+                    <a:bodyPr/>
+                    <a:lstStyle/>
+                    <a:p>
+                      <a:pPr indent="0" marL="0">
+                        <a:buNone/>
+                      </a:pPr>
+                      <a:r>
+                        <a:rPr lang="en-US" sz="800" dirty="0">
+                          <a:solidFill>
+                            <a:srgbClr val="2D2D2D"/>
+                          </a:solidFill>
+                          <a:latin typeface="Calibri" pitchFamily="34" charset="0"/>
+                          <a:ea typeface="Calibri" pitchFamily="34" charset="-122"/>
+                          <a:cs typeface="Calibri" pitchFamily="34" charset="-120"/>
+                        </a:rPr>
+                        <a:t>単品名称</a:t>
+                      </a:r>
+                      <a:endParaRPr lang="en-US" sz="800" dirty="0">
+                        <a:latin typeface="Calibri" charset="0"/>
+                        <a:ea typeface="Calibri" charset="0"/>
+                        <a:cs typeface="Calibri" charset="0"/>
+                      </a:endParaRPr>
+                    </a:p>
+                  </a:txBody>
+                  <a:tcPr marL="91440" marR="91440" marT="45720" marB="45720">
+                    <a:lnL w="6350" cap="flat" cmpd="sng" algn="ctr">
+                      <a:solidFill>
+                        <a:srgbClr val="CCCCCC"/>
+                      </a:solidFill>
+                      <a:prstDash val="solid"/>
+                      <a:round/>
+                      <a:headEnd type="none" w="med" len="med"/>
+                      <a:tailEnd type="none" w="med" len="med"/>
+                    </a:lnL>
+                    <a:lnR w="6350" cap="flat" cmpd="sng" algn="ctr">
+                      <a:solidFill>
+                        <a:srgbClr val="CCCCCC"/>
+                      </a:solidFill>
+                      <a:prstDash val="solid"/>
+                      <a:round/>
+                      <a:headEnd type="none" w="med" len="med"/>
+                      <a:tailEnd type="none" w="med" len="med"/>
+                    </a:lnR>
+                    <a:lnT w="6350" cap="flat" cmpd="sng" algn="ctr">
+                      <a:solidFill>
+                        <a:srgbClr val="CCCCCC"/>
+                      </a:solidFill>
+                      <a:prstDash val="solid"/>
+                      <a:round/>
+                      <a:headEnd type="none" w="med" len="med"/>
+                      <a:tailEnd type="none" w="med" len="med"/>
+                    </a:lnT>
+                    <a:lnB w="6350" cap="flat" cmpd="sng" algn="ctr">
+                      <a:solidFill>
+                        <a:srgbClr val="CCCCCC"/>
+                      </a:solidFill>
+                      <a:prstDash val="solid"/>
+                      <a:round/>
+                      <a:headEnd type="none" w="med" len="med"/>
+                      <a:tailEnd type="none" w="med" len="med"/>
+                    </a:lnB>
+                    <a:solidFill>
+                      <a:srgbClr val="F5F5F5"/>
+                    </a:solidFill>
+                  </a:tcPr>
+                </a:tc>
+              </a:tr>
+              <a:tr h="228600">
+                <a:tc>
+                  <a:txBody>
+                    <a:bodyPr/>
+                    <a:lstStyle/>
+                    <a:p>
+                      <a:pPr indent="0" marL="0">
+                        <a:buNone/>
+                      </a:pPr>
+                      <a:r>
+                        <a:rPr lang="en-US" sz="800" dirty="0">
+                          <a:solidFill>
+                            <a:srgbClr val="2D2D2D"/>
+                          </a:solidFill>
+                          <a:latin typeface="Calibri" pitchFamily="34" charset="0"/>
+                          <a:ea typeface="Calibri" pitchFamily="34" charset="-122"/>
+                          <a:cs typeface="Calibri" pitchFamily="34" charset="-120"/>
+                        </a:rPr>
+                        <a:t>DCPT_DESCR</a:t>
+                      </a:r>
+                      <a:endParaRPr lang="en-US" sz="800" dirty="0">
+                        <a:latin typeface="Calibri" charset="0"/>
+                        <a:ea typeface="Calibri" charset="0"/>
+                        <a:cs typeface="Calibri" charset="0"/>
+                      </a:endParaRPr>
+                    </a:p>
+                  </a:txBody>
+                  <a:tcPr marL="91440" marR="91440" marT="45720" marB="45720">
+                    <a:lnL w="6350" cap="flat" cmpd="sng" algn="ctr">
+                      <a:solidFill>
+                        <a:srgbClr val="CCCCCC"/>
+                      </a:solidFill>
+                      <a:prstDash val="solid"/>
+                      <a:round/>
+                      <a:headEnd type="none" w="med" len="med"/>
+                      <a:tailEnd type="none" w="med" len="med"/>
+                    </a:lnL>
+                    <a:lnR w="6350" cap="flat" cmpd="sng" algn="ctr">
+                      <a:solidFill>
+                        <a:srgbClr val="CCCCCC"/>
+                      </a:solidFill>
+                      <a:prstDash val="solid"/>
+                      <a:round/>
+                      <a:headEnd type="none" w="med" len="med"/>
+                      <a:tailEnd type="none" w="med" len="med"/>
+                    </a:lnR>
+                    <a:lnT w="6350" cap="flat" cmpd="sng" algn="ctr">
+                      <a:solidFill>
+                        <a:srgbClr val="CCCCCC"/>
+                      </a:solidFill>
+                      <a:prstDash val="solid"/>
+                      <a:round/>
+                      <a:headEnd type="none" w="med" len="med"/>
+                      <a:tailEnd type="none" w="med" len="med"/>
+                    </a:lnT>
+                    <a:lnB w="6350" cap="flat" cmpd="sng" algn="ctr">
+                      <a:solidFill>
+                        <a:srgbClr val="CCCCCC"/>
+                      </a:solidFill>
+                      <a:prstDash val="solid"/>
+                      <a:round/>
+                      <a:headEnd type="none" w="med" len="med"/>
+                      <a:tailEnd type="none" w="med" len="med"/>
+                    </a:lnB>
+                    <a:solidFill>
+                      <a:srgbClr val="FFFFFF"/>
+                    </a:solidFill>
+                  </a:tcPr>
+                </a:tc>
+                <a:tc>
+                  <a:txBody>
+                    <a:bodyPr/>
+                    <a:lstStyle/>
+                    <a:p>
+                      <a:pPr indent="0" marL="0">
+                        <a:buNone/>
+                      </a:pPr>
+                      <a:r>
+                        <a:rPr lang="en-US" sz="800" dirty="0">
+                          <a:solidFill>
+                            <a:srgbClr val="2D2D2D"/>
+                          </a:solidFill>
+                          <a:latin typeface="Calibri" pitchFamily="34" charset="0"/>
+                          <a:ea typeface="Calibri" pitchFamily="34" charset="-122"/>
+                          <a:cs typeface="Calibri" pitchFamily="34" charset="-120"/>
+                        </a:rPr>
+                        <a:t>varchar(20)</a:t>
+                      </a:r>
+                      <a:endParaRPr lang="en-US" sz="800" dirty="0">
+                        <a:latin typeface="Calibri" charset="0"/>
+                        <a:ea typeface="Calibri" charset="0"/>
+                        <a:cs typeface="Calibri" charset="0"/>
+                      </a:endParaRPr>
+                    </a:p>
+                  </a:txBody>
+                  <a:tcPr marL="91440" marR="91440" marT="45720" marB="45720">
+                    <a:lnL w="6350" cap="flat" cmpd="sng" algn="ctr">
+                      <a:solidFill>
+                        <a:srgbClr val="CCCCCC"/>
+                      </a:solidFill>
+                      <a:prstDash val="solid"/>
+                      <a:round/>
+                      <a:headEnd type="none" w="med" len="med"/>
+                      <a:tailEnd type="none" w="med" len="med"/>
+                    </a:lnL>
+                    <a:lnR w="6350" cap="flat" cmpd="sng" algn="ctr">
+                      <a:solidFill>
+                        <a:srgbClr val="CCCCCC"/>
+                      </a:solidFill>
+                      <a:prstDash val="solid"/>
+                      <a:round/>
+                      <a:headEnd type="none" w="med" len="med"/>
+                      <a:tailEnd type="none" w="med" len="med"/>
+                    </a:lnR>
+                    <a:lnT w="6350" cap="flat" cmpd="sng" algn="ctr">
+                      <a:solidFill>
+                        <a:srgbClr val="CCCCCC"/>
+                      </a:solidFill>
+                      <a:prstDash val="solid"/>
+                      <a:round/>
+                      <a:headEnd type="none" w="med" len="med"/>
+                      <a:tailEnd type="none" w="med" len="med"/>
+                    </a:lnT>
+                    <a:lnB w="6350" cap="flat" cmpd="sng" algn="ctr">
+                      <a:solidFill>
+                        <a:srgbClr val="CCCCCC"/>
+                      </a:solidFill>
+                      <a:prstDash val="solid"/>
+                      <a:round/>
+                      <a:headEnd type="none" w="med" len="med"/>
+                      <a:tailEnd type="none" w="med" len="med"/>
+                    </a:lnB>
+                    <a:solidFill>
+                      <a:srgbClr val="FFFFFF"/>
+                    </a:solidFill>
+                  </a:tcPr>
+                </a:tc>
+                <a:tc>
+                  <a:txBody>
+                    <a:bodyPr/>
+                    <a:lstStyle/>
+                    <a:p>
+                      <a:pPr indent="0" marL="0">
+                        <a:buNone/>
+                      </a:pPr>
+                      <a:r>
+                        <a:rPr lang="en-US" sz="800" dirty="0">
+                          <a:solidFill>
+                            <a:srgbClr val="2D2D2D"/>
+                          </a:solidFill>
+                          <a:latin typeface="Calibri" pitchFamily="34" charset="0"/>
+                          <a:ea typeface="Calibri" pitchFamily="34" charset="-122"/>
+                          <a:cs typeface="Calibri" pitchFamily="34" charset="-120"/>
+                        </a:rPr>
+                        <a:t>レシート記述名</a:t>
+                      </a:r>
+                      <a:endParaRPr lang="en-US" sz="800" dirty="0">
+                        <a:latin typeface="Calibri" charset="0"/>
+                        <a:ea typeface="Calibri" charset="0"/>
+                        <a:cs typeface="Calibri" charset="0"/>
+                      </a:endParaRPr>
+                    </a:p>
+                  </a:txBody>
+                  <a:tcPr marL="91440" marR="91440" marT="45720" marB="45720">
+                    <a:lnL w="6350" cap="flat" cmpd="sng" algn="ctr">
+                      <a:solidFill>
+                        <a:srgbClr val="CCCCCC"/>
+                      </a:solidFill>
+                      <a:prstDash val="solid"/>
+                      <a:round/>
+                      <a:headEnd type="none" w="med" len="med"/>
+                      <a:tailEnd type="none" w="med" len="med"/>
+                    </a:lnL>
+                    <a:lnR w="6350" cap="flat" cmpd="sng" algn="ctr">
+                      <a:solidFill>
+                        <a:srgbClr val="CCCCCC"/>
+                      </a:solidFill>
+                      <a:prstDash val="solid"/>
+                      <a:round/>
+                      <a:headEnd type="none" w="med" len="med"/>
+                      <a:tailEnd type="none" w="med" len="med"/>
+                    </a:lnR>
+                    <a:lnT w="6350" cap="flat" cmpd="sng" algn="ctr">
+                      <a:solidFill>
+                        <a:srgbClr val="CCCCCC"/>
+                      </a:solidFill>
+                      <a:prstDash val="solid"/>
+                      <a:round/>
+                      <a:headEnd type="none" w="med" len="med"/>
+                      <a:tailEnd type="none" w="med" len="med"/>
+                    </a:lnT>
+                    <a:lnB w="6350" cap="flat" cmpd="sng" algn="ctr">
+                      <a:solidFill>
+                        <a:srgbClr val="CCCCCC"/>
+                      </a:solidFill>
+                      <a:prstDash val="solid"/>
+                      <a:round/>
+                      <a:headEnd type="none" w="med" len="med"/>
+                      <a:tailEnd type="none" w="med" len="med"/>
+                    </a:lnB>
+                    <a:solidFill>
+                      <a:srgbClr val="FFFFFF"/>
+                    </a:solidFill>
+                  </a:tcPr>
+                </a:tc>
+              </a:tr>
+              <a:tr h="228600">
+                <a:tc>
+                  <a:txBody>
+                    <a:bodyPr/>
+                    <a:lstStyle/>
+                    <a:p>
+                      <a:pPr indent="0" marL="0">
+                        <a:buNone/>
+                      </a:pPr>
+                      <a:r>
+                        <a:rPr lang="en-US" sz="800" dirty="0">
+                          <a:solidFill>
+                            <a:srgbClr val="2D2D2D"/>
+                          </a:solidFill>
+                          <a:latin typeface="Calibri" pitchFamily="34" charset="0"/>
+                          <a:ea typeface="Calibri" pitchFamily="34" charset="-122"/>
+                          <a:cs typeface="Calibri" pitchFamily="34" charset="-120"/>
+                        </a:rPr>
+                        <a:t>RTL_PRC NV_CD</a:t>
+                      </a:r>
+                      <a:endParaRPr lang="en-US" sz="800" dirty="0">
+                        <a:latin typeface="Calibri" charset="0"/>
+                        <a:ea typeface="Calibri" charset="0"/>
+                        <a:cs typeface="Calibri" charset="0"/>
+                      </a:endParaRPr>
+                    </a:p>
+                  </a:txBody>
+                  <a:tcPr marL="91440" marR="91440" marT="45720" marB="45720">
+                    <a:lnL w="6350" cap="flat" cmpd="sng" algn="ctr">
+                      <a:solidFill>
+                        <a:srgbClr val="CCCCCC"/>
+                      </a:solidFill>
+                      <a:prstDash val="solid"/>
+                      <a:round/>
+                      <a:headEnd type="none" w="med" len="med"/>
+                      <a:tailEnd type="none" w="med" len="med"/>
+                    </a:lnL>
+                    <a:lnR w="6350" cap="flat" cmpd="sng" algn="ctr">
+                      <a:solidFill>
+                        <a:srgbClr val="CCCCCC"/>
+                      </a:solidFill>
+                      <a:prstDash val="solid"/>
+                      <a:round/>
+                      <a:headEnd type="none" w="med" len="med"/>
+                      <a:tailEnd type="none" w="med" len="med"/>
+                    </a:lnR>
+                    <a:lnT w="6350" cap="flat" cmpd="sng" algn="ctr">
+                      <a:solidFill>
+                        <a:srgbClr val="CCCCCC"/>
+                      </a:solidFill>
+                      <a:prstDash val="solid"/>
+                      <a:round/>
+                      <a:headEnd type="none" w="med" len="med"/>
+                      <a:tailEnd type="none" w="med" len="med"/>
+                    </a:lnT>
+                    <a:lnB w="6350" cap="flat" cmpd="sng" algn="ctr">
+                      <a:solidFill>
+                        <a:srgbClr val="CCCCCC"/>
+                      </a:solidFill>
+                      <a:prstDash val="solid"/>
+                      <a:round/>
+                      <a:headEnd type="none" w="med" len="med"/>
+                      <a:tailEnd type="none" w="med" len="med"/>
+                    </a:lnB>
+                    <a:solidFill>
+                      <a:srgbClr val="F5F5F5"/>
+                    </a:solidFill>
+                  </a:tcPr>
+                </a:tc>
+                <a:tc>
+                  <a:txBody>
+                    <a:bodyPr/>
+                    <a:lstStyle/>
+                    <a:p>
+                      <a:pPr indent="0" marL="0">
+                        <a:buNone/>
+                      </a:pPr>
+                      <a:r>
+                        <a:rPr lang="en-US" sz="800" dirty="0">
+                          <a:solidFill>
+                            <a:srgbClr val="2D2D2D"/>
+                          </a:solidFill>
+                          <a:latin typeface="Calibri" pitchFamily="34" charset="0"/>
+                          <a:ea typeface="Calibri" pitchFamily="34" charset="-122"/>
+                          <a:cs typeface="Calibri" pitchFamily="34" charset="-120"/>
+                        </a:rPr>
+                        <a:t>int</a:t>
+                      </a:r>
+                      <a:endParaRPr lang="en-US" sz="800" dirty="0">
+                        <a:latin typeface="Calibri" charset="0"/>
+                        <a:ea typeface="Calibri" charset="0"/>
+                        <a:cs typeface="Calibri" charset="0"/>
+                      </a:endParaRPr>
+                    </a:p>
+                  </a:txBody>
+                  <a:tcPr marL="91440" marR="91440" marT="45720" marB="45720">
+                    <a:lnL w="6350" cap="flat" cmpd="sng" algn="ctr">
+                      <a:solidFill>
+                        <a:srgbClr val="CCCCCC"/>
+                      </a:solidFill>
+                      <a:prstDash val="solid"/>
+                      <a:round/>
+                      <a:headEnd type="none" w="med" len="med"/>
+                      <a:tailEnd type="none" w="med" len="med"/>
+                    </a:lnL>
+                    <a:lnR w="6350" cap="flat" cmpd="sng" algn="ctr">
+                      <a:solidFill>
+                        <a:srgbClr val="CCCCCC"/>
+                      </a:solidFill>
+                      <a:prstDash val="solid"/>
+                      <a:round/>
+                      <a:headEnd type="none" w="med" len="med"/>
+                      <a:tailEnd type="none" w="med" len="med"/>
+                    </a:lnR>
+                    <a:lnT w="6350" cap="flat" cmpd="sng" algn="ctr">
+                      <a:solidFill>
+                        <a:srgbClr val="CCCCCC"/>
+                      </a:solidFill>
+                      <a:prstDash val="solid"/>
+                      <a:round/>
+                      <a:headEnd type="none" w="med" len="med"/>
+                      <a:tailEnd type="none" w="med" len="med"/>
+                    </a:lnT>
+                    <a:lnB w="6350" cap="flat" cmpd="sng" algn="ctr">
+                      <a:solidFill>
+                        <a:srgbClr val="CCCCCC"/>
+                      </a:solidFill>
+                      <a:prstDash val="solid"/>
+                      <a:round/>
+                      <a:headEnd type="none" w="med" len="med"/>
+                      <a:tailEnd type="none" w="med" len="med"/>
+                    </a:lnB>
+                    <a:solidFill>
+                      <a:srgbClr val="F5F5F5"/>
+                    </a:solidFill>
+                  </a:tcPr>
+                </a:tc>
+                <a:tc>
+                  <a:txBody>
+                    <a:bodyPr/>
+                    <a:lstStyle/>
+                    <a:p>
+                      <a:pPr indent="0" marL="0">
+                        <a:buNone/>
+                      </a:pPr>
+                      <a:r>
+                        <a:rPr lang="en-US" sz="800" dirty="0">
+                          <a:solidFill>
+                            <a:srgbClr val="2D2D2D"/>
+                          </a:solidFill>
+                          <a:latin typeface="Calibri" pitchFamily="34" charset="0"/>
+                          <a:ea typeface="Calibri" pitchFamily="34" charset="-122"/>
+                          <a:cs typeface="Calibri" pitchFamily="34" charset="-120"/>
+                        </a:rPr>
+                        <a:t>売価</a:t>
+                      </a:r>
+                      <a:endParaRPr lang="en-US" sz="800" dirty="0">
+                        <a:latin typeface="Calibri" charset="0"/>
+                        <a:ea typeface="Calibri" charset="0"/>
+                        <a:cs typeface="Calibri" charset="0"/>
+                      </a:endParaRPr>
+                    </a:p>
+                  </a:txBody>
+                  <a:tcPr marL="91440" marR="91440" marT="45720" marB="45720">
+                    <a:lnL w="6350" cap="flat" cmpd="sng" algn="ctr">
+                      <a:solidFill>
+                        <a:srgbClr val="CCCCCC"/>
+                      </a:solidFill>
+                      <a:prstDash val="solid"/>
+                      <a:round/>
+                      <a:headEnd type="none" w="med" len="med"/>
+                      <a:tailEnd type="none" w="med" len="med"/>
+                    </a:lnL>
+                    <a:lnR w="6350" cap="flat" cmpd="sng" algn="ctr">
+                      <a:solidFill>
+                        <a:srgbClr val="CCCCCC"/>
+                      </a:solidFill>
+                      <a:prstDash val="solid"/>
+                      <a:round/>
+                      <a:headEnd type="none" w="med" len="med"/>
+                      <a:tailEnd type="none" w="med" len="med"/>
+                    </a:lnR>
+                    <a:lnT w="6350" cap="flat" cmpd="sng" algn="ctr">
+                      <a:solidFill>
+                        <a:srgbClr val="CCCCCC"/>
+                      </a:solidFill>
+                      <a:prstDash val="solid"/>
+                      <a:round/>
+                      <a:headEnd type="none" w="med" len="med"/>
+                      <a:tailEnd type="none" w="med" len="med"/>
+                    </a:lnT>
+                    <a:lnB w="6350" cap="flat" cmpd="sng" algn="ctr">
+                      <a:solidFill>
+                        <a:srgbClr val="CCCCCC"/>
+                      </a:solidFill>
+                      <a:prstDash val="solid"/>
+                      <a:round/>
+                      <a:headEnd type="none" w="med" len="med"/>
+                      <a:tailEnd type="none" w="med" len="med"/>
+                    </a:lnB>
+                    <a:solidFill>
+                      <a:srgbClr val="F5F5F5"/>
+                    </a:solidFill>
+                  </a:tcPr>
+                </a:tc>
+              </a:tr>
+              <a:tr h="228600">
+                <a:tc>
+                  <a:txBody>
+                    <a:bodyPr/>
+                    <a:lstStyle/>
+                    <a:p>
+                      <a:pPr indent="0" marL="0">
+                        <a:buNone/>
+                      </a:pPr>
+                      <a:r>
+                        <a:rPr lang="en-US" sz="800" dirty="0">
+                          <a:solidFill>
+                            <a:srgbClr val="2D2D2D"/>
+                          </a:solidFill>
+                          <a:latin typeface="Calibri" pitchFamily="34" charset="0"/>
+                          <a:ea typeface="Calibri" pitchFamily="34" charset="-122"/>
+                          <a:cs typeface="Calibri" pitchFamily="34" charset="-120"/>
+                        </a:rPr>
+                        <a:t>UNT_CST</a:t>
+                      </a:r>
+                      <a:endParaRPr lang="en-US" sz="800" dirty="0">
+                        <a:latin typeface="Calibri" charset="0"/>
+                        <a:ea typeface="Calibri" charset="0"/>
+                        <a:cs typeface="Calibri" charset="0"/>
+                      </a:endParaRPr>
+                    </a:p>
+                  </a:txBody>
+                  <a:tcPr marL="91440" marR="91440" marT="45720" marB="45720">
+                    <a:lnL w="6350" cap="flat" cmpd="sng" algn="ctr">
+                      <a:solidFill>
+                        <a:srgbClr val="CCCCCC"/>
+                      </a:solidFill>
+                      <a:prstDash val="solid"/>
+                      <a:round/>
+                      <a:headEnd type="none" w="med" len="med"/>
+                      <a:tailEnd type="none" w="med" len="med"/>
+                    </a:lnL>
+                    <a:lnR w="6350" cap="flat" cmpd="sng" algn="ctr">
+                      <a:solidFill>
+                        <a:srgbClr val="CCCCCC"/>
+                      </a:solidFill>
+                      <a:prstDash val="solid"/>
+                      <a:round/>
+                      <a:headEnd type="none" w="med" len="med"/>
+                      <a:tailEnd type="none" w="med" len="med"/>
+                    </a:lnR>
+                    <a:lnT w="6350" cap="flat" cmpd="sng" algn="ctr">
+                      <a:solidFill>
+                        <a:srgbClr val="CCCCCC"/>
+                      </a:solidFill>
+                      <a:prstDash val="solid"/>
+                      <a:round/>
+                      <a:headEnd type="none" w="med" len="med"/>
+                      <a:tailEnd type="none" w="med" len="med"/>
+                    </a:lnT>
+                    <a:lnB w="6350" cap="flat" cmpd="sng" algn="ctr">
+                      <a:solidFill>
+                        <a:srgbClr val="CCCCCC"/>
+                      </a:solidFill>
+                      <a:prstDash val="solid"/>
+                      <a:round/>
+                      <a:headEnd type="none" w="med" len="med"/>
+                      <a:tailEnd type="none" w="med" len="med"/>
+                    </a:lnB>
+                    <a:solidFill>
+                      <a:srgbClr val="FFFFFF"/>
+                    </a:solidFill>
+                  </a:tcPr>
+                </a:tc>
+                <a:tc>
+                  <a:txBody>
+                    <a:bodyPr/>
+                    <a:lstStyle/>
+                    <a:p>
+                      <a:pPr indent="0" marL="0">
+                        <a:buNone/>
+                      </a:pPr>
+                      <a:r>
+                        <a:rPr lang="en-US" sz="800" dirty="0">
+                          <a:solidFill>
+                            <a:srgbClr val="2D2D2D"/>
+                          </a:solidFill>
+                          <a:latin typeface="Calibri" pitchFamily="34" charset="0"/>
+                          <a:ea typeface="Calibri" pitchFamily="34" charset="-122"/>
+                          <a:cs typeface="Calibri" pitchFamily="34" charset="-120"/>
+                        </a:rPr>
+                        <a:t>decimal(9,2)</a:t>
+                      </a:r>
+                      <a:endParaRPr lang="en-US" sz="800" dirty="0">
+                        <a:latin typeface="Calibri" charset="0"/>
+                        <a:ea typeface="Calibri" charset="0"/>
+                        <a:cs typeface="Calibri" charset="0"/>
+                      </a:endParaRPr>
+                    </a:p>
+                  </a:txBody>
+                  <a:tcPr marL="91440" marR="91440" marT="45720" marB="45720">
+                    <a:lnL w="6350" cap="flat" cmpd="sng" algn="ctr">
+                      <a:solidFill>
+                        <a:srgbClr val="CCCCCC"/>
+                      </a:solidFill>
+                      <a:prstDash val="solid"/>
+                      <a:round/>
+                      <a:headEnd type="none" w="med" len="med"/>
+                      <a:tailEnd type="none" w="med" len="med"/>
+                    </a:lnL>
+                    <a:lnR w="6350" cap="flat" cmpd="sng" algn="ctr">
+                      <a:solidFill>
+                        <a:srgbClr val="CCCCCC"/>
+                      </a:solidFill>
+                      <a:prstDash val="solid"/>
+                      <a:round/>
+                      <a:headEnd type="none" w="med" len="med"/>
+                      <a:tailEnd type="none" w="med" len="med"/>
+                    </a:lnR>
+                    <a:lnT w="6350" cap="flat" cmpd="sng" algn="ctr">
+                      <a:solidFill>
+                        <a:srgbClr val="CCCCCC"/>
+                      </a:solidFill>
+                      <a:prstDash val="solid"/>
+                      <a:round/>
+                      <a:headEnd type="none" w="med" len="med"/>
+                      <a:tailEnd type="none" w="med" len="med"/>
+                    </a:lnT>
+                    <a:lnB w="6350" cap="flat" cmpd="sng" algn="ctr">
+                      <a:solidFill>
+                        <a:srgbClr val="CCCCCC"/>
+                      </a:solidFill>
+                      <a:prstDash val="solid"/>
+                      <a:round/>
+                      <a:headEnd type="none" w="med" len="med"/>
+                      <a:tailEnd type="none" w="med" len="med"/>
+                    </a:lnB>
+                    <a:solidFill>
+                      <a:srgbClr val="FFFFFF"/>
+                    </a:solidFill>
+                  </a:tcPr>
+                </a:tc>
+                <a:tc>
+                  <a:txBody>
+                    <a:bodyPr/>
+                    <a:lstStyle/>
+                    <a:p>
+                      <a:pPr indent="0" marL="0">
+                        <a:buNone/>
+                      </a:pPr>
+                      <a:r>
+                        <a:rPr lang="en-US" sz="800" dirty="0">
+                          <a:solidFill>
+                            <a:srgbClr val="2D2D2D"/>
+                          </a:solidFill>
+                          <a:latin typeface="Calibri" pitchFamily="34" charset="0"/>
+                          <a:ea typeface="Calibri" pitchFamily="34" charset="-122"/>
+                          <a:cs typeface="Calibri" pitchFamily="34" charset="-120"/>
+                        </a:rPr>
+                        <a:t>単位原価</a:t>
+                      </a:r>
+                      <a:endParaRPr lang="en-US" sz="800" dirty="0">
+                        <a:latin typeface="Calibri" charset="0"/>
+                        <a:ea typeface="Calibri" charset="0"/>
+                        <a:cs typeface="Calibri" charset="0"/>
+                      </a:endParaRPr>
+                    </a:p>
+                  </a:txBody>
+                  <a:tcPr marL="91440" marR="91440" marT="45720" marB="45720">
+                    <a:lnL w="6350" cap="flat" cmpd="sng" algn="ctr">
+                      <a:solidFill>
+                        <a:srgbClr val="CCCCCC"/>
+                      </a:solidFill>
+                      <a:prstDash val="solid"/>
+                      <a:round/>
+                      <a:headEnd type="none" w="med" len="med"/>
+                      <a:tailEnd type="none" w="med" len="med"/>
+                    </a:lnL>
+                    <a:lnR w="6350" cap="flat" cmpd="sng" algn="ctr">
+                      <a:solidFill>
+                        <a:srgbClr val="CCCCCC"/>
+                      </a:solidFill>
+                      <a:prstDash val="solid"/>
+                      <a:round/>
+                      <a:headEnd type="none" w="med" len="med"/>
+                      <a:tailEnd type="none" w="med" len="med"/>
+                    </a:lnR>
+                    <a:lnT w="6350" cap="flat" cmpd="sng" algn="ctr">
+                      <a:solidFill>
+                        <a:srgbClr val="CCCCCC"/>
+                      </a:solidFill>
+                      <a:prstDash val="solid"/>
+                      <a:round/>
+                      <a:headEnd type="none" w="med" len="med"/>
+                      <a:tailEnd type="none" w="med" len="med"/>
+                    </a:lnT>
+                    <a:lnB w="6350" cap="flat" cmpd="sng" algn="ctr">
+                      <a:solidFill>
+                        <a:srgbClr val="CCCCCC"/>
+                      </a:solidFill>
+                      <a:prstDash val="solid"/>
+                      <a:round/>
+                      <a:headEnd type="none" w="med" len="med"/>
+                      <a:tailEnd type="none" w="med" len="med"/>
+                    </a:lnB>
+                    <a:solidFill>
+                      <a:srgbClr val="FFFFFF"/>
+                    </a:solidFill>
+                  </a:tcPr>
+                </a:tc>
+              </a:tr>
+              <a:tr h="228600">
+                <a:tc>
+                  <a:txBody>
+                    <a:bodyPr/>
+                    <a:lstStyle/>
+                    <a:p>
+                      <a:pPr indent="0" marL="0">
+                        <a:buNone/>
+                      </a:pPr>
+                      <a:r>
+                        <a:rPr lang="en-US" sz="800" dirty="0">
+                          <a:solidFill>
+                            <a:srgbClr val="2D2D2D"/>
+                          </a:solidFill>
+                          <a:latin typeface="Calibri" pitchFamily="34" charset="0"/>
+                          <a:ea typeface="Calibri" pitchFamily="34" charset="-122"/>
+                          <a:cs typeface="Calibri" pitchFamily="34" charset="-120"/>
+                        </a:rPr>
+                        <a:t>REG_PRC</a:t>
+                      </a:r>
+                      <a:endParaRPr lang="en-US" sz="800" dirty="0">
+                        <a:latin typeface="Calibri" charset="0"/>
+                        <a:ea typeface="Calibri" charset="0"/>
+                        <a:cs typeface="Calibri" charset="0"/>
+                      </a:endParaRPr>
+                    </a:p>
+                  </a:txBody>
+                  <a:tcPr marL="91440" marR="91440" marT="45720" marB="45720">
+                    <a:lnL w="6350" cap="flat" cmpd="sng" algn="ctr">
+                      <a:solidFill>
+                        <a:srgbClr val="CCCCCC"/>
+                      </a:solidFill>
+                      <a:prstDash val="solid"/>
+                      <a:round/>
+                      <a:headEnd type="none" w="med" len="med"/>
+                      <a:tailEnd type="none" w="med" len="med"/>
+                    </a:lnL>
+                    <a:lnR w="6350" cap="flat" cmpd="sng" algn="ctr">
+                      <a:solidFill>
+                        <a:srgbClr val="CCCCCC"/>
+                      </a:solidFill>
+                      <a:prstDash val="solid"/>
+                      <a:round/>
+                      <a:headEnd type="none" w="med" len="med"/>
+                      <a:tailEnd type="none" w="med" len="med"/>
+                    </a:lnR>
+                    <a:lnT w="6350" cap="flat" cmpd="sng" algn="ctr">
+                      <a:solidFill>
+                        <a:srgbClr val="CCCCCC"/>
+                      </a:solidFill>
+                      <a:prstDash val="solid"/>
+                      <a:round/>
+                      <a:headEnd type="none" w="med" len="med"/>
+                      <a:tailEnd type="none" w="med" len="med"/>
+                    </a:lnT>
+                    <a:lnB w="6350" cap="flat" cmpd="sng" algn="ctr">
+                      <a:solidFill>
+                        <a:srgbClr val="CCCCCC"/>
+                      </a:solidFill>
+                      <a:prstDash val="solid"/>
+                      <a:round/>
+                      <a:headEnd type="none" w="med" len="med"/>
+                      <a:tailEnd type="none" w="med" len="med"/>
+                    </a:lnB>
+                    <a:solidFill>
+                      <a:srgbClr val="F5F5F5"/>
+                    </a:solidFill>
+                  </a:tcPr>
+                </a:tc>
+                <a:tc>
+                  <a:txBody>
+                    <a:bodyPr/>
+                    <a:lstStyle/>
+                    <a:p>
+                      <a:pPr indent="0" marL="0">
+                        <a:buNone/>
+                      </a:pPr>
+                      <a:r>
+                        <a:rPr lang="en-US" sz="800" dirty="0">
+                          <a:solidFill>
+                            <a:srgbClr val="2D2D2D"/>
+                          </a:solidFill>
+                          <a:latin typeface="Calibri" pitchFamily="34" charset="0"/>
+                          <a:ea typeface="Calibri" pitchFamily="34" charset="-122"/>
+                          <a:cs typeface="Calibri" pitchFamily="34" charset="-120"/>
+                        </a:rPr>
+                        <a:t>int</a:t>
+                      </a:r>
+                      <a:endParaRPr lang="en-US" sz="800" dirty="0">
+                        <a:latin typeface="Calibri" charset="0"/>
+                        <a:ea typeface="Calibri" charset="0"/>
+                        <a:cs typeface="Calibri" charset="0"/>
+                      </a:endParaRPr>
+                    </a:p>
+                  </a:txBody>
+                  <a:tcPr marL="91440" marR="91440" marT="45720" marB="45720">
+                    <a:lnL w="6350" cap="flat" cmpd="sng" algn="ctr">
+                      <a:solidFill>
+                        <a:srgbClr val="CCCCCC"/>
+                      </a:solidFill>
+                      <a:prstDash val="solid"/>
+                      <a:round/>
+                      <a:headEnd type="none" w="med" len="med"/>
+                      <a:tailEnd type="none" w="med" len="med"/>
+                    </a:lnL>
+                    <a:lnR w="6350" cap="flat" cmpd="sng" algn="ctr">
+                      <a:solidFill>
+                        <a:srgbClr val="CCCCCC"/>
+                      </a:solidFill>
+                      <a:prstDash val="solid"/>
+                      <a:round/>
+                      <a:headEnd type="none" w="med" len="med"/>
+                      <a:tailEnd type="none" w="med" len="med"/>
+                    </a:lnR>
+                    <a:lnT w="6350" cap="flat" cmpd="sng" algn="ctr">
+                      <a:solidFill>
+                        <a:srgbClr val="CCCCCC"/>
+                      </a:solidFill>
+                      <a:prstDash val="solid"/>
+                      <a:round/>
+                      <a:headEnd type="none" w="med" len="med"/>
+                      <a:tailEnd type="none" w="med" len="med"/>
+                    </a:lnT>
+                    <a:lnB w="6350" cap="flat" cmpd="sng" algn="ctr">
+                      <a:solidFill>
+                        <a:srgbClr val="CCCCCC"/>
+                      </a:solidFill>
+                      <a:prstDash val="solid"/>
+                      <a:round/>
+                      <a:headEnd type="none" w="med" len="med"/>
+                      <a:tailEnd type="none" w="med" len="med"/>
+                    </a:lnB>
+                    <a:solidFill>
+                      <a:srgbClr val="F5F5F5"/>
+                    </a:solidFill>
+                  </a:tcPr>
+                </a:tc>
+                <a:tc>
+                  <a:txBody>
+                    <a:bodyPr/>
+                    <a:lstStyle/>
+                    <a:p>
+                      <a:pPr indent="0" marL="0">
+                        <a:buNone/>
+                      </a:pPr>
+                      <a:r>
+                        <a:rPr lang="en-US" sz="800" dirty="0">
+                          <a:solidFill>
+                            <a:srgbClr val="2D2D2D"/>
+                          </a:solidFill>
+                          <a:latin typeface="Calibri" pitchFamily="34" charset="0"/>
+                          <a:ea typeface="Calibri" pitchFamily="34" charset="-122"/>
+                          <a:cs typeface="Calibri" pitchFamily="34" charset="-120"/>
+                        </a:rPr>
+                        <a:t>定価</a:t>
+                      </a:r>
+                      <a:endParaRPr lang="en-US" sz="800" dirty="0">
+                        <a:latin typeface="Calibri" charset="0"/>
+                        <a:ea typeface="Calibri" charset="0"/>
+                        <a:cs typeface="Calibri" charset="0"/>
+                      </a:endParaRPr>
+                    </a:p>
+                  </a:txBody>
+                  <a:tcPr marL="91440" marR="91440" marT="45720" marB="45720">
+                    <a:lnL w="6350" cap="flat" cmpd="sng" algn="ctr">
+                      <a:solidFill>
+                        <a:srgbClr val="CCCCCC"/>
+                      </a:solidFill>
+                      <a:prstDash val="solid"/>
+                      <a:round/>
+                      <a:headEnd type="none" w="med" len="med"/>
+                      <a:tailEnd type="none" w="med" len="med"/>
+                    </a:lnL>
+                    <a:lnR w="6350" cap="flat" cmpd="sng" algn="ctr">
+                      <a:solidFill>
+                        <a:srgbClr val="CCCCCC"/>
+                      </a:solidFill>
+                      <a:prstDash val="solid"/>
+                      <a:round/>
+                      <a:headEnd type="none" w="med" len="med"/>
+                      <a:tailEnd type="none" w="med" len="med"/>
+                    </a:lnR>
+                    <a:lnT w="6350" cap="flat" cmpd="sng" algn="ctr">
+                      <a:solidFill>
+                        <a:srgbClr val="CCCCCC"/>
+                      </a:solidFill>
+                      <a:prstDash val="solid"/>
+                      <a:round/>
+                      <a:headEnd type="none" w="med" len="med"/>
+                      <a:tailEnd type="none" w="med" len="med"/>
+                    </a:lnT>
+                    <a:lnB w="6350" cap="flat" cmpd="sng" algn="ctr">
+                      <a:solidFill>
+                        <a:srgbClr val="CCCCCC"/>
+                      </a:solidFill>
+                      <a:prstDash val="solid"/>
+                      <a:round/>
+                      <a:headEnd type="none" w="med" len="med"/>
+                      <a:tailEnd type="none" w="med" len="med"/>
+                    </a:lnB>
+                    <a:solidFill>
+                      <a:srgbClr val="F5F5F5"/>
+                    </a:solidFill>
+                  </a:tcPr>
+                </a:tc>
+              </a:tr>
+              <a:tr h="228600">
+                <a:tc>
+                  <a:txBody>
+                    <a:bodyPr/>
+                    <a:lstStyle/>
+                    <a:p>
+                      <a:pPr indent="0" marL="0">
+                        <a:buNone/>
+                      </a:pPr>
+                      <a:r>
+                        <a:rPr lang="en-US" sz="800" dirty="0">
+                          <a:solidFill>
+                            <a:srgbClr val="2D2D2D"/>
+                          </a:solidFill>
+                          <a:latin typeface="Calibri" pitchFamily="34" charset="0"/>
+                          <a:ea typeface="Calibri" pitchFamily="34" charset="-122"/>
+                          <a:cs typeface="Calibri" pitchFamily="34" charset="-120"/>
+                        </a:rPr>
+                        <a:t>GSFD_MBR_PRC</a:t>
+                      </a:r>
+                      <a:endParaRPr lang="en-US" sz="800" dirty="0">
+                        <a:latin typeface="Calibri" charset="0"/>
+                        <a:ea typeface="Calibri" charset="0"/>
+                        <a:cs typeface="Calibri" charset="0"/>
+                      </a:endParaRPr>
+                    </a:p>
+                  </a:txBody>
+                  <a:tcPr marL="91440" marR="91440" marT="45720" marB="45720">
+                    <a:lnL w="6350" cap="flat" cmpd="sng" algn="ctr">
+                      <a:solidFill>
+                        <a:srgbClr val="CCCCCC"/>
+                      </a:solidFill>
+                      <a:prstDash val="solid"/>
+                      <a:round/>
+                      <a:headEnd type="none" w="med" len="med"/>
+                      <a:tailEnd type="none" w="med" len="med"/>
+                    </a:lnL>
+                    <a:lnR w="6350" cap="flat" cmpd="sng" algn="ctr">
+                      <a:solidFill>
+                        <a:srgbClr val="CCCCCC"/>
+                      </a:solidFill>
+                      <a:prstDash val="solid"/>
+                      <a:round/>
+                      <a:headEnd type="none" w="med" len="med"/>
+                      <a:tailEnd type="none" w="med" len="med"/>
+                    </a:lnR>
+                    <a:lnT w="6350" cap="flat" cmpd="sng" algn="ctr">
+                      <a:solidFill>
+                        <a:srgbClr val="CCCCCC"/>
+                      </a:solidFill>
+                      <a:prstDash val="solid"/>
+                      <a:round/>
+                      <a:headEnd type="none" w="med" len="med"/>
+                      <a:tailEnd type="none" w="med" len="med"/>
+                    </a:lnT>
+                    <a:lnB w="6350" cap="flat" cmpd="sng" algn="ctr">
+                      <a:solidFill>
+                        <a:srgbClr val="CCCCCC"/>
+                      </a:solidFill>
+                      <a:prstDash val="solid"/>
+                      <a:round/>
+                      <a:headEnd type="none" w="med" len="med"/>
+                      <a:tailEnd type="none" w="med" len="med"/>
+                    </a:lnB>
+                    <a:solidFill>
+                      <a:srgbClr val="FFFFFF"/>
+                    </a:solidFill>
+                  </a:tcPr>
+                </a:tc>
+                <a:tc>
+                  <a:txBody>
+                    <a:bodyPr/>
+                    <a:lstStyle/>
+                    <a:p>
+                      <a:pPr indent="0" marL="0">
+                        <a:buNone/>
+                      </a:pPr>
+                      <a:r>
+                        <a:rPr lang="en-US" sz="800" dirty="0">
+                          <a:solidFill>
+                            <a:srgbClr val="2D2D2D"/>
+                          </a:solidFill>
+                          <a:latin typeface="Calibri" pitchFamily="34" charset="0"/>
+                          <a:ea typeface="Calibri" pitchFamily="34" charset="-122"/>
+                          <a:cs typeface="Calibri" pitchFamily="34" charset="-120"/>
+                        </a:rPr>
+                        <a:t>int</a:t>
+                      </a:r>
+                      <a:endParaRPr lang="en-US" sz="800" dirty="0">
+                        <a:latin typeface="Calibri" charset="0"/>
+                        <a:ea typeface="Calibri" charset="0"/>
+                        <a:cs typeface="Calibri" charset="0"/>
+                      </a:endParaRPr>
+                    </a:p>
+                  </a:txBody>
+                  <a:tcPr marL="91440" marR="91440" marT="45720" marB="45720">
+                    <a:lnL w="6350" cap="flat" cmpd="sng" algn="ctr">
+                      <a:solidFill>
+                        <a:srgbClr val="CCCCCC"/>
+                      </a:solidFill>
+                      <a:prstDash val="solid"/>
+                      <a:round/>
+                      <a:headEnd type="none" w="med" len="med"/>
+                      <a:tailEnd type="none" w="med" len="med"/>
+                    </a:lnL>
+                    <a:lnR w="6350" cap="flat" cmpd="sng" algn="ctr">
+                      <a:solidFill>
+                        <a:srgbClr val="CCCCCC"/>
+                      </a:solidFill>
+                      <a:prstDash val="solid"/>
+                      <a:round/>
+                      <a:headEnd type="none" w="med" len="med"/>
+                      <a:tailEnd type="none" w="med" len="med"/>
+                    </a:lnR>
+                    <a:lnT w="6350" cap="flat" cmpd="sng" algn="ctr">
+                      <a:solidFill>
+                        <a:srgbClr val="CCCCCC"/>
+                      </a:solidFill>
+                      <a:prstDash val="solid"/>
+                      <a:round/>
+                      <a:headEnd type="none" w="med" len="med"/>
+                      <a:tailEnd type="none" w="med" len="med"/>
+                    </a:lnT>
+                    <a:lnB w="6350" cap="flat" cmpd="sng" algn="ctr">
+                      <a:solidFill>
+                        <a:srgbClr val="CCCCCC"/>
+                      </a:solidFill>
+                      <a:prstDash val="solid"/>
+                      <a:round/>
+                      <a:headEnd type="none" w="med" len="med"/>
+                      <a:tailEnd type="none" w="med" len="med"/>
+                    </a:lnB>
+                    <a:solidFill>
+                      <a:srgbClr val="FFFFFF"/>
+                    </a:solidFill>
+                  </a:tcPr>
+                </a:tc>
+                <a:tc>
+                  <a:txBody>
+                    <a:bodyPr/>
+                    <a:lstStyle/>
+                    <a:p>
+                      <a:pPr indent="0" marL="0">
+                        <a:buNone/>
+                      </a:pPr>
+                      <a:r>
+                        <a:rPr lang="en-US" sz="800" dirty="0">
+                          <a:solidFill>
+                            <a:srgbClr val="2D2D2D"/>
+                          </a:solidFill>
+                          <a:latin typeface="Calibri" pitchFamily="34" charset="0"/>
+                          <a:ea typeface="Calibri" pitchFamily="34" charset="-122"/>
+                          <a:cs typeface="Calibri" pitchFamily="34" charset="-120"/>
+                        </a:rPr>
+                        <a:t>会員価格</a:t>
+                      </a:r>
+                      <a:endParaRPr lang="en-US" sz="800" dirty="0">
+                        <a:latin typeface="Calibri" charset="0"/>
+                        <a:ea typeface="Calibri" charset="0"/>
+                        <a:cs typeface="Calibri" charset="0"/>
+                      </a:endParaRPr>
+                    </a:p>
+                  </a:txBody>
+                  <a:tcPr marL="91440" marR="91440" marT="45720" marB="45720">
+                    <a:lnL w="6350" cap="flat" cmpd="sng" algn="ctr">
+                      <a:solidFill>
+                        <a:srgbClr val="CCCCCC"/>
+                      </a:solidFill>
+                      <a:prstDash val="solid"/>
+                      <a:round/>
+                      <a:headEnd type="none" w="med" len="med"/>
+                      <a:tailEnd type="none" w="med" len="med"/>
+                    </a:lnL>
+                    <a:lnR w="6350" cap="flat" cmpd="sng" algn="ctr">
+                      <a:solidFill>
+                        <a:srgbClr val="CCCCCC"/>
+                      </a:solidFill>
+                      <a:prstDash val="solid"/>
+                      <a:round/>
+                      <a:headEnd type="none" w="med" len="med"/>
+                      <a:tailEnd type="none" w="med" len="med"/>
+                    </a:lnR>
+                    <a:lnT w="6350" cap="flat" cmpd="sng" algn="ctr">
+                      <a:solidFill>
+                        <a:srgbClr val="CCCCCC"/>
+                      </a:solidFill>
+                      <a:prstDash val="solid"/>
+                      <a:round/>
+                      <a:headEnd type="none" w="med" len="med"/>
+                      <a:tailEnd type="none" w="med" len="med"/>
+                    </a:lnT>
+                    <a:lnB w="6350" cap="flat" cmpd="sng" algn="ctr">
+                      <a:solidFill>
+                        <a:srgbClr val="CCCCCC"/>
+                      </a:solidFill>
+                      <a:prstDash val="solid"/>
+                      <a:round/>
+                      <a:headEnd type="none" w="med" len="med"/>
+                      <a:tailEnd type="none" w="med" len="med"/>
+                    </a:lnB>
+                    <a:solidFill>
+                      <a:srgbClr val="FFFFFF"/>
+                    </a:solidFill>
+                  </a:tcPr>
+                </a:tc>
+              </a:tr>
+              <a:tr h="228600">
+                <a:tc>
+                  <a:txBody>
+                    <a:bodyPr/>
+                    <a:lstStyle/>
+                    <a:p>
+                      <a:pPr indent="0" marL="0">
+                        <a:buNone/>
+                      </a:pPr>
+                      <a:r>
+                        <a:rPr lang="en-US" sz="800" dirty="0">
+                          <a:solidFill>
+                            <a:srgbClr val="2D2D2D"/>
+                          </a:solidFill>
+                          <a:latin typeface="Calibri" pitchFamily="34" charset="0"/>
+                          <a:ea typeface="Calibri" pitchFamily="34" charset="-122"/>
+                          <a:cs typeface="Calibri" pitchFamily="34" charset="-120"/>
+                        </a:rPr>
+                        <a:t>PRCS_TYP</a:t>
+                      </a:r>
+                      <a:endParaRPr lang="en-US" sz="800" dirty="0">
+                        <a:latin typeface="Calibri" charset="0"/>
+                        <a:ea typeface="Calibri" charset="0"/>
+                        <a:cs typeface="Calibri" charset="0"/>
+                      </a:endParaRPr>
+                    </a:p>
+                  </a:txBody>
+                  <a:tcPr marL="91440" marR="91440" marT="45720" marB="45720">
+                    <a:lnL w="6350" cap="flat" cmpd="sng" algn="ctr">
+                      <a:solidFill>
+                        <a:srgbClr val="CCCCCC"/>
+                      </a:solidFill>
+                      <a:prstDash val="solid"/>
+                      <a:round/>
+                      <a:headEnd type="none" w="med" len="med"/>
+                      <a:tailEnd type="none" w="med" len="med"/>
+                    </a:lnL>
+                    <a:lnR w="6350" cap="flat" cmpd="sng" algn="ctr">
+                      <a:solidFill>
+                        <a:srgbClr val="CCCCCC"/>
+                      </a:solidFill>
+                      <a:prstDash val="solid"/>
+                      <a:round/>
+                      <a:headEnd type="none" w="med" len="med"/>
+                      <a:tailEnd type="none" w="med" len="med"/>
+                    </a:lnR>
+                    <a:lnT w="6350" cap="flat" cmpd="sng" algn="ctr">
+                      <a:solidFill>
+                        <a:srgbClr val="CCCCCC"/>
+                      </a:solidFill>
+                      <a:prstDash val="solid"/>
+                      <a:round/>
+                      <a:headEnd type="none" w="med" len="med"/>
+                      <a:tailEnd type="none" w="med" len="med"/>
+                    </a:lnT>
+                    <a:lnB w="6350" cap="flat" cmpd="sng" algn="ctr">
+                      <a:solidFill>
+                        <a:srgbClr val="CCCCCC"/>
+                      </a:solidFill>
+                      <a:prstDash val="solid"/>
+                      <a:round/>
+                      <a:headEnd type="none" w="med" len="med"/>
+                      <a:tailEnd type="none" w="med" len="med"/>
+                    </a:lnB>
+                    <a:solidFill>
+                      <a:srgbClr val="F5F5F5"/>
+                    </a:solidFill>
+                  </a:tcPr>
+                </a:tc>
+                <a:tc>
+                  <a:txBody>
+                    <a:bodyPr/>
+                    <a:lstStyle/>
+                    <a:p>
+                      <a:pPr indent="0" marL="0">
+                        <a:buNone/>
+                      </a:pPr>
+                      <a:r>
+                        <a:rPr lang="en-US" sz="800" dirty="0">
+                          <a:solidFill>
+                            <a:srgbClr val="2D2D2D"/>
+                          </a:solidFill>
+                          <a:latin typeface="Calibri" pitchFamily="34" charset="0"/>
+                          <a:ea typeface="Calibri" pitchFamily="34" charset="-122"/>
+                          <a:cs typeface="Calibri" pitchFamily="34" charset="-120"/>
+                        </a:rPr>
+                        <a:t>varchar(1)</a:t>
+                      </a:r>
+                      <a:endParaRPr lang="en-US" sz="800" dirty="0">
+                        <a:latin typeface="Calibri" charset="0"/>
+                        <a:ea typeface="Calibri" charset="0"/>
+                        <a:cs typeface="Calibri" charset="0"/>
+                      </a:endParaRPr>
+                    </a:p>
+                  </a:txBody>
+                  <a:tcPr marL="91440" marR="91440" marT="45720" marB="45720">
+                    <a:lnL w="6350" cap="flat" cmpd="sng" algn="ctr">
+                      <a:solidFill>
+                        <a:srgbClr val="CCCCCC"/>
+                      </a:solidFill>
+                      <a:prstDash val="solid"/>
+                      <a:round/>
+                      <a:headEnd type="none" w="med" len="med"/>
+                      <a:tailEnd type="none" w="med" len="med"/>
+                    </a:lnL>
+                    <a:lnR w="6350" cap="flat" cmpd="sng" algn="ctr">
+                      <a:solidFill>
+                        <a:srgbClr val="CCCCCC"/>
+                      </a:solidFill>
+                      <a:prstDash val="solid"/>
+                      <a:round/>
+                      <a:headEnd type="none" w="med" len="med"/>
+                      <a:tailEnd type="none" w="med" len="med"/>
+                    </a:lnR>
+                    <a:lnT w="6350" cap="flat" cmpd="sng" algn="ctr">
+                      <a:solidFill>
+                        <a:srgbClr val="CCCCCC"/>
+                      </a:solidFill>
+                      <a:prstDash val="solid"/>
+                      <a:round/>
+                      <a:headEnd type="none" w="med" len="med"/>
+                      <a:tailEnd type="none" w="med" len="med"/>
+                    </a:lnT>
+                    <a:lnB w="6350" cap="flat" cmpd="sng" algn="ctr">
+                      <a:solidFill>
+                        <a:srgbClr val="CCCCCC"/>
+                      </a:solidFill>
+                      <a:prstDash val="solid"/>
+                      <a:round/>
+                      <a:headEnd type="none" w="med" len="med"/>
+                      <a:tailEnd type="none" w="med" len="med"/>
+                    </a:lnB>
+                    <a:solidFill>
+                      <a:srgbClr val="F5F5F5"/>
+                    </a:solidFill>
+                  </a:tcPr>
+                </a:tc>
+                <a:tc>
+                  <a:txBody>
+                    <a:bodyPr/>
+                    <a:lstStyle/>
+                    <a:p>
+                      <a:pPr indent="0" marL="0">
+                        <a:buNone/>
+                      </a:pPr>
+                      <a:r>
+                        <a:rPr lang="en-US" sz="800" dirty="0">
+                          <a:solidFill>
+                            <a:srgbClr val="2D2D2D"/>
+                          </a:solidFill>
+                          <a:latin typeface="Calibri" pitchFamily="34" charset="0"/>
+                          <a:ea typeface="Calibri" pitchFamily="34" charset="-122"/>
+                          <a:cs typeface="Calibri" pitchFamily="34" charset="-120"/>
+                        </a:rPr>
+                        <a:t>処理区分（A:登録/U:更新/D:削除）</a:t>
+                      </a:r>
+                      <a:endParaRPr lang="en-US" sz="800" dirty="0">
+                        <a:latin typeface="Calibri" charset="0"/>
+                        <a:ea typeface="Calibri" charset="0"/>
+                        <a:cs typeface="Calibri" charset="0"/>
+                      </a:endParaRPr>
+                    </a:p>
+                  </a:txBody>
+                  <a:tcPr marL="91440" marR="91440" marT="45720" marB="45720">
+                    <a:lnL w="6350" cap="flat" cmpd="sng" algn="ctr">
+                      <a:solidFill>
+                        <a:srgbClr val="CCCCCC"/>
+                      </a:solidFill>
+                      <a:prstDash val="solid"/>
+                      <a:round/>
+                      <a:headEnd type="none" w="med" len="med"/>
+                      <a:tailEnd type="none" w="med" len="med"/>
+                    </a:lnL>
+                    <a:lnR w="6350" cap="flat" cmpd="sng" algn="ctr">
+                      <a:solidFill>
+                        <a:srgbClr val="CCCCCC"/>
+                      </a:solidFill>
+                      <a:prstDash val="solid"/>
+                      <a:round/>
+                      <a:headEnd type="none" w="med" len="med"/>
+                      <a:tailEnd type="none" w="med" len="med"/>
+                    </a:lnR>
+                    <a:lnT w="6350" cap="flat" cmpd="sng" algn="ctr">
+                      <a:solidFill>
+                        <a:srgbClr val="CCCCCC"/>
+                      </a:solidFill>
+                      <a:prstDash val="solid"/>
+                      <a:round/>
+                      <a:headEnd type="none" w="med" len="med"/>
+                      <a:tailEnd type="none" w="med" len="med"/>
+                    </a:lnT>
+                    <a:lnB w="6350" cap="flat" cmpd="sng" algn="ctr">
+                      <a:solidFill>
+                        <a:srgbClr val="CCCCCC"/>
+                      </a:solidFill>
+                      <a:prstDash val="solid"/>
+                      <a:round/>
+                      <a:headEnd type="none" w="med" len="med"/>
+                      <a:tailEnd type="none" w="med" len="med"/>
+                    </a:lnB>
+                    <a:solidFill>
+                      <a:srgbClr val="F5F5F5"/>
+                    </a:solidFill>
+                  </a:tcPr>
+                </a:tc>
+              </a:tr>
+              <a:tr h="228600">
+                <a:tc>
+                  <a:txBody>
+                    <a:bodyPr/>
+                    <a:lstStyle/>
+                    <a:p>
+                      <a:pPr indent="0" marL="0">
+                        <a:buNone/>
+                      </a:pPr>
+                      <a:r>
+                        <a:rPr lang="en-US" sz="800" dirty="0">
+                          <a:solidFill>
+                            <a:srgbClr val="2D2D2D"/>
+                          </a:solidFill>
+                          <a:latin typeface="Calibri" pitchFamily="34" charset="0"/>
+                          <a:ea typeface="Calibri" pitchFamily="34" charset="-122"/>
+                          <a:cs typeface="Calibri" pitchFamily="34" charset="-120"/>
+                        </a:rPr>
+                        <a:t>PRCS_FG</a:t>
+                      </a:r>
+                      <a:endParaRPr lang="en-US" sz="800" dirty="0">
+                        <a:latin typeface="Calibri" charset="0"/>
+                        <a:ea typeface="Calibri" charset="0"/>
+                        <a:cs typeface="Calibri" charset="0"/>
+                      </a:endParaRPr>
+                    </a:p>
+                  </a:txBody>
+                  <a:tcPr marL="91440" marR="91440" marT="45720" marB="45720">
+                    <a:lnL w="6350" cap="flat" cmpd="sng" algn="ctr">
+                      <a:solidFill>
+                        <a:srgbClr val="CCCCCC"/>
+                      </a:solidFill>
+                      <a:prstDash val="solid"/>
+                      <a:round/>
+                      <a:headEnd type="none" w="med" len="med"/>
+                      <a:tailEnd type="none" w="med" len="med"/>
+                    </a:lnL>
+                    <a:lnR w="6350" cap="flat" cmpd="sng" algn="ctr">
+                      <a:solidFill>
+                        <a:srgbClr val="CCCCCC"/>
+                      </a:solidFill>
+                      <a:prstDash val="solid"/>
+                      <a:round/>
+                      <a:headEnd type="none" w="med" len="med"/>
+                      <a:tailEnd type="none" w="med" len="med"/>
+                    </a:lnR>
+                    <a:lnT w="6350" cap="flat" cmpd="sng" algn="ctr">
+                      <a:solidFill>
+                        <a:srgbClr val="CCCCCC"/>
+                      </a:solidFill>
+                      <a:prstDash val="solid"/>
+                      <a:round/>
+                      <a:headEnd type="none" w="med" len="med"/>
+                      <a:tailEnd type="none" w="med" len="med"/>
+                    </a:lnT>
+                    <a:lnB w="6350" cap="flat" cmpd="sng" algn="ctr">
+                      <a:solidFill>
+                        <a:srgbClr val="CCCCCC"/>
+                      </a:solidFill>
+                      <a:prstDash val="solid"/>
+                      <a:round/>
+                      <a:headEnd type="none" w="med" len="med"/>
+                      <a:tailEnd type="none" w="med" len="med"/>
+                    </a:lnB>
+                    <a:solidFill>
+                      <a:srgbClr val="FFFFFF"/>
+                    </a:solidFill>
+                  </a:tcPr>
+                </a:tc>
+                <a:tc>
+                  <a:txBody>
+                    <a:bodyPr/>
+                    <a:lstStyle/>
+                    <a:p>
+                      <a:pPr indent="0" marL="0">
+                        <a:buNone/>
+                      </a:pPr>
+                      <a:r>
+                        <a:rPr lang="en-US" sz="800" dirty="0">
+                          <a:solidFill>
+                            <a:srgbClr val="2D2D2D"/>
+                          </a:solidFill>
+                          <a:latin typeface="Calibri" pitchFamily="34" charset="0"/>
+                          <a:ea typeface="Calibri" pitchFamily="34" charset="-122"/>
+                          <a:cs typeface="Calibri" pitchFamily="34" charset="-120"/>
+                        </a:rPr>
+                        <a:t>varchar(1)</a:t>
+                      </a:r>
+                      <a:endParaRPr lang="en-US" sz="800" dirty="0">
+                        <a:latin typeface="Calibri" charset="0"/>
+                        <a:ea typeface="Calibri" charset="0"/>
+                        <a:cs typeface="Calibri" charset="0"/>
+                      </a:endParaRPr>
+                    </a:p>
+                  </a:txBody>
+                  <a:tcPr marL="91440" marR="91440" marT="45720" marB="45720">
+                    <a:lnL w="6350" cap="flat" cmpd="sng" algn="ctr">
+                      <a:solidFill>
+                        <a:srgbClr val="CCCCCC"/>
+                      </a:solidFill>
+                      <a:prstDash val="solid"/>
+                      <a:round/>
+                      <a:headEnd type="none" w="med" len="med"/>
+                      <a:tailEnd type="none" w="med" len="med"/>
+                    </a:lnL>
+                    <a:lnR w="6350" cap="flat" cmpd="sng" algn="ctr">
+                      <a:solidFill>
+                        <a:srgbClr val="CCCCCC"/>
+                      </a:solidFill>
+                      <a:prstDash val="solid"/>
+                      <a:round/>
+                      <a:headEnd type="none" w="med" len="med"/>
+                      <a:tailEnd type="none" w="med" len="med"/>
+                    </a:lnR>
+                    <a:lnT w="6350" cap="flat" cmpd="sng" algn="ctr">
+                      <a:solidFill>
+                        <a:srgbClr val="CCCCCC"/>
+                      </a:solidFill>
+                      <a:prstDash val="solid"/>
+                      <a:round/>
+                      <a:headEnd type="none" w="med" len="med"/>
+                      <a:tailEnd type="none" w="med" len="med"/>
+                    </a:lnT>
+                    <a:lnB w="6350" cap="flat" cmpd="sng" algn="ctr">
+                      <a:solidFill>
+                        <a:srgbClr val="CCCCCC"/>
+                      </a:solidFill>
+                      <a:prstDash val="solid"/>
+                      <a:round/>
+                      <a:headEnd type="none" w="med" len="med"/>
+                      <a:tailEnd type="none" w="med" len="med"/>
+                    </a:lnB>
+                    <a:solidFill>
+                      <a:srgbClr val="FFFFFF"/>
+                    </a:solidFill>
+                  </a:tcPr>
+                </a:tc>
+                <a:tc>
+                  <a:txBody>
+                    <a:bodyPr/>
+                    <a:lstStyle/>
+                    <a:p>
+                      <a:pPr indent="0" marL="0">
+                        <a:buNone/>
+                      </a:pPr>
+                      <a:r>
+                        <a:rPr lang="en-US" sz="800" dirty="0">
+                          <a:solidFill>
+                            <a:srgbClr val="2D2D2D"/>
+                          </a:solidFill>
+                          <a:latin typeface="Calibri" pitchFamily="34" charset="0"/>
+                          <a:ea typeface="Calibri" pitchFamily="34" charset="-122"/>
+                          <a:cs typeface="Calibri" pitchFamily="34" charset="-120"/>
+                        </a:rPr>
+                        <a:t>処理フラグ（0:未処理）</a:t>
+                      </a:r>
+                      <a:endParaRPr lang="en-US" sz="800" dirty="0">
+                        <a:latin typeface="Calibri" charset="0"/>
+                        <a:ea typeface="Calibri" charset="0"/>
+                        <a:cs typeface="Calibri" charset="0"/>
+                      </a:endParaRPr>
+                    </a:p>
+                  </a:txBody>
+                  <a:tcPr marL="91440" marR="91440" marT="45720" marB="45720">
+                    <a:lnL w="6350" cap="flat" cmpd="sng" algn="ctr">
+                      <a:solidFill>
+                        <a:srgbClr val="CCCCCC"/>
+                      </a:solidFill>
+                      <a:prstDash val="solid"/>
+                      <a:round/>
+                      <a:headEnd type="none" w="med" len="med"/>
+                      <a:tailEnd type="none" w="med" len="med"/>
+                    </a:lnL>
+                    <a:lnR w="6350" cap="flat" cmpd="sng" algn="ctr">
+                      <a:solidFill>
+                        <a:srgbClr val="CCCCCC"/>
+                      </a:solidFill>
+                      <a:prstDash val="solid"/>
+                      <a:round/>
+                      <a:headEnd type="none" w="med" len="med"/>
+                      <a:tailEnd type="none" w="med" len="med"/>
+                    </a:lnR>
+                    <a:lnT w="6350" cap="flat" cmpd="sng" algn="ctr">
+                      <a:solidFill>
+                        <a:srgbClr val="CCCCCC"/>
+                      </a:solidFill>
+                      <a:prstDash val="solid"/>
+                      <a:round/>
+                      <a:headEnd type="none" w="med" len="med"/>
+                      <a:tailEnd type="none" w="med" len="med"/>
+                    </a:lnT>
+                    <a:lnB w="6350" cap="flat" cmpd="sng" algn="ctr">
+                      <a:solidFill>
+                        <a:srgbClr val="CCCCCC"/>
+                      </a:solidFill>
+                      <a:prstDash val="solid"/>
+                      <a:round/>
+                      <a:headEnd type="none" w="med" len="med"/>
+                      <a:tailEnd type="none" w="med" len="med"/>
+                    </a:lnB>
+                    <a:solidFill>
+                      <a:srgbClr val="FFFFFF"/>
+                    </a:solidFill>
+                  </a:tcPr>
+                </a:tc>
+              </a:tr>
+              <a:tr h="228600">
+                <a:tc>
+                  <a:txBody>
+                    <a:bodyPr/>
+                    <a:lstStyle/>
+                    <a:p>
+                      <a:pPr indent="0" marL="0">
+                        <a:buNone/>
+                      </a:pPr>
+                      <a:r>
+                        <a:rPr lang="en-US" sz="800" dirty="0">
+                          <a:solidFill>
+                            <a:srgbClr val="2D2D2D"/>
+                          </a:solidFill>
+                          <a:latin typeface="Calibri" pitchFamily="34" charset="0"/>
+                          <a:ea typeface="Calibri" pitchFamily="34" charset="-122"/>
+                          <a:cs typeface="Calibri" pitchFamily="34" charset="-120"/>
+                        </a:rPr>
+                        <a:t>P_SCAN_ID</a:t>
+                      </a:r>
+                      <a:endParaRPr lang="en-US" sz="800" dirty="0">
+                        <a:latin typeface="Calibri" charset="0"/>
+                        <a:ea typeface="Calibri" charset="0"/>
+                        <a:cs typeface="Calibri" charset="0"/>
+                      </a:endParaRPr>
+                    </a:p>
+                  </a:txBody>
+                  <a:tcPr marL="91440" marR="91440" marT="45720" marB="45720">
+                    <a:lnL w="6350" cap="flat" cmpd="sng" algn="ctr">
+                      <a:solidFill>
+                        <a:srgbClr val="CCCCCC"/>
+                      </a:solidFill>
+                      <a:prstDash val="solid"/>
+                      <a:round/>
+                      <a:headEnd type="none" w="med" len="med"/>
+                      <a:tailEnd type="none" w="med" len="med"/>
+                    </a:lnL>
+                    <a:lnR w="6350" cap="flat" cmpd="sng" algn="ctr">
+                      <a:solidFill>
+                        <a:srgbClr val="CCCCCC"/>
+                      </a:solidFill>
+                      <a:prstDash val="solid"/>
+                      <a:round/>
+                      <a:headEnd type="none" w="med" len="med"/>
+                      <a:tailEnd type="none" w="med" len="med"/>
+                    </a:lnR>
+                    <a:lnT w="6350" cap="flat" cmpd="sng" algn="ctr">
+                      <a:solidFill>
+                        <a:srgbClr val="CCCCCC"/>
+                      </a:solidFill>
+                      <a:prstDash val="solid"/>
+                      <a:round/>
+                      <a:headEnd type="none" w="med" len="med"/>
+                      <a:tailEnd type="none" w="med" len="med"/>
+                    </a:lnT>
+                    <a:lnB w="6350" cap="flat" cmpd="sng" algn="ctr">
+                      <a:solidFill>
+                        <a:srgbClr val="CCCCCC"/>
+                      </a:solidFill>
+                      <a:prstDash val="solid"/>
+                      <a:round/>
+                      <a:headEnd type="none" w="med" len="med"/>
+                      <a:tailEnd type="none" w="med" len="med"/>
+                    </a:lnB>
+                    <a:solidFill>
+                      <a:srgbClr val="F5F5F5"/>
+                    </a:solidFill>
+                  </a:tcPr>
+                </a:tc>
+                <a:tc>
+                  <a:txBody>
+                    <a:bodyPr/>
+                    <a:lstStyle/>
+                    <a:p>
+                      <a:pPr indent="0" marL="0">
+                        <a:buNone/>
+                      </a:pPr>
+                      <a:r>
+                        <a:rPr lang="en-US" sz="800" dirty="0">
+                          <a:solidFill>
+                            <a:srgbClr val="2D2D2D"/>
+                          </a:solidFill>
+                          <a:latin typeface="Calibri" pitchFamily="34" charset="0"/>
+                          <a:ea typeface="Calibri" pitchFamily="34" charset="-122"/>
+                          <a:cs typeface="Calibri" pitchFamily="34" charset="-120"/>
+                        </a:rPr>
+                        <a:t>varchar(24)</a:t>
+                      </a:r>
+                      <a:endParaRPr lang="en-US" sz="800" dirty="0">
+                        <a:latin typeface="Calibri" charset="0"/>
+                        <a:ea typeface="Calibri" charset="0"/>
+                        <a:cs typeface="Calibri" charset="0"/>
+                      </a:endParaRPr>
+                    </a:p>
+                  </a:txBody>
+                  <a:tcPr marL="91440" marR="91440" marT="45720" marB="45720">
+                    <a:lnL w="6350" cap="flat" cmpd="sng" algn="ctr">
+                      <a:solidFill>
+                        <a:srgbClr val="CCCCCC"/>
+                      </a:solidFill>
+                      <a:prstDash val="solid"/>
+                      <a:round/>
+                      <a:headEnd type="none" w="med" len="med"/>
+                      <a:tailEnd type="none" w="med" len="med"/>
+                    </a:lnL>
+                    <a:lnR w="6350" cap="flat" cmpd="sng" algn="ctr">
+                      <a:solidFill>
+                        <a:srgbClr val="CCCCCC"/>
+                      </a:solidFill>
+                      <a:prstDash val="solid"/>
+                      <a:round/>
+                      <a:headEnd type="none" w="med" len="med"/>
+                      <a:tailEnd type="none" w="med" len="med"/>
+                    </a:lnR>
+                    <a:lnT w="6350" cap="flat" cmpd="sng" algn="ctr">
+                      <a:solidFill>
+                        <a:srgbClr val="CCCCCC"/>
+                      </a:solidFill>
+                      <a:prstDash val="solid"/>
+                      <a:round/>
+                      <a:headEnd type="none" w="med" len="med"/>
+                      <a:tailEnd type="none" w="med" len="med"/>
+                    </a:lnT>
+                    <a:lnB w="6350" cap="flat" cmpd="sng" algn="ctr">
+                      <a:solidFill>
+                        <a:srgbClr val="CCCCCC"/>
+                      </a:solidFill>
+                      <a:prstDash val="solid"/>
+                      <a:round/>
+                      <a:headEnd type="none" w="med" len="med"/>
+                      <a:tailEnd type="none" w="med" len="med"/>
+                    </a:lnB>
+                    <a:solidFill>
+                      <a:srgbClr val="F5F5F5"/>
+                    </a:solidFill>
+                  </a:tcPr>
+                </a:tc>
+                <a:tc>
+                  <a:txBody>
+                    <a:bodyPr/>
+                    <a:lstStyle/>
+                    <a:p>
+                      <a:pPr indent="0" marL="0">
+                        <a:buNone/>
+                      </a:pPr>
+                      <a:r>
+                        <a:rPr lang="en-US" sz="800" dirty="0">
+                          <a:solidFill>
+                            <a:srgbClr val="2D2D2D"/>
+                          </a:solidFill>
+                          <a:latin typeface="Calibri" pitchFamily="34" charset="0"/>
+                          <a:ea typeface="Calibri" pitchFamily="34" charset="-122"/>
+                          <a:cs typeface="Calibri" pitchFamily="34" charset="-120"/>
+                        </a:rPr>
+                        <a:t>販売コード（親JAN）</a:t>
+                      </a:r>
+                      <a:endParaRPr lang="en-US" sz="800" dirty="0">
+                        <a:latin typeface="Calibri" charset="0"/>
+                        <a:ea typeface="Calibri" charset="0"/>
+                        <a:cs typeface="Calibri" charset="0"/>
+                      </a:endParaRPr>
+                    </a:p>
+                  </a:txBody>
+                  <a:tcPr marL="91440" marR="91440" marT="45720" marB="45720">
+                    <a:lnL w="6350" cap="flat" cmpd="sng" algn="ctr">
+                      <a:solidFill>
+                        <a:srgbClr val="CCCCCC"/>
+                      </a:solidFill>
+                      <a:prstDash val="solid"/>
+                      <a:round/>
+                      <a:headEnd type="none" w="med" len="med"/>
+                      <a:tailEnd type="none" w="med" len="med"/>
+                    </a:lnL>
+                    <a:lnR w="6350" cap="flat" cmpd="sng" algn="ctr">
+                      <a:solidFill>
+                        <a:srgbClr val="CCCCCC"/>
+                      </a:solidFill>
+                      <a:prstDash val="solid"/>
+                      <a:round/>
+                      <a:headEnd type="none" w="med" len="med"/>
+                      <a:tailEnd type="none" w="med" len="med"/>
+                    </a:lnR>
+                    <a:lnT w="6350" cap="flat" cmpd="sng" algn="ctr">
+                      <a:solidFill>
+                        <a:srgbClr val="CCCCCC"/>
+                      </a:solidFill>
+                      <a:prstDash val="solid"/>
+                      <a:round/>
+                      <a:headEnd type="none" w="med" len="med"/>
+                      <a:tailEnd type="none" w="med" len="med"/>
+                    </a:lnT>
+                    <a:lnB w="6350" cap="flat" cmpd="sng" algn="ctr">
+                      <a:solidFill>
+                        <a:srgbClr val="CCCCCC"/>
+                      </a:solidFill>
+                      <a:prstDash val="solid"/>
+                      <a:round/>
+                      <a:headEnd type="none" w="med" len="med"/>
+                      <a:tailEnd type="none" w="med" len="med"/>
+                    </a:lnB>
+                    <a:solidFill>
+                      <a:srgbClr val="F5F5F5"/>
+                    </a:solidFill>
+                  </a:tcPr>
+                </a:tc>
+              </a:tr>
+              <a:tr h="228600">
+                <a:tc>
+                  <a:txBody>
+                    <a:bodyPr/>
+                    <a:lstStyle/>
+                    <a:p>
+                      <a:pPr indent="0" marL="0">
+                        <a:buNone/>
+                      </a:pPr>
+                      <a:r>
+                        <a:rPr lang="en-US" sz="800" dirty="0">
+                          <a:solidFill>
+                            <a:srgbClr val="2D2D2D"/>
+                          </a:solidFill>
+                          <a:latin typeface="Calibri" pitchFamily="34" charset="0"/>
+                          <a:ea typeface="Calibri" pitchFamily="34" charset="-122"/>
+                          <a:cs typeface="Calibri" pitchFamily="34" charset="-120"/>
+                        </a:rPr>
+                        <a:t>TAXBLTY_CD</a:t>
+                      </a:r>
+                      <a:endParaRPr lang="en-US" sz="800" dirty="0">
+                        <a:latin typeface="Calibri" charset="0"/>
+                        <a:ea typeface="Calibri" charset="0"/>
+                        <a:cs typeface="Calibri" charset="0"/>
+                      </a:endParaRPr>
+                    </a:p>
+                  </a:txBody>
+                  <a:tcPr marL="91440" marR="91440" marT="45720" marB="45720">
+                    <a:lnL w="6350" cap="flat" cmpd="sng" algn="ctr">
+                      <a:solidFill>
+                        <a:srgbClr val="CCCCCC"/>
+                      </a:solidFill>
+                      <a:prstDash val="solid"/>
+                      <a:round/>
+                      <a:headEnd type="none" w="med" len="med"/>
+                      <a:tailEnd type="none" w="med" len="med"/>
+                    </a:lnL>
+                    <a:lnR w="6350" cap="flat" cmpd="sng" algn="ctr">
+                      <a:solidFill>
+                        <a:srgbClr val="CCCCCC"/>
+                      </a:solidFill>
+                      <a:prstDash val="solid"/>
+                      <a:round/>
+                      <a:headEnd type="none" w="med" len="med"/>
+                      <a:tailEnd type="none" w="med" len="med"/>
+                    </a:lnR>
+                    <a:lnT w="6350" cap="flat" cmpd="sng" algn="ctr">
+                      <a:solidFill>
+                        <a:srgbClr val="CCCCCC"/>
+                      </a:solidFill>
+                      <a:prstDash val="solid"/>
+                      <a:round/>
+                      <a:headEnd type="none" w="med" len="med"/>
+                      <a:tailEnd type="none" w="med" len="med"/>
+                    </a:lnT>
+                    <a:lnB w="6350" cap="flat" cmpd="sng" algn="ctr">
+                      <a:solidFill>
+                        <a:srgbClr val="CCCCCC"/>
+                      </a:solidFill>
+                      <a:prstDash val="solid"/>
+                      <a:round/>
+                      <a:headEnd type="none" w="med" len="med"/>
+                      <a:tailEnd type="none" w="med" len="med"/>
+                    </a:lnB>
+                    <a:solidFill>
+                      <a:srgbClr val="FFFFFF"/>
+                    </a:solidFill>
+                  </a:tcPr>
+                </a:tc>
+                <a:tc>
+                  <a:txBody>
+                    <a:bodyPr/>
+                    <a:lstStyle/>
+                    <a:p>
+                      <a:pPr indent="0" marL="0">
+                        <a:buNone/>
+                      </a:pPr>
+                      <a:r>
+                        <a:rPr lang="en-US" sz="800" dirty="0">
+                          <a:solidFill>
+                            <a:srgbClr val="2D2D2D"/>
+                          </a:solidFill>
+                          <a:latin typeface="Calibri" pitchFamily="34" charset="0"/>
+                          <a:ea typeface="Calibri" pitchFamily="34" charset="-122"/>
+                          <a:cs typeface="Calibri" pitchFamily="34" charset="-120"/>
+                        </a:rPr>
+                        <a:t>smallint</a:t>
+                      </a:r>
+                      <a:endParaRPr lang="en-US" sz="800" dirty="0">
+                        <a:latin typeface="Calibri" charset="0"/>
+                        <a:ea typeface="Calibri" charset="0"/>
+                        <a:cs typeface="Calibri" charset="0"/>
+                      </a:endParaRPr>
+                    </a:p>
+                  </a:txBody>
+                  <a:tcPr marL="91440" marR="91440" marT="45720" marB="45720">
+                    <a:lnL w="6350" cap="flat" cmpd="sng" algn="ctr">
+                      <a:solidFill>
+                        <a:srgbClr val="CCCCCC"/>
+                      </a:solidFill>
+                      <a:prstDash val="solid"/>
+                      <a:round/>
+                      <a:headEnd type="none" w="med" len="med"/>
+                      <a:tailEnd type="none" w="med" len="med"/>
+                    </a:lnL>
+                    <a:lnR w="6350" cap="flat" cmpd="sng" algn="ctr">
+                      <a:solidFill>
+                        <a:srgbClr val="CCCCCC"/>
+                      </a:solidFill>
+                      <a:prstDash val="solid"/>
+                      <a:round/>
+                      <a:headEnd type="none" w="med" len="med"/>
+                      <a:tailEnd type="none" w="med" len="med"/>
+                    </a:lnR>
+                    <a:lnT w="6350" cap="flat" cmpd="sng" algn="ctr">
+                      <a:solidFill>
+                        <a:srgbClr val="CCCCCC"/>
+                      </a:solidFill>
+                      <a:prstDash val="solid"/>
+                      <a:round/>
+                      <a:headEnd type="none" w="med" len="med"/>
+                      <a:tailEnd type="none" w="med" len="med"/>
+                    </a:lnT>
+                    <a:lnB w="6350" cap="flat" cmpd="sng" algn="ctr">
+                      <a:solidFill>
+                        <a:srgbClr val="CCCCCC"/>
+                      </a:solidFill>
+                      <a:prstDash val="solid"/>
+                      <a:round/>
+                      <a:headEnd type="none" w="med" len="med"/>
+                      <a:tailEnd type="none" w="med" len="med"/>
+                    </a:lnB>
+                    <a:solidFill>
+                      <a:srgbClr val="FFFFFF"/>
+                    </a:solidFill>
+                  </a:tcPr>
+                </a:tc>
+                <a:tc>
+                  <a:txBody>
+                    <a:bodyPr/>
+                    <a:lstStyle/>
+                    <a:p>
+                      <a:pPr indent="0" marL="0">
+                        <a:buNone/>
+                      </a:pPr>
+                      <a:r>
+                        <a:rPr lang="en-US" sz="800" dirty="0">
+                          <a:solidFill>
+                            <a:srgbClr val="2D2D2D"/>
+                          </a:solidFill>
+                          <a:latin typeface="Calibri" pitchFamily="34" charset="0"/>
+                          <a:ea typeface="Calibri" pitchFamily="34" charset="-122"/>
+                          <a:cs typeface="Calibri" pitchFamily="34" charset="-120"/>
+                        </a:rPr>
+                        <a:t>税種別コード</a:t>
+                      </a:r>
+                      <a:endParaRPr lang="en-US" sz="800" dirty="0">
+                        <a:latin typeface="Calibri" charset="0"/>
+                        <a:ea typeface="Calibri" charset="0"/>
+                        <a:cs typeface="Calibri" charset="0"/>
+                      </a:endParaRPr>
+                    </a:p>
+                  </a:txBody>
+                  <a:tcPr marL="91440" marR="91440" marT="45720" marB="45720">
+                    <a:lnL w="6350" cap="flat" cmpd="sng" algn="ctr">
+                      <a:solidFill>
+                        <a:srgbClr val="CCCCCC"/>
+                      </a:solidFill>
+                      <a:prstDash val="solid"/>
+                      <a:round/>
+                      <a:headEnd type="none" w="med" len="med"/>
+                      <a:tailEnd type="none" w="med" len="med"/>
+                    </a:lnL>
+                    <a:lnR w="6350" cap="flat" cmpd="sng" algn="ctr">
+                      <a:solidFill>
+                        <a:srgbClr val="CCCCCC"/>
+                      </a:solidFill>
+                      <a:prstDash val="solid"/>
+                      <a:round/>
+                      <a:headEnd type="none" w="med" len="med"/>
+                      <a:tailEnd type="none" w="med" len="med"/>
+                    </a:lnR>
+                    <a:lnT w="6350" cap="flat" cmpd="sng" algn="ctr">
+                      <a:solidFill>
+                        <a:srgbClr val="CCCCCC"/>
+                      </a:solidFill>
+                      <a:prstDash val="solid"/>
+                      <a:round/>
+                      <a:headEnd type="none" w="med" len="med"/>
+                      <a:tailEnd type="none" w="med" len="med"/>
+                    </a:lnT>
+                    <a:lnB w="6350" cap="flat" cmpd="sng" algn="ctr">
+                      <a:solidFill>
+                        <a:srgbClr val="CCCCCC"/>
+                      </a:solidFill>
+                      <a:prstDash val="solid"/>
+                      <a:round/>
+                      <a:headEnd type="none" w="med" len="med"/>
+                      <a:tailEnd type="none" w="med" len="med"/>
+                    </a:lnB>
+                    <a:solidFill>
+                      <a:srgbClr val="FFFFFF"/>
+                    </a:solidFill>
+                  </a:tcPr>
+                </a:tc>
+              </a:tr>
+              <a:tr h="228600">
+                <a:tc>
+                  <a:txBody>
+                    <a:bodyPr/>
+                    <a:lstStyle/>
+                    <a:p>
+                      <a:pPr indent="0" marL="0">
+                        <a:buNone/>
+                      </a:pPr>
+                      <a:r>
+                        <a:rPr lang="en-US" sz="800" dirty="0">
+                          <a:solidFill>
+                            <a:srgbClr val="2D2D2D"/>
+                          </a:solidFill>
+                          <a:latin typeface="Calibri" pitchFamily="34" charset="0"/>
+                          <a:ea typeface="Calibri" pitchFamily="34" charset="-122"/>
+                          <a:cs typeface="Calibri" pitchFamily="34" charset="-120"/>
+                        </a:rPr>
+                        <a:t>SCAN_TYP</a:t>
+                      </a:r>
+                      <a:endParaRPr lang="en-US" sz="800" dirty="0">
+                        <a:latin typeface="Calibri" charset="0"/>
+                        <a:ea typeface="Calibri" charset="0"/>
+                        <a:cs typeface="Calibri" charset="0"/>
+                      </a:endParaRPr>
+                    </a:p>
+                  </a:txBody>
+                  <a:tcPr marL="91440" marR="91440" marT="45720" marB="45720">
+                    <a:lnL w="6350" cap="flat" cmpd="sng" algn="ctr">
+                      <a:solidFill>
+                        <a:srgbClr val="CCCCCC"/>
+                      </a:solidFill>
+                      <a:prstDash val="solid"/>
+                      <a:round/>
+                      <a:headEnd type="none" w="med" len="med"/>
+                      <a:tailEnd type="none" w="med" len="med"/>
+                    </a:lnL>
+                    <a:lnR w="6350" cap="flat" cmpd="sng" algn="ctr">
+                      <a:solidFill>
+                        <a:srgbClr val="CCCCCC"/>
+                      </a:solidFill>
+                      <a:prstDash val="solid"/>
+                      <a:round/>
+                      <a:headEnd type="none" w="med" len="med"/>
+                      <a:tailEnd type="none" w="med" len="med"/>
+                    </a:lnR>
+                    <a:lnT w="6350" cap="flat" cmpd="sng" algn="ctr">
+                      <a:solidFill>
+                        <a:srgbClr val="CCCCCC"/>
+                      </a:solidFill>
+                      <a:prstDash val="solid"/>
+                      <a:round/>
+                      <a:headEnd type="none" w="med" len="med"/>
+                      <a:tailEnd type="none" w="med" len="med"/>
+                    </a:lnT>
+                    <a:lnB w="6350" cap="flat" cmpd="sng" algn="ctr">
+                      <a:solidFill>
+                        <a:srgbClr val="CCCCCC"/>
+                      </a:solidFill>
+                      <a:prstDash val="solid"/>
+                      <a:round/>
+                      <a:headEnd type="none" w="med" len="med"/>
+                      <a:tailEnd type="none" w="med" len="med"/>
+                    </a:lnB>
+                    <a:solidFill>
+                      <a:srgbClr val="F5F5F5"/>
+                    </a:solidFill>
+                  </a:tcPr>
+                </a:tc>
+                <a:tc>
+                  <a:txBody>
+                    <a:bodyPr/>
+                    <a:lstStyle/>
+                    <a:p>
+                      <a:pPr indent="0" marL="0">
+                        <a:buNone/>
+                      </a:pPr>
+                      <a:r>
+                        <a:rPr lang="en-US" sz="800" dirty="0">
+                          <a:solidFill>
+                            <a:srgbClr val="2D2D2D"/>
+                          </a:solidFill>
+                          <a:latin typeface="Calibri" pitchFamily="34" charset="0"/>
+                          <a:ea typeface="Calibri" pitchFamily="34" charset="-122"/>
+                          <a:cs typeface="Calibri" pitchFamily="34" charset="-120"/>
+                        </a:rPr>
+                        <a:t>smallint</a:t>
+                      </a:r>
+                      <a:endParaRPr lang="en-US" sz="800" dirty="0">
+                        <a:latin typeface="Calibri" charset="0"/>
+                        <a:ea typeface="Calibri" charset="0"/>
+                        <a:cs typeface="Calibri" charset="0"/>
+                      </a:endParaRPr>
+                    </a:p>
+                  </a:txBody>
+                  <a:tcPr marL="91440" marR="91440" marT="45720" marB="45720">
+                    <a:lnL w="6350" cap="flat" cmpd="sng" algn="ctr">
+                      <a:solidFill>
+                        <a:srgbClr val="CCCCCC"/>
+                      </a:solidFill>
+                      <a:prstDash val="solid"/>
+                      <a:round/>
+                      <a:headEnd type="none" w="med" len="med"/>
+                      <a:tailEnd type="none" w="med" len="med"/>
+                    </a:lnL>
+                    <a:lnR w="6350" cap="flat" cmpd="sng" algn="ctr">
+                      <a:solidFill>
+                        <a:srgbClr val="CCCCCC"/>
+                      </a:solidFill>
+                      <a:prstDash val="solid"/>
+                      <a:round/>
+                      <a:headEnd type="none" w="med" len="med"/>
+                      <a:tailEnd type="none" w="med" len="med"/>
+                    </a:lnR>
+                    <a:lnT w="6350" cap="flat" cmpd="sng" algn="ctr">
+                      <a:solidFill>
+                        <a:srgbClr val="CCCCCC"/>
+                      </a:solidFill>
+                      <a:prstDash val="solid"/>
+                      <a:round/>
+                      <a:headEnd type="none" w="med" len="med"/>
+                      <a:tailEnd type="none" w="med" len="med"/>
+                    </a:lnT>
+                    <a:lnB w="6350" cap="flat" cmpd="sng" algn="ctr">
+                      <a:solidFill>
+                        <a:srgbClr val="CCCCCC"/>
+                      </a:solidFill>
+                      <a:prstDash val="solid"/>
+                      <a:round/>
+                      <a:headEnd type="none" w="med" len="med"/>
+                      <a:tailEnd type="none" w="med" len="med"/>
+                    </a:lnB>
+                    <a:solidFill>
+                      <a:srgbClr val="F5F5F5"/>
+                    </a:solidFill>
+                  </a:tcPr>
+                </a:tc>
+                <a:tc>
+                  <a:txBody>
+                    <a:bodyPr/>
+                    <a:lstStyle/>
+                    <a:p>
+                      <a:pPr indent="0" marL="0">
+                        <a:buNone/>
+                      </a:pPr>
+                      <a:r>
+                        <a:rPr lang="en-US" sz="800" dirty="0">
+                          <a:solidFill>
+                            <a:srgbClr val="2D2D2D"/>
+                          </a:solidFill>
+                          <a:latin typeface="Calibri" pitchFamily="34" charset="0"/>
+                          <a:ea typeface="Calibri" pitchFamily="34" charset="-122"/>
+                          <a:cs typeface="Calibri" pitchFamily="34" charset="-120"/>
+                        </a:rPr>
+                        <a:t>PLUタイプ（0:JAN-13/1:EAN-13...）</a:t>
+                      </a:r>
+                      <a:endParaRPr lang="en-US" sz="800" dirty="0">
+                        <a:latin typeface="Calibri" charset="0"/>
+                        <a:ea typeface="Calibri" charset="0"/>
+                        <a:cs typeface="Calibri" charset="0"/>
+                      </a:endParaRPr>
+                    </a:p>
+                  </a:txBody>
+                  <a:tcPr marL="91440" marR="91440" marT="45720" marB="45720">
+                    <a:lnL w="6350" cap="flat" cmpd="sng" algn="ctr">
+                      <a:solidFill>
+                        <a:srgbClr val="CCCCCC"/>
+                      </a:solidFill>
+                      <a:prstDash val="solid"/>
+                      <a:round/>
+                      <a:headEnd type="none" w="med" len="med"/>
+                      <a:tailEnd type="none" w="med" len="med"/>
+                    </a:lnL>
+                    <a:lnR w="6350" cap="flat" cmpd="sng" algn="ctr">
+                      <a:solidFill>
+                        <a:srgbClr val="CCCCCC"/>
+                      </a:solidFill>
+                      <a:prstDash val="solid"/>
+                      <a:round/>
+                      <a:headEnd type="none" w="med" len="med"/>
+                      <a:tailEnd type="none" w="med" len="med"/>
+                    </a:lnR>
+                    <a:lnT w="6350" cap="flat" cmpd="sng" algn="ctr">
+                      <a:solidFill>
+                        <a:srgbClr val="CCCCCC"/>
+                      </a:solidFill>
+                      <a:prstDash val="solid"/>
+                      <a:round/>
+                      <a:headEnd type="none" w="med" len="med"/>
+                      <a:tailEnd type="none" w="med" len="med"/>
+                    </a:lnT>
+                    <a:lnB w="6350" cap="flat" cmpd="sng" algn="ctr">
+                      <a:solidFill>
+                        <a:srgbClr val="CCCCCC"/>
+                      </a:solidFill>
+                      <a:prstDash val="solid"/>
+                      <a:round/>
+                      <a:headEnd type="none" w="med" len="med"/>
+                      <a:tailEnd type="none" w="med" len="med"/>
+                    </a:lnB>
+                    <a:solidFill>
+                      <a:srgbClr val="F5F5F5"/>
+                    </a:solidFill>
+                  </a:tcPr>
+                </a:tc>
+              </a:tr>
+              <a:tr h="228600">
+                <a:tc>
+                  <a:txBody>
+                    <a:bodyPr/>
+                    <a:lstStyle/>
+                    <a:p>
+                      <a:pPr indent="0" marL="0">
+                        <a:buNone/>
+                      </a:pPr>
+                      <a:r>
+                        <a:rPr lang="en-US" sz="800" dirty="0">
+                          <a:solidFill>
+                            <a:srgbClr val="2D2D2D"/>
+                          </a:solidFill>
+                          <a:latin typeface="Calibri" pitchFamily="34" charset="0"/>
+                          <a:ea typeface="Calibri" pitchFamily="34" charset="-122"/>
+                          <a:cs typeface="Calibri" pitchFamily="34" charset="-120"/>
+                        </a:rPr>
+                        <a:t>PRCS_DT</a:t>
+                      </a:r>
+                      <a:endParaRPr lang="en-US" sz="800" dirty="0">
+                        <a:latin typeface="Calibri" charset="0"/>
+                        <a:ea typeface="Calibri" charset="0"/>
+                        <a:cs typeface="Calibri" charset="0"/>
+                      </a:endParaRPr>
+                    </a:p>
+                  </a:txBody>
+                  <a:tcPr marL="91440" marR="91440" marT="45720" marB="45720">
+                    <a:lnL w="6350" cap="flat" cmpd="sng" algn="ctr">
+                      <a:solidFill>
+                        <a:srgbClr val="CCCCCC"/>
+                      </a:solidFill>
+                      <a:prstDash val="solid"/>
+                      <a:round/>
+                      <a:headEnd type="none" w="med" len="med"/>
+                      <a:tailEnd type="none" w="med" len="med"/>
+                    </a:lnL>
+                    <a:lnR w="6350" cap="flat" cmpd="sng" algn="ctr">
+                      <a:solidFill>
+                        <a:srgbClr val="CCCCCC"/>
+                      </a:solidFill>
+                      <a:prstDash val="solid"/>
+                      <a:round/>
+                      <a:headEnd type="none" w="med" len="med"/>
+                      <a:tailEnd type="none" w="med" len="med"/>
+                    </a:lnR>
+                    <a:lnT w="6350" cap="flat" cmpd="sng" algn="ctr">
+                      <a:solidFill>
+                        <a:srgbClr val="CCCCCC"/>
+                      </a:solidFill>
+                      <a:prstDash val="solid"/>
+                      <a:round/>
+                      <a:headEnd type="none" w="med" len="med"/>
+                      <a:tailEnd type="none" w="med" len="med"/>
+                    </a:lnT>
+                    <a:lnB w="6350" cap="flat" cmpd="sng" algn="ctr">
+                      <a:solidFill>
+                        <a:srgbClr val="CCCCCC"/>
+                      </a:solidFill>
+                      <a:prstDash val="solid"/>
+                      <a:round/>
+                      <a:headEnd type="none" w="med" len="med"/>
+                      <a:tailEnd type="none" w="med" len="med"/>
+                    </a:lnB>
+                    <a:solidFill>
+                      <a:srgbClr val="FFFFFF"/>
+                    </a:solidFill>
+                  </a:tcPr>
+                </a:tc>
+                <a:tc>
+                  <a:txBody>
+                    <a:bodyPr/>
+                    <a:lstStyle/>
+                    <a:p>
+                      <a:pPr indent="0" marL="0">
+                        <a:buNone/>
+                      </a:pPr>
+                      <a:r>
+                        <a:rPr lang="en-US" sz="800" dirty="0">
+                          <a:solidFill>
+                            <a:srgbClr val="2D2D2D"/>
+                          </a:solidFill>
+                          <a:latin typeface="Calibri" pitchFamily="34" charset="0"/>
+                          <a:ea typeface="Calibri" pitchFamily="34" charset="-122"/>
+                          <a:cs typeface="Calibri" pitchFamily="34" charset="-120"/>
+                        </a:rPr>
+                        <a:t>varchar(8)</a:t>
+                      </a:r>
+                      <a:endParaRPr lang="en-US" sz="800" dirty="0">
+                        <a:latin typeface="Calibri" charset="0"/>
+                        <a:ea typeface="Calibri" charset="0"/>
+                        <a:cs typeface="Calibri" charset="0"/>
+                      </a:endParaRPr>
+                    </a:p>
+                  </a:txBody>
+                  <a:tcPr marL="91440" marR="91440" marT="45720" marB="45720">
+                    <a:lnL w="6350" cap="flat" cmpd="sng" algn="ctr">
+                      <a:solidFill>
+                        <a:srgbClr val="CCCCCC"/>
+                      </a:solidFill>
+                      <a:prstDash val="solid"/>
+                      <a:round/>
+                      <a:headEnd type="none" w="med" len="med"/>
+                      <a:tailEnd type="none" w="med" len="med"/>
+                    </a:lnL>
+                    <a:lnR w="6350" cap="flat" cmpd="sng" algn="ctr">
+                      <a:solidFill>
+                        <a:srgbClr val="CCCCCC"/>
+                      </a:solidFill>
+                      <a:prstDash val="solid"/>
+                      <a:round/>
+                      <a:headEnd type="none" w="med" len="med"/>
+                      <a:tailEnd type="none" w="med" len="med"/>
+                    </a:lnR>
+                    <a:lnT w="6350" cap="flat" cmpd="sng" algn="ctr">
+                      <a:solidFill>
+                        <a:srgbClr val="CCCCCC"/>
+                      </a:solidFill>
+                      <a:prstDash val="solid"/>
+                      <a:round/>
+                      <a:headEnd type="none" w="med" len="med"/>
+                      <a:tailEnd type="none" w="med" len="med"/>
+                    </a:lnT>
+                    <a:lnB w="6350" cap="flat" cmpd="sng" algn="ctr">
+                      <a:solidFill>
+                        <a:srgbClr val="CCCCCC"/>
+                      </a:solidFill>
+                      <a:prstDash val="solid"/>
+                      <a:round/>
+                      <a:headEnd type="none" w="med" len="med"/>
+                      <a:tailEnd type="none" w="med" len="med"/>
+                    </a:lnB>
+                    <a:solidFill>
+                      <a:srgbClr val="FFFFFF"/>
+                    </a:solidFill>
+                  </a:tcPr>
+                </a:tc>
+                <a:tc>
+                  <a:txBody>
+                    <a:bodyPr/>
+                    <a:lstStyle/>
+                    <a:p>
+                      <a:pPr indent="0" marL="0">
+                        <a:buNone/>
+                      </a:pPr>
+                      <a:r>
+                        <a:rPr lang="en-US" sz="800" dirty="0">
+                          <a:solidFill>
+                            <a:srgbClr val="2D2D2D"/>
+                          </a:solidFill>
+                          <a:latin typeface="Calibri" pitchFamily="34" charset="0"/>
+                          <a:ea typeface="Calibri" pitchFamily="34" charset="-122"/>
+                          <a:cs typeface="Calibri" pitchFamily="34" charset="-120"/>
+                        </a:rPr>
+                        <a:t>処理日</a:t>
+                      </a:r>
+                      <a:endParaRPr lang="en-US" sz="800" dirty="0">
+                        <a:latin typeface="Calibri" charset="0"/>
+                        <a:ea typeface="Calibri" charset="0"/>
+                        <a:cs typeface="Calibri" charset="0"/>
+                      </a:endParaRPr>
+                    </a:p>
+                  </a:txBody>
+                  <a:tcPr marL="91440" marR="91440" marT="45720" marB="45720">
+                    <a:lnL w="6350" cap="flat" cmpd="sng" algn="ctr">
+                      <a:solidFill>
+                        <a:srgbClr val="CCCCCC"/>
+                      </a:solidFill>
+                      <a:prstDash val="solid"/>
+                      <a:round/>
+                      <a:headEnd type="none" w="med" len="med"/>
+                      <a:tailEnd type="none" w="med" len="med"/>
+                    </a:lnL>
+                    <a:lnR w="6350" cap="flat" cmpd="sng" algn="ctr">
+                      <a:solidFill>
+                        <a:srgbClr val="CCCCCC"/>
+                      </a:solidFill>
+                      <a:prstDash val="solid"/>
+                      <a:round/>
+                      <a:headEnd type="none" w="med" len="med"/>
+                      <a:tailEnd type="none" w="med" len="med"/>
+                    </a:lnR>
+                    <a:lnT w="6350" cap="flat" cmpd="sng" algn="ctr">
+                      <a:solidFill>
+                        <a:srgbClr val="CCCCCC"/>
+                      </a:solidFill>
+                      <a:prstDash val="solid"/>
+                      <a:round/>
+                      <a:headEnd type="none" w="med" len="med"/>
+                      <a:tailEnd type="none" w="med" len="med"/>
+                    </a:lnT>
+                    <a:lnB w="6350" cap="flat" cmpd="sng" algn="ctr">
+                      <a:solidFill>
+                        <a:srgbClr val="CCCCCC"/>
+                      </a:solidFill>
+                      <a:prstDash val="solid"/>
+                      <a:round/>
+                      <a:headEnd type="none" w="med" len="med"/>
+                      <a:tailEnd type="none" w="med" len="med"/>
+                    </a:lnB>
+                    <a:solidFill>
+                      <a:srgbClr val="FFFFFF"/>
+                    </a:solidFill>
+                  </a:tcPr>
+                </a:tc>
+              </a:tr>
+              <a:tr h="228600">
+                <a:tc>
+                  <a:txBody>
+                    <a:bodyPr/>
+                    <a:lstStyle/>
+                    <a:p>
+                      <a:pPr indent="0" marL="0">
+                        <a:buNone/>
+                      </a:pPr>
+                      <a:r>
+                        <a:rPr lang="en-US" sz="800" dirty="0">
+                          <a:solidFill>
+                            <a:srgbClr val="2D2D2D"/>
+                          </a:solidFill>
+                          <a:latin typeface="Calibri" pitchFamily="34" charset="0"/>
+                          <a:ea typeface="Calibri" pitchFamily="34" charset="-122"/>
+                          <a:cs typeface="Calibri" pitchFamily="34" charset="-120"/>
+                        </a:rPr>
+                        <a:t>RCV_DT</a:t>
+                      </a:r>
+                      <a:endParaRPr lang="en-US" sz="800" dirty="0">
+                        <a:latin typeface="Calibri" charset="0"/>
+                        <a:ea typeface="Calibri" charset="0"/>
+                        <a:cs typeface="Calibri" charset="0"/>
+                      </a:endParaRPr>
+                    </a:p>
+                  </a:txBody>
+                  <a:tcPr marL="91440" marR="91440" marT="45720" marB="45720">
+                    <a:lnL w="6350" cap="flat" cmpd="sng" algn="ctr">
+                      <a:solidFill>
+                        <a:srgbClr val="CCCCCC"/>
+                      </a:solidFill>
+                      <a:prstDash val="solid"/>
+                      <a:round/>
+                      <a:headEnd type="none" w="med" len="med"/>
+                      <a:tailEnd type="none" w="med" len="med"/>
+                    </a:lnL>
+                    <a:lnR w="6350" cap="flat" cmpd="sng" algn="ctr">
+                      <a:solidFill>
+                        <a:srgbClr val="CCCCCC"/>
+                      </a:solidFill>
+                      <a:prstDash val="solid"/>
+                      <a:round/>
+                      <a:headEnd type="none" w="med" len="med"/>
+                      <a:tailEnd type="none" w="med" len="med"/>
+                    </a:lnR>
+                    <a:lnT w="6350" cap="flat" cmpd="sng" algn="ctr">
+                      <a:solidFill>
+                        <a:srgbClr val="CCCCCC"/>
+                      </a:solidFill>
+                      <a:prstDash val="solid"/>
+                      <a:round/>
+                      <a:headEnd type="none" w="med" len="med"/>
+                      <a:tailEnd type="none" w="med" len="med"/>
+                    </a:lnT>
+                    <a:lnB w="6350" cap="flat" cmpd="sng" algn="ctr">
+                      <a:solidFill>
+                        <a:srgbClr val="CCCCCC"/>
+                      </a:solidFill>
+                      <a:prstDash val="solid"/>
+                      <a:round/>
+                      <a:headEnd type="none" w="med" len="med"/>
+                      <a:tailEnd type="none" w="med" len="med"/>
+                    </a:lnB>
+                    <a:solidFill>
+                      <a:srgbClr val="F5F5F5"/>
+                    </a:solidFill>
+                  </a:tcPr>
+                </a:tc>
+                <a:tc>
+                  <a:txBody>
+                    <a:bodyPr/>
+                    <a:lstStyle/>
+                    <a:p>
+                      <a:pPr indent="0" marL="0">
+                        <a:buNone/>
+                      </a:pPr>
+                      <a:r>
+                        <a:rPr lang="en-US" sz="800" dirty="0">
+                          <a:solidFill>
+                            <a:srgbClr val="2D2D2D"/>
+                          </a:solidFill>
+                          <a:latin typeface="Calibri" pitchFamily="34" charset="0"/>
+                          <a:ea typeface="Calibri" pitchFamily="34" charset="-122"/>
+                          <a:cs typeface="Calibri" pitchFamily="34" charset="-120"/>
+                        </a:rPr>
+                        <a:t>varchar(8)</a:t>
+                      </a:r>
+                      <a:endParaRPr lang="en-US" sz="800" dirty="0">
+                        <a:latin typeface="Calibri" charset="0"/>
+                        <a:ea typeface="Calibri" charset="0"/>
+                        <a:cs typeface="Calibri" charset="0"/>
+                      </a:endParaRPr>
+                    </a:p>
+                  </a:txBody>
+                  <a:tcPr marL="91440" marR="91440" marT="45720" marB="45720">
+                    <a:lnL w="6350" cap="flat" cmpd="sng" algn="ctr">
+                      <a:solidFill>
+                        <a:srgbClr val="CCCCCC"/>
+                      </a:solidFill>
+                      <a:prstDash val="solid"/>
+                      <a:round/>
+                      <a:headEnd type="none" w="med" len="med"/>
+                      <a:tailEnd type="none" w="med" len="med"/>
+                    </a:lnL>
+                    <a:lnR w="6350" cap="flat" cmpd="sng" algn="ctr">
+                      <a:solidFill>
+                        <a:srgbClr val="CCCCCC"/>
+                      </a:solidFill>
+                      <a:prstDash val="solid"/>
+                      <a:round/>
+                      <a:headEnd type="none" w="med" len="med"/>
+                      <a:tailEnd type="none" w="med" len="med"/>
+                    </a:lnR>
+                    <a:lnT w="6350" cap="flat" cmpd="sng" algn="ctr">
+                      <a:solidFill>
+                        <a:srgbClr val="CCCCCC"/>
+                      </a:solidFill>
+                      <a:prstDash val="solid"/>
+                      <a:round/>
+                      <a:headEnd type="none" w="med" len="med"/>
+                      <a:tailEnd type="none" w="med" len="med"/>
+                    </a:lnT>
+                    <a:lnB w="6350" cap="flat" cmpd="sng" algn="ctr">
+                      <a:solidFill>
+                        <a:srgbClr val="CCCCCC"/>
+                      </a:solidFill>
+                      <a:prstDash val="solid"/>
+                      <a:round/>
+                      <a:headEnd type="none" w="med" len="med"/>
+                      <a:tailEnd type="none" w="med" len="med"/>
+                    </a:lnB>
+                    <a:solidFill>
+                      <a:srgbClr val="F5F5F5"/>
+                    </a:solidFill>
+                  </a:tcPr>
+                </a:tc>
+                <a:tc>
+                  <a:txBody>
+                    <a:bodyPr/>
+                    <a:lstStyle/>
+                    <a:p>
+                      <a:pPr indent="0" marL="0">
+                        <a:buNone/>
+                      </a:pPr>
+                      <a:r>
+                        <a:rPr lang="en-US" sz="800" dirty="0">
+                          <a:solidFill>
+                            <a:srgbClr val="2D2D2D"/>
+                          </a:solidFill>
+                          <a:latin typeface="Calibri" pitchFamily="34" charset="0"/>
+                          <a:ea typeface="Calibri" pitchFamily="34" charset="-122"/>
+                          <a:cs typeface="Calibri" pitchFamily="34" charset="-120"/>
+                        </a:rPr>
+                        <a:t>受信日</a:t>
+                      </a:r>
+                      <a:endParaRPr lang="en-US" sz="800" dirty="0">
+                        <a:latin typeface="Calibri" charset="0"/>
+                        <a:ea typeface="Calibri" charset="0"/>
+                        <a:cs typeface="Calibri" charset="0"/>
+                      </a:endParaRPr>
+                    </a:p>
+                  </a:txBody>
+                  <a:tcPr marL="91440" marR="91440" marT="45720" marB="45720">
+                    <a:lnL w="6350" cap="flat" cmpd="sng" algn="ctr">
+                      <a:solidFill>
+                        <a:srgbClr val="CCCCCC"/>
+                      </a:solidFill>
+                      <a:prstDash val="solid"/>
+                      <a:round/>
+                      <a:headEnd type="none" w="med" len="med"/>
+                      <a:tailEnd type="none" w="med" len="med"/>
+                    </a:lnL>
+                    <a:lnR w="6350" cap="flat" cmpd="sng" algn="ctr">
+                      <a:solidFill>
+                        <a:srgbClr val="CCCCCC"/>
+                      </a:solidFill>
+                      <a:prstDash val="solid"/>
+                      <a:round/>
+                      <a:headEnd type="none" w="med" len="med"/>
+                      <a:tailEnd type="none" w="med" len="med"/>
+                    </a:lnR>
+                    <a:lnT w="6350" cap="flat" cmpd="sng" algn="ctr">
+                      <a:solidFill>
+                        <a:srgbClr val="CCCCCC"/>
+                      </a:solidFill>
+                      <a:prstDash val="solid"/>
+                      <a:round/>
+                      <a:headEnd type="none" w="med" len="med"/>
+                      <a:tailEnd type="none" w="med" len="med"/>
+                    </a:lnT>
+                    <a:lnB w="6350" cap="flat" cmpd="sng" algn="ctr">
+                      <a:solidFill>
+                        <a:srgbClr val="CCCCCC"/>
+                      </a:solidFill>
+                      <a:prstDash val="solid"/>
+                      <a:round/>
+                      <a:headEnd type="none" w="med" len="med"/>
+                      <a:tailEnd type="none" w="med" len="med"/>
+                    </a:lnB>
+                    <a:solidFill>
+                      <a:srgbClr val="F5F5F5"/>
+                    </a:solidFill>
+                  </a:tcPr>
+                </a:tc>
+              </a:tr>
+              <a:tr h="228600">
+                <a:tc>
+                  <a:txBody>
+                    <a:bodyPr/>
+                    <a:lstStyle/>
+                    <a:p>
+                      <a:pPr indent="0" marL="0">
+                        <a:buNone/>
+                      </a:pPr>
+                      <a:r>
+                        <a:rPr lang="en-US" sz="800" dirty="0">
+                          <a:solidFill>
+                            <a:srgbClr val="2D2D2D"/>
+                          </a:solidFill>
+                          <a:latin typeface="Calibri" pitchFamily="34" charset="0"/>
+                          <a:ea typeface="Calibri" pitchFamily="34" charset="-122"/>
+                          <a:cs typeface="Calibri" pitchFamily="34" charset="-120"/>
+                        </a:rPr>
+                        <a:t/>
+                      </a:r>
+                      <a:endParaRPr lang="en-US" sz="800" dirty="0">
+                        <a:latin typeface="Calibri" charset="0"/>
+                        <a:ea typeface="Calibri" charset="0"/>
+                        <a:cs typeface="Calibri" charset="0"/>
+                      </a:endParaRPr>
+                    </a:p>
+                  </a:txBody>
+                  <a:tcPr marL="91440" marR="91440" marT="45720" marB="45720">
+                    <a:lnL w="6350" cap="flat" cmpd="sng" algn="ctr">
+                      <a:solidFill>
+                        <a:srgbClr val="CCCCCC"/>
+                      </a:solidFill>
+                      <a:prstDash val="solid"/>
+                      <a:round/>
+                      <a:headEnd type="none" w="med" len="med"/>
+                      <a:tailEnd type="none" w="med" len="med"/>
+                    </a:lnL>
+                    <a:lnR w="6350" cap="flat" cmpd="sng" algn="ctr">
+                      <a:solidFill>
+                        <a:srgbClr val="CCCCCC"/>
+                      </a:solidFill>
+                      <a:prstDash val="solid"/>
+                      <a:round/>
+                      <a:headEnd type="none" w="med" len="med"/>
+                      <a:tailEnd type="none" w="med" len="med"/>
+                    </a:lnR>
+                    <a:lnT w="6350" cap="flat" cmpd="sng" algn="ctr">
+                      <a:solidFill>
+                        <a:srgbClr val="CCCCCC"/>
+                      </a:solidFill>
+                      <a:prstDash val="solid"/>
+                      <a:round/>
+                      <a:headEnd type="none" w="med" len="med"/>
+                      <a:tailEnd type="none" w="med" len="med"/>
+                    </a:lnT>
+                    <a:lnB w="6350" cap="flat" cmpd="sng" algn="ctr">
+                      <a:solidFill>
+                        <a:srgbClr val="CCCCCC"/>
+                      </a:solidFill>
+                      <a:prstDash val="solid"/>
+                      <a:round/>
+                      <a:headEnd type="none" w="med" len="med"/>
+                      <a:tailEnd type="none" w="med" len="med"/>
+                    </a:lnB>
+                    <a:solidFill>
+                      <a:srgbClr val="FFFFFF"/>
+                    </a:solidFill>
+                  </a:tcPr>
+                </a:tc>
+                <a:tc>
+                  <a:txBody>
+                    <a:bodyPr/>
+                    <a:lstStyle/>
+                    <a:p>
+                      <a:pPr indent="0" marL="0">
+                        <a:buNone/>
+                      </a:pPr>
+                      <a:r>
+                        <a:rPr lang="en-US" sz="800" dirty="0">
+                          <a:solidFill>
+                            <a:srgbClr val="2D2D2D"/>
+                          </a:solidFill>
+                          <a:latin typeface="Calibri" pitchFamily="34" charset="0"/>
+                          <a:ea typeface="Calibri" pitchFamily="34" charset="-122"/>
+                          <a:cs typeface="Calibri" pitchFamily="34" charset="-120"/>
+                        </a:rPr>
+                        <a:t/>
+                      </a:r>
+                      <a:endParaRPr lang="en-US" sz="800" dirty="0">
+                        <a:latin typeface="Calibri" charset="0"/>
+                        <a:ea typeface="Calibri" charset="0"/>
+                        <a:cs typeface="Calibri" charset="0"/>
+                      </a:endParaRPr>
+                    </a:p>
+                  </a:txBody>
+                  <a:tcPr marL="91440" marR="91440" marT="45720" marB="45720">
+                    <a:lnL w="6350" cap="flat" cmpd="sng" algn="ctr">
+                      <a:solidFill>
+                        <a:srgbClr val="CCCCCC"/>
+                      </a:solidFill>
+                      <a:prstDash val="solid"/>
+                      <a:round/>
+                      <a:headEnd type="none" w="med" len="med"/>
+                      <a:tailEnd type="none" w="med" len="med"/>
+                    </a:lnL>
+                    <a:lnR w="6350" cap="flat" cmpd="sng" algn="ctr">
+                      <a:solidFill>
+                        <a:srgbClr val="CCCCCC"/>
+                      </a:solidFill>
+                      <a:prstDash val="solid"/>
+                      <a:round/>
+                      <a:headEnd type="none" w="med" len="med"/>
+                      <a:tailEnd type="none" w="med" len="med"/>
+                    </a:lnR>
+                    <a:lnT w="6350" cap="flat" cmpd="sng" algn="ctr">
+                      <a:solidFill>
+                        <a:srgbClr val="CCCCCC"/>
+                      </a:solidFill>
+                      <a:prstDash val="solid"/>
+                      <a:round/>
+                      <a:headEnd type="none" w="med" len="med"/>
+                      <a:tailEnd type="none" w="med" len="med"/>
+                    </a:lnT>
+                    <a:lnB w="6350" cap="flat" cmpd="sng" algn="ctr">
+                      <a:solidFill>
+                        <a:srgbClr val="CCCCCC"/>
+                      </a:solidFill>
+                      <a:prstDash val="solid"/>
+                      <a:round/>
+                      <a:headEnd type="none" w="med" len="med"/>
+                      <a:tailEnd type="none" w="med" len="med"/>
+                    </a:lnB>
+                    <a:solidFill>
+                      <a:srgbClr val="FFFFFF"/>
+                    </a:solidFill>
+                  </a:tcPr>
+                </a:tc>
+                <a:tc>
+                  <a:txBody>
+                    <a:bodyPr/>
+                    <a:lstStyle/>
+                    <a:p>
+                      <a:pPr indent="0" marL="0">
+                        <a:buNone/>
+                      </a:pPr>
+                      <a:r>
+                        <a:rPr lang="en-US" sz="800" dirty="0">
+                          <a:solidFill>
+                            <a:srgbClr val="2D2D2D"/>
+                          </a:solidFill>
+                          <a:latin typeface="Calibri" pitchFamily="34" charset="0"/>
+                          <a:ea typeface="Calibri" pitchFamily="34" charset="-122"/>
+                          <a:cs typeface="Calibri" pitchFamily="34" charset="-120"/>
+                        </a:rPr>
+                        <a:t/>
+                      </a:r>
+                      <a:endParaRPr lang="en-US" sz="800" dirty="0">
+                        <a:latin typeface="Calibri" charset="0"/>
+                        <a:ea typeface="Calibri" charset="0"/>
+                        <a:cs typeface="Calibri" charset="0"/>
+                      </a:endParaRPr>
+                    </a:p>
+                  </a:txBody>
+                  <a:tcPr marL="91440" marR="91440" marT="45720" marB="45720">
+                    <a:lnL w="6350" cap="flat" cmpd="sng" algn="ctr">
+                      <a:solidFill>
+                        <a:srgbClr val="CCCCCC"/>
+                      </a:solidFill>
+                      <a:prstDash val="solid"/>
+                      <a:round/>
+                      <a:headEnd type="none" w="med" len="med"/>
+                      <a:tailEnd type="none" w="med" len="med"/>
+                    </a:lnL>
+                    <a:lnR w="6350" cap="flat" cmpd="sng" algn="ctr">
+                      <a:solidFill>
+                        <a:srgbClr val="CCCCCC"/>
+                      </a:solidFill>
+                      <a:prstDash val="solid"/>
+                      <a:round/>
+                      <a:headEnd type="none" w="med" len="med"/>
+                      <a:tailEnd type="none" w="med" len="med"/>
+                    </a:lnR>
+                    <a:lnT w="6350" cap="flat" cmpd="sng" algn="ctr">
+                      <a:solidFill>
+                        <a:srgbClr val="CCCCCC"/>
+                      </a:solidFill>
+                      <a:prstDash val="solid"/>
+                      <a:round/>
+                      <a:headEnd type="none" w="med" len="med"/>
+                      <a:tailEnd type="none" w="med" len="med"/>
+                    </a:lnT>
+                    <a:lnB w="6350" cap="flat" cmpd="sng" algn="ctr">
+                      <a:solidFill>
+                        <a:srgbClr val="CCCCCC"/>
+                      </a:solidFill>
+                      <a:prstDash val="solid"/>
+                      <a:round/>
+                      <a:headEnd type="none" w="med" len="med"/>
+                      <a:tailEnd type="none" w="med" len="med"/>
+                    </a:lnB>
+                    <a:solidFill>
+                      <a:srgbClr val="FFFFFF"/>
+                    </a:solidFill>
+                  </a:tcPr>
+                </a:tc>
+              </a:tr>
+              <a:tr h="228600">
+                <a:tc>
+                  <a:txBody>
+                    <a:bodyPr/>
+                    <a:lstStyle/>
+                    <a:p>
+                      <a:pPr indent="0" marL="0">
+                        <a:buNone/>
+                      </a:pPr>
+                      <a:r>
+                        <a:rPr lang="en-US" sz="800" dirty="0">
+                          <a:solidFill>
+                            <a:srgbClr val="2D2D2D"/>
+                          </a:solidFill>
+                          <a:latin typeface="Calibri" pitchFamily="34" charset="0"/>
+                          <a:ea typeface="Calibri" pitchFamily="34" charset="-122"/>
+                          <a:cs typeface="Calibri" pitchFamily="34" charset="-120"/>
+                        </a:rPr>
+                        <a:t/>
+                      </a:r>
+                      <a:endParaRPr lang="en-US" sz="800" dirty="0">
+                        <a:latin typeface="Calibri" charset="0"/>
+                        <a:ea typeface="Calibri" charset="0"/>
+                        <a:cs typeface="Calibri" charset="0"/>
+                      </a:endParaRPr>
+                    </a:p>
+                  </a:txBody>
+                  <a:tcPr marL="91440" marR="91440" marT="45720" marB="45720">
+                    <a:lnL w="6350" cap="flat" cmpd="sng" algn="ctr">
+                      <a:solidFill>
+                        <a:srgbClr val="CCCCCC"/>
+                      </a:solidFill>
+                      <a:prstDash val="solid"/>
+                      <a:round/>
+                      <a:headEnd type="none" w="med" len="med"/>
+                      <a:tailEnd type="none" w="med" len="med"/>
+                    </a:lnL>
+                    <a:lnR w="6350" cap="flat" cmpd="sng" algn="ctr">
+                      <a:solidFill>
+                        <a:srgbClr val="CCCCCC"/>
+                      </a:solidFill>
+                      <a:prstDash val="solid"/>
+                      <a:round/>
+                      <a:headEnd type="none" w="med" len="med"/>
+                      <a:tailEnd type="none" w="med" len="med"/>
+                    </a:lnR>
+                    <a:lnT w="6350" cap="flat" cmpd="sng" algn="ctr">
+                      <a:solidFill>
+                        <a:srgbClr val="CCCCCC"/>
+                      </a:solidFill>
+                      <a:prstDash val="solid"/>
+                      <a:round/>
+                      <a:headEnd type="none" w="med" len="med"/>
+                      <a:tailEnd type="none" w="med" len="med"/>
+                    </a:lnT>
+                    <a:lnB w="6350" cap="flat" cmpd="sng" algn="ctr">
+                      <a:solidFill>
+                        <a:srgbClr val="CCCCCC"/>
+                      </a:solidFill>
+                      <a:prstDash val="solid"/>
+                      <a:round/>
+                      <a:headEnd type="none" w="med" len="med"/>
+                      <a:tailEnd type="none" w="med" len="med"/>
+                    </a:lnB>
+                    <a:solidFill>
+                      <a:srgbClr val="F5F5F5"/>
+                    </a:solidFill>
+                  </a:tcPr>
+                </a:tc>
+                <a:tc>
+                  <a:txBody>
+                    <a:bodyPr/>
+                    <a:lstStyle/>
+                    <a:p>
+                      <a:pPr indent="0" marL="0">
+                        <a:buNone/>
+                      </a:pPr>
+                      <a:r>
+                        <a:rPr lang="en-US" sz="800" dirty="0">
+                          <a:solidFill>
+                            <a:srgbClr val="2D2D2D"/>
+                          </a:solidFill>
+                          <a:latin typeface="Calibri" pitchFamily="34" charset="0"/>
+                          <a:ea typeface="Calibri" pitchFamily="34" charset="-122"/>
+                          <a:cs typeface="Calibri" pitchFamily="34" charset="-120"/>
+                        </a:rPr>
+                        <a:t/>
+                      </a:r>
+                      <a:endParaRPr lang="en-US" sz="800" dirty="0">
+                        <a:latin typeface="Calibri" charset="0"/>
+                        <a:ea typeface="Calibri" charset="0"/>
+                        <a:cs typeface="Calibri" charset="0"/>
+                      </a:endParaRPr>
+                    </a:p>
+                  </a:txBody>
+                  <a:tcPr marL="91440" marR="91440" marT="45720" marB="45720">
+                    <a:lnL w="6350" cap="flat" cmpd="sng" algn="ctr">
+                      <a:solidFill>
+                        <a:srgbClr val="CCCCCC"/>
+                      </a:solidFill>
+                      <a:prstDash val="solid"/>
+                      <a:round/>
+                      <a:headEnd type="none" w="med" len="med"/>
+                      <a:tailEnd type="none" w="med" len="med"/>
+                    </a:lnL>
+                    <a:lnR w="6350" cap="flat" cmpd="sng" algn="ctr">
+                      <a:solidFill>
+                        <a:srgbClr val="CCCCCC"/>
+                      </a:solidFill>
+                      <a:prstDash val="solid"/>
+                      <a:round/>
+                      <a:headEnd type="none" w="med" len="med"/>
+                      <a:tailEnd type="none" w="med" len="med"/>
+                    </a:lnR>
+                    <a:lnT w="6350" cap="flat" cmpd="sng" algn="ctr">
+                      <a:solidFill>
+                        <a:srgbClr val="CCCCCC"/>
+                      </a:solidFill>
+                      <a:prstDash val="solid"/>
+                      <a:round/>
+                      <a:headEnd type="none" w="med" len="med"/>
+                      <a:tailEnd type="none" w="med" len="med"/>
+                    </a:lnT>
+                    <a:lnB w="6350" cap="flat" cmpd="sng" algn="ctr">
+                      <a:solidFill>
+                        <a:srgbClr val="CCCCCC"/>
+                      </a:solidFill>
+                      <a:prstDash val="solid"/>
+                      <a:round/>
+                      <a:headEnd type="none" w="med" len="med"/>
+                      <a:tailEnd type="none" w="med" len="med"/>
+                    </a:lnB>
+                    <a:solidFill>
+                      <a:srgbClr val="F5F5F5"/>
+                    </a:solidFill>
+                  </a:tcPr>
+                </a:tc>
+                <a:tc>
+                  <a:txBody>
+                    <a:bodyPr/>
+                    <a:lstStyle/>
+                    <a:p>
+                      <a:pPr indent="0" marL="0">
+                        <a:buNone/>
+                      </a:pPr>
+                      <a:r>
+                        <a:rPr lang="en-US" sz="800" dirty="0">
+                          <a:solidFill>
+                            <a:srgbClr val="2D2D2D"/>
+                          </a:solidFill>
+                          <a:latin typeface="Calibri" pitchFamily="34" charset="0"/>
+                          <a:ea typeface="Calibri" pitchFamily="34" charset="-122"/>
+                          <a:cs typeface="Calibri" pitchFamily="34" charset="-120"/>
+                        </a:rPr>
+                        <a:t/>
+                      </a:r>
+                      <a:endParaRPr lang="en-US" sz="800" dirty="0">
+                        <a:latin typeface="Calibri" charset="0"/>
+                        <a:ea typeface="Calibri" charset="0"/>
+                        <a:cs typeface="Calibri" charset="0"/>
+                      </a:endParaRPr>
+                    </a:p>
+                  </a:txBody>
+                  <a:tcPr marL="91440" marR="91440" marT="45720" marB="45720">
+                    <a:lnL w="6350" cap="flat" cmpd="sng" algn="ctr">
+                      <a:solidFill>
+                        <a:srgbClr val="CCCCCC"/>
+                      </a:solidFill>
+                      <a:prstDash val="solid"/>
+                      <a:round/>
+                      <a:headEnd type="none" w="med" len="med"/>
+                      <a:tailEnd type="none" w="med" len="med"/>
+                    </a:lnL>
+                    <a:lnR w="6350" cap="flat" cmpd="sng" algn="ctr">
+                      <a:solidFill>
+                        <a:srgbClr val="CCCCCC"/>
+                      </a:solidFill>
+                      <a:prstDash val="solid"/>
+                      <a:round/>
+                      <a:headEnd type="none" w="med" len="med"/>
+                      <a:tailEnd type="none" w="med" len="med"/>
+                    </a:lnR>
+                    <a:lnT w="6350" cap="flat" cmpd="sng" algn="ctr">
+                      <a:solidFill>
+                        <a:srgbClr val="CCCCCC"/>
+                      </a:solidFill>
+                      <a:prstDash val="solid"/>
+                      <a:round/>
+                      <a:headEnd type="none" w="med" len="med"/>
+                      <a:tailEnd type="none" w="med" len="med"/>
+                    </a:lnT>
+                    <a:lnB w="6350" cap="flat" cmpd="sng" algn="ctr">
+                      <a:solidFill>
+                        <a:srgbClr val="CCCCCC"/>
+                      </a:solidFill>
+                      <a:prstDash val="solid"/>
+                      <a:round/>
+                      <a:headEnd type="none" w="med" len="med"/>
+                      <a:tailEnd type="none" w="med" len="med"/>
+                    </a:lnB>
+                    <a:solidFill>
+                      <a:srgbClr val="F5F5F5"/>
+                    </a:solidFill>
+                  </a:tcPr>
+                </a:tc>
+              </a:tr>
+            </a:tbl>
+          </a:graphicData>
+        </a:graphic>
+      </p:graphicFrame>
+      <p:sp>
+        <p:nvSpPr>
+          <p:cNvPr id="16" name="Text 9"/>
+          <p:cNvSpPr/>
+          <p:nvPr/>
+        </p:nvSpPr>
+        <p:spPr>
+          <a:xfrm>
+            <a:off x="5029200" y="6035040"/>
+            <a:ext cx="4572000" cy="274320"/>
+          </a:xfrm>
+          <a:prstGeom prst="rect">
+            <a:avLst/>
+          </a:prstGeom>
+          <a:noFill/>
+          <a:ln/>
+        </p:spPr>
+        <p:txBody>
+          <a:bodyPr wrap="square" lIns="0" tIns="0" rIns="0" bIns="0" rtlCol="0" anchor="ctr"/>
+          <a:lstStyle/>
+          <a:p>
+            <a:pPr indent="0" marL="0">
+              <a:buNone/>
+            </a:pPr>
+            <a:r>
+              <a:rPr lang="en-US" sz="800" dirty="0">
+                <a:solidFill>
+                  <a:srgbClr val="AA4400"/>
+                </a:solidFill>
+                <a:latin typeface="Calibri" pitchFamily="34" charset="0"/>
+                <a:ea typeface="Calibri" pitchFamily="34" charset="-122"/>
+                <a:cs typeface="Calibri" pitchFamily="34" charset="-120"/>
+              </a:rPr>
+              <a:t>※ 取込順序: 01→02→03→04→05  /  02〜05 は将来実装予定</a:t>
+            </a:r>
+            <a:endParaRPr lang="en-US" sz="800" dirty="0"/>
+          </a:p>
+        </p:txBody>
+      </p:sp>
+    </p:spTree>
+  </p:cSld>
+  <p:clrMapOvr>
+    <a:masterClrMapping/>
+  </p:clrMapOvr>
+</p:sld>
+</file>
+
+<file path=ppt/slides/slide2.xml><?xml version="1.0" encoding="utf-8"?>
+<p:sld xmlns:a="http://schemas.openxmlformats.org/drawingml/2006/main" xmlns:r="http://schemas.openxmlformats.org/officeDocument/2006/relationships" xmlns:p="http://schemas.openxmlformats.org/presentationml/2006/main">
+  <p:cSld name="Slide 2">
+    <p:bg>
+      <p:bgPr>
+        <a:solidFill>
+          <a:srgbClr val="FFFFFF"/>
+        </a:solidFill>
+      </p:bgPr>
+    </p:bg>
+    <p:spTree>
+      <p:nvGrpSpPr>
+        <p:cNvPr id="1" name=""/>
+        <p:cNvGrpSpPr/>
+        <p:nvPr/>
+      </p:nvGrpSpPr>
+      <p:grpSpPr>
+        <a:xfrm>
+          <a:off x="0" y="0"/>
+          <a:ext cx="0" cy="0"/>
+          <a:chOff x="0" y="0"/>
+          <a:chExt cx="0" cy="0"/>
+        </a:xfrm>
+      </p:grpSpPr>
+      <p:pic>
+        <p:nvPicPr>
+          <p:cNvPr id="2" name="Image 0" descr="/mnt/skills/user/luvina-ppt/assets/decoration_dots.png"/>
+          <p:cNvPicPr>
+            <a:picLocks noChangeAspect="1"/>
+          </p:cNvPicPr>
+          <p:nvPr/>
+        </p:nvPicPr>
+        <p:blipFill>
+          <a:blip r:embed="rId1"/>
+          <a:stretch>
+            <a:fillRect/>
+          </a:stretch>
+        </p:blipFill>
+        <p:spPr>
+          <a:xfrm>
+            <a:off x="0" y="0"/>
+            <a:ext cx="3904488" cy="2880360"/>
+          </a:xfrm>
+          <a:prstGeom prst="rect">
+            <a:avLst/>
+          </a:prstGeom>
+        </p:spPr>
+      </p:pic>
+      <p:pic>
+        <p:nvPicPr>
+          <p:cNvPr id="3" name="Image 1" descr="/mnt/skills/user/luvina-ppt/assets/luvina_badge.png"/>
+          <p:cNvPicPr>
+            <a:picLocks noChangeAspect="1"/>
+          </p:cNvPicPr>
+          <p:nvPr/>
+        </p:nvPicPr>
+        <p:blipFill>
+          <a:blip r:embed="rId2"/>
+          <a:stretch>
+            <a:fillRect/>
+          </a:stretch>
+        </p:blipFill>
+        <p:spPr>
+          <a:xfrm>
+            <a:off x="109728" y="109728"/>
+            <a:ext cx="1874520" cy="466344"/>
+          </a:xfrm>
+          <a:prstGeom prst="rect">
+            <a:avLst/>
+          </a:prstGeom>
+        </p:spPr>
+      </p:pic>
+      <p:sp>
+        <p:nvSpPr>
+          <p:cNvPr id="4" name="Text 0"/>
+          <p:cNvSpPr/>
+          <p:nvPr/>
+        </p:nvSpPr>
+        <p:spPr>
+          <a:xfrm>
+            <a:off x="438912" y="173736"/>
+            <a:ext cx="1216152" cy="329184"/>
+          </a:xfrm>
+          <a:prstGeom prst="rect">
+            <a:avLst/>
+          </a:prstGeom>
+          <a:noFill/>
+          <a:ln/>
+        </p:spPr>
+        <p:txBody>
+          <a:bodyPr wrap="square" lIns="0" tIns="0" rIns="0" bIns="0" rtlCol="0" anchor="ctr"/>
+          <a:lstStyle/>
+          <a:p>
+            <a:pPr indent="0" marL="0">
+              <a:buNone/>
+            </a:pPr>
+            <a:r>
+              <a:rPr lang="en-US" sz="1600" b="1" dirty="0">
+                <a:solidFill>
+                  <a:srgbClr val="FFFFFF"/>
+                </a:solidFill>
+                <a:latin typeface="Arial Black" pitchFamily="34" charset="0"/>
+                <a:ea typeface="Arial Black" pitchFamily="34" charset="-122"/>
+                <a:cs typeface="Arial Black" pitchFamily="34" charset="-120"/>
+              </a:rPr>
+              <a:t>LUVINA</a:t>
+            </a:r>
+            <a:endParaRPr lang="en-US" sz="1600" dirty="0"/>
+          </a:p>
+        </p:txBody>
+      </p:sp>
+      <p:pic>
+        <p:nvPicPr>
+          <p:cNvPr id="5" name="Image 2" descr="/mnt/skills/user/luvina-ppt/assets/luvina_logo.png"/>
           <p:cNvPicPr>
             <a:picLocks noChangeAspect="1"/>
           </p:cNvPicPr>
@@ -22198,7 +27869,7 @@
                 <a:ea typeface="Calibri" pitchFamily="34" charset="-122"/>
                 <a:cs typeface="Calibri" pitchFamily="34" charset="-120"/>
               </a:rPr>
-              <a:t>OC(基幹/BIPROGY) / SG(POS/VINX) / SH(棚情報/SHARP)</a:t>
+              <a:t>OC(基幹/BIPROGY) / SG(POS/VINX) / SH(棚情報/SHARP)　11. OC取込定義（GHマスタ）: GHPLUM(実装済) / GHDISCOUNTM・GHBUNDLEM・GHEVENTM・GMMDSEM(未実装)</a:t>
             </a:r>
             <a:endParaRPr lang="en-US" sz="800" dirty="0"/>
           </a:p>
@@ -22238,7 +27909,7 @@
       </p:grpSpPr>
       <p:pic>
         <p:nvPicPr>
-          <p:cNvPr id="2" name="Image 0" descr="/mnt/skills/user/luvina-ppt/assets/decoration_dots.png">    </p:cNvPr>
+          <p:cNvPr id="2" name="Image 0" descr="/mnt/skills/user/luvina-ppt/assets/decoration_dots.png"/>
           <p:cNvPicPr>
             <a:picLocks noChangeAspect="1"/>
           </p:cNvPicPr>
@@ -22262,7 +27933,7 @@
       </p:pic>
       <p:pic>
         <p:nvPicPr>
-          <p:cNvPr id="3" name="Image 1" descr="/mnt/skills/user/luvina-ppt/assets/luvina_badge.png">    </p:cNvPr>
+          <p:cNvPr id="3" name="Image 1" descr="/mnt/skills/user/luvina-ppt/assets/luvina_badge.png"/>
           <p:cNvPicPr>
             <a:picLocks noChangeAspect="1"/>
           </p:cNvPicPr>
@@ -22325,7 +27996,7 @@
       </p:sp>
       <p:pic>
         <p:nvPicPr>
-          <p:cNvPr id="5" name="Image 2" descr="/mnt/skills/user/luvina-ppt/assets/luvina_logo.png">    </p:cNvPr>
+          <p:cNvPr id="5" name="Image 2" descr="/mnt/skills/user/luvina-ppt/assets/luvina_logo.png"/>
           <p:cNvPicPr>
             <a:picLocks noChangeAspect="1"/>
           </p:cNvPicPr>
@@ -22597,7 +28268,7 @@
       </p:grpSpPr>
       <p:pic>
         <p:nvPicPr>
-          <p:cNvPr id="2" name="Image 0" descr="/mnt/skills/user/luvina-ppt/assets/decoration_dots.png">    </p:cNvPr>
+          <p:cNvPr id="2" name="Image 0" descr="/mnt/skills/user/luvina-ppt/assets/decoration_dots.png"/>
           <p:cNvPicPr>
             <a:picLocks noChangeAspect="1"/>
           </p:cNvPicPr>
@@ -22621,7 +28292,7 @@
       </p:pic>
       <p:pic>
         <p:nvPicPr>
-          <p:cNvPr id="3" name="Image 1" descr="/mnt/skills/user/luvina-ppt/assets/luvina_badge.png">    </p:cNvPr>
+          <p:cNvPr id="3" name="Image 1" descr="/mnt/skills/user/luvina-ppt/assets/luvina_badge.png"/>
           <p:cNvPicPr>
             <a:picLocks noChangeAspect="1"/>
           </p:cNvPicPr>
@@ -22684,7 +28355,7 @@
       </p:sp>
       <p:pic>
         <p:nvPicPr>
-          <p:cNvPr id="5" name="Image 2" descr="/mnt/skills/user/luvina-ppt/assets/luvina_logo.png">    </p:cNvPr>
+          <p:cNvPr id="5" name="Image 2" descr="/mnt/skills/user/luvina-ppt/assets/luvina_logo.png"/>
           <p:cNvPicPr>
             <a:picLocks noChangeAspect="1"/>
           </p:cNvPicPr>
@@ -23988,7 +29659,7 @@
       </p:grpSpPr>
       <p:pic>
         <p:nvPicPr>
-          <p:cNvPr id="2" name="Image 0" descr="/mnt/skills/user/luvina-ppt/assets/decoration_dots.png">    </p:cNvPr>
+          <p:cNvPr id="2" name="Image 0" descr="/mnt/skills/user/luvina-ppt/assets/decoration_dots.png"/>
           <p:cNvPicPr>
             <a:picLocks noChangeAspect="1"/>
           </p:cNvPicPr>
@@ -24012,7 +29683,7 @@
       </p:pic>
       <p:pic>
         <p:nvPicPr>
-          <p:cNvPr id="3" name="Image 1" descr="/mnt/skills/user/luvina-ppt/assets/luvina_badge.png">    </p:cNvPr>
+          <p:cNvPr id="3" name="Image 1" descr="/mnt/skills/user/luvina-ppt/assets/luvina_badge.png"/>
           <p:cNvPicPr>
             <a:picLocks noChangeAspect="1"/>
           </p:cNvPicPr>
@@ -24075,7 +29746,7 @@
       </p:sp>
       <p:pic>
         <p:nvPicPr>
-          <p:cNvPr id="5" name="Image 2" descr="/mnt/skills/user/luvina-ppt/assets/luvina_logo.png">    </p:cNvPr>
+          <p:cNvPr id="5" name="Image 2" descr="/mnt/skills/user/luvina-ppt/assets/luvina_logo.png"/>
           <p:cNvPicPr>
             <a:picLocks noChangeAspect="1"/>
           </p:cNvPicPr>
@@ -24347,7 +30018,7 @@
       </p:grpSpPr>
       <p:pic>
         <p:nvPicPr>
-          <p:cNvPr id="2" name="Image 0" descr="/mnt/skills/user/luvina-ppt/assets/decoration_dots.png">    </p:cNvPr>
+          <p:cNvPr id="2" name="Image 0" descr="/mnt/skills/user/luvina-ppt/assets/decoration_dots.png"/>
           <p:cNvPicPr>
             <a:picLocks noChangeAspect="1"/>
           </p:cNvPicPr>
@@ -24371,7 +30042,7 @@
       </p:pic>
       <p:pic>
         <p:nvPicPr>
-          <p:cNvPr id="3" name="Image 1" descr="/mnt/skills/user/luvina-ppt/assets/luvina_badge.png">    </p:cNvPr>
+          <p:cNvPr id="3" name="Image 1" descr="/mnt/skills/user/luvina-ppt/assets/luvina_badge.png"/>
           <p:cNvPicPr>
             <a:picLocks noChangeAspect="1"/>
           </p:cNvPicPr>
@@ -24434,7 +30105,7 @@
       </p:sp>
       <p:pic>
         <p:nvPicPr>
-          <p:cNvPr id="5" name="Image 2" descr="/mnt/skills/user/luvina-ppt/assets/luvina_logo.png">    </p:cNvPr>
+          <p:cNvPr id="5" name="Image 2" descr="/mnt/skills/user/luvina-ppt/assets/luvina_logo.png"/>
           <p:cNvPicPr>
             <a:picLocks noChangeAspect="1"/>
           </p:cNvPicPr>
@@ -27922,7 +33593,7 @@
       </p:grpSpPr>
       <p:pic>
         <p:nvPicPr>
-          <p:cNvPr id="2" name="Image 0" descr="/mnt/skills/user/luvina-ppt/assets/decoration_dots.png">    </p:cNvPr>
+          <p:cNvPr id="2" name="Image 0" descr="/mnt/skills/user/luvina-ppt/assets/decoration_dots.png"/>
           <p:cNvPicPr>
             <a:picLocks noChangeAspect="1"/>
           </p:cNvPicPr>
@@ -27946,7 +33617,7 @@
       </p:pic>
       <p:pic>
         <p:nvPicPr>
-          <p:cNvPr id="3" name="Image 1" descr="/mnt/skills/user/luvina-ppt/assets/luvina_badge.png">    </p:cNvPr>
+          <p:cNvPr id="3" name="Image 1" descr="/mnt/skills/user/luvina-ppt/assets/luvina_badge.png"/>
           <p:cNvPicPr>
             <a:picLocks noChangeAspect="1"/>
           </p:cNvPicPr>
@@ -28009,7 +33680,7 @@
       </p:sp>
       <p:pic>
         <p:nvPicPr>
-          <p:cNvPr id="5" name="Image 2" descr="/mnt/skills/user/luvina-ppt/assets/luvina_logo.png">    </p:cNvPr>
+          <p:cNvPr id="5" name="Image 2" descr="/mnt/skills/user/luvina-ppt/assets/luvina_logo.png"/>
           <p:cNvPicPr>
             <a:picLocks noChangeAspect="1"/>
           </p:cNvPicPr>
@@ -31879,7 +37550,7 @@
       </p:grpSpPr>
       <p:pic>
         <p:nvPicPr>
-          <p:cNvPr id="2" name="Image 0" descr="/mnt/skills/user/luvina-ppt/assets/decoration_dots.png">    </p:cNvPr>
+          <p:cNvPr id="2" name="Image 0" descr="/mnt/skills/user/luvina-ppt/assets/decoration_dots.png"/>
           <p:cNvPicPr>
             <a:picLocks noChangeAspect="1"/>
           </p:cNvPicPr>
@@ -31903,7 +37574,7 @@
       </p:pic>
       <p:pic>
         <p:nvPicPr>
-          <p:cNvPr id="3" name="Image 1" descr="/mnt/skills/user/luvina-ppt/assets/luvina_badge.png">    </p:cNvPr>
+          <p:cNvPr id="3" name="Image 1" descr="/mnt/skills/user/luvina-ppt/assets/luvina_badge.png"/>
           <p:cNvPicPr>
             <a:picLocks noChangeAspect="1"/>
           </p:cNvPicPr>
@@ -31966,7 +37637,7 @@
       </p:sp>
       <p:pic>
         <p:nvPicPr>
-          <p:cNvPr id="5" name="Image 2" descr="/mnt/skills/user/luvina-ppt/assets/luvina_logo.png">    </p:cNvPr>
+          <p:cNvPr id="5" name="Image 2" descr="/mnt/skills/user/luvina-ppt/assets/luvina_logo.png"/>
           <p:cNvPicPr>
             <a:picLocks noChangeAspect="1"/>
           </p:cNvPicPr>
@@ -35851,7 +41522,7 @@
       </p:grpSpPr>
       <p:pic>
         <p:nvPicPr>
-          <p:cNvPr id="2" name="Image 0" descr="/mnt/skills/user/luvina-ppt/assets/decoration_dots.png">    </p:cNvPr>
+          <p:cNvPr id="2" name="Image 0" descr="/mnt/skills/user/luvina-ppt/assets/decoration_dots.png"/>
           <p:cNvPicPr>
             <a:picLocks noChangeAspect="1"/>
           </p:cNvPicPr>
@@ -35875,7 +41546,7 @@
       </p:pic>
       <p:pic>
         <p:nvPicPr>
-          <p:cNvPr id="3" name="Image 1" descr="/mnt/skills/user/luvina-ppt/assets/luvina_badge.png">    </p:cNvPr>
+          <p:cNvPr id="3" name="Image 1" descr="/mnt/skills/user/luvina-ppt/assets/luvina_badge.png"/>
           <p:cNvPicPr>
             <a:picLocks noChangeAspect="1"/>
           </p:cNvPicPr>
@@ -35938,7 +41609,7 @@
       </p:sp>
       <p:pic>
         <p:nvPicPr>
-          <p:cNvPr id="5" name="Image 2" descr="/mnt/skills/user/luvina-ppt/assets/luvina_logo.png">    </p:cNvPr>
+          <p:cNvPr id="5" name="Image 2" descr="/mnt/skills/user/luvina-ppt/assets/luvina_logo.png"/>
           <p:cNvPicPr>
             <a:picLocks noChangeAspect="1"/>
           </p:cNvPicPr>

--- a/40_AWS/01_構成資料/カスミPOS_AWS構成資料.pptx
+++ b/40_AWS/01_構成資料/カスミPOS_AWS構成資料.pptx
@@ -20,6 +20,7 @@
     <p:sldId id="267" r:id="rId13"/>
     <p:sldId id="268" r:id="rId14"/>
     <p:sldId id="269" r:id="rId15"/>
+    <p:sldId id="271" r:id="rId22"/>
   </p:sldIdLst>
   <p:notesMasterIdLst>
     <p:notesMasterId r:id="rId16"/>
@@ -25966,6 +25967,565 @@
 </p:sld>
 </file>
 
+<file path=ppt/slides/slide16.xml><?xml version="1.0" encoding="utf-8"?>
+<p:sld xmlns:a="http://schemas.openxmlformats.org/drawingml/2006/main" xmlns:r="http://schemas.openxmlformats.org/officeDocument/2006/relationships" xmlns:p="http://schemas.openxmlformats.org/presentationml/2006/main">
+  <p:cSld name="Slide 16">
+    <p:bg>
+      <p:bgPr>
+        <a:solidFill>
+          <a:srgbClr val="FFFFFF"/>
+        </a:solidFill>
+      </p:bgPr>
+    </p:bg>
+    <p:spTree>
+      <p:nvGrpSpPr>
+        <p:cNvPr id="1" name=""/>
+        <p:cNvGrpSpPr/>
+        <p:nvPr/>
+      </p:nvGrpSpPr>
+      <p:grpSpPr>
+        <a:xfrm>
+          <a:off x="0" y="0"/>
+          <a:ext cx="0" cy="0"/>
+          <a:chOff x="0" y="0"/>
+          <a:chExt cx="0" cy="0"/>
+        </a:xfrm>
+      </p:grpSpPr>
+      <p:pic>
+        <p:nvPicPr>
+          <p:cNvPr id="2" name="Image 0" descr="/mnt/skills/user/luvina-ppt/assets/decoration_dots.png"/>
+          <p:cNvPicPr>
+            <a:picLocks noChangeAspect="1"/>
+          </p:cNvPicPr>
+          <p:nvPr/>
+        </p:nvPicPr>
+        <p:blipFill>
+          <a:blip r:embed="rId1"/>
+          <a:stretch>
+            <a:fillRect/>
+          </a:stretch>
+        </p:blipFill>
+        <p:spPr>
+          <a:xfrm>
+            <a:off x="0" y="0"/>
+            <a:ext cx="3904488" cy="2880360"/>
+          </a:xfrm>
+          <a:prstGeom prst="rect">
+            <a:avLst/>
+          </a:prstGeom>
+        </p:spPr>
+      </p:pic>
+      <p:pic>
+        <p:nvPicPr>
+          <p:cNvPr id="3" name="Image 1" descr="/mnt/skills/user/luvina-ppt/assets/luvina_badge.png"/>
+          <p:cNvPicPr>
+            <a:picLocks noChangeAspect="1"/>
+          </p:cNvPicPr>
+          <p:nvPr/>
+        </p:nvPicPr>
+        <p:blipFill>
+          <a:blip r:embed="rId2"/>
+          <a:stretch>
+            <a:fillRect/>
+          </a:stretch>
+        </p:blipFill>
+        <p:spPr>
+          <a:xfrm>
+            <a:off x="109728" y="109728"/>
+            <a:ext cx="1874520" cy="466344"/>
+          </a:xfrm>
+          <a:prstGeom prst="rect">
+            <a:avLst/>
+          </a:prstGeom>
+        </p:spPr>
+      </p:pic>
+      <p:pic>
+        <p:nvPicPr>
+          <p:cNvPr id="5" name="Image 2" descr="/mnt/skills/user/luvina-ppt/assets/luvina_logo.png"/>
+          <p:cNvPicPr>
+            <a:picLocks noChangeAspect="1"/>
+          </p:cNvPicPr>
+          <p:nvPr/>
+        </p:nvPicPr>
+        <p:blipFill>
+          <a:blip r:embed="rId3"/>
+          <a:stretch>
+            <a:fillRect/>
+          </a:stretch>
+        </p:blipFill>
+        <p:spPr>
+          <a:xfrm>
+            <a:off x="10546416" y="109728"/>
+            <a:ext cx="1600200" cy="533400"/>
+          </a:xfrm>
+          <a:prstGeom prst="rect">
+            <a:avLst/>
+          </a:prstGeom>
+        </p:spPr>
+      </p:pic>
+      <p:sp>
+        <p:nvSpPr>
+          <p:cNvPr id="4" name="Text 0"/>
+          <p:cNvSpPr/>
+          <p:nvPr/>
+        </p:nvSpPr>
+        <p:spPr>
+          <a:xfrm>
+            <a:off x="109728" y="109728"/>
+            <a:ext cx="1874520" cy="466344"/>
+          </a:xfrm>
+          <a:prstGeom prst="rect">
+            <a:avLst/>
+          </a:prstGeom>
+          <a:noFill/>
+        </p:spPr>
+        <p:txBody>
+          <a:bodyPr anchor="ctr"/>
+          <a:lstStyle/>
+          <a:p>
+            <a:pPr algn="ctr"/>
+            <a:r>
+              <a:rPr lang="en-US" sz="1800" b="1" dirty="0">
+                <a:solidFill>
+                  <a:srgbClr val="FFFFFF"/>
+                </a:solidFill>
+              </a:rPr>
+              <a:t>LUVINA</a:t>
+            </a:r>
+          </a:p>
+        </p:txBody>
+      </p:sp>
+      <p:sp>
+        <p:nvSpPr>
+          <p:cNvPr id="6" name="Title"/>
+          <p:cNvSpPr/>
+          <p:nvPr/>
+        </p:nvSpPr>
+        <p:spPr>
+          <a:xfrm>
+            <a:off x="457200" y="609600"/>
+            <a:ext cx="11280600" cy="457200"/>
+          </a:xfrm>
+          <a:prstGeom prst="rect">
+            <a:avLst/>
+          </a:prstGeom>
+          <a:noFill/>
+        </p:spPr>
+        <p:txBody>
+          <a:bodyPr/>
+          <a:lstStyle/>
+          <a:p>
+            <a:r>
+              <a:rPr lang="ja-JP" sz="2400" b="1" dirty="0">
+                <a:solidFill>
+                  <a:srgbClr val="C8102E"/>
+                </a:solidFill>
+              </a:rPr>
+              <a:t>今後の課題 — 2026年3月 AWS調査まとめ</a:t>
+            </a:r>
+          </a:p>
+        </p:txBody>
+      </p:sp>
+      <p:sp>
+        <p:nvSpPr>
+          <p:cNvPr id="7" name="Subtitle"/>
+          <p:cNvSpPr/>
+          <p:nvPr/>
+        </p:nvSpPr>
+        <p:spPr>
+          <a:xfrm>
+            <a:off x="457200" y="1066800"/>
+            <a:ext cx="11280600" cy="304800"/>
+          </a:xfrm>
+          <a:prstGeom prst="rect">
+            <a:avLst/>
+          </a:prstGeom>
+          <a:noFill/>
+        </p:spPr>
+        <p:txBody>
+          <a:bodyPr/>
+          <a:lstStyle/>
+          <a:p>
+            <a:r>
+              <a:rPr lang="ja-JP" sz="1400" b="0" dirty="0">
+                <a:solidFill>
+                  <a:srgbClr val="666666"/>
+                </a:solidFill>
+              </a:rPr>
+              <a:t>2026年3月 AWS CloudShell・Lambda調査に基づく改善項目</a:t>
+            </a:r>
+          </a:p>
+        </p:txBody>
+      </p:sp>
+      <p:sp>
+        <p:nvSpPr>
+          <p:cNvPr id="8" name="LeftCol"/>
+          <p:cNvSpPr/>
+          <p:nvPr/>
+        </p:nvSpPr>
+        <p:spPr>
+          <a:xfrm>
+            <a:off x="457200" y="1524000"/>
+            <a:ext cx="5486400" cy="4724400"/>
+          </a:xfrm>
+          <a:prstGeom prst="rect">
+            <a:avLst/>
+          </a:prstGeom>
+          <a:solidFill>
+            <a:srgbClr val="FFF5F5"/>
+          </a:solidFill>
+          <a:ln>
+            <a:solidFill>
+              <a:srgbClr val="C8102E"/>
+            </a:solidFill>
+          </a:ln>
+        </p:spPr>
+        <p:txBody>
+          <a:bodyPr insFontAlign="base" lIns="180000" tIns="180000" rIns="180000"/>
+          <a:lstStyle/>
+          <a:p>
+            <a:r>
+              <a:rPr lang="ja-JP" sz="1600" b="1" dirty="0">
+                <a:solidFill>
+                  <a:srgbClr val="C8102E"/>
+                </a:solidFill>
+              </a:rPr>
+              <a:t>🔴 高優先度（早期対応推奨）</a:t>
+            </a:r>
+          </a:p>
+          <a:p>
+            <a:r>
+              <a:rPr lang="ja-JP" sz="1100" dirty="0"/>
+              <a:t/>
+            </a:r>
+          </a:p>
+          <a:p>
+            <a:r>
+              <a:rPr lang="ja-JP" sz="1300" b="1" dirty="0">
+                <a:solidFill>
+                  <a:srgbClr val="333333"/>
+                </a:solidFill>
+              </a:rPr>
+              <a:t>① バックアップ保持期間の変更</a:t>
+            </a:r>
+          </a:p>
+          <a:p>
+            <a:r>
+              <a:rPr lang="ja-JP" sz="1100" dirty="0">
+                <a:solidFill>
+                  <a:srgbClr val="555555"/>
+                </a:solidFill>
+              </a:rPr>
+              <a:t xml:space="preserve">  現状: 1日  →  推奨: 最低7日・理想35日</a:t>
+            </a:r>
+          </a:p>
+          <a:p>
+            <a:r>
+              <a:rPr lang="ja-JP" sz="1100" dirty="0">
+                <a:solidFill>
+                  <a:srgbClr val="555555"/>
+                </a:solidFill>
+              </a:rPr>
+              <a:t xml:space="preserve">  前日分しか自動復元できない状態</a:t>
+            </a:r>
+          </a:p>
+          <a:p>
+            <a:r>
+              <a:rPr lang="ja-JP" sz="1100" dirty="0">
+                <a:solidFill>
+                  <a:srgbClr val="555555"/>
+                </a:solidFill>
+              </a:rPr>
+              <a:t xml:space="preserve">  参照: 04_修正依頼/20260308_MYSQLバックアップ設定.md</a:t>
+            </a:r>
+          </a:p>
+          <a:p>
+            <a:r>
+              <a:rPr lang="ja-JP" sz="1000" dirty="0"/>
+              <a:t/>
+            </a:r>
+          </a:p>
+          <a:p>
+            <a:r>
+              <a:rPr lang="ja-JP" sz="1300" b="1" dirty="0">
+                <a:solidFill>
+                  <a:srgbClr val="333333"/>
+                </a:solidFill>
+              </a:rPr>
+              <a:t>② AWS Backup 設定</a:t>
+            </a:r>
+          </a:p>
+          <a:p>
+            <a:r>
+              <a:rPr lang="ja-JP" sz="1100" dirty="0">
+                <a:solidFill>
+                  <a:srgbClr val="555555"/>
+                </a:solidFill>
+              </a:rPr>
+              <a:t xml:space="preserve">  現状: 未設定（長期スナップショットなし）</a:t>
+            </a:r>
+          </a:p>
+          <a:p>
+            <a:r>
+              <a:rPr lang="ja-JP" sz="1100" dirty="0">
+                <a:solidFill>
+                  <a:srgbClr val="555555"/>
+                </a:solidFill>
+              </a:rPr>
+              <a:t xml:space="preserve">  月次スナップショット自動保持ルールの作成が必要</a:t>
+            </a:r>
+          </a:p>
+          <a:p>
+            <a:r>
+              <a:rPr lang="ja-JP" sz="1000" dirty="0"/>
+              <a:t/>
+            </a:r>
+          </a:p>
+          <a:p>
+            <a:r>
+              <a:rPr lang="ja-JP" sz="1300" b="1" dirty="0">
+                <a:solidFill>
+                  <a:srgbClr val="333333"/>
+                </a:solidFill>
+              </a:rPr>
+              <a:t>③ RDS インスタンス ダウンサイズ</a:t>
+            </a:r>
+          </a:p>
+          <a:p>
+            <a:r>
+              <a:rPr lang="ja-JP" sz="1100" dirty="0">
+                <a:solidFill>
+                  <a:srgbClr val="555555"/>
+                </a:solidFill>
+              </a:rPr>
+              <a:t xml:space="preserve">  現状: db.r5.2xlarge ×2台（CPU≈0%・Read IOPS=0）</a:t>
+            </a:r>
+          </a:p>
+          <a:p>
+            <a:r>
+              <a:rPr lang="ja-JP" sz="1100" dirty="0">
+                <a:solidFill>
+                  <a:srgbClr val="C8102E"/>
+                </a:solidFill>
+              </a:rPr>
+              <a:t xml:space="preserve">  → db.r5.large に変更で約$1,369/月削減（62%削減）</a:t>
+            </a:r>
+          </a:p>
+          <a:p>
+            <a:r>
+              <a:rPr lang="ja-JP" sz="1100" dirty="0">
+                <a:solidFill>
+                  <a:srgbClr val="555555"/>
+                </a:solidFill>
+              </a:rPr>
+              <a:t xml:space="preserve">  参照: 06_コスト調査/20260308_RDSパフォーマンス・コスト調査.md</a:t>
+            </a:r>
+          </a:p>
+        </p:txBody>
+      </p:sp>
+      <p:sp>
+        <p:nvSpPr>
+          <p:cNvPr id="9" name="RightCol"/>
+          <p:cNvSpPr/>
+          <p:nvPr/>
+        </p:nvSpPr>
+        <p:spPr>
+          <a:xfrm>
+            <a:off x="6248400" y="1524000"/>
+            <a:ext cx="5486400" cy="4724400"/>
+          </a:xfrm>
+          <a:prstGeom prst="rect">
+            <a:avLst/>
+          </a:prstGeom>
+          <a:solidFill>
+            <a:srgbClr val="FFFDE7"/>
+          </a:solidFill>
+          <a:ln>
+            <a:solidFill>
+              <a:srgbClr val="F59B00"/>
+            </a:solidFill>
+          </a:ln>
+        </p:spPr>
+        <p:txBody>
+          <a:bodyPr insFontAlign="base" lIns="180000" tIns="180000" rIns="180000"/>
+          <a:lstStyle/>
+          <a:p>
+            <a:r>
+              <a:rPr lang="ja-JP" sz="1600" b="1" dirty="0">
+                <a:solidFill>
+                  <a:srgbClr val="B8860B"/>
+                </a:solidFill>
+              </a:rPr>
+              <a:t>⚠️ 中優先度（計画的に対応）</a:t>
+            </a:r>
+          </a:p>
+          <a:p>
+            <a:r>
+              <a:rPr lang="ja-JP" sz="1100" dirty="0"/>
+              <a:t/>
+            </a:r>
+          </a:p>
+          <a:p>
+            <a:r>
+              <a:rPr lang="ja-JP" sz="1300" b="1" dirty="0">
+                <a:solidFill>
+                  <a:srgbClr val="333333"/>
+                </a:solidFill>
+              </a:rPr>
+              <a:t>④ create-file-end-for-night 接続先変更</a:t>
+            </a:r>
+          </a:p>
+          <a:p>
+            <a:r>
+              <a:rPr lang="ja-JP" sz="1100" dirty="0">
+                <a:solidFill>
+                  <a:srgbClr val="555555"/>
+                </a:solidFill>
+              </a:rPr>
+              <a:t xml:space="preserve">  Lambda調査でSELECTのみと判明</a:t>
+            </a:r>
+          </a:p>
+          <a:p>
+            <a:r>
+              <a:rPr lang="ja-JP" sz="1100" dirty="0">
+                <a:solidFill>
+                  <a:srgbClr val="555555"/>
+                </a:solidFill>
+              </a:rPr>
+              <a:t xml:space="preserve">  DB_KASUMI: prd/Replica_Kasumi</a:t>
+            </a:r>
+          </a:p>
+          <a:p>
+            <a:r>
+              <a:rPr lang="ja-JP" sz="1100" dirty="0">
+                <a:solidFill>
+                  <a:srgbClr val="555555"/>
+                </a:solidFill>
+              </a:rPr>
+              <a:t xml:space="preserve">  → prd/Replica_Kasumi_RO に変更</a:t>
+            </a:r>
+          </a:p>
+          <a:p>
+            <a:r>
+              <a:rPr lang="ja-JP" sz="1100" dirty="0">
+                <a:solidFill>
+                  <a:srgbClr val="555555"/>
+                </a:solidFill>
+              </a:rPr>
+              <a:t xml:space="preserve">  参照: 04_修正依頼/..._DB接続先変更.md</a:t>
+            </a:r>
+          </a:p>
+          <a:p>
+            <a:r>
+              <a:rPr lang="ja-JP" sz="1000" dirty="0"/>
+              <a:t/>
+            </a:r>
+          </a:p>
+          <a:p>
+            <a:r>
+              <a:rPr lang="ja-JP" sz="1300" b="1" dirty="0">
+                <a:solidFill>
+                  <a:srgbClr val="333333"/>
+                </a:solidFill>
+              </a:rPr>
+              <a:t>⑤ PromotionTier 同値問題</a:t>
+            </a:r>
+          </a:p>
+          <a:p>
+            <a:r>
+              <a:rPr lang="ja-JP" sz="1100" dirty="0">
+                <a:solidFill>
+                  <a:srgbClr val="555555"/>
+                </a:solidFill>
+              </a:rPr>
+              <a:t xml:space="preserve">  instance-1/2 ともに Tier=1</a:t>
+            </a:r>
+          </a:p>
+          <a:p>
+            <a:r>
+              <a:rPr lang="ja-JP" sz="1100" dirty="0">
+                <a:solidFill>
+                  <a:srgbClr val="555555"/>
+                </a:solidFill>
+              </a:rPr>
+              <a:t xml:space="preserve">  → instance-2 を Tier=2 に変更し昇格順序を明確化</a:t>
+            </a:r>
+          </a:p>
+          <a:p>
+            <a:r>
+              <a:rPr lang="ja-JP" sz="1000" dirty="0"/>
+              <a:t/>
+            </a:r>
+          </a:p>
+          <a:p>
+            <a:r>
+              <a:rPr lang="ja-JP" sz="1300" b="1" dirty="0">
+                <a:solidFill>
+                  <a:srgbClr val="333333"/>
+                </a:solidFill>
+              </a:rPr>
+              <a:t>⑥ シークレット命名の改善（中長期）</a:t>
+            </a:r>
+          </a:p>
+          <a:p>
+            <a:r>
+              <a:rPr lang="ja-JP" sz="1100" dirty="0">
+                <a:solidFill>
+                  <a:srgbClr val="555555"/>
+                </a:solidFill>
+              </a:rPr>
+              <a:t xml:space="preserve">  prd/Replica_Kasumi は実際にはWriterエンドポイント</a:t>
+            </a:r>
+          </a:p>
+          <a:p>
+            <a:r>
+              <a:rPr lang="ja-JP" sz="1100" dirty="0">
+                <a:solidFill>
+                  <a:srgbClr val="555555"/>
+                </a:solidFill>
+              </a:rPr>
+              <a:t xml:space="preserve">  → prd/Writer_Kasumi 等への改名を検討</a:t>
+            </a:r>
+          </a:p>
+        </p:txBody>
+      </p:sp>
+      <p:sp>
+        <p:nvSpPr>
+          <p:cNvPr id="10" name="PageNum"/>
+          <p:cNvSpPr/>
+          <p:nvPr/>
+        </p:nvSpPr>
+        <p:spPr>
+          <a:xfrm>
+            <a:off x="11176200" y="6248400"/>
+            <a:ext cx="609600" cy="304800"/>
+          </a:xfrm>
+          <a:prstGeom prst="rect">
+            <a:avLst/>
+          </a:prstGeom>
+          <a:noFill/>
+        </p:spPr>
+        <p:txBody>
+          <a:bodyPr anchor="ctr"/>
+          <a:lstStyle/>
+          <a:p>
+            <a:pPr algn="r"/>
+            <a:r>
+              <a:rPr lang="en-US" sz="1000" dirty="0">
+                <a:solidFill>
+                  <a:srgbClr val="999999"/>
+                </a:solidFill>
+              </a:rPr>
+              <a:t>16</a:t>
+            </a:r>
+          </a:p>
+        </p:txBody>
+      </p:sp>
+    </p:spTree>
+  </p:cSld>
+</p:sld>
+</file>
+
 <file path=ppt/slides/slide2.xml><?xml version="1.0" encoding="utf-8"?>
 <p:sld xmlns:a="http://schemas.openxmlformats.org/drawingml/2006/main" xmlns:r="http://schemas.openxmlformats.org/officeDocument/2006/relationships" xmlns:p="http://schemas.openxmlformats.org/presentationml/2006/main">
   <p:cSld name="Slide 2">

--- a/40_AWS/01_構成資料/カスミPOS_AWS構成資料.pptx
+++ b/40_AWS/01_構成資料/カスミPOS_AWS構成資料.pptx
@@ -13,9 +13,10 @@
     <p:sldId id="261" r:id="rId7"/>
     <p:sldId id="262" r:id="rId8"/>
     <p:sldId id="263" r:id="rId9"/>
+    <p:sldId id="264" r:id="rId10"/>
   </p:sldIdLst>
   <p:notesMasterIdLst>
-    <p:notesMasterId r:id="rId10"/>
+    <p:notesMasterId r:id="rId11"/>
   </p:notesMasterIdLst>
   <p:sldSz cx="9902952" cy="6858000"/>
   <p:notesSz cx="6858000" cy="9902952"/>
@@ -1149,6 +1150,94 @@
             <a:fld id="{F7021451-1387-4CA6-816F-3879F97B5CBC}" type="slidenum">
               <a:rPr lang="en-US"/>
               <a:t>8</a:t>
+            </a:fld>
+            <a:endParaRPr lang="en-US"/>
+          </a:p>
+        </p:txBody>
+      </p:sp>
+    </p:spTree>
+    <p:extLst>
+      <p:ext uri="{BB962C8B-B14F-4D97-AF65-F5344CB8AC3E}">
+        <p14:creationId xmlns:p14="http://schemas.microsoft.com/office/powerpoint/2010/main" val="1024086991"/>
+      </p:ext>
+    </p:extLst>
+  </p:cSld>
+  <p:clrMapOvr>
+    <a:masterClrMapping/>
+  </p:clrMapOvr>
+</p:notes>
+</file>
+
+<file path=ppt/notesSlides/notesSlide9.xml><?xml version="1.0" encoding="utf-8"?>
+<p:notes xmlns:a="http://schemas.openxmlformats.org/drawingml/2006/main" xmlns:r="http://schemas.openxmlformats.org/officeDocument/2006/relationships" xmlns:p="http://schemas.openxmlformats.org/presentationml/2006/main">
+  <p:cSld>
+    <p:spTree>
+      <p:nvGrpSpPr>
+        <p:cNvPr id="1" name=""/>
+        <p:cNvGrpSpPr/>
+        <p:nvPr/>
+      </p:nvGrpSpPr>
+      <p:grpSpPr>
+        <a:xfrm>
+          <a:off x="0" y="0"/>
+          <a:ext cx="0" cy="0"/>
+          <a:chOff x="0" y="0"/>
+          <a:chExt cx="0" cy="0"/>
+        </a:xfrm>
+      </p:grpSpPr>
+      <p:sp>
+        <p:nvSpPr>
+          <p:cNvPr id="2" name="Slide Image Placeholder 1"/>
+          <p:cNvSpPr>
+            <a:spLocks noGrp="1" noRot="1" noChangeAspect="1"/>
+          </p:cNvSpPr>
+          <p:nvPr>
+            <p:ph type="sldImg"/>
+          </p:nvPr>
+        </p:nvSpPr>
+        <p:spPr/>
+      </p:sp>
+      <p:sp>
+        <p:nvSpPr>
+          <p:cNvPr id="3" name="Notes Placeholder 2"/>
+          <p:cNvSpPr>
+            <a:spLocks noGrp="1"/>
+          </p:cNvSpPr>
+          <p:nvPr>
+            <p:ph type="body" idx="1"/>
+          </p:nvPr>
+        </p:nvSpPr>
+        <p:spPr/>
+        <p:txBody>
+          <a:bodyPr/>
+          <a:lstStyle/>
+          <a:p>
+            <a:r>
+              <a:rPr lang="en-US" dirty="0"/>
+              <a:t/>
+            </a:r>
+            <a:endParaRPr lang="en-US" dirty="0"/>
+          </a:p>
+        </p:txBody>
+      </p:sp>
+      <p:sp>
+        <p:nvSpPr>
+          <p:cNvPr id="4" name="Slide Number Placeholder 3"/>
+          <p:cNvSpPr>
+            <a:spLocks noGrp="1"/>
+          </p:cNvSpPr>
+          <p:nvPr>
+            <p:ph type="sldNum" sz="quarter" idx="10"/>
+          </p:nvPr>
+        </p:nvSpPr>
+        <p:spPr/>
+        <p:txBody>
+          <a:bodyPr/>
+          <a:lstStyle/>
+          <a:p>
+            <a:fld id="{F7021451-1387-4CA6-816F-3879F97B5CBC}" type="slidenum">
+              <a:rPr lang="en-US"/>
+              <a:t>9</a:t>
             </a:fld>
             <a:endParaRPr lang="en-US"/>
           </a:p>
@@ -2839,7 +2928,7 @@
         </p:nvSpPr>
         <p:spPr>
           <a:xfrm>
-            <a:off x="457200" y="2468880"/>
+            <a:off x="457200" y="2350008"/>
             <a:ext cx="493776" cy="493776"/>
           </a:xfrm>
           <a:prstGeom prst="rect">
@@ -2859,7 +2948,7 @@
         </p:nvSpPr>
         <p:spPr>
           <a:xfrm>
-            <a:off x="457200" y="2468880"/>
+            <a:off x="457200" y="2350008"/>
             <a:ext cx="493776" cy="493776"/>
           </a:xfrm>
           <a:prstGeom prst="rect">
@@ -2898,7 +2987,7 @@
         </p:nvSpPr>
         <p:spPr>
           <a:xfrm>
-            <a:off x="1097280" y="2487168"/>
+            <a:off x="1097280" y="2368296"/>
             <a:ext cx="7772400" cy="228600"/>
           </a:xfrm>
           <a:prstGeom prst="rect">
@@ -2937,7 +3026,7 @@
         </p:nvSpPr>
         <p:spPr>
           <a:xfrm>
-            <a:off x="1097280" y="2724912"/>
+            <a:off x="1097280" y="2606040"/>
             <a:ext cx="7772400" cy="201168"/>
           </a:xfrm>
           <a:prstGeom prst="rect">
@@ -2976,7 +3065,7 @@
         </p:nvSpPr>
         <p:spPr>
           <a:xfrm>
-            <a:off x="457200" y="2999232"/>
+            <a:off x="457200" y="2880360"/>
             <a:ext cx="8961120" cy="0"/>
           </a:xfrm>
           <a:prstGeom prst="line">
@@ -2999,7 +3088,7 @@
         </p:nvSpPr>
         <p:spPr>
           <a:xfrm>
-            <a:off x="457200" y="3291840"/>
+            <a:off x="457200" y="3054096"/>
             <a:ext cx="493776" cy="493776"/>
           </a:xfrm>
           <a:prstGeom prst="rect">
@@ -3019,7 +3108,7 @@
         </p:nvSpPr>
         <p:spPr>
           <a:xfrm>
-            <a:off x="457200" y="3291840"/>
+            <a:off x="457200" y="3054096"/>
             <a:ext cx="493776" cy="493776"/>
           </a:xfrm>
           <a:prstGeom prst="rect">
@@ -3058,8 +3147,47 @@
         </p:nvSpPr>
         <p:spPr>
           <a:xfrm>
+            <a:off x="1097280" y="3072384"/>
+            <a:ext cx="7772400" cy="228600"/>
+          </a:xfrm>
+          <a:prstGeom prst="rect">
+            <a:avLst/>
+          </a:prstGeom>
+          <a:noFill/>
+          <a:ln/>
+        </p:spPr>
+        <p:txBody>
+          <a:bodyPr wrap="square" lIns="0" tIns="0" rIns="0" bIns="0" rtlCol="0" anchor="ctr"/>
+          <a:lstStyle/>
+          <a:p>
+            <a:pPr indent="0" marL="0">
+              <a:buNone/>
+            </a:pPr>
+            <a:r>
+              <a:rPr lang="en-US" sz="1400" b="1" dirty="0">
+                <a:solidFill>
+                  <a:srgbClr val="2D2D2D"/>
+                </a:solidFill>
+                <a:latin typeface="Meiryo" pitchFamily="34" charset="0"/>
+                <a:ea typeface="Meiryo" pitchFamily="34" charset="-122"/>
+                <a:cs typeface="Meiryo" pitchFamily="34" charset="-120"/>
+              </a:rPr>
+              <a:t>STG環境 — セキュリティ現状と問題影響</a:t>
+            </a:r>
+            <a:endParaRPr lang="en-US" sz="1400" dirty="0"/>
+          </a:p>
+        </p:txBody>
+      </p:sp>
+      <p:sp>
+        <p:nvSpPr>
+          <p:cNvPr id="24" name="Text 19"/>
+          <p:cNvSpPr/>
+          <p:nvPr/>
+        </p:nvSpPr>
+        <p:spPr>
+          <a:xfrm>
             <a:off x="1097280" y="3310128"/>
-            <a:ext cx="7772400" cy="228600"/>
+            <a:ext cx="7772400" cy="201168"/>
           </a:xfrm>
           <a:prstGeom prst="rect">
             <a:avLst/>
@@ -3075,45 +3203,6 @@
               <a:buNone/>
             </a:pPr>
             <a:r>
-              <a:rPr lang="en-US" sz="1400" b="1" dirty="0">
-                <a:solidFill>
-                  <a:srgbClr val="2D2D2D"/>
-                </a:solidFill>
-                <a:latin typeface="Meiryo" pitchFamily="34" charset="0"/>
-                <a:ea typeface="Meiryo" pitchFamily="34" charset="-122"/>
-                <a:cs typeface="Meiryo" pitchFamily="34" charset="-120"/>
-              </a:rPr>
-              <a:t>STG環境 — セキュリティ現状と問題影響</a:t>
-            </a:r>
-            <a:endParaRPr lang="en-US" sz="1400" dirty="0"/>
-          </a:p>
-        </p:txBody>
-      </p:sp>
-      <p:sp>
-        <p:nvSpPr>
-          <p:cNvPr id="24" name="Text 19"/>
-          <p:cNvSpPr/>
-          <p:nvPr/>
-        </p:nvSpPr>
-        <p:spPr>
-          <a:xfrm>
-            <a:off x="1097280" y="3547872"/>
-            <a:ext cx="7772400" cy="201168"/>
-          </a:xfrm>
-          <a:prstGeom prst="rect">
-            <a:avLst/>
-          </a:prstGeom>
-          <a:noFill/>
-          <a:ln/>
-        </p:spPr>
-        <p:txBody>
-          <a:bodyPr wrap="square" lIns="0" tIns="0" rIns="0" bIns="0" rtlCol="0" anchor="ctr"/>
-          <a:lstStyle/>
-          <a:p>
-            <a:pPr indent="0" marL="0">
-              <a:buNone/>
-            </a:pPr>
-            <a:r>
               <a:rPr lang="en-US" sz="1000" dirty="0">
                 <a:solidFill>
                   <a:srgbClr val="666666"/>
@@ -3136,7 +3225,7 @@
         </p:nvSpPr>
         <p:spPr>
           <a:xfrm>
-            <a:off x="457200" y="3822192"/>
+            <a:off x="457200" y="3584448"/>
             <a:ext cx="8961120" cy="0"/>
           </a:xfrm>
           <a:prstGeom prst="line">
@@ -3159,7 +3248,7 @@
         </p:nvSpPr>
         <p:spPr>
           <a:xfrm>
-            <a:off x="457200" y="4114800"/>
+            <a:off x="457200" y="3758184"/>
             <a:ext cx="493776" cy="493776"/>
           </a:xfrm>
           <a:prstGeom prst="rect">
@@ -3179,7 +3268,7 @@
         </p:nvSpPr>
         <p:spPr>
           <a:xfrm>
-            <a:off x="457200" y="4114800"/>
+            <a:off x="457200" y="3758184"/>
             <a:ext cx="493776" cy="493776"/>
           </a:xfrm>
           <a:prstGeom prst="rect">
@@ -3218,7 +3307,7 @@
         </p:nvSpPr>
         <p:spPr>
           <a:xfrm>
-            <a:off x="1097280" y="4133088"/>
+            <a:off x="1097280" y="3776472"/>
             <a:ext cx="7772400" cy="228600"/>
           </a:xfrm>
           <a:prstGeom prst="rect">
@@ -3257,7 +3346,7 @@
         </p:nvSpPr>
         <p:spPr>
           <a:xfrm>
-            <a:off x="1097280" y="4370832"/>
+            <a:off x="1097280" y="4014216"/>
             <a:ext cx="7772400" cy="201168"/>
           </a:xfrm>
           <a:prstGeom prst="rect">
@@ -3296,7 +3385,7 @@
         </p:nvSpPr>
         <p:spPr>
           <a:xfrm>
-            <a:off x="457200" y="4645152"/>
+            <a:off x="457200" y="4288536"/>
             <a:ext cx="8961120" cy="0"/>
           </a:xfrm>
           <a:prstGeom prst="line">
@@ -3319,7 +3408,7 @@
         </p:nvSpPr>
         <p:spPr>
           <a:xfrm>
-            <a:off x="457200" y="4937760"/>
+            <a:off x="457200" y="4462272"/>
             <a:ext cx="493776" cy="493776"/>
           </a:xfrm>
           <a:prstGeom prst="rect">
@@ -3339,7 +3428,7 @@
         </p:nvSpPr>
         <p:spPr>
           <a:xfrm>
-            <a:off x="457200" y="4937760"/>
+            <a:off x="457200" y="4462272"/>
             <a:ext cx="493776" cy="493776"/>
           </a:xfrm>
           <a:prstGeom prst="rect">
@@ -3378,7 +3467,7 @@
         </p:nvSpPr>
         <p:spPr>
           <a:xfrm>
-            <a:off x="1097280" y="4956048"/>
+            <a:off x="1097280" y="4480560"/>
             <a:ext cx="7772400" cy="228600"/>
           </a:xfrm>
           <a:prstGeom prst="rect">
@@ -3417,7 +3506,7 @@
         </p:nvSpPr>
         <p:spPr>
           <a:xfrm>
-            <a:off x="1097280" y="5193792"/>
+            <a:off x="1097280" y="4718304"/>
             <a:ext cx="7772400" cy="201168"/>
           </a:xfrm>
           <a:prstGeom prst="rect">
@@ -3456,7 +3545,7 @@
         </p:nvSpPr>
         <p:spPr>
           <a:xfrm>
-            <a:off x="457200" y="5468112"/>
+            <a:off x="457200" y="4992624"/>
             <a:ext cx="8961120" cy="0"/>
           </a:xfrm>
           <a:prstGeom prst="line">
@@ -3479,7 +3568,7 @@
         </p:nvSpPr>
         <p:spPr>
           <a:xfrm>
-            <a:off x="457200" y="5760720"/>
+            <a:off x="457200" y="5166360"/>
             <a:ext cx="493776" cy="493776"/>
           </a:xfrm>
           <a:prstGeom prst="rect">
@@ -3499,7 +3588,7 @@
         </p:nvSpPr>
         <p:spPr>
           <a:xfrm>
-            <a:off x="457200" y="5760720"/>
+            <a:off x="457200" y="5166360"/>
             <a:ext cx="493776" cy="493776"/>
           </a:xfrm>
           <a:prstGeom prst="rect">
@@ -3538,7 +3627,7 @@
         </p:nvSpPr>
         <p:spPr>
           <a:xfrm>
-            <a:off x="1097280" y="5779008"/>
+            <a:off x="1097280" y="5184648"/>
             <a:ext cx="7772400" cy="228600"/>
           </a:xfrm>
           <a:prstGeom prst="rect">
@@ -3563,6 +3652,166 @@
                 <a:ea typeface="Meiryo" pitchFamily="34" charset="-122"/>
                 <a:cs typeface="Meiryo" pitchFamily="34" charset="-120"/>
               </a:rPr>
+              <a:t>本番環境・検証環境 差異一覧</a:t>
+            </a:r>
+            <a:endParaRPr lang="en-US" sz="1400" dirty="0"/>
+          </a:p>
+        </p:txBody>
+      </p:sp>
+      <p:sp>
+        <p:nvSpPr>
+          <p:cNvPr id="39" name="Text 34"/>
+          <p:cNvSpPr/>
+          <p:nvPr/>
+        </p:nvSpPr>
+        <p:spPr>
+          <a:xfrm>
+            <a:off x="1097280" y="5422392"/>
+            <a:ext cx="7772400" cy="201168"/>
+          </a:xfrm>
+          <a:prstGeom prst="rect">
+            <a:avLst/>
+          </a:prstGeom>
+          <a:noFill/>
+          <a:ln/>
+        </p:spPr>
+        <p:txBody>
+          <a:bodyPr wrap="square" lIns="0" tIns="0" rIns="0" bIns="0" rtlCol="0" anchor="ctr"/>
+          <a:lstStyle/>
+          <a:p>
+            <a:pPr indent="0" marL="0">
+              <a:buNone/>
+            </a:pPr>
+            <a:r>
+              <a:rPr lang="en-US" sz="1000" dirty="0">
+                <a:solidFill>
+                  <a:srgbClr val="666666"/>
+                </a:solidFill>
+                <a:latin typeface="Meiryo" pitchFamily="34" charset="0"/>
+                <a:ea typeface="Meiryo" pitchFamily="34" charset="-122"/>
+                <a:cs typeface="Meiryo" pitchFamily="34" charset="-120"/>
+              </a:rPr>
+              <a:t>Danh sách sự khác biệt PRD / STG</a:t>
+            </a:r>
+            <a:endParaRPr lang="en-US" sz="1000" dirty="0"/>
+          </a:p>
+        </p:txBody>
+      </p:sp>
+      <p:sp>
+        <p:nvSpPr>
+          <p:cNvPr id="40" name="Shape 35"/>
+          <p:cNvSpPr/>
+          <p:nvPr/>
+        </p:nvSpPr>
+        <p:spPr>
+          <a:xfrm>
+            <a:off x="457200" y="5696712"/>
+            <a:ext cx="8961120" cy="0"/>
+          </a:xfrm>
+          <a:prstGeom prst="line">
+            <a:avLst/>
+          </a:prstGeom>
+          <a:noFill/>
+          <a:ln w="6350">
+            <a:solidFill>
+              <a:srgbClr val="CCCCCC"/>
+            </a:solidFill>
+            <a:prstDash val="solid"/>
+          </a:ln>
+        </p:spPr>
+      </p:sp>
+      <p:sp>
+        <p:nvSpPr>
+          <p:cNvPr id="41" name="Shape 36"/>
+          <p:cNvSpPr/>
+          <p:nvPr/>
+        </p:nvSpPr>
+        <p:spPr>
+          <a:xfrm>
+            <a:off x="457200" y="5870448"/>
+            <a:ext cx="493776" cy="493776"/>
+          </a:xfrm>
+          <a:prstGeom prst="rect">
+            <a:avLst/>
+          </a:prstGeom>
+          <a:solidFill>
+            <a:srgbClr val="D0232A"/>
+          </a:solidFill>
+          <a:ln/>
+        </p:spPr>
+      </p:sp>
+      <p:sp>
+        <p:nvSpPr>
+          <p:cNvPr id="42" name="Text 37"/>
+          <p:cNvSpPr/>
+          <p:nvPr/>
+        </p:nvSpPr>
+        <p:spPr>
+          <a:xfrm>
+            <a:off x="457200" y="5870448"/>
+            <a:ext cx="493776" cy="493776"/>
+          </a:xfrm>
+          <a:prstGeom prst="rect">
+            <a:avLst/>
+          </a:prstGeom>
+          <a:noFill/>
+          <a:ln/>
+        </p:spPr>
+        <p:txBody>
+          <a:bodyPr wrap="square" lIns="0" tIns="0" rIns="0" bIns="0" rtlCol="0" anchor="ctr"/>
+          <a:lstStyle/>
+          <a:p>
+            <a:pPr algn="ctr" indent="0" marL="0">
+              <a:buNone/>
+            </a:pPr>
+            <a:r>
+              <a:rPr lang="en-US" sz="1400" b="1" dirty="0">
+                <a:solidFill>
+                  <a:srgbClr val="FFFFFF"/>
+                </a:solidFill>
+                <a:latin typeface="Arial Black" pitchFamily="34" charset="0"/>
+                <a:ea typeface="Arial Black" pitchFamily="34" charset="-122"/>
+                <a:cs typeface="Arial Black" pitchFamily="34" charset="-120"/>
+              </a:rPr>
+              <a:t>07</a:t>
+            </a:r>
+            <a:endParaRPr lang="en-US" sz="1400" dirty="0"/>
+          </a:p>
+        </p:txBody>
+      </p:sp>
+      <p:sp>
+        <p:nvSpPr>
+          <p:cNvPr id="43" name="Text 38"/>
+          <p:cNvSpPr/>
+          <p:nvPr/>
+        </p:nvSpPr>
+        <p:spPr>
+          <a:xfrm>
+            <a:off x="1097280" y="5888736"/>
+            <a:ext cx="7772400" cy="228600"/>
+          </a:xfrm>
+          <a:prstGeom prst="rect">
+            <a:avLst/>
+          </a:prstGeom>
+          <a:noFill/>
+          <a:ln/>
+        </p:spPr>
+        <p:txBody>
+          <a:bodyPr wrap="square" lIns="0" tIns="0" rIns="0" bIns="0" rtlCol="0" anchor="ctr"/>
+          <a:lstStyle/>
+          <a:p>
+            <a:pPr indent="0" marL="0">
+              <a:buNone/>
+            </a:pPr>
+            <a:r>
+              <a:rPr lang="en-US" sz="1400" b="1" dirty="0">
+                <a:solidFill>
+                  <a:srgbClr val="2D2D2D"/>
+                </a:solidFill>
+                <a:latin typeface="Meiryo" pitchFamily="34" charset="0"/>
+                <a:ea typeface="Meiryo" pitchFamily="34" charset="-122"/>
+                <a:cs typeface="Meiryo" pitchFamily="34" charset="-120"/>
+              </a:rPr>
               <a:t>リスク一覧・対応ロードマップ</a:t>
             </a:r>
             <a:endParaRPr lang="en-US" sz="1400" dirty="0"/>
@@ -3571,13 +3820,13 @@
       </p:sp>
       <p:sp>
         <p:nvSpPr>
-          <p:cNvPr id="39" name="Text 34"/>
-          <p:cNvSpPr/>
-          <p:nvPr/>
-        </p:nvSpPr>
-        <p:spPr>
-          <a:xfrm>
-            <a:off x="1097280" y="6016752"/>
+          <p:cNvPr id="44" name="Text 39"/>
+          <p:cNvSpPr/>
+          <p:nvPr/>
+        </p:nvSpPr>
+        <p:spPr>
+          <a:xfrm>
+            <a:off x="1097280" y="6126480"/>
             <a:ext cx="7772400" cy="201168"/>
           </a:xfrm>
           <a:prstGeom prst="rect">
@@ -3610,13 +3859,13 @@
       </p:sp>
       <p:sp>
         <p:nvSpPr>
-          <p:cNvPr id="40" name="Shape 35"/>
-          <p:cNvSpPr/>
-          <p:nvPr/>
-        </p:nvSpPr>
-        <p:spPr>
-          <a:xfrm>
-            <a:off x="457200" y="6291072"/>
+          <p:cNvPr id="45" name="Shape 40"/>
+          <p:cNvSpPr/>
+          <p:nvPr/>
+        </p:nvSpPr>
+        <p:spPr>
+          <a:xfrm>
+            <a:off x="457200" y="6400800"/>
             <a:ext cx="8961120" cy="0"/>
           </a:xfrm>
           <a:prstGeom prst="line">
@@ -14807,7 +15056,7 @@
         <p:spPr>
           <a:xfrm>
             <a:off x="274320" y="1572768"/>
-            <a:ext cx="146304" cy="146304"/>
+            <a:ext cx="128016" cy="128016"/>
           </a:xfrm>
           <a:prstGeom prst="rect">
             <a:avLst/>
@@ -14826,8 +15075,8 @@
         </p:nvSpPr>
         <p:spPr>
           <a:xfrm>
-            <a:off x="457200" y="1554480"/>
-            <a:ext cx="1645920" cy="182880"/>
+            <a:off x="438912" y="1554480"/>
+            <a:ext cx="1417320" cy="182880"/>
           </a:xfrm>
           <a:prstGeom prst="rect">
             <a:avLst/>
@@ -14843,7 +15092,7 @@
               <a:buNone/>
             </a:pPr>
             <a:r>
-              <a:rPr lang="en-US" sz="750" dirty="0">
+              <a:rPr lang="en-US" sz="700" dirty="0">
                 <a:solidFill>
                   <a:srgbClr val="333333"/>
                 </a:solidFill>
@@ -14853,7 +15102,7 @@
               </a:rPr>
               <a:t>OC系 (BIPROGY)</a:t>
             </a:r>
-            <a:endParaRPr lang="en-US" sz="750" dirty="0"/>
+            <a:endParaRPr lang="en-US" sz="700" dirty="0"/>
           </a:p>
         </p:txBody>
       </p:sp>
@@ -14865,8 +15114,8 @@
         </p:nvSpPr>
         <p:spPr>
           <a:xfrm>
-            <a:off x="2157984" y="1572768"/>
-            <a:ext cx="146304" cy="146304"/>
+            <a:off x="1847088" y="1572768"/>
+            <a:ext cx="128016" cy="128016"/>
           </a:xfrm>
           <a:prstGeom prst="rect">
             <a:avLst/>
@@ -14885,8 +15134,8 @@
         </p:nvSpPr>
         <p:spPr>
           <a:xfrm>
-            <a:off x="2340864" y="1554480"/>
-            <a:ext cx="1645920" cy="182880"/>
+            <a:off x="2011680" y="1554480"/>
+            <a:ext cx="1417320" cy="182880"/>
           </a:xfrm>
           <a:prstGeom prst="rect">
             <a:avLst/>
@@ -14902,7 +15151,7 @@
               <a:buNone/>
             </a:pPr>
             <a:r>
-              <a:rPr lang="en-US" sz="750" dirty="0">
+              <a:rPr lang="en-US" sz="700" dirty="0">
                 <a:solidFill>
                   <a:srgbClr val="333333"/>
                 </a:solidFill>
@@ -14912,7 +15161,7 @@
               </a:rPr>
               <a:t>SG系 (VINX)</a:t>
             </a:r>
-            <a:endParaRPr lang="en-US" sz="750" dirty="0"/>
+            <a:endParaRPr lang="en-US" sz="700" dirty="0"/>
           </a:p>
         </p:txBody>
       </p:sp>
@@ -14924,8 +15173,8 @@
         </p:nvSpPr>
         <p:spPr>
           <a:xfrm>
-            <a:off x="4041648" y="1572768"/>
-            <a:ext cx="146304" cy="146304"/>
+            <a:off x="3419856" y="1572768"/>
+            <a:ext cx="128016" cy="128016"/>
           </a:xfrm>
           <a:prstGeom prst="rect">
             <a:avLst/>
@@ -14944,8 +15193,8 @@
         </p:nvSpPr>
         <p:spPr>
           <a:xfrm>
-            <a:off x="4224528" y="1554480"/>
-            <a:ext cx="1645920" cy="182880"/>
+            <a:off x="3584448" y="1554480"/>
+            <a:ext cx="1417320" cy="182880"/>
           </a:xfrm>
           <a:prstGeom prst="rect">
             <a:avLst/>
@@ -14961,7 +15210,7 @@
               <a:buNone/>
             </a:pPr>
             <a:r>
-              <a:rPr lang="en-US" sz="750" dirty="0">
+              <a:rPr lang="en-US" sz="700" dirty="0">
                 <a:solidFill>
                   <a:srgbClr val="333333"/>
                 </a:solidFill>
@@ -14971,7 +15220,7 @@
               </a:rPr>
               <a:t>SH系 (SHARP)</a:t>
             </a:r>
-            <a:endParaRPr lang="en-US" sz="750" dirty="0"/>
+            <a:endParaRPr lang="en-US" sz="700" dirty="0"/>
           </a:p>
         </p:txBody>
       </p:sp>
@@ -14983,8 +15232,8 @@
         </p:nvSpPr>
         <p:spPr>
           <a:xfrm>
-            <a:off x="5925312" y="1572768"/>
-            <a:ext cx="146304" cy="146304"/>
+            <a:off x="4992624" y="1572768"/>
+            <a:ext cx="128016" cy="128016"/>
           </a:xfrm>
           <a:prstGeom prst="rect">
             <a:avLst/>
@@ -15003,8 +15252,8 @@
         </p:nvSpPr>
         <p:spPr>
           <a:xfrm>
-            <a:off x="6108192" y="1554480"/>
-            <a:ext cx="1645920" cy="182880"/>
+            <a:off x="5157216" y="1554480"/>
+            <a:ext cx="1417320" cy="182880"/>
           </a:xfrm>
           <a:prstGeom prst="rect">
             <a:avLst/>
@@ -15020,7 +15269,7 @@
               <a:buNone/>
             </a:pPr>
             <a:r>
-              <a:rPr lang="en-US" sz="750" dirty="0">
+              <a:rPr lang="en-US" sz="700" dirty="0">
                 <a:solidFill>
                   <a:srgbClr val="333333"/>
                 </a:solidFill>
@@ -15030,7 +15279,7 @@
               </a:rPr>
               <a:t>夜間バッチ</a:t>
             </a:r>
-            <a:endParaRPr lang="en-US" sz="750" dirty="0"/>
+            <a:endParaRPr lang="en-US" sz="700" dirty="0"/>
           </a:p>
         </p:txBody>
       </p:sp>
@@ -15042,8 +15291,67 @@
         </p:nvSpPr>
         <p:spPr>
           <a:xfrm>
-            <a:off x="7808976" y="1572768"/>
-            <a:ext cx="146304" cy="146304"/>
+            <a:off x="6565392" y="1572768"/>
+            <a:ext cx="128016" cy="128016"/>
+          </a:xfrm>
+          <a:prstGeom prst="rect">
+            <a:avLst/>
+          </a:prstGeom>
+          <a:solidFill>
+            <a:srgbClr val="D4A017"/>
+          </a:solidFill>
+          <a:ln/>
+        </p:spPr>
+      </p:sp>
+      <p:sp>
+        <p:nvSpPr>
+          <p:cNvPr id="21" name="Text 16"/>
+          <p:cNvSpPr/>
+          <p:nvPr/>
+        </p:nvSpPr>
+        <p:spPr>
+          <a:xfrm>
+            <a:off x="6729984" y="1554480"/>
+            <a:ext cx="1417320" cy="182880"/>
+          </a:xfrm>
+          <a:prstGeom prst="rect">
+            <a:avLst/>
+          </a:prstGeom>
+          <a:noFill/>
+          <a:ln/>
+        </p:spPr>
+        <p:txBody>
+          <a:bodyPr wrap="square" lIns="0" tIns="0" rIns="0" bIns="0" rtlCol="0" anchor="ctr"/>
+          <a:lstStyle/>
+          <a:p>
+            <a:pPr indent="0" marL="0">
+              <a:buNone/>
+            </a:pPr>
+            <a:r>
+              <a:rPr lang="en-US" sz="700" dirty="0">
+                <a:solidFill>
+                  <a:srgbClr val="333333"/>
+                </a:solidFill>
+                <a:latin typeface="Meiryo" pitchFamily="34" charset="0"/>
+                <a:ea typeface="Meiryo" pitchFamily="34" charset="-122"/>
+                <a:cs typeface="Meiryo" pitchFamily="34" charset="-120"/>
+              </a:rPr>
+              <a:t>ギフト決済</a:t>
+            </a:r>
+            <a:endParaRPr lang="en-US" sz="700" dirty="0"/>
+          </a:p>
+        </p:txBody>
+      </p:sp>
+      <p:sp>
+        <p:nvSpPr>
+          <p:cNvPr id="22" name="Shape 17"/>
+          <p:cNvSpPr/>
+          <p:nvPr/>
+        </p:nvSpPr>
+        <p:spPr>
+          <a:xfrm>
+            <a:off x="8138160" y="1572768"/>
+            <a:ext cx="128016" cy="128016"/>
           </a:xfrm>
           <a:prstGeom prst="rect">
             <a:avLst/>
@@ -15056,14 +15364,14 @@
       </p:sp>
       <p:sp>
         <p:nvSpPr>
-          <p:cNvPr id="21" name="Text 16"/>
-          <p:cNvSpPr/>
-          <p:nvPr/>
-        </p:nvSpPr>
-        <p:spPr>
-          <a:xfrm>
-            <a:off x="7991856" y="1554480"/>
-            <a:ext cx="1645920" cy="182880"/>
+          <p:cNvPr id="23" name="Text 18"/>
+          <p:cNvSpPr/>
+          <p:nvPr/>
+        </p:nvSpPr>
+        <p:spPr>
+          <a:xfrm>
+            <a:off x="8302752" y="1554480"/>
+            <a:ext cx="1417320" cy="182880"/>
           </a:xfrm>
           <a:prstGeom prst="rect">
             <a:avLst/>
@@ -15079,7 +15387,7 @@
               <a:buNone/>
             </a:pPr>
             <a:r>
-              <a:rPr lang="en-US" sz="750" dirty="0">
+              <a:rPr lang="en-US" sz="700" dirty="0">
                 <a:solidFill>
                   <a:srgbClr val="333333"/>
                 </a:solidFill>
@@ -15089,13 +15397,13 @@
               </a:rPr>
               <a:t>送信フロー</a:t>
             </a:r>
-            <a:endParaRPr lang="en-US" sz="750" dirty="0"/>
-          </a:p>
-        </p:txBody>
-      </p:sp>
-      <p:sp>
-        <p:nvSpPr>
-          <p:cNvPr id="22" name="Shape 17"/>
+            <a:endParaRPr lang="en-US" sz="700" dirty="0"/>
+          </a:p>
+        </p:txBody>
+      </p:sp>
+      <p:sp>
+        <p:nvSpPr>
+          <p:cNvPr id="24" name="Shape 19"/>
           <p:cNvSpPr/>
           <p:nvPr/>
         </p:nvSpPr>
@@ -15120,7 +15428,7 @@
       </p:sp>
       <p:sp>
         <p:nvSpPr>
-          <p:cNvPr id="23" name="Text 18"/>
+          <p:cNvPr id="25" name="Text 20"/>
           <p:cNvSpPr/>
           <p:nvPr/>
         </p:nvSpPr>
@@ -15176,7 +15484,7 @@
       </p:sp>
       <p:sp>
         <p:nvSpPr>
-          <p:cNvPr id="24" name="Shape 19"/>
+          <p:cNvPr id="26" name="Shape 21"/>
           <p:cNvSpPr/>
           <p:nvPr/>
         </p:nvSpPr>
@@ -15201,7 +15509,7 @@
       </p:sp>
       <p:sp>
         <p:nvSpPr>
-          <p:cNvPr id="25" name="Text 20"/>
+          <p:cNvPr id="27" name="Text 22"/>
           <p:cNvSpPr/>
           <p:nvPr/>
         </p:nvSpPr>
@@ -15257,7 +15565,7 @@
       </p:sp>
       <p:sp>
         <p:nvSpPr>
-          <p:cNvPr id="26" name="Shape 21"/>
+          <p:cNvPr id="28" name="Shape 23"/>
           <p:cNvSpPr/>
           <p:nvPr/>
         </p:nvSpPr>
@@ -15282,7 +15590,7 @@
       </p:sp>
       <p:sp>
         <p:nvSpPr>
-          <p:cNvPr id="27" name="Text 22"/>
+          <p:cNvPr id="29" name="Text 24"/>
           <p:cNvSpPr/>
           <p:nvPr/>
         </p:nvSpPr>
@@ -15338,7 +15646,7 @@
       </p:sp>
       <p:sp>
         <p:nvSpPr>
-          <p:cNvPr id="28" name="Shape 23"/>
+          <p:cNvPr id="30" name="Shape 25"/>
           <p:cNvSpPr/>
           <p:nvPr/>
         </p:nvSpPr>
@@ -15363,7 +15671,7 @@
       </p:sp>
       <p:sp>
         <p:nvSpPr>
-          <p:cNvPr id="29" name="Text 24"/>
+          <p:cNvPr id="31" name="Text 26"/>
           <p:cNvSpPr/>
           <p:nvPr/>
         </p:nvSpPr>
@@ -15419,7 +15727,7 @@
       </p:sp>
       <p:sp>
         <p:nvSpPr>
-          <p:cNvPr id="30" name="Shape 25"/>
+          <p:cNvPr id="32" name="Shape 27"/>
           <p:cNvSpPr/>
           <p:nvPr/>
         </p:nvSpPr>
@@ -15444,7 +15752,7 @@
       </p:sp>
       <p:sp>
         <p:nvSpPr>
-          <p:cNvPr id="31" name="Text 26"/>
+          <p:cNvPr id="33" name="Text 28"/>
           <p:cNvSpPr/>
           <p:nvPr/>
         </p:nvSpPr>
@@ -15500,7 +15808,7 @@
       </p:sp>
       <p:sp>
         <p:nvSpPr>
-          <p:cNvPr id="32" name="Shape 27"/>
+          <p:cNvPr id="34" name="Shape 29"/>
           <p:cNvSpPr/>
           <p:nvPr/>
         </p:nvSpPr>
@@ -15525,7 +15833,7 @@
       </p:sp>
       <p:sp>
         <p:nvSpPr>
-          <p:cNvPr id="33" name="Text 28"/>
+          <p:cNvPr id="35" name="Text 30"/>
           <p:cNvSpPr/>
           <p:nvPr/>
         </p:nvSpPr>
@@ -15581,14 +15889,14 @@
       </p:sp>
       <p:sp>
         <p:nvSpPr>
-          <p:cNvPr id="34" name="Shape 29"/>
+          <p:cNvPr id="36" name="Shape 31"/>
           <p:cNvSpPr/>
           <p:nvPr/>
         </p:nvSpPr>
         <p:spPr>
           <a:xfrm>
             <a:off x="201168" y="2249424"/>
-            <a:ext cx="1517904" cy="402336"/>
+            <a:ext cx="1517904" cy="365760"/>
           </a:xfrm>
           <a:prstGeom prst="rect">
             <a:avLst/>
@@ -15606,14 +15914,14 @@
       </p:sp>
       <p:sp>
         <p:nvSpPr>
-          <p:cNvPr id="35" name="Text 30"/>
+          <p:cNvPr id="37" name="Text 32"/>
           <p:cNvSpPr/>
           <p:nvPr/>
         </p:nvSpPr>
         <p:spPr>
           <a:xfrm>
             <a:off x="228600" y="2249424"/>
-            <a:ext cx="1463040" cy="402336"/>
+            <a:ext cx="1463040" cy="365760"/>
           </a:xfrm>
           <a:prstGeom prst="rect">
             <a:avLst/>
@@ -15662,13 +15970,13 @@
       </p:sp>
       <p:sp>
         <p:nvSpPr>
-          <p:cNvPr id="36" name="Shape 31"/>
-          <p:cNvSpPr/>
-          <p:nvPr/>
-        </p:nvSpPr>
-        <p:spPr>
-          <a:xfrm>
-            <a:off x="1719072" y="2450592"/>
+          <p:cNvPr id="38" name="Shape 33"/>
+          <p:cNvSpPr/>
+          <p:nvPr/>
+        </p:nvSpPr>
+        <p:spPr>
+          <a:xfrm>
+            <a:off x="1719072" y="2432304"/>
             <a:ext cx="0" cy="0"/>
           </a:xfrm>
           <a:prstGeom prst="line">
@@ -15685,13 +15993,13 @@
       </p:sp>
       <p:sp>
         <p:nvSpPr>
-          <p:cNvPr id="37" name="Text 32"/>
-          <p:cNvSpPr/>
-          <p:nvPr/>
-        </p:nvSpPr>
-        <p:spPr>
-          <a:xfrm>
-            <a:off x="1682496" y="2350008"/>
+          <p:cNvPr id="39" name="Text 34"/>
+          <p:cNvSpPr/>
+          <p:nvPr/>
+        </p:nvSpPr>
+        <p:spPr>
+          <a:xfrm>
+            <a:off x="1682496" y="2331720"/>
             <a:ext cx="164592" cy="182880"/>
           </a:xfrm>
           <a:prstGeom prst="rect">
@@ -15721,14 +16029,14 @@
       </p:sp>
       <p:sp>
         <p:nvSpPr>
-          <p:cNvPr id="38" name="Shape 33"/>
+          <p:cNvPr id="40" name="Shape 35"/>
           <p:cNvSpPr/>
           <p:nvPr/>
         </p:nvSpPr>
         <p:spPr>
           <a:xfrm>
             <a:off x="1847088" y="2249424"/>
-            <a:ext cx="1517904" cy="402336"/>
+            <a:ext cx="1517904" cy="365760"/>
           </a:xfrm>
           <a:prstGeom prst="rect">
             <a:avLst/>
@@ -15746,14 +16054,14 @@
       </p:sp>
       <p:sp>
         <p:nvSpPr>
-          <p:cNvPr id="39" name="Text 34"/>
+          <p:cNvPr id="41" name="Text 36"/>
           <p:cNvSpPr/>
           <p:nvPr/>
         </p:nvSpPr>
         <p:spPr>
           <a:xfrm>
             <a:off x="1874520" y="2249424"/>
-            <a:ext cx="1463040" cy="402336"/>
+            <a:ext cx="1463040" cy="365760"/>
           </a:xfrm>
           <a:prstGeom prst="rect">
             <a:avLst/>
@@ -15802,13 +16110,13 @@
       </p:sp>
       <p:sp>
         <p:nvSpPr>
-          <p:cNvPr id="40" name="Shape 35"/>
-          <p:cNvSpPr/>
-          <p:nvPr/>
-        </p:nvSpPr>
-        <p:spPr>
-          <a:xfrm>
-            <a:off x="3364992" y="2450592"/>
+          <p:cNvPr id="42" name="Shape 37"/>
+          <p:cNvSpPr/>
+          <p:nvPr/>
+        </p:nvSpPr>
+        <p:spPr>
+          <a:xfrm>
+            <a:off x="3364992" y="2432304"/>
             <a:ext cx="0" cy="0"/>
           </a:xfrm>
           <a:prstGeom prst="line">
@@ -15825,13 +16133,13 @@
       </p:sp>
       <p:sp>
         <p:nvSpPr>
-          <p:cNvPr id="41" name="Text 36"/>
-          <p:cNvSpPr/>
-          <p:nvPr/>
-        </p:nvSpPr>
-        <p:spPr>
-          <a:xfrm>
-            <a:off x="3328416" y="2350008"/>
+          <p:cNvPr id="43" name="Text 38"/>
+          <p:cNvSpPr/>
+          <p:nvPr/>
+        </p:nvSpPr>
+        <p:spPr>
+          <a:xfrm>
+            <a:off x="3328416" y="2331720"/>
             <a:ext cx="164592" cy="182880"/>
           </a:xfrm>
           <a:prstGeom prst="rect">
@@ -15861,14 +16169,14 @@
       </p:sp>
       <p:sp>
         <p:nvSpPr>
-          <p:cNvPr id="42" name="Shape 37"/>
+          <p:cNvPr id="44" name="Shape 39"/>
           <p:cNvSpPr/>
           <p:nvPr/>
         </p:nvSpPr>
         <p:spPr>
           <a:xfrm>
             <a:off x="3493008" y="2249424"/>
-            <a:ext cx="1517904" cy="402336"/>
+            <a:ext cx="1517904" cy="365760"/>
           </a:xfrm>
           <a:prstGeom prst="rect">
             <a:avLst/>
@@ -15886,14 +16194,14 @@
       </p:sp>
       <p:sp>
         <p:nvSpPr>
-          <p:cNvPr id="43" name="Text 38"/>
+          <p:cNvPr id="45" name="Text 40"/>
           <p:cNvSpPr/>
           <p:nvPr/>
         </p:nvSpPr>
         <p:spPr>
           <a:xfrm>
             <a:off x="3520440" y="2249424"/>
-            <a:ext cx="1463040" cy="402336"/>
+            <a:ext cx="1463040" cy="365760"/>
           </a:xfrm>
           <a:prstGeom prst="rect">
             <a:avLst/>
@@ -15942,13 +16250,13 @@
       </p:sp>
       <p:sp>
         <p:nvSpPr>
-          <p:cNvPr id="44" name="Shape 39"/>
-          <p:cNvSpPr/>
-          <p:nvPr/>
-        </p:nvSpPr>
-        <p:spPr>
-          <a:xfrm>
-            <a:off x="5010912" y="2450592"/>
+          <p:cNvPr id="46" name="Shape 41"/>
+          <p:cNvSpPr/>
+          <p:nvPr/>
+        </p:nvSpPr>
+        <p:spPr>
+          <a:xfrm>
+            <a:off x="5010912" y="2432304"/>
             <a:ext cx="0" cy="0"/>
           </a:xfrm>
           <a:prstGeom prst="line">
@@ -15965,13 +16273,13 @@
       </p:sp>
       <p:sp>
         <p:nvSpPr>
-          <p:cNvPr id="45" name="Text 40"/>
-          <p:cNvSpPr/>
-          <p:nvPr/>
-        </p:nvSpPr>
-        <p:spPr>
-          <a:xfrm>
-            <a:off x="4974336" y="2350008"/>
+          <p:cNvPr id="47" name="Text 42"/>
+          <p:cNvSpPr/>
+          <p:nvPr/>
+        </p:nvSpPr>
+        <p:spPr>
+          <a:xfrm>
+            <a:off x="4974336" y="2331720"/>
             <a:ext cx="164592" cy="182880"/>
           </a:xfrm>
           <a:prstGeom prst="rect">
@@ -16001,14 +16309,14 @@
       </p:sp>
       <p:sp>
         <p:nvSpPr>
-          <p:cNvPr id="46" name="Shape 41"/>
+          <p:cNvPr id="48" name="Shape 43"/>
           <p:cNvSpPr/>
           <p:nvPr/>
         </p:nvSpPr>
         <p:spPr>
           <a:xfrm>
             <a:off x="5138928" y="2249424"/>
-            <a:ext cx="1517904" cy="402336"/>
+            <a:ext cx="1517904" cy="365760"/>
           </a:xfrm>
           <a:prstGeom prst="rect">
             <a:avLst/>
@@ -16026,14 +16334,14 @@
       </p:sp>
       <p:sp>
         <p:nvSpPr>
-          <p:cNvPr id="47" name="Text 42"/>
+          <p:cNvPr id="49" name="Text 44"/>
           <p:cNvSpPr/>
           <p:nvPr/>
         </p:nvSpPr>
         <p:spPr>
           <a:xfrm>
             <a:off x="5166360" y="2249424"/>
-            <a:ext cx="1463040" cy="402336"/>
+            <a:ext cx="1463040" cy="365760"/>
           </a:xfrm>
           <a:prstGeom prst="rect">
             <a:avLst/>
@@ -16099,13 +16407,13 @@
       </p:sp>
       <p:sp>
         <p:nvSpPr>
-          <p:cNvPr id="48" name="Shape 43"/>
-          <p:cNvSpPr/>
-          <p:nvPr/>
-        </p:nvSpPr>
-        <p:spPr>
-          <a:xfrm>
-            <a:off x="6656832" y="2450592"/>
+          <p:cNvPr id="50" name="Shape 45"/>
+          <p:cNvSpPr/>
+          <p:nvPr/>
+        </p:nvSpPr>
+        <p:spPr>
+          <a:xfrm>
+            <a:off x="6656832" y="2432304"/>
             <a:ext cx="0" cy="0"/>
           </a:xfrm>
           <a:prstGeom prst="line">
@@ -16122,13 +16430,13 @@
       </p:sp>
       <p:sp>
         <p:nvSpPr>
-          <p:cNvPr id="49" name="Text 44"/>
-          <p:cNvSpPr/>
-          <p:nvPr/>
-        </p:nvSpPr>
-        <p:spPr>
-          <a:xfrm>
-            <a:off x="6620256" y="2350008"/>
+          <p:cNvPr id="51" name="Text 46"/>
+          <p:cNvSpPr/>
+          <p:nvPr/>
+        </p:nvSpPr>
+        <p:spPr>
+          <a:xfrm>
+            <a:off x="6620256" y="2331720"/>
             <a:ext cx="164592" cy="182880"/>
           </a:xfrm>
           <a:prstGeom prst="rect">
@@ -16158,14 +16466,14 @@
       </p:sp>
       <p:sp>
         <p:nvSpPr>
-          <p:cNvPr id="50" name="Shape 45"/>
+          <p:cNvPr id="52" name="Shape 47"/>
           <p:cNvSpPr/>
           <p:nvPr/>
         </p:nvSpPr>
         <p:spPr>
           <a:xfrm>
             <a:off x="6784848" y="2249424"/>
-            <a:ext cx="1517904" cy="402336"/>
+            <a:ext cx="1517904" cy="365760"/>
           </a:xfrm>
           <a:prstGeom prst="rect">
             <a:avLst/>
@@ -16183,14 +16491,14 @@
       </p:sp>
       <p:sp>
         <p:nvSpPr>
-          <p:cNvPr id="51" name="Text 46"/>
+          <p:cNvPr id="53" name="Text 48"/>
           <p:cNvSpPr/>
           <p:nvPr/>
         </p:nvSpPr>
         <p:spPr>
           <a:xfrm>
             <a:off x="6812280" y="2249424"/>
-            <a:ext cx="1463040" cy="402336"/>
+            <a:ext cx="1463040" cy="365760"/>
           </a:xfrm>
           <a:prstGeom prst="rect">
             <a:avLst/>
@@ -16256,13 +16564,13 @@
       </p:sp>
       <p:sp>
         <p:nvSpPr>
-          <p:cNvPr id="52" name="Shape 47"/>
-          <p:cNvSpPr/>
-          <p:nvPr/>
-        </p:nvSpPr>
-        <p:spPr>
-          <a:xfrm>
-            <a:off x="8302752" y="2450592"/>
+          <p:cNvPr id="54" name="Shape 49"/>
+          <p:cNvSpPr/>
+          <p:nvPr/>
+        </p:nvSpPr>
+        <p:spPr>
+          <a:xfrm>
+            <a:off x="8302752" y="2432304"/>
             <a:ext cx="0" cy="0"/>
           </a:xfrm>
           <a:prstGeom prst="line">
@@ -16279,13 +16587,13 @@
       </p:sp>
       <p:sp>
         <p:nvSpPr>
-          <p:cNvPr id="53" name="Text 48"/>
-          <p:cNvSpPr/>
-          <p:nvPr/>
-        </p:nvSpPr>
-        <p:spPr>
-          <a:xfrm>
-            <a:off x="8266176" y="2350008"/>
+          <p:cNvPr id="55" name="Text 50"/>
+          <p:cNvSpPr/>
+          <p:nvPr/>
+        </p:nvSpPr>
+        <p:spPr>
+          <a:xfrm>
+            <a:off x="8266176" y="2331720"/>
             <a:ext cx="164592" cy="182880"/>
           </a:xfrm>
           <a:prstGeom prst="rect">
@@ -16315,14 +16623,14 @@
       </p:sp>
       <p:sp>
         <p:nvSpPr>
-          <p:cNvPr id="54" name="Shape 49"/>
+          <p:cNvPr id="56" name="Shape 51"/>
           <p:cNvSpPr/>
           <p:nvPr/>
         </p:nvSpPr>
         <p:spPr>
           <a:xfrm>
             <a:off x="8430768" y="2249424"/>
-            <a:ext cx="1243584" cy="402336"/>
+            <a:ext cx="1243584" cy="365760"/>
           </a:xfrm>
           <a:prstGeom prst="rect">
             <a:avLst/>
@@ -16340,14 +16648,14 @@
       </p:sp>
       <p:sp>
         <p:nvSpPr>
-          <p:cNvPr id="55" name="Text 50"/>
+          <p:cNvPr id="57" name="Text 52"/>
           <p:cNvSpPr/>
           <p:nvPr/>
         </p:nvSpPr>
         <p:spPr>
           <a:xfrm>
             <a:off x="8458200" y="2249424"/>
-            <a:ext cx="1188720" cy="402336"/>
+            <a:ext cx="1188720" cy="365760"/>
           </a:xfrm>
           <a:prstGeom prst="rect">
             <a:avLst/>
@@ -16413,14 +16721,14 @@
       </p:sp>
       <p:sp>
         <p:nvSpPr>
-          <p:cNvPr id="56" name="Shape 51"/>
-          <p:cNvSpPr/>
-          <p:nvPr/>
-        </p:nvSpPr>
-        <p:spPr>
-          <a:xfrm>
-            <a:off x="201168" y="2761488"/>
-            <a:ext cx="1517904" cy="402336"/>
+          <p:cNvPr id="58" name="Shape 53"/>
+          <p:cNvSpPr/>
+          <p:nvPr/>
+        </p:nvSpPr>
+        <p:spPr>
+          <a:xfrm>
+            <a:off x="201168" y="2706624"/>
+            <a:ext cx="1517904" cy="365760"/>
           </a:xfrm>
           <a:prstGeom prst="rect">
             <a:avLst/>
@@ -16438,14 +16746,14 @@
       </p:sp>
       <p:sp>
         <p:nvSpPr>
-          <p:cNvPr id="57" name="Text 52"/>
-          <p:cNvSpPr/>
-          <p:nvPr/>
-        </p:nvSpPr>
-        <p:spPr>
-          <a:xfrm>
-            <a:off x="228600" y="2761488"/>
-            <a:ext cx="1463040" cy="402336"/>
+          <p:cNvPr id="59" name="Text 54"/>
+          <p:cNvSpPr/>
+          <p:nvPr/>
+        </p:nvSpPr>
+        <p:spPr>
+          <a:xfrm>
+            <a:off x="228600" y="2706624"/>
+            <a:ext cx="1463040" cy="365760"/>
           </a:xfrm>
           <a:prstGeom prst="rect">
             <a:avLst/>
@@ -16494,13 +16802,13 @@
       </p:sp>
       <p:sp>
         <p:nvSpPr>
-          <p:cNvPr id="58" name="Shape 53"/>
-          <p:cNvSpPr/>
-          <p:nvPr/>
-        </p:nvSpPr>
-        <p:spPr>
-          <a:xfrm>
-            <a:off x="1719072" y="2962656"/>
+          <p:cNvPr id="60" name="Shape 55"/>
+          <p:cNvSpPr/>
+          <p:nvPr/>
+        </p:nvSpPr>
+        <p:spPr>
+          <a:xfrm>
+            <a:off x="1719072" y="2889504"/>
             <a:ext cx="0" cy="0"/>
           </a:xfrm>
           <a:prstGeom prst="line">
@@ -16517,13 +16825,13 @@
       </p:sp>
       <p:sp>
         <p:nvSpPr>
-          <p:cNvPr id="59" name="Text 54"/>
-          <p:cNvSpPr/>
-          <p:nvPr/>
-        </p:nvSpPr>
-        <p:spPr>
-          <a:xfrm>
-            <a:off x="1682496" y="2862072"/>
+          <p:cNvPr id="61" name="Text 56"/>
+          <p:cNvSpPr/>
+          <p:nvPr/>
+        </p:nvSpPr>
+        <p:spPr>
+          <a:xfrm>
+            <a:off x="1682496" y="2788920"/>
             <a:ext cx="164592" cy="182880"/>
           </a:xfrm>
           <a:prstGeom prst="rect">
@@ -16553,14 +16861,14 @@
       </p:sp>
       <p:sp>
         <p:nvSpPr>
-          <p:cNvPr id="60" name="Shape 55"/>
-          <p:cNvSpPr/>
-          <p:nvPr/>
-        </p:nvSpPr>
-        <p:spPr>
-          <a:xfrm>
-            <a:off x="1847088" y="2761488"/>
-            <a:ext cx="1517904" cy="402336"/>
+          <p:cNvPr id="62" name="Shape 57"/>
+          <p:cNvSpPr/>
+          <p:nvPr/>
+        </p:nvSpPr>
+        <p:spPr>
+          <a:xfrm>
+            <a:off x="1847088" y="2706624"/>
+            <a:ext cx="1517904" cy="365760"/>
           </a:xfrm>
           <a:prstGeom prst="rect">
             <a:avLst/>
@@ -16578,14 +16886,14 @@
       </p:sp>
       <p:sp>
         <p:nvSpPr>
-          <p:cNvPr id="61" name="Text 56"/>
-          <p:cNvSpPr/>
-          <p:nvPr/>
-        </p:nvSpPr>
-        <p:spPr>
-          <a:xfrm>
-            <a:off x="1874520" y="2761488"/>
-            <a:ext cx="1463040" cy="402336"/>
+          <p:cNvPr id="63" name="Text 58"/>
+          <p:cNvSpPr/>
+          <p:nvPr/>
+        </p:nvSpPr>
+        <p:spPr>
+          <a:xfrm>
+            <a:off x="1874520" y="2706624"/>
+            <a:ext cx="1463040" cy="365760"/>
           </a:xfrm>
           <a:prstGeom prst="rect">
             <a:avLst/>
@@ -16634,13 +16942,13 @@
       </p:sp>
       <p:sp>
         <p:nvSpPr>
-          <p:cNvPr id="62" name="Shape 57"/>
-          <p:cNvSpPr/>
-          <p:nvPr/>
-        </p:nvSpPr>
-        <p:spPr>
-          <a:xfrm>
-            <a:off x="3364992" y="2962656"/>
+          <p:cNvPr id="64" name="Shape 59"/>
+          <p:cNvSpPr/>
+          <p:nvPr/>
+        </p:nvSpPr>
+        <p:spPr>
+          <a:xfrm>
+            <a:off x="3364992" y="2889504"/>
             <a:ext cx="0" cy="0"/>
           </a:xfrm>
           <a:prstGeom prst="line">
@@ -16657,13 +16965,13 @@
       </p:sp>
       <p:sp>
         <p:nvSpPr>
-          <p:cNvPr id="63" name="Text 58"/>
-          <p:cNvSpPr/>
-          <p:nvPr/>
-        </p:nvSpPr>
-        <p:spPr>
-          <a:xfrm>
-            <a:off x="3328416" y="2862072"/>
+          <p:cNvPr id="65" name="Text 60"/>
+          <p:cNvSpPr/>
+          <p:nvPr/>
+        </p:nvSpPr>
+        <p:spPr>
+          <a:xfrm>
+            <a:off x="3328416" y="2788920"/>
             <a:ext cx="164592" cy="182880"/>
           </a:xfrm>
           <a:prstGeom prst="rect">
@@ -16693,14 +17001,14 @@
       </p:sp>
       <p:sp>
         <p:nvSpPr>
-          <p:cNvPr id="64" name="Shape 59"/>
-          <p:cNvSpPr/>
-          <p:nvPr/>
-        </p:nvSpPr>
-        <p:spPr>
-          <a:xfrm>
-            <a:off x="3493008" y="2761488"/>
-            <a:ext cx="1517904" cy="402336"/>
+          <p:cNvPr id="66" name="Shape 61"/>
+          <p:cNvSpPr/>
+          <p:nvPr/>
+        </p:nvSpPr>
+        <p:spPr>
+          <a:xfrm>
+            <a:off x="3493008" y="2706624"/>
+            <a:ext cx="1517904" cy="365760"/>
           </a:xfrm>
           <a:prstGeom prst="rect">
             <a:avLst/>
@@ -16718,14 +17026,14 @@
       </p:sp>
       <p:sp>
         <p:nvSpPr>
-          <p:cNvPr id="65" name="Text 60"/>
-          <p:cNvSpPr/>
-          <p:nvPr/>
-        </p:nvSpPr>
-        <p:spPr>
-          <a:xfrm>
-            <a:off x="3520440" y="2761488"/>
-            <a:ext cx="1463040" cy="402336"/>
+          <p:cNvPr id="67" name="Text 62"/>
+          <p:cNvSpPr/>
+          <p:nvPr/>
+        </p:nvSpPr>
+        <p:spPr>
+          <a:xfrm>
+            <a:off x="3520440" y="2706624"/>
+            <a:ext cx="1463040" cy="365760"/>
           </a:xfrm>
           <a:prstGeom prst="rect">
             <a:avLst/>
@@ -16774,13 +17082,13 @@
       </p:sp>
       <p:sp>
         <p:nvSpPr>
-          <p:cNvPr id="66" name="Shape 61"/>
-          <p:cNvSpPr/>
-          <p:nvPr/>
-        </p:nvSpPr>
-        <p:spPr>
-          <a:xfrm>
-            <a:off x="5010912" y="2962656"/>
+          <p:cNvPr id="68" name="Shape 63"/>
+          <p:cNvSpPr/>
+          <p:nvPr/>
+        </p:nvSpPr>
+        <p:spPr>
+          <a:xfrm>
+            <a:off x="5010912" y="2889504"/>
             <a:ext cx="0" cy="0"/>
           </a:xfrm>
           <a:prstGeom prst="line">
@@ -16797,13 +17105,13 @@
       </p:sp>
       <p:sp>
         <p:nvSpPr>
-          <p:cNvPr id="67" name="Text 62"/>
-          <p:cNvSpPr/>
-          <p:nvPr/>
-        </p:nvSpPr>
-        <p:spPr>
-          <a:xfrm>
-            <a:off x="4974336" y="2862072"/>
+          <p:cNvPr id="69" name="Text 64"/>
+          <p:cNvSpPr/>
+          <p:nvPr/>
+        </p:nvSpPr>
+        <p:spPr>
+          <a:xfrm>
+            <a:off x="4974336" y="2788920"/>
             <a:ext cx="164592" cy="182880"/>
           </a:xfrm>
           <a:prstGeom prst="rect">
@@ -16833,14 +17141,14 @@
       </p:sp>
       <p:sp>
         <p:nvSpPr>
-          <p:cNvPr id="68" name="Shape 63"/>
-          <p:cNvSpPr/>
-          <p:nvPr/>
-        </p:nvSpPr>
-        <p:spPr>
-          <a:xfrm>
-            <a:off x="5138928" y="2761488"/>
-            <a:ext cx="1517904" cy="402336"/>
+          <p:cNvPr id="70" name="Shape 65"/>
+          <p:cNvSpPr/>
+          <p:nvPr/>
+        </p:nvSpPr>
+        <p:spPr>
+          <a:xfrm>
+            <a:off x="5138928" y="2706624"/>
+            <a:ext cx="1517904" cy="365760"/>
           </a:xfrm>
           <a:prstGeom prst="rect">
             <a:avLst/>
@@ -16858,14 +17166,14 @@
       </p:sp>
       <p:sp>
         <p:nvSpPr>
-          <p:cNvPr id="69" name="Text 64"/>
-          <p:cNvSpPr/>
-          <p:nvPr/>
-        </p:nvSpPr>
-        <p:spPr>
-          <a:xfrm>
-            <a:off x="5166360" y="2761488"/>
-            <a:ext cx="1463040" cy="402336"/>
+          <p:cNvPr id="71" name="Text 66"/>
+          <p:cNvSpPr/>
+          <p:nvPr/>
+        </p:nvSpPr>
+        <p:spPr>
+          <a:xfrm>
+            <a:off x="5166360" y="2706624"/>
+            <a:ext cx="1463040" cy="365760"/>
           </a:xfrm>
           <a:prstGeom prst="rect">
             <a:avLst/>
@@ -16931,13 +17239,13 @@
       </p:sp>
       <p:sp>
         <p:nvSpPr>
-          <p:cNvPr id="70" name="Shape 65"/>
-          <p:cNvSpPr/>
-          <p:nvPr/>
-        </p:nvSpPr>
-        <p:spPr>
-          <a:xfrm>
-            <a:off x="6656832" y="2962656"/>
+          <p:cNvPr id="72" name="Shape 67"/>
+          <p:cNvSpPr/>
+          <p:nvPr/>
+        </p:nvSpPr>
+        <p:spPr>
+          <a:xfrm>
+            <a:off x="6656832" y="2889504"/>
             <a:ext cx="0" cy="0"/>
           </a:xfrm>
           <a:prstGeom prst="line">
@@ -16954,13 +17262,13 @@
       </p:sp>
       <p:sp>
         <p:nvSpPr>
-          <p:cNvPr id="71" name="Text 66"/>
-          <p:cNvSpPr/>
-          <p:nvPr/>
-        </p:nvSpPr>
-        <p:spPr>
-          <a:xfrm>
-            <a:off x="6620256" y="2862072"/>
+          <p:cNvPr id="73" name="Text 68"/>
+          <p:cNvSpPr/>
+          <p:nvPr/>
+        </p:nvSpPr>
+        <p:spPr>
+          <a:xfrm>
+            <a:off x="6620256" y="2788920"/>
             <a:ext cx="164592" cy="182880"/>
           </a:xfrm>
           <a:prstGeom prst="rect">
@@ -16990,14 +17298,14 @@
       </p:sp>
       <p:sp>
         <p:nvSpPr>
-          <p:cNvPr id="72" name="Shape 67"/>
-          <p:cNvSpPr/>
-          <p:nvPr/>
-        </p:nvSpPr>
-        <p:spPr>
-          <a:xfrm>
-            <a:off x="6784848" y="2761488"/>
-            <a:ext cx="1517904" cy="402336"/>
+          <p:cNvPr id="74" name="Shape 69"/>
+          <p:cNvSpPr/>
+          <p:nvPr/>
+        </p:nvSpPr>
+        <p:spPr>
+          <a:xfrm>
+            <a:off x="6784848" y="2706624"/>
+            <a:ext cx="1517904" cy="365760"/>
           </a:xfrm>
           <a:prstGeom prst="rect">
             <a:avLst/>
@@ -17015,14 +17323,14 @@
       </p:sp>
       <p:sp>
         <p:nvSpPr>
-          <p:cNvPr id="73" name="Text 68"/>
-          <p:cNvSpPr/>
-          <p:nvPr/>
-        </p:nvSpPr>
-        <p:spPr>
-          <a:xfrm>
-            <a:off x="6812280" y="2761488"/>
-            <a:ext cx="1463040" cy="402336"/>
+          <p:cNvPr id="75" name="Text 70"/>
+          <p:cNvSpPr/>
+          <p:nvPr/>
+        </p:nvSpPr>
+        <p:spPr>
+          <a:xfrm>
+            <a:off x="6812280" y="2706624"/>
+            <a:ext cx="1463040" cy="365760"/>
           </a:xfrm>
           <a:prstGeom prst="rect">
             <a:avLst/>
@@ -17088,13 +17396,13 @@
       </p:sp>
       <p:sp>
         <p:nvSpPr>
-          <p:cNvPr id="74" name="Shape 69"/>
-          <p:cNvSpPr/>
-          <p:nvPr/>
-        </p:nvSpPr>
-        <p:spPr>
-          <a:xfrm>
-            <a:off x="8302752" y="2962656"/>
+          <p:cNvPr id="76" name="Shape 71"/>
+          <p:cNvSpPr/>
+          <p:nvPr/>
+        </p:nvSpPr>
+        <p:spPr>
+          <a:xfrm>
+            <a:off x="8302752" y="2889504"/>
             <a:ext cx="0" cy="0"/>
           </a:xfrm>
           <a:prstGeom prst="line">
@@ -17111,13 +17419,13 @@
       </p:sp>
       <p:sp>
         <p:nvSpPr>
-          <p:cNvPr id="75" name="Text 70"/>
-          <p:cNvSpPr/>
-          <p:nvPr/>
-        </p:nvSpPr>
-        <p:spPr>
-          <a:xfrm>
-            <a:off x="8266176" y="2862072"/>
+          <p:cNvPr id="77" name="Text 72"/>
+          <p:cNvSpPr/>
+          <p:nvPr/>
+        </p:nvSpPr>
+        <p:spPr>
+          <a:xfrm>
+            <a:off x="8266176" y="2788920"/>
             <a:ext cx="164592" cy="182880"/>
           </a:xfrm>
           <a:prstGeom prst="rect">
@@ -17147,14 +17455,14 @@
       </p:sp>
       <p:sp>
         <p:nvSpPr>
-          <p:cNvPr id="76" name="Shape 71"/>
-          <p:cNvSpPr/>
-          <p:nvPr/>
-        </p:nvSpPr>
-        <p:spPr>
-          <a:xfrm>
-            <a:off x="8430768" y="2761488"/>
-            <a:ext cx="1243584" cy="402336"/>
+          <p:cNvPr id="78" name="Shape 73"/>
+          <p:cNvSpPr/>
+          <p:nvPr/>
+        </p:nvSpPr>
+        <p:spPr>
+          <a:xfrm>
+            <a:off x="8430768" y="2706624"/>
+            <a:ext cx="1243584" cy="365760"/>
           </a:xfrm>
           <a:prstGeom prst="rect">
             <a:avLst/>
@@ -17172,14 +17480,14 @@
       </p:sp>
       <p:sp>
         <p:nvSpPr>
-          <p:cNvPr id="77" name="Text 72"/>
-          <p:cNvSpPr/>
-          <p:nvPr/>
-        </p:nvSpPr>
-        <p:spPr>
-          <a:xfrm>
-            <a:off x="8458200" y="2761488"/>
-            <a:ext cx="1188720" cy="402336"/>
+          <p:cNvPr id="79" name="Text 74"/>
+          <p:cNvSpPr/>
+          <p:nvPr/>
+        </p:nvSpPr>
+        <p:spPr>
+          <a:xfrm>
+            <a:off x="8458200" y="2706624"/>
+            <a:ext cx="1188720" cy="365760"/>
           </a:xfrm>
           <a:prstGeom prst="rect">
             <a:avLst/>
@@ -17245,14 +17553,14 @@
       </p:sp>
       <p:sp>
         <p:nvSpPr>
-          <p:cNvPr id="78" name="Shape 73"/>
-          <p:cNvSpPr/>
-          <p:nvPr/>
-        </p:nvSpPr>
-        <p:spPr>
-          <a:xfrm>
-            <a:off x="201168" y="3273552"/>
-            <a:ext cx="1517904" cy="402336"/>
+          <p:cNvPr id="80" name="Shape 75"/>
+          <p:cNvSpPr/>
+          <p:nvPr/>
+        </p:nvSpPr>
+        <p:spPr>
+          <a:xfrm>
+            <a:off x="201168" y="3163824"/>
+            <a:ext cx="1517904" cy="365760"/>
           </a:xfrm>
           <a:prstGeom prst="rect">
             <a:avLst/>
@@ -17270,14 +17578,14 @@
       </p:sp>
       <p:sp>
         <p:nvSpPr>
-          <p:cNvPr id="79" name="Text 74"/>
-          <p:cNvSpPr/>
-          <p:nvPr/>
-        </p:nvSpPr>
-        <p:spPr>
-          <a:xfrm>
-            <a:off x="228600" y="3273552"/>
-            <a:ext cx="1463040" cy="402336"/>
+          <p:cNvPr id="81" name="Text 76"/>
+          <p:cNvSpPr/>
+          <p:nvPr/>
+        </p:nvSpPr>
+        <p:spPr>
+          <a:xfrm>
+            <a:off x="228600" y="3163824"/>
+            <a:ext cx="1463040" cy="365760"/>
           </a:xfrm>
           <a:prstGeom prst="rect">
             <a:avLst/>
@@ -17326,13 +17634,13 @@
       </p:sp>
       <p:sp>
         <p:nvSpPr>
-          <p:cNvPr id="80" name="Shape 75"/>
-          <p:cNvSpPr/>
-          <p:nvPr/>
-        </p:nvSpPr>
-        <p:spPr>
-          <a:xfrm>
-            <a:off x="1719072" y="3474720"/>
+          <p:cNvPr id="82" name="Shape 77"/>
+          <p:cNvSpPr/>
+          <p:nvPr/>
+        </p:nvSpPr>
+        <p:spPr>
+          <a:xfrm>
+            <a:off x="1719072" y="3346704"/>
             <a:ext cx="0" cy="0"/>
           </a:xfrm>
           <a:prstGeom prst="line">
@@ -17349,13 +17657,13 @@
       </p:sp>
       <p:sp>
         <p:nvSpPr>
-          <p:cNvPr id="81" name="Text 76"/>
-          <p:cNvSpPr/>
-          <p:nvPr/>
-        </p:nvSpPr>
-        <p:spPr>
-          <a:xfrm>
-            <a:off x="1682496" y="3374136"/>
+          <p:cNvPr id="83" name="Text 78"/>
+          <p:cNvSpPr/>
+          <p:nvPr/>
+        </p:nvSpPr>
+        <p:spPr>
+          <a:xfrm>
+            <a:off x="1682496" y="3246120"/>
             <a:ext cx="164592" cy="182880"/>
           </a:xfrm>
           <a:prstGeom prst="rect">
@@ -17385,14 +17693,14 @@
       </p:sp>
       <p:sp>
         <p:nvSpPr>
-          <p:cNvPr id="82" name="Shape 77"/>
-          <p:cNvSpPr/>
-          <p:nvPr/>
-        </p:nvSpPr>
-        <p:spPr>
-          <a:xfrm>
-            <a:off x="1847088" y="3273552"/>
-            <a:ext cx="1517904" cy="402336"/>
+          <p:cNvPr id="84" name="Shape 79"/>
+          <p:cNvSpPr/>
+          <p:nvPr/>
+        </p:nvSpPr>
+        <p:spPr>
+          <a:xfrm>
+            <a:off x="1847088" y="3163824"/>
+            <a:ext cx="1517904" cy="365760"/>
           </a:xfrm>
           <a:prstGeom prst="rect">
             <a:avLst/>
@@ -17410,14 +17718,14 @@
       </p:sp>
       <p:sp>
         <p:nvSpPr>
-          <p:cNvPr id="83" name="Text 78"/>
-          <p:cNvSpPr/>
-          <p:nvPr/>
-        </p:nvSpPr>
-        <p:spPr>
-          <a:xfrm>
-            <a:off x="1874520" y="3273552"/>
-            <a:ext cx="1463040" cy="402336"/>
+          <p:cNvPr id="85" name="Text 80"/>
+          <p:cNvSpPr/>
+          <p:nvPr/>
+        </p:nvSpPr>
+        <p:spPr>
+          <a:xfrm>
+            <a:off x="1874520" y="3163824"/>
+            <a:ext cx="1463040" cy="365760"/>
           </a:xfrm>
           <a:prstGeom prst="rect">
             <a:avLst/>
@@ -17466,13 +17774,13 @@
       </p:sp>
       <p:sp>
         <p:nvSpPr>
-          <p:cNvPr id="84" name="Shape 79"/>
-          <p:cNvSpPr/>
-          <p:nvPr/>
-        </p:nvSpPr>
-        <p:spPr>
-          <a:xfrm>
-            <a:off x="3364992" y="3474720"/>
+          <p:cNvPr id="86" name="Shape 81"/>
+          <p:cNvSpPr/>
+          <p:nvPr/>
+        </p:nvSpPr>
+        <p:spPr>
+          <a:xfrm>
+            <a:off x="3364992" y="3346704"/>
             <a:ext cx="0" cy="0"/>
           </a:xfrm>
           <a:prstGeom prst="line">
@@ -17489,13 +17797,13 @@
       </p:sp>
       <p:sp>
         <p:nvSpPr>
-          <p:cNvPr id="85" name="Text 80"/>
-          <p:cNvSpPr/>
-          <p:nvPr/>
-        </p:nvSpPr>
-        <p:spPr>
-          <a:xfrm>
-            <a:off x="3328416" y="3374136"/>
+          <p:cNvPr id="87" name="Text 82"/>
+          <p:cNvSpPr/>
+          <p:nvPr/>
+        </p:nvSpPr>
+        <p:spPr>
+          <a:xfrm>
+            <a:off x="3328416" y="3246120"/>
             <a:ext cx="164592" cy="182880"/>
           </a:xfrm>
           <a:prstGeom prst="rect">
@@ -17525,14 +17833,14 @@
       </p:sp>
       <p:sp>
         <p:nvSpPr>
-          <p:cNvPr id="86" name="Shape 81"/>
-          <p:cNvSpPr/>
-          <p:nvPr/>
-        </p:nvSpPr>
-        <p:spPr>
-          <a:xfrm>
-            <a:off x="3493008" y="3273552"/>
-            <a:ext cx="1517904" cy="402336"/>
+          <p:cNvPr id="88" name="Shape 83"/>
+          <p:cNvSpPr/>
+          <p:nvPr/>
+        </p:nvSpPr>
+        <p:spPr>
+          <a:xfrm>
+            <a:off x="3493008" y="3163824"/>
+            <a:ext cx="1517904" cy="365760"/>
           </a:xfrm>
           <a:prstGeom prst="rect">
             <a:avLst/>
@@ -17550,14 +17858,14 @@
       </p:sp>
       <p:sp>
         <p:nvSpPr>
-          <p:cNvPr id="87" name="Text 82"/>
-          <p:cNvSpPr/>
-          <p:nvPr/>
-        </p:nvSpPr>
-        <p:spPr>
-          <a:xfrm>
-            <a:off x="3520440" y="3273552"/>
-            <a:ext cx="1463040" cy="402336"/>
+          <p:cNvPr id="89" name="Text 84"/>
+          <p:cNvSpPr/>
+          <p:nvPr/>
+        </p:nvSpPr>
+        <p:spPr>
+          <a:xfrm>
+            <a:off x="3520440" y="3163824"/>
+            <a:ext cx="1463040" cy="365760"/>
           </a:xfrm>
           <a:prstGeom prst="rect">
             <a:avLst/>
@@ -17606,13 +17914,13 @@
       </p:sp>
       <p:sp>
         <p:nvSpPr>
-          <p:cNvPr id="88" name="Shape 83"/>
-          <p:cNvSpPr/>
-          <p:nvPr/>
-        </p:nvSpPr>
-        <p:spPr>
-          <a:xfrm>
-            <a:off x="5010912" y="3474720"/>
+          <p:cNvPr id="90" name="Shape 85"/>
+          <p:cNvSpPr/>
+          <p:nvPr/>
+        </p:nvSpPr>
+        <p:spPr>
+          <a:xfrm>
+            <a:off x="5010912" y="3346704"/>
             <a:ext cx="0" cy="0"/>
           </a:xfrm>
           <a:prstGeom prst="line">
@@ -17629,13 +17937,13 @@
       </p:sp>
       <p:sp>
         <p:nvSpPr>
-          <p:cNvPr id="89" name="Text 84"/>
-          <p:cNvSpPr/>
-          <p:nvPr/>
-        </p:nvSpPr>
-        <p:spPr>
-          <a:xfrm>
-            <a:off x="4974336" y="3374136"/>
+          <p:cNvPr id="91" name="Text 86"/>
+          <p:cNvSpPr/>
+          <p:nvPr/>
+        </p:nvSpPr>
+        <p:spPr>
+          <a:xfrm>
+            <a:off x="4974336" y="3246120"/>
             <a:ext cx="164592" cy="182880"/>
           </a:xfrm>
           <a:prstGeom prst="rect">
@@ -17665,14 +17973,14 @@
       </p:sp>
       <p:sp>
         <p:nvSpPr>
-          <p:cNvPr id="90" name="Shape 85"/>
-          <p:cNvSpPr/>
-          <p:nvPr/>
-        </p:nvSpPr>
-        <p:spPr>
-          <a:xfrm>
-            <a:off x="5138928" y="3273552"/>
-            <a:ext cx="1517904" cy="402336"/>
+          <p:cNvPr id="92" name="Shape 87"/>
+          <p:cNvSpPr/>
+          <p:nvPr/>
+        </p:nvSpPr>
+        <p:spPr>
+          <a:xfrm>
+            <a:off x="5138928" y="3163824"/>
+            <a:ext cx="1517904" cy="365760"/>
           </a:xfrm>
           <a:prstGeom prst="rect">
             <a:avLst/>
@@ -17690,14 +17998,14 @@
       </p:sp>
       <p:sp>
         <p:nvSpPr>
-          <p:cNvPr id="91" name="Text 86"/>
-          <p:cNvSpPr/>
-          <p:nvPr/>
-        </p:nvSpPr>
-        <p:spPr>
-          <a:xfrm>
-            <a:off x="5166360" y="3273552"/>
-            <a:ext cx="1463040" cy="402336"/>
+          <p:cNvPr id="93" name="Text 88"/>
+          <p:cNvSpPr/>
+          <p:nvPr/>
+        </p:nvSpPr>
+        <p:spPr>
+          <a:xfrm>
+            <a:off x="5166360" y="3163824"/>
+            <a:ext cx="1463040" cy="365760"/>
           </a:xfrm>
           <a:prstGeom prst="rect">
             <a:avLst/>
@@ -17763,13 +18071,13 @@
       </p:sp>
       <p:sp>
         <p:nvSpPr>
-          <p:cNvPr id="92" name="Shape 87"/>
-          <p:cNvSpPr/>
-          <p:nvPr/>
-        </p:nvSpPr>
-        <p:spPr>
-          <a:xfrm>
-            <a:off x="6656832" y="3474720"/>
+          <p:cNvPr id="94" name="Shape 89"/>
+          <p:cNvSpPr/>
+          <p:nvPr/>
+        </p:nvSpPr>
+        <p:spPr>
+          <a:xfrm>
+            <a:off x="6656832" y="3346704"/>
             <a:ext cx="0" cy="0"/>
           </a:xfrm>
           <a:prstGeom prst="line">
@@ -17786,13 +18094,13 @@
       </p:sp>
       <p:sp>
         <p:nvSpPr>
-          <p:cNvPr id="93" name="Text 88"/>
-          <p:cNvSpPr/>
-          <p:nvPr/>
-        </p:nvSpPr>
-        <p:spPr>
-          <a:xfrm>
-            <a:off x="6620256" y="3374136"/>
+          <p:cNvPr id="95" name="Text 90"/>
+          <p:cNvSpPr/>
+          <p:nvPr/>
+        </p:nvSpPr>
+        <p:spPr>
+          <a:xfrm>
+            <a:off x="6620256" y="3246120"/>
             <a:ext cx="164592" cy="182880"/>
           </a:xfrm>
           <a:prstGeom prst="rect">
@@ -17822,14 +18130,14 @@
       </p:sp>
       <p:sp>
         <p:nvSpPr>
-          <p:cNvPr id="94" name="Shape 89"/>
-          <p:cNvSpPr/>
-          <p:nvPr/>
-        </p:nvSpPr>
-        <p:spPr>
-          <a:xfrm>
-            <a:off x="6784848" y="3273552"/>
-            <a:ext cx="1517904" cy="402336"/>
+          <p:cNvPr id="96" name="Shape 91"/>
+          <p:cNvSpPr/>
+          <p:nvPr/>
+        </p:nvSpPr>
+        <p:spPr>
+          <a:xfrm>
+            <a:off x="6784848" y="3163824"/>
+            <a:ext cx="1517904" cy="365760"/>
           </a:xfrm>
           <a:prstGeom prst="rect">
             <a:avLst/>
@@ -17847,14 +18155,14 @@
       </p:sp>
       <p:sp>
         <p:nvSpPr>
-          <p:cNvPr id="95" name="Text 90"/>
-          <p:cNvSpPr/>
-          <p:nvPr/>
-        </p:nvSpPr>
-        <p:spPr>
-          <a:xfrm>
-            <a:off x="6812280" y="3273552"/>
-            <a:ext cx="1463040" cy="402336"/>
+          <p:cNvPr id="97" name="Text 92"/>
+          <p:cNvSpPr/>
+          <p:nvPr/>
+        </p:nvSpPr>
+        <p:spPr>
+          <a:xfrm>
+            <a:off x="6812280" y="3163824"/>
+            <a:ext cx="1463040" cy="365760"/>
           </a:xfrm>
           <a:prstGeom prst="rect">
             <a:avLst/>
@@ -17920,13 +18228,13 @@
       </p:sp>
       <p:sp>
         <p:nvSpPr>
-          <p:cNvPr id="96" name="Shape 91"/>
-          <p:cNvSpPr/>
-          <p:nvPr/>
-        </p:nvSpPr>
-        <p:spPr>
-          <a:xfrm>
-            <a:off x="7543800" y="3675888"/>
+          <p:cNvPr id="98" name="Shape 93"/>
+          <p:cNvSpPr/>
+          <p:nvPr/>
+        </p:nvSpPr>
+        <p:spPr>
+          <a:xfrm>
+            <a:off x="7543800" y="3529584"/>
             <a:ext cx="0" cy="201168"/>
           </a:xfrm>
           <a:prstGeom prst="line">
@@ -17943,13 +18251,13 @@
       </p:sp>
       <p:sp>
         <p:nvSpPr>
-          <p:cNvPr id="97" name="Text 92"/>
-          <p:cNvSpPr/>
-          <p:nvPr/>
-        </p:nvSpPr>
-        <p:spPr>
-          <a:xfrm>
-            <a:off x="7461504" y="3822192"/>
+          <p:cNvPr id="99" name="Text 94"/>
+          <p:cNvSpPr/>
+          <p:nvPr/>
+        </p:nvSpPr>
+        <p:spPr>
+          <a:xfrm>
+            <a:off x="7461504" y="3675888"/>
             <a:ext cx="164592" cy="164592"/>
           </a:xfrm>
           <a:prstGeom prst="rect">
@@ -17979,14 +18287,14 @@
       </p:sp>
       <p:sp>
         <p:nvSpPr>
-          <p:cNvPr id="98" name="Shape 93"/>
-          <p:cNvSpPr/>
-          <p:nvPr/>
-        </p:nvSpPr>
-        <p:spPr>
-          <a:xfrm>
-            <a:off x="201168" y="3877056"/>
-            <a:ext cx="1517904" cy="402336"/>
+          <p:cNvPr id="100" name="Shape 95"/>
+          <p:cNvSpPr/>
+          <p:nvPr/>
+        </p:nvSpPr>
+        <p:spPr>
+          <a:xfrm>
+            <a:off x="201168" y="3730752"/>
+            <a:ext cx="1517904" cy="365760"/>
           </a:xfrm>
           <a:prstGeom prst="rect">
             <a:avLst/>
@@ -18004,14 +18312,14 @@
       </p:sp>
       <p:sp>
         <p:nvSpPr>
-          <p:cNvPr id="99" name="Text 94"/>
-          <p:cNvSpPr/>
-          <p:nvPr/>
-        </p:nvSpPr>
-        <p:spPr>
-          <a:xfrm>
-            <a:off x="228600" y="3877056"/>
-            <a:ext cx="1463040" cy="402336"/>
+          <p:cNvPr id="101" name="Text 96"/>
+          <p:cNvSpPr/>
+          <p:nvPr/>
+        </p:nvSpPr>
+        <p:spPr>
+          <a:xfrm>
+            <a:off x="228600" y="3730752"/>
+            <a:ext cx="1463040" cy="365760"/>
           </a:xfrm>
           <a:prstGeom prst="rect">
             <a:avLst/>
@@ -18077,13 +18385,13 @@
       </p:sp>
       <p:sp>
         <p:nvSpPr>
-          <p:cNvPr id="100" name="Shape 95"/>
-          <p:cNvSpPr/>
-          <p:nvPr/>
-        </p:nvSpPr>
-        <p:spPr>
-          <a:xfrm>
-            <a:off x="1719072" y="4078224"/>
+          <p:cNvPr id="102" name="Shape 97"/>
+          <p:cNvSpPr/>
+          <p:nvPr/>
+        </p:nvSpPr>
+        <p:spPr>
+          <a:xfrm>
+            <a:off x="1719072" y="3913632"/>
             <a:ext cx="0" cy="0"/>
           </a:xfrm>
           <a:prstGeom prst="line">
@@ -18100,13 +18408,13 @@
       </p:sp>
       <p:sp>
         <p:nvSpPr>
-          <p:cNvPr id="101" name="Text 96"/>
-          <p:cNvSpPr/>
-          <p:nvPr/>
-        </p:nvSpPr>
-        <p:spPr>
-          <a:xfrm>
-            <a:off x="1682496" y="3977640"/>
+          <p:cNvPr id="103" name="Text 98"/>
+          <p:cNvSpPr/>
+          <p:nvPr/>
+        </p:nvSpPr>
+        <p:spPr>
+          <a:xfrm>
+            <a:off x="1682496" y="3813048"/>
             <a:ext cx="164592" cy="182880"/>
           </a:xfrm>
           <a:prstGeom prst="rect">
@@ -18136,14 +18444,14 @@
       </p:sp>
       <p:sp>
         <p:nvSpPr>
-          <p:cNvPr id="102" name="Shape 97"/>
-          <p:cNvSpPr/>
-          <p:nvPr/>
-        </p:nvSpPr>
-        <p:spPr>
-          <a:xfrm>
-            <a:off x="1847088" y="3877056"/>
-            <a:ext cx="1517904" cy="402336"/>
+          <p:cNvPr id="104" name="Shape 99"/>
+          <p:cNvSpPr/>
+          <p:nvPr/>
+        </p:nvSpPr>
+        <p:spPr>
+          <a:xfrm>
+            <a:off x="1847088" y="3730752"/>
+            <a:ext cx="1517904" cy="365760"/>
           </a:xfrm>
           <a:prstGeom prst="rect">
             <a:avLst/>
@@ -18161,14 +18469,14 @@
       </p:sp>
       <p:sp>
         <p:nvSpPr>
-          <p:cNvPr id="103" name="Text 98"/>
-          <p:cNvSpPr/>
-          <p:nvPr/>
-        </p:nvSpPr>
-        <p:spPr>
-          <a:xfrm>
-            <a:off x="1874520" y="3877056"/>
-            <a:ext cx="1463040" cy="402336"/>
+          <p:cNvPr id="105" name="Text 100"/>
+          <p:cNvSpPr/>
+          <p:nvPr/>
+        </p:nvSpPr>
+        <p:spPr>
+          <a:xfrm>
+            <a:off x="1874520" y="3730752"/>
+            <a:ext cx="1463040" cy="365760"/>
           </a:xfrm>
           <a:prstGeom prst="rect">
             <a:avLst/>
@@ -18234,13 +18542,13 @@
       </p:sp>
       <p:sp>
         <p:nvSpPr>
-          <p:cNvPr id="104" name="Shape 99"/>
-          <p:cNvSpPr/>
-          <p:nvPr/>
-        </p:nvSpPr>
-        <p:spPr>
-          <a:xfrm>
-            <a:off x="3364992" y="4078224"/>
+          <p:cNvPr id="106" name="Shape 101"/>
+          <p:cNvSpPr/>
+          <p:nvPr/>
+        </p:nvSpPr>
+        <p:spPr>
+          <a:xfrm>
+            <a:off x="3364992" y="3913632"/>
             <a:ext cx="0" cy="0"/>
           </a:xfrm>
           <a:prstGeom prst="line">
@@ -18257,13 +18565,13 @@
       </p:sp>
       <p:sp>
         <p:nvSpPr>
-          <p:cNvPr id="105" name="Text 100"/>
-          <p:cNvSpPr/>
-          <p:nvPr/>
-        </p:nvSpPr>
-        <p:spPr>
-          <a:xfrm>
-            <a:off x="3328416" y="3977640"/>
+          <p:cNvPr id="107" name="Text 102"/>
+          <p:cNvSpPr/>
+          <p:nvPr/>
+        </p:nvSpPr>
+        <p:spPr>
+          <a:xfrm>
+            <a:off x="3328416" y="3813048"/>
             <a:ext cx="164592" cy="182880"/>
           </a:xfrm>
           <a:prstGeom prst="rect">
@@ -18293,14 +18601,14 @@
       </p:sp>
       <p:sp>
         <p:nvSpPr>
-          <p:cNvPr id="106" name="Shape 101"/>
-          <p:cNvSpPr/>
-          <p:nvPr/>
-        </p:nvSpPr>
-        <p:spPr>
-          <a:xfrm>
-            <a:off x="3493008" y="3877056"/>
-            <a:ext cx="1517904" cy="402336"/>
+          <p:cNvPr id="108" name="Shape 103"/>
+          <p:cNvSpPr/>
+          <p:nvPr/>
+        </p:nvSpPr>
+        <p:spPr>
+          <a:xfrm>
+            <a:off x="3493008" y="3730752"/>
+            <a:ext cx="1517904" cy="365760"/>
           </a:xfrm>
           <a:prstGeom prst="rect">
             <a:avLst/>
@@ -18318,14 +18626,14 @@
       </p:sp>
       <p:sp>
         <p:nvSpPr>
-          <p:cNvPr id="107" name="Text 102"/>
-          <p:cNvSpPr/>
-          <p:nvPr/>
-        </p:nvSpPr>
-        <p:spPr>
-          <a:xfrm>
-            <a:off x="3520440" y="3877056"/>
-            <a:ext cx="1463040" cy="402336"/>
+          <p:cNvPr id="109" name="Text 104"/>
+          <p:cNvSpPr/>
+          <p:nvPr/>
+        </p:nvSpPr>
+        <p:spPr>
+          <a:xfrm>
+            <a:off x="3520440" y="3730752"/>
+            <a:ext cx="1463040" cy="365760"/>
           </a:xfrm>
           <a:prstGeom prst="rect">
             <a:avLst/>
@@ -18391,13 +18699,13 @@
       </p:sp>
       <p:sp>
         <p:nvSpPr>
-          <p:cNvPr id="108" name="Shape 103"/>
-          <p:cNvSpPr/>
-          <p:nvPr/>
-        </p:nvSpPr>
-        <p:spPr>
-          <a:xfrm>
-            <a:off x="5010912" y="4078224"/>
+          <p:cNvPr id="110" name="Shape 105"/>
+          <p:cNvSpPr/>
+          <p:nvPr/>
+        </p:nvSpPr>
+        <p:spPr>
+          <a:xfrm>
+            <a:off x="5010912" y="3913632"/>
             <a:ext cx="0" cy="0"/>
           </a:xfrm>
           <a:prstGeom prst="line">
@@ -18414,13 +18722,13 @@
       </p:sp>
       <p:sp>
         <p:nvSpPr>
-          <p:cNvPr id="109" name="Text 104"/>
-          <p:cNvSpPr/>
-          <p:nvPr/>
-        </p:nvSpPr>
-        <p:spPr>
-          <a:xfrm>
-            <a:off x="4974336" y="3977640"/>
+          <p:cNvPr id="111" name="Text 106"/>
+          <p:cNvSpPr/>
+          <p:nvPr/>
+        </p:nvSpPr>
+        <p:spPr>
+          <a:xfrm>
+            <a:off x="4974336" y="3813048"/>
             <a:ext cx="164592" cy="182880"/>
           </a:xfrm>
           <a:prstGeom prst="rect">
@@ -18450,14 +18758,14 @@
       </p:sp>
       <p:sp>
         <p:nvSpPr>
-          <p:cNvPr id="110" name="Shape 105"/>
-          <p:cNvSpPr/>
-          <p:nvPr/>
-        </p:nvSpPr>
-        <p:spPr>
-          <a:xfrm>
-            <a:off x="5138928" y="3877056"/>
-            <a:ext cx="1517904" cy="402336"/>
+          <p:cNvPr id="112" name="Shape 107"/>
+          <p:cNvSpPr/>
+          <p:nvPr/>
+        </p:nvSpPr>
+        <p:spPr>
+          <a:xfrm>
+            <a:off x="5138928" y="3730752"/>
+            <a:ext cx="1517904" cy="365760"/>
           </a:xfrm>
           <a:prstGeom prst="rect">
             <a:avLst/>
@@ -18475,14 +18783,14 @@
       </p:sp>
       <p:sp>
         <p:nvSpPr>
-          <p:cNvPr id="111" name="Text 106"/>
-          <p:cNvSpPr/>
-          <p:nvPr/>
-        </p:nvSpPr>
-        <p:spPr>
-          <a:xfrm>
-            <a:off x="5166360" y="3877056"/>
-            <a:ext cx="1463040" cy="402336"/>
+          <p:cNvPr id="113" name="Text 108"/>
+          <p:cNvSpPr/>
+          <p:nvPr/>
+        </p:nvSpPr>
+        <p:spPr>
+          <a:xfrm>
+            <a:off x="5166360" y="3730752"/>
+            <a:ext cx="1463040" cy="365760"/>
           </a:xfrm>
           <a:prstGeom prst="rect">
             <a:avLst/>
@@ -18548,13 +18856,13 @@
       </p:sp>
       <p:sp>
         <p:nvSpPr>
-          <p:cNvPr id="112" name="Shape 107"/>
-          <p:cNvSpPr/>
-          <p:nvPr/>
-        </p:nvSpPr>
-        <p:spPr>
-          <a:xfrm>
-            <a:off x="6656832" y="4078224"/>
+          <p:cNvPr id="114" name="Shape 109"/>
+          <p:cNvSpPr/>
+          <p:nvPr/>
+        </p:nvSpPr>
+        <p:spPr>
+          <a:xfrm>
+            <a:off x="6656832" y="3913632"/>
             <a:ext cx="0" cy="0"/>
           </a:xfrm>
           <a:prstGeom prst="line">
@@ -18571,13 +18879,13 @@
       </p:sp>
       <p:sp>
         <p:nvSpPr>
-          <p:cNvPr id="113" name="Text 108"/>
-          <p:cNvSpPr/>
-          <p:nvPr/>
-        </p:nvSpPr>
-        <p:spPr>
-          <a:xfrm>
-            <a:off x="6620256" y="3977640"/>
+          <p:cNvPr id="115" name="Text 110"/>
+          <p:cNvSpPr/>
+          <p:nvPr/>
+        </p:nvSpPr>
+        <p:spPr>
+          <a:xfrm>
+            <a:off x="6620256" y="3813048"/>
             <a:ext cx="164592" cy="182880"/>
           </a:xfrm>
           <a:prstGeom prst="rect">
@@ -18607,14 +18915,14 @@
       </p:sp>
       <p:sp>
         <p:nvSpPr>
-          <p:cNvPr id="114" name="Shape 109"/>
-          <p:cNvSpPr/>
-          <p:nvPr/>
-        </p:nvSpPr>
-        <p:spPr>
-          <a:xfrm>
-            <a:off x="6784848" y="3877056"/>
-            <a:ext cx="1517904" cy="402336"/>
+          <p:cNvPr id="116" name="Shape 111"/>
+          <p:cNvSpPr/>
+          <p:nvPr/>
+        </p:nvSpPr>
+        <p:spPr>
+          <a:xfrm>
+            <a:off x="6784848" y="3730752"/>
+            <a:ext cx="1517904" cy="365760"/>
           </a:xfrm>
           <a:prstGeom prst="rect">
             <a:avLst/>
@@ -18632,14 +18940,14 @@
       </p:sp>
       <p:sp>
         <p:nvSpPr>
-          <p:cNvPr id="115" name="Text 110"/>
-          <p:cNvSpPr/>
-          <p:nvPr/>
-        </p:nvSpPr>
-        <p:spPr>
-          <a:xfrm>
-            <a:off x="6812280" y="3877056"/>
-            <a:ext cx="1463040" cy="402336"/>
+          <p:cNvPr id="117" name="Text 112"/>
+          <p:cNvSpPr/>
+          <p:nvPr/>
+        </p:nvSpPr>
+        <p:spPr>
+          <a:xfrm>
+            <a:off x="6812280" y="3730752"/>
+            <a:ext cx="1463040" cy="365760"/>
           </a:xfrm>
           <a:prstGeom prst="rect">
             <a:avLst/>
@@ -18705,13 +19013,13 @@
       </p:sp>
       <p:sp>
         <p:nvSpPr>
-          <p:cNvPr id="116" name="Shape 111"/>
-          <p:cNvSpPr/>
-          <p:nvPr/>
-        </p:nvSpPr>
-        <p:spPr>
-          <a:xfrm>
-            <a:off x="8302752" y="4078224"/>
+          <p:cNvPr id="118" name="Shape 113"/>
+          <p:cNvSpPr/>
+          <p:nvPr/>
+        </p:nvSpPr>
+        <p:spPr>
+          <a:xfrm>
+            <a:off x="8302752" y="3913632"/>
             <a:ext cx="0" cy="0"/>
           </a:xfrm>
           <a:prstGeom prst="line">
@@ -18728,13 +19036,13 @@
       </p:sp>
       <p:sp>
         <p:nvSpPr>
-          <p:cNvPr id="117" name="Text 112"/>
-          <p:cNvSpPr/>
-          <p:nvPr/>
-        </p:nvSpPr>
-        <p:spPr>
-          <a:xfrm>
-            <a:off x="8266176" y="3977640"/>
+          <p:cNvPr id="119" name="Text 114"/>
+          <p:cNvSpPr/>
+          <p:nvPr/>
+        </p:nvSpPr>
+        <p:spPr>
+          <a:xfrm>
+            <a:off x="8266176" y="3813048"/>
             <a:ext cx="164592" cy="182880"/>
           </a:xfrm>
           <a:prstGeom prst="rect">
@@ -18764,14 +19072,14 @@
       </p:sp>
       <p:sp>
         <p:nvSpPr>
-          <p:cNvPr id="118" name="Shape 113"/>
-          <p:cNvSpPr/>
-          <p:nvPr/>
-        </p:nvSpPr>
-        <p:spPr>
-          <a:xfrm>
-            <a:off x="8430768" y="3877056"/>
-            <a:ext cx="1243584" cy="402336"/>
+          <p:cNvPr id="120" name="Shape 115"/>
+          <p:cNvSpPr/>
+          <p:nvPr/>
+        </p:nvSpPr>
+        <p:spPr>
+          <a:xfrm>
+            <a:off x="8430768" y="3730752"/>
+            <a:ext cx="1243584" cy="365760"/>
           </a:xfrm>
           <a:prstGeom prst="rect">
             <a:avLst/>
@@ -18789,14 +19097,14 @@
       </p:sp>
       <p:sp>
         <p:nvSpPr>
-          <p:cNvPr id="119" name="Text 114"/>
-          <p:cNvSpPr/>
-          <p:nvPr/>
-        </p:nvSpPr>
-        <p:spPr>
-          <a:xfrm>
-            <a:off x="8458200" y="3877056"/>
-            <a:ext cx="1188720" cy="402336"/>
+          <p:cNvPr id="121" name="Text 116"/>
+          <p:cNvSpPr/>
+          <p:nvPr/>
+        </p:nvSpPr>
+        <p:spPr>
+          <a:xfrm>
+            <a:off x="8458200" y="3730752"/>
+            <a:ext cx="1188720" cy="365760"/>
           </a:xfrm>
           <a:prstGeom prst="rect">
             <a:avLst/>
@@ -18862,14 +19170,14 @@
       </p:sp>
       <p:sp>
         <p:nvSpPr>
-          <p:cNvPr id="120" name="Text 115"/>
-          <p:cNvSpPr/>
-          <p:nvPr/>
-        </p:nvSpPr>
-        <p:spPr>
-          <a:xfrm>
-            <a:off x="1847088" y="4297680"/>
-            <a:ext cx="1517904" cy="274320"/>
+          <p:cNvPr id="122" name="Text 117"/>
+          <p:cNvSpPr/>
+          <p:nvPr/>
+        </p:nvSpPr>
+        <p:spPr>
+          <a:xfrm>
+            <a:off x="1847088" y="4114800"/>
+            <a:ext cx="1517904" cy="237744"/>
           </a:xfrm>
           <a:prstGeom prst="rect">
             <a:avLst/>
@@ -18918,14 +19226,961 @@
       </p:sp>
       <p:sp>
         <p:nvSpPr>
-          <p:cNvPr id="121" name="Shape 116"/>
-          <p:cNvSpPr/>
-          <p:nvPr/>
-        </p:nvSpPr>
-        <p:spPr>
-          <a:xfrm>
-            <a:off x="182880" y="4626864"/>
-            <a:ext cx="9509760" cy="274320"/>
+          <p:cNvPr id="123" name="Shape 118"/>
+          <p:cNvSpPr/>
+          <p:nvPr/>
+        </p:nvSpPr>
+        <p:spPr>
+          <a:xfrm>
+            <a:off x="182880" y="4279392"/>
+            <a:ext cx="9509760" cy="128016"/>
+          </a:xfrm>
+          <a:prstGeom prst="rect">
+            <a:avLst/>
+          </a:prstGeom>
+          <a:solidFill>
+            <a:srgbClr val="FFF9E6"/>
+          </a:solidFill>
+          <a:ln w="6350">
+            <a:solidFill>
+              <a:srgbClr val="D4A017"/>
+            </a:solidFill>
+            <a:prstDash val="solid"/>
+          </a:ln>
+        </p:spPr>
+      </p:sp>
+      <p:sp>
+        <p:nvSpPr>
+          <p:cNvPr id="124" name="Text 119"/>
+          <p:cNvSpPr/>
+          <p:nvPr/>
+        </p:nvSpPr>
+        <p:spPr>
+          <a:xfrm>
+            <a:off x="237744" y="4279392"/>
+            <a:ext cx="9400032" cy="128016"/>
+          </a:xfrm>
+          <a:prstGeom prst="rect">
+            <a:avLst/>
+          </a:prstGeom>
+          <a:noFill/>
+          <a:ln/>
+        </p:spPr>
+        <p:txBody>
+          <a:bodyPr wrap="square" lIns="0" tIns="0" rIns="0" bIns="0" rtlCol="0" anchor="ctr"/>
+          <a:lstStyle/>
+          <a:p>
+            <a:pPr indent="0" marL="0">
+              <a:buNone/>
+            </a:pPr>
+            <a:r>
+              <a:rPr lang="en-US" sz="700" b="1" dirty="0">
+                <a:solidFill>
+                  <a:srgbClr val="D4A017"/>
+                </a:solidFill>
+                <a:latin typeface="Meiryo" pitchFamily="34" charset="0"/>
+                <a:ea typeface="Meiryo" pitchFamily="34" charset="-122"/>
+                <a:cs typeface="Meiryo" pitchFamily="34" charset="-120"/>
+              </a:rPr>
+              <a:t>ギフトカード決済データ送信 / Gửi dữ liệu thanh toán Gift Card</a:t>
+            </a:r>
+            <a:endParaRPr lang="en-US" sz="700" dirty="0"/>
+          </a:p>
+        </p:txBody>
+      </p:sp>
+      <p:sp>
+        <p:nvSpPr>
+          <p:cNvPr id="125" name="Shape 120"/>
+          <p:cNvSpPr/>
+          <p:nvPr/>
+        </p:nvSpPr>
+        <p:spPr>
+          <a:xfrm>
+            <a:off x="201168" y="4425696"/>
+            <a:ext cx="1517904" cy="365760"/>
+          </a:xfrm>
+          <a:prstGeom prst="rect">
+            <a:avLst/>
+          </a:prstGeom>
+          <a:solidFill>
+            <a:srgbClr val="FFFDE7"/>
+          </a:solidFill>
+          <a:ln w="12700">
+            <a:solidFill>
+              <a:srgbClr val="D4A017"/>
+            </a:solidFill>
+            <a:prstDash val="solid"/>
+          </a:ln>
+        </p:spPr>
+      </p:sp>
+      <p:sp>
+        <p:nvSpPr>
+          <p:cNvPr id="126" name="Text 121"/>
+          <p:cNvSpPr/>
+          <p:nvPr/>
+        </p:nvSpPr>
+        <p:spPr>
+          <a:xfrm>
+            <a:off x="228600" y="4425696"/>
+            <a:ext cx="1463040" cy="365760"/>
+          </a:xfrm>
+          <a:prstGeom prst="rect">
+            <a:avLst/>
+          </a:prstGeom>
+          <a:noFill/>
+          <a:ln/>
+        </p:spPr>
+        <p:txBody>
+          <a:bodyPr wrap="square" lIns="0" tIns="0" rIns="0" bIns="0" rtlCol="0" anchor="ctr"/>
+          <a:lstStyle/>
+          <a:p>
+            <a:pPr algn="ctr" indent="0" marL="0">
+              <a:buNone/>
+            </a:pPr>
+            <a:r>
+              <a:rPr lang="en-US" sz="650" dirty="0">
+                <a:solidFill>
+                  <a:srgbClr val="D4A017"/>
+                </a:solidFill>
+                <a:latin typeface="Meiryo" pitchFamily="34" charset="0"/>
+                <a:ea typeface="Meiryo" pitchFamily="34" charset="-122"/>
+                <a:cs typeface="Meiryo" pitchFamily="34" charset="-120"/>
+              </a:rPr>
+              <a:t>EC2 giftcard</a:t>
+            </a:r>
+            <a:endParaRPr lang="en-US" sz="650" dirty="0"/>
+          </a:p>
+          <a:p>
+            <a:pPr algn="ctr" indent="0" marL="0">
+              <a:buNone/>
+            </a:pPr>
+            <a:r>
+              <a:rPr lang="en-US" sz="650" dirty="0">
+                <a:solidFill>
+                  <a:srgbClr val="D4A017"/>
+                </a:solidFill>
+                <a:latin typeface="Meiryo" pitchFamily="34" charset="0"/>
+                <a:ea typeface="Meiryo" pitchFamily="34" charset="-122"/>
+                <a:cs typeface="Meiryo" pitchFamily="34" charset="-120"/>
+              </a:rPr>
+              <a:t>(Spring Boot)</a:t>
+            </a:r>
+            <a:endParaRPr lang="en-US" sz="650" dirty="0"/>
+          </a:p>
+          <a:p>
+            <a:pPr algn="ctr" indent="0" marL="0">
+              <a:buNone/>
+            </a:pPr>
+            <a:r>
+              <a:rPr lang="en-US" sz="650" dirty="0">
+                <a:solidFill>
+                  <a:srgbClr val="D4A017"/>
+                </a:solidFill>
+                <a:latin typeface="Meiryo" pitchFamily="34" charset="0"/>
+                <a:ea typeface="Meiryo" pitchFamily="34" charset="-122"/>
+                <a:cs typeface="Meiryo" pitchFamily="34" charset="-120"/>
+              </a:rPr>
+              <a:t>cron 09:00</a:t>
+            </a:r>
+            <a:endParaRPr lang="en-US" sz="650" dirty="0"/>
+          </a:p>
+        </p:txBody>
+      </p:sp>
+      <p:sp>
+        <p:nvSpPr>
+          <p:cNvPr id="127" name="Shape 122"/>
+          <p:cNvSpPr/>
+          <p:nvPr/>
+        </p:nvSpPr>
+        <p:spPr>
+          <a:xfrm>
+            <a:off x="1719072" y="4608576"/>
+            <a:ext cx="0" cy="0"/>
+          </a:xfrm>
+          <a:prstGeom prst="line">
+            <a:avLst/>
+          </a:prstGeom>
+          <a:noFill/>
+          <a:ln w="19050">
+            <a:solidFill>
+              <a:srgbClr val="D4A017"/>
+            </a:solidFill>
+            <a:prstDash val="solid"/>
+          </a:ln>
+        </p:spPr>
+      </p:sp>
+      <p:sp>
+        <p:nvSpPr>
+          <p:cNvPr id="128" name="Text 123"/>
+          <p:cNvSpPr/>
+          <p:nvPr/>
+        </p:nvSpPr>
+        <p:spPr>
+          <a:xfrm>
+            <a:off x="1682496" y="4507992"/>
+            <a:ext cx="164592" cy="182880"/>
+          </a:xfrm>
+          <a:prstGeom prst="rect">
+            <a:avLst/>
+          </a:prstGeom>
+          <a:noFill/>
+          <a:ln/>
+        </p:spPr>
+        <p:txBody>
+          <a:bodyPr wrap="square" lIns="0" tIns="0" rIns="0" bIns="0" rtlCol="0" anchor="ctr"/>
+          <a:lstStyle/>
+          <a:p>
+            <a:pPr indent="0" marL="0">
+              <a:buNone/>
+            </a:pPr>
+            <a:r>
+              <a:rPr lang="en-US" sz="900" dirty="0">
+                <a:solidFill>
+                  <a:srgbClr val="D4A017"/>
+                </a:solidFill>
+              </a:rPr>
+              <a:t>▶</a:t>
+            </a:r>
+            <a:endParaRPr lang="en-US" sz="900" dirty="0"/>
+          </a:p>
+        </p:txBody>
+      </p:sp>
+      <p:sp>
+        <p:nvSpPr>
+          <p:cNvPr id="129" name="Shape 124"/>
+          <p:cNvSpPr/>
+          <p:nvPr/>
+        </p:nvSpPr>
+        <p:spPr>
+          <a:xfrm>
+            <a:off x="1847088" y="4425696"/>
+            <a:ext cx="1517904" cy="365760"/>
+          </a:xfrm>
+          <a:prstGeom prst="rect">
+            <a:avLst/>
+          </a:prstGeom>
+          <a:solidFill>
+            <a:srgbClr val="FFFDE7"/>
+          </a:solidFill>
+          <a:ln w="12700">
+            <a:solidFill>
+              <a:srgbClr val="D4A017"/>
+            </a:solidFill>
+            <a:prstDash val="solid"/>
+          </a:ln>
+        </p:spPr>
+      </p:sp>
+      <p:sp>
+        <p:nvSpPr>
+          <p:cNvPr id="130" name="Text 125"/>
+          <p:cNvSpPr/>
+          <p:nvPr/>
+        </p:nvSpPr>
+        <p:spPr>
+          <a:xfrm>
+            <a:off x="1874520" y="4425696"/>
+            <a:ext cx="1463040" cy="365760"/>
+          </a:xfrm>
+          <a:prstGeom prst="rect">
+            <a:avLst/>
+          </a:prstGeom>
+          <a:noFill/>
+          <a:ln/>
+        </p:spPr>
+        <p:txBody>
+          <a:bodyPr wrap="square" lIns="0" tIns="0" rIns="0" bIns="0" rtlCol="0" anchor="ctr"/>
+          <a:lstStyle/>
+          <a:p>
+            <a:pPr algn="ctr" indent="0" marL="0">
+              <a:buNone/>
+            </a:pPr>
+            <a:r>
+              <a:rPr lang="en-US" sz="650" dirty="0">
+                <a:solidFill>
+                  <a:srgbClr val="D4A017"/>
+                </a:solidFill>
+                <a:latin typeface="Meiryo" pitchFamily="34" charset="0"/>
+                <a:ea typeface="Meiryo" pitchFamily="34" charset="-122"/>
+                <a:cs typeface="Meiryo" pitchFamily="34" charset="-120"/>
+              </a:rPr>
+              <a:t>Aurora MySQL</a:t>
+            </a:r>
+            <a:endParaRPr lang="en-US" sz="650" dirty="0"/>
+          </a:p>
+          <a:p>
+            <a:pPr algn="ctr" indent="0" marL="0">
+              <a:buNone/>
+            </a:pPr>
+            <a:r>
+              <a:rPr lang="en-US" sz="650" dirty="0">
+                <a:solidFill>
+                  <a:srgbClr val="D4A017"/>
+                </a:solidFill>
+                <a:latin typeface="Meiryo" pitchFamily="34" charset="0"/>
+                <a:ea typeface="Meiryo" pitchFamily="34" charset="-122"/>
+                <a:cs typeface="Meiryo" pitchFamily="34" charset="-120"/>
+              </a:rPr>
+              <a:t>取引データ取得</a:t>
+            </a:r>
+            <a:endParaRPr lang="en-US" sz="650" dirty="0"/>
+          </a:p>
+          <a:p>
+            <a:pPr algn="ctr" indent="0" marL="0">
+              <a:buNone/>
+            </a:pPr>
+            <a:r>
+              <a:rPr lang="en-US" sz="650" dirty="0">
+                <a:solidFill>
+                  <a:srgbClr val="D4A017"/>
+                </a:solidFill>
+                <a:latin typeface="Meiryo" pitchFamily="34" charset="0"/>
+                <a:ea typeface="Meiryo" pitchFamily="34" charset="-122"/>
+                <a:cs typeface="Meiryo" pitchFamily="34" charset="-120"/>
+              </a:rPr>
+              <a:t>(settlement_history)</a:t>
+            </a:r>
+            <a:endParaRPr lang="en-US" sz="650" dirty="0"/>
+          </a:p>
+        </p:txBody>
+      </p:sp>
+      <p:sp>
+        <p:nvSpPr>
+          <p:cNvPr id="131" name="Shape 126"/>
+          <p:cNvSpPr/>
+          <p:nvPr/>
+        </p:nvSpPr>
+        <p:spPr>
+          <a:xfrm>
+            <a:off x="3364992" y="4608576"/>
+            <a:ext cx="0" cy="0"/>
+          </a:xfrm>
+          <a:prstGeom prst="line">
+            <a:avLst/>
+          </a:prstGeom>
+          <a:noFill/>
+          <a:ln w="19050">
+            <a:solidFill>
+              <a:srgbClr val="D4A017"/>
+            </a:solidFill>
+            <a:prstDash val="solid"/>
+          </a:ln>
+        </p:spPr>
+      </p:sp>
+      <p:sp>
+        <p:nvSpPr>
+          <p:cNvPr id="132" name="Text 127"/>
+          <p:cNvSpPr/>
+          <p:nvPr/>
+        </p:nvSpPr>
+        <p:spPr>
+          <a:xfrm>
+            <a:off x="3328416" y="4507992"/>
+            <a:ext cx="164592" cy="182880"/>
+          </a:xfrm>
+          <a:prstGeom prst="rect">
+            <a:avLst/>
+          </a:prstGeom>
+          <a:noFill/>
+          <a:ln/>
+        </p:spPr>
+        <p:txBody>
+          <a:bodyPr wrap="square" lIns="0" tIns="0" rIns="0" bIns="0" rtlCol="0" anchor="ctr"/>
+          <a:lstStyle/>
+          <a:p>
+            <a:pPr indent="0" marL="0">
+              <a:buNone/>
+            </a:pPr>
+            <a:r>
+              <a:rPr lang="en-US" sz="900" dirty="0">
+                <a:solidFill>
+                  <a:srgbClr val="D4A017"/>
+                </a:solidFill>
+              </a:rPr>
+              <a:t>▶</a:t>
+            </a:r>
+            <a:endParaRPr lang="en-US" sz="900" dirty="0"/>
+          </a:p>
+        </p:txBody>
+      </p:sp>
+      <p:sp>
+        <p:nvSpPr>
+          <p:cNvPr id="133" name="Shape 128"/>
+          <p:cNvSpPr/>
+          <p:nvPr/>
+        </p:nvSpPr>
+        <p:spPr>
+          <a:xfrm>
+            <a:off x="3493008" y="4425696"/>
+            <a:ext cx="1517904" cy="365760"/>
+          </a:xfrm>
+          <a:prstGeom prst="rect">
+            <a:avLst/>
+          </a:prstGeom>
+          <a:solidFill>
+            <a:srgbClr val="FFFDE7"/>
+          </a:solidFill>
+          <a:ln w="12700">
+            <a:solidFill>
+              <a:srgbClr val="D4A017"/>
+            </a:solidFill>
+            <a:prstDash val="solid"/>
+          </a:ln>
+        </p:spPr>
+      </p:sp>
+      <p:sp>
+        <p:nvSpPr>
+          <p:cNvPr id="134" name="Text 129"/>
+          <p:cNvSpPr/>
+          <p:nvPr/>
+        </p:nvSpPr>
+        <p:spPr>
+          <a:xfrm>
+            <a:off x="3520440" y="4425696"/>
+            <a:ext cx="1463040" cy="365760"/>
+          </a:xfrm>
+          <a:prstGeom prst="rect">
+            <a:avLst/>
+          </a:prstGeom>
+          <a:noFill/>
+          <a:ln/>
+        </p:spPr>
+        <p:txBody>
+          <a:bodyPr wrap="square" lIns="0" tIns="0" rIns="0" bIns="0" rtlCol="0" anchor="ctr"/>
+          <a:lstStyle/>
+          <a:p>
+            <a:pPr algn="ctr" indent="0" marL="0">
+              <a:buNone/>
+            </a:pPr>
+            <a:r>
+              <a:rPr lang="en-US" sz="650" dirty="0">
+                <a:solidFill>
+                  <a:srgbClr val="D4A017"/>
+                </a:solidFill>
+                <a:latin typeface="Meiryo" pitchFamily="34" charset="0"/>
+                <a:ea typeface="Meiryo" pitchFamily="34" charset="-122"/>
+                <a:cs typeface="Meiryo" pitchFamily="34" charset="-120"/>
+              </a:rPr>
+              <a:t>EBCDICファイル</a:t>
+            </a:r>
+            <a:endParaRPr lang="en-US" sz="650" dirty="0"/>
+          </a:p>
+          <a:p>
+            <a:pPr algn="ctr" indent="0" marL="0">
+              <a:buNone/>
+            </a:pPr>
+            <a:r>
+              <a:rPr lang="en-US" sz="650" dirty="0">
+                <a:solidFill>
+                  <a:srgbClr val="D4A017"/>
+                </a:solidFill>
+                <a:latin typeface="Meiryo" pitchFamily="34" charset="0"/>
+                <a:ea typeface="Meiryo" pitchFamily="34" charset="-122"/>
+                <a:cs typeface="Meiryo" pitchFamily="34" charset="-120"/>
+              </a:rPr>
+              <a:t>生成(/tmp)</a:t>
+            </a:r>
+            <a:endParaRPr lang="en-US" sz="650" dirty="0"/>
+          </a:p>
+          <a:p>
+            <a:pPr algn="ctr" indent="0" marL="0">
+              <a:buNone/>
+            </a:pPr>
+            <a:r>
+              <a:rPr lang="en-US" sz="650" dirty="0">
+                <a:solidFill>
+                  <a:srgbClr val="D4A017"/>
+                </a:solidFill>
+                <a:latin typeface="Meiryo" pitchFamily="34" charset="0"/>
+                <a:ea typeface="Meiryo" pitchFamily="34" charset="-122"/>
+                <a:cs typeface="Meiryo" pitchFamily="34" charset="-120"/>
+              </a:rPr>
+              <a:t>6301900000_*</a:t>
+            </a:r>
+            <a:endParaRPr lang="en-US" sz="650" dirty="0"/>
+          </a:p>
+        </p:txBody>
+      </p:sp>
+      <p:sp>
+        <p:nvSpPr>
+          <p:cNvPr id="135" name="Shape 130"/>
+          <p:cNvSpPr/>
+          <p:nvPr/>
+        </p:nvSpPr>
+        <p:spPr>
+          <a:xfrm>
+            <a:off x="5010912" y="4608576"/>
+            <a:ext cx="0" cy="0"/>
+          </a:xfrm>
+          <a:prstGeom prst="line">
+            <a:avLst/>
+          </a:prstGeom>
+          <a:noFill/>
+          <a:ln w="19050">
+            <a:solidFill>
+              <a:srgbClr val="D4A017"/>
+            </a:solidFill>
+            <a:prstDash val="solid"/>
+          </a:ln>
+        </p:spPr>
+      </p:sp>
+      <p:sp>
+        <p:nvSpPr>
+          <p:cNvPr id="136" name="Text 131"/>
+          <p:cNvSpPr/>
+          <p:nvPr/>
+        </p:nvSpPr>
+        <p:spPr>
+          <a:xfrm>
+            <a:off x="4974336" y="4507992"/>
+            <a:ext cx="164592" cy="182880"/>
+          </a:xfrm>
+          <a:prstGeom prst="rect">
+            <a:avLst/>
+          </a:prstGeom>
+          <a:noFill/>
+          <a:ln/>
+        </p:spPr>
+        <p:txBody>
+          <a:bodyPr wrap="square" lIns="0" tIns="0" rIns="0" bIns="0" rtlCol="0" anchor="ctr"/>
+          <a:lstStyle/>
+          <a:p>
+            <a:pPr indent="0" marL="0">
+              <a:buNone/>
+            </a:pPr>
+            <a:r>
+              <a:rPr lang="en-US" sz="900" dirty="0">
+                <a:solidFill>
+                  <a:srgbClr val="D4A017"/>
+                </a:solidFill>
+              </a:rPr>
+              <a:t>▶</a:t>
+            </a:r>
+            <a:endParaRPr lang="en-US" sz="900" dirty="0"/>
+          </a:p>
+        </p:txBody>
+      </p:sp>
+      <p:sp>
+        <p:nvSpPr>
+          <p:cNvPr id="137" name="Shape 132"/>
+          <p:cNvSpPr/>
+          <p:nvPr/>
+        </p:nvSpPr>
+        <p:spPr>
+          <a:xfrm>
+            <a:off x="5138928" y="4425696"/>
+            <a:ext cx="1517904" cy="365760"/>
+          </a:xfrm>
+          <a:prstGeom prst="rect">
+            <a:avLst/>
+          </a:prstGeom>
+          <a:solidFill>
+            <a:srgbClr val="FFFDE7"/>
+          </a:solidFill>
+          <a:ln w="12700">
+            <a:solidFill>
+              <a:srgbClr val="D4A017"/>
+            </a:solidFill>
+            <a:prstDash val="solid"/>
+          </a:ln>
+        </p:spPr>
+      </p:sp>
+      <p:sp>
+        <p:nvSpPr>
+          <p:cNvPr id="138" name="Text 133"/>
+          <p:cNvSpPr/>
+          <p:nvPr/>
+        </p:nvSpPr>
+        <p:spPr>
+          <a:xfrm>
+            <a:off x="5166360" y="4425696"/>
+            <a:ext cx="1463040" cy="365760"/>
+          </a:xfrm>
+          <a:prstGeom prst="rect">
+            <a:avLst/>
+          </a:prstGeom>
+          <a:noFill/>
+          <a:ln/>
+        </p:spPr>
+        <p:txBody>
+          <a:bodyPr wrap="square" lIns="0" tIns="0" rIns="0" bIns="0" rtlCol="0" anchor="ctr"/>
+          <a:lstStyle/>
+          <a:p>
+            <a:pPr algn="ctr" indent="0" marL="0">
+              <a:buNone/>
+            </a:pPr>
+            <a:r>
+              <a:rPr lang="en-US" sz="650" dirty="0">
+                <a:solidFill>
+                  <a:srgbClr val="D4A017"/>
+                </a:solidFill>
+                <a:latin typeface="Meiryo" pitchFamily="34" charset="0"/>
+                <a:ea typeface="Meiryo" pitchFamily="34" charset="-122"/>
+                <a:cs typeface="Meiryo" pitchFamily="34" charset="-120"/>
+              </a:rPr>
+              <a:t>SftpService</a:t>
+            </a:r>
+            <a:endParaRPr lang="en-US" sz="650" dirty="0"/>
+          </a:p>
+          <a:p>
+            <a:pPr algn="ctr" indent="0" marL="0">
+              <a:buNone/>
+            </a:pPr>
+            <a:r>
+              <a:rPr lang="en-US" sz="650" dirty="0">
+                <a:solidFill>
+                  <a:srgbClr val="D4A017"/>
+                </a:solidFill>
+                <a:latin typeface="Meiryo" pitchFamily="34" charset="0"/>
+                <a:ea typeface="Meiryo" pitchFamily="34" charset="-122"/>
+                <a:cs typeface="Meiryo" pitchFamily="34" charset="-120"/>
+              </a:rPr>
+              <a:t>(JSch / SSH鍵認証)</a:t>
+            </a:r>
+            <a:endParaRPr lang="en-US" sz="650" dirty="0"/>
+          </a:p>
+          <a:p>
+            <a:pPr algn="ctr" indent="0" marL="0">
+              <a:buNone/>
+            </a:pPr>
+            <a:r>
+              <a:rPr lang="en-US" sz="650" dirty="0">
+                <a:solidFill>
+                  <a:srgbClr val="D4A017"/>
+                </a:solidFill>
+                <a:latin typeface="Meiryo" pitchFamily="34" charset="0"/>
+                <a:ea typeface="Meiryo" pitchFamily="34" charset="-122"/>
+                <a:cs typeface="Meiryo" pitchFamily="34" charset="-120"/>
+              </a:rPr>
+              <a:t>NAT GW経由</a:t>
+            </a:r>
+            <a:endParaRPr lang="en-US" sz="650" dirty="0"/>
+          </a:p>
+        </p:txBody>
+      </p:sp>
+      <p:sp>
+        <p:nvSpPr>
+          <p:cNvPr id="139" name="Shape 134"/>
+          <p:cNvSpPr/>
+          <p:nvPr/>
+        </p:nvSpPr>
+        <p:spPr>
+          <a:xfrm>
+            <a:off x="6656832" y="4608576"/>
+            <a:ext cx="0" cy="0"/>
+          </a:xfrm>
+          <a:prstGeom prst="line">
+            <a:avLst/>
+          </a:prstGeom>
+          <a:noFill/>
+          <a:ln w="19050">
+            <a:solidFill>
+              <a:srgbClr val="C8102E"/>
+            </a:solidFill>
+            <a:prstDash val="solid"/>
+          </a:ln>
+        </p:spPr>
+      </p:sp>
+      <p:sp>
+        <p:nvSpPr>
+          <p:cNvPr id="140" name="Text 135"/>
+          <p:cNvSpPr/>
+          <p:nvPr/>
+        </p:nvSpPr>
+        <p:spPr>
+          <a:xfrm>
+            <a:off x="6620256" y="4507992"/>
+            <a:ext cx="164592" cy="182880"/>
+          </a:xfrm>
+          <a:prstGeom prst="rect">
+            <a:avLst/>
+          </a:prstGeom>
+          <a:noFill/>
+          <a:ln/>
+        </p:spPr>
+        <p:txBody>
+          <a:bodyPr wrap="square" lIns="0" tIns="0" rIns="0" bIns="0" rtlCol="0" anchor="ctr"/>
+          <a:lstStyle/>
+          <a:p>
+            <a:pPr indent="0" marL="0">
+              <a:buNone/>
+            </a:pPr>
+            <a:r>
+              <a:rPr lang="en-US" sz="900" dirty="0">
+                <a:solidFill>
+                  <a:srgbClr val="C8102E"/>
+                </a:solidFill>
+              </a:rPr>
+              <a:t>▶</a:t>
+            </a:r>
+            <a:endParaRPr lang="en-US" sz="900" dirty="0"/>
+          </a:p>
+        </p:txBody>
+      </p:sp>
+      <p:sp>
+        <p:nvSpPr>
+          <p:cNvPr id="141" name="Shape 136"/>
+          <p:cNvSpPr/>
+          <p:nvPr/>
+        </p:nvSpPr>
+        <p:spPr>
+          <a:xfrm>
+            <a:off x="6784848" y="4425696"/>
+            <a:ext cx="1517904" cy="365760"/>
+          </a:xfrm>
+          <a:prstGeom prst="rect">
+            <a:avLst/>
+          </a:prstGeom>
+          <a:solidFill>
+            <a:srgbClr val="FFF3E0"/>
+          </a:solidFill>
+          <a:ln w="12700">
+            <a:solidFill>
+              <a:srgbClr val="C8102E"/>
+            </a:solidFill>
+            <a:prstDash val="solid"/>
+          </a:ln>
+        </p:spPr>
+      </p:sp>
+      <p:sp>
+        <p:nvSpPr>
+          <p:cNvPr id="142" name="Text 137"/>
+          <p:cNvSpPr/>
+          <p:nvPr/>
+        </p:nvSpPr>
+        <p:spPr>
+          <a:xfrm>
+            <a:off x="6812280" y="4425696"/>
+            <a:ext cx="1463040" cy="365760"/>
+          </a:xfrm>
+          <a:prstGeom prst="rect">
+            <a:avLst/>
+          </a:prstGeom>
+          <a:noFill/>
+          <a:ln/>
+        </p:spPr>
+        <p:txBody>
+          <a:bodyPr wrap="square" lIns="0" tIns="0" rIns="0" bIns="0" rtlCol="0" anchor="ctr"/>
+          <a:lstStyle/>
+          <a:p>
+            <a:pPr algn="ctr" indent="0" marL="0">
+              <a:buNone/>
+            </a:pPr>
+            <a:r>
+              <a:rPr lang="en-US" sz="650" dirty="0">
+                <a:solidFill>
+                  <a:srgbClr val="C8102E"/>
+                </a:solidFill>
+                <a:latin typeface="Meiryo" pitchFamily="34" charset="0"/>
+                <a:ea typeface="Meiryo" pitchFamily="34" charset="-122"/>
+                <a:cs typeface="Meiryo" pitchFamily="34" charset="-120"/>
+              </a:rPr>
+              <a:t>インターネット</a:t>
+            </a:r>
+            <a:endParaRPr lang="en-US" sz="650" dirty="0"/>
+          </a:p>
+          <a:p>
+            <a:pPr algn="ctr" indent="0" marL="0">
+              <a:buNone/>
+            </a:pPr>
+            <a:r>
+              <a:rPr lang="en-US" sz="650" dirty="0">
+                <a:solidFill>
+                  <a:srgbClr val="C8102E"/>
+                </a:solidFill>
+                <a:latin typeface="Meiryo" pitchFamily="34" charset="0"/>
+                <a:ea typeface="Meiryo" pitchFamily="34" charset="-122"/>
+                <a:cs typeface="Meiryo" pitchFamily="34" charset="-120"/>
+              </a:rPr>
+              <a:t>(NAT GW</a:t>
+            </a:r>
+            <a:endParaRPr lang="en-US" sz="650" dirty="0"/>
+          </a:p>
+          <a:p>
+            <a:pPr algn="ctr" indent="0" marL="0">
+              <a:buNone/>
+            </a:pPr>
+            <a:r>
+              <a:rPr lang="en-US" sz="650" dirty="0">
+                <a:solidFill>
+                  <a:srgbClr val="C8102E"/>
+                </a:solidFill>
+                <a:latin typeface="Meiryo" pitchFamily="34" charset="0"/>
+                <a:ea typeface="Meiryo" pitchFamily="34" charset="-122"/>
+                <a:cs typeface="Meiryo" pitchFamily="34" charset="-120"/>
+              </a:rPr>
+              <a:t>57.182.174.110)</a:t>
+            </a:r>
+            <a:endParaRPr lang="en-US" sz="650" dirty="0"/>
+          </a:p>
+        </p:txBody>
+      </p:sp>
+      <p:sp>
+        <p:nvSpPr>
+          <p:cNvPr id="143" name="Shape 138"/>
+          <p:cNvSpPr/>
+          <p:nvPr/>
+        </p:nvSpPr>
+        <p:spPr>
+          <a:xfrm>
+            <a:off x="8302752" y="4608576"/>
+            <a:ext cx="0" cy="0"/>
+          </a:xfrm>
+          <a:prstGeom prst="line">
+            <a:avLst/>
+          </a:prstGeom>
+          <a:noFill/>
+          <a:ln w="19050">
+            <a:solidFill>
+              <a:srgbClr val="C8102E"/>
+            </a:solidFill>
+            <a:prstDash val="solid"/>
+          </a:ln>
+        </p:spPr>
+      </p:sp>
+      <p:sp>
+        <p:nvSpPr>
+          <p:cNvPr id="144" name="Text 139"/>
+          <p:cNvSpPr/>
+          <p:nvPr/>
+        </p:nvSpPr>
+        <p:spPr>
+          <a:xfrm>
+            <a:off x="8266176" y="4507992"/>
+            <a:ext cx="164592" cy="182880"/>
+          </a:xfrm>
+          <a:prstGeom prst="rect">
+            <a:avLst/>
+          </a:prstGeom>
+          <a:noFill/>
+          <a:ln/>
+        </p:spPr>
+        <p:txBody>
+          <a:bodyPr wrap="square" lIns="0" tIns="0" rIns="0" bIns="0" rtlCol="0" anchor="ctr"/>
+          <a:lstStyle/>
+          <a:p>
+            <a:pPr indent="0" marL="0">
+              <a:buNone/>
+            </a:pPr>
+            <a:r>
+              <a:rPr lang="en-US" sz="900" dirty="0">
+                <a:solidFill>
+                  <a:srgbClr val="C8102E"/>
+                </a:solidFill>
+              </a:rPr>
+              <a:t>▶</a:t>
+            </a:r>
+            <a:endParaRPr lang="en-US" sz="900" dirty="0"/>
+          </a:p>
+        </p:txBody>
+      </p:sp>
+      <p:sp>
+        <p:nvSpPr>
+          <p:cNvPr id="145" name="Shape 140"/>
+          <p:cNvSpPr/>
+          <p:nvPr/>
+        </p:nvSpPr>
+        <p:spPr>
+          <a:xfrm>
+            <a:off x="8430768" y="4425696"/>
+            <a:ext cx="1243584" cy="365760"/>
+          </a:xfrm>
+          <a:prstGeom prst="rect">
+            <a:avLst/>
+          </a:prstGeom>
+          <a:solidFill>
+            <a:srgbClr val="FCE4EC"/>
+          </a:solidFill>
+          <a:ln w="12700">
+            <a:solidFill>
+              <a:srgbClr val="C8102E"/>
+            </a:solidFill>
+            <a:prstDash val="solid"/>
+          </a:ln>
+        </p:spPr>
+      </p:sp>
+      <p:sp>
+        <p:nvSpPr>
+          <p:cNvPr id="146" name="Text 141"/>
+          <p:cNvSpPr/>
+          <p:nvPr/>
+        </p:nvSpPr>
+        <p:spPr>
+          <a:xfrm>
+            <a:off x="8458200" y="4425696"/>
+            <a:ext cx="1188720" cy="365760"/>
+          </a:xfrm>
+          <a:prstGeom prst="rect">
+            <a:avLst/>
+          </a:prstGeom>
+          <a:noFill/>
+          <a:ln/>
+        </p:spPr>
+        <p:txBody>
+          <a:bodyPr wrap="square" lIns="0" tIns="0" rIns="0" bIns="0" rtlCol="0" anchor="ctr"/>
+          <a:lstStyle/>
+          <a:p>
+            <a:pPr algn="ctr" indent="0" marL="0">
+              <a:buNone/>
+            </a:pPr>
+            <a:r>
+              <a:rPr lang="en-US" sz="650" dirty="0">
+                <a:solidFill>
+                  <a:srgbClr val="C8102E"/>
+                </a:solidFill>
+                <a:latin typeface="Meiryo" pitchFamily="34" charset="0"/>
+                <a:ea typeface="Meiryo" pitchFamily="34" charset="-122"/>
+                <a:cs typeface="Meiryo" pitchFamily="34" charset="-120"/>
+              </a:rPr>
+              <a:t>NTT DATA CDS</a:t>
+            </a:r>
+            <a:endParaRPr lang="en-US" sz="650" dirty="0"/>
+          </a:p>
+          <a:p>
+            <a:pPr algn="ctr" indent="0" marL="0">
+              <a:buNone/>
+            </a:pPr>
+            <a:r>
+              <a:rPr lang="en-US" sz="650" dirty="0">
+                <a:solidFill>
+                  <a:srgbClr val="C8102E"/>
+                </a:solidFill>
+                <a:latin typeface="Meiryo" pitchFamily="34" charset="0"/>
+                <a:ea typeface="Meiryo" pitchFamily="34" charset="-122"/>
+                <a:cs typeface="Meiryo" pitchFamily="34" charset="-120"/>
+              </a:rPr>
+              <a:t>210.144.93.17</a:t>
+            </a:r>
+            <a:endParaRPr lang="en-US" sz="650" dirty="0"/>
+          </a:p>
+          <a:p>
+            <a:pPr algn="ctr" indent="0" marL="0">
+              <a:buNone/>
+            </a:pPr>
+            <a:r>
+              <a:rPr lang="en-US" sz="650" dirty="0">
+                <a:solidFill>
+                  <a:srgbClr val="C8102E"/>
+                </a:solidFill>
+                <a:latin typeface="Meiryo" pitchFamily="34" charset="0"/>
+                <a:ea typeface="Meiryo" pitchFamily="34" charset="-122"/>
+                <a:cs typeface="Meiryo" pitchFamily="34" charset="-120"/>
+              </a:rPr>
+              <a:t>TCP 22 (SFTP)</a:t>
+            </a:r>
+            <a:endParaRPr lang="en-US" sz="650" dirty="0"/>
+          </a:p>
+        </p:txBody>
+      </p:sp>
+      <p:sp>
+        <p:nvSpPr>
+          <p:cNvPr id="147" name="Shape 142"/>
+          <p:cNvSpPr/>
+          <p:nvPr/>
+        </p:nvSpPr>
+        <p:spPr>
+          <a:xfrm>
+            <a:off x="182880" y="4901184"/>
+            <a:ext cx="9509760" cy="237744"/>
           </a:xfrm>
           <a:prstGeom prst="rect">
             <a:avLst/>
@@ -18943,14 +20198,14 @@
       </p:sp>
       <p:sp>
         <p:nvSpPr>
-          <p:cNvPr id="122" name="Text 117"/>
-          <p:cNvSpPr/>
-          <p:nvPr/>
-        </p:nvSpPr>
-        <p:spPr>
-          <a:xfrm>
-            <a:off x="237744" y="4626864"/>
-            <a:ext cx="9400032" cy="274320"/>
+          <p:cNvPr id="148" name="Text 143"/>
+          <p:cNvSpPr/>
+          <p:nvPr/>
+        </p:nvSpPr>
+        <p:spPr>
+          <a:xfrm>
+            <a:off x="237744" y="4901184"/>
+            <a:ext cx="9400032" cy="237744"/>
           </a:xfrm>
           <a:prstGeom prst="rect">
             <a:avLst/>
@@ -18966,7 +20221,7 @@
               <a:buNone/>
             </a:pPr>
             <a:r>
-              <a:rPr lang="en-US" sz="750" dirty="0">
+              <a:rPr lang="en-US" sz="700" dirty="0">
                 <a:solidFill>
                   <a:srgbClr val="B07020"/>
                 </a:solidFill>
@@ -18976,20 +20231,20 @@
               </a:rPr>
               <a:t>⚠️ sent-txt-file Lambda は平文FTP（Apache Commons Net）を使用。VPN内通信のため実害は低いが、将来的なFTPS化を推奨。</a:t>
             </a:r>
-            <a:endParaRPr lang="en-US" sz="750" dirty="0"/>
-          </a:p>
-        </p:txBody>
-      </p:sp>
-      <p:sp>
-        <p:nvSpPr>
-          <p:cNvPr id="123" name="Shape 118"/>
-          <p:cNvSpPr/>
-          <p:nvPr/>
-        </p:nvSpPr>
-        <p:spPr>
-          <a:xfrm>
-            <a:off x="182880" y="4937760"/>
-            <a:ext cx="9509760" cy="256032"/>
+            <a:endParaRPr lang="en-US" sz="700" dirty="0"/>
+          </a:p>
+        </p:txBody>
+      </p:sp>
+      <p:sp>
+        <p:nvSpPr>
+          <p:cNvPr id="149" name="Shape 144"/>
+          <p:cNvSpPr/>
+          <p:nvPr/>
+        </p:nvSpPr>
+        <p:spPr>
+          <a:xfrm>
+            <a:off x="182880" y="5175504"/>
+            <a:ext cx="9509760" cy="237744"/>
           </a:xfrm>
           <a:prstGeom prst="rect">
             <a:avLst/>
@@ -19007,14 +20262,14 @@
       </p:sp>
       <p:sp>
         <p:nvSpPr>
-          <p:cNvPr id="124" name="Text 119"/>
-          <p:cNvSpPr/>
-          <p:nvPr/>
-        </p:nvSpPr>
-        <p:spPr>
-          <a:xfrm>
-            <a:off x="237744" y="4937760"/>
-            <a:ext cx="9400032" cy="256032"/>
+          <p:cNvPr id="150" name="Text 145"/>
+          <p:cNvSpPr/>
+          <p:nvPr/>
+        </p:nvSpPr>
+        <p:spPr>
+          <a:xfrm>
+            <a:off x="237744" y="5175504"/>
+            <a:ext cx="9400032" cy="237744"/>
           </a:xfrm>
           <a:prstGeom prst="rect">
             <a:avLst/>
@@ -19030,7 +20285,7 @@
               <a:buNone/>
             </a:pPr>
             <a:r>
-              <a:rPr lang="en-US" sz="750" dirty="0">
+              <a:rPr lang="en-US" sz="700" dirty="0">
                 <a:solidFill>
                   <a:srgbClr val="228844"/>
                 </a:solidFill>
@@ -19040,20 +20295,84 @@
               </a:rPr>
               <a:t>✅ SG受信フロー: VINX→SFTP PUT→tf-server-sg→S3→EB→SF(import) → S3(.ENDEXPORT) → EB → SF(create-txt) → Lambda FTP送信</a:t>
             </a:r>
-            <a:endParaRPr lang="en-US" sz="750" dirty="0"/>
-          </a:p>
-        </p:txBody>
-      </p:sp>
-      <p:sp>
-        <p:nvSpPr>
-          <p:cNvPr id="125" name="Shape 120"/>
-          <p:cNvSpPr/>
-          <p:nvPr/>
-        </p:nvSpPr>
-        <p:spPr>
-          <a:xfrm>
-            <a:off x="182880" y="5230368"/>
-            <a:ext cx="9509760" cy="256032"/>
+            <a:endParaRPr lang="en-US" sz="700" dirty="0"/>
+          </a:p>
+        </p:txBody>
+      </p:sp>
+      <p:sp>
+        <p:nvSpPr>
+          <p:cNvPr id="151" name="Shape 146"/>
+          <p:cNvSpPr/>
+          <p:nvPr/>
+        </p:nvSpPr>
+        <p:spPr>
+          <a:xfrm>
+            <a:off x="182880" y="5449824"/>
+            <a:ext cx="9509760" cy="237744"/>
+          </a:xfrm>
+          <a:prstGeom prst="rect">
+            <a:avLst/>
+          </a:prstGeom>
+          <a:solidFill>
+            <a:srgbClr val="FFFDE7"/>
+          </a:solidFill>
+          <a:ln w="6350">
+            <a:solidFill>
+              <a:srgbClr val="D4A017"/>
+            </a:solidFill>
+            <a:prstDash val="solid"/>
+          </a:ln>
+        </p:spPr>
+      </p:sp>
+      <p:sp>
+        <p:nvSpPr>
+          <p:cNvPr id="152" name="Text 147"/>
+          <p:cNvSpPr/>
+          <p:nvPr/>
+        </p:nvSpPr>
+        <p:spPr>
+          <a:xfrm>
+            <a:off x="237744" y="5449824"/>
+            <a:ext cx="9400032" cy="237744"/>
+          </a:xfrm>
+          <a:prstGeom prst="rect">
+            <a:avLst/>
+          </a:prstGeom>
+          <a:noFill/>
+          <a:ln/>
+        </p:spPr>
+        <p:txBody>
+          <a:bodyPr wrap="square" lIns="0" tIns="0" rIns="0" bIns="0" rtlCol="0" anchor="ctr"/>
+          <a:lstStyle/>
+          <a:p>
+            <a:pPr indent="0" marL="0">
+              <a:buNone/>
+            </a:pPr>
+            <a:r>
+              <a:rPr lang="en-US" sz="700" dirty="0">
+                <a:solidFill>
+                  <a:srgbClr val="D4A017"/>
+                </a:solidFill>
+                <a:latin typeface="Meiryo" pitchFamily="34" charset="0"/>
+                <a:ea typeface="Meiryo" pitchFamily="34" charset="-122"/>
+                <a:cs typeface="Meiryo" pitchFamily="34" charset="-120"/>
+              </a:rPr>
+              <a:t>🎁 ギフト決済フロー: EC2 giftcard cron(09:00) → Aurora MySQL(取引データ) → EBCDICファイル生成 → JSch SFTP(SSH鍵) → NTT DATA CDS(210.144.93.17:22) ※インターネット経由</a:t>
+            </a:r>
+            <a:endParaRPr lang="en-US" sz="700" dirty="0"/>
+          </a:p>
+        </p:txBody>
+      </p:sp>
+      <p:sp>
+        <p:nvSpPr>
+          <p:cNvPr id="153" name="Shape 148"/>
+          <p:cNvSpPr/>
+          <p:nvPr/>
+        </p:nvSpPr>
+        <p:spPr>
+          <a:xfrm>
+            <a:off x="182880" y="5724144"/>
+            <a:ext cx="9509760" cy="237744"/>
           </a:xfrm>
           <a:prstGeom prst="rect">
             <a:avLst/>
@@ -19071,14 +20390,14 @@
       </p:sp>
       <p:sp>
         <p:nvSpPr>
-          <p:cNvPr id="126" name="Text 121"/>
-          <p:cNvSpPr/>
-          <p:nvPr/>
-        </p:nvSpPr>
-        <p:spPr>
-          <a:xfrm>
-            <a:off x="237744" y="5230368"/>
-            <a:ext cx="9400032" cy="256032"/>
+          <p:cNvPr id="154" name="Text 149"/>
+          <p:cNvSpPr/>
+          <p:nvPr/>
+        </p:nvSpPr>
+        <p:spPr>
+          <a:xfrm>
+            <a:off x="237744" y="5724144"/>
+            <a:ext cx="9400032" cy="237744"/>
           </a:xfrm>
           <a:prstGeom prst="rect">
             <a:avLst/>
@@ -19094,7 +20413,7 @@
               <a:buNone/>
             </a:pPr>
             <a:r>
-              <a:rPr lang="en-US" sz="750" dirty="0">
+              <a:rPr lang="en-US" sz="700" dirty="0">
                 <a:solidFill>
                   <a:srgbClr val="9966BB"/>
                 </a:solidFill>
@@ -19104,7 +20423,7 @@
               </a:rPr>
               <a:t>🌙 夜間バッチ: EventBridge cron(05:30) → Lambda(create-file-end-for-night) → DB(store_list取得) → 各店舗分.ENDEXPORTをS3に生成 → 送信フローに合流</a:t>
             </a:r>
-            <a:endParaRPr lang="en-US" sz="750" dirty="0"/>
+            <a:endParaRPr lang="en-US" sz="700" dirty="0"/>
           </a:p>
         </p:txBody>
       </p:sp>
@@ -19304,7 +20623,7 @@
                 <a:ea typeface="Meiryo" pitchFamily="34" charset="-122"/>
                 <a:cs typeface="Meiryo" pitchFamily="34" charset="-120"/>
               </a:rPr>
-              <a:t>06 対応ロードマップ / Lộ trình ứng phó</a:t>
+              <a:t>06  本番環境・検証環境 差異一覧</a:t>
             </a:r>
             <a:endParaRPr lang="en-US" sz="1800" dirty="0"/>
           </a:p>
@@ -19343,7 +20662,7 @@
                 <a:ea typeface="Meiryo" pitchFamily="34" charset="-122"/>
                 <a:cs typeface="Meiryo" pitchFamily="34" charset="-120"/>
               </a:rPr>
-              <a:t>2026年3月〜4月 / Tháng 3〜4 năm 2026</a:t>
+              <a:t>Danh sách sự khác biệt PRD / STG  |  AWSアカウント: PRD=332802448674 / STG=750735758916</a:t>
             </a:r>
             <a:endParaRPr lang="en-US" sz="1100" dirty="0"/>
           </a:p>
@@ -19400,6 +20719,5227 @@
                 </a:solidFill>
               </a:rPr>
               <a:t>8</a:t>
+            </a:r>
+            <a:endParaRPr lang="en-US" sz="1000" dirty="0"/>
+          </a:p>
+        </p:txBody>
+      </p:sp>
+      <p:sp>
+        <p:nvSpPr>
+          <p:cNvPr id="11" name="Text 6"/>
+          <p:cNvSpPr/>
+          <p:nvPr/>
+        </p:nvSpPr>
+        <p:spPr>
+          <a:xfrm>
+            <a:off x="731520" y="6565392"/>
+            <a:ext cx="8229600" cy="219456"/>
+          </a:xfrm>
+          <a:prstGeom prst="rect">
+            <a:avLst/>
+          </a:prstGeom>
+          <a:noFill/>
+          <a:ln/>
+        </p:spPr>
+        <p:txBody>
+          <a:bodyPr wrap="square" lIns="0" tIns="0" rIns="0" bIns="0" rtlCol="0" anchor="ctr"/>
+          <a:lstStyle/>
+          <a:p>
+            <a:pPr algn="r" indent="0" marL="0">
+              <a:buNone/>
+            </a:pPr>
+            <a:r>
+              <a:rPr lang="en-US" sz="900" dirty="0">
+                <a:solidFill>
+                  <a:srgbClr val="FFFFFF"/>
+                </a:solidFill>
+              </a:rPr>
+              <a:t>KASUMI POS  AWS構成資料　|　Confidential　|　2026-03-09</a:t>
+            </a:r>
+            <a:endParaRPr lang="en-US" sz="900" dirty="0"/>
+          </a:p>
+        </p:txBody>
+      </p:sp>
+      <p:sp>
+        <p:nvSpPr>
+          <p:cNvPr id="12" name="Shape 7"/>
+          <p:cNvSpPr/>
+          <p:nvPr/>
+        </p:nvSpPr>
+        <p:spPr>
+          <a:xfrm>
+            <a:off x="182880" y="1627632"/>
+            <a:ext cx="1170432" cy="256032"/>
+          </a:xfrm>
+          <a:prstGeom prst="rect">
+            <a:avLst/>
+          </a:prstGeom>
+          <a:solidFill>
+            <a:srgbClr val="2E4057"/>
+          </a:solidFill>
+          <a:ln/>
+        </p:spPr>
+      </p:sp>
+      <p:sp>
+        <p:nvSpPr>
+          <p:cNvPr id="13" name="Text 8"/>
+          <p:cNvSpPr/>
+          <p:nvPr/>
+        </p:nvSpPr>
+        <p:spPr>
+          <a:xfrm>
+            <a:off x="182880" y="1627632"/>
+            <a:ext cx="1170432" cy="256032"/>
+          </a:xfrm>
+          <a:prstGeom prst="rect">
+            <a:avLst/>
+          </a:prstGeom>
+          <a:noFill/>
+          <a:ln/>
+        </p:spPr>
+        <p:txBody>
+          <a:bodyPr wrap="square" lIns="0" tIns="0" rIns="0" bIns="0" rtlCol="0" anchor="ctr"/>
+          <a:lstStyle/>
+          <a:p>
+            <a:pPr algn="ctr" indent="0" marL="0">
+              <a:buNone/>
+            </a:pPr>
+            <a:r>
+              <a:rPr lang="en-US" sz="850" b="1" dirty="0">
+                <a:solidFill>
+                  <a:srgbClr val="FFFFFF"/>
+                </a:solidFill>
+                <a:latin typeface="Meiryo" pitchFamily="34" charset="0"/>
+                <a:ea typeface="Meiryo" pitchFamily="34" charset="-122"/>
+                <a:cs typeface="Meiryo" pitchFamily="34" charset="-120"/>
+              </a:rPr>
+              <a:t>カテゴリ</a:t>
+            </a:r>
+            <a:endParaRPr lang="en-US" sz="850" dirty="0"/>
+          </a:p>
+        </p:txBody>
+      </p:sp>
+      <p:sp>
+        <p:nvSpPr>
+          <p:cNvPr id="14" name="Shape 9"/>
+          <p:cNvSpPr/>
+          <p:nvPr/>
+        </p:nvSpPr>
+        <p:spPr>
+          <a:xfrm>
+            <a:off x="1371600" y="1627632"/>
+            <a:ext cx="2359152" cy="256032"/>
+          </a:xfrm>
+          <a:prstGeom prst="rect">
+            <a:avLst/>
+          </a:prstGeom>
+          <a:solidFill>
+            <a:srgbClr val="2E4057"/>
+          </a:solidFill>
+          <a:ln/>
+        </p:spPr>
+      </p:sp>
+      <p:sp>
+        <p:nvSpPr>
+          <p:cNvPr id="15" name="Text 10"/>
+          <p:cNvSpPr/>
+          <p:nvPr/>
+        </p:nvSpPr>
+        <p:spPr>
+          <a:xfrm>
+            <a:off x="1371600" y="1627632"/>
+            <a:ext cx="2359152" cy="256032"/>
+          </a:xfrm>
+          <a:prstGeom prst="rect">
+            <a:avLst/>
+          </a:prstGeom>
+          <a:noFill/>
+          <a:ln/>
+        </p:spPr>
+        <p:txBody>
+          <a:bodyPr wrap="square" lIns="0" tIns="0" rIns="0" bIns="0" rtlCol="0" anchor="ctr"/>
+          <a:lstStyle/>
+          <a:p>
+            <a:pPr algn="ctr" indent="0" marL="0">
+              <a:buNone/>
+            </a:pPr>
+            <a:r>
+              <a:rPr lang="en-US" sz="850" b="1" dirty="0">
+                <a:solidFill>
+                  <a:srgbClr val="FFFFFF"/>
+                </a:solidFill>
+                <a:latin typeface="Meiryo" pitchFamily="34" charset="0"/>
+                <a:ea typeface="Meiryo" pitchFamily="34" charset="-122"/>
+                <a:cs typeface="Meiryo" pitchFamily="34" charset="-120"/>
+              </a:rPr>
+              <a:t>項目</a:t>
+            </a:r>
+            <a:endParaRPr lang="en-US" sz="850" dirty="0"/>
+          </a:p>
+        </p:txBody>
+      </p:sp>
+      <p:sp>
+        <p:nvSpPr>
+          <p:cNvPr id="16" name="Shape 11"/>
+          <p:cNvSpPr/>
+          <p:nvPr/>
+        </p:nvSpPr>
+        <p:spPr>
+          <a:xfrm>
+            <a:off x="3749040" y="1627632"/>
+            <a:ext cx="2633472" cy="256032"/>
+          </a:xfrm>
+          <a:prstGeom prst="rect">
+            <a:avLst/>
+          </a:prstGeom>
+          <a:solidFill>
+            <a:srgbClr val="1A3A6B"/>
+          </a:solidFill>
+          <a:ln/>
+        </p:spPr>
+      </p:sp>
+      <p:sp>
+        <p:nvSpPr>
+          <p:cNvPr id="17" name="Text 12"/>
+          <p:cNvSpPr/>
+          <p:nvPr/>
+        </p:nvSpPr>
+        <p:spPr>
+          <a:xfrm>
+            <a:off x="3749040" y="1627632"/>
+            <a:ext cx="2633472" cy="256032"/>
+          </a:xfrm>
+          <a:prstGeom prst="rect">
+            <a:avLst/>
+          </a:prstGeom>
+          <a:noFill/>
+          <a:ln/>
+        </p:spPr>
+        <p:txBody>
+          <a:bodyPr wrap="square" lIns="0" tIns="0" rIns="0" bIns="0" rtlCol="0" anchor="ctr"/>
+          <a:lstStyle/>
+          <a:p>
+            <a:pPr algn="ctr" indent="0" marL="0">
+              <a:buNone/>
+            </a:pPr>
+            <a:r>
+              <a:rPr lang="en-US" sz="850" b="1" dirty="0">
+                <a:solidFill>
+                  <a:srgbClr val="FFFFFF"/>
+                </a:solidFill>
+                <a:latin typeface="Meiryo" pitchFamily="34" charset="0"/>
+                <a:ea typeface="Meiryo" pitchFamily="34" charset="-122"/>
+                <a:cs typeface="Meiryo" pitchFamily="34" charset="-120"/>
+              </a:rPr>
+              <a:t>🟦 PRD（本番）</a:t>
+            </a:r>
+            <a:endParaRPr lang="en-US" sz="850" dirty="0"/>
+          </a:p>
+        </p:txBody>
+      </p:sp>
+      <p:sp>
+        <p:nvSpPr>
+          <p:cNvPr id="18" name="Shape 13"/>
+          <p:cNvSpPr/>
+          <p:nvPr/>
+        </p:nvSpPr>
+        <p:spPr>
+          <a:xfrm>
+            <a:off x="6400800" y="1627632"/>
+            <a:ext cx="2633472" cy="256032"/>
+          </a:xfrm>
+          <a:prstGeom prst="rect">
+            <a:avLst/>
+          </a:prstGeom>
+          <a:solidFill>
+            <a:srgbClr val="7B4000"/>
+          </a:solidFill>
+          <a:ln/>
+        </p:spPr>
+      </p:sp>
+      <p:sp>
+        <p:nvSpPr>
+          <p:cNvPr id="19" name="Text 14"/>
+          <p:cNvSpPr/>
+          <p:nvPr/>
+        </p:nvSpPr>
+        <p:spPr>
+          <a:xfrm>
+            <a:off x="6400800" y="1627632"/>
+            <a:ext cx="2633472" cy="256032"/>
+          </a:xfrm>
+          <a:prstGeom prst="rect">
+            <a:avLst/>
+          </a:prstGeom>
+          <a:noFill/>
+          <a:ln/>
+        </p:spPr>
+        <p:txBody>
+          <a:bodyPr wrap="square" lIns="0" tIns="0" rIns="0" bIns="0" rtlCol="0" anchor="ctr"/>
+          <a:lstStyle/>
+          <a:p>
+            <a:pPr algn="ctr" indent="0" marL="0">
+              <a:buNone/>
+            </a:pPr>
+            <a:r>
+              <a:rPr lang="en-US" sz="850" b="1" dirty="0">
+                <a:solidFill>
+                  <a:srgbClr val="FFFFFF"/>
+                </a:solidFill>
+                <a:latin typeface="Meiryo" pitchFamily="34" charset="0"/>
+                <a:ea typeface="Meiryo" pitchFamily="34" charset="-122"/>
+                <a:cs typeface="Meiryo" pitchFamily="34" charset="-120"/>
+              </a:rPr>
+              <a:t>🟧 STG（検証）</a:t>
+            </a:r>
+            <a:endParaRPr lang="en-US" sz="850" dirty="0"/>
+          </a:p>
+        </p:txBody>
+      </p:sp>
+      <p:sp>
+        <p:nvSpPr>
+          <p:cNvPr id="20" name="Shape 15"/>
+          <p:cNvSpPr/>
+          <p:nvPr/>
+        </p:nvSpPr>
+        <p:spPr>
+          <a:xfrm>
+            <a:off x="182880" y="1883664"/>
+            <a:ext cx="1170432" cy="233172"/>
+          </a:xfrm>
+          <a:prstGeom prst="rect">
+            <a:avLst/>
+          </a:prstGeom>
+          <a:solidFill>
+            <a:srgbClr val="E0E7EF"/>
+          </a:solidFill>
+          <a:ln w="3810">
+            <a:solidFill>
+              <a:srgbClr val="DDDDDD"/>
+            </a:solidFill>
+            <a:prstDash val="solid"/>
+          </a:ln>
+        </p:spPr>
+      </p:sp>
+      <p:sp>
+        <p:nvSpPr>
+          <p:cNvPr id="21" name="Text 16"/>
+          <p:cNvSpPr/>
+          <p:nvPr/>
+        </p:nvSpPr>
+        <p:spPr>
+          <a:xfrm>
+            <a:off x="182880" y="1883664"/>
+            <a:ext cx="1170432" cy="233172"/>
+          </a:xfrm>
+          <a:prstGeom prst="rect">
+            <a:avLst/>
+          </a:prstGeom>
+          <a:noFill/>
+          <a:ln/>
+        </p:spPr>
+        <p:txBody>
+          <a:bodyPr wrap="square" lIns="0" tIns="0" rIns="0" bIns="0" rtlCol="0" anchor="ctr"/>
+          <a:lstStyle/>
+          <a:p>
+            <a:pPr algn="ctr" indent="0" marL="0">
+              <a:buNone/>
+            </a:pPr>
+            <a:r>
+              <a:rPr lang="en-US" sz="750" b="1" dirty="0">
+                <a:solidFill>
+                  <a:srgbClr val="2E4057"/>
+                </a:solidFill>
+                <a:latin typeface="Meiryo" pitchFamily="34" charset="0"/>
+                <a:ea typeface="Meiryo" pitchFamily="34" charset="-122"/>
+                <a:cs typeface="Meiryo" pitchFamily="34" charset="-120"/>
+              </a:rPr>
+              <a:t>基本情報</a:t>
+            </a:r>
+            <a:endParaRPr lang="en-US" sz="750" dirty="0"/>
+          </a:p>
+        </p:txBody>
+      </p:sp>
+      <p:sp>
+        <p:nvSpPr>
+          <p:cNvPr id="22" name="Shape 17"/>
+          <p:cNvSpPr/>
+          <p:nvPr/>
+        </p:nvSpPr>
+        <p:spPr>
+          <a:xfrm>
+            <a:off x="1371600" y="1883664"/>
+            <a:ext cx="2359152" cy="233172"/>
+          </a:xfrm>
+          <a:prstGeom prst="rect">
+            <a:avLst/>
+          </a:prstGeom>
+          <a:solidFill>
+            <a:srgbClr val="FAFAFA"/>
+          </a:solidFill>
+          <a:ln w="3810">
+            <a:solidFill>
+              <a:srgbClr val="DDDDDD"/>
+            </a:solidFill>
+            <a:prstDash val="solid"/>
+          </a:ln>
+        </p:spPr>
+      </p:sp>
+      <p:sp>
+        <p:nvSpPr>
+          <p:cNvPr id="23" name="Text 18"/>
+          <p:cNvSpPr/>
+          <p:nvPr/>
+        </p:nvSpPr>
+        <p:spPr>
+          <a:xfrm>
+            <a:off x="1426464" y="1883664"/>
+            <a:ext cx="2286000" cy="233172"/>
+          </a:xfrm>
+          <a:prstGeom prst="rect">
+            <a:avLst/>
+          </a:prstGeom>
+          <a:noFill/>
+          <a:ln/>
+        </p:spPr>
+        <p:txBody>
+          <a:bodyPr wrap="square" lIns="0" tIns="0" rIns="0" bIns="0" rtlCol="0" anchor="ctr"/>
+          <a:lstStyle/>
+          <a:p>
+            <a:pPr indent="0" marL="0">
+              <a:buNone/>
+            </a:pPr>
+            <a:r>
+              <a:rPr lang="en-US" sz="750" dirty="0">
+                <a:solidFill>
+                  <a:srgbClr val="333333"/>
+                </a:solidFill>
+                <a:latin typeface="Meiryo" pitchFamily="34" charset="0"/>
+                <a:ea typeface="Meiryo" pitchFamily="34" charset="-122"/>
+                <a:cs typeface="Meiryo" pitchFamily="34" charset="-120"/>
+              </a:rPr>
+              <a:t>AWSアカウント</a:t>
+            </a:r>
+            <a:endParaRPr lang="en-US" sz="750" dirty="0"/>
+          </a:p>
+        </p:txBody>
+      </p:sp>
+      <p:sp>
+        <p:nvSpPr>
+          <p:cNvPr id="24" name="Shape 19"/>
+          <p:cNvSpPr/>
+          <p:nvPr/>
+        </p:nvSpPr>
+        <p:spPr>
+          <a:xfrm>
+            <a:off x="3749040" y="1883664"/>
+            <a:ext cx="2633472" cy="233172"/>
+          </a:xfrm>
+          <a:prstGeom prst="rect">
+            <a:avLst/>
+          </a:prstGeom>
+          <a:solidFill>
+            <a:srgbClr val="E8F0FB"/>
+          </a:solidFill>
+          <a:ln w="3810">
+            <a:solidFill>
+              <a:srgbClr val="DDDDDD"/>
+            </a:solidFill>
+            <a:prstDash val="solid"/>
+          </a:ln>
+        </p:spPr>
+      </p:sp>
+      <p:sp>
+        <p:nvSpPr>
+          <p:cNvPr id="25" name="Text 20"/>
+          <p:cNvSpPr/>
+          <p:nvPr/>
+        </p:nvSpPr>
+        <p:spPr>
+          <a:xfrm>
+            <a:off x="3803904" y="1883664"/>
+            <a:ext cx="2560320" cy="233172"/>
+          </a:xfrm>
+          <a:prstGeom prst="rect">
+            <a:avLst/>
+          </a:prstGeom>
+          <a:noFill/>
+          <a:ln/>
+        </p:spPr>
+        <p:txBody>
+          <a:bodyPr wrap="square" lIns="0" tIns="0" rIns="0" bIns="0" rtlCol="0" anchor="ctr"/>
+          <a:lstStyle/>
+          <a:p>
+            <a:pPr indent="0" marL="0">
+              <a:buNone/>
+            </a:pPr>
+            <a:r>
+              <a:rPr lang="en-US" sz="700" dirty="0">
+                <a:solidFill>
+                  <a:srgbClr val="1A1A1A"/>
+                </a:solidFill>
+                <a:latin typeface="Meiryo" pitchFamily="34" charset="0"/>
+                <a:ea typeface="Meiryo" pitchFamily="34" charset="-122"/>
+                <a:cs typeface="Meiryo" pitchFamily="34" charset="-120"/>
+              </a:rPr>
+              <a:t>332802448674</a:t>
+            </a:r>
+            <a:endParaRPr lang="en-US" sz="700" dirty="0"/>
+          </a:p>
+        </p:txBody>
+      </p:sp>
+      <p:sp>
+        <p:nvSpPr>
+          <p:cNvPr id="26" name="Shape 21"/>
+          <p:cNvSpPr/>
+          <p:nvPr/>
+        </p:nvSpPr>
+        <p:spPr>
+          <a:xfrm>
+            <a:off x="6400800" y="1883664"/>
+            <a:ext cx="2633472" cy="233172"/>
+          </a:xfrm>
+          <a:prstGeom prst="rect">
+            <a:avLst/>
+          </a:prstGeom>
+          <a:solidFill>
+            <a:srgbClr val="FFF3E0"/>
+          </a:solidFill>
+          <a:ln w="3810">
+            <a:solidFill>
+              <a:srgbClr val="DDDDDD"/>
+            </a:solidFill>
+            <a:prstDash val="solid"/>
+          </a:ln>
+        </p:spPr>
+      </p:sp>
+      <p:sp>
+        <p:nvSpPr>
+          <p:cNvPr id="27" name="Text 22"/>
+          <p:cNvSpPr/>
+          <p:nvPr/>
+        </p:nvSpPr>
+        <p:spPr>
+          <a:xfrm>
+            <a:off x="6455664" y="1883664"/>
+            <a:ext cx="2560320" cy="233172"/>
+          </a:xfrm>
+          <a:prstGeom prst="rect">
+            <a:avLst/>
+          </a:prstGeom>
+          <a:noFill/>
+          <a:ln/>
+        </p:spPr>
+        <p:txBody>
+          <a:bodyPr wrap="square" lIns="0" tIns="0" rIns="0" bIns="0" rtlCol="0" anchor="ctr"/>
+          <a:lstStyle/>
+          <a:p>
+            <a:pPr indent="0" marL="0">
+              <a:buNone/>
+            </a:pPr>
+            <a:r>
+              <a:rPr lang="en-US" sz="700" dirty="0">
+                <a:solidFill>
+                  <a:srgbClr val="1A1A1A"/>
+                </a:solidFill>
+                <a:latin typeface="Meiryo" pitchFamily="34" charset="0"/>
+                <a:ea typeface="Meiryo" pitchFamily="34" charset="-122"/>
+                <a:cs typeface="Meiryo" pitchFamily="34" charset="-120"/>
+              </a:rPr>
+              <a:t>750735758916</a:t>
+            </a:r>
+            <a:endParaRPr lang="en-US" sz="700" dirty="0"/>
+          </a:p>
+        </p:txBody>
+      </p:sp>
+      <p:sp>
+        <p:nvSpPr>
+          <p:cNvPr id="28" name="Shape 23"/>
+          <p:cNvSpPr/>
+          <p:nvPr/>
+        </p:nvSpPr>
+        <p:spPr>
+          <a:xfrm>
+            <a:off x="182880" y="2116836"/>
+            <a:ext cx="1170432" cy="233172"/>
+          </a:xfrm>
+          <a:prstGeom prst="rect">
+            <a:avLst/>
+          </a:prstGeom>
+          <a:solidFill>
+            <a:srgbClr val="FFFFFF"/>
+          </a:solidFill>
+          <a:ln w="3810">
+            <a:solidFill>
+              <a:srgbClr val="DDDDDD"/>
+            </a:solidFill>
+            <a:prstDash val="solid"/>
+          </a:ln>
+        </p:spPr>
+      </p:sp>
+      <p:sp>
+        <p:nvSpPr>
+          <p:cNvPr id="29" name="Shape 24"/>
+          <p:cNvSpPr/>
+          <p:nvPr/>
+        </p:nvSpPr>
+        <p:spPr>
+          <a:xfrm>
+            <a:off x="1371600" y="2116836"/>
+            <a:ext cx="2359152" cy="233172"/>
+          </a:xfrm>
+          <a:prstGeom prst="rect">
+            <a:avLst/>
+          </a:prstGeom>
+          <a:solidFill>
+            <a:srgbClr val="FFFFFF"/>
+          </a:solidFill>
+          <a:ln w="3810">
+            <a:solidFill>
+              <a:srgbClr val="DDDDDD"/>
+            </a:solidFill>
+            <a:prstDash val="solid"/>
+          </a:ln>
+        </p:spPr>
+      </p:sp>
+      <p:sp>
+        <p:nvSpPr>
+          <p:cNvPr id="30" name="Text 25"/>
+          <p:cNvSpPr/>
+          <p:nvPr/>
+        </p:nvSpPr>
+        <p:spPr>
+          <a:xfrm>
+            <a:off x="1426464" y="2116836"/>
+            <a:ext cx="2286000" cy="233172"/>
+          </a:xfrm>
+          <a:prstGeom prst="rect">
+            <a:avLst/>
+          </a:prstGeom>
+          <a:noFill/>
+          <a:ln/>
+        </p:spPr>
+        <p:txBody>
+          <a:bodyPr wrap="square" lIns="0" tIns="0" rIns="0" bIns="0" rtlCol="0" anchor="ctr"/>
+          <a:lstStyle/>
+          <a:p>
+            <a:pPr indent="0" marL="0">
+              <a:buNone/>
+            </a:pPr>
+            <a:r>
+              <a:rPr lang="en-US" sz="750" dirty="0">
+                <a:solidFill>
+                  <a:srgbClr val="333333"/>
+                </a:solidFill>
+                <a:latin typeface="Meiryo" pitchFamily="34" charset="0"/>
+                <a:ea typeface="Meiryo" pitchFamily="34" charset="-122"/>
+                <a:cs typeface="Meiryo" pitchFamily="34" charset="-120"/>
+              </a:rPr>
+              <a:t>VPC CIDR</a:t>
+            </a:r>
+            <a:endParaRPr lang="en-US" sz="750" dirty="0"/>
+          </a:p>
+        </p:txBody>
+      </p:sp>
+      <p:sp>
+        <p:nvSpPr>
+          <p:cNvPr id="31" name="Shape 26"/>
+          <p:cNvSpPr/>
+          <p:nvPr/>
+        </p:nvSpPr>
+        <p:spPr>
+          <a:xfrm>
+            <a:off x="3749040" y="2116836"/>
+            <a:ext cx="2633472" cy="233172"/>
+          </a:xfrm>
+          <a:prstGeom prst="rect">
+            <a:avLst/>
+          </a:prstGeom>
+          <a:solidFill>
+            <a:srgbClr val="E8F0FB"/>
+          </a:solidFill>
+          <a:ln w="3810">
+            <a:solidFill>
+              <a:srgbClr val="DDDDDD"/>
+            </a:solidFill>
+            <a:prstDash val="solid"/>
+          </a:ln>
+        </p:spPr>
+      </p:sp>
+      <p:sp>
+        <p:nvSpPr>
+          <p:cNvPr id="32" name="Text 27"/>
+          <p:cNvSpPr/>
+          <p:nvPr/>
+        </p:nvSpPr>
+        <p:spPr>
+          <a:xfrm>
+            <a:off x="3803904" y="2116836"/>
+            <a:ext cx="2560320" cy="233172"/>
+          </a:xfrm>
+          <a:prstGeom prst="rect">
+            <a:avLst/>
+          </a:prstGeom>
+          <a:noFill/>
+          <a:ln/>
+        </p:spPr>
+        <p:txBody>
+          <a:bodyPr wrap="square" lIns="0" tIns="0" rIns="0" bIns="0" rtlCol="0" anchor="ctr"/>
+          <a:lstStyle/>
+          <a:p>
+            <a:pPr indent="0" marL="0">
+              <a:buNone/>
+            </a:pPr>
+            <a:r>
+              <a:rPr lang="en-US" sz="700" dirty="0">
+                <a:solidFill>
+                  <a:srgbClr val="1A1A1A"/>
+                </a:solidFill>
+                <a:latin typeface="Meiryo" pitchFamily="34" charset="0"/>
+                <a:ea typeface="Meiryo" pitchFamily="34" charset="-122"/>
+                <a:cs typeface="Meiryo" pitchFamily="34" charset="-120"/>
+              </a:rPr>
+              <a:t>10.238.0.0/16</a:t>
+            </a:r>
+            <a:endParaRPr lang="en-US" sz="700" dirty="0"/>
+          </a:p>
+        </p:txBody>
+      </p:sp>
+      <p:sp>
+        <p:nvSpPr>
+          <p:cNvPr id="33" name="Shape 28"/>
+          <p:cNvSpPr/>
+          <p:nvPr/>
+        </p:nvSpPr>
+        <p:spPr>
+          <a:xfrm>
+            <a:off x="6400800" y="2116836"/>
+            <a:ext cx="2633472" cy="233172"/>
+          </a:xfrm>
+          <a:prstGeom prst="rect">
+            <a:avLst/>
+          </a:prstGeom>
+          <a:solidFill>
+            <a:srgbClr val="FFF3E0"/>
+          </a:solidFill>
+          <a:ln w="3810">
+            <a:solidFill>
+              <a:srgbClr val="DDDDDD"/>
+            </a:solidFill>
+            <a:prstDash val="solid"/>
+          </a:ln>
+        </p:spPr>
+      </p:sp>
+      <p:sp>
+        <p:nvSpPr>
+          <p:cNvPr id="34" name="Text 29"/>
+          <p:cNvSpPr/>
+          <p:nvPr/>
+        </p:nvSpPr>
+        <p:spPr>
+          <a:xfrm>
+            <a:off x="6455664" y="2116836"/>
+            <a:ext cx="2560320" cy="233172"/>
+          </a:xfrm>
+          <a:prstGeom prst="rect">
+            <a:avLst/>
+          </a:prstGeom>
+          <a:noFill/>
+          <a:ln/>
+        </p:spPr>
+        <p:txBody>
+          <a:bodyPr wrap="square" lIns="0" tIns="0" rIns="0" bIns="0" rtlCol="0" anchor="ctr"/>
+          <a:lstStyle/>
+          <a:p>
+            <a:pPr indent="0" marL="0">
+              <a:buNone/>
+            </a:pPr>
+            <a:r>
+              <a:rPr lang="en-US" sz="700" dirty="0">
+                <a:solidFill>
+                  <a:srgbClr val="1A1A1A"/>
+                </a:solidFill>
+                <a:latin typeface="Meiryo" pitchFamily="34" charset="0"/>
+                <a:ea typeface="Meiryo" pitchFamily="34" charset="-122"/>
+                <a:cs typeface="Meiryo" pitchFamily="34" charset="-120"/>
+              </a:rPr>
+              <a:t>10.239.0.0/16</a:t>
+            </a:r>
+            <a:endParaRPr lang="en-US" sz="700" dirty="0"/>
+          </a:p>
+        </p:txBody>
+      </p:sp>
+      <p:sp>
+        <p:nvSpPr>
+          <p:cNvPr id="35" name="Shape 30"/>
+          <p:cNvSpPr/>
+          <p:nvPr/>
+        </p:nvSpPr>
+        <p:spPr>
+          <a:xfrm>
+            <a:off x="182880" y="2350008"/>
+            <a:ext cx="1170432" cy="233172"/>
+          </a:xfrm>
+          <a:prstGeom prst="rect">
+            <a:avLst/>
+          </a:prstGeom>
+          <a:solidFill>
+            <a:srgbClr val="FAFAFA"/>
+          </a:solidFill>
+          <a:ln w="3810">
+            <a:solidFill>
+              <a:srgbClr val="DDDDDD"/>
+            </a:solidFill>
+            <a:prstDash val="solid"/>
+          </a:ln>
+        </p:spPr>
+      </p:sp>
+      <p:sp>
+        <p:nvSpPr>
+          <p:cNvPr id="36" name="Shape 31"/>
+          <p:cNvSpPr/>
+          <p:nvPr/>
+        </p:nvSpPr>
+        <p:spPr>
+          <a:xfrm>
+            <a:off x="1371600" y="2350008"/>
+            <a:ext cx="2359152" cy="233172"/>
+          </a:xfrm>
+          <a:prstGeom prst="rect">
+            <a:avLst/>
+          </a:prstGeom>
+          <a:solidFill>
+            <a:srgbClr val="FAFAFA"/>
+          </a:solidFill>
+          <a:ln w="3810">
+            <a:solidFill>
+              <a:srgbClr val="DDDDDD"/>
+            </a:solidFill>
+            <a:prstDash val="solid"/>
+          </a:ln>
+        </p:spPr>
+      </p:sp>
+      <p:sp>
+        <p:nvSpPr>
+          <p:cNvPr id="37" name="Text 32"/>
+          <p:cNvSpPr/>
+          <p:nvPr/>
+        </p:nvSpPr>
+        <p:spPr>
+          <a:xfrm>
+            <a:off x="1426464" y="2350008"/>
+            <a:ext cx="2286000" cy="233172"/>
+          </a:xfrm>
+          <a:prstGeom prst="rect">
+            <a:avLst/>
+          </a:prstGeom>
+          <a:noFill/>
+          <a:ln/>
+        </p:spPr>
+        <p:txBody>
+          <a:bodyPr wrap="square" lIns="0" tIns="0" rIns="0" bIns="0" rtlCol="0" anchor="ctr"/>
+          <a:lstStyle/>
+          <a:p>
+            <a:pPr indent="0" marL="0">
+              <a:buNone/>
+            </a:pPr>
+            <a:r>
+              <a:rPr lang="en-US" sz="750" dirty="0">
+                <a:solidFill>
+                  <a:srgbClr val="333333"/>
+                </a:solidFill>
+                <a:latin typeface="Meiryo" pitchFamily="34" charset="0"/>
+                <a:ea typeface="Meiryo" pitchFamily="34" charset="-122"/>
+                <a:cs typeface="Meiryo" pitchFamily="34" charset="-120"/>
+              </a:rPr>
+              <a:t>S3バケット</a:t>
+            </a:r>
+            <a:endParaRPr lang="en-US" sz="750" dirty="0"/>
+          </a:p>
+        </p:txBody>
+      </p:sp>
+      <p:sp>
+        <p:nvSpPr>
+          <p:cNvPr id="38" name="Shape 33"/>
+          <p:cNvSpPr/>
+          <p:nvPr/>
+        </p:nvSpPr>
+        <p:spPr>
+          <a:xfrm>
+            <a:off x="3749040" y="2350008"/>
+            <a:ext cx="2633472" cy="233172"/>
+          </a:xfrm>
+          <a:prstGeom prst="rect">
+            <a:avLst/>
+          </a:prstGeom>
+          <a:solidFill>
+            <a:srgbClr val="E8F0FB"/>
+          </a:solidFill>
+          <a:ln w="3810">
+            <a:solidFill>
+              <a:srgbClr val="DDDDDD"/>
+            </a:solidFill>
+            <a:prstDash val="solid"/>
+          </a:ln>
+        </p:spPr>
+      </p:sp>
+      <p:sp>
+        <p:nvSpPr>
+          <p:cNvPr id="39" name="Text 34"/>
+          <p:cNvSpPr/>
+          <p:nvPr/>
+        </p:nvSpPr>
+        <p:spPr>
+          <a:xfrm>
+            <a:off x="3803904" y="2350008"/>
+            <a:ext cx="2560320" cy="233172"/>
+          </a:xfrm>
+          <a:prstGeom prst="rect">
+            <a:avLst/>
+          </a:prstGeom>
+          <a:noFill/>
+          <a:ln/>
+        </p:spPr>
+        <p:txBody>
+          <a:bodyPr wrap="square" lIns="0" tIns="0" rIns="0" bIns="0" rtlCol="0" anchor="ctr"/>
+          <a:lstStyle/>
+          <a:p>
+            <a:pPr indent="0" marL="0">
+              <a:buNone/>
+            </a:pPr>
+            <a:r>
+              <a:rPr lang="en-US" sz="700" dirty="0">
+                <a:solidFill>
+                  <a:srgbClr val="1A1A1A"/>
+                </a:solidFill>
+                <a:latin typeface="Meiryo" pitchFamily="34" charset="0"/>
+                <a:ea typeface="Meiryo" pitchFamily="34" charset="-122"/>
+                <a:cs typeface="Meiryo" pitchFamily="34" charset="-120"/>
+              </a:rPr>
+              <a:t>prd-ignica-ksm</a:t>
+            </a:r>
+            <a:endParaRPr lang="en-US" sz="700" dirty="0"/>
+          </a:p>
+        </p:txBody>
+      </p:sp>
+      <p:sp>
+        <p:nvSpPr>
+          <p:cNvPr id="40" name="Shape 35"/>
+          <p:cNvSpPr/>
+          <p:nvPr/>
+        </p:nvSpPr>
+        <p:spPr>
+          <a:xfrm>
+            <a:off x="6400800" y="2350008"/>
+            <a:ext cx="2633472" cy="233172"/>
+          </a:xfrm>
+          <a:prstGeom prst="rect">
+            <a:avLst/>
+          </a:prstGeom>
+          <a:solidFill>
+            <a:srgbClr val="FFF3E0"/>
+          </a:solidFill>
+          <a:ln w="3810">
+            <a:solidFill>
+              <a:srgbClr val="DDDDDD"/>
+            </a:solidFill>
+            <a:prstDash val="solid"/>
+          </a:ln>
+        </p:spPr>
+      </p:sp>
+      <p:sp>
+        <p:nvSpPr>
+          <p:cNvPr id="41" name="Text 36"/>
+          <p:cNvSpPr/>
+          <p:nvPr/>
+        </p:nvSpPr>
+        <p:spPr>
+          <a:xfrm>
+            <a:off x="6455664" y="2350008"/>
+            <a:ext cx="2560320" cy="233172"/>
+          </a:xfrm>
+          <a:prstGeom prst="rect">
+            <a:avLst/>
+          </a:prstGeom>
+          <a:noFill/>
+          <a:ln/>
+        </p:spPr>
+        <p:txBody>
+          <a:bodyPr wrap="square" lIns="0" tIns="0" rIns="0" bIns="0" rtlCol="0" anchor="ctr"/>
+          <a:lstStyle/>
+          <a:p>
+            <a:pPr indent="0" marL="0">
+              <a:buNone/>
+            </a:pPr>
+            <a:r>
+              <a:rPr lang="en-US" sz="700" dirty="0">
+                <a:solidFill>
+                  <a:srgbClr val="1A1A1A"/>
+                </a:solidFill>
+                <a:latin typeface="Meiryo" pitchFamily="34" charset="0"/>
+                <a:ea typeface="Meiryo" pitchFamily="34" charset="-122"/>
+                <a:cs typeface="Meiryo" pitchFamily="34" charset="-120"/>
+              </a:rPr>
+              <a:t>stg-ignica-ksm</a:t>
+            </a:r>
+            <a:endParaRPr lang="en-US" sz="700" dirty="0"/>
+          </a:p>
+        </p:txBody>
+      </p:sp>
+      <p:sp>
+        <p:nvSpPr>
+          <p:cNvPr id="42" name="Shape 37"/>
+          <p:cNvSpPr/>
+          <p:nvPr/>
+        </p:nvSpPr>
+        <p:spPr>
+          <a:xfrm>
+            <a:off x="182880" y="2583180"/>
+            <a:ext cx="1170432" cy="233172"/>
+          </a:xfrm>
+          <a:prstGeom prst="rect">
+            <a:avLst/>
+          </a:prstGeom>
+          <a:solidFill>
+            <a:srgbClr val="E0E7EF"/>
+          </a:solidFill>
+          <a:ln w="3810">
+            <a:solidFill>
+              <a:srgbClr val="DDDDDD"/>
+            </a:solidFill>
+            <a:prstDash val="solid"/>
+          </a:ln>
+        </p:spPr>
+      </p:sp>
+      <p:sp>
+        <p:nvSpPr>
+          <p:cNvPr id="43" name="Text 38"/>
+          <p:cNvSpPr/>
+          <p:nvPr/>
+        </p:nvSpPr>
+        <p:spPr>
+          <a:xfrm>
+            <a:off x="182880" y="2583180"/>
+            <a:ext cx="1170432" cy="233172"/>
+          </a:xfrm>
+          <a:prstGeom prst="rect">
+            <a:avLst/>
+          </a:prstGeom>
+          <a:noFill/>
+          <a:ln/>
+        </p:spPr>
+        <p:txBody>
+          <a:bodyPr wrap="square" lIns="0" tIns="0" rIns="0" bIns="0" rtlCol="0" anchor="ctr"/>
+          <a:lstStyle/>
+          <a:p>
+            <a:pPr algn="ctr" indent="0" marL="0">
+              <a:buNone/>
+            </a:pPr>
+            <a:r>
+              <a:rPr lang="en-US" sz="750" b="1" dirty="0">
+                <a:solidFill>
+                  <a:srgbClr val="2E4057"/>
+                </a:solidFill>
+                <a:latin typeface="Meiryo" pitchFamily="34" charset="0"/>
+                <a:ea typeface="Meiryo" pitchFamily="34" charset="-122"/>
+                <a:cs typeface="Meiryo" pitchFamily="34" charset="-120"/>
+              </a:rPr>
+              <a:t>EC2</a:t>
+            </a:r>
+            <a:endParaRPr lang="en-US" sz="750" dirty="0"/>
+          </a:p>
+        </p:txBody>
+      </p:sp>
+      <p:sp>
+        <p:nvSpPr>
+          <p:cNvPr id="44" name="Shape 39"/>
+          <p:cNvSpPr/>
+          <p:nvPr/>
+        </p:nvSpPr>
+        <p:spPr>
+          <a:xfrm>
+            <a:off x="1371600" y="2583180"/>
+            <a:ext cx="2359152" cy="233172"/>
+          </a:xfrm>
+          <a:prstGeom prst="rect">
+            <a:avLst/>
+          </a:prstGeom>
+          <a:solidFill>
+            <a:srgbClr val="FFFFFF"/>
+          </a:solidFill>
+          <a:ln w="3810">
+            <a:solidFill>
+              <a:srgbClr val="DDDDDD"/>
+            </a:solidFill>
+            <a:prstDash val="solid"/>
+          </a:ln>
+        </p:spPr>
+      </p:sp>
+      <p:sp>
+        <p:nvSpPr>
+          <p:cNvPr id="45" name="Text 40"/>
+          <p:cNvSpPr/>
+          <p:nvPr/>
+        </p:nvSpPr>
+        <p:spPr>
+          <a:xfrm>
+            <a:off x="1426464" y="2583180"/>
+            <a:ext cx="2286000" cy="233172"/>
+          </a:xfrm>
+          <a:prstGeom prst="rect">
+            <a:avLst/>
+          </a:prstGeom>
+          <a:noFill/>
+          <a:ln/>
+        </p:spPr>
+        <p:txBody>
+          <a:bodyPr wrap="square" lIns="0" tIns="0" rIns="0" bIns="0" rtlCol="0" anchor="ctr"/>
+          <a:lstStyle/>
+          <a:p>
+            <a:pPr indent="0" marL="0">
+              <a:buNone/>
+            </a:pPr>
+            <a:r>
+              <a:rPr lang="en-US" sz="750" dirty="0">
+                <a:solidFill>
+                  <a:srgbClr val="333333"/>
+                </a:solidFill>
+                <a:latin typeface="Meiryo" pitchFamily="34" charset="0"/>
+                <a:ea typeface="Meiryo" pitchFamily="34" charset="-122"/>
+                <a:cs typeface="Meiryo" pitchFamily="34" charset="-120"/>
+              </a:rPr>
+              <a:t>Bastion IP</a:t>
+            </a:r>
+            <a:endParaRPr lang="en-US" sz="750" dirty="0"/>
+          </a:p>
+        </p:txBody>
+      </p:sp>
+      <p:sp>
+        <p:nvSpPr>
+          <p:cNvPr id="46" name="Shape 41"/>
+          <p:cNvSpPr/>
+          <p:nvPr/>
+        </p:nvSpPr>
+        <p:spPr>
+          <a:xfrm>
+            <a:off x="3749040" y="2583180"/>
+            <a:ext cx="2633472" cy="233172"/>
+          </a:xfrm>
+          <a:prstGeom prst="rect">
+            <a:avLst/>
+          </a:prstGeom>
+          <a:solidFill>
+            <a:srgbClr val="E8F0FB"/>
+          </a:solidFill>
+          <a:ln w="3810">
+            <a:solidFill>
+              <a:srgbClr val="DDDDDD"/>
+            </a:solidFill>
+            <a:prstDash val="solid"/>
+          </a:ln>
+        </p:spPr>
+      </p:sp>
+      <p:sp>
+        <p:nvSpPr>
+          <p:cNvPr id="47" name="Text 42"/>
+          <p:cNvSpPr/>
+          <p:nvPr/>
+        </p:nvSpPr>
+        <p:spPr>
+          <a:xfrm>
+            <a:off x="3803904" y="2583180"/>
+            <a:ext cx="2560320" cy="233172"/>
+          </a:xfrm>
+          <a:prstGeom prst="rect">
+            <a:avLst/>
+          </a:prstGeom>
+          <a:noFill/>
+          <a:ln/>
+        </p:spPr>
+        <p:txBody>
+          <a:bodyPr wrap="square" lIns="0" tIns="0" rIns="0" bIns="0" rtlCol="0" anchor="ctr"/>
+          <a:lstStyle/>
+          <a:p>
+            <a:pPr indent="0" marL="0">
+              <a:buNone/>
+            </a:pPr>
+            <a:r>
+              <a:rPr lang="en-US" sz="700" dirty="0">
+                <a:solidFill>
+                  <a:srgbClr val="1A1A1A"/>
+                </a:solidFill>
+                <a:latin typeface="Meiryo" pitchFamily="34" charset="0"/>
+                <a:ea typeface="Meiryo" pitchFamily="34" charset="-122"/>
+                <a:cs typeface="Meiryo" pitchFamily="34" charset="-120"/>
+              </a:rPr>
+              <a:t>10.238.2.39</a:t>
+            </a:r>
+            <a:endParaRPr lang="en-US" sz="700" dirty="0"/>
+          </a:p>
+        </p:txBody>
+      </p:sp>
+      <p:sp>
+        <p:nvSpPr>
+          <p:cNvPr id="48" name="Shape 43"/>
+          <p:cNvSpPr/>
+          <p:nvPr/>
+        </p:nvSpPr>
+        <p:spPr>
+          <a:xfrm>
+            <a:off x="6400800" y="2583180"/>
+            <a:ext cx="2633472" cy="233172"/>
+          </a:xfrm>
+          <a:prstGeom prst="rect">
+            <a:avLst/>
+          </a:prstGeom>
+          <a:solidFill>
+            <a:srgbClr val="FFF3E0"/>
+          </a:solidFill>
+          <a:ln w="3810">
+            <a:solidFill>
+              <a:srgbClr val="DDDDDD"/>
+            </a:solidFill>
+            <a:prstDash val="solid"/>
+          </a:ln>
+        </p:spPr>
+      </p:sp>
+      <p:sp>
+        <p:nvSpPr>
+          <p:cNvPr id="49" name="Text 44"/>
+          <p:cNvSpPr/>
+          <p:nvPr/>
+        </p:nvSpPr>
+        <p:spPr>
+          <a:xfrm>
+            <a:off x="6455664" y="2583180"/>
+            <a:ext cx="2560320" cy="233172"/>
+          </a:xfrm>
+          <a:prstGeom prst="rect">
+            <a:avLst/>
+          </a:prstGeom>
+          <a:noFill/>
+          <a:ln/>
+        </p:spPr>
+        <p:txBody>
+          <a:bodyPr wrap="square" lIns="0" tIns="0" rIns="0" bIns="0" rtlCol="0" anchor="ctr"/>
+          <a:lstStyle/>
+          <a:p>
+            <a:pPr indent="0" marL="0">
+              <a:buNone/>
+            </a:pPr>
+            <a:r>
+              <a:rPr lang="en-US" sz="700" dirty="0">
+                <a:solidFill>
+                  <a:srgbClr val="1A1A1A"/>
+                </a:solidFill>
+                <a:latin typeface="Meiryo" pitchFamily="34" charset="0"/>
+                <a:ea typeface="Meiryo" pitchFamily="34" charset="-122"/>
+                <a:cs typeface="Meiryo" pitchFamily="34" charset="-120"/>
+              </a:rPr>
+              <a:t>10.239.2.4</a:t>
+            </a:r>
+            <a:endParaRPr lang="en-US" sz="700" dirty="0"/>
+          </a:p>
+        </p:txBody>
+      </p:sp>
+      <p:sp>
+        <p:nvSpPr>
+          <p:cNvPr id="50" name="Shape 45"/>
+          <p:cNvSpPr/>
+          <p:nvPr/>
+        </p:nvSpPr>
+        <p:spPr>
+          <a:xfrm>
+            <a:off x="182880" y="2816352"/>
+            <a:ext cx="1170432" cy="233172"/>
+          </a:xfrm>
+          <a:prstGeom prst="rect">
+            <a:avLst/>
+          </a:prstGeom>
+          <a:solidFill>
+            <a:srgbClr val="FAFAFA"/>
+          </a:solidFill>
+          <a:ln w="3810">
+            <a:solidFill>
+              <a:srgbClr val="DDDDDD"/>
+            </a:solidFill>
+            <a:prstDash val="solid"/>
+          </a:ln>
+        </p:spPr>
+      </p:sp>
+      <p:sp>
+        <p:nvSpPr>
+          <p:cNvPr id="51" name="Shape 46"/>
+          <p:cNvSpPr/>
+          <p:nvPr/>
+        </p:nvSpPr>
+        <p:spPr>
+          <a:xfrm>
+            <a:off x="1371600" y="2816352"/>
+            <a:ext cx="2359152" cy="233172"/>
+          </a:xfrm>
+          <a:prstGeom prst="rect">
+            <a:avLst/>
+          </a:prstGeom>
+          <a:solidFill>
+            <a:srgbClr val="FAFAFA"/>
+          </a:solidFill>
+          <a:ln w="3810">
+            <a:solidFill>
+              <a:srgbClr val="DDDDDD"/>
+            </a:solidFill>
+            <a:prstDash val="solid"/>
+          </a:ln>
+        </p:spPr>
+      </p:sp>
+      <p:sp>
+        <p:nvSpPr>
+          <p:cNvPr id="52" name="Text 47"/>
+          <p:cNvSpPr/>
+          <p:nvPr/>
+        </p:nvSpPr>
+        <p:spPr>
+          <a:xfrm>
+            <a:off x="1426464" y="2816352"/>
+            <a:ext cx="2286000" cy="233172"/>
+          </a:xfrm>
+          <a:prstGeom prst="rect">
+            <a:avLst/>
+          </a:prstGeom>
+          <a:noFill/>
+          <a:ln/>
+        </p:spPr>
+        <p:txBody>
+          <a:bodyPr wrap="square" lIns="0" tIns="0" rIns="0" bIns="0" rtlCol="0" anchor="ctr"/>
+          <a:lstStyle/>
+          <a:p>
+            <a:pPr indent="0" marL="0">
+              <a:buNone/>
+            </a:pPr>
+            <a:r>
+              <a:rPr lang="en-US" sz="750" dirty="0">
+                <a:solidFill>
+                  <a:srgbClr val="333333"/>
+                </a:solidFill>
+                <a:latin typeface="Meiryo" pitchFamily="34" charset="0"/>
+                <a:ea typeface="Meiryo" pitchFamily="34" charset="-122"/>
+                <a:cs typeface="Meiryo" pitchFamily="34" charset="-120"/>
+              </a:rPr>
+              <a:t>giftcard IP</a:t>
+            </a:r>
+            <a:endParaRPr lang="en-US" sz="750" dirty="0"/>
+          </a:p>
+        </p:txBody>
+      </p:sp>
+      <p:sp>
+        <p:nvSpPr>
+          <p:cNvPr id="53" name="Shape 48"/>
+          <p:cNvSpPr/>
+          <p:nvPr/>
+        </p:nvSpPr>
+        <p:spPr>
+          <a:xfrm>
+            <a:off x="3749040" y="2816352"/>
+            <a:ext cx="2633472" cy="233172"/>
+          </a:xfrm>
+          <a:prstGeom prst="rect">
+            <a:avLst/>
+          </a:prstGeom>
+          <a:solidFill>
+            <a:srgbClr val="E8F0FB"/>
+          </a:solidFill>
+          <a:ln w="3810">
+            <a:solidFill>
+              <a:srgbClr val="DDDDDD"/>
+            </a:solidFill>
+            <a:prstDash val="solid"/>
+          </a:ln>
+        </p:spPr>
+      </p:sp>
+      <p:sp>
+        <p:nvSpPr>
+          <p:cNvPr id="54" name="Text 49"/>
+          <p:cNvSpPr/>
+          <p:nvPr/>
+        </p:nvSpPr>
+        <p:spPr>
+          <a:xfrm>
+            <a:off x="3803904" y="2816352"/>
+            <a:ext cx="2560320" cy="233172"/>
+          </a:xfrm>
+          <a:prstGeom prst="rect">
+            <a:avLst/>
+          </a:prstGeom>
+          <a:noFill/>
+          <a:ln/>
+        </p:spPr>
+        <p:txBody>
+          <a:bodyPr wrap="square" lIns="0" tIns="0" rIns="0" bIns="0" rtlCol="0" anchor="ctr"/>
+          <a:lstStyle/>
+          <a:p>
+            <a:pPr indent="0" marL="0">
+              <a:buNone/>
+            </a:pPr>
+            <a:r>
+              <a:rPr lang="en-US" sz="700" dirty="0">
+                <a:solidFill>
+                  <a:srgbClr val="1A1A1A"/>
+                </a:solidFill>
+                <a:latin typeface="Meiryo" pitchFamily="34" charset="0"/>
+                <a:ea typeface="Meiryo" pitchFamily="34" charset="-122"/>
+                <a:cs typeface="Meiryo" pitchFamily="34" charset="-120"/>
+              </a:rPr>
+              <a:t>10.238.2.198 (t2.large)</a:t>
+            </a:r>
+            <a:endParaRPr lang="en-US" sz="700" dirty="0"/>
+          </a:p>
+        </p:txBody>
+      </p:sp>
+      <p:sp>
+        <p:nvSpPr>
+          <p:cNvPr id="55" name="Shape 50"/>
+          <p:cNvSpPr/>
+          <p:nvPr/>
+        </p:nvSpPr>
+        <p:spPr>
+          <a:xfrm>
+            <a:off x="6400800" y="2816352"/>
+            <a:ext cx="2633472" cy="233172"/>
+          </a:xfrm>
+          <a:prstGeom prst="rect">
+            <a:avLst/>
+          </a:prstGeom>
+          <a:solidFill>
+            <a:srgbClr val="FFF3E0"/>
+          </a:solidFill>
+          <a:ln w="3810">
+            <a:solidFill>
+              <a:srgbClr val="DDDDDD"/>
+            </a:solidFill>
+            <a:prstDash val="solid"/>
+          </a:ln>
+        </p:spPr>
+      </p:sp>
+      <p:sp>
+        <p:nvSpPr>
+          <p:cNvPr id="56" name="Text 51"/>
+          <p:cNvSpPr/>
+          <p:nvPr/>
+        </p:nvSpPr>
+        <p:spPr>
+          <a:xfrm>
+            <a:off x="6455664" y="2816352"/>
+            <a:ext cx="2560320" cy="233172"/>
+          </a:xfrm>
+          <a:prstGeom prst="rect">
+            <a:avLst/>
+          </a:prstGeom>
+          <a:noFill/>
+          <a:ln/>
+        </p:spPr>
+        <p:txBody>
+          <a:bodyPr wrap="square" lIns="0" tIns="0" rIns="0" bIns="0" rtlCol="0" anchor="ctr"/>
+          <a:lstStyle/>
+          <a:p>
+            <a:pPr indent="0" marL="0">
+              <a:buNone/>
+            </a:pPr>
+            <a:r>
+              <a:rPr lang="en-US" sz="700" dirty="0">
+                <a:solidFill>
+                  <a:srgbClr val="1A1A1A"/>
+                </a:solidFill>
+                <a:latin typeface="Meiryo" pitchFamily="34" charset="0"/>
+                <a:ea typeface="Meiryo" pitchFamily="34" charset="-122"/>
+                <a:cs typeface="Meiryo" pitchFamily="34" charset="-120"/>
+              </a:rPr>
+              <a:t>10.239.2.193</a:t>
+            </a:r>
+            <a:endParaRPr lang="en-US" sz="700" dirty="0"/>
+          </a:p>
+        </p:txBody>
+      </p:sp>
+      <p:sp>
+        <p:nvSpPr>
+          <p:cNvPr id="57" name="Shape 52"/>
+          <p:cNvSpPr/>
+          <p:nvPr/>
+        </p:nvSpPr>
+        <p:spPr>
+          <a:xfrm>
+            <a:off x="182880" y="3049524"/>
+            <a:ext cx="1170432" cy="233172"/>
+          </a:xfrm>
+          <a:prstGeom prst="rect">
+            <a:avLst/>
+          </a:prstGeom>
+          <a:solidFill>
+            <a:srgbClr val="E0E7EF"/>
+          </a:solidFill>
+          <a:ln w="3810">
+            <a:solidFill>
+              <a:srgbClr val="DDDDDD"/>
+            </a:solidFill>
+            <a:prstDash val="solid"/>
+          </a:ln>
+        </p:spPr>
+      </p:sp>
+      <p:sp>
+        <p:nvSpPr>
+          <p:cNvPr id="58" name="Text 53"/>
+          <p:cNvSpPr/>
+          <p:nvPr/>
+        </p:nvSpPr>
+        <p:spPr>
+          <a:xfrm>
+            <a:off x="182880" y="3049524"/>
+            <a:ext cx="1170432" cy="233172"/>
+          </a:xfrm>
+          <a:prstGeom prst="rect">
+            <a:avLst/>
+          </a:prstGeom>
+          <a:noFill/>
+          <a:ln/>
+        </p:spPr>
+        <p:txBody>
+          <a:bodyPr wrap="square" lIns="0" tIns="0" rIns="0" bIns="0" rtlCol="0" anchor="ctr"/>
+          <a:lstStyle/>
+          <a:p>
+            <a:pPr algn="ctr" indent="0" marL="0">
+              <a:buNone/>
+            </a:pPr>
+            <a:r>
+              <a:rPr lang="en-US" sz="750" b="1" dirty="0">
+                <a:solidFill>
+                  <a:srgbClr val="2E4057"/>
+                </a:solidFill>
+                <a:latin typeface="Meiryo" pitchFamily="34" charset="0"/>
+                <a:ea typeface="Meiryo" pitchFamily="34" charset="-122"/>
+                <a:cs typeface="Meiryo" pitchFamily="34" charset="-120"/>
+              </a:rPr>
+              <a:t>セキュリティ</a:t>
+            </a:r>
+            <a:endParaRPr lang="en-US" sz="750" dirty="0"/>
+          </a:p>
+        </p:txBody>
+      </p:sp>
+      <p:sp>
+        <p:nvSpPr>
+          <p:cNvPr id="59" name="Shape 54"/>
+          <p:cNvSpPr/>
+          <p:nvPr/>
+        </p:nvSpPr>
+        <p:spPr>
+          <a:xfrm>
+            <a:off x="1371600" y="3049524"/>
+            <a:ext cx="2359152" cy="233172"/>
+          </a:xfrm>
+          <a:prstGeom prst="rect">
+            <a:avLst/>
+          </a:prstGeom>
+          <a:solidFill>
+            <a:srgbClr val="FFFFFF"/>
+          </a:solidFill>
+          <a:ln w="3810">
+            <a:solidFill>
+              <a:srgbClr val="DDDDDD"/>
+            </a:solidFill>
+            <a:prstDash val="solid"/>
+          </a:ln>
+        </p:spPr>
+      </p:sp>
+      <p:sp>
+        <p:nvSpPr>
+          <p:cNvPr id="60" name="Text 55"/>
+          <p:cNvSpPr/>
+          <p:nvPr/>
+        </p:nvSpPr>
+        <p:spPr>
+          <a:xfrm>
+            <a:off x="1426464" y="3049524"/>
+            <a:ext cx="2286000" cy="233172"/>
+          </a:xfrm>
+          <a:prstGeom prst="rect">
+            <a:avLst/>
+          </a:prstGeom>
+          <a:noFill/>
+          <a:ln/>
+        </p:spPr>
+        <p:txBody>
+          <a:bodyPr wrap="square" lIns="0" tIns="0" rIns="0" bIns="0" rtlCol="0" anchor="ctr"/>
+          <a:lstStyle/>
+          <a:p>
+            <a:pPr indent="0" marL="0">
+              <a:buNone/>
+            </a:pPr>
+            <a:r>
+              <a:rPr lang="en-US" sz="750" dirty="0">
+                <a:solidFill>
+                  <a:srgbClr val="333333"/>
+                </a:solidFill>
+                <a:latin typeface="Meiryo" pitchFamily="34" charset="0"/>
+                <a:ea typeface="Meiryo" pitchFamily="34" charset="-122"/>
+                <a:cs typeface="Meiryo" pitchFamily="34" charset="-120"/>
+              </a:rPr>
+              <a:t>GuardDuty</a:t>
+            </a:r>
+            <a:endParaRPr lang="en-US" sz="750" dirty="0"/>
+          </a:p>
+        </p:txBody>
+      </p:sp>
+      <p:sp>
+        <p:nvSpPr>
+          <p:cNvPr id="61" name="Shape 56"/>
+          <p:cNvSpPr/>
+          <p:nvPr/>
+        </p:nvSpPr>
+        <p:spPr>
+          <a:xfrm>
+            <a:off x="3749040" y="3049524"/>
+            <a:ext cx="2633472" cy="233172"/>
+          </a:xfrm>
+          <a:prstGeom prst="rect">
+            <a:avLst/>
+          </a:prstGeom>
+          <a:solidFill>
+            <a:srgbClr val="E8F8E8"/>
+          </a:solidFill>
+          <a:ln w="3810">
+            <a:solidFill>
+              <a:srgbClr val="DDDDDD"/>
+            </a:solidFill>
+            <a:prstDash val="solid"/>
+          </a:ln>
+        </p:spPr>
+      </p:sp>
+      <p:sp>
+        <p:nvSpPr>
+          <p:cNvPr id="62" name="Text 57"/>
+          <p:cNvSpPr/>
+          <p:nvPr/>
+        </p:nvSpPr>
+        <p:spPr>
+          <a:xfrm>
+            <a:off x="3803904" y="3049524"/>
+            <a:ext cx="2560320" cy="233172"/>
+          </a:xfrm>
+          <a:prstGeom prst="rect">
+            <a:avLst/>
+          </a:prstGeom>
+          <a:noFill/>
+          <a:ln/>
+        </p:spPr>
+        <p:txBody>
+          <a:bodyPr wrap="square" lIns="0" tIns="0" rIns="0" bIns="0" rtlCol="0" anchor="ctr"/>
+          <a:lstStyle/>
+          <a:p>
+            <a:pPr indent="0" marL="0">
+              <a:buNone/>
+            </a:pPr>
+            <a:r>
+              <a:rPr lang="en-US" sz="700" dirty="0">
+                <a:solidFill>
+                  <a:srgbClr val="1A1A1A"/>
+                </a:solidFill>
+                <a:latin typeface="Meiryo" pitchFamily="34" charset="0"/>
+                <a:ea typeface="Meiryo" pitchFamily="34" charset="-122"/>
+                <a:cs typeface="Meiryo" pitchFamily="34" charset="-120"/>
+              </a:rPr>
+              <a:t>✅ 有効</a:t>
+            </a:r>
+            <a:endParaRPr lang="en-US" sz="700" dirty="0"/>
+          </a:p>
+        </p:txBody>
+      </p:sp>
+      <p:sp>
+        <p:nvSpPr>
+          <p:cNvPr id="63" name="Shape 58"/>
+          <p:cNvSpPr/>
+          <p:nvPr/>
+        </p:nvSpPr>
+        <p:spPr>
+          <a:xfrm>
+            <a:off x="6400800" y="3049524"/>
+            <a:ext cx="2633472" cy="233172"/>
+          </a:xfrm>
+          <a:prstGeom prst="rect">
+            <a:avLst/>
+          </a:prstGeom>
+          <a:solidFill>
+            <a:srgbClr val="FFE8E8"/>
+          </a:solidFill>
+          <a:ln w="3810">
+            <a:solidFill>
+              <a:srgbClr val="DDDDDD"/>
+            </a:solidFill>
+            <a:prstDash val="solid"/>
+          </a:ln>
+        </p:spPr>
+      </p:sp>
+      <p:sp>
+        <p:nvSpPr>
+          <p:cNvPr id="64" name="Text 59"/>
+          <p:cNvSpPr/>
+          <p:nvPr/>
+        </p:nvSpPr>
+        <p:spPr>
+          <a:xfrm>
+            <a:off x="6455664" y="3049524"/>
+            <a:ext cx="2560320" cy="233172"/>
+          </a:xfrm>
+          <a:prstGeom prst="rect">
+            <a:avLst/>
+          </a:prstGeom>
+          <a:noFill/>
+          <a:ln/>
+        </p:spPr>
+        <p:txBody>
+          <a:bodyPr wrap="square" lIns="0" tIns="0" rIns="0" bIns="0" rtlCol="0" anchor="ctr"/>
+          <a:lstStyle/>
+          <a:p>
+            <a:pPr indent="0" marL="0">
+              <a:buNone/>
+            </a:pPr>
+            <a:r>
+              <a:rPr lang="en-US" sz="700" dirty="0">
+                <a:solidFill>
+                  <a:srgbClr val="1A1A1A"/>
+                </a:solidFill>
+                <a:latin typeface="Meiryo" pitchFamily="34" charset="0"/>
+                <a:ea typeface="Meiryo" pitchFamily="34" charset="-122"/>
+                <a:cs typeface="Meiryo" pitchFamily="34" charset="-120"/>
+              </a:rPr>
+              <a:t>🔴 無効</a:t>
+            </a:r>
+            <a:endParaRPr lang="en-US" sz="700" dirty="0"/>
+          </a:p>
+        </p:txBody>
+      </p:sp>
+      <p:sp>
+        <p:nvSpPr>
+          <p:cNvPr id="65" name="Shape 60"/>
+          <p:cNvSpPr/>
+          <p:nvPr/>
+        </p:nvSpPr>
+        <p:spPr>
+          <a:xfrm>
+            <a:off x="182880" y="3282696"/>
+            <a:ext cx="1170432" cy="233172"/>
+          </a:xfrm>
+          <a:prstGeom prst="rect">
+            <a:avLst/>
+          </a:prstGeom>
+          <a:solidFill>
+            <a:srgbClr val="FAFAFA"/>
+          </a:solidFill>
+          <a:ln w="3810">
+            <a:solidFill>
+              <a:srgbClr val="DDDDDD"/>
+            </a:solidFill>
+            <a:prstDash val="solid"/>
+          </a:ln>
+        </p:spPr>
+      </p:sp>
+      <p:sp>
+        <p:nvSpPr>
+          <p:cNvPr id="66" name="Shape 61"/>
+          <p:cNvSpPr/>
+          <p:nvPr/>
+        </p:nvSpPr>
+        <p:spPr>
+          <a:xfrm>
+            <a:off x="1371600" y="3282696"/>
+            <a:ext cx="2359152" cy="233172"/>
+          </a:xfrm>
+          <a:prstGeom prst="rect">
+            <a:avLst/>
+          </a:prstGeom>
+          <a:solidFill>
+            <a:srgbClr val="FAFAFA"/>
+          </a:solidFill>
+          <a:ln w="3810">
+            <a:solidFill>
+              <a:srgbClr val="DDDDDD"/>
+            </a:solidFill>
+            <a:prstDash val="solid"/>
+          </a:ln>
+        </p:spPr>
+      </p:sp>
+      <p:sp>
+        <p:nvSpPr>
+          <p:cNvPr id="67" name="Text 62"/>
+          <p:cNvSpPr/>
+          <p:nvPr/>
+        </p:nvSpPr>
+        <p:spPr>
+          <a:xfrm>
+            <a:off x="1426464" y="3282696"/>
+            <a:ext cx="2286000" cy="233172"/>
+          </a:xfrm>
+          <a:prstGeom prst="rect">
+            <a:avLst/>
+          </a:prstGeom>
+          <a:noFill/>
+          <a:ln/>
+        </p:spPr>
+        <p:txBody>
+          <a:bodyPr wrap="square" lIns="0" tIns="0" rIns="0" bIns="0" rtlCol="0" anchor="ctr"/>
+          <a:lstStyle/>
+          <a:p>
+            <a:pPr indent="0" marL="0">
+              <a:buNone/>
+            </a:pPr>
+            <a:r>
+              <a:rPr lang="en-US" sz="750" dirty="0">
+                <a:solidFill>
+                  <a:srgbClr val="333333"/>
+                </a:solidFill>
+                <a:latin typeface="Meiryo" pitchFamily="34" charset="0"/>
+                <a:ea typeface="Meiryo" pitchFamily="34" charset="-122"/>
+                <a:cs typeface="Meiryo" pitchFamily="34" charset="-120"/>
+              </a:rPr>
+              <a:t>CloudTrail</a:t>
+            </a:r>
+            <a:endParaRPr lang="en-US" sz="750" dirty="0"/>
+          </a:p>
+        </p:txBody>
+      </p:sp>
+      <p:sp>
+        <p:nvSpPr>
+          <p:cNvPr id="68" name="Shape 63"/>
+          <p:cNvSpPr/>
+          <p:nvPr/>
+        </p:nvSpPr>
+        <p:spPr>
+          <a:xfrm>
+            <a:off x="3749040" y="3282696"/>
+            <a:ext cx="2633472" cy="233172"/>
+          </a:xfrm>
+          <a:prstGeom prst="rect">
+            <a:avLst/>
+          </a:prstGeom>
+          <a:solidFill>
+            <a:srgbClr val="E8F8E8"/>
+          </a:solidFill>
+          <a:ln w="3810">
+            <a:solidFill>
+              <a:srgbClr val="DDDDDD"/>
+            </a:solidFill>
+            <a:prstDash val="solid"/>
+          </a:ln>
+        </p:spPr>
+      </p:sp>
+      <p:sp>
+        <p:nvSpPr>
+          <p:cNvPr id="69" name="Text 64"/>
+          <p:cNvSpPr/>
+          <p:nvPr/>
+        </p:nvSpPr>
+        <p:spPr>
+          <a:xfrm>
+            <a:off x="3803904" y="3282696"/>
+            <a:ext cx="2560320" cy="233172"/>
+          </a:xfrm>
+          <a:prstGeom prst="rect">
+            <a:avLst/>
+          </a:prstGeom>
+          <a:noFill/>
+          <a:ln/>
+        </p:spPr>
+        <p:txBody>
+          <a:bodyPr wrap="square" lIns="0" tIns="0" rIns="0" bIns="0" rtlCol="0" anchor="ctr"/>
+          <a:lstStyle/>
+          <a:p>
+            <a:pPr indent="0" marL="0">
+              <a:buNone/>
+            </a:pPr>
+            <a:r>
+              <a:rPr lang="en-US" sz="700" dirty="0">
+                <a:solidFill>
+                  <a:srgbClr val="1A1A1A"/>
+                </a:solidFill>
+                <a:latin typeface="Meiryo" pitchFamily="34" charset="0"/>
+                <a:ea typeface="Meiryo" pitchFamily="34" charset="-122"/>
+                <a:cs typeface="Meiryo" pitchFamily="34" charset="-120"/>
+              </a:rPr>
+              <a:t>✅ 有効</a:t>
+            </a:r>
+            <a:endParaRPr lang="en-US" sz="700" dirty="0"/>
+          </a:p>
+        </p:txBody>
+      </p:sp>
+      <p:sp>
+        <p:nvSpPr>
+          <p:cNvPr id="70" name="Shape 65"/>
+          <p:cNvSpPr/>
+          <p:nvPr/>
+        </p:nvSpPr>
+        <p:spPr>
+          <a:xfrm>
+            <a:off x="6400800" y="3282696"/>
+            <a:ext cx="2633472" cy="233172"/>
+          </a:xfrm>
+          <a:prstGeom prst="rect">
+            <a:avLst/>
+          </a:prstGeom>
+          <a:solidFill>
+            <a:srgbClr val="FFE8E8"/>
+          </a:solidFill>
+          <a:ln w="3810">
+            <a:solidFill>
+              <a:srgbClr val="DDDDDD"/>
+            </a:solidFill>
+            <a:prstDash val="solid"/>
+          </a:ln>
+        </p:spPr>
+      </p:sp>
+      <p:sp>
+        <p:nvSpPr>
+          <p:cNvPr id="71" name="Text 66"/>
+          <p:cNvSpPr/>
+          <p:nvPr/>
+        </p:nvSpPr>
+        <p:spPr>
+          <a:xfrm>
+            <a:off x="6455664" y="3282696"/>
+            <a:ext cx="2560320" cy="233172"/>
+          </a:xfrm>
+          <a:prstGeom prst="rect">
+            <a:avLst/>
+          </a:prstGeom>
+          <a:noFill/>
+          <a:ln/>
+        </p:spPr>
+        <p:txBody>
+          <a:bodyPr wrap="square" lIns="0" tIns="0" rIns="0" bIns="0" rtlCol="0" anchor="ctr"/>
+          <a:lstStyle/>
+          <a:p>
+            <a:pPr indent="0" marL="0">
+              <a:buNone/>
+            </a:pPr>
+            <a:r>
+              <a:rPr lang="en-US" sz="700" dirty="0">
+                <a:solidFill>
+                  <a:srgbClr val="1A1A1A"/>
+                </a:solidFill>
+                <a:latin typeface="Meiryo" pitchFamily="34" charset="0"/>
+                <a:ea typeface="Meiryo" pitchFamily="34" charset="-122"/>
+                <a:cs typeface="Meiryo" pitchFamily="34" charset="-120"/>
+              </a:rPr>
+              <a:t>🔴 無効</a:t>
+            </a:r>
+            <a:endParaRPr lang="en-US" sz="700" dirty="0"/>
+          </a:p>
+        </p:txBody>
+      </p:sp>
+      <p:sp>
+        <p:nvSpPr>
+          <p:cNvPr id="72" name="Shape 67"/>
+          <p:cNvSpPr/>
+          <p:nvPr/>
+        </p:nvSpPr>
+        <p:spPr>
+          <a:xfrm>
+            <a:off x="182880" y="3515868"/>
+            <a:ext cx="1170432" cy="233172"/>
+          </a:xfrm>
+          <a:prstGeom prst="rect">
+            <a:avLst/>
+          </a:prstGeom>
+          <a:solidFill>
+            <a:srgbClr val="FFFFFF"/>
+          </a:solidFill>
+          <a:ln w="3810">
+            <a:solidFill>
+              <a:srgbClr val="DDDDDD"/>
+            </a:solidFill>
+            <a:prstDash val="solid"/>
+          </a:ln>
+        </p:spPr>
+      </p:sp>
+      <p:sp>
+        <p:nvSpPr>
+          <p:cNvPr id="73" name="Shape 68"/>
+          <p:cNvSpPr/>
+          <p:nvPr/>
+        </p:nvSpPr>
+        <p:spPr>
+          <a:xfrm>
+            <a:off x="1371600" y="3515868"/>
+            <a:ext cx="2359152" cy="233172"/>
+          </a:xfrm>
+          <a:prstGeom prst="rect">
+            <a:avLst/>
+          </a:prstGeom>
+          <a:solidFill>
+            <a:srgbClr val="FFFFFF"/>
+          </a:solidFill>
+          <a:ln w="3810">
+            <a:solidFill>
+              <a:srgbClr val="DDDDDD"/>
+            </a:solidFill>
+            <a:prstDash val="solid"/>
+          </a:ln>
+        </p:spPr>
+      </p:sp>
+      <p:sp>
+        <p:nvSpPr>
+          <p:cNvPr id="74" name="Text 69"/>
+          <p:cNvSpPr/>
+          <p:nvPr/>
+        </p:nvSpPr>
+        <p:spPr>
+          <a:xfrm>
+            <a:off x="1426464" y="3515868"/>
+            <a:ext cx="2286000" cy="233172"/>
+          </a:xfrm>
+          <a:prstGeom prst="rect">
+            <a:avLst/>
+          </a:prstGeom>
+          <a:noFill/>
+          <a:ln/>
+        </p:spPr>
+        <p:txBody>
+          <a:bodyPr wrap="square" lIns="0" tIns="0" rIns="0" bIns="0" rtlCol="0" anchor="ctr"/>
+          <a:lstStyle/>
+          <a:p>
+            <a:pPr indent="0" marL="0">
+              <a:buNone/>
+            </a:pPr>
+            <a:r>
+              <a:rPr lang="en-US" sz="750" dirty="0">
+                <a:solidFill>
+                  <a:srgbClr val="333333"/>
+                </a:solidFill>
+                <a:latin typeface="Meiryo" pitchFamily="34" charset="0"/>
+                <a:ea typeface="Meiryo" pitchFamily="34" charset="-122"/>
+                <a:cs typeface="Meiryo" pitchFamily="34" charset="-120"/>
+              </a:rPr>
+              <a:t>Security Hub</a:t>
+            </a:r>
+            <a:endParaRPr lang="en-US" sz="750" dirty="0"/>
+          </a:p>
+        </p:txBody>
+      </p:sp>
+      <p:sp>
+        <p:nvSpPr>
+          <p:cNvPr id="75" name="Shape 70"/>
+          <p:cNvSpPr/>
+          <p:nvPr/>
+        </p:nvSpPr>
+        <p:spPr>
+          <a:xfrm>
+            <a:off x="3749040" y="3515868"/>
+            <a:ext cx="2633472" cy="233172"/>
+          </a:xfrm>
+          <a:prstGeom prst="rect">
+            <a:avLst/>
+          </a:prstGeom>
+          <a:solidFill>
+            <a:srgbClr val="E8F8E8"/>
+          </a:solidFill>
+          <a:ln w="3810">
+            <a:solidFill>
+              <a:srgbClr val="DDDDDD"/>
+            </a:solidFill>
+            <a:prstDash val="solid"/>
+          </a:ln>
+        </p:spPr>
+      </p:sp>
+      <p:sp>
+        <p:nvSpPr>
+          <p:cNvPr id="76" name="Text 71"/>
+          <p:cNvSpPr/>
+          <p:nvPr/>
+        </p:nvSpPr>
+        <p:spPr>
+          <a:xfrm>
+            <a:off x="3803904" y="3515868"/>
+            <a:ext cx="2560320" cy="233172"/>
+          </a:xfrm>
+          <a:prstGeom prst="rect">
+            <a:avLst/>
+          </a:prstGeom>
+          <a:noFill/>
+          <a:ln/>
+        </p:spPr>
+        <p:txBody>
+          <a:bodyPr wrap="square" lIns="0" tIns="0" rIns="0" bIns="0" rtlCol="0" anchor="ctr"/>
+          <a:lstStyle/>
+          <a:p>
+            <a:pPr indent="0" marL="0">
+              <a:buNone/>
+            </a:pPr>
+            <a:r>
+              <a:rPr lang="en-US" sz="700" dirty="0">
+                <a:solidFill>
+                  <a:srgbClr val="1A1A1A"/>
+                </a:solidFill>
+                <a:latin typeface="Meiryo" pitchFamily="34" charset="0"/>
+                <a:ea typeface="Meiryo" pitchFamily="34" charset="-122"/>
+                <a:cs typeface="Meiryo" pitchFamily="34" charset="-120"/>
+              </a:rPr>
+              <a:t>✅ 有効</a:t>
+            </a:r>
+            <a:endParaRPr lang="en-US" sz="700" dirty="0"/>
+          </a:p>
+        </p:txBody>
+      </p:sp>
+      <p:sp>
+        <p:nvSpPr>
+          <p:cNvPr id="77" name="Shape 72"/>
+          <p:cNvSpPr/>
+          <p:nvPr/>
+        </p:nvSpPr>
+        <p:spPr>
+          <a:xfrm>
+            <a:off x="6400800" y="3515868"/>
+            <a:ext cx="2633472" cy="233172"/>
+          </a:xfrm>
+          <a:prstGeom prst="rect">
+            <a:avLst/>
+          </a:prstGeom>
+          <a:solidFill>
+            <a:srgbClr val="FFE8E8"/>
+          </a:solidFill>
+          <a:ln w="3810">
+            <a:solidFill>
+              <a:srgbClr val="DDDDDD"/>
+            </a:solidFill>
+            <a:prstDash val="solid"/>
+          </a:ln>
+        </p:spPr>
+      </p:sp>
+      <p:sp>
+        <p:nvSpPr>
+          <p:cNvPr id="78" name="Text 73"/>
+          <p:cNvSpPr/>
+          <p:nvPr/>
+        </p:nvSpPr>
+        <p:spPr>
+          <a:xfrm>
+            <a:off x="6455664" y="3515868"/>
+            <a:ext cx="2560320" cy="233172"/>
+          </a:xfrm>
+          <a:prstGeom prst="rect">
+            <a:avLst/>
+          </a:prstGeom>
+          <a:noFill/>
+          <a:ln/>
+        </p:spPr>
+        <p:txBody>
+          <a:bodyPr wrap="square" lIns="0" tIns="0" rIns="0" bIns="0" rtlCol="0" anchor="ctr"/>
+          <a:lstStyle/>
+          <a:p>
+            <a:pPr indent="0" marL="0">
+              <a:buNone/>
+            </a:pPr>
+            <a:r>
+              <a:rPr lang="en-US" sz="700" dirty="0">
+                <a:solidFill>
+                  <a:srgbClr val="1A1A1A"/>
+                </a:solidFill>
+                <a:latin typeface="Meiryo" pitchFamily="34" charset="0"/>
+                <a:ea typeface="Meiryo" pitchFamily="34" charset="-122"/>
+                <a:cs typeface="Meiryo" pitchFamily="34" charset="-120"/>
+              </a:rPr>
+              <a:t>🔴 無効</a:t>
+            </a:r>
+            <a:endParaRPr lang="en-US" sz="700" dirty="0"/>
+          </a:p>
+        </p:txBody>
+      </p:sp>
+      <p:sp>
+        <p:nvSpPr>
+          <p:cNvPr id="79" name="Shape 74"/>
+          <p:cNvSpPr/>
+          <p:nvPr/>
+        </p:nvSpPr>
+        <p:spPr>
+          <a:xfrm>
+            <a:off x="182880" y="3749040"/>
+            <a:ext cx="1170432" cy="233172"/>
+          </a:xfrm>
+          <a:prstGeom prst="rect">
+            <a:avLst/>
+          </a:prstGeom>
+          <a:solidFill>
+            <a:srgbClr val="FAFAFA"/>
+          </a:solidFill>
+          <a:ln w="3810">
+            <a:solidFill>
+              <a:srgbClr val="DDDDDD"/>
+            </a:solidFill>
+            <a:prstDash val="solid"/>
+          </a:ln>
+        </p:spPr>
+      </p:sp>
+      <p:sp>
+        <p:nvSpPr>
+          <p:cNvPr id="80" name="Shape 75"/>
+          <p:cNvSpPr/>
+          <p:nvPr/>
+        </p:nvSpPr>
+        <p:spPr>
+          <a:xfrm>
+            <a:off x="1371600" y="3749040"/>
+            <a:ext cx="2359152" cy="233172"/>
+          </a:xfrm>
+          <a:prstGeom prst="rect">
+            <a:avLst/>
+          </a:prstGeom>
+          <a:solidFill>
+            <a:srgbClr val="FAFAFA"/>
+          </a:solidFill>
+          <a:ln w="3810">
+            <a:solidFill>
+              <a:srgbClr val="DDDDDD"/>
+            </a:solidFill>
+            <a:prstDash val="solid"/>
+          </a:ln>
+        </p:spPr>
+      </p:sp>
+      <p:sp>
+        <p:nvSpPr>
+          <p:cNvPr id="81" name="Text 76"/>
+          <p:cNvSpPr/>
+          <p:nvPr/>
+        </p:nvSpPr>
+        <p:spPr>
+          <a:xfrm>
+            <a:off x="1426464" y="3749040"/>
+            <a:ext cx="2286000" cy="233172"/>
+          </a:xfrm>
+          <a:prstGeom prst="rect">
+            <a:avLst/>
+          </a:prstGeom>
+          <a:noFill/>
+          <a:ln/>
+        </p:spPr>
+        <p:txBody>
+          <a:bodyPr wrap="square" lIns="0" tIns="0" rIns="0" bIns="0" rtlCol="0" anchor="ctr"/>
+          <a:lstStyle/>
+          <a:p>
+            <a:pPr indent="0" marL="0">
+              <a:buNone/>
+            </a:pPr>
+            <a:r>
+              <a:rPr lang="en-US" sz="750" dirty="0">
+                <a:solidFill>
+                  <a:srgbClr val="333333"/>
+                </a:solidFill>
+                <a:latin typeface="Meiryo" pitchFamily="34" charset="0"/>
+                <a:ea typeface="Meiryo" pitchFamily="34" charset="-122"/>
+                <a:cs typeface="Meiryo" pitchFamily="34" charset="-120"/>
+              </a:rPr>
+              <a:t>MFA強制</a:t>
+            </a:r>
+            <a:endParaRPr lang="en-US" sz="750" dirty="0"/>
+          </a:p>
+        </p:txBody>
+      </p:sp>
+      <p:sp>
+        <p:nvSpPr>
+          <p:cNvPr id="82" name="Shape 77"/>
+          <p:cNvSpPr/>
+          <p:nvPr/>
+        </p:nvSpPr>
+        <p:spPr>
+          <a:xfrm>
+            <a:off x="3749040" y="3749040"/>
+            <a:ext cx="2633472" cy="233172"/>
+          </a:xfrm>
+          <a:prstGeom prst="rect">
+            <a:avLst/>
+          </a:prstGeom>
+          <a:solidFill>
+            <a:srgbClr val="FFF8E1"/>
+          </a:solidFill>
+          <a:ln w="3810">
+            <a:solidFill>
+              <a:srgbClr val="DDDDDD"/>
+            </a:solidFill>
+            <a:prstDash val="solid"/>
+          </a:ln>
+        </p:spPr>
+      </p:sp>
+      <p:sp>
+        <p:nvSpPr>
+          <p:cNvPr id="83" name="Text 78"/>
+          <p:cNvSpPr/>
+          <p:nvPr/>
+        </p:nvSpPr>
+        <p:spPr>
+          <a:xfrm>
+            <a:off x="3803904" y="3749040"/>
+            <a:ext cx="2560320" cy="233172"/>
+          </a:xfrm>
+          <a:prstGeom prst="rect">
+            <a:avLst/>
+          </a:prstGeom>
+          <a:noFill/>
+          <a:ln/>
+        </p:spPr>
+        <p:txBody>
+          <a:bodyPr wrap="square" lIns="0" tIns="0" rIns="0" bIns="0" rtlCol="0" anchor="ctr"/>
+          <a:lstStyle/>
+          <a:p>
+            <a:pPr indent="0" marL="0">
+              <a:buNone/>
+            </a:pPr>
+            <a:r>
+              <a:rPr lang="en-US" sz="700" dirty="0">
+                <a:solidFill>
+                  <a:srgbClr val="1A1A1A"/>
+                </a:solidFill>
+                <a:latin typeface="Meiryo" pitchFamily="34" charset="0"/>
+                <a:ea typeface="Meiryo" pitchFamily="34" charset="-122"/>
+                <a:cs typeface="Meiryo" pitchFamily="34" charset="-120"/>
+              </a:rPr>
+              <a:t>⚠️ 未強制（両環境共通）</a:t>
+            </a:r>
+            <a:endParaRPr lang="en-US" sz="700" dirty="0"/>
+          </a:p>
+        </p:txBody>
+      </p:sp>
+      <p:sp>
+        <p:nvSpPr>
+          <p:cNvPr id="84" name="Shape 79"/>
+          <p:cNvSpPr/>
+          <p:nvPr/>
+        </p:nvSpPr>
+        <p:spPr>
+          <a:xfrm>
+            <a:off x="6400800" y="3749040"/>
+            <a:ext cx="2633472" cy="233172"/>
+          </a:xfrm>
+          <a:prstGeom prst="rect">
+            <a:avLst/>
+          </a:prstGeom>
+          <a:solidFill>
+            <a:srgbClr val="FFF8E1"/>
+          </a:solidFill>
+          <a:ln w="3810">
+            <a:solidFill>
+              <a:srgbClr val="DDDDDD"/>
+            </a:solidFill>
+            <a:prstDash val="solid"/>
+          </a:ln>
+        </p:spPr>
+      </p:sp>
+      <p:sp>
+        <p:nvSpPr>
+          <p:cNvPr id="85" name="Text 80"/>
+          <p:cNvSpPr/>
+          <p:nvPr/>
+        </p:nvSpPr>
+        <p:spPr>
+          <a:xfrm>
+            <a:off x="6455664" y="3749040"/>
+            <a:ext cx="2560320" cy="233172"/>
+          </a:xfrm>
+          <a:prstGeom prst="rect">
+            <a:avLst/>
+          </a:prstGeom>
+          <a:noFill/>
+          <a:ln/>
+        </p:spPr>
+        <p:txBody>
+          <a:bodyPr wrap="square" lIns="0" tIns="0" rIns="0" bIns="0" rtlCol="0" anchor="ctr"/>
+          <a:lstStyle/>
+          <a:p>
+            <a:pPr indent="0" marL="0">
+              <a:buNone/>
+            </a:pPr>
+            <a:r>
+              <a:rPr lang="en-US" sz="700" dirty="0">
+                <a:solidFill>
+                  <a:srgbClr val="1A1A1A"/>
+                </a:solidFill>
+                <a:latin typeface="Meiryo" pitchFamily="34" charset="0"/>
+                <a:ea typeface="Meiryo" pitchFamily="34" charset="-122"/>
+                <a:cs typeface="Meiryo" pitchFamily="34" charset="-120"/>
+              </a:rPr>
+              <a:t>⚠️ 未強制（両環境共通）</a:t>
+            </a:r>
+            <a:endParaRPr lang="en-US" sz="700" dirty="0"/>
+          </a:p>
+        </p:txBody>
+      </p:sp>
+      <p:sp>
+        <p:nvSpPr>
+          <p:cNvPr id="86" name="Shape 81"/>
+          <p:cNvSpPr/>
+          <p:nvPr/>
+        </p:nvSpPr>
+        <p:spPr>
+          <a:xfrm>
+            <a:off x="182880" y="3982212"/>
+            <a:ext cx="1170432" cy="233172"/>
+          </a:xfrm>
+          <a:prstGeom prst="rect">
+            <a:avLst/>
+          </a:prstGeom>
+          <a:solidFill>
+            <a:srgbClr val="E0E7EF"/>
+          </a:solidFill>
+          <a:ln w="3810">
+            <a:solidFill>
+              <a:srgbClr val="DDDDDD"/>
+            </a:solidFill>
+            <a:prstDash val="solid"/>
+          </a:ln>
+        </p:spPr>
+      </p:sp>
+      <p:sp>
+        <p:nvSpPr>
+          <p:cNvPr id="87" name="Text 82"/>
+          <p:cNvSpPr/>
+          <p:nvPr/>
+        </p:nvSpPr>
+        <p:spPr>
+          <a:xfrm>
+            <a:off x="182880" y="3982212"/>
+            <a:ext cx="1170432" cy="233172"/>
+          </a:xfrm>
+          <a:prstGeom prst="rect">
+            <a:avLst/>
+          </a:prstGeom>
+          <a:noFill/>
+          <a:ln/>
+        </p:spPr>
+        <p:txBody>
+          <a:bodyPr wrap="square" lIns="0" tIns="0" rIns="0" bIns="0" rtlCol="0" anchor="ctr"/>
+          <a:lstStyle/>
+          <a:p>
+            <a:pPr algn="ctr" indent="0" marL="0">
+              <a:buNone/>
+            </a:pPr>
+            <a:r>
+              <a:rPr lang="en-US" sz="750" b="1" dirty="0">
+                <a:solidFill>
+                  <a:srgbClr val="2E4057"/>
+                </a:solidFill>
+                <a:latin typeface="Meiryo" pitchFamily="34" charset="0"/>
+                <a:ea typeface="Meiryo" pitchFamily="34" charset="-122"/>
+                <a:cs typeface="Meiryo" pitchFamily="34" charset="-120"/>
+              </a:rPr>
+              <a:t>SG</a:t>
+            </a:r>
+            <a:endParaRPr lang="en-US" sz="750" dirty="0"/>
+          </a:p>
+        </p:txBody>
+      </p:sp>
+      <p:sp>
+        <p:nvSpPr>
+          <p:cNvPr id="88" name="Shape 83"/>
+          <p:cNvSpPr/>
+          <p:nvPr/>
+        </p:nvSpPr>
+        <p:spPr>
+          <a:xfrm>
+            <a:off x="1371600" y="3982212"/>
+            <a:ext cx="2359152" cy="233172"/>
+          </a:xfrm>
+          <a:prstGeom prst="rect">
+            <a:avLst/>
+          </a:prstGeom>
+          <a:solidFill>
+            <a:srgbClr val="FFFFFF"/>
+          </a:solidFill>
+          <a:ln w="3810">
+            <a:solidFill>
+              <a:srgbClr val="DDDDDD"/>
+            </a:solidFill>
+            <a:prstDash val="solid"/>
+          </a:ln>
+        </p:spPr>
+      </p:sp>
+      <p:sp>
+        <p:nvSpPr>
+          <p:cNvPr id="89" name="Text 84"/>
+          <p:cNvSpPr/>
+          <p:nvPr/>
+        </p:nvSpPr>
+        <p:spPr>
+          <a:xfrm>
+            <a:off x="1426464" y="3982212"/>
+            <a:ext cx="2286000" cy="233172"/>
+          </a:xfrm>
+          <a:prstGeom prst="rect">
+            <a:avLst/>
+          </a:prstGeom>
+          <a:noFill/>
+          <a:ln/>
+        </p:spPr>
+        <p:txBody>
+          <a:bodyPr wrap="square" lIns="0" tIns="0" rIns="0" bIns="0" rtlCol="0" anchor="ctr"/>
+          <a:lstStyle/>
+          <a:p>
+            <a:pPr indent="0" marL="0">
+              <a:buNone/>
+            </a:pPr>
+            <a:r>
+              <a:rPr lang="en-US" sz="750" dirty="0">
+                <a:solidFill>
+                  <a:srgbClr val="333333"/>
+                </a:solidFill>
+                <a:latin typeface="Meiryo" pitchFamily="34" charset="0"/>
+                <a:ea typeface="Meiryo" pitchFamily="34" charset="-122"/>
+                <a:cs typeface="Meiryo" pitchFamily="34" charset="-120"/>
+              </a:rPr>
+              <a:t>Transfer Family SG</a:t>
+            </a:r>
+            <a:endParaRPr lang="en-US" sz="750" dirty="0"/>
+          </a:p>
+        </p:txBody>
+      </p:sp>
+      <p:sp>
+        <p:nvSpPr>
+          <p:cNvPr id="90" name="Shape 85"/>
+          <p:cNvSpPr/>
+          <p:nvPr/>
+        </p:nvSpPr>
+        <p:spPr>
+          <a:xfrm>
+            <a:off x="3749040" y="3982212"/>
+            <a:ext cx="2633472" cy="233172"/>
+          </a:xfrm>
+          <a:prstGeom prst="rect">
+            <a:avLst/>
+          </a:prstGeom>
+          <a:solidFill>
+            <a:srgbClr val="E8F8E8"/>
+          </a:solidFill>
+          <a:ln w="3810">
+            <a:solidFill>
+              <a:srgbClr val="DDDDDD"/>
+            </a:solidFill>
+            <a:prstDash val="solid"/>
+          </a:ln>
+        </p:spPr>
+      </p:sp>
+      <p:sp>
+        <p:nvSpPr>
+          <p:cNvPr id="91" name="Text 86"/>
+          <p:cNvSpPr/>
+          <p:nvPr/>
+        </p:nvSpPr>
+        <p:spPr>
+          <a:xfrm>
+            <a:off x="3803904" y="3982212"/>
+            <a:ext cx="2560320" cy="233172"/>
+          </a:xfrm>
+          <a:prstGeom prst="rect">
+            <a:avLst/>
+          </a:prstGeom>
+          <a:noFill/>
+          <a:ln/>
+        </p:spPr>
+        <p:txBody>
+          <a:bodyPr wrap="square" lIns="0" tIns="0" rIns="0" bIns="0" rtlCol="0" anchor="ctr"/>
+          <a:lstStyle/>
+          <a:p>
+            <a:pPr indent="0" marL="0">
+              <a:buNone/>
+            </a:pPr>
+            <a:r>
+              <a:rPr lang="en-US" sz="700" dirty="0">
+                <a:solidFill>
+                  <a:srgbClr val="1A1A1A"/>
+                </a:solidFill>
+                <a:latin typeface="Meiryo" pitchFamily="34" charset="0"/>
+                <a:ea typeface="Meiryo" pitchFamily="34" charset="-122"/>
+                <a:cs typeface="Meiryo" pitchFamily="34" charset="-120"/>
+              </a:rPr>
+              <a:t>✅ USMH閉域網のみ</a:t>
+            </a:r>
+            <a:endParaRPr lang="en-US" sz="700" dirty="0"/>
+          </a:p>
+        </p:txBody>
+      </p:sp>
+      <p:sp>
+        <p:nvSpPr>
+          <p:cNvPr id="92" name="Shape 87"/>
+          <p:cNvSpPr/>
+          <p:nvPr/>
+        </p:nvSpPr>
+        <p:spPr>
+          <a:xfrm>
+            <a:off x="6400800" y="3982212"/>
+            <a:ext cx="2633472" cy="233172"/>
+          </a:xfrm>
+          <a:prstGeom prst="rect">
+            <a:avLst/>
+          </a:prstGeom>
+          <a:solidFill>
+            <a:srgbClr val="FFE8E8"/>
+          </a:solidFill>
+          <a:ln w="3810">
+            <a:solidFill>
+              <a:srgbClr val="DDDDDD"/>
+            </a:solidFill>
+            <a:prstDash val="solid"/>
+          </a:ln>
+        </p:spPr>
+      </p:sp>
+      <p:sp>
+        <p:nvSpPr>
+          <p:cNvPr id="93" name="Text 88"/>
+          <p:cNvSpPr/>
+          <p:nvPr/>
+        </p:nvSpPr>
+        <p:spPr>
+          <a:xfrm>
+            <a:off x="6455664" y="3982212"/>
+            <a:ext cx="2560320" cy="233172"/>
+          </a:xfrm>
+          <a:prstGeom prst="rect">
+            <a:avLst/>
+          </a:prstGeom>
+          <a:noFill/>
+          <a:ln/>
+        </p:spPr>
+        <p:txBody>
+          <a:bodyPr wrap="square" lIns="0" tIns="0" rIns="0" bIns="0" rtlCol="0" anchor="ctr"/>
+          <a:lstStyle/>
+          <a:p>
+            <a:pPr indent="0" marL="0">
+              <a:buNone/>
+            </a:pPr>
+            <a:r>
+              <a:rPr lang="en-US" sz="700" dirty="0">
+                <a:solidFill>
+                  <a:srgbClr val="1A1A1A"/>
+                </a:solidFill>
+                <a:latin typeface="Meiryo" pitchFamily="34" charset="0"/>
+                <a:ea typeface="Meiryo" pitchFamily="34" charset="-122"/>
+                <a:cs typeface="Meiryo" pitchFamily="34" charset="-120"/>
+              </a:rPr>
+              <a:t>🔴 Bastion許可(テスト残骸)</a:t>
+            </a:r>
+            <a:endParaRPr lang="en-US" sz="700" dirty="0"/>
+          </a:p>
+        </p:txBody>
+      </p:sp>
+      <p:sp>
+        <p:nvSpPr>
+          <p:cNvPr id="94" name="Shape 89"/>
+          <p:cNvSpPr/>
+          <p:nvPr/>
+        </p:nvSpPr>
+        <p:spPr>
+          <a:xfrm>
+            <a:off x="182880" y="4215384"/>
+            <a:ext cx="1170432" cy="233172"/>
+          </a:xfrm>
+          <a:prstGeom prst="rect">
+            <a:avLst/>
+          </a:prstGeom>
+          <a:solidFill>
+            <a:srgbClr val="FAFAFA"/>
+          </a:solidFill>
+          <a:ln w="3810">
+            <a:solidFill>
+              <a:srgbClr val="DDDDDD"/>
+            </a:solidFill>
+            <a:prstDash val="solid"/>
+          </a:ln>
+        </p:spPr>
+      </p:sp>
+      <p:sp>
+        <p:nvSpPr>
+          <p:cNvPr id="95" name="Shape 90"/>
+          <p:cNvSpPr/>
+          <p:nvPr/>
+        </p:nvSpPr>
+        <p:spPr>
+          <a:xfrm>
+            <a:off x="1371600" y="4215384"/>
+            <a:ext cx="2359152" cy="233172"/>
+          </a:xfrm>
+          <a:prstGeom prst="rect">
+            <a:avLst/>
+          </a:prstGeom>
+          <a:solidFill>
+            <a:srgbClr val="FAFAFA"/>
+          </a:solidFill>
+          <a:ln w="3810">
+            <a:solidFill>
+              <a:srgbClr val="DDDDDD"/>
+            </a:solidFill>
+            <a:prstDash val="solid"/>
+          </a:ln>
+        </p:spPr>
+      </p:sp>
+      <p:sp>
+        <p:nvSpPr>
+          <p:cNvPr id="96" name="Text 91"/>
+          <p:cNvSpPr/>
+          <p:nvPr/>
+        </p:nvSpPr>
+        <p:spPr>
+          <a:xfrm>
+            <a:off x="1426464" y="4215384"/>
+            <a:ext cx="2286000" cy="233172"/>
+          </a:xfrm>
+          <a:prstGeom prst="rect">
+            <a:avLst/>
+          </a:prstGeom>
+          <a:noFill/>
+          <a:ln/>
+        </p:spPr>
+        <p:txBody>
+          <a:bodyPr wrap="square" lIns="0" tIns="0" rIns="0" bIns="0" rtlCol="0" anchor="ctr"/>
+          <a:lstStyle/>
+          <a:p>
+            <a:pPr indent="0" marL="0">
+              <a:buNone/>
+            </a:pPr>
+            <a:r>
+              <a:rPr lang="en-US" sz="750" dirty="0">
+                <a:solidFill>
+                  <a:srgbClr val="333333"/>
+                </a:solidFill>
+                <a:latin typeface="Meiryo" pitchFamily="34" charset="0"/>
+                <a:ea typeface="Meiryo" pitchFamily="34" charset="-122"/>
+                <a:cs typeface="Meiryo" pitchFamily="34" charset="-120"/>
+              </a:rPr>
+              <a:t>web-be SG</a:t>
+            </a:r>
+            <a:endParaRPr lang="en-US" sz="750" dirty="0"/>
+          </a:p>
+        </p:txBody>
+      </p:sp>
+      <p:sp>
+        <p:nvSpPr>
+          <p:cNvPr id="97" name="Shape 92"/>
+          <p:cNvSpPr/>
+          <p:nvPr/>
+        </p:nvSpPr>
+        <p:spPr>
+          <a:xfrm>
+            <a:off x="3749040" y="4215384"/>
+            <a:ext cx="2633472" cy="233172"/>
+          </a:xfrm>
+          <a:prstGeom prst="rect">
+            <a:avLst/>
+          </a:prstGeom>
+          <a:solidFill>
+            <a:srgbClr val="E8F8E8"/>
+          </a:solidFill>
+          <a:ln w="3810">
+            <a:solidFill>
+              <a:srgbClr val="DDDDDD"/>
+            </a:solidFill>
+            <a:prstDash val="solid"/>
+          </a:ln>
+        </p:spPr>
+      </p:sp>
+      <p:sp>
+        <p:nvSpPr>
+          <p:cNvPr id="98" name="Text 93"/>
+          <p:cNvSpPr/>
+          <p:nvPr/>
+        </p:nvSpPr>
+        <p:spPr>
+          <a:xfrm>
+            <a:off x="3803904" y="4215384"/>
+            <a:ext cx="2560320" cy="233172"/>
+          </a:xfrm>
+          <a:prstGeom prst="rect">
+            <a:avLst/>
+          </a:prstGeom>
+          <a:noFill/>
+          <a:ln/>
+        </p:spPr>
+        <p:txBody>
+          <a:bodyPr wrap="square" lIns="0" tIns="0" rIns="0" bIns="0" rtlCol="0" anchor="ctr"/>
+          <a:lstStyle/>
+          <a:p>
+            <a:pPr indent="0" marL="0">
+              <a:buNone/>
+            </a:pPr>
+            <a:r>
+              <a:rPr lang="en-US" sz="700" dirty="0">
+                <a:solidFill>
+                  <a:srgbClr val="1A1A1A"/>
+                </a:solidFill>
+                <a:latin typeface="Meiryo" pitchFamily="34" charset="0"/>
+                <a:ea typeface="Meiryo" pitchFamily="34" charset="-122"/>
+                <a:cs typeface="Meiryo" pitchFamily="34" charset="-120"/>
+              </a:rPr>
+              <a:t>✅ 正常（該当リソースなし）</a:t>
+            </a:r>
+            <a:endParaRPr lang="en-US" sz="700" dirty="0"/>
+          </a:p>
+        </p:txBody>
+      </p:sp>
+      <p:sp>
+        <p:nvSpPr>
+          <p:cNvPr id="99" name="Shape 94"/>
+          <p:cNvSpPr/>
+          <p:nvPr/>
+        </p:nvSpPr>
+        <p:spPr>
+          <a:xfrm>
+            <a:off x="6400800" y="4215384"/>
+            <a:ext cx="2633472" cy="233172"/>
+          </a:xfrm>
+          <a:prstGeom prst="rect">
+            <a:avLst/>
+          </a:prstGeom>
+          <a:solidFill>
+            <a:srgbClr val="FFE8E8"/>
+          </a:solidFill>
+          <a:ln w="3810">
+            <a:solidFill>
+              <a:srgbClr val="DDDDDD"/>
+            </a:solidFill>
+            <a:prstDash val="solid"/>
+          </a:ln>
+        </p:spPr>
+      </p:sp>
+      <p:sp>
+        <p:nvSpPr>
+          <p:cNvPr id="100" name="Text 95"/>
+          <p:cNvSpPr/>
+          <p:nvPr/>
+        </p:nvSpPr>
+        <p:spPr>
+          <a:xfrm>
+            <a:off x="6455664" y="4215384"/>
+            <a:ext cx="2560320" cy="233172"/>
+          </a:xfrm>
+          <a:prstGeom prst="rect">
+            <a:avLst/>
+          </a:prstGeom>
+          <a:noFill/>
+          <a:ln/>
+        </p:spPr>
+        <p:txBody>
+          <a:bodyPr wrap="square" lIns="0" tIns="0" rIns="0" bIns="0" rtlCol="0" anchor="ctr"/>
+          <a:lstStyle/>
+          <a:p>
+            <a:pPr indent="0" marL="0">
+              <a:buNone/>
+            </a:pPr>
+            <a:r>
+              <a:rPr lang="en-US" sz="700" dirty="0">
+                <a:solidFill>
+                  <a:srgbClr val="1A1A1A"/>
+                </a:solidFill>
+                <a:latin typeface="Meiryo" pitchFamily="34" charset="0"/>
+                <a:ea typeface="Meiryo" pitchFamily="34" charset="-122"/>
+                <a:cs typeface="Meiryo" pitchFamily="34" charset="-120"/>
+              </a:rPr>
+              <a:t>🔴 全通信許可(-1)</a:t>
+            </a:r>
+            <a:endParaRPr lang="en-US" sz="700" dirty="0"/>
+          </a:p>
+        </p:txBody>
+      </p:sp>
+      <p:sp>
+        <p:nvSpPr>
+          <p:cNvPr id="101" name="Shape 96"/>
+          <p:cNvSpPr/>
+          <p:nvPr/>
+        </p:nvSpPr>
+        <p:spPr>
+          <a:xfrm>
+            <a:off x="182880" y="4448556"/>
+            <a:ext cx="1170432" cy="233172"/>
+          </a:xfrm>
+          <a:prstGeom prst="rect">
+            <a:avLst/>
+          </a:prstGeom>
+          <a:solidFill>
+            <a:srgbClr val="E0E7EF"/>
+          </a:solidFill>
+          <a:ln w="3810">
+            <a:solidFill>
+              <a:srgbClr val="DDDDDD"/>
+            </a:solidFill>
+            <a:prstDash val="solid"/>
+          </a:ln>
+        </p:spPr>
+      </p:sp>
+      <p:sp>
+        <p:nvSpPr>
+          <p:cNvPr id="102" name="Text 97"/>
+          <p:cNvSpPr/>
+          <p:nvPr/>
+        </p:nvSpPr>
+        <p:spPr>
+          <a:xfrm>
+            <a:off x="182880" y="4448556"/>
+            <a:ext cx="1170432" cy="233172"/>
+          </a:xfrm>
+          <a:prstGeom prst="rect">
+            <a:avLst/>
+          </a:prstGeom>
+          <a:noFill/>
+          <a:ln/>
+        </p:spPr>
+        <p:txBody>
+          <a:bodyPr wrap="square" lIns="0" tIns="0" rIns="0" bIns="0" rtlCol="0" anchor="ctr"/>
+          <a:lstStyle/>
+          <a:p>
+            <a:pPr algn="ctr" indent="0" marL="0">
+              <a:buNone/>
+            </a:pPr>
+            <a:r>
+              <a:rPr lang="en-US" sz="750" b="1" dirty="0">
+                <a:solidFill>
+                  <a:srgbClr val="2E4057"/>
+                </a:solidFill>
+                <a:latin typeface="Meiryo" pitchFamily="34" charset="0"/>
+                <a:ea typeface="Meiryo" pitchFamily="34" charset="-122"/>
+                <a:cs typeface="Meiryo" pitchFamily="34" charset="-120"/>
+              </a:rPr>
+              <a:t>EventBridge</a:t>
+            </a:r>
+            <a:endParaRPr lang="en-US" sz="750" dirty="0"/>
+          </a:p>
+        </p:txBody>
+      </p:sp>
+      <p:sp>
+        <p:nvSpPr>
+          <p:cNvPr id="103" name="Shape 98"/>
+          <p:cNvSpPr/>
+          <p:nvPr/>
+        </p:nvSpPr>
+        <p:spPr>
+          <a:xfrm>
+            <a:off x="1371600" y="4448556"/>
+            <a:ext cx="2359152" cy="233172"/>
+          </a:xfrm>
+          <a:prstGeom prst="rect">
+            <a:avLst/>
+          </a:prstGeom>
+          <a:solidFill>
+            <a:srgbClr val="FFFFFF"/>
+          </a:solidFill>
+          <a:ln w="3810">
+            <a:solidFill>
+              <a:srgbClr val="DDDDDD"/>
+            </a:solidFill>
+            <a:prstDash val="solid"/>
+          </a:ln>
+        </p:spPr>
+      </p:sp>
+      <p:sp>
+        <p:nvSpPr>
+          <p:cNvPr id="104" name="Text 99"/>
+          <p:cNvSpPr/>
+          <p:nvPr/>
+        </p:nvSpPr>
+        <p:spPr>
+          <a:xfrm>
+            <a:off x="1426464" y="4448556"/>
+            <a:ext cx="2286000" cy="233172"/>
+          </a:xfrm>
+          <a:prstGeom prst="rect">
+            <a:avLst/>
+          </a:prstGeom>
+          <a:noFill/>
+          <a:ln/>
+        </p:spPr>
+        <p:txBody>
+          <a:bodyPr wrap="square" lIns="0" tIns="0" rIns="0" bIns="0" rtlCol="0" anchor="ctr"/>
+          <a:lstStyle/>
+          <a:p>
+            <a:pPr indent="0" marL="0">
+              <a:buNone/>
+            </a:pPr>
+            <a:r>
+              <a:rPr lang="en-US" sz="750" dirty="0">
+                <a:solidFill>
+                  <a:srgbClr val="333333"/>
+                </a:solidFill>
+                <a:latin typeface="Meiryo" pitchFamily="34" charset="0"/>
+                <a:ea typeface="Meiryo" pitchFamily="34" charset="-122"/>
+                <a:cs typeface="Meiryo" pitchFamily="34" charset="-120"/>
+              </a:rPr>
+              <a:t>-9233系ルール</a:t>
+            </a:r>
+            <a:endParaRPr lang="en-US" sz="750" dirty="0"/>
+          </a:p>
+        </p:txBody>
+      </p:sp>
+      <p:sp>
+        <p:nvSpPr>
+          <p:cNvPr id="105" name="Shape 100"/>
+          <p:cNvSpPr/>
+          <p:nvPr/>
+        </p:nvSpPr>
+        <p:spPr>
+          <a:xfrm>
+            <a:off x="3749040" y="4448556"/>
+            <a:ext cx="2633472" cy="233172"/>
+          </a:xfrm>
+          <a:prstGeom prst="rect">
+            <a:avLst/>
+          </a:prstGeom>
+          <a:solidFill>
+            <a:srgbClr val="E8F8E8"/>
+          </a:solidFill>
+          <a:ln w="3810">
+            <a:solidFill>
+              <a:srgbClr val="DDDDDD"/>
+            </a:solidFill>
+            <a:prstDash val="solid"/>
+          </a:ln>
+        </p:spPr>
+      </p:sp>
+      <p:sp>
+        <p:nvSpPr>
+          <p:cNvPr id="106" name="Text 101"/>
+          <p:cNvSpPr/>
+          <p:nvPr/>
+        </p:nvSpPr>
+        <p:spPr>
+          <a:xfrm>
+            <a:off x="3803904" y="4448556"/>
+            <a:ext cx="2560320" cy="233172"/>
+          </a:xfrm>
+          <a:prstGeom prst="rect">
+            <a:avLst/>
+          </a:prstGeom>
+          <a:noFill/>
+          <a:ln/>
+        </p:spPr>
+        <p:txBody>
+          <a:bodyPr wrap="square" lIns="0" tIns="0" rIns="0" bIns="0" rtlCol="0" anchor="ctr"/>
+          <a:lstStyle/>
+          <a:p>
+            <a:pPr indent="0" marL="0">
+              <a:buNone/>
+            </a:pPr>
+            <a:r>
+              <a:rPr lang="en-US" sz="700" dirty="0">
+                <a:solidFill>
+                  <a:srgbClr val="1A1A1A"/>
+                </a:solidFill>
+                <a:latin typeface="Meiryo" pitchFamily="34" charset="0"/>
+                <a:ea typeface="Meiryo" pitchFamily="34" charset="-122"/>
+                <a:cs typeface="Meiryo" pitchFamily="34" charset="-120"/>
+              </a:rPr>
+              <a:t>✅ 存在しない</a:t>
+            </a:r>
+            <a:endParaRPr lang="en-US" sz="700" dirty="0"/>
+          </a:p>
+        </p:txBody>
+      </p:sp>
+      <p:sp>
+        <p:nvSpPr>
+          <p:cNvPr id="107" name="Shape 102"/>
+          <p:cNvSpPr/>
+          <p:nvPr/>
+        </p:nvSpPr>
+        <p:spPr>
+          <a:xfrm>
+            <a:off x="6400800" y="4448556"/>
+            <a:ext cx="2633472" cy="233172"/>
+          </a:xfrm>
+          <a:prstGeom prst="rect">
+            <a:avLst/>
+          </a:prstGeom>
+          <a:solidFill>
+            <a:srgbClr val="FFF8E1"/>
+          </a:solidFill>
+          <a:ln w="3810">
+            <a:solidFill>
+              <a:srgbClr val="DDDDDD"/>
+            </a:solidFill>
+            <a:prstDash val="solid"/>
+          </a:ln>
+        </p:spPr>
+      </p:sp>
+      <p:sp>
+        <p:nvSpPr>
+          <p:cNvPr id="108" name="Text 103"/>
+          <p:cNvSpPr/>
+          <p:nvPr/>
+        </p:nvSpPr>
+        <p:spPr>
+          <a:xfrm>
+            <a:off x="6455664" y="4448556"/>
+            <a:ext cx="2560320" cy="233172"/>
+          </a:xfrm>
+          <a:prstGeom prst="rect">
+            <a:avLst/>
+          </a:prstGeom>
+          <a:noFill/>
+          <a:ln/>
+        </p:spPr>
+        <p:txBody>
+          <a:bodyPr wrap="square" lIns="0" tIns="0" rIns="0" bIns="0" rtlCol="0" anchor="ctr"/>
+          <a:lstStyle/>
+          <a:p>
+            <a:pPr indent="0" marL="0">
+              <a:buNone/>
+            </a:pPr>
+            <a:r>
+              <a:rPr lang="en-US" sz="700" dirty="0">
+                <a:solidFill>
+                  <a:srgbClr val="1A1A1A"/>
+                </a:solidFill>
+                <a:latin typeface="Meiryo" pitchFamily="34" charset="0"/>
+                <a:ea typeface="Meiryo" pitchFamily="34" charset="-122"/>
+                <a:cs typeface="Meiryo" pitchFamily="34" charset="-120"/>
+              </a:rPr>
+              <a:t>⚠️ DISABLED残骸3本あり</a:t>
+            </a:r>
+            <a:endParaRPr lang="en-US" sz="700" dirty="0"/>
+          </a:p>
+        </p:txBody>
+      </p:sp>
+      <p:sp>
+        <p:nvSpPr>
+          <p:cNvPr id="109" name="Shape 104"/>
+          <p:cNvSpPr/>
+          <p:nvPr/>
+        </p:nvSpPr>
+        <p:spPr>
+          <a:xfrm>
+            <a:off x="182880" y="4681728"/>
+            <a:ext cx="1170432" cy="233172"/>
+          </a:xfrm>
+          <a:prstGeom prst="rect">
+            <a:avLst/>
+          </a:prstGeom>
+          <a:solidFill>
+            <a:srgbClr val="FAFAFA"/>
+          </a:solidFill>
+          <a:ln w="3810">
+            <a:solidFill>
+              <a:srgbClr val="DDDDDD"/>
+            </a:solidFill>
+            <a:prstDash val="solid"/>
+          </a:ln>
+        </p:spPr>
+      </p:sp>
+      <p:sp>
+        <p:nvSpPr>
+          <p:cNvPr id="110" name="Shape 105"/>
+          <p:cNvSpPr/>
+          <p:nvPr/>
+        </p:nvSpPr>
+        <p:spPr>
+          <a:xfrm>
+            <a:off x="1371600" y="4681728"/>
+            <a:ext cx="2359152" cy="233172"/>
+          </a:xfrm>
+          <a:prstGeom prst="rect">
+            <a:avLst/>
+          </a:prstGeom>
+          <a:solidFill>
+            <a:srgbClr val="FAFAFA"/>
+          </a:solidFill>
+          <a:ln w="3810">
+            <a:solidFill>
+              <a:srgbClr val="DDDDDD"/>
+            </a:solidFill>
+            <a:prstDash val="solid"/>
+          </a:ln>
+        </p:spPr>
+      </p:sp>
+      <p:sp>
+        <p:nvSpPr>
+          <p:cNvPr id="111" name="Text 106"/>
+          <p:cNvSpPr/>
+          <p:nvPr/>
+        </p:nvSpPr>
+        <p:spPr>
+          <a:xfrm>
+            <a:off x="1426464" y="4681728"/>
+            <a:ext cx="2286000" cy="233172"/>
+          </a:xfrm>
+          <a:prstGeom prst="rect">
+            <a:avLst/>
+          </a:prstGeom>
+          <a:noFill/>
+          <a:ln/>
+        </p:spPr>
+        <p:txBody>
+          <a:bodyPr wrap="square" lIns="0" tIns="0" rIns="0" bIns="0" rtlCol="0" anchor="ctr"/>
+          <a:lstStyle/>
+          <a:p>
+            <a:pPr indent="0" marL="0">
+              <a:buNone/>
+            </a:pPr>
+            <a:r>
+              <a:rPr lang="en-US" sz="750" dirty="0">
+                <a:solidFill>
+                  <a:srgbClr val="333333"/>
+                </a:solidFill>
+                <a:latin typeface="Meiryo" pitchFamily="34" charset="0"/>
+                <a:ea typeface="Meiryo" pitchFamily="34" charset="-122"/>
+                <a:cs typeface="Meiryo" pitchFamily="34" charset="-120"/>
+              </a:rPr>
+              <a:t>check-price</a:t>
+            </a:r>
+            <a:endParaRPr lang="en-US" sz="750" dirty="0"/>
+          </a:p>
+        </p:txBody>
+      </p:sp>
+      <p:sp>
+        <p:nvSpPr>
+          <p:cNvPr id="112" name="Shape 107"/>
+          <p:cNvSpPr/>
+          <p:nvPr/>
+        </p:nvSpPr>
+        <p:spPr>
+          <a:xfrm>
+            <a:off x="3749040" y="4681728"/>
+            <a:ext cx="2633472" cy="233172"/>
+          </a:xfrm>
+          <a:prstGeom prst="rect">
+            <a:avLst/>
+          </a:prstGeom>
+          <a:solidFill>
+            <a:srgbClr val="F5F5F5"/>
+          </a:solidFill>
+          <a:ln w="3810">
+            <a:solidFill>
+              <a:srgbClr val="DDDDDD"/>
+            </a:solidFill>
+            <a:prstDash val="solid"/>
+          </a:ln>
+        </p:spPr>
+      </p:sp>
+      <p:sp>
+        <p:nvSpPr>
+          <p:cNvPr id="113" name="Text 108"/>
+          <p:cNvSpPr/>
+          <p:nvPr/>
+        </p:nvSpPr>
+        <p:spPr>
+          <a:xfrm>
+            <a:off x="3803904" y="4681728"/>
+            <a:ext cx="2560320" cy="233172"/>
+          </a:xfrm>
+          <a:prstGeom prst="rect">
+            <a:avLst/>
+          </a:prstGeom>
+          <a:noFill/>
+          <a:ln/>
+        </p:spPr>
+        <p:txBody>
+          <a:bodyPr wrap="square" lIns="0" tIns="0" rIns="0" bIns="0" rtlCol="0" anchor="ctr"/>
+          <a:lstStyle/>
+          <a:p>
+            <a:pPr indent="0" marL="0">
+              <a:buNone/>
+            </a:pPr>
+            <a:r>
+              <a:rPr lang="en-US" sz="700" dirty="0">
+                <a:solidFill>
+                  <a:srgbClr val="1A1A1A"/>
+                </a:solidFill>
+                <a:latin typeface="Meiryo" pitchFamily="34" charset="0"/>
+                <a:ea typeface="Meiryo" pitchFamily="34" charset="-122"/>
+                <a:cs typeface="Meiryo" pitchFamily="34" charset="-120"/>
+              </a:rPr>
+              <a:t>DISABLED</a:t>
+            </a:r>
+            <a:endParaRPr lang="en-US" sz="700" dirty="0"/>
+          </a:p>
+        </p:txBody>
+      </p:sp>
+      <p:sp>
+        <p:nvSpPr>
+          <p:cNvPr id="114" name="Shape 109"/>
+          <p:cNvSpPr/>
+          <p:nvPr/>
+        </p:nvSpPr>
+        <p:spPr>
+          <a:xfrm>
+            <a:off x="6400800" y="4681728"/>
+            <a:ext cx="2633472" cy="233172"/>
+          </a:xfrm>
+          <a:prstGeom prst="rect">
+            <a:avLst/>
+          </a:prstGeom>
+          <a:solidFill>
+            <a:srgbClr val="FFF8E1"/>
+          </a:solidFill>
+          <a:ln w="3810">
+            <a:solidFill>
+              <a:srgbClr val="DDDDDD"/>
+            </a:solidFill>
+            <a:prstDash val="solid"/>
+          </a:ln>
+        </p:spPr>
+      </p:sp>
+      <p:sp>
+        <p:nvSpPr>
+          <p:cNvPr id="115" name="Text 110"/>
+          <p:cNvSpPr/>
+          <p:nvPr/>
+        </p:nvSpPr>
+        <p:spPr>
+          <a:xfrm>
+            <a:off x="6455664" y="4681728"/>
+            <a:ext cx="2560320" cy="233172"/>
+          </a:xfrm>
+          <a:prstGeom prst="rect">
+            <a:avLst/>
+          </a:prstGeom>
+          <a:noFill/>
+          <a:ln/>
+        </p:spPr>
+        <p:txBody>
+          <a:bodyPr wrap="square" lIns="0" tIns="0" rIns="0" bIns="0" rtlCol="0" anchor="ctr"/>
+          <a:lstStyle/>
+          <a:p>
+            <a:pPr indent="0" marL="0">
+              <a:buNone/>
+            </a:pPr>
+            <a:r>
+              <a:rPr lang="en-US" sz="700" dirty="0">
+                <a:solidFill>
+                  <a:srgbClr val="1A1A1A"/>
+                </a:solidFill>
+                <a:latin typeface="Meiryo" pitchFamily="34" charset="0"/>
+                <a:ea typeface="Meiryo" pitchFamily="34" charset="-122"/>
+                <a:cs typeface="Meiryo" pitchFamily="34" charset="-120"/>
+              </a:rPr>
+              <a:t>⚠️ ENABLED</a:t>
+            </a:r>
+            <a:endParaRPr lang="en-US" sz="700" dirty="0"/>
+          </a:p>
+        </p:txBody>
+      </p:sp>
+      <p:sp>
+        <p:nvSpPr>
+          <p:cNvPr id="116" name="Shape 111"/>
+          <p:cNvSpPr/>
+          <p:nvPr/>
+        </p:nvSpPr>
+        <p:spPr>
+          <a:xfrm>
+            <a:off x="182880" y="4914900"/>
+            <a:ext cx="1170432" cy="233172"/>
+          </a:xfrm>
+          <a:prstGeom prst="rect">
+            <a:avLst/>
+          </a:prstGeom>
+          <a:solidFill>
+            <a:srgbClr val="FFFFFF"/>
+          </a:solidFill>
+          <a:ln w="3810">
+            <a:solidFill>
+              <a:srgbClr val="DDDDDD"/>
+            </a:solidFill>
+            <a:prstDash val="solid"/>
+          </a:ln>
+        </p:spPr>
+      </p:sp>
+      <p:sp>
+        <p:nvSpPr>
+          <p:cNvPr id="117" name="Shape 112"/>
+          <p:cNvSpPr/>
+          <p:nvPr/>
+        </p:nvSpPr>
+        <p:spPr>
+          <a:xfrm>
+            <a:off x="1371600" y="4914900"/>
+            <a:ext cx="2359152" cy="233172"/>
+          </a:xfrm>
+          <a:prstGeom prst="rect">
+            <a:avLst/>
+          </a:prstGeom>
+          <a:solidFill>
+            <a:srgbClr val="FFFFFF"/>
+          </a:solidFill>
+          <a:ln w="3810">
+            <a:solidFill>
+              <a:srgbClr val="DDDDDD"/>
+            </a:solidFill>
+            <a:prstDash val="solid"/>
+          </a:ln>
+        </p:spPr>
+      </p:sp>
+      <p:sp>
+        <p:nvSpPr>
+          <p:cNvPr id="118" name="Text 113"/>
+          <p:cNvSpPr/>
+          <p:nvPr/>
+        </p:nvSpPr>
+        <p:spPr>
+          <a:xfrm>
+            <a:off x="1426464" y="4914900"/>
+            <a:ext cx="2286000" cy="233172"/>
+          </a:xfrm>
+          <a:prstGeom prst="rect">
+            <a:avLst/>
+          </a:prstGeom>
+          <a:noFill/>
+          <a:ln/>
+        </p:spPr>
+        <p:txBody>
+          <a:bodyPr wrap="square" lIns="0" tIns="0" rIns="0" bIns="0" rtlCol="0" anchor="ctr"/>
+          <a:lstStyle/>
+          <a:p>
+            <a:pPr indent="0" marL="0">
+              <a:buNone/>
+            </a:pPr>
+            <a:r>
+              <a:rPr lang="en-US" sz="750" dirty="0">
+                <a:solidFill>
+                  <a:srgbClr val="333333"/>
+                </a:solidFill>
+                <a:latin typeface="Meiryo" pitchFamily="34" charset="0"/>
+                <a:ea typeface="Meiryo" pitchFamily="34" charset="-122"/>
+                <a:cs typeface="Meiryo" pitchFamily="34" charset="-120"/>
+              </a:rPr>
+              <a:t>AmazonInspector系</a:t>
+            </a:r>
+            <a:endParaRPr lang="en-US" sz="750" dirty="0"/>
+          </a:p>
+        </p:txBody>
+      </p:sp>
+      <p:sp>
+        <p:nvSpPr>
+          <p:cNvPr id="119" name="Shape 114"/>
+          <p:cNvSpPr/>
+          <p:nvPr/>
+        </p:nvSpPr>
+        <p:spPr>
+          <a:xfrm>
+            <a:off x="3749040" y="4914900"/>
+            <a:ext cx="2633472" cy="233172"/>
+          </a:xfrm>
+          <a:prstGeom prst="rect">
+            <a:avLst/>
+          </a:prstGeom>
+          <a:solidFill>
+            <a:srgbClr val="E8F8E8"/>
+          </a:solidFill>
+          <a:ln w="3810">
+            <a:solidFill>
+              <a:srgbClr val="DDDDDD"/>
+            </a:solidFill>
+            <a:prstDash val="solid"/>
+          </a:ln>
+        </p:spPr>
+      </p:sp>
+      <p:sp>
+        <p:nvSpPr>
+          <p:cNvPr id="120" name="Text 115"/>
+          <p:cNvSpPr/>
+          <p:nvPr/>
+        </p:nvSpPr>
+        <p:spPr>
+          <a:xfrm>
+            <a:off x="3803904" y="4914900"/>
+            <a:ext cx="2560320" cy="233172"/>
+          </a:xfrm>
+          <a:prstGeom prst="rect">
+            <a:avLst/>
+          </a:prstGeom>
+          <a:noFill/>
+          <a:ln/>
+        </p:spPr>
+        <p:txBody>
+          <a:bodyPr wrap="square" lIns="0" tIns="0" rIns="0" bIns="0" rtlCol="0" anchor="ctr"/>
+          <a:lstStyle/>
+          <a:p>
+            <a:pPr indent="0" marL="0">
+              <a:buNone/>
+            </a:pPr>
+            <a:r>
+              <a:rPr lang="en-US" sz="700" dirty="0">
+                <a:solidFill>
+                  <a:srgbClr val="1A1A1A"/>
+                </a:solidFill>
+                <a:latin typeface="Meiryo" pitchFamily="34" charset="0"/>
+                <a:ea typeface="Meiryo" pitchFamily="34" charset="-122"/>
+                <a:cs typeface="Meiryo" pitchFamily="34" charset="-120"/>
+              </a:rPr>
+              <a:t>✅ 6本あり</a:t>
+            </a:r>
+            <a:endParaRPr lang="en-US" sz="700" dirty="0"/>
+          </a:p>
+        </p:txBody>
+      </p:sp>
+      <p:sp>
+        <p:nvSpPr>
+          <p:cNvPr id="121" name="Shape 116"/>
+          <p:cNvSpPr/>
+          <p:nvPr/>
+        </p:nvSpPr>
+        <p:spPr>
+          <a:xfrm>
+            <a:off x="6400800" y="4914900"/>
+            <a:ext cx="2633472" cy="233172"/>
+          </a:xfrm>
+          <a:prstGeom prst="rect">
+            <a:avLst/>
+          </a:prstGeom>
+          <a:solidFill>
+            <a:srgbClr val="F5F5F5"/>
+          </a:solidFill>
+          <a:ln w="3810">
+            <a:solidFill>
+              <a:srgbClr val="DDDDDD"/>
+            </a:solidFill>
+            <a:prstDash val="solid"/>
+          </a:ln>
+        </p:spPr>
+      </p:sp>
+      <p:sp>
+        <p:nvSpPr>
+          <p:cNvPr id="122" name="Text 117"/>
+          <p:cNvSpPr/>
+          <p:nvPr/>
+        </p:nvSpPr>
+        <p:spPr>
+          <a:xfrm>
+            <a:off x="6455664" y="4914900"/>
+            <a:ext cx="2560320" cy="233172"/>
+          </a:xfrm>
+          <a:prstGeom prst="rect">
+            <a:avLst/>
+          </a:prstGeom>
+          <a:noFill/>
+          <a:ln/>
+        </p:spPr>
+        <p:txBody>
+          <a:bodyPr wrap="square" lIns="0" tIns="0" rIns="0" bIns="0" rtlCol="0" anchor="ctr"/>
+          <a:lstStyle/>
+          <a:p>
+            <a:pPr indent="0" marL="0">
+              <a:buNone/>
+            </a:pPr>
+            <a:r>
+              <a:rPr lang="en-US" sz="700" dirty="0">
+                <a:solidFill>
+                  <a:srgbClr val="1A1A1A"/>
+                </a:solidFill>
+                <a:latin typeface="Meiryo" pitchFamily="34" charset="0"/>
+                <a:ea typeface="Meiryo" pitchFamily="34" charset="-122"/>
+                <a:cs typeface="Meiryo" pitchFamily="34" charset="-120"/>
+              </a:rPr>
+              <a:t>なし</a:t>
+            </a:r>
+            <a:endParaRPr lang="en-US" sz="700" dirty="0"/>
+          </a:p>
+        </p:txBody>
+      </p:sp>
+      <p:sp>
+        <p:nvSpPr>
+          <p:cNvPr id="123" name="Shape 118"/>
+          <p:cNvSpPr/>
+          <p:nvPr/>
+        </p:nvSpPr>
+        <p:spPr>
+          <a:xfrm>
+            <a:off x="182880" y="5148072"/>
+            <a:ext cx="1170432" cy="233172"/>
+          </a:xfrm>
+          <a:prstGeom prst="rect">
+            <a:avLst/>
+          </a:prstGeom>
+          <a:solidFill>
+            <a:srgbClr val="FAFAFA"/>
+          </a:solidFill>
+          <a:ln w="3810">
+            <a:solidFill>
+              <a:srgbClr val="DDDDDD"/>
+            </a:solidFill>
+            <a:prstDash val="solid"/>
+          </a:ln>
+        </p:spPr>
+      </p:sp>
+      <p:sp>
+        <p:nvSpPr>
+          <p:cNvPr id="124" name="Shape 119"/>
+          <p:cNvSpPr/>
+          <p:nvPr/>
+        </p:nvSpPr>
+        <p:spPr>
+          <a:xfrm>
+            <a:off x="1371600" y="5148072"/>
+            <a:ext cx="2359152" cy="233172"/>
+          </a:xfrm>
+          <a:prstGeom prst="rect">
+            <a:avLst/>
+          </a:prstGeom>
+          <a:solidFill>
+            <a:srgbClr val="FAFAFA"/>
+          </a:solidFill>
+          <a:ln w="3810">
+            <a:solidFill>
+              <a:srgbClr val="DDDDDD"/>
+            </a:solidFill>
+            <a:prstDash val="solid"/>
+          </a:ln>
+        </p:spPr>
+      </p:sp>
+      <p:sp>
+        <p:nvSpPr>
+          <p:cNvPr id="125" name="Text 120"/>
+          <p:cNvSpPr/>
+          <p:nvPr/>
+        </p:nvSpPr>
+        <p:spPr>
+          <a:xfrm>
+            <a:off x="1426464" y="5148072"/>
+            <a:ext cx="2286000" cy="233172"/>
+          </a:xfrm>
+          <a:prstGeom prst="rect">
+            <a:avLst/>
+          </a:prstGeom>
+          <a:noFill/>
+          <a:ln/>
+        </p:spPr>
+        <p:txBody>
+          <a:bodyPr wrap="square" lIns="0" tIns="0" rIns="0" bIns="0" rtlCol="0" anchor="ctr"/>
+          <a:lstStyle/>
+          <a:p>
+            <a:pPr indent="0" marL="0">
+              <a:buNone/>
+            </a:pPr>
+            <a:r>
+              <a:rPr lang="en-US" sz="750" dirty="0">
+                <a:solidFill>
+                  <a:srgbClr val="333333"/>
+                </a:solidFill>
+                <a:latin typeface="Meiryo" pitchFamily="34" charset="0"/>
+                <a:ea typeface="Meiryo" pitchFamily="34" charset="-122"/>
+                <a:cs typeface="Meiryo" pitchFamily="34" charset="-120"/>
+              </a:rPr>
+              <a:t>night-export-sg</a:t>
+            </a:r>
+            <a:endParaRPr lang="en-US" sz="750" dirty="0"/>
+          </a:p>
+        </p:txBody>
+      </p:sp>
+      <p:sp>
+        <p:nvSpPr>
+          <p:cNvPr id="126" name="Shape 121"/>
+          <p:cNvSpPr/>
+          <p:nvPr/>
+        </p:nvSpPr>
+        <p:spPr>
+          <a:xfrm>
+            <a:off x="3749040" y="5148072"/>
+            <a:ext cx="2633472" cy="233172"/>
+          </a:xfrm>
+          <a:prstGeom prst="rect">
+            <a:avLst/>
+          </a:prstGeom>
+          <a:solidFill>
+            <a:srgbClr val="E8F8E8"/>
+          </a:solidFill>
+          <a:ln w="3810">
+            <a:solidFill>
+              <a:srgbClr val="DDDDDD"/>
+            </a:solidFill>
+            <a:prstDash val="solid"/>
+          </a:ln>
+        </p:spPr>
+      </p:sp>
+      <p:sp>
+        <p:nvSpPr>
+          <p:cNvPr id="127" name="Text 122"/>
+          <p:cNvSpPr/>
+          <p:nvPr/>
+        </p:nvSpPr>
+        <p:spPr>
+          <a:xfrm>
+            <a:off x="3803904" y="5148072"/>
+            <a:ext cx="2560320" cy="233172"/>
+          </a:xfrm>
+          <a:prstGeom prst="rect">
+            <a:avLst/>
+          </a:prstGeom>
+          <a:noFill/>
+          <a:ln/>
+        </p:spPr>
+        <p:txBody>
+          <a:bodyPr wrap="square" lIns="0" tIns="0" rIns="0" bIns="0" rtlCol="0" anchor="ctr"/>
+          <a:lstStyle/>
+          <a:p>
+            <a:pPr indent="0" marL="0">
+              <a:buNone/>
+            </a:pPr>
+            <a:r>
+              <a:rPr lang="en-US" sz="700" dirty="0">
+                <a:solidFill>
+                  <a:srgbClr val="1A1A1A"/>
+                </a:solidFill>
+                <a:latin typeface="Meiryo" pitchFamily="34" charset="0"/>
+                <a:ea typeface="Meiryo" pitchFamily="34" charset="-122"/>
+                <a:cs typeface="Meiryo" pitchFamily="34" charset="-120"/>
+              </a:rPr>
+              <a:t>ENABLED (JST 05:30)</a:t>
+            </a:r>
+            <a:endParaRPr lang="en-US" sz="700" dirty="0"/>
+          </a:p>
+        </p:txBody>
+      </p:sp>
+      <p:sp>
+        <p:nvSpPr>
+          <p:cNvPr id="128" name="Shape 123"/>
+          <p:cNvSpPr/>
+          <p:nvPr/>
+        </p:nvSpPr>
+        <p:spPr>
+          <a:xfrm>
+            <a:off x="6400800" y="5148072"/>
+            <a:ext cx="2633472" cy="233172"/>
+          </a:xfrm>
+          <a:prstGeom prst="rect">
+            <a:avLst/>
+          </a:prstGeom>
+          <a:solidFill>
+            <a:srgbClr val="E8F8E8"/>
+          </a:solidFill>
+          <a:ln w="3810">
+            <a:solidFill>
+              <a:srgbClr val="DDDDDD"/>
+            </a:solidFill>
+            <a:prstDash val="solid"/>
+          </a:ln>
+        </p:spPr>
+      </p:sp>
+      <p:sp>
+        <p:nvSpPr>
+          <p:cNvPr id="129" name="Text 124"/>
+          <p:cNvSpPr/>
+          <p:nvPr/>
+        </p:nvSpPr>
+        <p:spPr>
+          <a:xfrm>
+            <a:off x="6455664" y="5148072"/>
+            <a:ext cx="2560320" cy="233172"/>
+          </a:xfrm>
+          <a:prstGeom prst="rect">
+            <a:avLst/>
+          </a:prstGeom>
+          <a:noFill/>
+          <a:ln/>
+        </p:spPr>
+        <p:txBody>
+          <a:bodyPr wrap="square" lIns="0" tIns="0" rIns="0" bIns="0" rtlCol="0" anchor="ctr"/>
+          <a:lstStyle/>
+          <a:p>
+            <a:pPr indent="0" marL="0">
+              <a:buNone/>
+            </a:pPr>
+            <a:r>
+              <a:rPr lang="en-US" sz="700" dirty="0">
+                <a:solidFill>
+                  <a:srgbClr val="1A1A1A"/>
+                </a:solidFill>
+                <a:latin typeface="Meiryo" pitchFamily="34" charset="0"/>
+                <a:ea typeface="Meiryo" pitchFamily="34" charset="-122"/>
+                <a:cs typeface="Meiryo" pitchFamily="34" charset="-120"/>
+              </a:rPr>
+              <a:t>ENABLED (JST 05:30)</a:t>
+            </a:r>
+            <a:endParaRPr lang="en-US" sz="700" dirty="0"/>
+          </a:p>
+        </p:txBody>
+      </p:sp>
+      <p:sp>
+        <p:nvSpPr>
+          <p:cNvPr id="130" name="Shape 125"/>
+          <p:cNvSpPr/>
+          <p:nvPr/>
+        </p:nvSpPr>
+        <p:spPr>
+          <a:xfrm>
+            <a:off x="182880" y="5381244"/>
+            <a:ext cx="1170432" cy="233172"/>
+          </a:xfrm>
+          <a:prstGeom prst="rect">
+            <a:avLst/>
+          </a:prstGeom>
+          <a:solidFill>
+            <a:srgbClr val="E0E7EF"/>
+          </a:solidFill>
+          <a:ln w="3810">
+            <a:solidFill>
+              <a:srgbClr val="DDDDDD"/>
+            </a:solidFill>
+            <a:prstDash val="solid"/>
+          </a:ln>
+        </p:spPr>
+      </p:sp>
+      <p:sp>
+        <p:nvSpPr>
+          <p:cNvPr id="131" name="Text 126"/>
+          <p:cNvSpPr/>
+          <p:nvPr/>
+        </p:nvSpPr>
+        <p:spPr>
+          <a:xfrm>
+            <a:off x="182880" y="5381244"/>
+            <a:ext cx="1170432" cy="233172"/>
+          </a:xfrm>
+          <a:prstGeom prst="rect">
+            <a:avLst/>
+          </a:prstGeom>
+          <a:noFill/>
+          <a:ln/>
+        </p:spPr>
+        <p:txBody>
+          <a:bodyPr wrap="square" lIns="0" tIns="0" rIns="0" bIns="0" rtlCol="0" anchor="ctr"/>
+          <a:lstStyle/>
+          <a:p>
+            <a:pPr algn="ctr" indent="0" marL="0">
+              <a:buNone/>
+            </a:pPr>
+            <a:r>
+              <a:rPr lang="en-US" sz="750" b="1" dirty="0">
+                <a:solidFill>
+                  <a:srgbClr val="2E4057"/>
+                </a:solidFill>
+                <a:latin typeface="Meiryo" pitchFamily="34" charset="0"/>
+                <a:ea typeface="Meiryo" pitchFamily="34" charset="-122"/>
+                <a:cs typeface="Meiryo" pitchFamily="34" charset="-120"/>
+              </a:rPr>
+              <a:t>Lambda</a:t>
+            </a:r>
+            <a:endParaRPr lang="en-US" sz="750" dirty="0"/>
+          </a:p>
+        </p:txBody>
+      </p:sp>
+      <p:sp>
+        <p:nvSpPr>
+          <p:cNvPr id="132" name="Shape 127"/>
+          <p:cNvSpPr/>
+          <p:nvPr/>
+        </p:nvSpPr>
+        <p:spPr>
+          <a:xfrm>
+            <a:off x="1371600" y="5381244"/>
+            <a:ext cx="2359152" cy="233172"/>
+          </a:xfrm>
+          <a:prstGeom prst="rect">
+            <a:avLst/>
+          </a:prstGeom>
+          <a:solidFill>
+            <a:srgbClr val="FFFFFF"/>
+          </a:solidFill>
+          <a:ln w="3810">
+            <a:solidFill>
+              <a:srgbClr val="DDDDDD"/>
+            </a:solidFill>
+            <a:prstDash val="solid"/>
+          </a:ln>
+        </p:spPr>
+      </p:sp>
+      <p:sp>
+        <p:nvSpPr>
+          <p:cNvPr id="133" name="Text 128"/>
+          <p:cNvSpPr/>
+          <p:nvPr/>
+        </p:nvSpPr>
+        <p:spPr>
+          <a:xfrm>
+            <a:off x="1426464" y="5381244"/>
+            <a:ext cx="2286000" cy="233172"/>
+          </a:xfrm>
+          <a:prstGeom prst="rect">
+            <a:avLst/>
+          </a:prstGeom>
+          <a:noFill/>
+          <a:ln/>
+        </p:spPr>
+        <p:txBody>
+          <a:bodyPr wrap="square" lIns="0" tIns="0" rIns="0" bIns="0" rtlCol="0" anchor="ctr"/>
+          <a:lstStyle/>
+          <a:p>
+            <a:pPr indent="0" marL="0">
+              <a:buNone/>
+            </a:pPr>
+            <a:r>
+              <a:rPr lang="en-US" sz="750" dirty="0">
+                <a:solidFill>
+                  <a:srgbClr val="333333"/>
+                </a:solidFill>
+                <a:latin typeface="Meiryo" pitchFamily="34" charset="0"/>
+                <a:ea typeface="Meiryo" pitchFamily="34" charset="-122"/>
+                <a:cs typeface="Meiryo" pitchFamily="34" charset="-120"/>
+              </a:rPr>
+              <a:t>PRD命名誤りLambda</a:t>
+            </a:r>
+            <a:endParaRPr lang="en-US" sz="750" dirty="0"/>
+          </a:p>
+        </p:txBody>
+      </p:sp>
+      <p:sp>
+        <p:nvSpPr>
+          <p:cNvPr id="134" name="Shape 129"/>
+          <p:cNvSpPr/>
+          <p:nvPr/>
+        </p:nvSpPr>
+        <p:spPr>
+          <a:xfrm>
+            <a:off x="3749040" y="5381244"/>
+            <a:ext cx="2633472" cy="233172"/>
+          </a:xfrm>
+          <a:prstGeom prst="rect">
+            <a:avLst/>
+          </a:prstGeom>
+          <a:solidFill>
+            <a:srgbClr val="FFE8E8"/>
+          </a:solidFill>
+          <a:ln w="3810">
+            <a:solidFill>
+              <a:srgbClr val="DDDDDD"/>
+            </a:solidFill>
+            <a:prstDash val="solid"/>
+          </a:ln>
+        </p:spPr>
+      </p:sp>
+      <p:sp>
+        <p:nvSpPr>
+          <p:cNvPr id="135" name="Text 130"/>
+          <p:cNvSpPr/>
+          <p:nvPr/>
+        </p:nvSpPr>
+        <p:spPr>
+          <a:xfrm>
+            <a:off x="3803904" y="5381244"/>
+            <a:ext cx="2560320" cy="233172"/>
+          </a:xfrm>
+          <a:prstGeom prst="rect">
+            <a:avLst/>
+          </a:prstGeom>
+          <a:noFill/>
+          <a:ln/>
+        </p:spPr>
+        <p:txBody>
+          <a:bodyPr wrap="square" lIns="0" tIns="0" rIns="0" bIns="0" rtlCol="0" anchor="ctr"/>
+          <a:lstStyle/>
+          <a:p>
+            <a:pPr indent="0" marL="0">
+              <a:buNone/>
+            </a:pPr>
+            <a:r>
+              <a:rPr lang="en-US" sz="700" dirty="0">
+                <a:solidFill>
+                  <a:srgbClr val="1A1A1A"/>
+                </a:solidFill>
+                <a:latin typeface="Meiryo" pitchFamily="34" charset="0"/>
+                <a:ea typeface="Meiryo" pitchFamily="34" charset="-122"/>
+                <a:cs typeface="Meiryo" pitchFamily="34" charset="-120"/>
+              </a:rPr>
+              <a:t>🔴 ksm-posstg-lmd-export-polling が存在</a:t>
+            </a:r>
+            <a:endParaRPr lang="en-US" sz="700" dirty="0"/>
+          </a:p>
+        </p:txBody>
+      </p:sp>
+      <p:sp>
+        <p:nvSpPr>
+          <p:cNvPr id="136" name="Shape 131"/>
+          <p:cNvSpPr/>
+          <p:nvPr/>
+        </p:nvSpPr>
+        <p:spPr>
+          <a:xfrm>
+            <a:off x="6400800" y="5381244"/>
+            <a:ext cx="2633472" cy="233172"/>
+          </a:xfrm>
+          <a:prstGeom prst="rect">
+            <a:avLst/>
+          </a:prstGeom>
+          <a:solidFill>
+            <a:srgbClr val="E8F8E8"/>
+          </a:solidFill>
+          <a:ln w="3810">
+            <a:solidFill>
+              <a:srgbClr val="DDDDDD"/>
+            </a:solidFill>
+            <a:prstDash val="solid"/>
+          </a:ln>
+        </p:spPr>
+      </p:sp>
+      <p:sp>
+        <p:nvSpPr>
+          <p:cNvPr id="137" name="Text 132"/>
+          <p:cNvSpPr/>
+          <p:nvPr/>
+        </p:nvSpPr>
+        <p:spPr>
+          <a:xfrm>
+            <a:off x="6455664" y="5381244"/>
+            <a:ext cx="2560320" cy="233172"/>
+          </a:xfrm>
+          <a:prstGeom prst="rect">
+            <a:avLst/>
+          </a:prstGeom>
+          <a:noFill/>
+          <a:ln/>
+        </p:spPr>
+        <p:txBody>
+          <a:bodyPr wrap="square" lIns="0" tIns="0" rIns="0" bIns="0" rtlCol="0" anchor="ctr"/>
+          <a:lstStyle/>
+          <a:p>
+            <a:pPr indent="0" marL="0">
+              <a:buNone/>
+            </a:pPr>
+            <a:r>
+              <a:rPr lang="en-US" sz="700" dirty="0">
+                <a:solidFill>
+                  <a:srgbClr val="1A1A1A"/>
+                </a:solidFill>
+                <a:latin typeface="Meiryo" pitchFamily="34" charset="0"/>
+                <a:ea typeface="Meiryo" pitchFamily="34" charset="-122"/>
+                <a:cs typeface="Meiryo" pitchFamily="34" charset="-120"/>
+              </a:rPr>
+              <a:t>正常</a:t>
+            </a:r>
+            <a:endParaRPr lang="en-US" sz="700" dirty="0"/>
+          </a:p>
+        </p:txBody>
+      </p:sp>
+      <p:sp>
+        <p:nvSpPr>
+          <p:cNvPr id="138" name="Shape 133"/>
+          <p:cNvSpPr/>
+          <p:nvPr/>
+        </p:nvSpPr>
+        <p:spPr>
+          <a:xfrm>
+            <a:off x="182880" y="5614416"/>
+            <a:ext cx="1170432" cy="233172"/>
+          </a:xfrm>
+          <a:prstGeom prst="rect">
+            <a:avLst/>
+          </a:prstGeom>
+          <a:solidFill>
+            <a:srgbClr val="FAFAFA"/>
+          </a:solidFill>
+          <a:ln w="3810">
+            <a:solidFill>
+              <a:srgbClr val="DDDDDD"/>
+            </a:solidFill>
+            <a:prstDash val="solid"/>
+          </a:ln>
+        </p:spPr>
+      </p:sp>
+      <p:sp>
+        <p:nvSpPr>
+          <p:cNvPr id="139" name="Shape 134"/>
+          <p:cNvSpPr/>
+          <p:nvPr/>
+        </p:nvSpPr>
+        <p:spPr>
+          <a:xfrm>
+            <a:off x="1371600" y="5614416"/>
+            <a:ext cx="2359152" cy="233172"/>
+          </a:xfrm>
+          <a:prstGeom prst="rect">
+            <a:avLst/>
+          </a:prstGeom>
+          <a:solidFill>
+            <a:srgbClr val="FAFAFA"/>
+          </a:solidFill>
+          <a:ln w="3810">
+            <a:solidFill>
+              <a:srgbClr val="DDDDDD"/>
+            </a:solidFill>
+            <a:prstDash val="solid"/>
+          </a:ln>
+        </p:spPr>
+      </p:sp>
+      <p:sp>
+        <p:nvSpPr>
+          <p:cNvPr id="140" name="Text 135"/>
+          <p:cNvSpPr/>
+          <p:nvPr/>
+        </p:nvSpPr>
+        <p:spPr>
+          <a:xfrm>
+            <a:off x="1426464" y="5614416"/>
+            <a:ext cx="2286000" cy="233172"/>
+          </a:xfrm>
+          <a:prstGeom prst="rect">
+            <a:avLst/>
+          </a:prstGeom>
+          <a:noFill/>
+          <a:ln/>
+        </p:spPr>
+        <p:txBody>
+          <a:bodyPr wrap="square" lIns="0" tIns="0" rIns="0" bIns="0" rtlCol="0" anchor="ctr"/>
+          <a:lstStyle/>
+          <a:p>
+            <a:pPr indent="0" marL="0">
+              <a:buNone/>
+            </a:pPr>
+            <a:r>
+              <a:rPr lang="en-US" sz="750" dirty="0">
+                <a:solidFill>
+                  <a:srgbClr val="333333"/>
+                </a:solidFill>
+                <a:latin typeface="Meiryo" pitchFamily="34" charset="0"/>
+                <a:ea typeface="Meiryo" pitchFamily="34" charset="-122"/>
+                <a:cs typeface="Meiryo" pitchFamily="34" charset="-120"/>
+              </a:rPr>
+              <a:t>CWLogsカバレッジ</a:t>
+            </a:r>
+            <a:endParaRPr lang="en-US" sz="750" dirty="0"/>
+          </a:p>
+        </p:txBody>
+      </p:sp>
+      <p:sp>
+        <p:nvSpPr>
+          <p:cNvPr id="141" name="Shape 136"/>
+          <p:cNvSpPr/>
+          <p:nvPr/>
+        </p:nvSpPr>
+        <p:spPr>
+          <a:xfrm>
+            <a:off x="3749040" y="5614416"/>
+            <a:ext cx="2633472" cy="233172"/>
+          </a:xfrm>
+          <a:prstGeom prst="rect">
+            <a:avLst/>
+          </a:prstGeom>
+          <a:solidFill>
+            <a:srgbClr val="E8F8E8"/>
+          </a:solidFill>
+          <a:ln w="3810">
+            <a:solidFill>
+              <a:srgbClr val="DDDDDD"/>
+            </a:solidFill>
+            <a:prstDash val="solid"/>
+          </a:ln>
+        </p:spPr>
+      </p:sp>
+      <p:sp>
+        <p:nvSpPr>
+          <p:cNvPr id="142" name="Text 137"/>
+          <p:cNvSpPr/>
+          <p:nvPr/>
+        </p:nvSpPr>
+        <p:spPr>
+          <a:xfrm>
+            <a:off x="3803904" y="5614416"/>
+            <a:ext cx="2560320" cy="233172"/>
+          </a:xfrm>
+          <a:prstGeom prst="rect">
+            <a:avLst/>
+          </a:prstGeom>
+          <a:noFill/>
+          <a:ln/>
+        </p:spPr>
+        <p:txBody>
+          <a:bodyPr wrap="square" lIns="0" tIns="0" rIns="0" bIns="0" rtlCol="0" anchor="ctr"/>
+          <a:lstStyle/>
+          <a:p>
+            <a:pPr indent="0" marL="0">
+              <a:buNone/>
+            </a:pPr>
+            <a:r>
+              <a:rPr lang="en-US" sz="700" dirty="0">
+                <a:solidFill>
+                  <a:srgbClr val="1A1A1A"/>
+                </a:solidFill>
+                <a:latin typeface="Meiryo" pitchFamily="34" charset="0"/>
+                <a:ea typeface="Meiryo" pitchFamily="34" charset="-122"/>
+                <a:cs typeface="Meiryo" pitchFamily="34" charset="-120"/>
+              </a:rPr>
+              <a:t>✅ ksm-posprd-lmd-* 全Lambda</a:t>
+            </a:r>
+            <a:endParaRPr lang="en-US" sz="700" dirty="0"/>
+          </a:p>
+        </p:txBody>
+      </p:sp>
+      <p:sp>
+        <p:nvSpPr>
+          <p:cNvPr id="143" name="Shape 138"/>
+          <p:cNvSpPr/>
+          <p:nvPr/>
+        </p:nvSpPr>
+        <p:spPr>
+          <a:xfrm>
+            <a:off x="6400800" y="5614416"/>
+            <a:ext cx="2633472" cy="233172"/>
+          </a:xfrm>
+          <a:prstGeom prst="rect">
+            <a:avLst/>
+          </a:prstGeom>
+          <a:solidFill>
+            <a:srgbClr val="E8F8E8"/>
+          </a:solidFill>
+          <a:ln w="3810">
+            <a:solidFill>
+              <a:srgbClr val="DDDDDD"/>
+            </a:solidFill>
+            <a:prstDash val="solid"/>
+          </a:ln>
+        </p:spPr>
+      </p:sp>
+      <p:sp>
+        <p:nvSpPr>
+          <p:cNvPr id="144" name="Text 139"/>
+          <p:cNvSpPr/>
+          <p:nvPr/>
+        </p:nvSpPr>
+        <p:spPr>
+          <a:xfrm>
+            <a:off x="6455664" y="5614416"/>
+            <a:ext cx="2560320" cy="233172"/>
+          </a:xfrm>
+          <a:prstGeom prst="rect">
+            <a:avLst/>
+          </a:prstGeom>
+          <a:noFill/>
+          <a:ln/>
+        </p:spPr>
+        <p:txBody>
+          <a:bodyPr wrap="square" lIns="0" tIns="0" rIns="0" bIns="0" rtlCol="0" anchor="ctr"/>
+          <a:lstStyle/>
+          <a:p>
+            <a:pPr indent="0" marL="0">
+              <a:buNone/>
+            </a:pPr>
+            <a:r>
+              <a:rPr lang="en-US" sz="700" dirty="0">
+                <a:solidFill>
+                  <a:srgbClr val="1A1A1A"/>
+                </a:solidFill>
+                <a:latin typeface="Meiryo" pitchFamily="34" charset="0"/>
+                <a:ea typeface="Meiryo" pitchFamily="34" charset="-122"/>
+                <a:cs typeface="Meiryo" pitchFamily="34" charset="-120"/>
+              </a:rPr>
+              <a:t>✅ 同様</a:t>
+            </a:r>
+            <a:endParaRPr lang="en-US" sz="700" dirty="0"/>
+          </a:p>
+        </p:txBody>
+      </p:sp>
+      <p:sp>
+        <p:nvSpPr>
+          <p:cNvPr id="145" name="Shape 140"/>
+          <p:cNvSpPr/>
+          <p:nvPr/>
+        </p:nvSpPr>
+        <p:spPr>
+          <a:xfrm>
+            <a:off x="182880" y="5847588"/>
+            <a:ext cx="1170432" cy="233172"/>
+          </a:xfrm>
+          <a:prstGeom prst="rect">
+            <a:avLst/>
+          </a:prstGeom>
+          <a:solidFill>
+            <a:srgbClr val="E0E7EF"/>
+          </a:solidFill>
+          <a:ln w="3810">
+            <a:solidFill>
+              <a:srgbClr val="DDDDDD"/>
+            </a:solidFill>
+            <a:prstDash val="solid"/>
+          </a:ln>
+        </p:spPr>
+      </p:sp>
+      <p:sp>
+        <p:nvSpPr>
+          <p:cNvPr id="146" name="Text 141"/>
+          <p:cNvSpPr/>
+          <p:nvPr/>
+        </p:nvSpPr>
+        <p:spPr>
+          <a:xfrm>
+            <a:off x="182880" y="5847588"/>
+            <a:ext cx="1170432" cy="233172"/>
+          </a:xfrm>
+          <a:prstGeom prst="rect">
+            <a:avLst/>
+          </a:prstGeom>
+          <a:noFill/>
+          <a:ln/>
+        </p:spPr>
+        <p:txBody>
+          <a:bodyPr wrap="square" lIns="0" tIns="0" rIns="0" bIns="0" rtlCol="0" anchor="ctr"/>
+          <a:lstStyle/>
+          <a:p>
+            <a:pPr algn="ctr" indent="0" marL="0">
+              <a:buNone/>
+            </a:pPr>
+            <a:r>
+              <a:rPr lang="en-US" sz="750" b="1" dirty="0">
+                <a:solidFill>
+                  <a:srgbClr val="2E4057"/>
+                </a:solidFill>
+                <a:latin typeface="Meiryo" pitchFamily="34" charset="0"/>
+                <a:ea typeface="Meiryo" pitchFamily="34" charset="-122"/>
+                <a:cs typeface="Meiryo" pitchFamily="34" charset="-120"/>
+              </a:rPr>
+              <a:t>VPN</a:t>
+            </a:r>
+            <a:endParaRPr lang="en-US" sz="750" dirty="0"/>
+          </a:p>
+        </p:txBody>
+      </p:sp>
+      <p:sp>
+        <p:nvSpPr>
+          <p:cNvPr id="147" name="Shape 142"/>
+          <p:cNvSpPr/>
+          <p:nvPr/>
+        </p:nvSpPr>
+        <p:spPr>
+          <a:xfrm>
+            <a:off x="1371600" y="5847588"/>
+            <a:ext cx="2359152" cy="233172"/>
+          </a:xfrm>
+          <a:prstGeom prst="rect">
+            <a:avLst/>
+          </a:prstGeom>
+          <a:solidFill>
+            <a:srgbClr val="FFFFFF"/>
+          </a:solidFill>
+          <a:ln w="3810">
+            <a:solidFill>
+              <a:srgbClr val="DDDDDD"/>
+            </a:solidFill>
+            <a:prstDash val="solid"/>
+          </a:ln>
+        </p:spPr>
+      </p:sp>
+      <p:sp>
+        <p:nvSpPr>
+          <p:cNvPr id="148" name="Text 143"/>
+          <p:cNvSpPr/>
+          <p:nvPr/>
+        </p:nvSpPr>
+        <p:spPr>
+          <a:xfrm>
+            <a:off x="1426464" y="5847588"/>
+            <a:ext cx="2286000" cy="233172"/>
+          </a:xfrm>
+          <a:prstGeom prst="rect">
+            <a:avLst/>
+          </a:prstGeom>
+          <a:noFill/>
+          <a:ln/>
+        </p:spPr>
+        <p:txBody>
+          <a:bodyPr wrap="square" lIns="0" tIns="0" rIns="0" bIns="0" rtlCol="0" anchor="ctr"/>
+          <a:lstStyle/>
+          <a:p>
+            <a:pPr indent="0" marL="0">
+              <a:buNone/>
+            </a:pPr>
+            <a:r>
+              <a:rPr lang="en-US" sz="750" dirty="0">
+                <a:solidFill>
+                  <a:srgbClr val="333333"/>
+                </a:solidFill>
+                <a:latin typeface="Meiryo" pitchFamily="34" charset="0"/>
+                <a:ea typeface="Meiryo" pitchFamily="34" charset="-122"/>
+                <a:cs typeface="Meiryo" pitchFamily="34" charset="-120"/>
+              </a:rPr>
+              <a:t>Tunnel1 (T1)</a:t>
+            </a:r>
+            <a:endParaRPr lang="en-US" sz="750" dirty="0"/>
+          </a:p>
+        </p:txBody>
+      </p:sp>
+      <p:sp>
+        <p:nvSpPr>
+          <p:cNvPr id="149" name="Shape 144"/>
+          <p:cNvSpPr/>
+          <p:nvPr/>
+        </p:nvSpPr>
+        <p:spPr>
+          <a:xfrm>
+            <a:off x="3749040" y="5847588"/>
+            <a:ext cx="2633472" cy="233172"/>
+          </a:xfrm>
+          <a:prstGeom prst="rect">
+            <a:avLst/>
+          </a:prstGeom>
+          <a:solidFill>
+            <a:srgbClr val="E8F8E8"/>
+          </a:solidFill>
+          <a:ln w="3810">
+            <a:solidFill>
+              <a:srgbClr val="DDDDDD"/>
+            </a:solidFill>
+            <a:prstDash val="solid"/>
+          </a:ln>
+        </p:spPr>
+      </p:sp>
+      <p:sp>
+        <p:nvSpPr>
+          <p:cNvPr id="150" name="Text 145"/>
+          <p:cNvSpPr/>
+          <p:nvPr/>
+        </p:nvSpPr>
+        <p:spPr>
+          <a:xfrm>
+            <a:off x="3803904" y="5847588"/>
+            <a:ext cx="2560320" cy="233172"/>
+          </a:xfrm>
+          <a:prstGeom prst="rect">
+            <a:avLst/>
+          </a:prstGeom>
+          <a:noFill/>
+          <a:ln/>
+        </p:spPr>
+        <p:txBody>
+          <a:bodyPr wrap="square" lIns="0" tIns="0" rIns="0" bIns="0" rtlCol="0" anchor="ctr"/>
+          <a:lstStyle/>
+          <a:p>
+            <a:pPr indent="0" marL="0">
+              <a:buNone/>
+            </a:pPr>
+            <a:r>
+              <a:rPr lang="en-US" sz="700" dirty="0">
+                <a:solidFill>
+                  <a:srgbClr val="1A1A1A"/>
+                </a:solidFill>
+                <a:latin typeface="Meiryo" pitchFamily="34" charset="0"/>
+                <a:ea typeface="Meiryo" pitchFamily="34" charset="-122"/>
+                <a:cs typeface="Meiryo" pitchFamily="34" charset="-120"/>
+              </a:rPr>
+              <a:t>✅ UP (35.79.95.18)</a:t>
+            </a:r>
+            <a:endParaRPr lang="en-US" sz="700" dirty="0"/>
+          </a:p>
+        </p:txBody>
+      </p:sp>
+      <p:sp>
+        <p:nvSpPr>
+          <p:cNvPr id="151" name="Shape 146"/>
+          <p:cNvSpPr/>
+          <p:nvPr/>
+        </p:nvSpPr>
+        <p:spPr>
+          <a:xfrm>
+            <a:off x="6400800" y="5847588"/>
+            <a:ext cx="2633472" cy="233172"/>
+          </a:xfrm>
+          <a:prstGeom prst="rect">
+            <a:avLst/>
+          </a:prstGeom>
+          <a:solidFill>
+            <a:srgbClr val="E8F8E8"/>
+          </a:solidFill>
+          <a:ln w="3810">
+            <a:solidFill>
+              <a:srgbClr val="DDDDDD"/>
+            </a:solidFill>
+            <a:prstDash val="solid"/>
+          </a:ln>
+        </p:spPr>
+      </p:sp>
+      <p:sp>
+        <p:nvSpPr>
+          <p:cNvPr id="152" name="Text 147"/>
+          <p:cNvSpPr/>
+          <p:nvPr/>
+        </p:nvSpPr>
+        <p:spPr>
+          <a:xfrm>
+            <a:off x="6455664" y="5847588"/>
+            <a:ext cx="2560320" cy="233172"/>
+          </a:xfrm>
+          <a:prstGeom prst="rect">
+            <a:avLst/>
+          </a:prstGeom>
+          <a:noFill/>
+          <a:ln/>
+        </p:spPr>
+        <p:txBody>
+          <a:bodyPr wrap="square" lIns="0" tIns="0" rIns="0" bIns="0" rtlCol="0" anchor="ctr"/>
+          <a:lstStyle/>
+          <a:p>
+            <a:pPr indent="0" marL="0">
+              <a:buNone/>
+            </a:pPr>
+            <a:r>
+              <a:rPr lang="en-US" sz="700" dirty="0">
+                <a:solidFill>
+                  <a:srgbClr val="1A1A1A"/>
+                </a:solidFill>
+                <a:latin typeface="Meiryo" pitchFamily="34" charset="0"/>
+                <a:ea typeface="Meiryo" pitchFamily="34" charset="-122"/>
+                <a:cs typeface="Meiryo" pitchFamily="34" charset="-120"/>
+              </a:rPr>
+              <a:t>✅ UP</a:t>
+            </a:r>
+            <a:endParaRPr lang="en-US" sz="700" dirty="0"/>
+          </a:p>
+        </p:txBody>
+      </p:sp>
+      <p:sp>
+        <p:nvSpPr>
+          <p:cNvPr id="153" name="Shape 148"/>
+          <p:cNvSpPr/>
+          <p:nvPr/>
+        </p:nvSpPr>
+        <p:spPr>
+          <a:xfrm>
+            <a:off x="182880" y="6080760"/>
+            <a:ext cx="1170432" cy="233172"/>
+          </a:xfrm>
+          <a:prstGeom prst="rect">
+            <a:avLst/>
+          </a:prstGeom>
+          <a:solidFill>
+            <a:srgbClr val="FAFAFA"/>
+          </a:solidFill>
+          <a:ln w="3810">
+            <a:solidFill>
+              <a:srgbClr val="DDDDDD"/>
+            </a:solidFill>
+            <a:prstDash val="solid"/>
+          </a:ln>
+        </p:spPr>
+      </p:sp>
+      <p:sp>
+        <p:nvSpPr>
+          <p:cNvPr id="154" name="Shape 149"/>
+          <p:cNvSpPr/>
+          <p:nvPr/>
+        </p:nvSpPr>
+        <p:spPr>
+          <a:xfrm>
+            <a:off x="1371600" y="6080760"/>
+            <a:ext cx="2359152" cy="233172"/>
+          </a:xfrm>
+          <a:prstGeom prst="rect">
+            <a:avLst/>
+          </a:prstGeom>
+          <a:solidFill>
+            <a:srgbClr val="FAFAFA"/>
+          </a:solidFill>
+          <a:ln w="3810">
+            <a:solidFill>
+              <a:srgbClr val="DDDDDD"/>
+            </a:solidFill>
+            <a:prstDash val="solid"/>
+          </a:ln>
+        </p:spPr>
+      </p:sp>
+      <p:sp>
+        <p:nvSpPr>
+          <p:cNvPr id="155" name="Text 150"/>
+          <p:cNvSpPr/>
+          <p:nvPr/>
+        </p:nvSpPr>
+        <p:spPr>
+          <a:xfrm>
+            <a:off x="1426464" y="6080760"/>
+            <a:ext cx="2286000" cy="233172"/>
+          </a:xfrm>
+          <a:prstGeom prst="rect">
+            <a:avLst/>
+          </a:prstGeom>
+          <a:noFill/>
+          <a:ln/>
+        </p:spPr>
+        <p:txBody>
+          <a:bodyPr wrap="square" lIns="0" tIns="0" rIns="0" bIns="0" rtlCol="0" anchor="ctr"/>
+          <a:lstStyle/>
+          <a:p>
+            <a:pPr indent="0" marL="0">
+              <a:buNone/>
+            </a:pPr>
+            <a:r>
+              <a:rPr lang="en-US" sz="750" dirty="0">
+                <a:solidFill>
+                  <a:srgbClr val="333333"/>
+                </a:solidFill>
+                <a:latin typeface="Meiryo" pitchFamily="34" charset="0"/>
+                <a:ea typeface="Meiryo" pitchFamily="34" charset="-122"/>
+                <a:cs typeface="Meiryo" pitchFamily="34" charset="-120"/>
+              </a:rPr>
+              <a:t>Tunnel2 (T2)</a:t>
+            </a:r>
+            <a:endParaRPr lang="en-US" sz="750" dirty="0"/>
+          </a:p>
+        </p:txBody>
+      </p:sp>
+      <p:sp>
+        <p:nvSpPr>
+          <p:cNvPr id="156" name="Shape 151"/>
+          <p:cNvSpPr/>
+          <p:nvPr/>
+        </p:nvSpPr>
+        <p:spPr>
+          <a:xfrm>
+            <a:off x="3749040" y="6080760"/>
+            <a:ext cx="2633472" cy="233172"/>
+          </a:xfrm>
+          <a:prstGeom prst="rect">
+            <a:avLst/>
+          </a:prstGeom>
+          <a:solidFill>
+            <a:srgbClr val="FFE8E8"/>
+          </a:solidFill>
+          <a:ln w="3810">
+            <a:solidFill>
+              <a:srgbClr val="DDDDDD"/>
+            </a:solidFill>
+            <a:prstDash val="solid"/>
+          </a:ln>
+        </p:spPr>
+      </p:sp>
+      <p:sp>
+        <p:nvSpPr>
+          <p:cNvPr id="157" name="Text 152"/>
+          <p:cNvSpPr/>
+          <p:nvPr/>
+        </p:nvSpPr>
+        <p:spPr>
+          <a:xfrm>
+            <a:off x="3803904" y="6080760"/>
+            <a:ext cx="2560320" cy="233172"/>
+          </a:xfrm>
+          <a:prstGeom prst="rect">
+            <a:avLst/>
+          </a:prstGeom>
+          <a:noFill/>
+          <a:ln/>
+        </p:spPr>
+        <p:txBody>
+          <a:bodyPr wrap="square" lIns="0" tIns="0" rIns="0" bIns="0" rtlCol="0" anchor="ctr"/>
+          <a:lstStyle/>
+          <a:p>
+            <a:pPr indent="0" marL="0">
+              <a:buNone/>
+            </a:pPr>
+            <a:r>
+              <a:rPr lang="en-US" sz="700" dirty="0">
+                <a:solidFill>
+                  <a:srgbClr val="1A1A1A"/>
+                </a:solidFill>
+                <a:latin typeface="Meiryo" pitchFamily="34" charset="0"/>
+                <a:ea typeface="Meiryo" pitchFamily="34" charset="-122"/>
+                <a:cs typeface="Meiryo" pitchFamily="34" charset="-120"/>
+              </a:rPr>
+              <a:t>🔴 DOWN (2026-02-19～)</a:t>
+            </a:r>
+            <a:endParaRPr lang="en-US" sz="700" dirty="0"/>
+          </a:p>
+        </p:txBody>
+      </p:sp>
+      <p:sp>
+        <p:nvSpPr>
+          <p:cNvPr id="158" name="Shape 153"/>
+          <p:cNvSpPr/>
+          <p:nvPr/>
+        </p:nvSpPr>
+        <p:spPr>
+          <a:xfrm>
+            <a:off x="6400800" y="6080760"/>
+            <a:ext cx="2633472" cy="233172"/>
+          </a:xfrm>
+          <a:prstGeom prst="rect">
+            <a:avLst/>
+          </a:prstGeom>
+          <a:solidFill>
+            <a:srgbClr val="FFE8E8"/>
+          </a:solidFill>
+          <a:ln w="3810">
+            <a:solidFill>
+              <a:srgbClr val="DDDDDD"/>
+            </a:solidFill>
+            <a:prstDash val="solid"/>
+          </a:ln>
+        </p:spPr>
+      </p:sp>
+      <p:sp>
+        <p:nvSpPr>
+          <p:cNvPr id="159" name="Text 154"/>
+          <p:cNvSpPr/>
+          <p:nvPr/>
+        </p:nvSpPr>
+        <p:spPr>
+          <a:xfrm>
+            <a:off x="6455664" y="6080760"/>
+            <a:ext cx="2560320" cy="233172"/>
+          </a:xfrm>
+          <a:prstGeom prst="rect">
+            <a:avLst/>
+          </a:prstGeom>
+          <a:noFill/>
+          <a:ln/>
+        </p:spPr>
+        <p:txBody>
+          <a:bodyPr wrap="square" lIns="0" tIns="0" rIns="0" bIns="0" rtlCol="0" anchor="ctr"/>
+          <a:lstStyle/>
+          <a:p>
+            <a:pPr indent="0" marL="0">
+              <a:buNone/>
+            </a:pPr>
+            <a:r>
+              <a:rPr lang="en-US" sz="700" dirty="0">
+                <a:solidFill>
+                  <a:srgbClr val="1A1A1A"/>
+                </a:solidFill>
+                <a:latin typeface="Meiryo" pitchFamily="34" charset="0"/>
+                <a:ea typeface="Meiryo" pitchFamily="34" charset="-122"/>
+                <a:cs typeface="Meiryo" pitchFamily="34" charset="-120"/>
+              </a:rPr>
+              <a:t>🔴 DOWN</a:t>
+            </a:r>
+            <a:endParaRPr lang="en-US" sz="700" dirty="0"/>
+          </a:p>
+        </p:txBody>
+      </p:sp>
+      <p:sp>
+        <p:nvSpPr>
+          <p:cNvPr id="160" name="Shape 155"/>
+          <p:cNvSpPr/>
+          <p:nvPr/>
+        </p:nvSpPr>
+        <p:spPr>
+          <a:xfrm>
+            <a:off x="182880" y="6368796"/>
+            <a:ext cx="2286000" cy="201168"/>
+          </a:xfrm>
+          <a:prstGeom prst="rect">
+            <a:avLst/>
+          </a:prstGeom>
+          <a:solidFill>
+            <a:srgbClr val="FFE8E8"/>
+          </a:solidFill>
+          <a:ln w="6350">
+            <a:solidFill>
+              <a:srgbClr val="BBBBBB"/>
+            </a:solidFill>
+            <a:prstDash val="solid"/>
+          </a:ln>
+        </p:spPr>
+      </p:sp>
+      <p:sp>
+        <p:nvSpPr>
+          <p:cNvPr id="161" name="Text 156"/>
+          <p:cNvSpPr/>
+          <p:nvPr/>
+        </p:nvSpPr>
+        <p:spPr>
+          <a:xfrm>
+            <a:off x="201168" y="6368796"/>
+            <a:ext cx="2249424" cy="201168"/>
+          </a:xfrm>
+          <a:prstGeom prst="rect">
+            <a:avLst/>
+          </a:prstGeom>
+          <a:noFill/>
+          <a:ln/>
+        </p:spPr>
+        <p:txBody>
+          <a:bodyPr wrap="square" lIns="0" tIns="0" rIns="0" bIns="0" rtlCol="0" anchor="ctr"/>
+          <a:lstStyle/>
+          <a:p>
+            <a:pPr indent="0" marL="0">
+              <a:buNone/>
+            </a:pPr>
+            <a:r>
+              <a:rPr lang="en-US" sz="700" dirty="0">
+                <a:solidFill>
+                  <a:srgbClr val="333333"/>
+                </a:solidFill>
+                <a:latin typeface="Meiryo" pitchFamily="34" charset="0"/>
+                <a:ea typeface="Meiryo" pitchFamily="34" charset="-122"/>
+                <a:cs typeface="Meiryo" pitchFamily="34" charset="-120"/>
+              </a:rPr>
+              <a:t>🔴 STGのみの問題・要対応</a:t>
+            </a:r>
+            <a:endParaRPr lang="en-US" sz="700" dirty="0"/>
+          </a:p>
+        </p:txBody>
+      </p:sp>
+      <p:sp>
+        <p:nvSpPr>
+          <p:cNvPr id="162" name="Shape 157"/>
+          <p:cNvSpPr/>
+          <p:nvPr/>
+        </p:nvSpPr>
+        <p:spPr>
+          <a:xfrm>
+            <a:off x="2578608" y="6368796"/>
+            <a:ext cx="2286000" cy="201168"/>
+          </a:xfrm>
+          <a:prstGeom prst="rect">
+            <a:avLst/>
+          </a:prstGeom>
+          <a:solidFill>
+            <a:srgbClr val="FFF8E1"/>
+          </a:solidFill>
+          <a:ln w="6350">
+            <a:solidFill>
+              <a:srgbClr val="BBBBBB"/>
+            </a:solidFill>
+            <a:prstDash val="solid"/>
+          </a:ln>
+        </p:spPr>
+      </p:sp>
+      <p:sp>
+        <p:nvSpPr>
+          <p:cNvPr id="163" name="Text 158"/>
+          <p:cNvSpPr/>
+          <p:nvPr/>
+        </p:nvSpPr>
+        <p:spPr>
+          <a:xfrm>
+            <a:off x="2596896" y="6368796"/>
+            <a:ext cx="2249424" cy="201168"/>
+          </a:xfrm>
+          <a:prstGeom prst="rect">
+            <a:avLst/>
+          </a:prstGeom>
+          <a:noFill/>
+          <a:ln/>
+        </p:spPr>
+        <p:txBody>
+          <a:bodyPr wrap="square" lIns="0" tIns="0" rIns="0" bIns="0" rtlCol="0" anchor="ctr"/>
+          <a:lstStyle/>
+          <a:p>
+            <a:pPr indent="0" marL="0">
+              <a:buNone/>
+            </a:pPr>
+            <a:r>
+              <a:rPr lang="en-US" sz="700" dirty="0">
+                <a:solidFill>
+                  <a:srgbClr val="333333"/>
+                </a:solidFill>
+                <a:latin typeface="Meiryo" pitchFamily="34" charset="0"/>
+                <a:ea typeface="Meiryo" pitchFamily="34" charset="-122"/>
+                <a:cs typeface="Meiryo" pitchFamily="34" charset="-120"/>
+              </a:rPr>
+              <a:t>⚠️ 両環境共通の課題</a:t>
+            </a:r>
+            <a:endParaRPr lang="en-US" sz="700" dirty="0"/>
+          </a:p>
+        </p:txBody>
+      </p:sp>
+      <p:sp>
+        <p:nvSpPr>
+          <p:cNvPr id="164" name="Shape 159"/>
+          <p:cNvSpPr/>
+          <p:nvPr/>
+        </p:nvSpPr>
+        <p:spPr>
+          <a:xfrm>
+            <a:off x="4974336" y="6368796"/>
+            <a:ext cx="2286000" cy="201168"/>
+          </a:xfrm>
+          <a:prstGeom prst="rect">
+            <a:avLst/>
+          </a:prstGeom>
+          <a:solidFill>
+            <a:srgbClr val="E8F8E8"/>
+          </a:solidFill>
+          <a:ln w="6350">
+            <a:solidFill>
+              <a:srgbClr val="BBBBBB"/>
+            </a:solidFill>
+            <a:prstDash val="solid"/>
+          </a:ln>
+        </p:spPr>
+      </p:sp>
+      <p:sp>
+        <p:nvSpPr>
+          <p:cNvPr id="165" name="Text 160"/>
+          <p:cNvSpPr/>
+          <p:nvPr/>
+        </p:nvSpPr>
+        <p:spPr>
+          <a:xfrm>
+            <a:off x="4992624" y="6368796"/>
+            <a:ext cx="2249424" cy="201168"/>
+          </a:xfrm>
+          <a:prstGeom prst="rect">
+            <a:avLst/>
+          </a:prstGeom>
+          <a:noFill/>
+          <a:ln/>
+        </p:spPr>
+        <p:txBody>
+          <a:bodyPr wrap="square" lIns="0" tIns="0" rIns="0" bIns="0" rtlCol="0" anchor="ctr"/>
+          <a:lstStyle/>
+          <a:p>
+            <a:pPr indent="0" marL="0">
+              <a:buNone/>
+            </a:pPr>
+            <a:r>
+              <a:rPr lang="en-US" sz="700" dirty="0">
+                <a:solidFill>
+                  <a:srgbClr val="333333"/>
+                </a:solidFill>
+                <a:latin typeface="Meiryo" pitchFamily="34" charset="0"/>
+                <a:ea typeface="Meiryo" pitchFamily="34" charset="-122"/>
+                <a:cs typeface="Meiryo" pitchFamily="34" charset="-120"/>
+              </a:rPr>
+              <a:t>✅ PRD正常 / STG問題</a:t>
+            </a:r>
+            <a:endParaRPr lang="en-US" sz="700" dirty="0"/>
+          </a:p>
+        </p:txBody>
+      </p:sp>
+      <p:sp>
+        <p:nvSpPr>
+          <p:cNvPr id="166" name="Shape 161"/>
+          <p:cNvSpPr/>
+          <p:nvPr/>
+        </p:nvSpPr>
+        <p:spPr>
+          <a:xfrm>
+            <a:off x="7370064" y="6368796"/>
+            <a:ext cx="2286000" cy="201168"/>
+          </a:xfrm>
+          <a:prstGeom prst="rect">
+            <a:avLst/>
+          </a:prstGeom>
+          <a:solidFill>
+            <a:srgbClr val="F5F5F5"/>
+          </a:solidFill>
+          <a:ln w="6350">
+            <a:solidFill>
+              <a:srgbClr val="BBBBBB"/>
+            </a:solidFill>
+            <a:prstDash val="solid"/>
+          </a:ln>
+        </p:spPr>
+      </p:sp>
+      <p:sp>
+        <p:nvSpPr>
+          <p:cNvPr id="167" name="Text 162"/>
+          <p:cNvSpPr/>
+          <p:nvPr/>
+        </p:nvSpPr>
+        <p:spPr>
+          <a:xfrm>
+            <a:off x="7388352" y="6368796"/>
+            <a:ext cx="2249424" cy="201168"/>
+          </a:xfrm>
+          <a:prstGeom prst="rect">
+            <a:avLst/>
+          </a:prstGeom>
+          <a:noFill/>
+          <a:ln/>
+        </p:spPr>
+        <p:txBody>
+          <a:bodyPr wrap="square" lIns="0" tIns="0" rIns="0" bIns="0" rtlCol="0" anchor="ctr"/>
+          <a:lstStyle/>
+          <a:p>
+            <a:pPr indent="0" marL="0">
+              <a:buNone/>
+            </a:pPr>
+            <a:r>
+              <a:rPr lang="en-US" sz="700" dirty="0">
+                <a:solidFill>
+                  <a:srgbClr val="333333"/>
+                </a:solidFill>
+                <a:latin typeface="Meiryo" pitchFamily="34" charset="0"/>
+                <a:ea typeface="Meiryo" pitchFamily="34" charset="-122"/>
+                <a:cs typeface="Meiryo" pitchFamily="34" charset="-120"/>
+              </a:rPr>
+              <a:t>　通常の環境差異</a:t>
+            </a:r>
+            <a:endParaRPr lang="en-US" sz="700" dirty="0"/>
+          </a:p>
+        </p:txBody>
+      </p:sp>
+    </p:spTree>
+  </p:cSld>
+  <p:clrMapOvr>
+    <a:masterClrMapping/>
+  </p:clrMapOvr>
+</p:sld>
+</file>
+
+<file path=ppt/slides/slide9.xml><?xml version="1.0" encoding="utf-8"?>
+<p:sld xmlns:a="http://schemas.openxmlformats.org/drawingml/2006/main" xmlns:r="http://schemas.openxmlformats.org/officeDocument/2006/relationships" xmlns:p="http://schemas.openxmlformats.org/presentationml/2006/main">
+  <p:cSld name="Slide 9">
+    <p:bg>
+      <p:bgPr>
+        <a:solidFill>
+          <a:srgbClr val="FFFFFF"/>
+        </a:solidFill>
+      </p:bgPr>
+    </p:bg>
+    <p:spTree>
+      <p:nvGrpSpPr>
+        <p:cNvPr id="1" name=""/>
+        <p:cNvGrpSpPr/>
+        <p:nvPr/>
+      </p:nvGrpSpPr>
+      <p:grpSpPr>
+        <a:xfrm>
+          <a:off x="0" y="0"/>
+          <a:ext cx="0" cy="0"/>
+          <a:chOff x="0" y="0"/>
+          <a:chExt cx="0" cy="0"/>
+        </a:xfrm>
+      </p:grpSpPr>
+      <p:pic>
+        <p:nvPicPr>
+          <p:cNvPr id="2" name="Image 0" descr="/mnt/skills/user/luvina-ppt/assets/decoration_dots.png">    </p:cNvPr>
+          <p:cNvPicPr>
+            <a:picLocks noChangeAspect="1"/>
+          </p:cNvPicPr>
+          <p:nvPr/>
+        </p:nvPicPr>
+        <p:blipFill>
+          <a:blip r:embed="rId1"/>
+          <a:stretch>
+            <a:fillRect/>
+          </a:stretch>
+        </p:blipFill>
+        <p:spPr>
+          <a:xfrm>
+            <a:off x="0" y="0"/>
+            <a:ext cx="3904488" cy="2880360"/>
+          </a:xfrm>
+          <a:prstGeom prst="rect">
+            <a:avLst/>
+          </a:prstGeom>
+        </p:spPr>
+      </p:pic>
+      <p:pic>
+        <p:nvPicPr>
+          <p:cNvPr id="3" name="Image 1" descr="/mnt/skills/user/luvina-ppt/assets/luvina_badge.png">    </p:cNvPr>
+          <p:cNvPicPr>
+            <a:picLocks noChangeAspect="1"/>
+          </p:cNvPicPr>
+          <p:nvPr/>
+        </p:nvPicPr>
+        <p:blipFill>
+          <a:blip r:embed="rId2"/>
+          <a:stretch>
+            <a:fillRect/>
+          </a:stretch>
+        </p:blipFill>
+        <p:spPr>
+          <a:xfrm>
+            <a:off x="109728" y="109728"/>
+            <a:ext cx="1874520" cy="466344"/>
+          </a:xfrm>
+          <a:prstGeom prst="rect">
+            <a:avLst/>
+          </a:prstGeom>
+        </p:spPr>
+      </p:pic>
+      <p:sp>
+        <p:nvSpPr>
+          <p:cNvPr id="4" name="Text 0"/>
+          <p:cNvSpPr/>
+          <p:nvPr/>
+        </p:nvSpPr>
+        <p:spPr>
+          <a:xfrm>
+            <a:off x="438912" y="173736"/>
+            <a:ext cx="1216152" cy="329184"/>
+          </a:xfrm>
+          <a:prstGeom prst="rect">
+            <a:avLst/>
+          </a:prstGeom>
+          <a:noFill/>
+          <a:ln/>
+        </p:spPr>
+        <p:txBody>
+          <a:bodyPr wrap="square" lIns="0" tIns="0" rIns="0" bIns="0" rtlCol="0" anchor="ctr"/>
+          <a:lstStyle/>
+          <a:p>
+            <a:pPr indent="0" marL="0">
+              <a:buNone/>
+            </a:pPr>
+            <a:r>
+              <a:rPr lang="en-US" sz="1600" b="1" dirty="0">
+                <a:solidFill>
+                  <a:srgbClr val="FFFFFF"/>
+                </a:solidFill>
+                <a:latin typeface="Arial Black" pitchFamily="34" charset="0"/>
+                <a:ea typeface="Arial Black" pitchFamily="34" charset="-122"/>
+                <a:cs typeface="Arial Black" pitchFamily="34" charset="-120"/>
+              </a:rPr>
+              <a:t>LUVINA</a:t>
+            </a:r>
+            <a:endParaRPr lang="en-US" sz="1600" dirty="0"/>
+          </a:p>
+        </p:txBody>
+      </p:sp>
+      <p:pic>
+        <p:nvPicPr>
+          <p:cNvPr id="5" name="Image 2" descr="/mnt/skills/user/luvina-ppt/assets/luvina_logo.png">    </p:cNvPr>
+          <p:cNvPicPr>
+            <a:picLocks noChangeAspect="1"/>
+          </p:cNvPicPr>
+          <p:nvPr/>
+        </p:nvPicPr>
+        <p:blipFill>
+          <a:blip r:embed="rId3"/>
+          <a:stretch>
+            <a:fillRect/>
+          </a:stretch>
+        </p:blipFill>
+        <p:spPr>
+          <a:xfrm>
+            <a:off x="8924544" y="109728"/>
+            <a:ext cx="932688" cy="466344"/>
+          </a:xfrm>
+          <a:prstGeom prst="rect">
+            <a:avLst/>
+          </a:prstGeom>
+        </p:spPr>
+      </p:pic>
+      <p:sp>
+        <p:nvSpPr>
+          <p:cNvPr id="6" name="Shape 1"/>
+          <p:cNvSpPr/>
+          <p:nvPr/>
+        </p:nvSpPr>
+        <p:spPr>
+          <a:xfrm>
+            <a:off x="0" y="640080"/>
+            <a:ext cx="9902952" cy="548640"/>
+          </a:xfrm>
+          <a:prstGeom prst="rect">
+            <a:avLst/>
+          </a:prstGeom>
+          <a:solidFill>
+            <a:srgbClr val="D0232A"/>
+          </a:solidFill>
+          <a:ln/>
+        </p:spPr>
+      </p:sp>
+      <p:sp>
+        <p:nvSpPr>
+          <p:cNvPr id="7" name="Text 2"/>
+          <p:cNvSpPr/>
+          <p:nvPr/>
+        </p:nvSpPr>
+        <p:spPr>
+          <a:xfrm>
+            <a:off x="301752" y="786384"/>
+            <a:ext cx="9144000" cy="356616"/>
+          </a:xfrm>
+          <a:prstGeom prst="rect">
+            <a:avLst/>
+          </a:prstGeom>
+          <a:noFill/>
+          <a:ln/>
+        </p:spPr>
+        <p:txBody>
+          <a:bodyPr wrap="square" lIns="0" tIns="0" rIns="0" bIns="0" rtlCol="0" anchor="ctr"/>
+          <a:lstStyle/>
+          <a:p>
+            <a:pPr indent="0" marL="0">
+              <a:buNone/>
+            </a:pPr>
+            <a:r>
+              <a:rPr lang="en-US" sz="1800" b="1" dirty="0">
+                <a:solidFill>
+                  <a:srgbClr val="FFFFFF"/>
+                </a:solidFill>
+                <a:latin typeface="Meiryo" pitchFamily="34" charset="0"/>
+                <a:ea typeface="Meiryo" pitchFamily="34" charset="-122"/>
+                <a:cs typeface="Meiryo" pitchFamily="34" charset="-120"/>
+              </a:rPr>
+              <a:t>07 対応ロードマップ / Lộ trình ứng phó</a:t>
+            </a:r>
+            <a:endParaRPr lang="en-US" sz="1800" dirty="0"/>
+          </a:p>
+        </p:txBody>
+      </p:sp>
+      <p:sp>
+        <p:nvSpPr>
+          <p:cNvPr id="8" name="Text 3"/>
+          <p:cNvSpPr/>
+          <p:nvPr/>
+        </p:nvSpPr>
+        <p:spPr>
+          <a:xfrm>
+            <a:off x="493776" y="1307592"/>
+            <a:ext cx="8915400" cy="182880"/>
+          </a:xfrm>
+          <a:prstGeom prst="rect">
+            <a:avLst/>
+          </a:prstGeom>
+          <a:noFill/>
+          <a:ln/>
+        </p:spPr>
+        <p:txBody>
+          <a:bodyPr wrap="square" lIns="0" tIns="0" rIns="0" bIns="0" rtlCol="0" anchor="ctr"/>
+          <a:lstStyle/>
+          <a:p>
+            <a:pPr indent="0" marL="0">
+              <a:buNone/>
+            </a:pPr>
+            <a:r>
+              <a:rPr lang="en-US" sz="1100" dirty="0">
+                <a:solidFill>
+                  <a:srgbClr val="555555"/>
+                </a:solidFill>
+                <a:latin typeface="Meiryo" pitchFamily="34" charset="0"/>
+                <a:ea typeface="Meiryo" pitchFamily="34" charset="-122"/>
+                <a:cs typeface="Meiryo" pitchFamily="34" charset="-120"/>
+              </a:rPr>
+              <a:t>2026年3月〜4月 / Tháng 3〜4 năm 2026</a:t>
+            </a:r>
+            <a:endParaRPr lang="en-US" sz="1100" dirty="0"/>
+          </a:p>
+        </p:txBody>
+      </p:sp>
+      <p:sp>
+        <p:nvSpPr>
+          <p:cNvPr id="9" name="Shape 4"/>
+          <p:cNvSpPr/>
+          <p:nvPr/>
+        </p:nvSpPr>
+        <p:spPr>
+          <a:xfrm>
+            <a:off x="0" y="6483096"/>
+            <a:ext cx="9902952" cy="393192"/>
+          </a:xfrm>
+          <a:prstGeom prst="rect">
+            <a:avLst/>
+          </a:prstGeom>
+          <a:solidFill>
+            <a:srgbClr val="D0232A"/>
+          </a:solidFill>
+          <a:ln/>
+        </p:spPr>
+      </p:sp>
+      <p:sp>
+        <p:nvSpPr>
+          <p:cNvPr id="10" name="Text 5"/>
+          <p:cNvSpPr/>
+          <p:nvPr/>
+        </p:nvSpPr>
+        <p:spPr>
+          <a:xfrm>
+            <a:off x="109728" y="6583680"/>
+            <a:ext cx="457200" cy="219456"/>
+          </a:xfrm>
+          <a:prstGeom prst="rect">
+            <a:avLst/>
+          </a:prstGeom>
+          <a:noFill/>
+          <a:ln/>
+        </p:spPr>
+        <p:txBody>
+          <a:bodyPr wrap="square" lIns="0" tIns="0" rIns="0" bIns="0" rtlCol="0" anchor="ctr"/>
+          <a:lstStyle/>
+          <a:p>
+            <a:pPr indent="0" marL="0">
+              <a:buNone/>
+            </a:pPr>
+            <a:r>
+              <a:rPr lang="en-US" sz="1000" dirty="0">
+                <a:solidFill>
+                  <a:srgbClr val="FFFFFF"/>
+                </a:solidFill>
+              </a:rPr>
+              <a:t>9</a:t>
             </a:r>
             <a:endParaRPr lang="en-US" sz="1000" dirty="0"/>
           </a:p>
